--- a/MonteCarlo/MonteCarloProj/Presentation for West River.pptx
+++ b/MonteCarlo/MonteCarloProj/Presentation for West River.pptx
@@ -2,16 +2,21 @@
 <file path=ppt/presentation.xml><?xml version="1.0" encoding="utf-8"?>
 <p:presentation xmlns:a="http://schemas.openxmlformats.org/drawingml/2006/main" xmlns:r="http://schemas.openxmlformats.org/officeDocument/2006/relationships" xmlns:p="http://schemas.openxmlformats.org/presentationml/2006/main" saveSubsetFonts="1">
   <p:sldMasterIdLst>
-    <p:sldMasterId id="2147483648" r:id="rId1"/>
+    <p:sldMasterId id="2147483660" r:id="rId1"/>
   </p:sldMasterIdLst>
   <p:sldIdLst>
     <p:sldId id="256" r:id="rId2"/>
-    <p:sldId id="258" r:id="rId3"/>
-    <p:sldId id="260" r:id="rId4"/>
-    <p:sldId id="261" r:id="rId5"/>
-    <p:sldId id="262" r:id="rId6"/>
-    <p:sldId id="259" r:id="rId7"/>
-    <p:sldId id="257" r:id="rId8"/>
+    <p:sldId id="263" r:id="rId3"/>
+    <p:sldId id="264" r:id="rId4"/>
+    <p:sldId id="265" r:id="rId5"/>
+    <p:sldId id="266" r:id="rId6"/>
+    <p:sldId id="267" r:id="rId7"/>
+    <p:sldId id="258" r:id="rId8"/>
+    <p:sldId id="260" r:id="rId9"/>
+    <p:sldId id="261" r:id="rId10"/>
+    <p:sldId id="262" r:id="rId11"/>
+    <p:sldId id="259" r:id="rId12"/>
+    <p:sldId id="257" r:id="rId13"/>
   </p:sldIdLst>
   <p:sldSz cx="12192000" cy="6858000"/>
   <p:notesSz cx="6858000" cy="9144000"/>
@@ -19,7 +24,7 @@
     <a:defPPr>
       <a:defRPr lang="en-US"/>
     </a:defPPr>
-    <a:lvl1pPr marL="0" algn="l" defTabSz="914400" rtl="0" eaLnBrk="1" latinLnBrk="0" hangingPunct="1">
+    <a:lvl1pPr marL="0" algn="l" defTabSz="457200" rtl="0" eaLnBrk="1" latinLnBrk="0" hangingPunct="1">
       <a:defRPr sz="1800" kern="1200">
         <a:solidFill>
           <a:schemeClr val="tx1"/>
@@ -29,7 +34,7 @@
         <a:cs typeface="+mn-cs"/>
       </a:defRPr>
     </a:lvl1pPr>
-    <a:lvl2pPr marL="457200" algn="l" defTabSz="914400" rtl="0" eaLnBrk="1" latinLnBrk="0" hangingPunct="1">
+    <a:lvl2pPr marL="457200" algn="l" defTabSz="457200" rtl="0" eaLnBrk="1" latinLnBrk="0" hangingPunct="1">
       <a:defRPr sz="1800" kern="1200">
         <a:solidFill>
           <a:schemeClr val="tx1"/>
@@ -39,7 +44,7 @@
         <a:cs typeface="+mn-cs"/>
       </a:defRPr>
     </a:lvl2pPr>
-    <a:lvl3pPr marL="914400" algn="l" defTabSz="914400" rtl="0" eaLnBrk="1" latinLnBrk="0" hangingPunct="1">
+    <a:lvl3pPr marL="914400" algn="l" defTabSz="457200" rtl="0" eaLnBrk="1" latinLnBrk="0" hangingPunct="1">
       <a:defRPr sz="1800" kern="1200">
         <a:solidFill>
           <a:schemeClr val="tx1"/>
@@ -49,7 +54,7 @@
         <a:cs typeface="+mn-cs"/>
       </a:defRPr>
     </a:lvl3pPr>
-    <a:lvl4pPr marL="1371600" algn="l" defTabSz="914400" rtl="0" eaLnBrk="1" latinLnBrk="0" hangingPunct="1">
+    <a:lvl4pPr marL="1371600" algn="l" defTabSz="457200" rtl="0" eaLnBrk="1" latinLnBrk="0" hangingPunct="1">
       <a:defRPr sz="1800" kern="1200">
         <a:solidFill>
           <a:schemeClr val="tx1"/>
@@ -59,7 +64,7 @@
         <a:cs typeface="+mn-cs"/>
       </a:defRPr>
     </a:lvl4pPr>
-    <a:lvl5pPr marL="1828800" algn="l" defTabSz="914400" rtl="0" eaLnBrk="1" latinLnBrk="0" hangingPunct="1">
+    <a:lvl5pPr marL="1828800" algn="l" defTabSz="457200" rtl="0" eaLnBrk="1" latinLnBrk="0" hangingPunct="1">
       <a:defRPr sz="1800" kern="1200">
         <a:solidFill>
           <a:schemeClr val="tx1"/>
@@ -69,7 +74,7 @@
         <a:cs typeface="+mn-cs"/>
       </a:defRPr>
     </a:lvl5pPr>
-    <a:lvl6pPr marL="2286000" algn="l" defTabSz="914400" rtl="0" eaLnBrk="1" latinLnBrk="0" hangingPunct="1">
+    <a:lvl6pPr marL="2286000" algn="l" defTabSz="457200" rtl="0" eaLnBrk="1" latinLnBrk="0" hangingPunct="1">
       <a:defRPr sz="1800" kern="1200">
         <a:solidFill>
           <a:schemeClr val="tx1"/>
@@ -79,7 +84,7 @@
         <a:cs typeface="+mn-cs"/>
       </a:defRPr>
     </a:lvl6pPr>
-    <a:lvl7pPr marL="2743200" algn="l" defTabSz="914400" rtl="0" eaLnBrk="1" latinLnBrk="0" hangingPunct="1">
+    <a:lvl7pPr marL="2743200" algn="l" defTabSz="457200" rtl="0" eaLnBrk="1" latinLnBrk="0" hangingPunct="1">
       <a:defRPr sz="1800" kern="1200">
         <a:solidFill>
           <a:schemeClr val="tx1"/>
@@ -89,7 +94,7 @@
         <a:cs typeface="+mn-cs"/>
       </a:defRPr>
     </a:lvl7pPr>
-    <a:lvl8pPr marL="3200400" algn="l" defTabSz="914400" rtl="0" eaLnBrk="1" latinLnBrk="0" hangingPunct="1">
+    <a:lvl8pPr marL="3200400" algn="l" defTabSz="457200" rtl="0" eaLnBrk="1" latinLnBrk="0" hangingPunct="1">
       <a:defRPr sz="1800" kern="1200">
         <a:solidFill>
           <a:schemeClr val="tx1"/>
@@ -99,7 +104,7 @@
         <a:cs typeface="+mn-cs"/>
       </a:defRPr>
     </a:lvl8pPr>
-    <a:lvl9pPr marL="3657600" algn="l" defTabSz="914400" rtl="0" eaLnBrk="1" latinLnBrk="0" hangingPunct="1">
+    <a:lvl9pPr marL="3657600" algn="l" defTabSz="457200" rtl="0" eaLnBrk="1" latinLnBrk="0" hangingPunct="1">
       <a:defRPr sz="1800" kern="1200">
         <a:solidFill>
           <a:schemeClr val="tx1"/>
@@ -110,6 +115,11 @@
       </a:defRPr>
     </a:lvl9pPr>
   </p:defaultTextStyle>
+  <p:extLst>
+    <p:ext uri="{EFAFB233-063F-42B5-8137-9DF3F51BA10A}">
+      <p15:sldGuideLst xmlns:p15="http://schemas.microsoft.com/office/powerpoint/2012/main"/>
+    </p:ext>
+  </p:extLst>
 </p:presentation>
 </file>
 
@@ -132,13 +142,7 @@
       </p:grpSpPr>
       <p:sp>
         <p:nvSpPr>
-          <p:cNvPr id="2" name="Title 1">
-            <a:extLst>
-              <a:ext uri="{FF2B5EF4-FFF2-40B4-BE49-F238E27FC236}">
-                <a16:creationId xmlns:a16="http://schemas.microsoft.com/office/drawing/2014/main" id="{4DA8F7E9-3854-6D63-DE87-02AA062309C5}"/>
-              </a:ext>
-            </a:extLst>
-          </p:cNvPr>
+          <p:cNvPr id="2" name="Title 1"/>
           <p:cNvSpPr>
             <a:spLocks noGrp="1"/>
           </p:cNvSpPr>
@@ -148,15 +152,15 @@
         </p:nvSpPr>
         <p:spPr>
           <a:xfrm>
-            <a:off x="1524000" y="1122363"/>
-            <a:ext cx="9144000" cy="2387600"/>
+            <a:off x="1154955" y="1447800"/>
+            <a:ext cx="8825658" cy="3329581"/>
           </a:xfrm>
         </p:spPr>
         <p:txBody>
           <a:bodyPr anchor="b"/>
           <a:lstStyle>
-            <a:lvl1pPr algn="ctr">
-              <a:defRPr sz="6000"/>
+            <a:lvl1pPr>
+              <a:defRPr sz="7200"/>
             </a:lvl1pPr>
           </a:lstStyle>
           <a:p>
@@ -164,18 +168,13 @@
               <a:rPr lang="en-US"/>
               <a:t>Click to edit Master title style</a:t>
             </a:r>
-          </a:p>
-        </p:txBody>
-      </p:sp>
-      <p:sp>
-        <p:nvSpPr>
-          <p:cNvPr id="3" name="Subtitle 2">
-            <a:extLst>
-              <a:ext uri="{FF2B5EF4-FFF2-40B4-BE49-F238E27FC236}">
-                <a16:creationId xmlns:a16="http://schemas.microsoft.com/office/drawing/2014/main" id="{31420B35-FDC6-B08B-B40C-71600AA6EE97}"/>
-              </a:ext>
-            </a:extLst>
-          </p:cNvPr>
+            <a:endParaRPr lang="en-US" dirty="0"/>
+          </a:p>
+        </p:txBody>
+      </p:sp>
+      <p:sp>
+        <p:nvSpPr>
+          <p:cNvPr id="3" name="Subtitle 2"/>
           <p:cNvSpPr>
             <a:spLocks noGrp="1"/>
           </p:cNvSpPr>
@@ -185,48 +184,103 @@
         </p:nvSpPr>
         <p:spPr>
           <a:xfrm>
-            <a:off x="1524000" y="3602038"/>
-            <a:ext cx="9144000" cy="1655762"/>
-          </a:xfrm>
-        </p:spPr>
-        <p:txBody>
-          <a:bodyPr/>
+            <a:off x="1154955" y="4777380"/>
+            <a:ext cx="8825658" cy="861420"/>
+          </a:xfrm>
+        </p:spPr>
+        <p:txBody>
+          <a:bodyPr anchor="t"/>
           <a:lstStyle>
-            <a:lvl1pPr marL="0" indent="0" algn="ctr">
-              <a:buNone/>
-              <a:defRPr sz="2400"/>
+            <a:lvl1pPr marL="0" indent="0" algn="l">
+              <a:buNone/>
+              <a:defRPr cap="all">
+                <a:solidFill>
+                  <a:schemeClr val="bg2">
+                    <a:lumMod val="40000"/>
+                    <a:lumOff val="60000"/>
+                  </a:schemeClr>
+                </a:solidFill>
+              </a:defRPr>
             </a:lvl1pPr>
             <a:lvl2pPr marL="457200" indent="0" algn="ctr">
               <a:buNone/>
-              <a:defRPr sz="2000"/>
+              <a:defRPr>
+                <a:solidFill>
+                  <a:schemeClr val="tx1">
+                    <a:tint val="75000"/>
+                  </a:schemeClr>
+                </a:solidFill>
+              </a:defRPr>
             </a:lvl2pPr>
             <a:lvl3pPr marL="914400" indent="0" algn="ctr">
               <a:buNone/>
-              <a:defRPr sz="1800"/>
+              <a:defRPr>
+                <a:solidFill>
+                  <a:schemeClr val="tx1">
+                    <a:tint val="75000"/>
+                  </a:schemeClr>
+                </a:solidFill>
+              </a:defRPr>
             </a:lvl3pPr>
             <a:lvl4pPr marL="1371600" indent="0" algn="ctr">
               <a:buNone/>
-              <a:defRPr sz="1600"/>
+              <a:defRPr>
+                <a:solidFill>
+                  <a:schemeClr val="tx1">
+                    <a:tint val="75000"/>
+                  </a:schemeClr>
+                </a:solidFill>
+              </a:defRPr>
             </a:lvl4pPr>
             <a:lvl5pPr marL="1828800" indent="0" algn="ctr">
               <a:buNone/>
-              <a:defRPr sz="1600"/>
+              <a:defRPr>
+                <a:solidFill>
+                  <a:schemeClr val="tx1">
+                    <a:tint val="75000"/>
+                  </a:schemeClr>
+                </a:solidFill>
+              </a:defRPr>
             </a:lvl5pPr>
             <a:lvl6pPr marL="2286000" indent="0" algn="ctr">
               <a:buNone/>
-              <a:defRPr sz="1600"/>
+              <a:defRPr>
+                <a:solidFill>
+                  <a:schemeClr val="tx1">
+                    <a:tint val="75000"/>
+                  </a:schemeClr>
+                </a:solidFill>
+              </a:defRPr>
             </a:lvl6pPr>
             <a:lvl7pPr marL="2743200" indent="0" algn="ctr">
               <a:buNone/>
-              <a:defRPr sz="1600"/>
+              <a:defRPr>
+                <a:solidFill>
+                  <a:schemeClr val="tx1">
+                    <a:tint val="75000"/>
+                  </a:schemeClr>
+                </a:solidFill>
+              </a:defRPr>
             </a:lvl7pPr>
             <a:lvl8pPr marL="3200400" indent="0" algn="ctr">
               <a:buNone/>
-              <a:defRPr sz="1600"/>
+              <a:defRPr>
+                <a:solidFill>
+                  <a:schemeClr val="tx1">
+                    <a:tint val="75000"/>
+                  </a:schemeClr>
+                </a:solidFill>
+              </a:defRPr>
             </a:lvl8pPr>
             <a:lvl9pPr marL="3657600" indent="0" algn="ctr">
               <a:buNone/>
-              <a:defRPr sz="1600"/>
+              <a:defRPr>
+                <a:solidFill>
+                  <a:schemeClr val="tx1">
+                    <a:tint val="75000"/>
+                  </a:schemeClr>
+                </a:solidFill>
+              </a:defRPr>
             </a:lvl9pPr>
           </a:lstStyle>
           <a:p>
@@ -234,18 +288,13 @@
               <a:rPr lang="en-US"/>
               <a:t>Click to edit Master subtitle style</a:t>
             </a:r>
-          </a:p>
-        </p:txBody>
-      </p:sp>
-      <p:sp>
-        <p:nvSpPr>
-          <p:cNvPr id="4" name="Date Placeholder 3">
-            <a:extLst>
-              <a:ext uri="{FF2B5EF4-FFF2-40B4-BE49-F238E27FC236}">
-                <a16:creationId xmlns:a16="http://schemas.microsoft.com/office/drawing/2014/main" id="{307FEE39-FC9F-275F-76D7-C625082FC3A2}"/>
-              </a:ext>
-            </a:extLst>
-          </p:cNvPr>
+            <a:endParaRPr lang="en-US" dirty="0"/>
+          </a:p>
+        </p:txBody>
+      </p:sp>
+      <p:sp>
+        <p:nvSpPr>
+          <p:cNvPr id="4" name="Date Placeholder 3"/>
           <p:cNvSpPr>
             <a:spLocks noGrp="1"/>
           </p:cNvSpPr>
@@ -268,13 +317,7 @@
       </p:sp>
       <p:sp>
         <p:nvSpPr>
-          <p:cNvPr id="5" name="Footer Placeholder 4">
-            <a:extLst>
-              <a:ext uri="{FF2B5EF4-FFF2-40B4-BE49-F238E27FC236}">
-                <a16:creationId xmlns:a16="http://schemas.microsoft.com/office/drawing/2014/main" id="{2B8CB7E9-0B23-1BCF-4269-4DDA5A4E988E}"/>
-              </a:ext>
-            </a:extLst>
-          </p:cNvPr>
+          <p:cNvPr id="5" name="Footer Placeholder 4"/>
           <p:cNvSpPr>
             <a:spLocks noGrp="1"/>
           </p:cNvSpPr>
@@ -293,13 +336,7 @@
       </p:sp>
       <p:sp>
         <p:nvSpPr>
-          <p:cNvPr id="6" name="Slide Number Placeholder 5">
-            <a:extLst>
-              <a:ext uri="{FF2B5EF4-FFF2-40B4-BE49-F238E27FC236}">
-                <a16:creationId xmlns:a16="http://schemas.microsoft.com/office/drawing/2014/main" id="{810BC0A7-8D04-1238-E694-95262BA16DB8}"/>
-              </a:ext>
-            </a:extLst>
-          </p:cNvPr>
+          <p:cNvPr id="6" name="Slide Number Placeholder 5"/>
           <p:cNvSpPr>
             <a:spLocks noGrp="1"/>
           </p:cNvSpPr>
@@ -323,7 +360,7 @@
     </p:spTree>
     <p:extLst>
       <p:ext uri="{BB962C8B-B14F-4D97-AF65-F5344CB8AC3E}">
-        <p14:creationId xmlns:p14="http://schemas.microsoft.com/office/powerpoint/2010/main" val="1472041960"/>
+        <p14:creationId xmlns:p14="http://schemas.microsoft.com/office/powerpoint/2010/main" val="844101610"/>
       </p:ext>
     </p:extLst>
   </p:cSld>
@@ -334,6 +371,2572 @@
 </file>
 
 <file path=ppt/slideLayouts/slideLayout10.xml><?xml version="1.0" encoding="utf-8"?>
+<p:sldLayout xmlns:a="http://schemas.openxmlformats.org/drawingml/2006/main" xmlns:r="http://schemas.openxmlformats.org/officeDocument/2006/relationships" xmlns:p="http://schemas.openxmlformats.org/presentationml/2006/main" preserve="1">
+  <p:cSld name="Panoramic Picture with Caption">
+    <p:spTree>
+      <p:nvGrpSpPr>
+        <p:cNvPr id="1" name=""/>
+        <p:cNvGrpSpPr/>
+        <p:nvPr/>
+      </p:nvGrpSpPr>
+      <p:grpSpPr>
+        <a:xfrm>
+          <a:off x="0" y="0"/>
+          <a:ext cx="0" cy="0"/>
+          <a:chOff x="0" y="0"/>
+          <a:chExt cx="0" cy="0"/>
+        </a:xfrm>
+      </p:grpSpPr>
+      <p:sp>
+        <p:nvSpPr>
+          <p:cNvPr id="2" name="Title 1"/>
+          <p:cNvSpPr>
+            <a:spLocks noGrp="1"/>
+          </p:cNvSpPr>
+          <p:nvPr>
+            <p:ph type="title"/>
+          </p:nvPr>
+        </p:nvSpPr>
+        <p:spPr>
+          <a:xfrm>
+            <a:off x="1154956" y="4800587"/>
+            <a:ext cx="8825657" cy="566738"/>
+          </a:xfrm>
+        </p:spPr>
+        <p:txBody>
+          <a:bodyPr anchor="b">
+            <a:normAutofit/>
+          </a:bodyPr>
+          <a:lstStyle>
+            <a:lvl1pPr algn="l">
+              <a:defRPr sz="2400" b="0"/>
+            </a:lvl1pPr>
+          </a:lstStyle>
+          <a:p>
+            <a:r>
+              <a:rPr lang="en-US"/>
+              <a:t>Click to edit Master title style</a:t>
+            </a:r>
+            <a:endParaRPr lang="en-US" dirty="0"/>
+          </a:p>
+        </p:txBody>
+      </p:sp>
+      <p:sp>
+        <p:nvSpPr>
+          <p:cNvPr id="3" name="Picture Placeholder 2"/>
+          <p:cNvSpPr>
+            <a:spLocks noGrp="1" noChangeAspect="1"/>
+          </p:cNvSpPr>
+          <p:nvPr>
+            <p:ph type="pic" idx="1"/>
+          </p:nvPr>
+        </p:nvSpPr>
+        <p:spPr>
+          <a:xfrm>
+            <a:off x="1154955" y="685800"/>
+            <a:ext cx="8825658" cy="3640666"/>
+          </a:xfrm>
+          <a:prstGeom prst="roundRect">
+            <a:avLst>
+              <a:gd name="adj" fmla="val 1858"/>
+            </a:avLst>
+          </a:prstGeom>
+          <a:effectLst>
+            <a:outerShdw blurRad="50800" dist="50800" dir="5400000" algn="tl" rotWithShape="0">
+              <a:srgbClr val="000000">
+                <a:alpha val="43000"/>
+              </a:srgbClr>
+            </a:outerShdw>
+          </a:effectLst>
+        </p:spPr>
+        <p:txBody>
+          <a:bodyPr anchor="t">
+            <a:normAutofit/>
+          </a:bodyPr>
+          <a:lstStyle>
+            <a:lvl1pPr marL="0" indent="0" algn="ctr">
+              <a:buNone/>
+              <a:defRPr sz="1600"/>
+            </a:lvl1pPr>
+            <a:lvl2pPr marL="457200" indent="0">
+              <a:buNone/>
+              <a:defRPr sz="1600"/>
+            </a:lvl2pPr>
+            <a:lvl3pPr marL="914400" indent="0">
+              <a:buNone/>
+              <a:defRPr sz="1600"/>
+            </a:lvl3pPr>
+            <a:lvl4pPr marL="1371600" indent="0">
+              <a:buNone/>
+              <a:defRPr sz="1600"/>
+            </a:lvl4pPr>
+            <a:lvl5pPr marL="1828800" indent="0">
+              <a:buNone/>
+              <a:defRPr sz="1600"/>
+            </a:lvl5pPr>
+            <a:lvl6pPr marL="2286000" indent="0">
+              <a:buNone/>
+              <a:defRPr sz="1600"/>
+            </a:lvl6pPr>
+            <a:lvl7pPr marL="2743200" indent="0">
+              <a:buNone/>
+              <a:defRPr sz="1600"/>
+            </a:lvl7pPr>
+            <a:lvl8pPr marL="3200400" indent="0">
+              <a:buNone/>
+              <a:defRPr sz="1600"/>
+            </a:lvl8pPr>
+            <a:lvl9pPr marL="3657600" indent="0">
+              <a:buNone/>
+              <a:defRPr sz="1600"/>
+            </a:lvl9pPr>
+          </a:lstStyle>
+          <a:p>
+            <a:r>
+              <a:rPr lang="en-US"/>
+              <a:t>Click icon to add picture</a:t>
+            </a:r>
+            <a:endParaRPr lang="en-US" dirty="0"/>
+          </a:p>
+        </p:txBody>
+      </p:sp>
+      <p:sp>
+        <p:nvSpPr>
+          <p:cNvPr id="4" name="Text Placeholder 3"/>
+          <p:cNvSpPr>
+            <a:spLocks noGrp="1"/>
+          </p:cNvSpPr>
+          <p:nvPr>
+            <p:ph type="body" sz="half" idx="2"/>
+          </p:nvPr>
+        </p:nvSpPr>
+        <p:spPr>
+          <a:xfrm>
+            <a:off x="1154956" y="5367325"/>
+            <a:ext cx="8825656" cy="493712"/>
+          </a:xfrm>
+        </p:spPr>
+        <p:txBody>
+          <a:bodyPr>
+            <a:normAutofit/>
+          </a:bodyPr>
+          <a:lstStyle>
+            <a:lvl1pPr marL="0" indent="0">
+              <a:buNone/>
+              <a:defRPr sz="1200"/>
+            </a:lvl1pPr>
+            <a:lvl2pPr marL="457200" indent="0">
+              <a:buNone/>
+              <a:defRPr sz="1200"/>
+            </a:lvl2pPr>
+            <a:lvl3pPr marL="914400" indent="0">
+              <a:buNone/>
+              <a:defRPr sz="1000"/>
+            </a:lvl3pPr>
+            <a:lvl4pPr marL="1371600" indent="0">
+              <a:buNone/>
+              <a:defRPr sz="900"/>
+            </a:lvl4pPr>
+            <a:lvl5pPr marL="1828800" indent="0">
+              <a:buNone/>
+              <a:defRPr sz="900"/>
+            </a:lvl5pPr>
+            <a:lvl6pPr marL="2286000" indent="0">
+              <a:buNone/>
+              <a:defRPr sz="900"/>
+            </a:lvl6pPr>
+            <a:lvl7pPr marL="2743200" indent="0">
+              <a:buNone/>
+              <a:defRPr sz="900"/>
+            </a:lvl7pPr>
+            <a:lvl8pPr marL="3200400" indent="0">
+              <a:buNone/>
+              <a:defRPr sz="900"/>
+            </a:lvl8pPr>
+            <a:lvl9pPr marL="3657600" indent="0">
+              <a:buNone/>
+              <a:defRPr sz="900"/>
+            </a:lvl9pPr>
+          </a:lstStyle>
+          <a:p>
+            <a:pPr lvl="0"/>
+            <a:r>
+              <a:rPr lang="en-US"/>
+              <a:t>Click to edit Master text styles</a:t>
+            </a:r>
+          </a:p>
+        </p:txBody>
+      </p:sp>
+      <p:sp>
+        <p:nvSpPr>
+          <p:cNvPr id="5" name="Date Placeholder 4"/>
+          <p:cNvSpPr>
+            <a:spLocks noGrp="1"/>
+          </p:cNvSpPr>
+          <p:nvPr>
+            <p:ph type="dt" sz="half" idx="10"/>
+          </p:nvPr>
+        </p:nvSpPr>
+        <p:spPr/>
+        <p:txBody>
+          <a:bodyPr/>
+          <a:lstStyle/>
+          <a:p>
+            <a:fld id="{658E1C9A-47F7-4494-B9B8-0D060B88ACB1}" type="datetimeFigureOut">
+              <a:rPr lang="en-US" smtClean="0"/>
+              <a:t>8/17/2026</a:t>
+            </a:fld>
+            <a:endParaRPr lang="en-US"/>
+          </a:p>
+        </p:txBody>
+      </p:sp>
+      <p:sp>
+        <p:nvSpPr>
+          <p:cNvPr id="6" name="Footer Placeholder 5"/>
+          <p:cNvSpPr>
+            <a:spLocks noGrp="1"/>
+          </p:cNvSpPr>
+          <p:nvPr>
+            <p:ph type="ftr" sz="quarter" idx="11"/>
+          </p:nvPr>
+        </p:nvSpPr>
+        <p:spPr/>
+        <p:txBody>
+          <a:bodyPr/>
+          <a:lstStyle/>
+          <a:p>
+            <a:endParaRPr lang="en-US"/>
+          </a:p>
+        </p:txBody>
+      </p:sp>
+      <p:sp>
+        <p:nvSpPr>
+          <p:cNvPr id="7" name="Slide Number Placeholder 6"/>
+          <p:cNvSpPr>
+            <a:spLocks noGrp="1"/>
+          </p:cNvSpPr>
+          <p:nvPr>
+            <p:ph type="sldNum" sz="quarter" idx="12"/>
+          </p:nvPr>
+        </p:nvSpPr>
+        <p:spPr/>
+        <p:txBody>
+          <a:bodyPr/>
+          <a:lstStyle/>
+          <a:p>
+            <a:fld id="{A2521D86-E9AE-4904-807B-12096BA8753D}" type="slidenum">
+              <a:rPr lang="en-US" smtClean="0"/>
+              <a:t>‹#›</a:t>
+            </a:fld>
+            <a:endParaRPr lang="en-US"/>
+          </a:p>
+        </p:txBody>
+      </p:sp>
+    </p:spTree>
+    <p:extLst>
+      <p:ext uri="{BB962C8B-B14F-4D97-AF65-F5344CB8AC3E}">
+        <p14:creationId xmlns:p14="http://schemas.microsoft.com/office/powerpoint/2010/main" val="3641872744"/>
+      </p:ext>
+    </p:extLst>
+  </p:cSld>
+  <p:clrMapOvr>
+    <a:masterClrMapping/>
+  </p:clrMapOvr>
+</p:sldLayout>
+</file>
+
+<file path=ppt/slideLayouts/slideLayout11.xml><?xml version="1.0" encoding="utf-8"?>
+<p:sldLayout xmlns:a="http://schemas.openxmlformats.org/drawingml/2006/main" xmlns:r="http://schemas.openxmlformats.org/officeDocument/2006/relationships" xmlns:p="http://schemas.openxmlformats.org/presentationml/2006/main" preserve="1">
+  <p:cSld name="Title and Caption">
+    <p:spTree>
+      <p:nvGrpSpPr>
+        <p:cNvPr id="1" name=""/>
+        <p:cNvGrpSpPr/>
+        <p:nvPr/>
+      </p:nvGrpSpPr>
+      <p:grpSpPr>
+        <a:xfrm>
+          <a:off x="0" y="0"/>
+          <a:ext cx="0" cy="0"/>
+          <a:chOff x="0" y="0"/>
+          <a:chExt cx="0" cy="0"/>
+        </a:xfrm>
+      </p:grpSpPr>
+      <p:sp>
+        <p:nvSpPr>
+          <p:cNvPr id="2" name="Title 1"/>
+          <p:cNvSpPr>
+            <a:spLocks noGrp="1"/>
+          </p:cNvSpPr>
+          <p:nvPr>
+            <p:ph type="title"/>
+          </p:nvPr>
+        </p:nvSpPr>
+        <p:spPr>
+          <a:xfrm>
+            <a:off x="1154954" y="1447800"/>
+            <a:ext cx="8825659" cy="1981200"/>
+          </a:xfrm>
+        </p:spPr>
+        <p:txBody>
+          <a:bodyPr/>
+          <a:lstStyle>
+            <a:lvl1pPr>
+              <a:defRPr sz="4800"/>
+            </a:lvl1pPr>
+          </a:lstStyle>
+          <a:p>
+            <a:r>
+              <a:rPr lang="en-US"/>
+              <a:t>Click to edit Master title style</a:t>
+            </a:r>
+            <a:endParaRPr lang="en-US" dirty="0"/>
+          </a:p>
+        </p:txBody>
+      </p:sp>
+      <p:sp>
+        <p:nvSpPr>
+          <p:cNvPr id="8" name="Text Placeholder 3"/>
+          <p:cNvSpPr>
+            <a:spLocks noGrp="1"/>
+          </p:cNvSpPr>
+          <p:nvPr>
+            <p:ph type="body" sz="half" idx="2"/>
+          </p:nvPr>
+        </p:nvSpPr>
+        <p:spPr>
+          <a:xfrm>
+            <a:off x="1154954" y="3657600"/>
+            <a:ext cx="8825659" cy="2362200"/>
+          </a:xfrm>
+        </p:spPr>
+        <p:txBody>
+          <a:bodyPr anchor="ctr">
+            <a:normAutofit/>
+          </a:bodyPr>
+          <a:lstStyle>
+            <a:lvl1pPr marL="0" indent="0">
+              <a:buNone/>
+              <a:defRPr sz="1800"/>
+            </a:lvl1pPr>
+            <a:lvl2pPr marL="457200" indent="0">
+              <a:buNone/>
+              <a:defRPr sz="1200"/>
+            </a:lvl2pPr>
+            <a:lvl3pPr marL="914400" indent="0">
+              <a:buNone/>
+              <a:defRPr sz="1000"/>
+            </a:lvl3pPr>
+            <a:lvl4pPr marL="1371600" indent="0">
+              <a:buNone/>
+              <a:defRPr sz="900"/>
+            </a:lvl4pPr>
+            <a:lvl5pPr marL="1828800" indent="0">
+              <a:buNone/>
+              <a:defRPr sz="900"/>
+            </a:lvl5pPr>
+            <a:lvl6pPr marL="2286000" indent="0">
+              <a:buNone/>
+              <a:defRPr sz="900"/>
+            </a:lvl6pPr>
+            <a:lvl7pPr marL="2743200" indent="0">
+              <a:buNone/>
+              <a:defRPr sz="900"/>
+            </a:lvl7pPr>
+            <a:lvl8pPr marL="3200400" indent="0">
+              <a:buNone/>
+              <a:defRPr sz="900"/>
+            </a:lvl8pPr>
+            <a:lvl9pPr marL="3657600" indent="0">
+              <a:buNone/>
+              <a:defRPr sz="900"/>
+            </a:lvl9pPr>
+          </a:lstStyle>
+          <a:p>
+            <a:pPr lvl="0"/>
+            <a:r>
+              <a:rPr lang="en-US"/>
+              <a:t>Click to edit Master text styles</a:t>
+            </a:r>
+          </a:p>
+        </p:txBody>
+      </p:sp>
+      <p:sp>
+        <p:nvSpPr>
+          <p:cNvPr id="4" name="Date Placeholder 3"/>
+          <p:cNvSpPr>
+            <a:spLocks noGrp="1"/>
+          </p:cNvSpPr>
+          <p:nvPr>
+            <p:ph type="dt" sz="half" idx="10"/>
+          </p:nvPr>
+        </p:nvSpPr>
+        <p:spPr/>
+        <p:txBody>
+          <a:bodyPr/>
+          <a:lstStyle/>
+          <a:p>
+            <a:fld id="{658E1C9A-47F7-4494-B9B8-0D060B88ACB1}" type="datetimeFigureOut">
+              <a:rPr lang="en-US" smtClean="0"/>
+              <a:t>8/17/2026</a:t>
+            </a:fld>
+            <a:endParaRPr lang="en-US"/>
+          </a:p>
+        </p:txBody>
+      </p:sp>
+      <p:sp>
+        <p:nvSpPr>
+          <p:cNvPr id="5" name="Footer Placeholder 4"/>
+          <p:cNvSpPr>
+            <a:spLocks noGrp="1"/>
+          </p:cNvSpPr>
+          <p:nvPr>
+            <p:ph type="ftr" sz="quarter" idx="11"/>
+          </p:nvPr>
+        </p:nvSpPr>
+        <p:spPr/>
+        <p:txBody>
+          <a:bodyPr/>
+          <a:lstStyle/>
+          <a:p>
+            <a:endParaRPr lang="en-US"/>
+          </a:p>
+        </p:txBody>
+      </p:sp>
+      <p:sp>
+        <p:nvSpPr>
+          <p:cNvPr id="6" name="Slide Number Placeholder 5"/>
+          <p:cNvSpPr>
+            <a:spLocks noGrp="1"/>
+          </p:cNvSpPr>
+          <p:nvPr>
+            <p:ph type="sldNum" sz="quarter" idx="12"/>
+          </p:nvPr>
+        </p:nvSpPr>
+        <p:spPr/>
+        <p:txBody>
+          <a:bodyPr/>
+          <a:lstStyle/>
+          <a:p>
+            <a:fld id="{A2521D86-E9AE-4904-807B-12096BA8753D}" type="slidenum">
+              <a:rPr lang="en-US" smtClean="0"/>
+              <a:t>‹#›</a:t>
+            </a:fld>
+            <a:endParaRPr lang="en-US"/>
+          </a:p>
+        </p:txBody>
+      </p:sp>
+    </p:spTree>
+    <p:extLst>
+      <p:ext uri="{BB962C8B-B14F-4D97-AF65-F5344CB8AC3E}">
+        <p14:creationId xmlns:p14="http://schemas.microsoft.com/office/powerpoint/2010/main" val="3973291833"/>
+      </p:ext>
+    </p:extLst>
+  </p:cSld>
+  <p:clrMapOvr>
+    <a:masterClrMapping/>
+  </p:clrMapOvr>
+</p:sldLayout>
+</file>
+
+<file path=ppt/slideLayouts/slideLayout12.xml><?xml version="1.0" encoding="utf-8"?>
+<p:sldLayout xmlns:a="http://schemas.openxmlformats.org/drawingml/2006/main" xmlns:r="http://schemas.openxmlformats.org/officeDocument/2006/relationships" xmlns:p="http://schemas.openxmlformats.org/presentationml/2006/main" preserve="1">
+  <p:cSld name="Quote with Caption">
+    <p:spTree>
+      <p:nvGrpSpPr>
+        <p:cNvPr id="1" name=""/>
+        <p:cNvGrpSpPr/>
+        <p:nvPr/>
+      </p:nvGrpSpPr>
+      <p:grpSpPr>
+        <a:xfrm>
+          <a:off x="0" y="0"/>
+          <a:ext cx="0" cy="0"/>
+          <a:chOff x="0" y="0"/>
+          <a:chExt cx="0" cy="0"/>
+        </a:xfrm>
+      </p:grpSpPr>
+      <p:sp>
+        <p:nvSpPr>
+          <p:cNvPr id="2" name="Title 1"/>
+          <p:cNvSpPr>
+            <a:spLocks noGrp="1"/>
+          </p:cNvSpPr>
+          <p:nvPr>
+            <p:ph type="title"/>
+          </p:nvPr>
+        </p:nvSpPr>
+        <p:spPr>
+          <a:xfrm>
+            <a:off x="1574801" y="1447800"/>
+            <a:ext cx="7999315" cy="2323374"/>
+          </a:xfrm>
+        </p:spPr>
+        <p:txBody>
+          <a:bodyPr/>
+          <a:lstStyle>
+            <a:lvl1pPr>
+              <a:defRPr sz="4800"/>
+            </a:lvl1pPr>
+          </a:lstStyle>
+          <a:p>
+            <a:r>
+              <a:rPr lang="en-US"/>
+              <a:t>Click to edit Master title style</a:t>
+            </a:r>
+            <a:endParaRPr lang="en-US" dirty="0"/>
+          </a:p>
+        </p:txBody>
+      </p:sp>
+      <p:sp>
+        <p:nvSpPr>
+          <p:cNvPr id="11" name="Text Placeholder 3"/>
+          <p:cNvSpPr>
+            <a:spLocks noGrp="1"/>
+          </p:cNvSpPr>
+          <p:nvPr>
+            <p:ph type="body" sz="half" idx="14"/>
+          </p:nvPr>
+        </p:nvSpPr>
+        <p:spPr>
+          <a:xfrm>
+            <a:off x="1930400" y="3771174"/>
+            <a:ext cx="7279649" cy="342174"/>
+          </a:xfrm>
+        </p:spPr>
+        <p:txBody>
+          <a:bodyPr vert="horz" lIns="91440" tIns="45720" rIns="91440" bIns="45720" rtlCol="0" anchor="t">
+            <a:normAutofit/>
+          </a:bodyPr>
+          <a:lstStyle>
+            <a:lvl1pPr marL="0" indent="0">
+              <a:buNone/>
+              <a:defRPr lang="en-US" sz="1400" b="0" i="0" kern="1200" cap="small" dirty="0">
+                <a:solidFill>
+                  <a:schemeClr val="bg2">
+                    <a:lumMod val="40000"/>
+                    <a:lumOff val="60000"/>
+                  </a:schemeClr>
+                </a:solidFill>
+                <a:latin typeface="+mj-lt"/>
+                <a:ea typeface="+mj-ea"/>
+                <a:cs typeface="+mj-cs"/>
+              </a:defRPr>
+            </a:lvl1pPr>
+            <a:lvl2pPr marL="457200" indent="0">
+              <a:buNone/>
+              <a:defRPr sz="1200"/>
+            </a:lvl2pPr>
+            <a:lvl3pPr marL="914400" indent="0">
+              <a:buNone/>
+              <a:defRPr sz="1000"/>
+            </a:lvl3pPr>
+            <a:lvl4pPr marL="1371600" indent="0">
+              <a:buNone/>
+              <a:defRPr sz="900"/>
+            </a:lvl4pPr>
+            <a:lvl5pPr marL="1828800" indent="0">
+              <a:buNone/>
+              <a:defRPr sz="900"/>
+            </a:lvl5pPr>
+            <a:lvl6pPr marL="2286000" indent="0">
+              <a:buNone/>
+              <a:defRPr sz="900"/>
+            </a:lvl6pPr>
+            <a:lvl7pPr marL="2743200" indent="0">
+              <a:buNone/>
+              <a:defRPr sz="900"/>
+            </a:lvl7pPr>
+            <a:lvl8pPr marL="3200400" indent="0">
+              <a:buNone/>
+              <a:defRPr sz="900"/>
+            </a:lvl8pPr>
+            <a:lvl9pPr marL="3657600" indent="0">
+              <a:buNone/>
+              <a:defRPr sz="900"/>
+            </a:lvl9pPr>
+          </a:lstStyle>
+          <a:p>
+            <a:pPr marL="0" lvl="0" indent="0">
+              <a:buNone/>
+            </a:pPr>
+            <a:r>
+              <a:rPr lang="en-US"/>
+              <a:t>Click to edit Master text styles</a:t>
+            </a:r>
+          </a:p>
+        </p:txBody>
+      </p:sp>
+      <p:sp>
+        <p:nvSpPr>
+          <p:cNvPr id="10" name="Text Placeholder 3"/>
+          <p:cNvSpPr>
+            <a:spLocks noGrp="1"/>
+          </p:cNvSpPr>
+          <p:nvPr>
+            <p:ph type="body" sz="half" idx="2"/>
+          </p:nvPr>
+        </p:nvSpPr>
+        <p:spPr>
+          <a:xfrm>
+            <a:off x="1154954" y="4350657"/>
+            <a:ext cx="8825659" cy="1676400"/>
+          </a:xfrm>
+        </p:spPr>
+        <p:txBody>
+          <a:bodyPr anchor="ctr">
+            <a:normAutofit/>
+          </a:bodyPr>
+          <a:lstStyle>
+            <a:lvl1pPr marL="0" indent="0">
+              <a:buNone/>
+              <a:defRPr sz="1800"/>
+            </a:lvl1pPr>
+            <a:lvl2pPr marL="457200" indent="0">
+              <a:buNone/>
+              <a:defRPr sz="1200"/>
+            </a:lvl2pPr>
+            <a:lvl3pPr marL="914400" indent="0">
+              <a:buNone/>
+              <a:defRPr sz="1000"/>
+            </a:lvl3pPr>
+            <a:lvl4pPr marL="1371600" indent="0">
+              <a:buNone/>
+              <a:defRPr sz="900"/>
+            </a:lvl4pPr>
+            <a:lvl5pPr marL="1828800" indent="0">
+              <a:buNone/>
+              <a:defRPr sz="900"/>
+            </a:lvl5pPr>
+            <a:lvl6pPr marL="2286000" indent="0">
+              <a:buNone/>
+              <a:defRPr sz="900"/>
+            </a:lvl6pPr>
+            <a:lvl7pPr marL="2743200" indent="0">
+              <a:buNone/>
+              <a:defRPr sz="900"/>
+            </a:lvl7pPr>
+            <a:lvl8pPr marL="3200400" indent="0">
+              <a:buNone/>
+              <a:defRPr sz="900"/>
+            </a:lvl8pPr>
+            <a:lvl9pPr marL="3657600" indent="0">
+              <a:buNone/>
+              <a:defRPr sz="900"/>
+            </a:lvl9pPr>
+          </a:lstStyle>
+          <a:p>
+            <a:pPr lvl="0"/>
+            <a:r>
+              <a:rPr lang="en-US"/>
+              <a:t>Click to edit Master text styles</a:t>
+            </a:r>
+          </a:p>
+        </p:txBody>
+      </p:sp>
+      <p:sp>
+        <p:nvSpPr>
+          <p:cNvPr id="4" name="Date Placeholder 3"/>
+          <p:cNvSpPr>
+            <a:spLocks noGrp="1"/>
+          </p:cNvSpPr>
+          <p:nvPr>
+            <p:ph type="dt" sz="half" idx="10"/>
+          </p:nvPr>
+        </p:nvSpPr>
+        <p:spPr/>
+        <p:txBody>
+          <a:bodyPr/>
+          <a:lstStyle/>
+          <a:p>
+            <a:fld id="{658E1C9A-47F7-4494-B9B8-0D060B88ACB1}" type="datetimeFigureOut">
+              <a:rPr lang="en-US" smtClean="0"/>
+              <a:t>8/17/2026</a:t>
+            </a:fld>
+            <a:endParaRPr lang="en-US"/>
+          </a:p>
+        </p:txBody>
+      </p:sp>
+      <p:sp>
+        <p:nvSpPr>
+          <p:cNvPr id="5" name="Footer Placeholder 4"/>
+          <p:cNvSpPr>
+            <a:spLocks noGrp="1"/>
+          </p:cNvSpPr>
+          <p:nvPr>
+            <p:ph type="ftr" sz="quarter" idx="11"/>
+          </p:nvPr>
+        </p:nvSpPr>
+        <p:spPr/>
+        <p:txBody>
+          <a:bodyPr/>
+          <a:lstStyle/>
+          <a:p>
+            <a:endParaRPr lang="en-US"/>
+          </a:p>
+        </p:txBody>
+      </p:sp>
+      <p:sp>
+        <p:nvSpPr>
+          <p:cNvPr id="6" name="Slide Number Placeholder 5"/>
+          <p:cNvSpPr>
+            <a:spLocks noGrp="1"/>
+          </p:cNvSpPr>
+          <p:nvPr>
+            <p:ph type="sldNum" sz="quarter" idx="12"/>
+          </p:nvPr>
+        </p:nvSpPr>
+        <p:spPr/>
+        <p:txBody>
+          <a:bodyPr/>
+          <a:lstStyle/>
+          <a:p>
+            <a:fld id="{A2521D86-E9AE-4904-807B-12096BA8753D}" type="slidenum">
+              <a:rPr lang="en-US" smtClean="0"/>
+              <a:t>‹#›</a:t>
+            </a:fld>
+            <a:endParaRPr lang="en-US"/>
+          </a:p>
+        </p:txBody>
+      </p:sp>
+      <p:sp>
+        <p:nvSpPr>
+          <p:cNvPr id="12" name="TextBox 11"/>
+          <p:cNvSpPr txBox="1"/>
+          <p:nvPr/>
+        </p:nvSpPr>
+        <p:spPr>
+          <a:xfrm>
+            <a:off x="898295" y="971253"/>
+            <a:ext cx="801912" cy="1969770"/>
+          </a:xfrm>
+          <a:prstGeom prst="rect">
+            <a:avLst/>
+          </a:prstGeom>
+          <a:noFill/>
+        </p:spPr>
+        <p:txBody>
+          <a:bodyPr wrap="square" rtlCol="0">
+            <a:spAutoFit/>
+          </a:bodyPr>
+          <a:lstStyle>
+            <a:defPPr>
+              <a:defRPr lang="en-US"/>
+            </a:defPPr>
+            <a:lvl1pPr algn="r">
+              <a:defRPr sz="12200" b="0" i="0">
+                <a:solidFill>
+                  <a:schemeClr val="bg2">
+                    <a:lumMod val="40000"/>
+                    <a:lumOff val="60000"/>
+                  </a:schemeClr>
+                </a:solidFill>
+                <a:latin typeface="Arial"/>
+                <a:ea typeface="+mj-ea"/>
+                <a:cs typeface="+mj-cs"/>
+              </a:defRPr>
+            </a:lvl1pPr>
+          </a:lstStyle>
+          <a:p>
+            <a:pPr lvl="0"/>
+            <a:r>
+              <a:rPr lang="en-US" dirty="0"/>
+              <a:t>“</a:t>
+            </a:r>
+          </a:p>
+        </p:txBody>
+      </p:sp>
+      <p:sp>
+        <p:nvSpPr>
+          <p:cNvPr id="15" name="TextBox 14"/>
+          <p:cNvSpPr txBox="1"/>
+          <p:nvPr/>
+        </p:nvSpPr>
+        <p:spPr>
+          <a:xfrm>
+            <a:off x="9330490" y="2613787"/>
+            <a:ext cx="801912" cy="1969770"/>
+          </a:xfrm>
+          <a:prstGeom prst="rect">
+            <a:avLst/>
+          </a:prstGeom>
+          <a:noFill/>
+        </p:spPr>
+        <p:txBody>
+          <a:bodyPr wrap="square" rtlCol="0">
+            <a:spAutoFit/>
+          </a:bodyPr>
+          <a:lstStyle>
+            <a:defPPr>
+              <a:defRPr lang="en-US"/>
+            </a:defPPr>
+            <a:lvl1pPr algn="r">
+              <a:defRPr sz="12200" b="0" i="0">
+                <a:solidFill>
+                  <a:schemeClr val="bg2">
+                    <a:lumMod val="40000"/>
+                    <a:lumOff val="60000"/>
+                  </a:schemeClr>
+                </a:solidFill>
+                <a:latin typeface="Arial"/>
+                <a:ea typeface="+mj-ea"/>
+                <a:cs typeface="+mj-cs"/>
+              </a:defRPr>
+            </a:lvl1pPr>
+          </a:lstStyle>
+          <a:p>
+            <a:pPr lvl="0"/>
+            <a:r>
+              <a:rPr lang="en-US" dirty="0"/>
+              <a:t>”</a:t>
+            </a:r>
+          </a:p>
+        </p:txBody>
+      </p:sp>
+    </p:spTree>
+    <p:extLst>
+      <p:ext uri="{BB962C8B-B14F-4D97-AF65-F5344CB8AC3E}">
+        <p14:creationId xmlns:p14="http://schemas.microsoft.com/office/powerpoint/2010/main" val="3845313699"/>
+      </p:ext>
+    </p:extLst>
+  </p:cSld>
+  <p:clrMapOvr>
+    <a:masterClrMapping/>
+  </p:clrMapOvr>
+</p:sldLayout>
+</file>
+
+<file path=ppt/slideLayouts/slideLayout13.xml><?xml version="1.0" encoding="utf-8"?>
+<p:sldLayout xmlns:a="http://schemas.openxmlformats.org/drawingml/2006/main" xmlns:r="http://schemas.openxmlformats.org/officeDocument/2006/relationships" xmlns:p="http://schemas.openxmlformats.org/presentationml/2006/main" preserve="1">
+  <p:cSld name="Name Card">
+    <p:spTree>
+      <p:nvGrpSpPr>
+        <p:cNvPr id="1" name=""/>
+        <p:cNvGrpSpPr/>
+        <p:nvPr/>
+      </p:nvGrpSpPr>
+      <p:grpSpPr>
+        <a:xfrm>
+          <a:off x="0" y="0"/>
+          <a:ext cx="0" cy="0"/>
+          <a:chOff x="0" y="0"/>
+          <a:chExt cx="0" cy="0"/>
+        </a:xfrm>
+      </p:grpSpPr>
+      <p:sp>
+        <p:nvSpPr>
+          <p:cNvPr id="2" name="Title 1"/>
+          <p:cNvSpPr>
+            <a:spLocks noGrp="1"/>
+          </p:cNvSpPr>
+          <p:nvPr>
+            <p:ph type="title"/>
+          </p:nvPr>
+        </p:nvSpPr>
+        <p:spPr>
+          <a:xfrm>
+            <a:off x="1154954" y="3124201"/>
+            <a:ext cx="8825660" cy="1653180"/>
+          </a:xfrm>
+        </p:spPr>
+        <p:txBody>
+          <a:bodyPr anchor="b"/>
+          <a:lstStyle>
+            <a:lvl1pPr algn="l">
+              <a:defRPr sz="4000" b="0" cap="none"/>
+            </a:lvl1pPr>
+          </a:lstStyle>
+          <a:p>
+            <a:r>
+              <a:rPr lang="en-US"/>
+              <a:t>Click to edit Master title style</a:t>
+            </a:r>
+            <a:endParaRPr lang="en-US" dirty="0"/>
+          </a:p>
+        </p:txBody>
+      </p:sp>
+      <p:sp>
+        <p:nvSpPr>
+          <p:cNvPr id="3" name="Text Placeholder 2"/>
+          <p:cNvSpPr>
+            <a:spLocks noGrp="1"/>
+          </p:cNvSpPr>
+          <p:nvPr>
+            <p:ph type="body" idx="1"/>
+          </p:nvPr>
+        </p:nvSpPr>
+        <p:spPr>
+          <a:xfrm>
+            <a:off x="1154954" y="4777381"/>
+            <a:ext cx="8825659" cy="860400"/>
+          </a:xfrm>
+        </p:spPr>
+        <p:txBody>
+          <a:bodyPr anchor="t"/>
+          <a:lstStyle>
+            <a:lvl1pPr marL="0" indent="0" algn="l">
+              <a:buNone/>
+              <a:defRPr sz="2000" cap="none">
+                <a:solidFill>
+                  <a:schemeClr val="bg2">
+                    <a:lumMod val="40000"/>
+                    <a:lumOff val="60000"/>
+                  </a:schemeClr>
+                </a:solidFill>
+              </a:defRPr>
+            </a:lvl1pPr>
+            <a:lvl2pPr marL="457200" indent="0">
+              <a:buNone/>
+              <a:defRPr sz="1800">
+                <a:solidFill>
+                  <a:schemeClr val="tx1">
+                    <a:tint val="75000"/>
+                  </a:schemeClr>
+                </a:solidFill>
+              </a:defRPr>
+            </a:lvl2pPr>
+            <a:lvl3pPr marL="914400" indent="0">
+              <a:buNone/>
+              <a:defRPr sz="1600">
+                <a:solidFill>
+                  <a:schemeClr val="tx1">
+                    <a:tint val="75000"/>
+                  </a:schemeClr>
+                </a:solidFill>
+              </a:defRPr>
+            </a:lvl3pPr>
+            <a:lvl4pPr marL="1371600" indent="0">
+              <a:buNone/>
+              <a:defRPr sz="1400">
+                <a:solidFill>
+                  <a:schemeClr val="tx1">
+                    <a:tint val="75000"/>
+                  </a:schemeClr>
+                </a:solidFill>
+              </a:defRPr>
+            </a:lvl4pPr>
+            <a:lvl5pPr marL="1828800" indent="0">
+              <a:buNone/>
+              <a:defRPr sz="1400">
+                <a:solidFill>
+                  <a:schemeClr val="tx1">
+                    <a:tint val="75000"/>
+                  </a:schemeClr>
+                </a:solidFill>
+              </a:defRPr>
+            </a:lvl5pPr>
+            <a:lvl6pPr marL="2286000" indent="0">
+              <a:buNone/>
+              <a:defRPr sz="1400">
+                <a:solidFill>
+                  <a:schemeClr val="tx1">
+                    <a:tint val="75000"/>
+                  </a:schemeClr>
+                </a:solidFill>
+              </a:defRPr>
+            </a:lvl6pPr>
+            <a:lvl7pPr marL="2743200" indent="0">
+              <a:buNone/>
+              <a:defRPr sz="1400">
+                <a:solidFill>
+                  <a:schemeClr val="tx1">
+                    <a:tint val="75000"/>
+                  </a:schemeClr>
+                </a:solidFill>
+              </a:defRPr>
+            </a:lvl7pPr>
+            <a:lvl8pPr marL="3200400" indent="0">
+              <a:buNone/>
+              <a:defRPr sz="1400">
+                <a:solidFill>
+                  <a:schemeClr val="tx1">
+                    <a:tint val="75000"/>
+                  </a:schemeClr>
+                </a:solidFill>
+              </a:defRPr>
+            </a:lvl8pPr>
+            <a:lvl9pPr marL="3657600" indent="0">
+              <a:buNone/>
+              <a:defRPr sz="1400">
+                <a:solidFill>
+                  <a:schemeClr val="tx1">
+                    <a:tint val="75000"/>
+                  </a:schemeClr>
+                </a:solidFill>
+              </a:defRPr>
+            </a:lvl9pPr>
+          </a:lstStyle>
+          <a:p>
+            <a:pPr lvl="0"/>
+            <a:r>
+              <a:rPr lang="en-US"/>
+              <a:t>Click to edit Master text styles</a:t>
+            </a:r>
+          </a:p>
+        </p:txBody>
+      </p:sp>
+      <p:sp>
+        <p:nvSpPr>
+          <p:cNvPr id="4" name="Date Placeholder 3"/>
+          <p:cNvSpPr>
+            <a:spLocks noGrp="1"/>
+          </p:cNvSpPr>
+          <p:nvPr>
+            <p:ph type="dt" sz="half" idx="10"/>
+          </p:nvPr>
+        </p:nvSpPr>
+        <p:spPr/>
+        <p:txBody>
+          <a:bodyPr/>
+          <a:lstStyle/>
+          <a:p>
+            <a:fld id="{658E1C9A-47F7-4494-B9B8-0D060B88ACB1}" type="datetimeFigureOut">
+              <a:rPr lang="en-US" smtClean="0"/>
+              <a:t>8/17/2026</a:t>
+            </a:fld>
+            <a:endParaRPr lang="en-US"/>
+          </a:p>
+        </p:txBody>
+      </p:sp>
+      <p:sp>
+        <p:nvSpPr>
+          <p:cNvPr id="5" name="Footer Placeholder 4"/>
+          <p:cNvSpPr>
+            <a:spLocks noGrp="1"/>
+          </p:cNvSpPr>
+          <p:nvPr>
+            <p:ph type="ftr" sz="quarter" idx="11"/>
+          </p:nvPr>
+        </p:nvSpPr>
+        <p:spPr/>
+        <p:txBody>
+          <a:bodyPr/>
+          <a:lstStyle/>
+          <a:p>
+            <a:endParaRPr lang="en-US"/>
+          </a:p>
+        </p:txBody>
+      </p:sp>
+      <p:sp>
+        <p:nvSpPr>
+          <p:cNvPr id="6" name="Slide Number Placeholder 5"/>
+          <p:cNvSpPr>
+            <a:spLocks noGrp="1"/>
+          </p:cNvSpPr>
+          <p:nvPr>
+            <p:ph type="sldNum" sz="quarter" idx="12"/>
+          </p:nvPr>
+        </p:nvSpPr>
+        <p:spPr/>
+        <p:txBody>
+          <a:bodyPr/>
+          <a:lstStyle/>
+          <a:p>
+            <a:fld id="{A2521D86-E9AE-4904-807B-12096BA8753D}" type="slidenum">
+              <a:rPr lang="en-US" smtClean="0"/>
+              <a:t>‹#›</a:t>
+            </a:fld>
+            <a:endParaRPr lang="en-US"/>
+          </a:p>
+        </p:txBody>
+      </p:sp>
+    </p:spTree>
+    <p:extLst>
+      <p:ext uri="{BB962C8B-B14F-4D97-AF65-F5344CB8AC3E}">
+        <p14:creationId xmlns:p14="http://schemas.microsoft.com/office/powerpoint/2010/main" val="3336703237"/>
+      </p:ext>
+    </p:extLst>
+  </p:cSld>
+  <p:clrMapOvr>
+    <a:masterClrMapping/>
+  </p:clrMapOvr>
+</p:sldLayout>
+</file>
+
+<file path=ppt/slideLayouts/slideLayout14.xml><?xml version="1.0" encoding="utf-8"?>
+<p:sldLayout xmlns:a="http://schemas.openxmlformats.org/drawingml/2006/main" xmlns:r="http://schemas.openxmlformats.org/officeDocument/2006/relationships" xmlns:p="http://schemas.openxmlformats.org/presentationml/2006/main" preserve="1">
+  <p:cSld name="3 Column">
+    <p:spTree>
+      <p:nvGrpSpPr>
+        <p:cNvPr id="1" name=""/>
+        <p:cNvGrpSpPr/>
+        <p:nvPr/>
+      </p:nvGrpSpPr>
+      <p:grpSpPr>
+        <a:xfrm>
+          <a:off x="0" y="0"/>
+          <a:ext cx="0" cy="0"/>
+          <a:chOff x="0" y="0"/>
+          <a:chExt cx="0" cy="0"/>
+        </a:xfrm>
+      </p:grpSpPr>
+      <p:sp>
+        <p:nvSpPr>
+          <p:cNvPr id="2" name="Title 1"/>
+          <p:cNvSpPr>
+            <a:spLocks noGrp="1"/>
+          </p:cNvSpPr>
+          <p:nvPr>
+            <p:ph type="title"/>
+          </p:nvPr>
+        </p:nvSpPr>
+        <p:spPr/>
+        <p:txBody>
+          <a:bodyPr/>
+          <a:lstStyle>
+            <a:lvl1pPr>
+              <a:defRPr sz="4200"/>
+            </a:lvl1pPr>
+          </a:lstStyle>
+          <a:p>
+            <a:r>
+              <a:rPr lang="en-US"/>
+              <a:t>Click to edit Master title style</a:t>
+            </a:r>
+            <a:endParaRPr lang="en-US" dirty="0"/>
+          </a:p>
+        </p:txBody>
+      </p:sp>
+      <p:sp>
+        <p:nvSpPr>
+          <p:cNvPr id="3" name="Text Placeholder 2"/>
+          <p:cNvSpPr>
+            <a:spLocks noGrp="1"/>
+          </p:cNvSpPr>
+          <p:nvPr>
+            <p:ph type="body" idx="1"/>
+          </p:nvPr>
+        </p:nvSpPr>
+        <p:spPr>
+          <a:xfrm>
+            <a:off x="632947" y="1981200"/>
+            <a:ext cx="2946866" cy="576262"/>
+          </a:xfrm>
+        </p:spPr>
+        <p:txBody>
+          <a:bodyPr anchor="b">
+            <a:noAutofit/>
+          </a:bodyPr>
+          <a:lstStyle>
+            <a:lvl1pPr marL="0" indent="0">
+              <a:buNone/>
+              <a:defRPr sz="2400" b="0">
+                <a:solidFill>
+                  <a:schemeClr val="bg2">
+                    <a:lumMod val="40000"/>
+                    <a:lumOff val="60000"/>
+                  </a:schemeClr>
+                </a:solidFill>
+              </a:defRPr>
+            </a:lvl1pPr>
+            <a:lvl2pPr marL="457200" indent="0">
+              <a:buNone/>
+              <a:defRPr sz="2000" b="1"/>
+            </a:lvl2pPr>
+            <a:lvl3pPr marL="914400" indent="0">
+              <a:buNone/>
+              <a:defRPr sz="1800" b="1"/>
+            </a:lvl3pPr>
+            <a:lvl4pPr marL="1371600" indent="0">
+              <a:buNone/>
+              <a:defRPr sz="1600" b="1"/>
+            </a:lvl4pPr>
+            <a:lvl5pPr marL="1828800" indent="0">
+              <a:buNone/>
+              <a:defRPr sz="1600" b="1"/>
+            </a:lvl5pPr>
+            <a:lvl6pPr marL="2286000" indent="0">
+              <a:buNone/>
+              <a:defRPr sz="1600" b="1"/>
+            </a:lvl6pPr>
+            <a:lvl7pPr marL="2743200" indent="0">
+              <a:buNone/>
+              <a:defRPr sz="1600" b="1"/>
+            </a:lvl7pPr>
+            <a:lvl8pPr marL="3200400" indent="0">
+              <a:buNone/>
+              <a:defRPr sz="1600" b="1"/>
+            </a:lvl8pPr>
+            <a:lvl9pPr marL="3657600" indent="0">
+              <a:buNone/>
+              <a:defRPr sz="1600" b="1"/>
+            </a:lvl9pPr>
+          </a:lstStyle>
+          <a:p>
+            <a:pPr lvl="0"/>
+            <a:r>
+              <a:rPr lang="en-US"/>
+              <a:t>Click to edit Master text styles</a:t>
+            </a:r>
+          </a:p>
+        </p:txBody>
+      </p:sp>
+      <p:sp>
+        <p:nvSpPr>
+          <p:cNvPr id="16" name="Text Placeholder 3"/>
+          <p:cNvSpPr>
+            <a:spLocks noGrp="1"/>
+          </p:cNvSpPr>
+          <p:nvPr>
+            <p:ph type="body" sz="half" idx="15"/>
+          </p:nvPr>
+        </p:nvSpPr>
+        <p:spPr>
+          <a:xfrm>
+            <a:off x="652463" y="2667000"/>
+            <a:ext cx="2927350" cy="3589338"/>
+          </a:xfrm>
+        </p:spPr>
+        <p:txBody>
+          <a:bodyPr anchor="t">
+            <a:normAutofit/>
+          </a:bodyPr>
+          <a:lstStyle>
+            <a:lvl1pPr marL="0" indent="0">
+              <a:buNone/>
+              <a:defRPr sz="1400"/>
+            </a:lvl1pPr>
+            <a:lvl2pPr marL="457200" indent="0">
+              <a:buNone/>
+              <a:defRPr sz="1200"/>
+            </a:lvl2pPr>
+            <a:lvl3pPr marL="914400" indent="0">
+              <a:buNone/>
+              <a:defRPr sz="1000"/>
+            </a:lvl3pPr>
+            <a:lvl4pPr marL="1371600" indent="0">
+              <a:buNone/>
+              <a:defRPr sz="900"/>
+            </a:lvl4pPr>
+            <a:lvl5pPr marL="1828800" indent="0">
+              <a:buNone/>
+              <a:defRPr sz="900"/>
+            </a:lvl5pPr>
+            <a:lvl6pPr marL="2286000" indent="0">
+              <a:buNone/>
+              <a:defRPr sz="900"/>
+            </a:lvl6pPr>
+            <a:lvl7pPr marL="2743200" indent="0">
+              <a:buNone/>
+              <a:defRPr sz="900"/>
+            </a:lvl7pPr>
+            <a:lvl8pPr marL="3200400" indent="0">
+              <a:buNone/>
+              <a:defRPr sz="900"/>
+            </a:lvl8pPr>
+            <a:lvl9pPr marL="3657600" indent="0">
+              <a:buNone/>
+              <a:defRPr sz="900"/>
+            </a:lvl9pPr>
+          </a:lstStyle>
+          <a:p>
+            <a:pPr lvl="0"/>
+            <a:r>
+              <a:rPr lang="en-US"/>
+              <a:t>Click to edit Master text styles</a:t>
+            </a:r>
+          </a:p>
+        </p:txBody>
+      </p:sp>
+      <p:sp>
+        <p:nvSpPr>
+          <p:cNvPr id="5" name="Text Placeholder 4"/>
+          <p:cNvSpPr>
+            <a:spLocks noGrp="1"/>
+          </p:cNvSpPr>
+          <p:nvPr>
+            <p:ph type="body" sz="quarter" idx="3"/>
+          </p:nvPr>
+        </p:nvSpPr>
+        <p:spPr>
+          <a:xfrm>
+            <a:off x="3883659" y="1981200"/>
+            <a:ext cx="2936241" cy="576262"/>
+          </a:xfrm>
+        </p:spPr>
+        <p:txBody>
+          <a:bodyPr anchor="b">
+            <a:noAutofit/>
+          </a:bodyPr>
+          <a:lstStyle>
+            <a:lvl1pPr marL="0" indent="0">
+              <a:buNone/>
+              <a:defRPr sz="2400" b="0">
+                <a:solidFill>
+                  <a:schemeClr val="bg2">
+                    <a:lumMod val="40000"/>
+                    <a:lumOff val="60000"/>
+                  </a:schemeClr>
+                </a:solidFill>
+              </a:defRPr>
+            </a:lvl1pPr>
+            <a:lvl2pPr marL="457200" indent="0">
+              <a:buNone/>
+              <a:defRPr sz="2000" b="1"/>
+            </a:lvl2pPr>
+            <a:lvl3pPr marL="914400" indent="0">
+              <a:buNone/>
+              <a:defRPr sz="1800" b="1"/>
+            </a:lvl3pPr>
+            <a:lvl4pPr marL="1371600" indent="0">
+              <a:buNone/>
+              <a:defRPr sz="1600" b="1"/>
+            </a:lvl4pPr>
+            <a:lvl5pPr marL="1828800" indent="0">
+              <a:buNone/>
+              <a:defRPr sz="1600" b="1"/>
+            </a:lvl5pPr>
+            <a:lvl6pPr marL="2286000" indent="0">
+              <a:buNone/>
+              <a:defRPr sz="1600" b="1"/>
+            </a:lvl6pPr>
+            <a:lvl7pPr marL="2743200" indent="0">
+              <a:buNone/>
+              <a:defRPr sz="1600" b="1"/>
+            </a:lvl7pPr>
+            <a:lvl8pPr marL="3200400" indent="0">
+              <a:buNone/>
+              <a:defRPr sz="1600" b="1"/>
+            </a:lvl8pPr>
+            <a:lvl9pPr marL="3657600" indent="0">
+              <a:buNone/>
+              <a:defRPr sz="1600" b="1"/>
+            </a:lvl9pPr>
+          </a:lstStyle>
+          <a:p>
+            <a:pPr lvl="0"/>
+            <a:r>
+              <a:rPr lang="en-US"/>
+              <a:t>Click to edit Master text styles</a:t>
+            </a:r>
+          </a:p>
+        </p:txBody>
+      </p:sp>
+      <p:sp>
+        <p:nvSpPr>
+          <p:cNvPr id="19" name="Text Placeholder 3"/>
+          <p:cNvSpPr>
+            <a:spLocks noGrp="1"/>
+          </p:cNvSpPr>
+          <p:nvPr>
+            <p:ph type="body" sz="half" idx="16"/>
+          </p:nvPr>
+        </p:nvSpPr>
+        <p:spPr>
+          <a:xfrm>
+            <a:off x="3873106" y="2667000"/>
+            <a:ext cx="2946794" cy="3589338"/>
+          </a:xfrm>
+        </p:spPr>
+        <p:txBody>
+          <a:bodyPr anchor="t">
+            <a:normAutofit/>
+          </a:bodyPr>
+          <a:lstStyle>
+            <a:lvl1pPr marL="0" indent="0">
+              <a:buNone/>
+              <a:defRPr sz="1400"/>
+            </a:lvl1pPr>
+            <a:lvl2pPr marL="457200" indent="0">
+              <a:buNone/>
+              <a:defRPr sz="1200"/>
+            </a:lvl2pPr>
+            <a:lvl3pPr marL="914400" indent="0">
+              <a:buNone/>
+              <a:defRPr sz="1000"/>
+            </a:lvl3pPr>
+            <a:lvl4pPr marL="1371600" indent="0">
+              <a:buNone/>
+              <a:defRPr sz="900"/>
+            </a:lvl4pPr>
+            <a:lvl5pPr marL="1828800" indent="0">
+              <a:buNone/>
+              <a:defRPr sz="900"/>
+            </a:lvl5pPr>
+            <a:lvl6pPr marL="2286000" indent="0">
+              <a:buNone/>
+              <a:defRPr sz="900"/>
+            </a:lvl6pPr>
+            <a:lvl7pPr marL="2743200" indent="0">
+              <a:buNone/>
+              <a:defRPr sz="900"/>
+            </a:lvl7pPr>
+            <a:lvl8pPr marL="3200400" indent="0">
+              <a:buNone/>
+              <a:defRPr sz="900"/>
+            </a:lvl8pPr>
+            <a:lvl9pPr marL="3657600" indent="0">
+              <a:buNone/>
+              <a:defRPr sz="900"/>
+            </a:lvl9pPr>
+          </a:lstStyle>
+          <a:p>
+            <a:pPr lvl="0"/>
+            <a:r>
+              <a:rPr lang="en-US"/>
+              <a:t>Click to edit Master text styles</a:t>
+            </a:r>
+          </a:p>
+        </p:txBody>
+      </p:sp>
+      <p:sp>
+        <p:nvSpPr>
+          <p:cNvPr id="14" name="Text Placeholder 4"/>
+          <p:cNvSpPr>
+            <a:spLocks noGrp="1"/>
+          </p:cNvSpPr>
+          <p:nvPr>
+            <p:ph type="body" sz="quarter" idx="13"/>
+          </p:nvPr>
+        </p:nvSpPr>
+        <p:spPr>
+          <a:xfrm>
+            <a:off x="7124700" y="1981200"/>
+            <a:ext cx="2932113" cy="576262"/>
+          </a:xfrm>
+        </p:spPr>
+        <p:txBody>
+          <a:bodyPr anchor="b">
+            <a:noAutofit/>
+          </a:bodyPr>
+          <a:lstStyle>
+            <a:lvl1pPr marL="0" indent="0">
+              <a:buNone/>
+              <a:defRPr sz="2400" b="0">
+                <a:solidFill>
+                  <a:schemeClr val="bg2">
+                    <a:lumMod val="40000"/>
+                    <a:lumOff val="60000"/>
+                  </a:schemeClr>
+                </a:solidFill>
+              </a:defRPr>
+            </a:lvl1pPr>
+            <a:lvl2pPr marL="457200" indent="0">
+              <a:buNone/>
+              <a:defRPr sz="2000" b="1"/>
+            </a:lvl2pPr>
+            <a:lvl3pPr marL="914400" indent="0">
+              <a:buNone/>
+              <a:defRPr sz="1800" b="1"/>
+            </a:lvl3pPr>
+            <a:lvl4pPr marL="1371600" indent="0">
+              <a:buNone/>
+              <a:defRPr sz="1600" b="1"/>
+            </a:lvl4pPr>
+            <a:lvl5pPr marL="1828800" indent="0">
+              <a:buNone/>
+              <a:defRPr sz="1600" b="1"/>
+            </a:lvl5pPr>
+            <a:lvl6pPr marL="2286000" indent="0">
+              <a:buNone/>
+              <a:defRPr sz="1600" b="1"/>
+            </a:lvl6pPr>
+            <a:lvl7pPr marL="2743200" indent="0">
+              <a:buNone/>
+              <a:defRPr sz="1600" b="1"/>
+            </a:lvl7pPr>
+            <a:lvl8pPr marL="3200400" indent="0">
+              <a:buNone/>
+              <a:defRPr sz="1600" b="1"/>
+            </a:lvl8pPr>
+            <a:lvl9pPr marL="3657600" indent="0">
+              <a:buNone/>
+              <a:defRPr sz="1600" b="1"/>
+            </a:lvl9pPr>
+          </a:lstStyle>
+          <a:p>
+            <a:pPr lvl="0"/>
+            <a:r>
+              <a:rPr lang="en-US"/>
+              <a:t>Click to edit Master text styles</a:t>
+            </a:r>
+          </a:p>
+        </p:txBody>
+      </p:sp>
+      <p:sp>
+        <p:nvSpPr>
+          <p:cNvPr id="20" name="Text Placeholder 3"/>
+          <p:cNvSpPr>
+            <a:spLocks noGrp="1"/>
+          </p:cNvSpPr>
+          <p:nvPr>
+            <p:ph type="body" sz="half" idx="17"/>
+          </p:nvPr>
+        </p:nvSpPr>
+        <p:spPr>
+          <a:xfrm>
+            <a:off x="7124700" y="2667000"/>
+            <a:ext cx="2932113" cy="3589338"/>
+          </a:xfrm>
+        </p:spPr>
+        <p:txBody>
+          <a:bodyPr anchor="t">
+            <a:normAutofit/>
+          </a:bodyPr>
+          <a:lstStyle>
+            <a:lvl1pPr marL="0" indent="0">
+              <a:buNone/>
+              <a:defRPr sz="1400"/>
+            </a:lvl1pPr>
+            <a:lvl2pPr marL="457200" indent="0">
+              <a:buNone/>
+              <a:defRPr sz="1200"/>
+            </a:lvl2pPr>
+            <a:lvl3pPr marL="914400" indent="0">
+              <a:buNone/>
+              <a:defRPr sz="1000"/>
+            </a:lvl3pPr>
+            <a:lvl4pPr marL="1371600" indent="0">
+              <a:buNone/>
+              <a:defRPr sz="900"/>
+            </a:lvl4pPr>
+            <a:lvl5pPr marL="1828800" indent="0">
+              <a:buNone/>
+              <a:defRPr sz="900"/>
+            </a:lvl5pPr>
+            <a:lvl6pPr marL="2286000" indent="0">
+              <a:buNone/>
+              <a:defRPr sz="900"/>
+            </a:lvl6pPr>
+            <a:lvl7pPr marL="2743200" indent="0">
+              <a:buNone/>
+              <a:defRPr sz="900"/>
+            </a:lvl7pPr>
+            <a:lvl8pPr marL="3200400" indent="0">
+              <a:buNone/>
+              <a:defRPr sz="900"/>
+            </a:lvl8pPr>
+            <a:lvl9pPr marL="3657600" indent="0">
+              <a:buNone/>
+              <a:defRPr sz="900"/>
+            </a:lvl9pPr>
+          </a:lstStyle>
+          <a:p>
+            <a:pPr lvl="0"/>
+            <a:r>
+              <a:rPr lang="en-US"/>
+              <a:t>Click to edit Master text styles</a:t>
+            </a:r>
+          </a:p>
+        </p:txBody>
+      </p:sp>
+      <p:cxnSp>
+        <p:nvCxnSpPr>
+          <p:cNvPr id="17" name="Straight Connector 16"/>
+          <p:cNvCxnSpPr/>
+          <p:nvPr/>
+        </p:nvCxnSpPr>
+        <p:spPr>
+          <a:xfrm>
+            <a:off x="3726142" y="2133600"/>
+            <a:ext cx="0" cy="3962400"/>
+          </a:xfrm>
+          <a:prstGeom prst="line">
+            <a:avLst/>
+          </a:prstGeom>
+          <a:ln w="12700" cmpd="sng">
+            <a:solidFill>
+              <a:schemeClr val="bg2">
+                <a:lumMod val="40000"/>
+                <a:lumOff val="60000"/>
+                <a:alpha val="40000"/>
+              </a:schemeClr>
+            </a:solidFill>
+          </a:ln>
+        </p:spPr>
+        <p:style>
+          <a:lnRef idx="2">
+            <a:schemeClr val="accent1"/>
+          </a:lnRef>
+          <a:fillRef idx="0">
+            <a:schemeClr val="accent1"/>
+          </a:fillRef>
+          <a:effectRef idx="1">
+            <a:schemeClr val="accent1"/>
+          </a:effectRef>
+          <a:fontRef idx="minor">
+            <a:schemeClr val="tx1"/>
+          </a:fontRef>
+        </p:style>
+      </p:cxnSp>
+      <p:cxnSp>
+        <p:nvCxnSpPr>
+          <p:cNvPr id="18" name="Straight Connector 17"/>
+          <p:cNvCxnSpPr/>
+          <p:nvPr/>
+        </p:nvCxnSpPr>
+        <p:spPr>
+          <a:xfrm>
+            <a:off x="6962227" y="2133600"/>
+            <a:ext cx="0" cy="3966882"/>
+          </a:xfrm>
+          <a:prstGeom prst="line">
+            <a:avLst/>
+          </a:prstGeom>
+          <a:ln w="12700" cmpd="sng">
+            <a:solidFill>
+              <a:schemeClr val="bg2">
+                <a:lumMod val="40000"/>
+                <a:lumOff val="60000"/>
+                <a:alpha val="40000"/>
+              </a:schemeClr>
+            </a:solidFill>
+          </a:ln>
+        </p:spPr>
+        <p:style>
+          <a:lnRef idx="2">
+            <a:schemeClr val="accent1"/>
+          </a:lnRef>
+          <a:fillRef idx="0">
+            <a:schemeClr val="accent1"/>
+          </a:fillRef>
+          <a:effectRef idx="1">
+            <a:schemeClr val="accent1"/>
+          </a:effectRef>
+          <a:fontRef idx="minor">
+            <a:schemeClr val="tx1"/>
+          </a:fontRef>
+        </p:style>
+      </p:cxnSp>
+      <p:sp>
+        <p:nvSpPr>
+          <p:cNvPr id="7" name="Date Placeholder 3"/>
+          <p:cNvSpPr>
+            <a:spLocks noGrp="1"/>
+          </p:cNvSpPr>
+          <p:nvPr>
+            <p:ph type="dt" sz="half" idx="10"/>
+          </p:nvPr>
+        </p:nvSpPr>
+        <p:spPr/>
+        <p:txBody>
+          <a:bodyPr/>
+          <a:lstStyle/>
+          <a:p>
+            <a:fld id="{658E1C9A-47F7-4494-B9B8-0D060B88ACB1}" type="datetimeFigureOut">
+              <a:rPr lang="en-US" smtClean="0"/>
+              <a:t>8/17/2026</a:t>
+            </a:fld>
+            <a:endParaRPr lang="en-US"/>
+          </a:p>
+        </p:txBody>
+      </p:sp>
+      <p:sp>
+        <p:nvSpPr>
+          <p:cNvPr id="4" name="Footer Placeholder 4"/>
+          <p:cNvSpPr>
+            <a:spLocks noGrp="1"/>
+          </p:cNvSpPr>
+          <p:nvPr>
+            <p:ph type="ftr" sz="quarter" idx="11"/>
+          </p:nvPr>
+        </p:nvSpPr>
+        <p:spPr/>
+        <p:txBody>
+          <a:bodyPr/>
+          <a:lstStyle/>
+          <a:p>
+            <a:endParaRPr lang="en-US"/>
+          </a:p>
+        </p:txBody>
+      </p:sp>
+      <p:sp>
+        <p:nvSpPr>
+          <p:cNvPr id="6" name="Slide Number Placeholder 5"/>
+          <p:cNvSpPr>
+            <a:spLocks noGrp="1"/>
+          </p:cNvSpPr>
+          <p:nvPr>
+            <p:ph type="sldNum" sz="quarter" idx="12"/>
+          </p:nvPr>
+        </p:nvSpPr>
+        <p:spPr/>
+        <p:txBody>
+          <a:bodyPr/>
+          <a:lstStyle/>
+          <a:p>
+            <a:fld id="{A2521D86-E9AE-4904-807B-12096BA8753D}" type="slidenum">
+              <a:rPr lang="en-US" smtClean="0"/>
+              <a:t>‹#›</a:t>
+            </a:fld>
+            <a:endParaRPr lang="en-US"/>
+          </a:p>
+        </p:txBody>
+      </p:sp>
+    </p:spTree>
+    <p:extLst>
+      <p:ext uri="{BB962C8B-B14F-4D97-AF65-F5344CB8AC3E}">
+        <p14:creationId xmlns:p14="http://schemas.microsoft.com/office/powerpoint/2010/main" val="3697243155"/>
+      </p:ext>
+    </p:extLst>
+  </p:cSld>
+  <p:clrMapOvr>
+    <a:masterClrMapping/>
+  </p:clrMapOvr>
+</p:sldLayout>
+</file>
+
+<file path=ppt/slideLayouts/slideLayout15.xml><?xml version="1.0" encoding="utf-8"?>
+<p:sldLayout xmlns:a="http://schemas.openxmlformats.org/drawingml/2006/main" xmlns:r="http://schemas.openxmlformats.org/officeDocument/2006/relationships" xmlns:p="http://schemas.openxmlformats.org/presentationml/2006/main" preserve="1">
+  <p:cSld name="3 Picture Column">
+    <p:spTree>
+      <p:nvGrpSpPr>
+        <p:cNvPr id="1" name=""/>
+        <p:cNvGrpSpPr/>
+        <p:nvPr/>
+      </p:nvGrpSpPr>
+      <p:grpSpPr>
+        <a:xfrm>
+          <a:off x="0" y="0"/>
+          <a:ext cx="0" cy="0"/>
+          <a:chOff x="0" y="0"/>
+          <a:chExt cx="0" cy="0"/>
+        </a:xfrm>
+      </p:grpSpPr>
+      <p:sp>
+        <p:nvSpPr>
+          <p:cNvPr id="2" name="Title 1"/>
+          <p:cNvSpPr>
+            <a:spLocks noGrp="1"/>
+          </p:cNvSpPr>
+          <p:nvPr>
+            <p:ph type="title"/>
+          </p:nvPr>
+        </p:nvSpPr>
+        <p:spPr/>
+        <p:txBody>
+          <a:bodyPr/>
+          <a:lstStyle>
+            <a:lvl1pPr>
+              <a:defRPr sz="4200"/>
+            </a:lvl1pPr>
+          </a:lstStyle>
+          <a:p>
+            <a:r>
+              <a:rPr lang="en-US"/>
+              <a:t>Click to edit Master title style</a:t>
+            </a:r>
+            <a:endParaRPr lang="en-US" dirty="0"/>
+          </a:p>
+        </p:txBody>
+      </p:sp>
+      <p:sp>
+        <p:nvSpPr>
+          <p:cNvPr id="3" name="Text Placeholder 2"/>
+          <p:cNvSpPr>
+            <a:spLocks noGrp="1"/>
+          </p:cNvSpPr>
+          <p:nvPr>
+            <p:ph type="body" idx="1"/>
+          </p:nvPr>
+        </p:nvSpPr>
+        <p:spPr>
+          <a:xfrm>
+            <a:off x="652463" y="4250949"/>
+            <a:ext cx="2940050" cy="576262"/>
+          </a:xfrm>
+        </p:spPr>
+        <p:txBody>
+          <a:bodyPr anchor="b">
+            <a:noAutofit/>
+          </a:bodyPr>
+          <a:lstStyle>
+            <a:lvl1pPr marL="0" indent="0">
+              <a:buNone/>
+              <a:defRPr sz="2400" b="0">
+                <a:solidFill>
+                  <a:schemeClr val="bg2">
+                    <a:lumMod val="40000"/>
+                    <a:lumOff val="60000"/>
+                  </a:schemeClr>
+                </a:solidFill>
+              </a:defRPr>
+            </a:lvl1pPr>
+            <a:lvl2pPr marL="457200" indent="0">
+              <a:buNone/>
+              <a:defRPr sz="2000" b="1"/>
+            </a:lvl2pPr>
+            <a:lvl3pPr marL="914400" indent="0">
+              <a:buNone/>
+              <a:defRPr sz="1800" b="1"/>
+            </a:lvl3pPr>
+            <a:lvl4pPr marL="1371600" indent="0">
+              <a:buNone/>
+              <a:defRPr sz="1600" b="1"/>
+            </a:lvl4pPr>
+            <a:lvl5pPr marL="1828800" indent="0">
+              <a:buNone/>
+              <a:defRPr sz="1600" b="1"/>
+            </a:lvl5pPr>
+            <a:lvl6pPr marL="2286000" indent="0">
+              <a:buNone/>
+              <a:defRPr sz="1600" b="1"/>
+            </a:lvl6pPr>
+            <a:lvl7pPr marL="2743200" indent="0">
+              <a:buNone/>
+              <a:defRPr sz="1600" b="1"/>
+            </a:lvl7pPr>
+            <a:lvl8pPr marL="3200400" indent="0">
+              <a:buNone/>
+              <a:defRPr sz="1600" b="1"/>
+            </a:lvl8pPr>
+            <a:lvl9pPr marL="3657600" indent="0">
+              <a:buNone/>
+              <a:defRPr sz="1600" b="1"/>
+            </a:lvl9pPr>
+          </a:lstStyle>
+          <a:p>
+            <a:pPr lvl="0"/>
+            <a:r>
+              <a:rPr lang="en-US"/>
+              <a:t>Click to edit Master text styles</a:t>
+            </a:r>
+          </a:p>
+        </p:txBody>
+      </p:sp>
+      <p:sp>
+        <p:nvSpPr>
+          <p:cNvPr id="29" name="Picture Placeholder 2"/>
+          <p:cNvSpPr>
+            <a:spLocks noGrp="1" noChangeAspect="1"/>
+          </p:cNvSpPr>
+          <p:nvPr>
+            <p:ph type="pic" idx="15"/>
+          </p:nvPr>
+        </p:nvSpPr>
+        <p:spPr>
+          <a:xfrm>
+            <a:off x="652463" y="2209800"/>
+            <a:ext cx="2940050" cy="1524000"/>
+          </a:xfrm>
+          <a:prstGeom prst="roundRect">
+            <a:avLst>
+              <a:gd name="adj" fmla="val 1858"/>
+            </a:avLst>
+          </a:prstGeom>
+          <a:effectLst>
+            <a:outerShdw blurRad="50800" dist="50800" dir="5400000" algn="tl" rotWithShape="0">
+              <a:srgbClr val="000000">
+                <a:alpha val="43000"/>
+              </a:srgbClr>
+            </a:outerShdw>
+          </a:effectLst>
+        </p:spPr>
+        <p:txBody>
+          <a:bodyPr anchor="t">
+            <a:normAutofit/>
+          </a:bodyPr>
+          <a:lstStyle>
+            <a:lvl1pPr marL="0" indent="0" algn="ctr">
+              <a:buNone/>
+              <a:defRPr sz="1600"/>
+            </a:lvl1pPr>
+            <a:lvl2pPr marL="457200" indent="0">
+              <a:buNone/>
+              <a:defRPr sz="1600"/>
+            </a:lvl2pPr>
+            <a:lvl3pPr marL="914400" indent="0">
+              <a:buNone/>
+              <a:defRPr sz="1600"/>
+            </a:lvl3pPr>
+            <a:lvl4pPr marL="1371600" indent="0">
+              <a:buNone/>
+              <a:defRPr sz="1600"/>
+            </a:lvl4pPr>
+            <a:lvl5pPr marL="1828800" indent="0">
+              <a:buNone/>
+              <a:defRPr sz="1600"/>
+            </a:lvl5pPr>
+            <a:lvl6pPr marL="2286000" indent="0">
+              <a:buNone/>
+              <a:defRPr sz="1600"/>
+            </a:lvl6pPr>
+            <a:lvl7pPr marL="2743200" indent="0">
+              <a:buNone/>
+              <a:defRPr sz="1600"/>
+            </a:lvl7pPr>
+            <a:lvl8pPr marL="3200400" indent="0">
+              <a:buNone/>
+              <a:defRPr sz="1600"/>
+            </a:lvl8pPr>
+            <a:lvl9pPr marL="3657600" indent="0">
+              <a:buNone/>
+              <a:defRPr sz="1600"/>
+            </a:lvl9pPr>
+          </a:lstStyle>
+          <a:p>
+            <a:r>
+              <a:rPr lang="en-US"/>
+              <a:t>Click icon to add picture</a:t>
+            </a:r>
+            <a:endParaRPr lang="en-US" dirty="0"/>
+          </a:p>
+        </p:txBody>
+      </p:sp>
+      <p:sp>
+        <p:nvSpPr>
+          <p:cNvPr id="22" name="Text Placeholder 3"/>
+          <p:cNvSpPr>
+            <a:spLocks noGrp="1"/>
+          </p:cNvSpPr>
+          <p:nvPr>
+            <p:ph type="body" sz="half" idx="18"/>
+          </p:nvPr>
+        </p:nvSpPr>
+        <p:spPr>
+          <a:xfrm>
+            <a:off x="652463" y="4827211"/>
+            <a:ext cx="2940050" cy="659189"/>
+          </a:xfrm>
+        </p:spPr>
+        <p:txBody>
+          <a:bodyPr anchor="t">
+            <a:normAutofit/>
+          </a:bodyPr>
+          <a:lstStyle>
+            <a:lvl1pPr marL="0" indent="0">
+              <a:buNone/>
+              <a:defRPr sz="1400"/>
+            </a:lvl1pPr>
+            <a:lvl2pPr marL="457200" indent="0">
+              <a:buNone/>
+              <a:defRPr sz="1200"/>
+            </a:lvl2pPr>
+            <a:lvl3pPr marL="914400" indent="0">
+              <a:buNone/>
+              <a:defRPr sz="1000"/>
+            </a:lvl3pPr>
+            <a:lvl4pPr marL="1371600" indent="0">
+              <a:buNone/>
+              <a:defRPr sz="900"/>
+            </a:lvl4pPr>
+            <a:lvl5pPr marL="1828800" indent="0">
+              <a:buNone/>
+              <a:defRPr sz="900"/>
+            </a:lvl5pPr>
+            <a:lvl6pPr marL="2286000" indent="0">
+              <a:buNone/>
+              <a:defRPr sz="900"/>
+            </a:lvl6pPr>
+            <a:lvl7pPr marL="2743200" indent="0">
+              <a:buNone/>
+              <a:defRPr sz="900"/>
+            </a:lvl7pPr>
+            <a:lvl8pPr marL="3200400" indent="0">
+              <a:buNone/>
+              <a:defRPr sz="900"/>
+            </a:lvl8pPr>
+            <a:lvl9pPr marL="3657600" indent="0">
+              <a:buNone/>
+              <a:defRPr sz="900"/>
+            </a:lvl9pPr>
+          </a:lstStyle>
+          <a:p>
+            <a:pPr lvl="0"/>
+            <a:r>
+              <a:rPr lang="en-US"/>
+              <a:t>Click to edit Master text styles</a:t>
+            </a:r>
+          </a:p>
+        </p:txBody>
+      </p:sp>
+      <p:sp>
+        <p:nvSpPr>
+          <p:cNvPr id="5" name="Text Placeholder 4"/>
+          <p:cNvSpPr>
+            <a:spLocks noGrp="1"/>
+          </p:cNvSpPr>
+          <p:nvPr>
+            <p:ph type="body" sz="quarter" idx="3"/>
+          </p:nvPr>
+        </p:nvSpPr>
+        <p:spPr>
+          <a:xfrm>
+            <a:off x="3889375" y="4250949"/>
+            <a:ext cx="2930525" cy="576262"/>
+          </a:xfrm>
+        </p:spPr>
+        <p:txBody>
+          <a:bodyPr anchor="b">
+            <a:noAutofit/>
+          </a:bodyPr>
+          <a:lstStyle>
+            <a:lvl1pPr marL="0" indent="0">
+              <a:buNone/>
+              <a:defRPr sz="2400" b="0">
+                <a:solidFill>
+                  <a:schemeClr val="bg2">
+                    <a:lumMod val="40000"/>
+                    <a:lumOff val="60000"/>
+                  </a:schemeClr>
+                </a:solidFill>
+              </a:defRPr>
+            </a:lvl1pPr>
+            <a:lvl2pPr marL="457200" indent="0">
+              <a:buNone/>
+              <a:defRPr sz="2000" b="1"/>
+            </a:lvl2pPr>
+            <a:lvl3pPr marL="914400" indent="0">
+              <a:buNone/>
+              <a:defRPr sz="1800" b="1"/>
+            </a:lvl3pPr>
+            <a:lvl4pPr marL="1371600" indent="0">
+              <a:buNone/>
+              <a:defRPr sz="1600" b="1"/>
+            </a:lvl4pPr>
+            <a:lvl5pPr marL="1828800" indent="0">
+              <a:buNone/>
+              <a:defRPr sz="1600" b="1"/>
+            </a:lvl5pPr>
+            <a:lvl6pPr marL="2286000" indent="0">
+              <a:buNone/>
+              <a:defRPr sz="1600" b="1"/>
+            </a:lvl6pPr>
+            <a:lvl7pPr marL="2743200" indent="0">
+              <a:buNone/>
+              <a:defRPr sz="1600" b="1"/>
+            </a:lvl7pPr>
+            <a:lvl8pPr marL="3200400" indent="0">
+              <a:buNone/>
+              <a:defRPr sz="1600" b="1"/>
+            </a:lvl8pPr>
+            <a:lvl9pPr marL="3657600" indent="0">
+              <a:buNone/>
+              <a:defRPr sz="1600" b="1"/>
+            </a:lvl9pPr>
+          </a:lstStyle>
+          <a:p>
+            <a:pPr lvl="0"/>
+            <a:r>
+              <a:rPr lang="en-US"/>
+              <a:t>Click to edit Master text styles</a:t>
+            </a:r>
+          </a:p>
+        </p:txBody>
+      </p:sp>
+      <p:sp>
+        <p:nvSpPr>
+          <p:cNvPr id="30" name="Picture Placeholder 2"/>
+          <p:cNvSpPr>
+            <a:spLocks noGrp="1" noChangeAspect="1"/>
+          </p:cNvSpPr>
+          <p:nvPr>
+            <p:ph type="pic" idx="21"/>
+          </p:nvPr>
+        </p:nvSpPr>
+        <p:spPr>
+          <a:xfrm>
+            <a:off x="3889374" y="2209800"/>
+            <a:ext cx="2930525" cy="1524000"/>
+          </a:xfrm>
+          <a:prstGeom prst="roundRect">
+            <a:avLst>
+              <a:gd name="adj" fmla="val 1858"/>
+            </a:avLst>
+          </a:prstGeom>
+          <a:effectLst>
+            <a:outerShdw blurRad="50800" dist="50800" dir="5400000" algn="tl" rotWithShape="0">
+              <a:srgbClr val="000000">
+                <a:alpha val="43000"/>
+              </a:srgbClr>
+            </a:outerShdw>
+          </a:effectLst>
+        </p:spPr>
+        <p:txBody>
+          <a:bodyPr anchor="t">
+            <a:normAutofit/>
+          </a:bodyPr>
+          <a:lstStyle>
+            <a:lvl1pPr marL="0" indent="0" algn="ctr">
+              <a:buNone/>
+              <a:defRPr sz="1600"/>
+            </a:lvl1pPr>
+            <a:lvl2pPr marL="457200" indent="0">
+              <a:buNone/>
+              <a:defRPr sz="1600"/>
+            </a:lvl2pPr>
+            <a:lvl3pPr marL="914400" indent="0">
+              <a:buNone/>
+              <a:defRPr sz="1600"/>
+            </a:lvl3pPr>
+            <a:lvl4pPr marL="1371600" indent="0">
+              <a:buNone/>
+              <a:defRPr sz="1600"/>
+            </a:lvl4pPr>
+            <a:lvl5pPr marL="1828800" indent="0">
+              <a:buNone/>
+              <a:defRPr sz="1600"/>
+            </a:lvl5pPr>
+            <a:lvl6pPr marL="2286000" indent="0">
+              <a:buNone/>
+              <a:defRPr sz="1600"/>
+            </a:lvl6pPr>
+            <a:lvl7pPr marL="2743200" indent="0">
+              <a:buNone/>
+              <a:defRPr sz="1600"/>
+            </a:lvl7pPr>
+            <a:lvl8pPr marL="3200400" indent="0">
+              <a:buNone/>
+              <a:defRPr sz="1600"/>
+            </a:lvl8pPr>
+            <a:lvl9pPr marL="3657600" indent="0">
+              <a:buNone/>
+              <a:defRPr sz="1600"/>
+            </a:lvl9pPr>
+          </a:lstStyle>
+          <a:p>
+            <a:r>
+              <a:rPr lang="en-US"/>
+              <a:t>Click icon to add picture</a:t>
+            </a:r>
+            <a:endParaRPr lang="en-US" dirty="0"/>
+          </a:p>
+        </p:txBody>
+      </p:sp>
+      <p:sp>
+        <p:nvSpPr>
+          <p:cNvPr id="23" name="Text Placeholder 3"/>
+          <p:cNvSpPr>
+            <a:spLocks noGrp="1"/>
+          </p:cNvSpPr>
+          <p:nvPr>
+            <p:ph type="body" sz="half" idx="19"/>
+          </p:nvPr>
+        </p:nvSpPr>
+        <p:spPr>
+          <a:xfrm>
+            <a:off x="3888022" y="4827210"/>
+            <a:ext cx="2934406" cy="659189"/>
+          </a:xfrm>
+        </p:spPr>
+        <p:txBody>
+          <a:bodyPr anchor="t">
+            <a:normAutofit/>
+          </a:bodyPr>
+          <a:lstStyle>
+            <a:lvl1pPr marL="0" indent="0">
+              <a:buNone/>
+              <a:defRPr sz="1400"/>
+            </a:lvl1pPr>
+            <a:lvl2pPr marL="457200" indent="0">
+              <a:buNone/>
+              <a:defRPr sz="1200"/>
+            </a:lvl2pPr>
+            <a:lvl3pPr marL="914400" indent="0">
+              <a:buNone/>
+              <a:defRPr sz="1000"/>
+            </a:lvl3pPr>
+            <a:lvl4pPr marL="1371600" indent="0">
+              <a:buNone/>
+              <a:defRPr sz="900"/>
+            </a:lvl4pPr>
+            <a:lvl5pPr marL="1828800" indent="0">
+              <a:buNone/>
+              <a:defRPr sz="900"/>
+            </a:lvl5pPr>
+            <a:lvl6pPr marL="2286000" indent="0">
+              <a:buNone/>
+              <a:defRPr sz="900"/>
+            </a:lvl6pPr>
+            <a:lvl7pPr marL="2743200" indent="0">
+              <a:buNone/>
+              <a:defRPr sz="900"/>
+            </a:lvl7pPr>
+            <a:lvl8pPr marL="3200400" indent="0">
+              <a:buNone/>
+              <a:defRPr sz="900"/>
+            </a:lvl8pPr>
+            <a:lvl9pPr marL="3657600" indent="0">
+              <a:buNone/>
+              <a:defRPr sz="900"/>
+            </a:lvl9pPr>
+          </a:lstStyle>
+          <a:p>
+            <a:pPr lvl="0"/>
+            <a:r>
+              <a:rPr lang="en-US"/>
+              <a:t>Click to edit Master text styles</a:t>
+            </a:r>
+          </a:p>
+        </p:txBody>
+      </p:sp>
+      <p:sp>
+        <p:nvSpPr>
+          <p:cNvPr id="14" name="Text Placeholder 4"/>
+          <p:cNvSpPr>
+            <a:spLocks noGrp="1"/>
+          </p:cNvSpPr>
+          <p:nvPr>
+            <p:ph type="body" sz="quarter" idx="13"/>
+          </p:nvPr>
+        </p:nvSpPr>
+        <p:spPr>
+          <a:xfrm>
+            <a:off x="7124700" y="4250949"/>
+            <a:ext cx="2932113" cy="576262"/>
+          </a:xfrm>
+        </p:spPr>
+        <p:txBody>
+          <a:bodyPr anchor="b">
+            <a:noAutofit/>
+          </a:bodyPr>
+          <a:lstStyle>
+            <a:lvl1pPr marL="0" indent="0">
+              <a:buNone/>
+              <a:defRPr sz="2400" b="0">
+                <a:solidFill>
+                  <a:schemeClr val="bg2">
+                    <a:lumMod val="40000"/>
+                    <a:lumOff val="60000"/>
+                  </a:schemeClr>
+                </a:solidFill>
+              </a:defRPr>
+            </a:lvl1pPr>
+            <a:lvl2pPr marL="457200" indent="0">
+              <a:buNone/>
+              <a:defRPr sz="2000" b="1"/>
+            </a:lvl2pPr>
+            <a:lvl3pPr marL="914400" indent="0">
+              <a:buNone/>
+              <a:defRPr sz="1800" b="1"/>
+            </a:lvl3pPr>
+            <a:lvl4pPr marL="1371600" indent="0">
+              <a:buNone/>
+              <a:defRPr sz="1600" b="1"/>
+            </a:lvl4pPr>
+            <a:lvl5pPr marL="1828800" indent="0">
+              <a:buNone/>
+              <a:defRPr sz="1600" b="1"/>
+            </a:lvl5pPr>
+            <a:lvl6pPr marL="2286000" indent="0">
+              <a:buNone/>
+              <a:defRPr sz="1600" b="1"/>
+            </a:lvl6pPr>
+            <a:lvl7pPr marL="2743200" indent="0">
+              <a:buNone/>
+              <a:defRPr sz="1600" b="1"/>
+            </a:lvl7pPr>
+            <a:lvl8pPr marL="3200400" indent="0">
+              <a:buNone/>
+              <a:defRPr sz="1600" b="1"/>
+            </a:lvl8pPr>
+            <a:lvl9pPr marL="3657600" indent="0">
+              <a:buNone/>
+              <a:defRPr sz="1600" b="1"/>
+            </a:lvl9pPr>
+          </a:lstStyle>
+          <a:p>
+            <a:pPr lvl="0"/>
+            <a:r>
+              <a:rPr lang="en-US"/>
+              <a:t>Click to edit Master text styles</a:t>
+            </a:r>
+          </a:p>
+        </p:txBody>
+      </p:sp>
+      <p:sp>
+        <p:nvSpPr>
+          <p:cNvPr id="31" name="Picture Placeholder 2"/>
+          <p:cNvSpPr>
+            <a:spLocks noGrp="1" noChangeAspect="1"/>
+          </p:cNvSpPr>
+          <p:nvPr>
+            <p:ph type="pic" idx="22"/>
+          </p:nvPr>
+        </p:nvSpPr>
+        <p:spPr>
+          <a:xfrm>
+            <a:off x="7124699" y="2209800"/>
+            <a:ext cx="2932113" cy="1524000"/>
+          </a:xfrm>
+          <a:prstGeom prst="roundRect">
+            <a:avLst>
+              <a:gd name="adj" fmla="val 1858"/>
+            </a:avLst>
+          </a:prstGeom>
+          <a:effectLst>
+            <a:outerShdw blurRad="50800" dist="50800" dir="5400000" algn="tl" rotWithShape="0">
+              <a:srgbClr val="000000">
+                <a:alpha val="43000"/>
+              </a:srgbClr>
+            </a:outerShdw>
+          </a:effectLst>
+        </p:spPr>
+        <p:txBody>
+          <a:bodyPr anchor="t">
+            <a:normAutofit/>
+          </a:bodyPr>
+          <a:lstStyle>
+            <a:lvl1pPr marL="0" indent="0" algn="ctr">
+              <a:buNone/>
+              <a:defRPr sz="1600"/>
+            </a:lvl1pPr>
+            <a:lvl2pPr marL="457200" indent="0">
+              <a:buNone/>
+              <a:defRPr sz="1600"/>
+            </a:lvl2pPr>
+            <a:lvl3pPr marL="914400" indent="0">
+              <a:buNone/>
+              <a:defRPr sz="1600"/>
+            </a:lvl3pPr>
+            <a:lvl4pPr marL="1371600" indent="0">
+              <a:buNone/>
+              <a:defRPr sz="1600"/>
+            </a:lvl4pPr>
+            <a:lvl5pPr marL="1828800" indent="0">
+              <a:buNone/>
+              <a:defRPr sz="1600"/>
+            </a:lvl5pPr>
+            <a:lvl6pPr marL="2286000" indent="0">
+              <a:buNone/>
+              <a:defRPr sz="1600"/>
+            </a:lvl6pPr>
+            <a:lvl7pPr marL="2743200" indent="0">
+              <a:buNone/>
+              <a:defRPr sz="1600"/>
+            </a:lvl7pPr>
+            <a:lvl8pPr marL="3200400" indent="0">
+              <a:buNone/>
+              <a:defRPr sz="1600"/>
+            </a:lvl8pPr>
+            <a:lvl9pPr marL="3657600" indent="0">
+              <a:buNone/>
+              <a:defRPr sz="1600"/>
+            </a:lvl9pPr>
+          </a:lstStyle>
+          <a:p>
+            <a:r>
+              <a:rPr lang="en-US"/>
+              <a:t>Click icon to add picture</a:t>
+            </a:r>
+            <a:endParaRPr lang="en-US" dirty="0"/>
+          </a:p>
+        </p:txBody>
+      </p:sp>
+      <p:sp>
+        <p:nvSpPr>
+          <p:cNvPr id="24" name="Text Placeholder 3"/>
+          <p:cNvSpPr>
+            <a:spLocks noGrp="1"/>
+          </p:cNvSpPr>
+          <p:nvPr>
+            <p:ph type="body" sz="half" idx="20"/>
+          </p:nvPr>
+        </p:nvSpPr>
+        <p:spPr>
+          <a:xfrm>
+            <a:off x="7124575" y="4827208"/>
+            <a:ext cx="2935997" cy="659189"/>
+          </a:xfrm>
+        </p:spPr>
+        <p:txBody>
+          <a:bodyPr anchor="t">
+            <a:normAutofit/>
+          </a:bodyPr>
+          <a:lstStyle>
+            <a:lvl1pPr marL="0" indent="0">
+              <a:buNone/>
+              <a:defRPr sz="1400"/>
+            </a:lvl1pPr>
+            <a:lvl2pPr marL="457200" indent="0">
+              <a:buNone/>
+              <a:defRPr sz="1200"/>
+            </a:lvl2pPr>
+            <a:lvl3pPr marL="914400" indent="0">
+              <a:buNone/>
+              <a:defRPr sz="1000"/>
+            </a:lvl3pPr>
+            <a:lvl4pPr marL="1371600" indent="0">
+              <a:buNone/>
+              <a:defRPr sz="900"/>
+            </a:lvl4pPr>
+            <a:lvl5pPr marL="1828800" indent="0">
+              <a:buNone/>
+              <a:defRPr sz="900"/>
+            </a:lvl5pPr>
+            <a:lvl6pPr marL="2286000" indent="0">
+              <a:buNone/>
+              <a:defRPr sz="900"/>
+            </a:lvl6pPr>
+            <a:lvl7pPr marL="2743200" indent="0">
+              <a:buNone/>
+              <a:defRPr sz="900"/>
+            </a:lvl7pPr>
+            <a:lvl8pPr marL="3200400" indent="0">
+              <a:buNone/>
+              <a:defRPr sz="900"/>
+            </a:lvl8pPr>
+            <a:lvl9pPr marL="3657600" indent="0">
+              <a:buNone/>
+              <a:defRPr sz="900"/>
+            </a:lvl9pPr>
+          </a:lstStyle>
+          <a:p>
+            <a:pPr lvl="0"/>
+            <a:r>
+              <a:rPr lang="en-US"/>
+              <a:t>Click to edit Master text styles</a:t>
+            </a:r>
+          </a:p>
+        </p:txBody>
+      </p:sp>
+      <p:cxnSp>
+        <p:nvCxnSpPr>
+          <p:cNvPr id="19" name="Straight Connector 18"/>
+          <p:cNvCxnSpPr/>
+          <p:nvPr/>
+        </p:nvCxnSpPr>
+        <p:spPr>
+          <a:xfrm>
+            <a:off x="3726142" y="2133600"/>
+            <a:ext cx="0" cy="3962400"/>
+          </a:xfrm>
+          <a:prstGeom prst="line">
+            <a:avLst/>
+          </a:prstGeom>
+          <a:ln w="12700" cmpd="sng">
+            <a:solidFill>
+              <a:schemeClr val="bg2">
+                <a:lumMod val="40000"/>
+                <a:lumOff val="60000"/>
+                <a:alpha val="40000"/>
+              </a:schemeClr>
+            </a:solidFill>
+          </a:ln>
+        </p:spPr>
+        <p:style>
+          <a:lnRef idx="2">
+            <a:schemeClr val="accent1"/>
+          </a:lnRef>
+          <a:fillRef idx="0">
+            <a:schemeClr val="accent1"/>
+          </a:fillRef>
+          <a:effectRef idx="1">
+            <a:schemeClr val="accent1"/>
+          </a:effectRef>
+          <a:fontRef idx="minor">
+            <a:schemeClr val="tx1"/>
+          </a:fontRef>
+        </p:style>
+      </p:cxnSp>
+      <p:cxnSp>
+        <p:nvCxnSpPr>
+          <p:cNvPr id="20" name="Straight Connector 19"/>
+          <p:cNvCxnSpPr/>
+          <p:nvPr/>
+        </p:nvCxnSpPr>
+        <p:spPr>
+          <a:xfrm>
+            <a:off x="6962227" y="2133600"/>
+            <a:ext cx="0" cy="3966882"/>
+          </a:xfrm>
+          <a:prstGeom prst="line">
+            <a:avLst/>
+          </a:prstGeom>
+          <a:ln w="12700" cmpd="sng">
+            <a:solidFill>
+              <a:schemeClr val="bg2">
+                <a:lumMod val="40000"/>
+                <a:lumOff val="60000"/>
+                <a:alpha val="40000"/>
+              </a:schemeClr>
+            </a:solidFill>
+          </a:ln>
+        </p:spPr>
+        <p:style>
+          <a:lnRef idx="2">
+            <a:schemeClr val="accent1"/>
+          </a:lnRef>
+          <a:fillRef idx="0">
+            <a:schemeClr val="accent1"/>
+          </a:fillRef>
+          <a:effectRef idx="1">
+            <a:schemeClr val="accent1"/>
+          </a:effectRef>
+          <a:fontRef idx="minor">
+            <a:schemeClr val="tx1"/>
+          </a:fontRef>
+        </p:style>
+      </p:cxnSp>
+      <p:sp>
+        <p:nvSpPr>
+          <p:cNvPr id="7" name="Date Placeholder 3"/>
+          <p:cNvSpPr>
+            <a:spLocks noGrp="1"/>
+          </p:cNvSpPr>
+          <p:nvPr>
+            <p:ph type="dt" sz="half" idx="10"/>
+          </p:nvPr>
+        </p:nvSpPr>
+        <p:spPr/>
+        <p:txBody>
+          <a:bodyPr/>
+          <a:lstStyle/>
+          <a:p>
+            <a:fld id="{658E1C9A-47F7-4494-B9B8-0D060B88ACB1}" type="datetimeFigureOut">
+              <a:rPr lang="en-US" smtClean="0"/>
+              <a:t>8/17/2026</a:t>
+            </a:fld>
+            <a:endParaRPr lang="en-US"/>
+          </a:p>
+        </p:txBody>
+      </p:sp>
+      <p:sp>
+        <p:nvSpPr>
+          <p:cNvPr id="4" name="Footer Placeholder 4"/>
+          <p:cNvSpPr>
+            <a:spLocks noGrp="1"/>
+          </p:cNvSpPr>
+          <p:nvPr>
+            <p:ph type="ftr" sz="quarter" idx="11"/>
+          </p:nvPr>
+        </p:nvSpPr>
+        <p:spPr/>
+        <p:txBody>
+          <a:bodyPr/>
+          <a:lstStyle/>
+          <a:p>
+            <a:endParaRPr lang="en-US"/>
+          </a:p>
+        </p:txBody>
+      </p:sp>
+      <p:sp>
+        <p:nvSpPr>
+          <p:cNvPr id="6" name="Slide Number Placeholder 5"/>
+          <p:cNvSpPr>
+            <a:spLocks noGrp="1"/>
+          </p:cNvSpPr>
+          <p:nvPr>
+            <p:ph type="sldNum" sz="quarter" idx="12"/>
+          </p:nvPr>
+        </p:nvSpPr>
+        <p:spPr/>
+        <p:txBody>
+          <a:bodyPr/>
+          <a:lstStyle/>
+          <a:p>
+            <a:fld id="{A2521D86-E9AE-4904-807B-12096BA8753D}" type="slidenum">
+              <a:rPr lang="en-US" smtClean="0"/>
+              <a:t>‹#›</a:t>
+            </a:fld>
+            <a:endParaRPr lang="en-US"/>
+          </a:p>
+        </p:txBody>
+      </p:sp>
+    </p:spTree>
+    <p:extLst>
+      <p:ext uri="{BB962C8B-B14F-4D97-AF65-F5344CB8AC3E}">
+        <p14:creationId xmlns:p14="http://schemas.microsoft.com/office/powerpoint/2010/main" val="878204887"/>
+      </p:ext>
+    </p:extLst>
+  </p:cSld>
+  <p:clrMapOvr>
+    <a:masterClrMapping/>
+  </p:clrMapOvr>
+</p:sldLayout>
+</file>
+
+<file path=ppt/slideLayouts/slideLayout16.xml><?xml version="1.0" encoding="utf-8"?>
 <p:sldLayout xmlns:a="http://schemas.openxmlformats.org/drawingml/2006/main" xmlns:r="http://schemas.openxmlformats.org/officeDocument/2006/relationships" xmlns:p="http://schemas.openxmlformats.org/presentationml/2006/main" type="vertTx" preserve="1">
   <p:cSld name="Title and Vertical Text">
     <p:spTree>
@@ -352,13 +2955,7 @@
       </p:grpSpPr>
       <p:sp>
         <p:nvSpPr>
-          <p:cNvPr id="2" name="Title 1">
-            <a:extLst>
-              <a:ext uri="{FF2B5EF4-FFF2-40B4-BE49-F238E27FC236}">
-                <a16:creationId xmlns:a16="http://schemas.microsoft.com/office/drawing/2014/main" id="{1D8C65BD-D80D-D2BA-AE45-0BFBBD57ECBE}"/>
-              </a:ext>
-            </a:extLst>
-          </p:cNvPr>
+          <p:cNvPr id="2" name="Title 1"/>
           <p:cNvSpPr>
             <a:spLocks noGrp="1"/>
           </p:cNvSpPr>
@@ -375,18 +2972,13 @@
               <a:rPr lang="en-US"/>
               <a:t>Click to edit Master title style</a:t>
             </a:r>
-          </a:p>
-        </p:txBody>
-      </p:sp>
-      <p:sp>
-        <p:nvSpPr>
-          <p:cNvPr id="3" name="Vertical Text Placeholder 2">
-            <a:extLst>
-              <a:ext uri="{FF2B5EF4-FFF2-40B4-BE49-F238E27FC236}">
-                <a16:creationId xmlns:a16="http://schemas.microsoft.com/office/drawing/2014/main" id="{EDE759B5-DAE5-D95C-C882-DB79E27EDFE0}"/>
-              </a:ext>
-            </a:extLst>
-          </p:cNvPr>
+            <a:endParaRPr lang="en-US" dirty="0"/>
+          </a:p>
+        </p:txBody>
+      </p:sp>
+      <p:sp>
+        <p:nvSpPr>
+          <p:cNvPr id="3" name="Vertical Text Placeholder 2"/>
           <p:cNvSpPr>
             <a:spLocks noGrp="1"/>
           </p:cNvSpPr>
@@ -396,7 +2988,7 @@
         </p:nvSpPr>
         <p:spPr/>
         <p:txBody>
-          <a:bodyPr vert="eaVert"/>
+          <a:bodyPr vert="eaVert" anchor="t" anchorCtr="0"/>
           <a:lstStyle/>
           <a:p>
             <a:pPr lvl="0"/>
@@ -432,18 +3024,13 @@
               <a:rPr lang="en-US"/>
               <a:t>Fifth level</a:t>
             </a:r>
-          </a:p>
-        </p:txBody>
-      </p:sp>
-      <p:sp>
-        <p:nvSpPr>
-          <p:cNvPr id="4" name="Date Placeholder 3">
-            <a:extLst>
-              <a:ext uri="{FF2B5EF4-FFF2-40B4-BE49-F238E27FC236}">
-                <a16:creationId xmlns:a16="http://schemas.microsoft.com/office/drawing/2014/main" id="{69388543-0721-7351-1F66-61059BBAFDE1}"/>
-              </a:ext>
-            </a:extLst>
-          </p:cNvPr>
+            <a:endParaRPr lang="en-US" dirty="0"/>
+          </a:p>
+        </p:txBody>
+      </p:sp>
+      <p:sp>
+        <p:nvSpPr>
+          <p:cNvPr id="4" name="Date Placeholder 3"/>
           <p:cNvSpPr>
             <a:spLocks noGrp="1"/>
           </p:cNvSpPr>
@@ -466,13 +3053,7 @@
       </p:sp>
       <p:sp>
         <p:nvSpPr>
-          <p:cNvPr id="5" name="Footer Placeholder 4">
-            <a:extLst>
-              <a:ext uri="{FF2B5EF4-FFF2-40B4-BE49-F238E27FC236}">
-                <a16:creationId xmlns:a16="http://schemas.microsoft.com/office/drawing/2014/main" id="{CE6B4B82-0AA0-886B-79BE-6F11A9AC8022}"/>
-              </a:ext>
-            </a:extLst>
-          </p:cNvPr>
+          <p:cNvPr id="5" name="Footer Placeholder 4"/>
           <p:cNvSpPr>
             <a:spLocks noGrp="1"/>
           </p:cNvSpPr>
@@ -491,13 +3072,7 @@
       </p:sp>
       <p:sp>
         <p:nvSpPr>
-          <p:cNvPr id="6" name="Slide Number Placeholder 5">
-            <a:extLst>
-              <a:ext uri="{FF2B5EF4-FFF2-40B4-BE49-F238E27FC236}">
-                <a16:creationId xmlns:a16="http://schemas.microsoft.com/office/drawing/2014/main" id="{1C5C0EE1-62E1-8B7B-B783-CFEBFA9C1422}"/>
-              </a:ext>
-            </a:extLst>
-          </p:cNvPr>
+          <p:cNvPr id="6" name="Slide Number Placeholder 5"/>
           <p:cNvSpPr>
             <a:spLocks noGrp="1"/>
           </p:cNvSpPr>
@@ -521,7 +3096,7 @@
     </p:spTree>
     <p:extLst>
       <p:ext uri="{BB962C8B-B14F-4D97-AF65-F5344CB8AC3E}">
-        <p14:creationId xmlns:p14="http://schemas.microsoft.com/office/powerpoint/2010/main" val="3915798780"/>
+        <p14:creationId xmlns:p14="http://schemas.microsoft.com/office/powerpoint/2010/main" val="3201531149"/>
       </p:ext>
     </p:extLst>
   </p:cSld>
@@ -531,7 +3106,7 @@
 </p:sldLayout>
 </file>
 
-<file path=ppt/slideLayouts/slideLayout11.xml><?xml version="1.0" encoding="utf-8"?>
+<file path=ppt/slideLayouts/slideLayout17.xml><?xml version="1.0" encoding="utf-8"?>
 <p:sldLayout xmlns:a="http://schemas.openxmlformats.org/drawingml/2006/main" xmlns:r="http://schemas.openxmlformats.org/officeDocument/2006/relationships" xmlns:p="http://schemas.openxmlformats.org/presentationml/2006/main" type="vertTitleAndTx" preserve="1">
   <p:cSld name="Vertical Title and Text">
     <p:spTree>
@@ -550,13 +3125,7 @@
       </p:grpSpPr>
       <p:sp>
         <p:nvSpPr>
-          <p:cNvPr id="2" name="Vertical Title 1">
-            <a:extLst>
-              <a:ext uri="{FF2B5EF4-FFF2-40B4-BE49-F238E27FC236}">
-                <a16:creationId xmlns:a16="http://schemas.microsoft.com/office/drawing/2014/main" id="{4BFFC21C-B3C0-A4B1-31F2-09132A6F44FF}"/>
-              </a:ext>
-            </a:extLst>
-          </p:cNvPr>
+          <p:cNvPr id="2" name="Vertical Title 1"/>
           <p:cNvSpPr>
             <a:spLocks noGrp="1"/>
           </p:cNvSpPr>
@@ -566,30 +3135,25 @@
         </p:nvSpPr>
         <p:spPr>
           <a:xfrm>
-            <a:off x="8724900" y="365125"/>
-            <a:ext cx="2628900" cy="5811838"/>
-          </a:xfrm>
-        </p:spPr>
-        <p:txBody>
-          <a:bodyPr vert="eaVert"/>
+            <a:off x="8304212" y="430213"/>
+            <a:ext cx="1752601" cy="5826125"/>
+          </a:xfrm>
+        </p:spPr>
+        <p:txBody>
+          <a:bodyPr vert="eaVert" anchor="b" anchorCtr="0"/>
           <a:lstStyle/>
           <a:p>
             <a:r>
               <a:rPr lang="en-US"/>
               <a:t>Click to edit Master title style</a:t>
             </a:r>
-          </a:p>
-        </p:txBody>
-      </p:sp>
-      <p:sp>
-        <p:nvSpPr>
-          <p:cNvPr id="3" name="Vertical Text Placeholder 2">
-            <a:extLst>
-              <a:ext uri="{FF2B5EF4-FFF2-40B4-BE49-F238E27FC236}">
-                <a16:creationId xmlns:a16="http://schemas.microsoft.com/office/drawing/2014/main" id="{8899214F-746E-9EB9-52F1-E2F80A0F01AF}"/>
-              </a:ext>
-            </a:extLst>
-          </p:cNvPr>
+            <a:endParaRPr lang="en-US" dirty="0"/>
+          </a:p>
+        </p:txBody>
+      </p:sp>
+      <p:sp>
+        <p:nvSpPr>
+          <p:cNvPr id="3" name="Vertical Text Placeholder 2"/>
           <p:cNvSpPr>
             <a:spLocks noGrp="1"/>
           </p:cNvSpPr>
@@ -599,8 +3163,8 @@
         </p:nvSpPr>
         <p:spPr>
           <a:xfrm>
-            <a:off x="838200" y="365125"/>
-            <a:ext cx="7734300" cy="5811838"/>
+            <a:off x="652463" y="887414"/>
+            <a:ext cx="7423149" cy="5368924"/>
           </a:xfrm>
         </p:spPr>
         <p:txBody>
@@ -640,18 +3204,13 @@
               <a:rPr lang="en-US"/>
               <a:t>Fifth level</a:t>
             </a:r>
-          </a:p>
-        </p:txBody>
-      </p:sp>
-      <p:sp>
-        <p:nvSpPr>
-          <p:cNvPr id="4" name="Date Placeholder 3">
-            <a:extLst>
-              <a:ext uri="{FF2B5EF4-FFF2-40B4-BE49-F238E27FC236}">
-                <a16:creationId xmlns:a16="http://schemas.microsoft.com/office/drawing/2014/main" id="{44FFC64B-78F5-B6CD-0D80-017E35150A3A}"/>
-              </a:ext>
-            </a:extLst>
-          </p:cNvPr>
+            <a:endParaRPr lang="en-US" dirty="0"/>
+          </a:p>
+        </p:txBody>
+      </p:sp>
+      <p:sp>
+        <p:nvSpPr>
+          <p:cNvPr id="4" name="Date Placeholder 3"/>
           <p:cNvSpPr>
             <a:spLocks noGrp="1"/>
           </p:cNvSpPr>
@@ -674,13 +3233,7 @@
       </p:sp>
       <p:sp>
         <p:nvSpPr>
-          <p:cNvPr id="5" name="Footer Placeholder 4">
-            <a:extLst>
-              <a:ext uri="{FF2B5EF4-FFF2-40B4-BE49-F238E27FC236}">
-                <a16:creationId xmlns:a16="http://schemas.microsoft.com/office/drawing/2014/main" id="{FD5A0286-7D21-F6AA-082D-FD942E117973}"/>
-              </a:ext>
-            </a:extLst>
-          </p:cNvPr>
+          <p:cNvPr id="5" name="Footer Placeholder 4"/>
           <p:cNvSpPr>
             <a:spLocks noGrp="1"/>
           </p:cNvSpPr>
@@ -699,13 +3252,7 @@
       </p:sp>
       <p:sp>
         <p:nvSpPr>
-          <p:cNvPr id="6" name="Slide Number Placeholder 5">
-            <a:extLst>
-              <a:ext uri="{FF2B5EF4-FFF2-40B4-BE49-F238E27FC236}">
-                <a16:creationId xmlns:a16="http://schemas.microsoft.com/office/drawing/2014/main" id="{EA2DBF15-DE9E-45A0-C8B7-33CF058E361A}"/>
-              </a:ext>
-            </a:extLst>
-          </p:cNvPr>
+          <p:cNvPr id="6" name="Slide Number Placeholder 5"/>
           <p:cNvSpPr>
             <a:spLocks noGrp="1"/>
           </p:cNvSpPr>
@@ -729,7 +3276,7 @@
     </p:spTree>
     <p:extLst>
       <p:ext uri="{BB962C8B-B14F-4D97-AF65-F5344CB8AC3E}">
-        <p14:creationId xmlns:p14="http://schemas.microsoft.com/office/powerpoint/2010/main" val="1779036040"/>
+        <p14:creationId xmlns:p14="http://schemas.microsoft.com/office/powerpoint/2010/main" val="585869521"/>
       </p:ext>
     </p:extLst>
   </p:cSld>
@@ -758,13 +3305,7 @@
       </p:grpSpPr>
       <p:sp>
         <p:nvSpPr>
-          <p:cNvPr id="2" name="Title 1">
-            <a:extLst>
-              <a:ext uri="{FF2B5EF4-FFF2-40B4-BE49-F238E27FC236}">
-                <a16:creationId xmlns:a16="http://schemas.microsoft.com/office/drawing/2014/main" id="{53106DF4-5BDA-D9C5-9B0D-2E2A1118E654}"/>
-              </a:ext>
-            </a:extLst>
-          </p:cNvPr>
+          <p:cNvPr id="2" name="Title 1"/>
           <p:cNvSpPr>
             <a:spLocks noGrp="1"/>
           </p:cNvSpPr>
@@ -781,18 +3322,13 @@
               <a:rPr lang="en-US"/>
               <a:t>Click to edit Master title style</a:t>
             </a:r>
-          </a:p>
-        </p:txBody>
-      </p:sp>
-      <p:sp>
-        <p:nvSpPr>
-          <p:cNvPr id="3" name="Content Placeholder 2">
-            <a:extLst>
-              <a:ext uri="{FF2B5EF4-FFF2-40B4-BE49-F238E27FC236}">
-                <a16:creationId xmlns:a16="http://schemas.microsoft.com/office/drawing/2014/main" id="{A93AB481-3FA8-591A-9073-51F459EBAB7D}"/>
-              </a:ext>
-            </a:extLst>
-          </p:cNvPr>
+            <a:endParaRPr lang="en-US" dirty="0"/>
+          </a:p>
+        </p:txBody>
+      </p:sp>
+      <p:sp>
+        <p:nvSpPr>
+          <p:cNvPr id="3" name="Content Placeholder 2"/>
           <p:cNvSpPr>
             <a:spLocks noGrp="1"/>
           </p:cNvSpPr>
@@ -838,18 +3374,13 @@
               <a:rPr lang="en-US"/>
               <a:t>Fifth level</a:t>
             </a:r>
-          </a:p>
-        </p:txBody>
-      </p:sp>
-      <p:sp>
-        <p:nvSpPr>
-          <p:cNvPr id="4" name="Date Placeholder 3">
-            <a:extLst>
-              <a:ext uri="{FF2B5EF4-FFF2-40B4-BE49-F238E27FC236}">
-                <a16:creationId xmlns:a16="http://schemas.microsoft.com/office/drawing/2014/main" id="{8EBE3296-B89E-62C9-C29E-6B74FC357F4F}"/>
-              </a:ext>
-            </a:extLst>
-          </p:cNvPr>
+            <a:endParaRPr lang="en-US" dirty="0"/>
+          </a:p>
+        </p:txBody>
+      </p:sp>
+      <p:sp>
+        <p:nvSpPr>
+          <p:cNvPr id="7" name="Date Placeholder 3"/>
           <p:cNvSpPr>
             <a:spLocks noGrp="1"/>
           </p:cNvSpPr>
@@ -872,13 +3403,7 @@
       </p:sp>
       <p:sp>
         <p:nvSpPr>
-          <p:cNvPr id="5" name="Footer Placeholder 4">
-            <a:extLst>
-              <a:ext uri="{FF2B5EF4-FFF2-40B4-BE49-F238E27FC236}">
-                <a16:creationId xmlns:a16="http://schemas.microsoft.com/office/drawing/2014/main" id="{E94C0828-0C76-4488-E037-49C36BF7EBC7}"/>
-              </a:ext>
-            </a:extLst>
-          </p:cNvPr>
+          <p:cNvPr id="5" name="Footer Placeholder 4"/>
           <p:cNvSpPr>
             <a:spLocks noGrp="1"/>
           </p:cNvSpPr>
@@ -897,13 +3422,7 @@
       </p:sp>
       <p:sp>
         <p:nvSpPr>
-          <p:cNvPr id="6" name="Slide Number Placeholder 5">
-            <a:extLst>
-              <a:ext uri="{FF2B5EF4-FFF2-40B4-BE49-F238E27FC236}">
-                <a16:creationId xmlns:a16="http://schemas.microsoft.com/office/drawing/2014/main" id="{910BAF51-C459-C3F8-BFE6-A7C9A29F7200}"/>
-              </a:ext>
-            </a:extLst>
-          </p:cNvPr>
+          <p:cNvPr id="6" name="Slide Number Placeholder 5"/>
           <p:cNvSpPr>
             <a:spLocks noGrp="1"/>
           </p:cNvSpPr>
@@ -927,7 +3446,7 @@
     </p:spTree>
     <p:extLst>
       <p:ext uri="{BB962C8B-B14F-4D97-AF65-F5344CB8AC3E}">
-        <p14:creationId xmlns:p14="http://schemas.microsoft.com/office/powerpoint/2010/main" val="3272230159"/>
+        <p14:creationId xmlns:p14="http://schemas.microsoft.com/office/powerpoint/2010/main" val="2681166387"/>
       </p:ext>
     </p:extLst>
   </p:cSld>
@@ -956,13 +3475,7 @@
       </p:grpSpPr>
       <p:sp>
         <p:nvSpPr>
-          <p:cNvPr id="2" name="Title 1">
-            <a:extLst>
-              <a:ext uri="{FF2B5EF4-FFF2-40B4-BE49-F238E27FC236}">
-                <a16:creationId xmlns:a16="http://schemas.microsoft.com/office/drawing/2014/main" id="{55C7F320-ED06-9F33-6319-1DFE5393A5B9}"/>
-              </a:ext>
-            </a:extLst>
-          </p:cNvPr>
+          <p:cNvPr id="2" name="Title 1"/>
           <p:cNvSpPr>
             <a:spLocks noGrp="1"/>
           </p:cNvSpPr>
@@ -972,15 +3485,15 @@
         </p:nvSpPr>
         <p:spPr>
           <a:xfrm>
-            <a:off x="831850" y="1709738"/>
-            <a:ext cx="10515600" cy="2852737"/>
+            <a:off x="1154956" y="2861733"/>
+            <a:ext cx="8825657" cy="1915647"/>
           </a:xfrm>
         </p:spPr>
         <p:txBody>
           <a:bodyPr anchor="b"/>
           <a:lstStyle>
-            <a:lvl1pPr>
-              <a:defRPr sz="6000"/>
+            <a:lvl1pPr algn="l">
+              <a:defRPr sz="4000" b="0" cap="none"/>
             </a:lvl1pPr>
           </a:lstStyle>
           <a:p>
@@ -988,18 +3501,13 @@
               <a:rPr lang="en-US"/>
               <a:t>Click to edit Master title style</a:t>
             </a:r>
-          </a:p>
-        </p:txBody>
-      </p:sp>
-      <p:sp>
-        <p:nvSpPr>
-          <p:cNvPr id="3" name="Text Placeholder 2">
-            <a:extLst>
-              <a:ext uri="{FF2B5EF4-FFF2-40B4-BE49-F238E27FC236}">
-                <a16:creationId xmlns:a16="http://schemas.microsoft.com/office/drawing/2014/main" id="{9598AAA1-0FED-F37F-7EE4-BE544F1119A0}"/>
-              </a:ext>
-            </a:extLst>
-          </p:cNvPr>
+            <a:endParaRPr lang="en-US" dirty="0"/>
+          </a:p>
+        </p:txBody>
+      </p:sp>
+      <p:sp>
+        <p:nvSpPr>
+          <p:cNvPr id="3" name="Text Placeholder 2"/>
           <p:cNvSpPr>
             <a:spLocks noGrp="1"/>
           </p:cNvSpPr>
@@ -1009,99 +3517,100 @@
         </p:nvSpPr>
         <p:spPr>
           <a:xfrm>
-            <a:off x="831850" y="4589463"/>
-            <a:ext cx="10515600" cy="1500187"/>
-          </a:xfrm>
-        </p:spPr>
-        <p:txBody>
-          <a:bodyPr/>
+            <a:off x="1154955" y="4777381"/>
+            <a:ext cx="8825658" cy="860400"/>
+          </a:xfrm>
+        </p:spPr>
+        <p:txBody>
+          <a:bodyPr anchor="t"/>
           <a:lstStyle>
-            <a:lvl1pPr marL="0" indent="0">
-              <a:buNone/>
-              <a:defRPr sz="2400">
+            <a:lvl1pPr marL="0" indent="0" algn="l">
+              <a:buNone/>
+              <a:defRPr sz="2000" cap="all">
                 <a:solidFill>
-                  <a:schemeClr val="tx1">
-                    <a:tint val="82000"/>
+                  <a:schemeClr val="bg2">
+                    <a:lumMod val="40000"/>
+                    <a:lumOff val="60000"/>
                   </a:schemeClr>
                 </a:solidFill>
               </a:defRPr>
             </a:lvl1pPr>
             <a:lvl2pPr marL="457200" indent="0">
               <a:buNone/>
-              <a:defRPr sz="2000">
+              <a:defRPr sz="1800">
                 <a:solidFill>
                   <a:schemeClr val="tx1">
-                    <a:tint val="82000"/>
+                    <a:tint val="75000"/>
                   </a:schemeClr>
                 </a:solidFill>
               </a:defRPr>
             </a:lvl2pPr>
             <a:lvl3pPr marL="914400" indent="0">
               <a:buNone/>
-              <a:defRPr sz="1800">
+              <a:defRPr sz="1600">
                 <a:solidFill>
                   <a:schemeClr val="tx1">
-                    <a:tint val="82000"/>
+                    <a:tint val="75000"/>
                   </a:schemeClr>
                 </a:solidFill>
               </a:defRPr>
             </a:lvl3pPr>
             <a:lvl4pPr marL="1371600" indent="0">
               <a:buNone/>
-              <a:defRPr sz="1600">
+              <a:defRPr sz="1400">
                 <a:solidFill>
                   <a:schemeClr val="tx1">
-                    <a:tint val="82000"/>
+                    <a:tint val="75000"/>
                   </a:schemeClr>
                 </a:solidFill>
               </a:defRPr>
             </a:lvl4pPr>
             <a:lvl5pPr marL="1828800" indent="0">
               <a:buNone/>
-              <a:defRPr sz="1600">
+              <a:defRPr sz="1400">
                 <a:solidFill>
                   <a:schemeClr val="tx1">
-                    <a:tint val="82000"/>
+                    <a:tint val="75000"/>
                   </a:schemeClr>
                 </a:solidFill>
               </a:defRPr>
             </a:lvl5pPr>
             <a:lvl6pPr marL="2286000" indent="0">
               <a:buNone/>
-              <a:defRPr sz="1600">
+              <a:defRPr sz="1400">
                 <a:solidFill>
                   <a:schemeClr val="tx1">
-                    <a:tint val="82000"/>
+                    <a:tint val="75000"/>
                   </a:schemeClr>
                 </a:solidFill>
               </a:defRPr>
             </a:lvl6pPr>
             <a:lvl7pPr marL="2743200" indent="0">
               <a:buNone/>
-              <a:defRPr sz="1600">
+              <a:defRPr sz="1400">
                 <a:solidFill>
                   <a:schemeClr val="tx1">
-                    <a:tint val="82000"/>
+                    <a:tint val="75000"/>
                   </a:schemeClr>
                 </a:solidFill>
               </a:defRPr>
             </a:lvl7pPr>
             <a:lvl8pPr marL="3200400" indent="0">
               <a:buNone/>
-              <a:defRPr sz="1600">
+              <a:defRPr sz="1400">
                 <a:solidFill>
                   <a:schemeClr val="tx1">
-                    <a:tint val="82000"/>
+                    <a:tint val="75000"/>
                   </a:schemeClr>
                 </a:solidFill>
               </a:defRPr>
             </a:lvl8pPr>
             <a:lvl9pPr marL="3657600" indent="0">
               <a:buNone/>
-              <a:defRPr sz="1600">
+              <a:defRPr sz="1400">
                 <a:solidFill>
                   <a:schemeClr val="tx1">
-                    <a:tint val="82000"/>
+                    <a:tint val="75000"/>
                   </a:schemeClr>
                 </a:solidFill>
               </a:defRPr>
@@ -1118,13 +3627,7 @@
       </p:sp>
       <p:sp>
         <p:nvSpPr>
-          <p:cNvPr id="4" name="Date Placeholder 3">
-            <a:extLst>
-              <a:ext uri="{FF2B5EF4-FFF2-40B4-BE49-F238E27FC236}">
-                <a16:creationId xmlns:a16="http://schemas.microsoft.com/office/drawing/2014/main" id="{BE0A0D47-D8CB-D6C0-E060-32A319C23586}"/>
-              </a:ext>
-            </a:extLst>
-          </p:cNvPr>
+          <p:cNvPr id="4" name="Date Placeholder 3"/>
           <p:cNvSpPr>
             <a:spLocks noGrp="1"/>
           </p:cNvSpPr>
@@ -1147,13 +3650,7 @@
       </p:sp>
       <p:sp>
         <p:nvSpPr>
-          <p:cNvPr id="5" name="Footer Placeholder 4">
-            <a:extLst>
-              <a:ext uri="{FF2B5EF4-FFF2-40B4-BE49-F238E27FC236}">
-                <a16:creationId xmlns:a16="http://schemas.microsoft.com/office/drawing/2014/main" id="{0B69AF7B-526F-DF14-0C6F-50025A8E169D}"/>
-              </a:ext>
-            </a:extLst>
-          </p:cNvPr>
+          <p:cNvPr id="5" name="Footer Placeholder 4"/>
           <p:cNvSpPr>
             <a:spLocks noGrp="1"/>
           </p:cNvSpPr>
@@ -1172,13 +3669,7 @@
       </p:sp>
       <p:sp>
         <p:nvSpPr>
-          <p:cNvPr id="6" name="Slide Number Placeholder 5">
-            <a:extLst>
-              <a:ext uri="{FF2B5EF4-FFF2-40B4-BE49-F238E27FC236}">
-                <a16:creationId xmlns:a16="http://schemas.microsoft.com/office/drawing/2014/main" id="{9A8E789B-F355-69E9-7A62-BB243B8F635E}"/>
-              </a:ext>
-            </a:extLst>
-          </p:cNvPr>
+          <p:cNvPr id="6" name="Slide Number Placeholder 5"/>
           <p:cNvSpPr>
             <a:spLocks noGrp="1"/>
           </p:cNvSpPr>
@@ -1202,7 +3693,7 @@
     </p:spTree>
     <p:extLst>
       <p:ext uri="{BB962C8B-B14F-4D97-AF65-F5344CB8AC3E}">
-        <p14:creationId xmlns:p14="http://schemas.microsoft.com/office/powerpoint/2010/main" val="1401657685"/>
+        <p14:creationId xmlns:p14="http://schemas.microsoft.com/office/powerpoint/2010/main" val="2645587353"/>
       </p:ext>
     </p:extLst>
   </p:cSld>
@@ -1231,13 +3722,7 @@
       </p:grpSpPr>
       <p:sp>
         <p:nvSpPr>
-          <p:cNvPr id="2" name="Title 1">
-            <a:extLst>
-              <a:ext uri="{FF2B5EF4-FFF2-40B4-BE49-F238E27FC236}">
-                <a16:creationId xmlns:a16="http://schemas.microsoft.com/office/drawing/2014/main" id="{A09DF826-D800-8B3B-B1DB-6E74F8E98B7A}"/>
-              </a:ext>
-            </a:extLst>
-          </p:cNvPr>
+          <p:cNvPr id="2" name="Title 1"/>
           <p:cNvSpPr>
             <a:spLocks noGrp="1"/>
           </p:cNvSpPr>
@@ -1254,18 +3739,13 @@
               <a:rPr lang="en-US"/>
               <a:t>Click to edit Master title style</a:t>
             </a:r>
-          </a:p>
-        </p:txBody>
-      </p:sp>
-      <p:sp>
-        <p:nvSpPr>
-          <p:cNvPr id="3" name="Content Placeholder 2">
-            <a:extLst>
-              <a:ext uri="{FF2B5EF4-FFF2-40B4-BE49-F238E27FC236}">
-                <a16:creationId xmlns:a16="http://schemas.microsoft.com/office/drawing/2014/main" id="{92174DFA-F187-F7B9-ECEF-665CBD0B5564}"/>
-              </a:ext>
-            </a:extLst>
-          </p:cNvPr>
+            <a:endParaRPr lang="en-US" dirty="0"/>
+          </a:p>
+        </p:txBody>
+      </p:sp>
+      <p:sp>
+        <p:nvSpPr>
+          <p:cNvPr id="3" name="Content Placeholder 2"/>
           <p:cNvSpPr>
             <a:spLocks noGrp="1"/>
           </p:cNvSpPr>
@@ -1275,13 +3755,43 @@
         </p:nvSpPr>
         <p:spPr>
           <a:xfrm>
-            <a:off x="838200" y="1825625"/>
-            <a:ext cx="5181600" cy="4351338"/>
-          </a:xfrm>
-        </p:spPr>
-        <p:txBody>
-          <a:bodyPr/>
-          <a:lstStyle/>
+            <a:off x="1103312" y="2060575"/>
+            <a:ext cx="4396339" cy="4195763"/>
+          </a:xfrm>
+        </p:spPr>
+        <p:txBody>
+          <a:bodyPr>
+            <a:normAutofit/>
+          </a:bodyPr>
+          <a:lstStyle>
+            <a:lvl1pPr>
+              <a:defRPr sz="1800"/>
+            </a:lvl1pPr>
+            <a:lvl2pPr>
+              <a:defRPr sz="1600"/>
+            </a:lvl2pPr>
+            <a:lvl3pPr>
+              <a:defRPr sz="1400"/>
+            </a:lvl3pPr>
+            <a:lvl4pPr>
+              <a:defRPr sz="1200"/>
+            </a:lvl4pPr>
+            <a:lvl5pPr>
+              <a:defRPr sz="1200"/>
+            </a:lvl5pPr>
+            <a:lvl6pPr>
+              <a:defRPr sz="1200"/>
+            </a:lvl6pPr>
+            <a:lvl7pPr>
+              <a:defRPr sz="1200"/>
+            </a:lvl7pPr>
+            <a:lvl8pPr>
+              <a:defRPr sz="1200"/>
+            </a:lvl8pPr>
+            <a:lvl9pPr>
+              <a:defRPr sz="1200"/>
+            </a:lvl9pPr>
+          </a:lstStyle>
           <a:p>
             <a:pPr lvl="0"/>
             <a:r>
@@ -1316,18 +3826,13 @@
               <a:rPr lang="en-US"/>
               <a:t>Fifth level</a:t>
             </a:r>
-          </a:p>
-        </p:txBody>
-      </p:sp>
-      <p:sp>
-        <p:nvSpPr>
-          <p:cNvPr id="4" name="Content Placeholder 3">
-            <a:extLst>
-              <a:ext uri="{FF2B5EF4-FFF2-40B4-BE49-F238E27FC236}">
-                <a16:creationId xmlns:a16="http://schemas.microsoft.com/office/drawing/2014/main" id="{064FDF17-6270-0FE6-690B-97B2A845EC22}"/>
-              </a:ext>
-            </a:extLst>
-          </p:cNvPr>
+            <a:endParaRPr lang="en-US" dirty="0"/>
+          </a:p>
+        </p:txBody>
+      </p:sp>
+      <p:sp>
+        <p:nvSpPr>
+          <p:cNvPr id="4" name="Content Placeholder 3"/>
           <p:cNvSpPr>
             <a:spLocks noGrp="1"/>
           </p:cNvSpPr>
@@ -1337,13 +3842,43 @@
         </p:nvSpPr>
         <p:spPr>
           <a:xfrm>
-            <a:off x="6172200" y="1825625"/>
-            <a:ext cx="5181600" cy="4351338"/>
-          </a:xfrm>
-        </p:spPr>
-        <p:txBody>
-          <a:bodyPr/>
-          <a:lstStyle/>
+            <a:off x="5654493" y="2056092"/>
+            <a:ext cx="4396341" cy="4200245"/>
+          </a:xfrm>
+        </p:spPr>
+        <p:txBody>
+          <a:bodyPr>
+            <a:normAutofit/>
+          </a:bodyPr>
+          <a:lstStyle>
+            <a:lvl1pPr>
+              <a:defRPr sz="1800"/>
+            </a:lvl1pPr>
+            <a:lvl2pPr>
+              <a:defRPr sz="1600"/>
+            </a:lvl2pPr>
+            <a:lvl3pPr>
+              <a:defRPr sz="1400"/>
+            </a:lvl3pPr>
+            <a:lvl4pPr>
+              <a:defRPr sz="1200"/>
+            </a:lvl4pPr>
+            <a:lvl5pPr>
+              <a:defRPr sz="1200"/>
+            </a:lvl5pPr>
+            <a:lvl6pPr>
+              <a:defRPr sz="1200"/>
+            </a:lvl6pPr>
+            <a:lvl7pPr>
+              <a:defRPr sz="1200"/>
+            </a:lvl7pPr>
+            <a:lvl8pPr>
+              <a:defRPr sz="1200"/>
+            </a:lvl8pPr>
+            <a:lvl9pPr>
+              <a:defRPr sz="1200"/>
+            </a:lvl9pPr>
+          </a:lstStyle>
           <a:p>
             <a:pPr lvl="0"/>
             <a:r>
@@ -1378,18 +3913,13 @@
               <a:rPr lang="en-US"/>
               <a:t>Fifth level</a:t>
             </a:r>
-          </a:p>
-        </p:txBody>
-      </p:sp>
-      <p:sp>
-        <p:nvSpPr>
-          <p:cNvPr id="5" name="Date Placeholder 4">
-            <a:extLst>
-              <a:ext uri="{FF2B5EF4-FFF2-40B4-BE49-F238E27FC236}">
-                <a16:creationId xmlns:a16="http://schemas.microsoft.com/office/drawing/2014/main" id="{51971FAB-1BE1-7DBC-187B-D42D32E43C88}"/>
-              </a:ext>
-            </a:extLst>
-          </p:cNvPr>
+            <a:endParaRPr lang="en-US" dirty="0"/>
+          </a:p>
+        </p:txBody>
+      </p:sp>
+      <p:sp>
+        <p:nvSpPr>
+          <p:cNvPr id="5" name="Date Placeholder 4"/>
           <p:cNvSpPr>
             <a:spLocks noGrp="1"/>
           </p:cNvSpPr>
@@ -1412,13 +3942,7 @@
       </p:sp>
       <p:sp>
         <p:nvSpPr>
-          <p:cNvPr id="6" name="Footer Placeholder 5">
-            <a:extLst>
-              <a:ext uri="{FF2B5EF4-FFF2-40B4-BE49-F238E27FC236}">
-                <a16:creationId xmlns:a16="http://schemas.microsoft.com/office/drawing/2014/main" id="{09C43AC9-D23B-FB08-A048-56B2BD41B7EC}"/>
-              </a:ext>
-            </a:extLst>
-          </p:cNvPr>
+          <p:cNvPr id="6" name="Footer Placeholder 5"/>
           <p:cNvSpPr>
             <a:spLocks noGrp="1"/>
           </p:cNvSpPr>
@@ -1437,13 +3961,7 @@
       </p:sp>
       <p:sp>
         <p:nvSpPr>
-          <p:cNvPr id="7" name="Slide Number Placeholder 6">
-            <a:extLst>
-              <a:ext uri="{FF2B5EF4-FFF2-40B4-BE49-F238E27FC236}">
-                <a16:creationId xmlns:a16="http://schemas.microsoft.com/office/drawing/2014/main" id="{8BBA4546-5CFE-3593-1A44-281B745FE3CF}"/>
-              </a:ext>
-            </a:extLst>
-          </p:cNvPr>
+          <p:cNvPr id="7" name="Slide Number Placeholder 6"/>
           <p:cNvSpPr>
             <a:spLocks noGrp="1"/>
           </p:cNvSpPr>
@@ -1467,7 +3985,7 @@
     </p:spTree>
     <p:extLst>
       <p:ext uri="{BB962C8B-B14F-4D97-AF65-F5344CB8AC3E}">
-        <p14:creationId xmlns:p14="http://schemas.microsoft.com/office/powerpoint/2010/main" val="2283434504"/>
+        <p14:creationId xmlns:p14="http://schemas.microsoft.com/office/powerpoint/2010/main" val="4144566277"/>
       </p:ext>
     </p:extLst>
   </p:cSld>
@@ -1496,13 +4014,7 @@
       </p:grpSpPr>
       <p:sp>
         <p:nvSpPr>
-          <p:cNvPr id="2" name="Title 1">
-            <a:extLst>
-              <a:ext uri="{FF2B5EF4-FFF2-40B4-BE49-F238E27FC236}">
-                <a16:creationId xmlns:a16="http://schemas.microsoft.com/office/drawing/2014/main" id="{4994DFE5-AAF5-A8DF-67D0-ED4BA28B2E8B}"/>
-              </a:ext>
-            </a:extLst>
-          </p:cNvPr>
+          <p:cNvPr id="2" name="Title 1"/>
           <p:cNvSpPr>
             <a:spLocks noGrp="1"/>
           </p:cNvSpPr>
@@ -1510,32 +4022,26 @@
             <p:ph type="title"/>
           </p:nvPr>
         </p:nvSpPr>
-        <p:spPr>
-          <a:xfrm>
-            <a:off x="839788" y="365125"/>
-            <a:ext cx="10515600" cy="1325563"/>
-          </a:xfrm>
-        </p:spPr>
+        <p:spPr/>
         <p:txBody>
           <a:bodyPr/>
-          <a:lstStyle/>
+          <a:lstStyle>
+            <a:lvl1pPr>
+              <a:defRPr/>
+            </a:lvl1pPr>
+          </a:lstStyle>
           <a:p>
             <a:r>
               <a:rPr lang="en-US"/>
               <a:t>Click to edit Master title style</a:t>
             </a:r>
-          </a:p>
-        </p:txBody>
-      </p:sp>
-      <p:sp>
-        <p:nvSpPr>
-          <p:cNvPr id="3" name="Text Placeholder 2">
-            <a:extLst>
-              <a:ext uri="{FF2B5EF4-FFF2-40B4-BE49-F238E27FC236}">
-                <a16:creationId xmlns:a16="http://schemas.microsoft.com/office/drawing/2014/main" id="{91D2E204-2E8B-E848-6326-4BED876C650B}"/>
-              </a:ext>
-            </a:extLst>
-          </p:cNvPr>
+            <a:endParaRPr lang="en-US" dirty="0"/>
+          </a:p>
+        </p:txBody>
+      </p:sp>
+      <p:sp>
+        <p:nvSpPr>
+          <p:cNvPr id="3" name="Text Placeholder 2"/>
           <p:cNvSpPr>
             <a:spLocks noGrp="1"/>
           </p:cNvSpPr>
@@ -1545,16 +4051,25 @@
         </p:nvSpPr>
         <p:spPr>
           <a:xfrm>
-            <a:off x="839788" y="1681163"/>
-            <a:ext cx="5157787" cy="823912"/>
-          </a:xfrm>
-        </p:spPr>
-        <p:txBody>
-          <a:bodyPr anchor="b"/>
+            <a:off x="1103313" y="1905000"/>
+            <a:ext cx="4396338" cy="576262"/>
+          </a:xfrm>
+        </p:spPr>
+        <p:txBody>
+          <a:bodyPr anchor="b">
+            <a:noAutofit/>
+          </a:bodyPr>
           <a:lstStyle>
             <a:lvl1pPr marL="0" indent="0">
               <a:buNone/>
-              <a:defRPr sz="2400" b="1"/>
+              <a:defRPr sz="2400" b="0">
+                <a:solidFill>
+                  <a:schemeClr val="bg2">
+                    <a:lumMod val="40000"/>
+                    <a:lumOff val="60000"/>
+                  </a:schemeClr>
+                </a:solidFill>
+              </a:defRPr>
             </a:lvl1pPr>
             <a:lvl2pPr marL="457200" indent="0">
               <a:buNone/>
@@ -1600,13 +4115,7 @@
       </p:sp>
       <p:sp>
         <p:nvSpPr>
-          <p:cNvPr id="4" name="Content Placeholder 3">
-            <a:extLst>
-              <a:ext uri="{FF2B5EF4-FFF2-40B4-BE49-F238E27FC236}">
-                <a16:creationId xmlns:a16="http://schemas.microsoft.com/office/drawing/2014/main" id="{DEFEA2D2-4F41-915C-9F87-DAFA58FC7FFB}"/>
-              </a:ext>
-            </a:extLst>
-          </p:cNvPr>
+          <p:cNvPr id="4" name="Content Placeholder 3"/>
           <p:cNvSpPr>
             <a:spLocks noGrp="1"/>
           </p:cNvSpPr>
@@ -1616,13 +4125,43 @@
         </p:nvSpPr>
         <p:spPr>
           <a:xfrm>
-            <a:off x="839788" y="2505075"/>
-            <a:ext cx="5157787" cy="3684588"/>
-          </a:xfrm>
-        </p:spPr>
-        <p:txBody>
-          <a:bodyPr/>
-          <a:lstStyle/>
+            <a:off x="1103312" y="2514600"/>
+            <a:ext cx="4396339" cy="3741738"/>
+          </a:xfrm>
+        </p:spPr>
+        <p:txBody>
+          <a:bodyPr>
+            <a:normAutofit/>
+          </a:bodyPr>
+          <a:lstStyle>
+            <a:lvl1pPr>
+              <a:defRPr sz="1800"/>
+            </a:lvl1pPr>
+            <a:lvl2pPr>
+              <a:defRPr sz="1600"/>
+            </a:lvl2pPr>
+            <a:lvl3pPr>
+              <a:defRPr sz="1400"/>
+            </a:lvl3pPr>
+            <a:lvl4pPr>
+              <a:defRPr sz="1200"/>
+            </a:lvl4pPr>
+            <a:lvl5pPr>
+              <a:defRPr sz="1200"/>
+            </a:lvl5pPr>
+            <a:lvl6pPr>
+              <a:defRPr sz="1200"/>
+            </a:lvl6pPr>
+            <a:lvl7pPr>
+              <a:defRPr sz="1200"/>
+            </a:lvl7pPr>
+            <a:lvl8pPr>
+              <a:defRPr sz="1200"/>
+            </a:lvl8pPr>
+            <a:lvl9pPr>
+              <a:defRPr sz="1200"/>
+            </a:lvl9pPr>
+          </a:lstStyle>
           <a:p>
             <a:pPr lvl="0"/>
             <a:r>
@@ -1657,18 +4196,13 @@
               <a:rPr lang="en-US"/>
               <a:t>Fifth level</a:t>
             </a:r>
-          </a:p>
-        </p:txBody>
-      </p:sp>
-      <p:sp>
-        <p:nvSpPr>
-          <p:cNvPr id="5" name="Text Placeholder 4">
-            <a:extLst>
-              <a:ext uri="{FF2B5EF4-FFF2-40B4-BE49-F238E27FC236}">
-                <a16:creationId xmlns:a16="http://schemas.microsoft.com/office/drawing/2014/main" id="{5697480F-DC6F-ED19-71D0-374F0D771373}"/>
-              </a:ext>
-            </a:extLst>
-          </p:cNvPr>
+            <a:endParaRPr lang="en-US" dirty="0"/>
+          </a:p>
+        </p:txBody>
+      </p:sp>
+      <p:sp>
+        <p:nvSpPr>
+          <p:cNvPr id="5" name="Text Placeholder 4"/>
           <p:cNvSpPr>
             <a:spLocks noGrp="1"/>
           </p:cNvSpPr>
@@ -1678,16 +4212,25 @@
         </p:nvSpPr>
         <p:spPr>
           <a:xfrm>
-            <a:off x="6172200" y="1681163"/>
-            <a:ext cx="5183188" cy="823912"/>
-          </a:xfrm>
-        </p:spPr>
-        <p:txBody>
-          <a:bodyPr anchor="b"/>
+            <a:off x="5654495" y="1905000"/>
+            <a:ext cx="4396339" cy="576262"/>
+          </a:xfrm>
+        </p:spPr>
+        <p:txBody>
+          <a:bodyPr anchor="b">
+            <a:noAutofit/>
+          </a:bodyPr>
           <a:lstStyle>
             <a:lvl1pPr marL="0" indent="0">
               <a:buNone/>
-              <a:defRPr sz="2400" b="1"/>
+              <a:defRPr sz="2400" b="0">
+                <a:solidFill>
+                  <a:schemeClr val="bg2">
+                    <a:lumMod val="40000"/>
+                    <a:lumOff val="60000"/>
+                  </a:schemeClr>
+                </a:solidFill>
+              </a:defRPr>
             </a:lvl1pPr>
             <a:lvl2pPr marL="457200" indent="0">
               <a:buNone/>
@@ -1733,13 +4276,7 @@
       </p:sp>
       <p:sp>
         <p:nvSpPr>
-          <p:cNvPr id="6" name="Content Placeholder 5">
-            <a:extLst>
-              <a:ext uri="{FF2B5EF4-FFF2-40B4-BE49-F238E27FC236}">
-                <a16:creationId xmlns:a16="http://schemas.microsoft.com/office/drawing/2014/main" id="{B8B7BDF7-D761-0234-250D-CCE27C9B42E4}"/>
-              </a:ext>
-            </a:extLst>
-          </p:cNvPr>
+          <p:cNvPr id="6" name="Content Placeholder 5"/>
           <p:cNvSpPr>
             <a:spLocks noGrp="1"/>
           </p:cNvSpPr>
@@ -1749,13 +4286,43 @@
         </p:nvSpPr>
         <p:spPr>
           <a:xfrm>
-            <a:off x="6172200" y="2505075"/>
-            <a:ext cx="5183188" cy="3684588"/>
-          </a:xfrm>
-        </p:spPr>
-        <p:txBody>
-          <a:bodyPr/>
-          <a:lstStyle/>
+            <a:off x="5654495" y="2514600"/>
+            <a:ext cx="4396339" cy="3741738"/>
+          </a:xfrm>
+        </p:spPr>
+        <p:txBody>
+          <a:bodyPr>
+            <a:normAutofit/>
+          </a:bodyPr>
+          <a:lstStyle>
+            <a:lvl1pPr>
+              <a:defRPr sz="1800"/>
+            </a:lvl1pPr>
+            <a:lvl2pPr>
+              <a:defRPr sz="1600"/>
+            </a:lvl2pPr>
+            <a:lvl3pPr>
+              <a:defRPr sz="1400"/>
+            </a:lvl3pPr>
+            <a:lvl4pPr>
+              <a:defRPr sz="1200"/>
+            </a:lvl4pPr>
+            <a:lvl5pPr>
+              <a:defRPr sz="1200"/>
+            </a:lvl5pPr>
+            <a:lvl6pPr>
+              <a:defRPr sz="1200"/>
+            </a:lvl6pPr>
+            <a:lvl7pPr>
+              <a:defRPr sz="1200"/>
+            </a:lvl7pPr>
+            <a:lvl8pPr>
+              <a:defRPr sz="1200"/>
+            </a:lvl8pPr>
+            <a:lvl9pPr>
+              <a:defRPr sz="1200"/>
+            </a:lvl9pPr>
+          </a:lstStyle>
           <a:p>
             <a:pPr lvl="0"/>
             <a:r>
@@ -1790,18 +4357,13 @@
               <a:rPr lang="en-US"/>
               <a:t>Fifth level</a:t>
             </a:r>
-          </a:p>
-        </p:txBody>
-      </p:sp>
-      <p:sp>
-        <p:nvSpPr>
-          <p:cNvPr id="7" name="Date Placeholder 6">
-            <a:extLst>
-              <a:ext uri="{FF2B5EF4-FFF2-40B4-BE49-F238E27FC236}">
-                <a16:creationId xmlns:a16="http://schemas.microsoft.com/office/drawing/2014/main" id="{196708F3-C08F-36EB-B0F9-F01498182DD1}"/>
-              </a:ext>
-            </a:extLst>
-          </p:cNvPr>
+            <a:endParaRPr lang="en-US" dirty="0"/>
+          </a:p>
+        </p:txBody>
+      </p:sp>
+      <p:sp>
+        <p:nvSpPr>
+          <p:cNvPr id="7" name="Date Placeholder 6"/>
           <p:cNvSpPr>
             <a:spLocks noGrp="1"/>
           </p:cNvSpPr>
@@ -1824,13 +4386,7 @@
       </p:sp>
       <p:sp>
         <p:nvSpPr>
-          <p:cNvPr id="8" name="Footer Placeholder 7">
-            <a:extLst>
-              <a:ext uri="{FF2B5EF4-FFF2-40B4-BE49-F238E27FC236}">
-                <a16:creationId xmlns:a16="http://schemas.microsoft.com/office/drawing/2014/main" id="{5E46A0CC-7FAE-BFD8-DC55-141FC2B937FA}"/>
-              </a:ext>
-            </a:extLst>
-          </p:cNvPr>
+          <p:cNvPr id="8" name="Footer Placeholder 7"/>
           <p:cNvSpPr>
             <a:spLocks noGrp="1"/>
           </p:cNvSpPr>
@@ -1849,13 +4405,7 @@
       </p:sp>
       <p:sp>
         <p:nvSpPr>
-          <p:cNvPr id="9" name="Slide Number Placeholder 8">
-            <a:extLst>
-              <a:ext uri="{FF2B5EF4-FFF2-40B4-BE49-F238E27FC236}">
-                <a16:creationId xmlns:a16="http://schemas.microsoft.com/office/drawing/2014/main" id="{032CEAFD-1E51-DE46-0CA4-19F48117B298}"/>
-              </a:ext>
-            </a:extLst>
-          </p:cNvPr>
+          <p:cNvPr id="9" name="Slide Number Placeholder 8"/>
           <p:cNvSpPr>
             <a:spLocks noGrp="1"/>
           </p:cNvSpPr>
@@ -1879,7 +4429,7 @@
     </p:spTree>
     <p:extLst>
       <p:ext uri="{BB962C8B-B14F-4D97-AF65-F5344CB8AC3E}">
-        <p14:creationId xmlns:p14="http://schemas.microsoft.com/office/powerpoint/2010/main" val="1649501983"/>
+        <p14:creationId xmlns:p14="http://schemas.microsoft.com/office/powerpoint/2010/main" val="3000638591"/>
       </p:ext>
     </p:extLst>
   </p:cSld>
@@ -1908,13 +4458,7 @@
       </p:grpSpPr>
       <p:sp>
         <p:nvSpPr>
-          <p:cNvPr id="2" name="Title 1">
-            <a:extLst>
-              <a:ext uri="{FF2B5EF4-FFF2-40B4-BE49-F238E27FC236}">
-                <a16:creationId xmlns:a16="http://schemas.microsoft.com/office/drawing/2014/main" id="{880EA3EA-DA45-DBD2-838E-7355B064D8F9}"/>
-              </a:ext>
-            </a:extLst>
-          </p:cNvPr>
+          <p:cNvPr id="2" name="Title 1"/>
           <p:cNvSpPr>
             <a:spLocks noGrp="1"/>
           </p:cNvSpPr>
@@ -1931,18 +4475,13 @@
               <a:rPr lang="en-US"/>
               <a:t>Click to edit Master title style</a:t>
             </a:r>
-          </a:p>
-        </p:txBody>
-      </p:sp>
-      <p:sp>
-        <p:nvSpPr>
-          <p:cNvPr id="3" name="Date Placeholder 2">
-            <a:extLst>
-              <a:ext uri="{FF2B5EF4-FFF2-40B4-BE49-F238E27FC236}">
-                <a16:creationId xmlns:a16="http://schemas.microsoft.com/office/drawing/2014/main" id="{70B3094F-ADC1-997C-838E-C66989EC6058}"/>
-              </a:ext>
-            </a:extLst>
-          </p:cNvPr>
+            <a:endParaRPr lang="en-US" dirty="0"/>
+          </a:p>
+        </p:txBody>
+      </p:sp>
+      <p:sp>
+        <p:nvSpPr>
+          <p:cNvPr id="7" name="Date Placeholder 2"/>
           <p:cNvSpPr>
             <a:spLocks noGrp="1"/>
           </p:cNvSpPr>
@@ -1965,13 +4504,7 @@
       </p:sp>
       <p:sp>
         <p:nvSpPr>
-          <p:cNvPr id="4" name="Footer Placeholder 3">
-            <a:extLst>
-              <a:ext uri="{FF2B5EF4-FFF2-40B4-BE49-F238E27FC236}">
-                <a16:creationId xmlns:a16="http://schemas.microsoft.com/office/drawing/2014/main" id="{06B52EC5-497E-419A-E97A-B8B5AF077268}"/>
-              </a:ext>
-            </a:extLst>
-          </p:cNvPr>
+          <p:cNvPr id="5" name="Footer Placeholder 3"/>
           <p:cNvSpPr>
             <a:spLocks noGrp="1"/>
           </p:cNvSpPr>
@@ -1990,13 +4523,7 @@
       </p:sp>
       <p:sp>
         <p:nvSpPr>
-          <p:cNvPr id="5" name="Slide Number Placeholder 4">
-            <a:extLst>
-              <a:ext uri="{FF2B5EF4-FFF2-40B4-BE49-F238E27FC236}">
-                <a16:creationId xmlns:a16="http://schemas.microsoft.com/office/drawing/2014/main" id="{B7BB7483-2DD1-6BB6-AB15-CFBBFD3BD777}"/>
-              </a:ext>
-            </a:extLst>
-          </p:cNvPr>
+          <p:cNvPr id="6" name="Slide Number Placeholder 4"/>
           <p:cNvSpPr>
             <a:spLocks noGrp="1"/>
           </p:cNvSpPr>
@@ -2020,7 +4547,7 @@
     </p:spTree>
     <p:extLst>
       <p:ext uri="{BB962C8B-B14F-4D97-AF65-F5344CB8AC3E}">
-        <p14:creationId xmlns:p14="http://schemas.microsoft.com/office/powerpoint/2010/main" val="1105175293"/>
+        <p14:creationId xmlns:p14="http://schemas.microsoft.com/office/powerpoint/2010/main" val="4164173272"/>
       </p:ext>
     </p:extLst>
   </p:cSld>
@@ -2049,13 +4576,7 @@
       </p:grpSpPr>
       <p:sp>
         <p:nvSpPr>
-          <p:cNvPr id="2" name="Date Placeholder 1">
-            <a:extLst>
-              <a:ext uri="{FF2B5EF4-FFF2-40B4-BE49-F238E27FC236}">
-                <a16:creationId xmlns:a16="http://schemas.microsoft.com/office/drawing/2014/main" id="{9123C032-2CEC-09D4-A598-E27D9CADDE46}"/>
-              </a:ext>
-            </a:extLst>
-          </p:cNvPr>
+          <p:cNvPr id="7" name="Date Placeholder 1"/>
           <p:cNvSpPr>
             <a:spLocks noGrp="1"/>
           </p:cNvSpPr>
@@ -2078,13 +4599,7 @@
       </p:sp>
       <p:sp>
         <p:nvSpPr>
-          <p:cNvPr id="3" name="Footer Placeholder 2">
-            <a:extLst>
-              <a:ext uri="{FF2B5EF4-FFF2-40B4-BE49-F238E27FC236}">
-                <a16:creationId xmlns:a16="http://schemas.microsoft.com/office/drawing/2014/main" id="{E9697B44-838D-33DF-0BC0-2E0BCBF089E0}"/>
-              </a:ext>
-            </a:extLst>
-          </p:cNvPr>
+          <p:cNvPr id="5" name="Footer Placeholder 2"/>
           <p:cNvSpPr>
             <a:spLocks noGrp="1"/>
           </p:cNvSpPr>
@@ -2103,13 +4618,7 @@
       </p:sp>
       <p:sp>
         <p:nvSpPr>
-          <p:cNvPr id="4" name="Slide Number Placeholder 3">
-            <a:extLst>
-              <a:ext uri="{FF2B5EF4-FFF2-40B4-BE49-F238E27FC236}">
-                <a16:creationId xmlns:a16="http://schemas.microsoft.com/office/drawing/2014/main" id="{B9DA8B1A-4E70-EC1B-9B3C-DDF49F5A3A4D}"/>
-              </a:ext>
-            </a:extLst>
-          </p:cNvPr>
+          <p:cNvPr id="6" name="Slide Number Placeholder 3"/>
           <p:cNvSpPr>
             <a:spLocks noGrp="1"/>
           </p:cNvSpPr>
@@ -2133,7 +4642,7 @@
     </p:spTree>
     <p:extLst>
       <p:ext uri="{BB962C8B-B14F-4D97-AF65-F5344CB8AC3E}">
-        <p14:creationId xmlns:p14="http://schemas.microsoft.com/office/powerpoint/2010/main" val="2424629522"/>
+        <p14:creationId xmlns:p14="http://schemas.microsoft.com/office/powerpoint/2010/main" val="3725905897"/>
       </p:ext>
     </p:extLst>
   </p:cSld>
@@ -2162,13 +4671,7 @@
       </p:grpSpPr>
       <p:sp>
         <p:nvSpPr>
-          <p:cNvPr id="2" name="Title 1">
-            <a:extLst>
-              <a:ext uri="{FF2B5EF4-FFF2-40B4-BE49-F238E27FC236}">
-                <a16:creationId xmlns:a16="http://schemas.microsoft.com/office/drawing/2014/main" id="{B8B04E02-FDF2-2222-77F9-56CF964E148D}"/>
-              </a:ext>
-            </a:extLst>
-          </p:cNvPr>
+          <p:cNvPr id="2" name="Title 1"/>
           <p:cNvSpPr>
             <a:spLocks noGrp="1"/>
           </p:cNvSpPr>
@@ -2178,15 +4681,15 @@
         </p:nvSpPr>
         <p:spPr>
           <a:xfrm>
-            <a:off x="839788" y="457200"/>
-            <a:ext cx="3932237" cy="1600200"/>
+            <a:off x="1154953" y="1447800"/>
+            <a:ext cx="3401064" cy="1447800"/>
           </a:xfrm>
         </p:spPr>
         <p:txBody>
           <a:bodyPr anchor="b"/>
           <a:lstStyle>
-            <a:lvl1pPr>
-              <a:defRPr sz="3200"/>
+            <a:lvl1pPr algn="l">
+              <a:defRPr sz="2400" b="0"/>
             </a:lvl1pPr>
           </a:lstStyle>
           <a:p>
@@ -2194,18 +4697,13 @@
               <a:rPr lang="en-US"/>
               <a:t>Click to edit Master title style</a:t>
             </a:r>
-          </a:p>
-        </p:txBody>
-      </p:sp>
-      <p:sp>
-        <p:nvSpPr>
-          <p:cNvPr id="3" name="Content Placeholder 2">
-            <a:extLst>
-              <a:ext uri="{FF2B5EF4-FFF2-40B4-BE49-F238E27FC236}">
-                <a16:creationId xmlns:a16="http://schemas.microsoft.com/office/drawing/2014/main" id="{0A2D3FE0-3D70-C3CA-8B57-20A5FDB502D6}"/>
-              </a:ext>
-            </a:extLst>
-          </p:cNvPr>
+            <a:endParaRPr lang="en-US" dirty="0"/>
+          </a:p>
+        </p:txBody>
+      </p:sp>
+      <p:sp>
+        <p:nvSpPr>
+          <p:cNvPr id="3" name="Content Placeholder 2"/>
           <p:cNvSpPr>
             <a:spLocks noGrp="1"/>
           </p:cNvSpPr>
@@ -2215,39 +4713,41 @@
         </p:nvSpPr>
         <p:spPr>
           <a:xfrm>
-            <a:off x="5183188" y="987425"/>
-            <a:ext cx="6172200" cy="4873625"/>
-          </a:xfrm>
-        </p:spPr>
-        <p:txBody>
-          <a:bodyPr/>
+            <a:off x="4784616" y="1447800"/>
+            <a:ext cx="5195997" cy="4572000"/>
+          </a:xfrm>
+        </p:spPr>
+        <p:txBody>
+          <a:bodyPr anchor="ctr">
+            <a:normAutofit/>
+          </a:bodyPr>
           <a:lstStyle>
             <a:lvl1pPr>
-              <a:defRPr sz="3200"/>
+              <a:defRPr sz="2000"/>
             </a:lvl1pPr>
             <a:lvl2pPr>
-              <a:defRPr sz="2800"/>
+              <a:defRPr sz="1800"/>
             </a:lvl2pPr>
             <a:lvl3pPr>
-              <a:defRPr sz="2400"/>
+              <a:defRPr sz="1600"/>
             </a:lvl3pPr>
             <a:lvl4pPr>
-              <a:defRPr sz="2000"/>
+              <a:defRPr sz="1400"/>
             </a:lvl4pPr>
             <a:lvl5pPr>
-              <a:defRPr sz="2000"/>
+              <a:defRPr sz="1400"/>
             </a:lvl5pPr>
             <a:lvl6pPr>
-              <a:defRPr sz="2000"/>
+              <a:defRPr sz="1400"/>
             </a:lvl6pPr>
             <a:lvl7pPr>
-              <a:defRPr sz="2000"/>
+              <a:defRPr sz="1400"/>
             </a:lvl7pPr>
             <a:lvl8pPr>
-              <a:defRPr sz="2000"/>
+              <a:defRPr sz="1400"/>
             </a:lvl8pPr>
             <a:lvl9pPr>
-              <a:defRPr sz="2000"/>
+              <a:defRPr sz="1400"/>
             </a:lvl9pPr>
           </a:lstStyle>
           <a:p>
@@ -2284,18 +4784,13 @@
               <a:rPr lang="en-US"/>
               <a:t>Fifth level</a:t>
             </a:r>
-          </a:p>
-        </p:txBody>
-      </p:sp>
-      <p:sp>
-        <p:nvSpPr>
-          <p:cNvPr id="4" name="Text Placeholder 3">
-            <a:extLst>
-              <a:ext uri="{FF2B5EF4-FFF2-40B4-BE49-F238E27FC236}">
-                <a16:creationId xmlns:a16="http://schemas.microsoft.com/office/drawing/2014/main" id="{1A5B5FF9-5040-95B7-B915-A12547656AF3}"/>
-              </a:ext>
-            </a:extLst>
-          </p:cNvPr>
+            <a:endParaRPr lang="en-US" dirty="0"/>
+          </a:p>
+        </p:txBody>
+      </p:sp>
+      <p:sp>
+        <p:nvSpPr>
+          <p:cNvPr id="4" name="Text Placeholder 3"/>
           <p:cNvSpPr>
             <a:spLocks noGrp="1"/>
           </p:cNvSpPr>
@@ -2305,8 +4800,8 @@
         </p:nvSpPr>
         <p:spPr>
           <a:xfrm>
-            <a:off x="839788" y="2057400"/>
-            <a:ext cx="3932237" cy="3811588"/>
+            <a:off x="1154953" y="3129280"/>
+            <a:ext cx="3401063" cy="2895599"/>
           </a:xfrm>
         </p:spPr>
         <p:txBody>
@@ -2314,39 +4809,39 @@
           <a:lstStyle>
             <a:lvl1pPr marL="0" indent="0">
               <a:buNone/>
-              <a:defRPr sz="1600"/>
+              <a:defRPr sz="1400"/>
             </a:lvl1pPr>
             <a:lvl2pPr marL="457200" indent="0">
               <a:buNone/>
-              <a:defRPr sz="1400"/>
+              <a:defRPr sz="1200"/>
             </a:lvl2pPr>
             <a:lvl3pPr marL="914400" indent="0">
               <a:buNone/>
-              <a:defRPr sz="1200"/>
+              <a:defRPr sz="1000"/>
             </a:lvl3pPr>
             <a:lvl4pPr marL="1371600" indent="0">
               <a:buNone/>
-              <a:defRPr sz="1000"/>
+              <a:defRPr sz="900"/>
             </a:lvl4pPr>
             <a:lvl5pPr marL="1828800" indent="0">
               <a:buNone/>
-              <a:defRPr sz="1000"/>
+              <a:defRPr sz="900"/>
             </a:lvl5pPr>
             <a:lvl6pPr marL="2286000" indent="0">
               <a:buNone/>
-              <a:defRPr sz="1000"/>
+              <a:defRPr sz="900"/>
             </a:lvl6pPr>
             <a:lvl7pPr marL="2743200" indent="0">
               <a:buNone/>
-              <a:defRPr sz="1000"/>
+              <a:defRPr sz="900"/>
             </a:lvl7pPr>
             <a:lvl8pPr marL="3200400" indent="0">
               <a:buNone/>
-              <a:defRPr sz="1000"/>
+              <a:defRPr sz="900"/>
             </a:lvl8pPr>
             <a:lvl9pPr marL="3657600" indent="0">
               <a:buNone/>
-              <a:defRPr sz="1000"/>
+              <a:defRPr sz="900"/>
             </a:lvl9pPr>
           </a:lstStyle>
           <a:p>
@@ -2360,13 +4855,7 @@
       </p:sp>
       <p:sp>
         <p:nvSpPr>
-          <p:cNvPr id="5" name="Date Placeholder 4">
-            <a:extLst>
-              <a:ext uri="{FF2B5EF4-FFF2-40B4-BE49-F238E27FC236}">
-                <a16:creationId xmlns:a16="http://schemas.microsoft.com/office/drawing/2014/main" id="{7ADD319C-B970-BCD9-8E3B-3889A97D8521}"/>
-              </a:ext>
-            </a:extLst>
-          </p:cNvPr>
+          <p:cNvPr id="7" name="Date Placeholder 4"/>
           <p:cNvSpPr>
             <a:spLocks noGrp="1"/>
           </p:cNvSpPr>
@@ -2389,13 +4878,7 @@
       </p:sp>
       <p:sp>
         <p:nvSpPr>
-          <p:cNvPr id="6" name="Footer Placeholder 5">
-            <a:extLst>
-              <a:ext uri="{FF2B5EF4-FFF2-40B4-BE49-F238E27FC236}">
-                <a16:creationId xmlns:a16="http://schemas.microsoft.com/office/drawing/2014/main" id="{83F105D2-56F2-1F19-1CD8-A02532060A9D}"/>
-              </a:ext>
-            </a:extLst>
-          </p:cNvPr>
+          <p:cNvPr id="5" name="Footer Placeholder 5"/>
           <p:cNvSpPr>
             <a:spLocks noGrp="1"/>
           </p:cNvSpPr>
@@ -2414,13 +4897,7 @@
       </p:sp>
       <p:sp>
         <p:nvSpPr>
-          <p:cNvPr id="7" name="Slide Number Placeholder 6">
-            <a:extLst>
-              <a:ext uri="{FF2B5EF4-FFF2-40B4-BE49-F238E27FC236}">
-                <a16:creationId xmlns:a16="http://schemas.microsoft.com/office/drawing/2014/main" id="{462DEE59-6277-3B1A-D223-5439358ACD24}"/>
-              </a:ext>
-            </a:extLst>
-          </p:cNvPr>
+          <p:cNvPr id="6" name="Slide Number Placeholder 6"/>
           <p:cNvSpPr>
             <a:spLocks noGrp="1"/>
           </p:cNvSpPr>
@@ -2444,7 +4921,7 @@
     </p:spTree>
     <p:extLst>
       <p:ext uri="{BB962C8B-B14F-4D97-AF65-F5344CB8AC3E}">
-        <p14:creationId xmlns:p14="http://schemas.microsoft.com/office/powerpoint/2010/main" val="2094406286"/>
+        <p14:creationId xmlns:p14="http://schemas.microsoft.com/office/powerpoint/2010/main" val="4227016660"/>
       </p:ext>
     </p:extLst>
   </p:cSld>
@@ -2473,13 +4950,7 @@
       </p:grpSpPr>
       <p:sp>
         <p:nvSpPr>
-          <p:cNvPr id="2" name="Title 1">
-            <a:extLst>
-              <a:ext uri="{FF2B5EF4-FFF2-40B4-BE49-F238E27FC236}">
-                <a16:creationId xmlns:a16="http://schemas.microsoft.com/office/drawing/2014/main" id="{3A55F1F9-9338-8198-9D91-EB9DDF7CC537}"/>
-              </a:ext>
-            </a:extLst>
-          </p:cNvPr>
+          <p:cNvPr id="2" name="Title 1"/>
           <p:cNvSpPr>
             <a:spLocks noGrp="1"/>
           </p:cNvSpPr>
@@ -2489,15 +4960,17 @@
         </p:nvSpPr>
         <p:spPr>
           <a:xfrm>
-            <a:off x="839788" y="457200"/>
-            <a:ext cx="3932237" cy="1600200"/>
-          </a:xfrm>
-        </p:spPr>
-        <p:txBody>
-          <a:bodyPr anchor="b"/>
+            <a:off x="1153907" y="1854192"/>
+            <a:ext cx="5092906" cy="1574808"/>
+          </a:xfrm>
+        </p:spPr>
+        <p:txBody>
+          <a:bodyPr anchor="b">
+            <a:normAutofit/>
+          </a:bodyPr>
           <a:lstStyle>
-            <a:lvl1pPr>
-              <a:defRPr sz="3200"/>
+            <a:lvl1pPr algn="l">
+              <a:defRPr sz="3600" b="0"/>
             </a:lvl1pPr>
           </a:lstStyle>
           <a:p>
@@ -2505,20 +4978,15 @@
               <a:rPr lang="en-US"/>
               <a:t>Click to edit Master title style</a:t>
             </a:r>
-          </a:p>
-        </p:txBody>
-      </p:sp>
-      <p:sp>
-        <p:nvSpPr>
-          <p:cNvPr id="3" name="Picture Placeholder 2">
-            <a:extLst>
-              <a:ext uri="{FF2B5EF4-FFF2-40B4-BE49-F238E27FC236}">
-                <a16:creationId xmlns:a16="http://schemas.microsoft.com/office/drawing/2014/main" id="{64BF1080-7AA1-6098-9F0E-E5A13574A303}"/>
-              </a:ext>
-            </a:extLst>
-          </p:cNvPr>
-          <p:cNvSpPr>
-            <a:spLocks noGrp="1"/>
+            <a:endParaRPr lang="en-US" dirty="0"/>
+          </a:p>
+        </p:txBody>
+      </p:sp>
+      <p:sp>
+        <p:nvSpPr>
+          <p:cNvPr id="3" name="Picture Placeholder 2"/>
+          <p:cNvSpPr>
+            <a:spLocks noGrp="1" noChangeAspect="1"/>
           </p:cNvSpPr>
           <p:nvPr>
             <p:ph type="pic" idx="1"/>
@@ -2526,118 +4994,132 @@
         </p:nvSpPr>
         <p:spPr>
           <a:xfrm>
-            <a:off x="5183188" y="987425"/>
-            <a:ext cx="6172200" cy="4873625"/>
-          </a:xfrm>
-        </p:spPr>
-        <p:txBody>
-          <a:bodyPr/>
+            <a:off x="6949546" y="1143000"/>
+            <a:ext cx="3200400" cy="4572000"/>
+          </a:xfrm>
+          <a:prstGeom prst="roundRect">
+            <a:avLst>
+              <a:gd name="adj" fmla="val 1858"/>
+            </a:avLst>
+          </a:prstGeom>
+          <a:effectLst>
+            <a:outerShdw blurRad="50800" dist="50800" dir="5400000" algn="tl" rotWithShape="0">
+              <a:srgbClr val="000000">
+                <a:alpha val="43000"/>
+              </a:srgbClr>
+            </a:outerShdw>
+          </a:effectLst>
+        </p:spPr>
+        <p:txBody>
+          <a:bodyPr anchor="t">
+            <a:normAutofit/>
+          </a:bodyPr>
           <a:lstStyle>
-            <a:lvl1pPr marL="0" indent="0">
-              <a:buNone/>
-              <a:defRPr sz="3200"/>
-            </a:lvl1pPr>
-            <a:lvl2pPr marL="457200" indent="0">
-              <a:buNone/>
-              <a:defRPr sz="2800"/>
-            </a:lvl2pPr>
-            <a:lvl3pPr marL="914400" indent="0">
-              <a:buNone/>
-              <a:defRPr sz="2400"/>
-            </a:lvl3pPr>
-            <a:lvl4pPr marL="1371600" indent="0">
-              <a:buNone/>
-              <a:defRPr sz="2000"/>
-            </a:lvl4pPr>
-            <a:lvl5pPr marL="1828800" indent="0">
-              <a:buNone/>
-              <a:defRPr sz="2000"/>
-            </a:lvl5pPr>
-            <a:lvl6pPr marL="2286000" indent="0">
-              <a:buNone/>
-              <a:defRPr sz="2000"/>
-            </a:lvl6pPr>
-            <a:lvl7pPr marL="2743200" indent="0">
-              <a:buNone/>
-              <a:defRPr sz="2000"/>
-            </a:lvl7pPr>
-            <a:lvl8pPr marL="3200400" indent="0">
-              <a:buNone/>
-              <a:defRPr sz="2000"/>
-            </a:lvl8pPr>
-            <a:lvl9pPr marL="3657600" indent="0">
-              <a:buNone/>
-              <a:defRPr sz="2000"/>
-            </a:lvl9pPr>
-          </a:lstStyle>
-          <a:p>
-            <a:endParaRPr lang="en-US"/>
-          </a:p>
-        </p:txBody>
-      </p:sp>
-      <p:sp>
-        <p:nvSpPr>
-          <p:cNvPr id="4" name="Text Placeholder 3">
-            <a:extLst>
-              <a:ext uri="{FF2B5EF4-FFF2-40B4-BE49-F238E27FC236}">
-                <a16:creationId xmlns:a16="http://schemas.microsoft.com/office/drawing/2014/main" id="{D4C1B259-7404-C482-7AD1-A88BA9937107}"/>
-              </a:ext>
-            </a:extLst>
-          </p:cNvPr>
-          <p:cNvSpPr>
-            <a:spLocks noGrp="1"/>
-          </p:cNvSpPr>
-          <p:nvPr>
-            <p:ph type="body" sz="half" idx="2"/>
-          </p:nvPr>
-        </p:nvSpPr>
-        <p:spPr>
-          <a:xfrm>
-            <a:off x="839788" y="2057400"/>
-            <a:ext cx="3932237" cy="3811588"/>
-          </a:xfrm>
-        </p:spPr>
-        <p:txBody>
-          <a:bodyPr/>
-          <a:lstStyle>
-            <a:lvl1pPr marL="0" indent="0">
+            <a:lvl1pPr marL="0" indent="0" algn="ctr">
               <a:buNone/>
               <a:defRPr sz="1600"/>
             </a:lvl1pPr>
             <a:lvl2pPr marL="457200" indent="0">
               <a:buNone/>
-              <a:defRPr sz="1400"/>
+              <a:defRPr sz="1600"/>
             </a:lvl2pPr>
             <a:lvl3pPr marL="914400" indent="0">
               <a:buNone/>
-              <a:defRPr sz="1200"/>
+              <a:defRPr sz="1600"/>
             </a:lvl3pPr>
             <a:lvl4pPr marL="1371600" indent="0">
               <a:buNone/>
-              <a:defRPr sz="1000"/>
+              <a:defRPr sz="1600"/>
             </a:lvl4pPr>
             <a:lvl5pPr marL="1828800" indent="0">
               <a:buNone/>
-              <a:defRPr sz="1000"/>
+              <a:defRPr sz="1600"/>
             </a:lvl5pPr>
             <a:lvl6pPr marL="2286000" indent="0">
               <a:buNone/>
-              <a:defRPr sz="1000"/>
+              <a:defRPr sz="1600"/>
             </a:lvl6pPr>
             <a:lvl7pPr marL="2743200" indent="0">
               <a:buNone/>
-              <a:defRPr sz="1000"/>
+              <a:defRPr sz="1600"/>
             </a:lvl7pPr>
             <a:lvl8pPr marL="3200400" indent="0">
               <a:buNone/>
-              <a:defRPr sz="1000"/>
+              <a:defRPr sz="1600"/>
             </a:lvl8pPr>
             <a:lvl9pPr marL="3657600" indent="0">
               <a:buNone/>
-              <a:defRPr sz="1000"/>
+              <a:defRPr sz="1600"/>
             </a:lvl9pPr>
           </a:lstStyle>
           <a:p>
+            <a:r>
+              <a:rPr lang="en-US"/>
+              <a:t>Click icon to add picture</a:t>
+            </a:r>
+            <a:endParaRPr lang="en-US" dirty="0"/>
+          </a:p>
+        </p:txBody>
+      </p:sp>
+      <p:sp>
+        <p:nvSpPr>
+          <p:cNvPr id="4" name="Text Placeholder 3"/>
+          <p:cNvSpPr>
+            <a:spLocks noGrp="1"/>
+          </p:cNvSpPr>
+          <p:nvPr>
+            <p:ph type="body" sz="half" idx="2"/>
+          </p:nvPr>
+        </p:nvSpPr>
+        <p:spPr>
+          <a:xfrm>
+            <a:off x="1154954" y="3657600"/>
+            <a:ext cx="5084979" cy="1371600"/>
+          </a:xfrm>
+        </p:spPr>
+        <p:txBody>
+          <a:bodyPr>
+            <a:normAutofit/>
+          </a:bodyPr>
+          <a:lstStyle>
+            <a:lvl1pPr marL="0" indent="0">
+              <a:buNone/>
+              <a:defRPr sz="1400"/>
+            </a:lvl1pPr>
+            <a:lvl2pPr marL="457200" indent="0">
+              <a:buNone/>
+              <a:defRPr sz="1200"/>
+            </a:lvl2pPr>
+            <a:lvl3pPr marL="914400" indent="0">
+              <a:buNone/>
+              <a:defRPr sz="1000"/>
+            </a:lvl3pPr>
+            <a:lvl4pPr marL="1371600" indent="0">
+              <a:buNone/>
+              <a:defRPr sz="900"/>
+            </a:lvl4pPr>
+            <a:lvl5pPr marL="1828800" indent="0">
+              <a:buNone/>
+              <a:defRPr sz="900"/>
+            </a:lvl5pPr>
+            <a:lvl6pPr marL="2286000" indent="0">
+              <a:buNone/>
+              <a:defRPr sz="900"/>
+            </a:lvl6pPr>
+            <a:lvl7pPr marL="2743200" indent="0">
+              <a:buNone/>
+              <a:defRPr sz="900"/>
+            </a:lvl7pPr>
+            <a:lvl8pPr marL="3200400" indent="0">
+              <a:buNone/>
+              <a:defRPr sz="900"/>
+            </a:lvl8pPr>
+            <a:lvl9pPr marL="3657600" indent="0">
+              <a:buNone/>
+              <a:defRPr sz="900"/>
+            </a:lvl9pPr>
+          </a:lstStyle>
+          <a:p>
             <a:pPr lvl="0"/>
             <a:r>
               <a:rPr lang="en-US"/>
@@ -2648,13 +5130,7 @@
       </p:sp>
       <p:sp>
         <p:nvSpPr>
-          <p:cNvPr id="5" name="Date Placeholder 4">
-            <a:extLst>
-              <a:ext uri="{FF2B5EF4-FFF2-40B4-BE49-F238E27FC236}">
-                <a16:creationId xmlns:a16="http://schemas.microsoft.com/office/drawing/2014/main" id="{CBEEF745-AAB7-8CFE-5CA6-CD6EDA015C0D}"/>
-              </a:ext>
-            </a:extLst>
-          </p:cNvPr>
+          <p:cNvPr id="5" name="Date Placeholder 4"/>
           <p:cNvSpPr>
             <a:spLocks noGrp="1"/>
           </p:cNvSpPr>
@@ -2677,13 +5153,7 @@
       </p:sp>
       <p:sp>
         <p:nvSpPr>
-          <p:cNvPr id="6" name="Footer Placeholder 5">
-            <a:extLst>
-              <a:ext uri="{FF2B5EF4-FFF2-40B4-BE49-F238E27FC236}">
-                <a16:creationId xmlns:a16="http://schemas.microsoft.com/office/drawing/2014/main" id="{C6D0D2E2-55BF-3F05-DF2F-F07C64C7F717}"/>
-              </a:ext>
-            </a:extLst>
-          </p:cNvPr>
+          <p:cNvPr id="6" name="Footer Placeholder 5"/>
           <p:cNvSpPr>
             <a:spLocks noGrp="1"/>
           </p:cNvSpPr>
@@ -2702,13 +5172,7 @@
       </p:sp>
       <p:sp>
         <p:nvSpPr>
-          <p:cNvPr id="7" name="Slide Number Placeholder 6">
-            <a:extLst>
-              <a:ext uri="{FF2B5EF4-FFF2-40B4-BE49-F238E27FC236}">
-                <a16:creationId xmlns:a16="http://schemas.microsoft.com/office/drawing/2014/main" id="{B3AE5043-5FCB-6029-7CBC-7505D8E61F6E}"/>
-              </a:ext>
-            </a:extLst>
-          </p:cNvPr>
+          <p:cNvPr id="7" name="Slide Number Placeholder 6"/>
           <p:cNvSpPr>
             <a:spLocks noGrp="1"/>
           </p:cNvSpPr>
@@ -2732,7 +5196,7 @@
     </p:spTree>
     <p:extLst>
       <p:ext uri="{BB962C8B-B14F-4D97-AF65-F5344CB8AC3E}">
-        <p14:creationId xmlns:p14="http://schemas.microsoft.com/office/powerpoint/2010/main" val="2956760882"/>
+        <p14:creationId xmlns:p14="http://schemas.microsoft.com/office/powerpoint/2010/main" val="3288559034"/>
       </p:ext>
     </p:extLst>
   </p:cSld>
@@ -2746,8 +5210,8 @@
 <p:sldMaster xmlns:a="http://schemas.openxmlformats.org/drawingml/2006/main" xmlns:r="http://schemas.openxmlformats.org/officeDocument/2006/relationships" xmlns:p="http://schemas.openxmlformats.org/presentationml/2006/main">
   <p:cSld>
     <p:bg>
-      <p:bgRef idx="1001">
-        <a:schemeClr val="bg1"/>
+      <p:bgRef idx="1003">
+        <a:schemeClr val="bg2"/>
       </p:bgRef>
     </p:bg>
     <p:spTree>
@@ -2764,69 +5228,273 @@
           <a:chExt cx="0" cy="0"/>
         </a:xfrm>
       </p:grpSpPr>
-      <p:sp>
-        <p:nvSpPr>
-          <p:cNvPr id="2" name="Title Placeholder 1">
+      <p:pic>
+        <p:nvPicPr>
+          <p:cNvPr id="8" name="Picture 7"/>
+          <p:cNvPicPr>
+            <a:picLocks noChangeAspect="1"/>
+          </p:cNvPicPr>
+          <p:nvPr/>
+        </p:nvPicPr>
+        <p:blipFill rotWithShape="1">
+          <a:blip r:embed="rId19">
             <a:extLst>
-              <a:ext uri="{FF2B5EF4-FFF2-40B4-BE49-F238E27FC236}">
-                <a16:creationId xmlns:a16="http://schemas.microsoft.com/office/drawing/2014/main" id="{8495947D-E587-83A1-01AF-2ABB1D70D724}"/>
+              <a:ext uri="{28A0092B-C50C-407E-A947-70E740481C1C}">
+                <a14:useLocalDpi xmlns:a14="http://schemas.microsoft.com/office/drawing/2010/main" val="0"/>
               </a:ext>
             </a:extLst>
-          </p:cNvPr>
-          <p:cNvSpPr>
-            <a:spLocks noGrp="1"/>
-          </p:cNvSpPr>
-          <p:nvPr>
-            <p:ph type="title"/>
-          </p:nvPr>
-        </p:nvSpPr>
+          </a:blip>
+          <a:srcRect l="3613"/>
+          <a:stretch/>
+        </p:blipFill>
         <p:spPr>
           <a:xfrm>
-            <a:off x="838200" y="365125"/>
-            <a:ext cx="10515600" cy="1325563"/>
+            <a:off x="0" y="2669685"/>
+            <a:ext cx="4037012" cy="4188315"/>
           </a:xfrm>
           <a:prstGeom prst="rect">
             <a:avLst/>
           </a:prstGeom>
         </p:spPr>
-        <p:txBody>
-          <a:bodyPr vert="horz" lIns="91440" tIns="45720" rIns="91440" bIns="45720" rtlCol="0" anchor="ctr">
-            <a:normAutofit/>
-          </a:bodyPr>
-          <a:lstStyle/>
-          <a:p>
-            <a:r>
-              <a:rPr lang="en-US"/>
-              <a:t>Click to edit Master title style</a:t>
-            </a:r>
-          </a:p>
-        </p:txBody>
-      </p:sp>
-      <p:sp>
-        <p:nvSpPr>
-          <p:cNvPr id="3" name="Text Placeholder 2">
+      </p:pic>
+      <p:pic>
+        <p:nvPicPr>
+          <p:cNvPr id="7" name="Picture 6"/>
+          <p:cNvPicPr>
+            <a:picLocks noChangeAspect="1"/>
+          </p:cNvPicPr>
+          <p:nvPr/>
+        </p:nvPicPr>
+        <p:blipFill rotWithShape="1">
+          <a:blip r:embed="rId20">
             <a:extLst>
-              <a:ext uri="{FF2B5EF4-FFF2-40B4-BE49-F238E27FC236}">
-                <a16:creationId xmlns:a16="http://schemas.microsoft.com/office/drawing/2014/main" id="{F6A96E17-8AA2-10CD-E007-CD2FD9DD72D0}"/>
+              <a:ext uri="{28A0092B-C50C-407E-A947-70E740481C1C}">
+                <a14:useLocalDpi xmlns:a14="http://schemas.microsoft.com/office/drawing/2010/main" val="0"/>
               </a:ext>
             </a:extLst>
-          </p:cNvPr>
-          <p:cNvSpPr>
-            <a:spLocks noGrp="1"/>
-          </p:cNvSpPr>
-          <p:nvPr>
-            <p:ph type="body" idx="1"/>
-          </p:nvPr>
-        </p:nvSpPr>
+          </a:blip>
+          <a:srcRect l="35640"/>
+          <a:stretch/>
+        </p:blipFill>
         <p:spPr>
           <a:xfrm>
-            <a:off x="838200" y="1825625"/>
-            <a:ext cx="10515600" cy="4351338"/>
+            <a:off x="0" y="2892347"/>
+            <a:ext cx="1522412" cy="2365453"/>
           </a:xfrm>
           <a:prstGeom prst="rect">
             <a:avLst/>
           </a:prstGeom>
         </p:spPr>
+      </p:pic>
+      <p:sp>
+        <p:nvSpPr>
+          <p:cNvPr id="16" name="Oval 15"/>
+          <p:cNvSpPr/>
+          <p:nvPr/>
+        </p:nvSpPr>
+        <p:spPr>
+          <a:xfrm>
+            <a:off x="8609012" y="1676400"/>
+            <a:ext cx="2819400" cy="2819400"/>
+          </a:xfrm>
+          <a:prstGeom prst="ellipse">
+            <a:avLst/>
+          </a:prstGeom>
+          <a:gradFill flip="none" rotWithShape="1">
+            <a:gsLst>
+              <a:gs pos="0">
+                <a:schemeClr val="bg2">
+                  <a:lumMod val="60000"/>
+                  <a:lumOff val="40000"/>
+                  <a:alpha val="7000"/>
+                </a:schemeClr>
+              </a:gs>
+              <a:gs pos="69000">
+                <a:schemeClr val="bg2">
+                  <a:lumMod val="60000"/>
+                  <a:lumOff val="40000"/>
+                  <a:alpha val="0"/>
+                </a:schemeClr>
+              </a:gs>
+              <a:gs pos="36000">
+                <a:schemeClr val="bg2">
+                  <a:lumMod val="60000"/>
+                  <a:lumOff val="40000"/>
+                  <a:alpha val="6000"/>
+                </a:schemeClr>
+              </a:gs>
+            </a:gsLst>
+            <a:path path="circle">
+              <a:fillToRect l="50000" t="50000" r="50000" b="50000"/>
+            </a:path>
+            <a:tileRect/>
+          </a:gradFill>
+          <a:ln>
+            <a:noFill/>
+          </a:ln>
+          <a:effectLst/>
+        </p:spPr>
+        <p:style>
+          <a:lnRef idx="1">
+            <a:schemeClr val="accent1"/>
+          </a:lnRef>
+          <a:fillRef idx="3">
+            <a:schemeClr val="accent1"/>
+          </a:fillRef>
+          <a:effectRef idx="2">
+            <a:schemeClr val="accent1"/>
+          </a:effectRef>
+          <a:fontRef idx="minor">
+            <a:schemeClr val="lt1"/>
+          </a:fontRef>
+        </p:style>
+      </p:sp>
+      <p:pic>
+        <p:nvPicPr>
+          <p:cNvPr id="9" name="Picture 8"/>
+          <p:cNvPicPr>
+            <a:picLocks noChangeAspect="1"/>
+          </p:cNvPicPr>
+          <p:nvPr/>
+        </p:nvPicPr>
+        <p:blipFill rotWithShape="1">
+          <a:blip r:embed="rId21">
+            <a:extLst>
+              <a:ext uri="{28A0092B-C50C-407E-A947-70E740481C1C}">
+                <a14:useLocalDpi xmlns:a14="http://schemas.microsoft.com/office/drawing/2010/main" val="0"/>
+              </a:ext>
+            </a:extLst>
+          </a:blip>
+          <a:srcRect t="28813"/>
+          <a:stretch/>
+        </p:blipFill>
+        <p:spPr>
+          <a:xfrm>
+            <a:off x="7999412" y="0"/>
+            <a:ext cx="1603387" cy="1141407"/>
+          </a:xfrm>
+          <a:prstGeom prst="rect">
+            <a:avLst/>
+          </a:prstGeom>
+        </p:spPr>
+      </p:pic>
+      <p:pic>
+        <p:nvPicPr>
+          <p:cNvPr id="10" name="Picture 9"/>
+          <p:cNvPicPr>
+            <a:picLocks noChangeAspect="1"/>
+          </p:cNvPicPr>
+          <p:nvPr/>
+        </p:nvPicPr>
+        <p:blipFill rotWithShape="1">
+          <a:blip r:embed="rId22">
+            <a:extLst>
+              <a:ext uri="{28A0092B-C50C-407E-A947-70E740481C1C}">
+                <a14:useLocalDpi xmlns:a14="http://schemas.microsoft.com/office/drawing/2010/main" val="0"/>
+              </a:ext>
+            </a:extLst>
+          </a:blip>
+          <a:srcRect b="23320"/>
+          <a:stretch/>
+        </p:blipFill>
+        <p:spPr>
+          <a:xfrm>
+            <a:off x="8605878" y="6096000"/>
+            <a:ext cx="993734" cy="762000"/>
+          </a:xfrm>
+          <a:prstGeom prst="rect">
+            <a:avLst/>
+          </a:prstGeom>
+        </p:spPr>
+      </p:pic>
+      <p:sp>
+        <p:nvSpPr>
+          <p:cNvPr id="14" name="Rectangle 13"/>
+          <p:cNvSpPr/>
+          <p:nvPr/>
+        </p:nvSpPr>
+        <p:spPr>
+          <a:xfrm>
+            <a:off x="10437812" y="0"/>
+            <a:ext cx="685800" cy="1143000"/>
+          </a:xfrm>
+          <a:prstGeom prst="rect">
+            <a:avLst/>
+          </a:prstGeom>
+          <a:solidFill>
+            <a:schemeClr val="accent1"/>
+          </a:solidFill>
+          <a:ln>
+            <a:noFill/>
+          </a:ln>
+        </p:spPr>
+        <p:style>
+          <a:lnRef idx="1">
+            <a:schemeClr val="accent1"/>
+          </a:lnRef>
+          <a:fillRef idx="3">
+            <a:schemeClr val="accent1"/>
+          </a:fillRef>
+          <a:effectRef idx="2">
+            <a:schemeClr val="accent1"/>
+          </a:effectRef>
+          <a:fontRef idx="minor">
+            <a:schemeClr val="lt1"/>
+          </a:fontRef>
+        </p:style>
+      </p:sp>
+      <p:sp>
+        <p:nvSpPr>
+          <p:cNvPr id="2" name="Title Placeholder 1"/>
+          <p:cNvSpPr>
+            <a:spLocks noGrp="1"/>
+          </p:cNvSpPr>
+          <p:nvPr>
+            <p:ph type="title"/>
+          </p:nvPr>
+        </p:nvSpPr>
+        <p:spPr>
+          <a:xfrm>
+            <a:off x="646111" y="452718"/>
+            <a:ext cx="9404723" cy="1400530"/>
+          </a:xfrm>
+          <a:prstGeom prst="rect">
+            <a:avLst/>
+          </a:prstGeom>
+        </p:spPr>
+        <p:txBody>
+          <a:bodyPr vert="horz" lIns="91440" tIns="45720" rIns="91440" bIns="45720" rtlCol="0" anchor="t">
+            <a:noAutofit/>
+          </a:bodyPr>
+          <a:lstStyle/>
+          <a:p>
+            <a:r>
+              <a:rPr lang="en-US"/>
+              <a:t>Click to edit Master title style</a:t>
+            </a:r>
+            <a:endParaRPr lang="en-US" dirty="0"/>
+          </a:p>
+        </p:txBody>
+      </p:sp>
+      <p:sp>
+        <p:nvSpPr>
+          <p:cNvPr id="3" name="Text Placeholder 2"/>
+          <p:cNvSpPr>
+            <a:spLocks noGrp="1"/>
+          </p:cNvSpPr>
+          <p:nvPr>
+            <p:ph type="body" idx="1"/>
+          </p:nvPr>
+        </p:nvSpPr>
+        <p:spPr>
+          <a:xfrm>
+            <a:off x="1103312" y="2052918"/>
+            <a:ext cx="8946541" cy="4195481"/>
+          </a:xfrm>
+          <a:prstGeom prst="rect">
+            <a:avLst/>
+          </a:prstGeom>
+        </p:spPr>
         <p:txBody>
           <a:bodyPr vert="horz" lIns="91440" tIns="45720" rIns="91440" bIns="45720" rtlCol="0">
             <a:normAutofit/>
@@ -2866,18 +5534,13 @@
               <a:rPr lang="en-US"/>
               <a:t>Fifth level</a:t>
             </a:r>
-          </a:p>
-        </p:txBody>
-      </p:sp>
-      <p:sp>
-        <p:nvSpPr>
-          <p:cNvPr id="4" name="Date Placeholder 3">
-            <a:extLst>
-              <a:ext uri="{FF2B5EF4-FFF2-40B4-BE49-F238E27FC236}">
-                <a16:creationId xmlns:a16="http://schemas.microsoft.com/office/drawing/2014/main" id="{8746BF39-1F0A-3E45-704B-CF0A5E6B1578}"/>
-              </a:ext>
-            </a:extLst>
-          </p:cNvPr>
+            <a:endParaRPr lang="en-US" dirty="0"/>
+          </a:p>
+        </p:txBody>
+      </p:sp>
+      <p:sp>
+        <p:nvSpPr>
+          <p:cNvPr id="4" name="Date Placeholder 3"/>
           <p:cNvSpPr>
             <a:spLocks noGrp="1"/>
           </p:cNvSpPr>
@@ -2886,22 +5549,23 @@
           </p:nvPr>
         </p:nvSpPr>
         <p:spPr>
-          <a:xfrm>
-            <a:off x="838200" y="6356350"/>
-            <a:ext cx="2743200" cy="365125"/>
+          <a:xfrm rot="5400000">
+            <a:off x="10155639" y="1790701"/>
+            <a:ext cx="990599" cy="304799"/>
           </a:xfrm>
           <a:prstGeom prst="rect">
             <a:avLst/>
           </a:prstGeom>
         </p:spPr>
         <p:txBody>
-          <a:bodyPr vert="horz" lIns="91440" tIns="45720" rIns="91440" bIns="45720" rtlCol="0" anchor="ctr"/>
+          <a:bodyPr vert="horz" lIns="91440" tIns="45720" rIns="91440" bIns="45720" rtlCol="0" anchor="t"/>
           <a:lstStyle>
             <a:lvl1pPr algn="l">
-              <a:defRPr sz="1200">
+              <a:defRPr sz="1100" b="0" i="0">
                 <a:solidFill>
                   <a:schemeClr val="tx1">
-                    <a:tint val="82000"/>
+                    <a:tint val="75000"/>
+                    <a:alpha val="60000"/>
                   </a:schemeClr>
                 </a:solidFill>
               </a:defRPr>
@@ -2918,13 +5582,7 @@
       </p:sp>
       <p:sp>
         <p:nvSpPr>
-          <p:cNvPr id="5" name="Footer Placeholder 4">
-            <a:extLst>
-              <a:ext uri="{FF2B5EF4-FFF2-40B4-BE49-F238E27FC236}">
-                <a16:creationId xmlns:a16="http://schemas.microsoft.com/office/drawing/2014/main" id="{9FDFE2A4-ADE4-5152-CFD4-ABC23A6E5214}"/>
-              </a:ext>
-            </a:extLst>
-          </p:cNvPr>
+          <p:cNvPr id="5" name="Footer Placeholder 4"/>
           <p:cNvSpPr>
             <a:spLocks noGrp="1"/>
           </p:cNvSpPr>
@@ -2933,22 +5591,23 @@
           </p:nvPr>
         </p:nvSpPr>
         <p:spPr>
-          <a:xfrm>
-            <a:off x="4038600" y="6356350"/>
-            <a:ext cx="4114800" cy="365125"/>
+          <a:xfrm rot="5400000">
+            <a:off x="8951573" y="3225297"/>
+            <a:ext cx="3859795" cy="304801"/>
           </a:xfrm>
           <a:prstGeom prst="rect">
             <a:avLst/>
           </a:prstGeom>
         </p:spPr>
         <p:txBody>
-          <a:bodyPr vert="horz" lIns="91440" tIns="45720" rIns="91440" bIns="45720" rtlCol="0" anchor="ctr"/>
+          <a:bodyPr vert="horz" lIns="91440" tIns="45720" rIns="91440" bIns="45720" rtlCol="0" anchor="b"/>
           <a:lstStyle>
-            <a:lvl1pPr algn="ctr">
-              <a:defRPr sz="1200">
+            <a:lvl1pPr algn="l">
+              <a:defRPr sz="1100" b="0" i="0">
                 <a:solidFill>
                   <a:schemeClr val="tx1">
-                    <a:tint val="82000"/>
+                    <a:tint val="75000"/>
+                    <a:alpha val="60000"/>
                   </a:schemeClr>
                 </a:solidFill>
               </a:defRPr>
@@ -2961,13 +5620,7 @@
       </p:sp>
       <p:sp>
         <p:nvSpPr>
-          <p:cNvPr id="6" name="Slide Number Placeholder 5">
-            <a:extLst>
-              <a:ext uri="{FF2B5EF4-FFF2-40B4-BE49-F238E27FC236}">
-                <a16:creationId xmlns:a16="http://schemas.microsoft.com/office/drawing/2014/main" id="{A55B0E5B-3703-B8C2-2B69-4DDCD2AC3412}"/>
-              </a:ext>
-            </a:extLst>
-          </p:cNvPr>
+          <p:cNvPr id="6" name="Slide Number Placeholder 5"/>
           <p:cNvSpPr>
             <a:spLocks noGrp="1"/>
           </p:cNvSpPr>
@@ -2975,23 +5628,23 @@
             <p:ph type="sldNum" sz="quarter" idx="4"/>
           </p:nvPr>
         </p:nvSpPr>
-        <p:spPr>
+        <p:spPr bwMode="gray">
           <a:xfrm>
-            <a:off x="8610600" y="6356350"/>
-            <a:ext cx="2743200" cy="365125"/>
+            <a:off x="10352540" y="295729"/>
+            <a:ext cx="838199" cy="767687"/>
           </a:xfrm>
           <a:prstGeom prst="rect">
             <a:avLst/>
           </a:prstGeom>
         </p:spPr>
         <p:txBody>
-          <a:bodyPr vert="horz" lIns="91440" tIns="45720" rIns="91440" bIns="45720" rtlCol="0" anchor="ctr"/>
+          <a:bodyPr vert="horz" lIns="91440" tIns="45720" rIns="91440" bIns="45720" rtlCol="0" anchor="b"/>
           <a:lstStyle>
-            <a:lvl1pPr algn="r">
-              <a:defRPr sz="1200">
+            <a:lvl1pPr algn="ctr">
+              <a:defRPr sz="2800" b="0" i="0">
                 <a:solidFill>
                   <a:schemeClr val="tx1">
-                    <a:tint val="82000"/>
+                    <a:tint val="75000"/>
                   </a:schemeClr>
                 </a:solidFill>
               </a:defRPr>
@@ -3009,35 +5662,121 @@
     </p:spTree>
     <p:extLst>
       <p:ext uri="{BB962C8B-B14F-4D97-AF65-F5344CB8AC3E}">
-        <p14:creationId xmlns:p14="http://schemas.microsoft.com/office/powerpoint/2010/main" val="1506560016"/>
+        <p14:creationId xmlns:p14="http://schemas.microsoft.com/office/powerpoint/2010/main" val="564298700"/>
       </p:ext>
     </p:extLst>
   </p:cSld>
-  <p:clrMap bg1="lt1" tx1="dk1" bg2="lt2" tx2="dk2" accent1="accent1" accent2="accent2" accent3="accent3" accent4="accent4" accent5="accent5" accent6="accent6" hlink="hlink" folHlink="folHlink"/>
+  <p:clrMap bg1="dk1" tx1="lt1" bg2="dk2" tx2="lt2" accent1="accent1" accent2="accent2" accent3="accent3" accent4="accent4" accent5="accent5" accent6="accent6" hlink="hlink" folHlink="folHlink"/>
   <p:sldLayoutIdLst>
-    <p:sldLayoutId id="2147483649" r:id="rId1"/>
-    <p:sldLayoutId id="2147483650" r:id="rId2"/>
-    <p:sldLayoutId id="2147483651" r:id="rId3"/>
-    <p:sldLayoutId id="2147483652" r:id="rId4"/>
-    <p:sldLayoutId id="2147483653" r:id="rId5"/>
-    <p:sldLayoutId id="2147483654" r:id="rId6"/>
-    <p:sldLayoutId id="2147483655" r:id="rId7"/>
-    <p:sldLayoutId id="2147483656" r:id="rId8"/>
-    <p:sldLayoutId id="2147483657" r:id="rId9"/>
-    <p:sldLayoutId id="2147483658" r:id="rId10"/>
-    <p:sldLayoutId id="2147483659" r:id="rId11"/>
+    <p:sldLayoutId id="2147483661" r:id="rId1"/>
+    <p:sldLayoutId id="2147483662" r:id="rId2"/>
+    <p:sldLayoutId id="2147483663" r:id="rId3"/>
+    <p:sldLayoutId id="2147483664" r:id="rId4"/>
+    <p:sldLayoutId id="2147483665" r:id="rId5"/>
+    <p:sldLayoutId id="2147483666" r:id="rId6"/>
+    <p:sldLayoutId id="2147483667" r:id="rId7"/>
+    <p:sldLayoutId id="2147483668" r:id="rId8"/>
+    <p:sldLayoutId id="2147483669" r:id="rId9"/>
+    <p:sldLayoutId id="2147483670" r:id="rId10"/>
+    <p:sldLayoutId id="2147483671" r:id="rId11"/>
+    <p:sldLayoutId id="2147483672" r:id="rId12"/>
+    <p:sldLayoutId id="2147483673" r:id="rId13"/>
+    <p:sldLayoutId id="2147483674" r:id="rId14"/>
+    <p:sldLayoutId id="2147483675" r:id="rId15"/>
+    <p:sldLayoutId id="2147483676" r:id="rId16"/>
+    <p:sldLayoutId id="2147483677" r:id="rId17"/>
   </p:sldLayoutIdLst>
   <p:txStyles>
     <p:titleStyle>
-      <a:lvl1pPr algn="l" defTabSz="914400" rtl="0" eaLnBrk="1" latinLnBrk="0" hangingPunct="1">
-        <a:lnSpc>
-          <a:spcPct val="90000"/>
-        </a:lnSpc>
+      <a:lvl1pPr algn="l" defTabSz="457200" rtl="0" eaLnBrk="1" latinLnBrk="0" hangingPunct="1">
         <a:spcBef>
           <a:spcPct val="0"/>
         </a:spcBef>
         <a:buNone/>
-        <a:defRPr sz="4400" kern="1200">
+        <a:defRPr sz="4200" b="0" i="0" kern="1200">
+          <a:solidFill>
+            <a:schemeClr val="tx2"/>
+          </a:solidFill>
+          <a:latin typeface="+mj-lt"/>
+          <a:ea typeface="+mj-ea"/>
+          <a:cs typeface="+mj-cs"/>
+        </a:defRPr>
+      </a:lvl1pPr>
+      <a:lvl2pPr eaLnBrk="1" hangingPunct="1">
+        <a:defRPr>
+          <a:solidFill>
+            <a:schemeClr val="tx2"/>
+          </a:solidFill>
+        </a:defRPr>
+      </a:lvl2pPr>
+      <a:lvl3pPr eaLnBrk="1" hangingPunct="1">
+        <a:defRPr>
+          <a:solidFill>
+            <a:schemeClr val="tx2"/>
+          </a:solidFill>
+        </a:defRPr>
+      </a:lvl3pPr>
+      <a:lvl4pPr eaLnBrk="1" hangingPunct="1">
+        <a:defRPr>
+          <a:solidFill>
+            <a:schemeClr val="tx2"/>
+          </a:solidFill>
+        </a:defRPr>
+      </a:lvl4pPr>
+      <a:lvl5pPr eaLnBrk="1" hangingPunct="1">
+        <a:defRPr>
+          <a:solidFill>
+            <a:schemeClr val="tx2"/>
+          </a:solidFill>
+        </a:defRPr>
+      </a:lvl5pPr>
+      <a:lvl6pPr eaLnBrk="1" hangingPunct="1">
+        <a:defRPr>
+          <a:solidFill>
+            <a:schemeClr val="tx2"/>
+          </a:solidFill>
+        </a:defRPr>
+      </a:lvl6pPr>
+      <a:lvl7pPr eaLnBrk="1" hangingPunct="1">
+        <a:defRPr>
+          <a:solidFill>
+            <a:schemeClr val="tx2"/>
+          </a:solidFill>
+        </a:defRPr>
+      </a:lvl7pPr>
+      <a:lvl8pPr eaLnBrk="1" hangingPunct="1">
+        <a:defRPr>
+          <a:solidFill>
+            <a:schemeClr val="tx2"/>
+          </a:solidFill>
+        </a:defRPr>
+      </a:lvl8pPr>
+      <a:lvl9pPr eaLnBrk="1" hangingPunct="1">
+        <a:defRPr>
+          <a:solidFill>
+            <a:schemeClr val="tx2"/>
+          </a:solidFill>
+        </a:defRPr>
+      </a:lvl9pPr>
+    </p:titleStyle>
+    <p:bodyStyle>
+      <a:lvl1pPr marL="342900" indent="-342900" algn="l" defTabSz="457200" rtl="0" eaLnBrk="1" latinLnBrk="0" hangingPunct="1">
+        <a:spcBef>
+          <a:spcPts val="1000"/>
+        </a:spcBef>
+        <a:spcAft>
+          <a:spcPts val="0"/>
+        </a:spcAft>
+        <a:buClr>
+          <a:schemeClr val="bg2">
+            <a:lumMod val="40000"/>
+            <a:lumOff val="60000"/>
+          </a:schemeClr>
+        </a:buClr>
+        <a:buSzPct val="80000"/>
+        <a:buFont typeface="Wingdings 3" charset="2"/>
+        <a:buChar char=""/>
+        <a:defRPr sz="2000" b="0" i="0" kern="1200">
           <a:solidFill>
             <a:schemeClr val="tx1"/>
           </a:solidFill>
@@ -3046,18 +5785,213 @@
           <a:cs typeface="+mj-cs"/>
         </a:defRPr>
       </a:lvl1pPr>
-    </p:titleStyle>
-    <p:bodyStyle>
-      <a:lvl1pPr marL="228600" indent="-228600" algn="l" defTabSz="914400" rtl="0" eaLnBrk="1" latinLnBrk="0" hangingPunct="1">
-        <a:lnSpc>
-          <a:spcPct val="90000"/>
-        </a:lnSpc>
+      <a:lvl2pPr marL="742950" indent="-285750" algn="l" defTabSz="457200" rtl="0" eaLnBrk="1" latinLnBrk="0" hangingPunct="1">
         <a:spcBef>
           <a:spcPts val="1000"/>
         </a:spcBef>
-        <a:buFont typeface="Arial" panose="020B0604020202020204" pitchFamily="34" charset="0"/>
-        <a:buChar char="•"/>
-        <a:defRPr sz="2800" kern="1200">
+        <a:spcAft>
+          <a:spcPts val="0"/>
+        </a:spcAft>
+        <a:buClr>
+          <a:schemeClr val="bg2">
+            <a:lumMod val="40000"/>
+            <a:lumOff val="60000"/>
+          </a:schemeClr>
+        </a:buClr>
+        <a:buSzPct val="80000"/>
+        <a:buFont typeface="Wingdings 3" charset="2"/>
+        <a:buChar char=""/>
+        <a:defRPr sz="1800" b="0" i="0" kern="1200">
+          <a:solidFill>
+            <a:schemeClr val="tx1"/>
+          </a:solidFill>
+          <a:latin typeface="+mj-lt"/>
+          <a:ea typeface="+mj-ea"/>
+          <a:cs typeface="+mj-cs"/>
+        </a:defRPr>
+      </a:lvl2pPr>
+      <a:lvl3pPr marL="1143000" indent="-228600" algn="l" defTabSz="457200" rtl="0" eaLnBrk="1" latinLnBrk="0" hangingPunct="1">
+        <a:spcBef>
+          <a:spcPts val="1000"/>
+        </a:spcBef>
+        <a:spcAft>
+          <a:spcPts val="0"/>
+        </a:spcAft>
+        <a:buClr>
+          <a:schemeClr val="bg2">
+            <a:lumMod val="40000"/>
+            <a:lumOff val="60000"/>
+          </a:schemeClr>
+        </a:buClr>
+        <a:buSzPct val="80000"/>
+        <a:buFont typeface="Wingdings 3" charset="2"/>
+        <a:buChar char=""/>
+        <a:defRPr sz="1600" b="0" i="0" kern="1200">
+          <a:solidFill>
+            <a:schemeClr val="tx1"/>
+          </a:solidFill>
+          <a:latin typeface="+mj-lt"/>
+          <a:ea typeface="+mj-ea"/>
+          <a:cs typeface="+mj-cs"/>
+        </a:defRPr>
+      </a:lvl3pPr>
+      <a:lvl4pPr marL="1600200" indent="-228600" algn="l" defTabSz="457200" rtl="0" eaLnBrk="1" latinLnBrk="0" hangingPunct="1">
+        <a:spcBef>
+          <a:spcPts val="1000"/>
+        </a:spcBef>
+        <a:spcAft>
+          <a:spcPts val="0"/>
+        </a:spcAft>
+        <a:buClr>
+          <a:schemeClr val="bg2">
+            <a:lumMod val="40000"/>
+            <a:lumOff val="60000"/>
+          </a:schemeClr>
+        </a:buClr>
+        <a:buSzPct val="80000"/>
+        <a:buFont typeface="Wingdings 3" charset="2"/>
+        <a:buChar char=""/>
+        <a:defRPr sz="1400" b="0" i="0" kern="1200">
+          <a:solidFill>
+            <a:schemeClr val="tx1"/>
+          </a:solidFill>
+          <a:latin typeface="+mj-lt"/>
+          <a:ea typeface="+mj-ea"/>
+          <a:cs typeface="+mj-cs"/>
+        </a:defRPr>
+      </a:lvl4pPr>
+      <a:lvl5pPr marL="2057400" indent="-228600" algn="l" defTabSz="457200" rtl="0" eaLnBrk="1" latinLnBrk="0" hangingPunct="1">
+        <a:spcBef>
+          <a:spcPts val="1000"/>
+        </a:spcBef>
+        <a:spcAft>
+          <a:spcPts val="0"/>
+        </a:spcAft>
+        <a:buClr>
+          <a:schemeClr val="bg2">
+            <a:lumMod val="40000"/>
+            <a:lumOff val="60000"/>
+          </a:schemeClr>
+        </a:buClr>
+        <a:buSzPct val="80000"/>
+        <a:buFont typeface="Wingdings 3" charset="2"/>
+        <a:buChar char=""/>
+        <a:defRPr sz="1400" b="0" i="0" kern="1200">
+          <a:solidFill>
+            <a:schemeClr val="tx1"/>
+          </a:solidFill>
+          <a:latin typeface="+mj-lt"/>
+          <a:ea typeface="+mj-ea"/>
+          <a:cs typeface="+mj-cs"/>
+        </a:defRPr>
+      </a:lvl5pPr>
+      <a:lvl6pPr marL="2506000" indent="-228600" algn="l" defTabSz="457200" rtl="0" eaLnBrk="1" latinLnBrk="0" hangingPunct="1">
+        <a:spcBef>
+          <a:spcPts val="1000"/>
+        </a:spcBef>
+        <a:spcAft>
+          <a:spcPts val="0"/>
+        </a:spcAft>
+        <a:buClr>
+          <a:schemeClr val="bg2">
+            <a:lumMod val="40000"/>
+            <a:lumOff val="60000"/>
+          </a:schemeClr>
+        </a:buClr>
+        <a:buSzPct val="80000"/>
+        <a:buFont typeface="Wingdings 3" charset="2"/>
+        <a:buChar char=""/>
+        <a:defRPr sz="1400" b="0" i="0" kern="1200">
+          <a:solidFill>
+            <a:schemeClr val="tx1"/>
+          </a:solidFill>
+          <a:latin typeface="+mj-lt"/>
+          <a:ea typeface="+mj-ea"/>
+          <a:cs typeface="+mj-cs"/>
+        </a:defRPr>
+      </a:lvl6pPr>
+      <a:lvl7pPr marL="2971800" indent="-228600" algn="l" defTabSz="457200" rtl="0" eaLnBrk="1" latinLnBrk="0" hangingPunct="1">
+        <a:spcBef>
+          <a:spcPts val="1000"/>
+        </a:spcBef>
+        <a:spcAft>
+          <a:spcPts val="0"/>
+        </a:spcAft>
+        <a:buClr>
+          <a:schemeClr val="bg2">
+            <a:lumMod val="40000"/>
+            <a:lumOff val="60000"/>
+          </a:schemeClr>
+        </a:buClr>
+        <a:buSzPct val="80000"/>
+        <a:buFont typeface="Wingdings 3" charset="2"/>
+        <a:buChar char=""/>
+        <a:defRPr sz="1400" b="0" i="0" kern="1200">
+          <a:solidFill>
+            <a:schemeClr val="tx1"/>
+          </a:solidFill>
+          <a:latin typeface="+mj-lt"/>
+          <a:ea typeface="+mj-ea"/>
+          <a:cs typeface="+mj-cs"/>
+        </a:defRPr>
+      </a:lvl7pPr>
+      <a:lvl8pPr marL="3429000" indent="-228600" algn="l" defTabSz="457200" rtl="0" eaLnBrk="1" latinLnBrk="0" hangingPunct="1">
+        <a:spcBef>
+          <a:spcPts val="1000"/>
+        </a:spcBef>
+        <a:spcAft>
+          <a:spcPts val="0"/>
+        </a:spcAft>
+        <a:buClr>
+          <a:schemeClr val="bg2">
+            <a:lumMod val="40000"/>
+            <a:lumOff val="60000"/>
+          </a:schemeClr>
+        </a:buClr>
+        <a:buSzPct val="80000"/>
+        <a:buFont typeface="Wingdings 3" charset="2"/>
+        <a:buChar char=""/>
+        <a:defRPr sz="1400" b="0" i="0" kern="1200">
+          <a:solidFill>
+            <a:schemeClr val="tx1"/>
+          </a:solidFill>
+          <a:latin typeface="+mj-lt"/>
+          <a:ea typeface="+mj-ea"/>
+          <a:cs typeface="+mj-cs"/>
+        </a:defRPr>
+      </a:lvl8pPr>
+      <a:lvl9pPr marL="3886200" indent="-228600" algn="l" defTabSz="457200" rtl="0" eaLnBrk="1" latinLnBrk="0" hangingPunct="1">
+        <a:spcBef>
+          <a:spcPts val="1000"/>
+        </a:spcBef>
+        <a:spcAft>
+          <a:spcPts val="0"/>
+        </a:spcAft>
+        <a:buClr>
+          <a:schemeClr val="bg2">
+            <a:lumMod val="40000"/>
+            <a:lumOff val="60000"/>
+          </a:schemeClr>
+        </a:buClr>
+        <a:buSzPct val="80000"/>
+        <a:buFont typeface="Wingdings 3" charset="2"/>
+        <a:buChar char=""/>
+        <a:defRPr sz="1400" b="0" i="0" kern="1200">
+          <a:solidFill>
+            <a:schemeClr val="tx1"/>
+          </a:solidFill>
+          <a:latin typeface="+mj-lt"/>
+          <a:ea typeface="+mj-ea"/>
+          <a:cs typeface="+mj-cs"/>
+        </a:defRPr>
+      </a:lvl9pPr>
+    </p:bodyStyle>
+    <p:otherStyle>
+      <a:defPPr>
+        <a:defRPr lang="en-US"/>
+      </a:defPPr>
+      <a:lvl1pPr marL="0" algn="l" defTabSz="457200" rtl="0" eaLnBrk="1" latinLnBrk="0" hangingPunct="1">
+        <a:defRPr sz="1800" kern="1200">
           <a:solidFill>
             <a:schemeClr val="tx1"/>
           </a:solidFill>
@@ -3066,16 +6000,8 @@
           <a:cs typeface="+mn-cs"/>
         </a:defRPr>
       </a:lvl1pPr>
-      <a:lvl2pPr marL="685800" indent="-228600" algn="l" defTabSz="914400" rtl="0" eaLnBrk="1" latinLnBrk="0" hangingPunct="1">
-        <a:lnSpc>
-          <a:spcPct val="90000"/>
-        </a:lnSpc>
-        <a:spcBef>
-          <a:spcPts val="500"/>
-        </a:spcBef>
-        <a:buFont typeface="Arial" panose="020B0604020202020204" pitchFamily="34" charset="0"/>
-        <a:buChar char="•"/>
-        <a:defRPr sz="2400" kern="1200">
+      <a:lvl2pPr marL="457200" algn="l" defTabSz="457200" rtl="0" eaLnBrk="1" latinLnBrk="0" hangingPunct="1">
+        <a:defRPr sz="1800" kern="1200">
           <a:solidFill>
             <a:schemeClr val="tx1"/>
           </a:solidFill>
@@ -3084,16 +6010,8 @@
           <a:cs typeface="+mn-cs"/>
         </a:defRPr>
       </a:lvl2pPr>
-      <a:lvl3pPr marL="1143000" indent="-228600" algn="l" defTabSz="914400" rtl="0" eaLnBrk="1" latinLnBrk="0" hangingPunct="1">
-        <a:lnSpc>
-          <a:spcPct val="90000"/>
-        </a:lnSpc>
-        <a:spcBef>
-          <a:spcPts val="500"/>
-        </a:spcBef>
-        <a:buFont typeface="Arial" panose="020B0604020202020204" pitchFamily="34" charset="0"/>
-        <a:buChar char="•"/>
-        <a:defRPr sz="2000" kern="1200">
+      <a:lvl3pPr marL="914400" algn="l" defTabSz="457200" rtl="0" eaLnBrk="1" latinLnBrk="0" hangingPunct="1">
+        <a:defRPr sz="1800" kern="1200">
           <a:solidFill>
             <a:schemeClr val="tx1"/>
           </a:solidFill>
@@ -3102,15 +6020,7 @@
           <a:cs typeface="+mn-cs"/>
         </a:defRPr>
       </a:lvl3pPr>
-      <a:lvl4pPr marL="1600200" indent="-228600" algn="l" defTabSz="914400" rtl="0" eaLnBrk="1" latinLnBrk="0" hangingPunct="1">
-        <a:lnSpc>
-          <a:spcPct val="90000"/>
-        </a:lnSpc>
-        <a:spcBef>
-          <a:spcPts val="500"/>
-        </a:spcBef>
-        <a:buFont typeface="Arial" panose="020B0604020202020204" pitchFamily="34" charset="0"/>
-        <a:buChar char="•"/>
+      <a:lvl4pPr marL="1371600" algn="l" defTabSz="457200" rtl="0" eaLnBrk="1" latinLnBrk="0" hangingPunct="1">
         <a:defRPr sz="1800" kern="1200">
           <a:solidFill>
             <a:schemeClr val="tx1"/>
@@ -3120,15 +6030,7 @@
           <a:cs typeface="+mn-cs"/>
         </a:defRPr>
       </a:lvl4pPr>
-      <a:lvl5pPr marL="2057400" indent="-228600" algn="l" defTabSz="914400" rtl="0" eaLnBrk="1" latinLnBrk="0" hangingPunct="1">
-        <a:lnSpc>
-          <a:spcPct val="90000"/>
-        </a:lnSpc>
-        <a:spcBef>
-          <a:spcPts val="500"/>
-        </a:spcBef>
-        <a:buFont typeface="Arial" panose="020B0604020202020204" pitchFamily="34" charset="0"/>
-        <a:buChar char="•"/>
+      <a:lvl5pPr marL="1828800" algn="l" defTabSz="457200" rtl="0" eaLnBrk="1" latinLnBrk="0" hangingPunct="1">
         <a:defRPr sz="1800" kern="1200">
           <a:solidFill>
             <a:schemeClr val="tx1"/>
@@ -3138,15 +6040,7 @@
           <a:cs typeface="+mn-cs"/>
         </a:defRPr>
       </a:lvl5pPr>
-      <a:lvl6pPr marL="2514600" indent="-228600" algn="l" defTabSz="914400" rtl="0" eaLnBrk="1" latinLnBrk="0" hangingPunct="1">
-        <a:lnSpc>
-          <a:spcPct val="90000"/>
-        </a:lnSpc>
-        <a:spcBef>
-          <a:spcPts val="500"/>
-        </a:spcBef>
-        <a:buFont typeface="Arial" panose="020B0604020202020204" pitchFamily="34" charset="0"/>
-        <a:buChar char="•"/>
+      <a:lvl6pPr marL="2286000" algn="l" defTabSz="457200" rtl="0" eaLnBrk="1" latinLnBrk="0" hangingPunct="1">
         <a:defRPr sz="1800" kern="1200">
           <a:solidFill>
             <a:schemeClr val="tx1"/>
@@ -3156,15 +6050,7 @@
           <a:cs typeface="+mn-cs"/>
         </a:defRPr>
       </a:lvl6pPr>
-      <a:lvl7pPr marL="2971800" indent="-228600" algn="l" defTabSz="914400" rtl="0" eaLnBrk="1" latinLnBrk="0" hangingPunct="1">
-        <a:lnSpc>
-          <a:spcPct val="90000"/>
-        </a:lnSpc>
-        <a:spcBef>
-          <a:spcPts val="500"/>
-        </a:spcBef>
-        <a:buFont typeface="Arial" panose="020B0604020202020204" pitchFamily="34" charset="0"/>
-        <a:buChar char="•"/>
+      <a:lvl7pPr marL="2743200" algn="l" defTabSz="457200" rtl="0" eaLnBrk="1" latinLnBrk="0" hangingPunct="1">
         <a:defRPr sz="1800" kern="1200">
           <a:solidFill>
             <a:schemeClr val="tx1"/>
@@ -3174,15 +6060,7 @@
           <a:cs typeface="+mn-cs"/>
         </a:defRPr>
       </a:lvl7pPr>
-      <a:lvl8pPr marL="3429000" indent="-228600" algn="l" defTabSz="914400" rtl="0" eaLnBrk="1" latinLnBrk="0" hangingPunct="1">
-        <a:lnSpc>
-          <a:spcPct val="90000"/>
-        </a:lnSpc>
-        <a:spcBef>
-          <a:spcPts val="500"/>
-        </a:spcBef>
-        <a:buFont typeface="Arial" panose="020B0604020202020204" pitchFamily="34" charset="0"/>
-        <a:buChar char="•"/>
+      <a:lvl8pPr marL="3200400" algn="l" defTabSz="457200" rtl="0" eaLnBrk="1" latinLnBrk="0" hangingPunct="1">
         <a:defRPr sz="1800" kern="1200">
           <a:solidFill>
             <a:schemeClr val="tx1"/>
@@ -3192,110 +6070,7 @@
           <a:cs typeface="+mn-cs"/>
         </a:defRPr>
       </a:lvl8pPr>
-      <a:lvl9pPr marL="3886200" indent="-228600" algn="l" defTabSz="914400" rtl="0" eaLnBrk="1" latinLnBrk="0" hangingPunct="1">
-        <a:lnSpc>
-          <a:spcPct val="90000"/>
-        </a:lnSpc>
-        <a:spcBef>
-          <a:spcPts val="500"/>
-        </a:spcBef>
-        <a:buFont typeface="Arial" panose="020B0604020202020204" pitchFamily="34" charset="0"/>
-        <a:buChar char="•"/>
-        <a:defRPr sz="1800" kern="1200">
-          <a:solidFill>
-            <a:schemeClr val="tx1"/>
-          </a:solidFill>
-          <a:latin typeface="+mn-lt"/>
-          <a:ea typeface="+mn-ea"/>
-          <a:cs typeface="+mn-cs"/>
-        </a:defRPr>
-      </a:lvl9pPr>
-    </p:bodyStyle>
-    <p:otherStyle>
-      <a:defPPr>
-        <a:defRPr lang="en-US"/>
-      </a:defPPr>
-      <a:lvl1pPr marL="0" algn="l" defTabSz="914400" rtl="0" eaLnBrk="1" latinLnBrk="0" hangingPunct="1">
-        <a:defRPr sz="1800" kern="1200">
-          <a:solidFill>
-            <a:schemeClr val="tx1"/>
-          </a:solidFill>
-          <a:latin typeface="+mn-lt"/>
-          <a:ea typeface="+mn-ea"/>
-          <a:cs typeface="+mn-cs"/>
-        </a:defRPr>
-      </a:lvl1pPr>
-      <a:lvl2pPr marL="457200" algn="l" defTabSz="914400" rtl="0" eaLnBrk="1" latinLnBrk="0" hangingPunct="1">
-        <a:defRPr sz="1800" kern="1200">
-          <a:solidFill>
-            <a:schemeClr val="tx1"/>
-          </a:solidFill>
-          <a:latin typeface="+mn-lt"/>
-          <a:ea typeface="+mn-ea"/>
-          <a:cs typeface="+mn-cs"/>
-        </a:defRPr>
-      </a:lvl2pPr>
-      <a:lvl3pPr marL="914400" algn="l" defTabSz="914400" rtl="0" eaLnBrk="1" latinLnBrk="0" hangingPunct="1">
-        <a:defRPr sz="1800" kern="1200">
-          <a:solidFill>
-            <a:schemeClr val="tx1"/>
-          </a:solidFill>
-          <a:latin typeface="+mn-lt"/>
-          <a:ea typeface="+mn-ea"/>
-          <a:cs typeface="+mn-cs"/>
-        </a:defRPr>
-      </a:lvl3pPr>
-      <a:lvl4pPr marL="1371600" algn="l" defTabSz="914400" rtl="0" eaLnBrk="1" latinLnBrk="0" hangingPunct="1">
-        <a:defRPr sz="1800" kern="1200">
-          <a:solidFill>
-            <a:schemeClr val="tx1"/>
-          </a:solidFill>
-          <a:latin typeface="+mn-lt"/>
-          <a:ea typeface="+mn-ea"/>
-          <a:cs typeface="+mn-cs"/>
-        </a:defRPr>
-      </a:lvl4pPr>
-      <a:lvl5pPr marL="1828800" algn="l" defTabSz="914400" rtl="0" eaLnBrk="1" latinLnBrk="0" hangingPunct="1">
-        <a:defRPr sz="1800" kern="1200">
-          <a:solidFill>
-            <a:schemeClr val="tx1"/>
-          </a:solidFill>
-          <a:latin typeface="+mn-lt"/>
-          <a:ea typeface="+mn-ea"/>
-          <a:cs typeface="+mn-cs"/>
-        </a:defRPr>
-      </a:lvl5pPr>
-      <a:lvl6pPr marL="2286000" algn="l" defTabSz="914400" rtl="0" eaLnBrk="1" latinLnBrk="0" hangingPunct="1">
-        <a:defRPr sz="1800" kern="1200">
-          <a:solidFill>
-            <a:schemeClr val="tx1"/>
-          </a:solidFill>
-          <a:latin typeface="+mn-lt"/>
-          <a:ea typeface="+mn-ea"/>
-          <a:cs typeface="+mn-cs"/>
-        </a:defRPr>
-      </a:lvl6pPr>
-      <a:lvl7pPr marL="2743200" algn="l" defTabSz="914400" rtl="0" eaLnBrk="1" latinLnBrk="0" hangingPunct="1">
-        <a:defRPr sz="1800" kern="1200">
-          <a:solidFill>
-            <a:schemeClr val="tx1"/>
-          </a:solidFill>
-          <a:latin typeface="+mn-lt"/>
-          <a:ea typeface="+mn-ea"/>
-          <a:cs typeface="+mn-cs"/>
-        </a:defRPr>
-      </a:lvl7pPr>
-      <a:lvl8pPr marL="3200400" algn="l" defTabSz="914400" rtl="0" eaLnBrk="1" latinLnBrk="0" hangingPunct="1">
-        <a:defRPr sz="1800" kern="1200">
-          <a:solidFill>
-            <a:schemeClr val="tx1"/>
-          </a:solidFill>
-          <a:latin typeface="+mn-lt"/>
-          <a:ea typeface="+mn-ea"/>
-          <a:cs typeface="+mn-cs"/>
-        </a:defRPr>
-      </a:lvl8pPr>
-      <a:lvl9pPr marL="3657600" algn="l" defTabSz="914400" rtl="0" eaLnBrk="1" latinLnBrk="0" hangingPunct="1">
+      <a:lvl9pPr marL="3657600" algn="l" defTabSz="457200" rtl="0" eaLnBrk="1" latinLnBrk="0" hangingPunct="1">
         <a:defRPr sz="1800" kern="1200">
           <a:solidFill>
             <a:schemeClr val="tx1"/>
@@ -3393,6 +6168,305 @@
 </p:sld>
 </file>
 
+<file path=ppt/slides/slide10.xml><?xml version="1.0" encoding="utf-8"?>
+<p:sld xmlns:a="http://schemas.openxmlformats.org/drawingml/2006/main" xmlns:r="http://schemas.openxmlformats.org/officeDocument/2006/relationships" xmlns:p="http://schemas.openxmlformats.org/presentationml/2006/main">
+  <p:cSld>
+    <p:spTree>
+      <p:nvGrpSpPr>
+        <p:cNvPr id="1" name=""/>
+        <p:cNvGrpSpPr/>
+        <p:nvPr/>
+      </p:nvGrpSpPr>
+      <p:grpSpPr>
+        <a:xfrm>
+          <a:off x="0" y="0"/>
+          <a:ext cx="0" cy="0"/>
+          <a:chOff x="0" y="0"/>
+          <a:chExt cx="0" cy="0"/>
+        </a:xfrm>
+      </p:grpSpPr>
+      <p:sp>
+        <p:nvSpPr>
+          <p:cNvPr id="2" name="Title 1">
+            <a:extLst>
+              <a:ext uri="{FF2B5EF4-FFF2-40B4-BE49-F238E27FC236}">
+                <a16:creationId xmlns:a16="http://schemas.microsoft.com/office/drawing/2014/main" id="{E2A8B833-A627-EF0D-80E8-9139A89545EF}"/>
+              </a:ext>
+            </a:extLst>
+          </p:cNvPr>
+          <p:cNvSpPr>
+            <a:spLocks noGrp="1"/>
+          </p:cNvSpPr>
+          <p:nvPr>
+            <p:ph type="title"/>
+          </p:nvPr>
+        </p:nvSpPr>
+        <p:spPr/>
+        <p:txBody>
+          <a:bodyPr/>
+          <a:lstStyle/>
+          <a:p>
+            <a:r>
+              <a:rPr lang="en-US" dirty="0"/>
+              <a:t>Validation</a:t>
+            </a:r>
+          </a:p>
+        </p:txBody>
+      </p:sp>
+      <p:sp>
+        <p:nvSpPr>
+          <p:cNvPr id="3" name="Picture Placeholder 2">
+            <a:extLst>
+              <a:ext uri="{FF2B5EF4-FFF2-40B4-BE49-F238E27FC236}">
+                <a16:creationId xmlns:a16="http://schemas.microsoft.com/office/drawing/2014/main" id="{02029C07-C905-3A77-FA6C-DA96735E126E}"/>
+              </a:ext>
+            </a:extLst>
+          </p:cNvPr>
+          <p:cNvSpPr>
+            <a:spLocks noGrp="1"/>
+          </p:cNvSpPr>
+          <p:nvPr>
+            <p:ph type="pic" idx="1"/>
+          </p:nvPr>
+        </p:nvSpPr>
+        <p:spPr/>
+        <p:txBody>
+          <a:bodyPr/>
+          <a:lstStyle/>
+          <a:p>
+            <a:endParaRPr lang="en-US"/>
+          </a:p>
+        </p:txBody>
+      </p:sp>
+      <p:sp>
+        <p:nvSpPr>
+          <p:cNvPr id="4" name="Text Placeholder 3">
+            <a:extLst>
+              <a:ext uri="{FF2B5EF4-FFF2-40B4-BE49-F238E27FC236}">
+                <a16:creationId xmlns:a16="http://schemas.microsoft.com/office/drawing/2014/main" id="{039F6216-FE26-A01B-8564-DFA27F4EA6F6}"/>
+              </a:ext>
+            </a:extLst>
+          </p:cNvPr>
+          <p:cNvSpPr>
+            <a:spLocks noGrp="1"/>
+          </p:cNvSpPr>
+          <p:nvPr>
+            <p:ph type="body" sz="half" idx="2"/>
+          </p:nvPr>
+        </p:nvSpPr>
+        <p:spPr/>
+        <p:txBody>
+          <a:bodyPr/>
+          <a:lstStyle/>
+          <a:p>
+            <a:r>
+              <a:rPr lang="en-US" dirty="0"/>
+              <a:t>For proper verification, I will use an analytic solver</a:t>
+            </a:r>
+          </a:p>
+        </p:txBody>
+      </p:sp>
+    </p:spTree>
+    <p:extLst>
+      <p:ext uri="{BB962C8B-B14F-4D97-AF65-F5344CB8AC3E}">
+        <p14:creationId xmlns:p14="http://schemas.microsoft.com/office/powerpoint/2010/main" val="2347936626"/>
+      </p:ext>
+    </p:extLst>
+  </p:cSld>
+  <p:clrMapOvr>
+    <a:masterClrMapping/>
+  </p:clrMapOvr>
+</p:sld>
+</file>
+
+<file path=ppt/slides/slide11.xml><?xml version="1.0" encoding="utf-8"?>
+<p:sld xmlns:a="http://schemas.openxmlformats.org/drawingml/2006/main" xmlns:r="http://schemas.openxmlformats.org/officeDocument/2006/relationships" xmlns:p="http://schemas.openxmlformats.org/presentationml/2006/main">
+  <p:cSld>
+    <p:spTree>
+      <p:nvGrpSpPr>
+        <p:cNvPr id="1" name=""/>
+        <p:cNvGrpSpPr/>
+        <p:nvPr/>
+      </p:nvGrpSpPr>
+      <p:grpSpPr>
+        <a:xfrm>
+          <a:off x="0" y="0"/>
+          <a:ext cx="0" cy="0"/>
+          <a:chOff x="0" y="0"/>
+          <a:chExt cx="0" cy="0"/>
+        </a:xfrm>
+      </p:grpSpPr>
+      <p:sp>
+        <p:nvSpPr>
+          <p:cNvPr id="2" name="Title 1">
+            <a:extLst>
+              <a:ext uri="{FF2B5EF4-FFF2-40B4-BE49-F238E27FC236}">
+                <a16:creationId xmlns:a16="http://schemas.microsoft.com/office/drawing/2014/main" id="{82892E64-2938-2E72-3704-0B2F214CA44C}"/>
+              </a:ext>
+            </a:extLst>
+          </p:cNvPr>
+          <p:cNvSpPr>
+            <a:spLocks noGrp="1"/>
+          </p:cNvSpPr>
+          <p:nvPr>
+            <p:ph type="title"/>
+          </p:nvPr>
+        </p:nvSpPr>
+        <p:spPr/>
+        <p:txBody>
+          <a:bodyPr/>
+          <a:lstStyle/>
+          <a:p>
+            <a:endParaRPr lang="en-US" dirty="0"/>
+          </a:p>
+        </p:txBody>
+      </p:sp>
+      <p:sp>
+        <p:nvSpPr>
+          <p:cNvPr id="3" name="Content Placeholder 2">
+            <a:extLst>
+              <a:ext uri="{FF2B5EF4-FFF2-40B4-BE49-F238E27FC236}">
+                <a16:creationId xmlns:a16="http://schemas.microsoft.com/office/drawing/2014/main" id="{807E48B6-D143-64CD-E99F-B83C8C90B860}"/>
+              </a:ext>
+            </a:extLst>
+          </p:cNvPr>
+          <p:cNvSpPr>
+            <a:spLocks noGrp="1"/>
+          </p:cNvSpPr>
+          <p:nvPr>
+            <p:ph idx="1"/>
+          </p:nvPr>
+        </p:nvSpPr>
+        <p:spPr/>
+        <p:txBody>
+          <a:bodyPr/>
+          <a:lstStyle/>
+          <a:p>
+            <a:endParaRPr lang="en-US"/>
+          </a:p>
+        </p:txBody>
+      </p:sp>
+    </p:spTree>
+    <p:extLst>
+      <p:ext uri="{BB962C8B-B14F-4D97-AF65-F5344CB8AC3E}">
+        <p14:creationId xmlns:p14="http://schemas.microsoft.com/office/powerpoint/2010/main" val="1310250"/>
+      </p:ext>
+    </p:extLst>
+  </p:cSld>
+  <p:clrMapOvr>
+    <a:masterClrMapping/>
+  </p:clrMapOvr>
+</p:sld>
+</file>
+
+<file path=ppt/slides/slide12.xml><?xml version="1.0" encoding="utf-8"?>
+<p:sld xmlns:a="http://schemas.openxmlformats.org/drawingml/2006/main" xmlns:r="http://schemas.openxmlformats.org/officeDocument/2006/relationships" xmlns:p="http://schemas.openxmlformats.org/presentationml/2006/main">
+  <p:cSld>
+    <p:spTree>
+      <p:nvGrpSpPr>
+        <p:cNvPr id="1" name=""/>
+        <p:cNvGrpSpPr/>
+        <p:nvPr/>
+      </p:nvGrpSpPr>
+      <p:grpSpPr>
+        <a:xfrm>
+          <a:off x="0" y="0"/>
+          <a:ext cx="0" cy="0"/>
+          <a:chOff x="0" y="0"/>
+          <a:chExt cx="0" cy="0"/>
+        </a:xfrm>
+      </p:grpSpPr>
+      <p:sp>
+        <p:nvSpPr>
+          <p:cNvPr id="2" name="Title 1">
+            <a:extLst>
+              <a:ext uri="{FF2B5EF4-FFF2-40B4-BE49-F238E27FC236}">
+                <a16:creationId xmlns:a16="http://schemas.microsoft.com/office/drawing/2014/main" id="{4DA35A90-343A-331E-F423-28D767CCB9E2}"/>
+              </a:ext>
+            </a:extLst>
+          </p:cNvPr>
+          <p:cNvSpPr>
+            <a:spLocks noGrp="1"/>
+          </p:cNvSpPr>
+          <p:nvPr>
+            <p:ph type="title"/>
+          </p:nvPr>
+        </p:nvSpPr>
+        <p:spPr/>
+        <p:txBody>
+          <a:bodyPr/>
+          <a:lstStyle/>
+          <a:p>
+            <a:r>
+              <a:rPr lang="en-US" dirty="0"/>
+              <a:t>Structure</a:t>
+            </a:r>
+          </a:p>
+        </p:txBody>
+      </p:sp>
+      <p:sp>
+        <p:nvSpPr>
+          <p:cNvPr id="3" name="Content Placeholder 2">
+            <a:extLst>
+              <a:ext uri="{FF2B5EF4-FFF2-40B4-BE49-F238E27FC236}">
+                <a16:creationId xmlns:a16="http://schemas.microsoft.com/office/drawing/2014/main" id="{F02F2B44-79DC-9756-4DB0-9D4EFB36E436}"/>
+              </a:ext>
+            </a:extLst>
+          </p:cNvPr>
+          <p:cNvSpPr>
+            <a:spLocks noGrp="1"/>
+          </p:cNvSpPr>
+          <p:nvPr>
+            <p:ph idx="1"/>
+          </p:nvPr>
+        </p:nvSpPr>
+        <p:spPr/>
+        <p:txBody>
+          <a:bodyPr/>
+          <a:lstStyle/>
+          <a:p>
+            <a:endParaRPr lang="en-US"/>
+          </a:p>
+        </p:txBody>
+      </p:sp>
+      <p:sp>
+        <p:nvSpPr>
+          <p:cNvPr id="4" name="Text Placeholder 3">
+            <a:extLst>
+              <a:ext uri="{FF2B5EF4-FFF2-40B4-BE49-F238E27FC236}">
+                <a16:creationId xmlns:a16="http://schemas.microsoft.com/office/drawing/2014/main" id="{BAA88F27-8EE8-783C-5CB9-DD3F9E6A24A7}"/>
+              </a:ext>
+            </a:extLst>
+          </p:cNvPr>
+          <p:cNvSpPr>
+            <a:spLocks noGrp="1"/>
+          </p:cNvSpPr>
+          <p:nvPr>
+            <p:ph type="body" sz="half" idx="2"/>
+          </p:nvPr>
+        </p:nvSpPr>
+        <p:spPr/>
+        <p:txBody>
+          <a:bodyPr/>
+          <a:lstStyle/>
+          <a:p>
+            <a:endParaRPr lang="en-US" dirty="0"/>
+          </a:p>
+        </p:txBody>
+      </p:sp>
+    </p:spTree>
+    <p:extLst>
+      <p:ext uri="{BB962C8B-B14F-4D97-AF65-F5344CB8AC3E}">
+        <p14:creationId xmlns:p14="http://schemas.microsoft.com/office/powerpoint/2010/main" val="829106148"/>
+      </p:ext>
+    </p:extLst>
+  </p:cSld>
+  <p:clrMapOvr>
+    <a:masterClrMapping/>
+  </p:clrMapOvr>
+</p:sld>
+</file>
+
 <file path=ppt/slides/slide2.xml><?xml version="1.0" encoding="utf-8"?>
 <p:sld xmlns:a="http://schemas.openxmlformats.org/drawingml/2006/main" xmlns:r="http://schemas.openxmlformats.org/officeDocument/2006/relationships" xmlns:p="http://schemas.openxmlformats.org/presentationml/2006/main">
   <p:cSld>
@@ -3415,7 +6489,7 @@
           <p:cNvPr id="2" name="Title 1">
             <a:extLst>
               <a:ext uri="{FF2B5EF4-FFF2-40B4-BE49-F238E27FC236}">
-                <a16:creationId xmlns:a16="http://schemas.microsoft.com/office/drawing/2014/main" id="{68CDE3B1-A1D1-CD63-EFDA-1AE7F26FA84E}"/>
+                <a16:creationId xmlns:a16="http://schemas.microsoft.com/office/drawing/2014/main" id="{7F51885E-7E45-1838-C5CE-F10B02BE33A0}"/>
               </a:ext>
             </a:extLst>
           </p:cNvPr>
@@ -3433,183 +6507,728 @@
           <a:p>
             <a:r>
               <a:rPr lang="en-US" dirty="0"/>
-              <a:t>Sanity Checks</a:t>
-            </a:r>
-          </a:p>
-        </p:txBody>
-      </p:sp>
-      <p:sp>
-        <p:nvSpPr>
-          <p:cNvPr id="3" name="Content Placeholder 2">
+              <a:t>The Experimental Setup</a:t>
+            </a:r>
+          </a:p>
+        </p:txBody>
+      </p:sp>
+      <p:pic>
+        <p:nvPicPr>
+          <p:cNvPr id="7" name="Content Placeholder 6">
             <a:extLst>
               <a:ext uri="{FF2B5EF4-FFF2-40B4-BE49-F238E27FC236}">
-                <a16:creationId xmlns:a16="http://schemas.microsoft.com/office/drawing/2014/main" id="{A967A8ED-E292-CF61-9F53-B9DCD8CEFC7E}"/>
+                <a16:creationId xmlns:a16="http://schemas.microsoft.com/office/drawing/2014/main" id="{7979D269-78B7-1CB2-DED0-0A47B66C7350}"/>
               </a:ext>
             </a:extLst>
           </p:cNvPr>
-          <p:cNvSpPr>
-            <a:spLocks noGrp="1"/>
-          </p:cNvSpPr>
+          <p:cNvPicPr>
+            <a:picLocks noGrp="1" noChangeAspect="1"/>
+          </p:cNvPicPr>
           <p:nvPr>
             <p:ph idx="1"/>
           </p:nvPr>
-        </p:nvSpPr>
-        <p:spPr/>
-        <p:txBody>
-          <a:bodyPr/>
-          <a:lstStyle/>
-          <a:p>
-            <a:endParaRPr lang="en-US" dirty="0"/>
-          </a:p>
-        </p:txBody>
-      </p:sp>
-      <p:sp>
-        <p:nvSpPr>
-          <p:cNvPr id="4" name="Text Placeholder 3">
+        </p:nvPicPr>
+        <p:blipFill>
+          <a:blip r:embed="rId2"/>
+          <a:stretch>
+            <a:fillRect/>
+          </a:stretch>
+        </p:blipFill>
+        <p:spPr>
+          <a:xfrm>
+            <a:off x="767246" y="2736970"/>
+            <a:ext cx="4010054" cy="2990872"/>
+          </a:xfrm>
+          <a:prstGeom prst="rect">
+            <a:avLst/>
+          </a:prstGeom>
+        </p:spPr>
+      </p:pic>
+      <p:pic>
+        <p:nvPicPr>
+          <p:cNvPr id="9" name="Picture 8">
             <a:extLst>
               <a:ext uri="{FF2B5EF4-FFF2-40B4-BE49-F238E27FC236}">
-                <a16:creationId xmlns:a16="http://schemas.microsoft.com/office/drawing/2014/main" id="{1D46CF0A-A784-9712-C2C8-FC454923D163}"/>
+                <a16:creationId xmlns:a16="http://schemas.microsoft.com/office/drawing/2014/main" id="{9AB91F91-4097-493D-65AB-5A166AFFB796}"/>
               </a:ext>
             </a:extLst>
           </p:cNvPr>
-          <p:cNvSpPr>
-            <a:spLocks noGrp="1"/>
-          </p:cNvSpPr>
-          <p:nvPr>
-            <p:ph type="body" sz="half" idx="2"/>
-          </p:nvPr>
-        </p:nvSpPr>
-        <p:spPr/>
-        <p:txBody>
-          <a:bodyPr>
-            <a:normAutofit fontScale="92500" lnSpcReduction="10000"/>
+          <p:cNvPicPr>
+            <a:picLocks noChangeAspect="1"/>
+          </p:cNvPicPr>
+          <p:nvPr/>
+        </p:nvPicPr>
+        <p:blipFill>
+          <a:blip r:embed="rId3"/>
+          <a:stretch>
+            <a:fillRect/>
+          </a:stretch>
+        </p:blipFill>
+        <p:spPr>
+          <a:xfrm>
+            <a:off x="6416568" y="2979859"/>
+            <a:ext cx="3562376" cy="2505093"/>
+          </a:xfrm>
+          <a:prstGeom prst="rect">
+            <a:avLst/>
+          </a:prstGeom>
+        </p:spPr>
+      </p:pic>
+      <p:sp>
+        <p:nvSpPr>
+          <p:cNvPr id="10" name="Oval 9">
+            <a:extLst>
+              <a:ext uri="{FF2B5EF4-FFF2-40B4-BE49-F238E27FC236}">
+                <a16:creationId xmlns:a16="http://schemas.microsoft.com/office/drawing/2014/main" id="{A1E60410-D2D2-80E1-8BB0-68BD9497A657}"/>
+              </a:ext>
+            </a:extLst>
+          </p:cNvPr>
+          <p:cNvSpPr/>
+          <p:nvPr/>
+        </p:nvSpPr>
+        <p:spPr>
+          <a:xfrm>
+            <a:off x="2406649" y="4013199"/>
+            <a:ext cx="212725" cy="244475"/>
+          </a:xfrm>
+          <a:prstGeom prst="ellipse">
+            <a:avLst/>
+          </a:prstGeom>
+          <a:noFill/>
+          <a:ln w="9525" cap="flat" cmpd="sng" algn="ctr">
+            <a:solidFill>
+              <a:schemeClr val="accent1"/>
+            </a:solidFill>
+            <a:prstDash val="solid"/>
+            <a:round/>
+            <a:headEnd type="none" w="med" len="med"/>
+            <a:tailEnd type="none" w="med" len="med"/>
+          </a:ln>
+        </p:spPr>
+        <p:style>
+          <a:lnRef idx="0">
+            <a:scrgbClr r="0" g="0" b="0"/>
+          </a:lnRef>
+          <a:fillRef idx="0">
+            <a:scrgbClr r="0" g="0" b="0"/>
+          </a:fillRef>
+          <a:effectRef idx="0">
+            <a:scrgbClr r="0" g="0" b="0"/>
+          </a:effectRef>
+          <a:fontRef idx="minor">
+            <a:schemeClr val="accent1"/>
+          </a:fontRef>
+        </p:style>
+        <p:txBody>
+          <a:bodyPr rtlCol="0" anchor="ctr"/>
+          <a:lstStyle/>
+          <a:p>
+            <a:pPr algn="ctr"/>
+            <a:endParaRPr lang="en-US"/>
+          </a:p>
+        </p:txBody>
+      </p:sp>
+      <p:sp>
+        <p:nvSpPr>
+          <p:cNvPr id="11" name="TextBox 10">
+            <a:extLst>
+              <a:ext uri="{FF2B5EF4-FFF2-40B4-BE49-F238E27FC236}">
+                <a16:creationId xmlns:a16="http://schemas.microsoft.com/office/drawing/2014/main" id="{CE91E650-593F-1E09-81AB-496D0BD94930}"/>
+              </a:ext>
+            </a:extLst>
+          </p:cNvPr>
+          <p:cNvSpPr txBox="1"/>
+          <p:nvPr/>
+        </p:nvSpPr>
+        <p:spPr>
+          <a:xfrm>
+            <a:off x="4013199" y="2295525"/>
+            <a:ext cx="1454151" cy="338554"/>
+          </a:xfrm>
+          <a:prstGeom prst="rect">
+            <a:avLst/>
+          </a:prstGeom>
+          <a:noFill/>
+        </p:spPr>
+        <p:txBody>
+          <a:bodyPr wrap="square" rtlCol="0">
+            <a:spAutoFit/>
           </a:bodyPr>
           <a:lstStyle/>
           <a:p>
-            <a:pPr marL="342900" indent="-342900">
-              <a:buAutoNum type="arabicPeriod"/>
-            </a:pPr>
+            <a:r>
+              <a:rPr lang="en-US" sz="1600" dirty="0"/>
+              <a:t>The source</a:t>
+            </a:r>
+          </a:p>
+        </p:txBody>
+      </p:sp>
+      <p:cxnSp>
+        <p:nvCxnSpPr>
+          <p:cNvPr id="15" name="Connector: Curved 14">
+            <a:extLst>
+              <a:ext uri="{FF2B5EF4-FFF2-40B4-BE49-F238E27FC236}">
+                <a16:creationId xmlns:a16="http://schemas.microsoft.com/office/drawing/2014/main" id="{80FD5669-7FE1-BA61-9F4F-F229D21DB396}"/>
+              </a:ext>
+            </a:extLst>
+          </p:cNvPr>
+          <p:cNvCxnSpPr>
+            <a:cxnSpLocks/>
+            <a:stCxn id="10" idx="6"/>
+            <a:endCxn id="11" idx="1"/>
+          </p:cNvCxnSpPr>
+          <p:nvPr/>
+        </p:nvCxnSpPr>
+        <p:spPr>
+          <a:xfrm flipV="1">
+            <a:off x="2619374" y="2464802"/>
+            <a:ext cx="1393825" cy="1670635"/>
+          </a:xfrm>
+          <a:prstGeom prst="curvedConnector3">
+            <a:avLst/>
+          </a:prstGeom>
+          <a:ln>
+            <a:tailEnd type="triangle"/>
+          </a:ln>
+        </p:spPr>
+        <p:style>
+          <a:lnRef idx="1">
+            <a:schemeClr val="accent1"/>
+          </a:lnRef>
+          <a:fillRef idx="0">
+            <a:schemeClr val="accent1"/>
+          </a:fillRef>
+          <a:effectRef idx="0">
+            <a:schemeClr val="accent1"/>
+          </a:effectRef>
+          <a:fontRef idx="minor">
+            <a:schemeClr val="tx1"/>
+          </a:fontRef>
+        </p:style>
+      </p:cxnSp>
+      <p:sp>
+        <p:nvSpPr>
+          <p:cNvPr id="17" name="TextBox 16">
+            <a:extLst>
+              <a:ext uri="{FF2B5EF4-FFF2-40B4-BE49-F238E27FC236}">
+                <a16:creationId xmlns:a16="http://schemas.microsoft.com/office/drawing/2014/main" id="{344CB1B2-1D9D-7F03-DCF9-43633DE715E9}"/>
+              </a:ext>
+            </a:extLst>
+          </p:cNvPr>
+          <p:cNvSpPr txBox="1"/>
+          <p:nvPr/>
+        </p:nvSpPr>
+        <p:spPr>
+          <a:xfrm>
+            <a:off x="4743449" y="4197350"/>
+            <a:ext cx="1463568" cy="584775"/>
+          </a:xfrm>
+          <a:prstGeom prst="rect">
+            <a:avLst/>
+          </a:prstGeom>
+          <a:noFill/>
+        </p:spPr>
+        <p:txBody>
+          <a:bodyPr wrap="square" rtlCol="0">
+            <a:spAutoFit/>
+          </a:bodyPr>
+          <a:lstStyle/>
+          <a:p>
+            <a:r>
+              <a:rPr lang="en-US" sz="1600" dirty="0"/>
+              <a:t>Domain Boundary</a:t>
+            </a:r>
+          </a:p>
+        </p:txBody>
+      </p:sp>
+      <p:cxnSp>
+        <p:nvCxnSpPr>
+          <p:cNvPr id="19" name="Connector: Curved 18">
+            <a:extLst>
+              <a:ext uri="{FF2B5EF4-FFF2-40B4-BE49-F238E27FC236}">
+                <a16:creationId xmlns:a16="http://schemas.microsoft.com/office/drawing/2014/main" id="{B28DB5EB-C3BF-1505-4C8D-69869071366C}"/>
+              </a:ext>
+            </a:extLst>
+          </p:cNvPr>
+          <p:cNvCxnSpPr>
+            <a:cxnSpLocks/>
+            <a:endCxn id="17" idx="1"/>
+          </p:cNvCxnSpPr>
+          <p:nvPr/>
+        </p:nvCxnSpPr>
+        <p:spPr>
+          <a:xfrm>
+            <a:off x="4378325" y="4314825"/>
+            <a:ext cx="365124" cy="174913"/>
+          </a:xfrm>
+          <a:prstGeom prst="curvedConnector3">
+            <a:avLst/>
+          </a:prstGeom>
+          <a:ln>
+            <a:tailEnd type="triangle"/>
+          </a:ln>
+        </p:spPr>
+        <p:style>
+          <a:lnRef idx="1">
+            <a:schemeClr val="accent3"/>
+          </a:lnRef>
+          <a:fillRef idx="0">
+            <a:schemeClr val="accent3"/>
+          </a:fillRef>
+          <a:effectRef idx="0">
+            <a:schemeClr val="accent3"/>
+          </a:effectRef>
+          <a:fontRef idx="minor">
+            <a:schemeClr val="tx1"/>
+          </a:fontRef>
+        </p:style>
+      </p:cxnSp>
+      <p:sp>
+        <p:nvSpPr>
+          <p:cNvPr id="22" name="Oval 21">
+            <a:extLst>
+              <a:ext uri="{FF2B5EF4-FFF2-40B4-BE49-F238E27FC236}">
+                <a16:creationId xmlns:a16="http://schemas.microsoft.com/office/drawing/2014/main" id="{34597057-9281-2B75-01EC-8ACEAC1FCDEC}"/>
+              </a:ext>
+            </a:extLst>
+          </p:cNvPr>
+          <p:cNvSpPr/>
+          <p:nvPr/>
+        </p:nvSpPr>
+        <p:spPr>
+          <a:xfrm>
+            <a:off x="7294077" y="3484562"/>
+            <a:ext cx="1425575" cy="1425575"/>
+          </a:xfrm>
+          <a:prstGeom prst="ellipse">
+            <a:avLst/>
+          </a:prstGeom>
+          <a:noFill/>
+          <a:ln w="9525" cap="flat" cmpd="sng" algn="ctr">
+            <a:solidFill>
+              <a:schemeClr val="accent6"/>
+            </a:solidFill>
+            <a:prstDash val="solid"/>
+            <a:round/>
+            <a:headEnd type="none" w="med" len="med"/>
+            <a:tailEnd type="none" w="med" len="med"/>
+          </a:ln>
+        </p:spPr>
+        <p:style>
+          <a:lnRef idx="0">
+            <a:scrgbClr r="0" g="0" b="0"/>
+          </a:lnRef>
+          <a:fillRef idx="0">
+            <a:scrgbClr r="0" g="0" b="0"/>
+          </a:fillRef>
+          <a:effectRef idx="0">
+            <a:scrgbClr r="0" g="0" b="0"/>
+          </a:effectRef>
+          <a:fontRef idx="minor">
+            <a:schemeClr val="accent6"/>
+          </a:fontRef>
+        </p:style>
+        <p:txBody>
+          <a:bodyPr rtlCol="0" anchor="ctr"/>
+          <a:lstStyle/>
+          <a:p>
+            <a:pPr algn="ctr"/>
+            <a:endParaRPr lang="en-US"/>
+          </a:p>
+        </p:txBody>
+      </p:sp>
+      <p:sp>
+        <p:nvSpPr>
+          <p:cNvPr id="24" name="Oval 23">
+            <a:extLst>
+              <a:ext uri="{FF2B5EF4-FFF2-40B4-BE49-F238E27FC236}">
+                <a16:creationId xmlns:a16="http://schemas.microsoft.com/office/drawing/2014/main" id="{680CB751-AAB9-858F-647A-4FA0D7604A12}"/>
+              </a:ext>
+            </a:extLst>
+          </p:cNvPr>
+          <p:cNvSpPr/>
+          <p:nvPr/>
+        </p:nvSpPr>
+        <p:spPr>
+          <a:xfrm>
+            <a:off x="7322926" y="3513411"/>
+            <a:ext cx="1367875" cy="1367875"/>
+          </a:xfrm>
+          <a:prstGeom prst="ellipse">
+            <a:avLst/>
+          </a:prstGeom>
+          <a:noFill/>
+          <a:ln w="9525" cap="flat" cmpd="sng" algn="ctr">
+            <a:solidFill>
+              <a:schemeClr val="accent6"/>
+            </a:solidFill>
+            <a:prstDash val="solid"/>
+            <a:round/>
+            <a:headEnd type="none" w="med" len="med"/>
+            <a:tailEnd type="none" w="med" len="med"/>
+          </a:ln>
+        </p:spPr>
+        <p:style>
+          <a:lnRef idx="0">
+            <a:scrgbClr r="0" g="0" b="0"/>
+          </a:lnRef>
+          <a:fillRef idx="0">
+            <a:scrgbClr r="0" g="0" b="0"/>
+          </a:fillRef>
+          <a:effectRef idx="0">
+            <a:scrgbClr r="0" g="0" b="0"/>
+          </a:effectRef>
+          <a:fontRef idx="minor">
+            <a:schemeClr val="accent6"/>
+          </a:fontRef>
+        </p:style>
+        <p:txBody>
+          <a:bodyPr rtlCol="0" anchor="ctr"/>
+          <a:lstStyle/>
+          <a:p>
+            <a:pPr algn="ctr"/>
+            <a:endParaRPr lang="en-US" dirty="0"/>
+          </a:p>
+        </p:txBody>
+      </p:sp>
+      <p:sp>
+        <p:nvSpPr>
+          <p:cNvPr id="25" name="TextBox 24">
+            <a:extLst>
+              <a:ext uri="{FF2B5EF4-FFF2-40B4-BE49-F238E27FC236}">
+                <a16:creationId xmlns:a16="http://schemas.microsoft.com/office/drawing/2014/main" id="{028882FF-07FF-6165-7054-61A776DFEDB0}"/>
+              </a:ext>
+            </a:extLst>
+          </p:cNvPr>
+          <p:cNvSpPr txBox="1"/>
+          <p:nvPr/>
+        </p:nvSpPr>
+        <p:spPr>
+          <a:xfrm>
+            <a:off x="7896224" y="2531528"/>
+            <a:ext cx="2311402" cy="338554"/>
+          </a:xfrm>
+          <a:prstGeom prst="rect">
+            <a:avLst/>
+          </a:prstGeom>
+          <a:noFill/>
+        </p:spPr>
+        <p:txBody>
+          <a:bodyPr wrap="square" rtlCol="0">
+            <a:spAutoFit/>
+          </a:bodyPr>
+          <a:lstStyle/>
+          <a:p>
+            <a:r>
+              <a:rPr lang="en-US" sz="1600" dirty="0"/>
+              <a:t>Zone(1) of interest</a:t>
+            </a:r>
+          </a:p>
+        </p:txBody>
+      </p:sp>
+      <p:cxnSp>
+        <p:nvCxnSpPr>
+          <p:cNvPr id="27" name="Straight Connector 26">
+            <a:extLst>
+              <a:ext uri="{FF2B5EF4-FFF2-40B4-BE49-F238E27FC236}">
+                <a16:creationId xmlns:a16="http://schemas.microsoft.com/office/drawing/2014/main" id="{A62EA7DA-8570-1224-F1F7-B0127DC73EF8}"/>
+              </a:ext>
+            </a:extLst>
+          </p:cNvPr>
+          <p:cNvCxnSpPr/>
+          <p:nvPr/>
+        </p:nvCxnSpPr>
+        <p:spPr>
+          <a:xfrm flipV="1">
+            <a:off x="8197756" y="3984625"/>
+            <a:ext cx="1270095" cy="212723"/>
+          </a:xfrm>
+          <a:prstGeom prst="line">
+            <a:avLst/>
+          </a:prstGeom>
+        </p:spPr>
+        <p:style>
+          <a:lnRef idx="1">
+            <a:schemeClr val="accent1"/>
+          </a:lnRef>
+          <a:fillRef idx="0">
+            <a:schemeClr val="accent1"/>
+          </a:fillRef>
+          <a:effectRef idx="0">
+            <a:schemeClr val="accent1"/>
+          </a:effectRef>
+          <a:fontRef idx="minor">
+            <a:schemeClr val="tx1"/>
+          </a:fontRef>
+        </p:style>
+      </p:cxnSp>
+      <p:cxnSp>
+        <p:nvCxnSpPr>
+          <p:cNvPr id="28" name="Straight Connector 27">
+            <a:extLst>
+              <a:ext uri="{FF2B5EF4-FFF2-40B4-BE49-F238E27FC236}">
+                <a16:creationId xmlns:a16="http://schemas.microsoft.com/office/drawing/2014/main" id="{F5A34D47-6D1C-904F-88DE-F7CB0E4DF642}"/>
+              </a:ext>
+            </a:extLst>
+          </p:cNvPr>
+          <p:cNvCxnSpPr>
+            <a:cxnSpLocks/>
+          </p:cNvCxnSpPr>
+          <p:nvPr/>
+        </p:nvCxnSpPr>
+        <p:spPr>
+          <a:xfrm>
+            <a:off x="8197755" y="4220232"/>
+            <a:ext cx="1270095" cy="212723"/>
+          </a:xfrm>
+          <a:prstGeom prst="line">
+            <a:avLst/>
+          </a:prstGeom>
+        </p:spPr>
+        <p:style>
+          <a:lnRef idx="1">
+            <a:schemeClr val="accent1"/>
+          </a:lnRef>
+          <a:fillRef idx="0">
+            <a:schemeClr val="accent1"/>
+          </a:fillRef>
+          <a:effectRef idx="0">
+            <a:schemeClr val="accent1"/>
+          </a:effectRef>
+          <a:fontRef idx="minor">
+            <a:schemeClr val="tx1"/>
+          </a:fontRef>
+        </p:style>
+      </p:cxnSp>
+      <p:cxnSp>
+        <p:nvCxnSpPr>
+          <p:cNvPr id="30" name="Straight Connector 29">
+            <a:extLst>
+              <a:ext uri="{FF2B5EF4-FFF2-40B4-BE49-F238E27FC236}">
+                <a16:creationId xmlns:a16="http://schemas.microsoft.com/office/drawing/2014/main" id="{F8164D63-2122-6D15-236F-8CBCB67ABA74}"/>
+              </a:ext>
+            </a:extLst>
+          </p:cNvPr>
+          <p:cNvCxnSpPr/>
+          <p:nvPr/>
+        </p:nvCxnSpPr>
+        <p:spPr>
+          <a:xfrm>
+            <a:off x="9467850" y="3984625"/>
+            <a:ext cx="0" cy="448330"/>
+          </a:xfrm>
+          <a:prstGeom prst="line">
+            <a:avLst/>
+          </a:prstGeom>
+        </p:spPr>
+        <p:style>
+          <a:lnRef idx="1">
+            <a:schemeClr val="accent1"/>
+          </a:lnRef>
+          <a:fillRef idx="0">
+            <a:schemeClr val="accent1"/>
+          </a:fillRef>
+          <a:effectRef idx="0">
+            <a:schemeClr val="accent1"/>
+          </a:effectRef>
+          <a:fontRef idx="minor">
+            <a:schemeClr val="tx1"/>
+          </a:fontRef>
+        </p:style>
+      </p:cxnSp>
+      <p:sp>
+        <p:nvSpPr>
+          <p:cNvPr id="31" name="TextBox 30">
+            <a:extLst>
+              <a:ext uri="{FF2B5EF4-FFF2-40B4-BE49-F238E27FC236}">
+                <a16:creationId xmlns:a16="http://schemas.microsoft.com/office/drawing/2014/main" id="{36340BF6-8631-0EEE-55D3-9397A3FE36EE}"/>
+              </a:ext>
+            </a:extLst>
+          </p:cNvPr>
+          <p:cNvSpPr txBox="1"/>
+          <p:nvPr/>
+        </p:nvSpPr>
+        <p:spPr>
+          <a:xfrm>
+            <a:off x="10216048" y="4740860"/>
+            <a:ext cx="2130520" cy="338554"/>
+          </a:xfrm>
+          <a:prstGeom prst="rect">
+            <a:avLst/>
+          </a:prstGeom>
+          <a:noFill/>
+        </p:spPr>
+        <p:txBody>
+          <a:bodyPr wrap="square" rtlCol="0">
+            <a:spAutoFit/>
+          </a:bodyPr>
+          <a:lstStyle/>
+          <a:p>
+            <a:r>
+              <a:rPr lang="en-US" sz="1600" dirty="0"/>
+              <a:t>Zone(2) of interest</a:t>
+            </a:r>
+          </a:p>
+        </p:txBody>
+      </p:sp>
+      <p:cxnSp>
+        <p:nvCxnSpPr>
+          <p:cNvPr id="33" name="Connector: Curved 32">
+            <a:extLst>
+              <a:ext uri="{FF2B5EF4-FFF2-40B4-BE49-F238E27FC236}">
+                <a16:creationId xmlns:a16="http://schemas.microsoft.com/office/drawing/2014/main" id="{4987ABB5-9CA5-8241-A4DD-D8F94585A0BA}"/>
+              </a:ext>
+            </a:extLst>
+          </p:cNvPr>
+          <p:cNvCxnSpPr>
+            <a:cxnSpLocks/>
+            <a:endCxn id="25" idx="1"/>
+          </p:cNvCxnSpPr>
+          <p:nvPr/>
+        </p:nvCxnSpPr>
+        <p:spPr>
+          <a:xfrm rot="5400000" flipH="1" flipV="1">
+            <a:off x="7193989" y="3012516"/>
+            <a:ext cx="1013946" cy="390524"/>
+          </a:xfrm>
+          <a:prstGeom prst="curvedConnector2">
+            <a:avLst/>
+          </a:prstGeom>
+          <a:ln>
+            <a:tailEnd type="triangle"/>
+          </a:ln>
+        </p:spPr>
+        <p:style>
+          <a:lnRef idx="1">
+            <a:schemeClr val="accent6"/>
+          </a:lnRef>
+          <a:fillRef idx="0">
+            <a:schemeClr val="accent6"/>
+          </a:fillRef>
+          <a:effectRef idx="0">
+            <a:schemeClr val="accent6"/>
+          </a:effectRef>
+          <a:fontRef idx="minor">
+            <a:schemeClr val="tx1"/>
+          </a:fontRef>
+        </p:style>
+      </p:cxnSp>
+      <p:cxnSp>
+        <p:nvCxnSpPr>
+          <p:cNvPr id="36" name="Connector: Curved 35">
+            <a:extLst>
+              <a:ext uri="{FF2B5EF4-FFF2-40B4-BE49-F238E27FC236}">
+                <a16:creationId xmlns:a16="http://schemas.microsoft.com/office/drawing/2014/main" id="{C105E3A2-5B12-362D-2BBD-41ADEDE4416A}"/>
+              </a:ext>
+            </a:extLst>
+          </p:cNvPr>
+          <p:cNvCxnSpPr>
+            <a:cxnSpLocks/>
+            <a:endCxn id="31" idx="0"/>
+          </p:cNvCxnSpPr>
+          <p:nvPr/>
+        </p:nvCxnSpPr>
+        <p:spPr>
+          <a:xfrm>
+            <a:off x="9239250" y="4283075"/>
+            <a:ext cx="2042058" cy="457785"/>
+          </a:xfrm>
+          <a:prstGeom prst="curvedConnector2">
+            <a:avLst/>
+          </a:prstGeom>
+          <a:ln>
+            <a:tailEnd type="triangle"/>
+          </a:ln>
+        </p:spPr>
+        <p:style>
+          <a:lnRef idx="1">
+            <a:schemeClr val="accent1"/>
+          </a:lnRef>
+          <a:fillRef idx="0">
+            <a:schemeClr val="accent1"/>
+          </a:fillRef>
+          <a:effectRef idx="0">
+            <a:schemeClr val="accent1"/>
+          </a:effectRef>
+          <a:fontRef idx="minor">
+            <a:schemeClr val="tx1"/>
+          </a:fontRef>
+        </p:style>
+      </p:cxnSp>
+      <p:sp>
+        <p:nvSpPr>
+          <p:cNvPr id="39" name="TextBox 38">
+            <a:extLst>
+              <a:ext uri="{FF2B5EF4-FFF2-40B4-BE49-F238E27FC236}">
+                <a16:creationId xmlns:a16="http://schemas.microsoft.com/office/drawing/2014/main" id="{7FA885E1-9B3B-36F2-C04E-BF29C9BB9DF5}"/>
+              </a:ext>
+            </a:extLst>
+          </p:cNvPr>
+          <p:cNvSpPr txBox="1"/>
+          <p:nvPr/>
+        </p:nvSpPr>
+        <p:spPr>
+          <a:xfrm>
+            <a:off x="647922" y="5792896"/>
+            <a:ext cx="4248702" cy="369332"/>
+          </a:xfrm>
+          <a:prstGeom prst="rect">
+            <a:avLst/>
+          </a:prstGeom>
+          <a:noFill/>
+        </p:spPr>
+        <p:txBody>
+          <a:bodyPr wrap="square" rtlCol="0">
+            <a:spAutoFit/>
+          </a:bodyPr>
+          <a:lstStyle/>
+          <a:p>
             <a:r>
               <a:rPr lang="en-US" dirty="0"/>
-              <a:t>Under 0 scattering:</a:t>
-            </a:r>
-          </a:p>
-          <a:p>
-            <a:pPr marL="800100" lvl="1" indent="-342900">
-              <a:buAutoNum type="arabicPeriod"/>
-            </a:pPr>
+              <a:t>3D image of the experimental setup</a:t>
+            </a:r>
+          </a:p>
+        </p:txBody>
+      </p:sp>
+      <p:sp>
+        <p:nvSpPr>
+          <p:cNvPr id="41" name="TextBox 40">
+            <a:extLst>
+              <a:ext uri="{FF2B5EF4-FFF2-40B4-BE49-F238E27FC236}">
+                <a16:creationId xmlns:a16="http://schemas.microsoft.com/office/drawing/2014/main" id="{84F7F0FB-27E7-7596-EC56-19CA6574F7A4}"/>
+              </a:ext>
+            </a:extLst>
+          </p:cNvPr>
+          <p:cNvSpPr txBox="1"/>
+          <p:nvPr/>
+        </p:nvSpPr>
+        <p:spPr>
+          <a:xfrm>
+            <a:off x="6073404" y="5551505"/>
+            <a:ext cx="4248702" cy="369332"/>
+          </a:xfrm>
+          <a:prstGeom prst="rect">
+            <a:avLst/>
+          </a:prstGeom>
+          <a:noFill/>
+        </p:spPr>
+        <p:txBody>
+          <a:bodyPr wrap="square" rtlCol="0">
+            <a:spAutoFit/>
+          </a:bodyPr>
+          <a:lstStyle/>
+          <a:p>
             <a:r>
               <a:rPr lang="en-US" dirty="0"/>
-              <a:t>Peak at zero degrees</a:t>
-            </a:r>
-          </a:p>
-          <a:p>
-            <a:pPr marL="800100" lvl="1" indent="-342900">
-              <a:buAutoNum type="arabicPeriod"/>
-            </a:pPr>
-            <a:r>
-              <a:rPr lang="en-US" dirty="0"/>
-              <a:t>Absorption dependance must recover the beer lambert law</a:t>
-            </a:r>
-          </a:p>
-          <a:p>
-            <a:pPr marL="342900" indent="-342900">
-              <a:buAutoNum type="arabicPeriod"/>
-            </a:pPr>
-            <a:r>
-              <a:rPr lang="en-US" dirty="0"/>
-              <a:t>Under conditions where 1 scattering event per photon on average occurs:</a:t>
-            </a:r>
-          </a:p>
-          <a:p>
-            <a:pPr marL="800100" lvl="1" indent="-342900">
-              <a:buAutoNum type="arabicPeriod"/>
-            </a:pPr>
-            <a:r>
-              <a:rPr lang="en-US" dirty="0"/>
-              <a:t>We must recover the Fornier Forand distribution</a:t>
-            </a:r>
-          </a:p>
-          <a:p>
-            <a:pPr marL="800100" lvl="1" indent="-342900">
-              <a:buAutoNum type="arabicPeriod"/>
-            </a:pPr>
-            <a:r>
-              <a:rPr lang="en-US" dirty="0"/>
-              <a:t>HG and FF must be close</a:t>
-            </a:r>
-          </a:p>
-          <a:p>
-            <a:pPr marL="342900" indent="-342900">
-              <a:buAutoNum type="arabicPeriod"/>
-            </a:pPr>
-            <a:r>
-              <a:rPr lang="en-US" dirty="0"/>
-              <a:t>Under reasonable scattering:</a:t>
-            </a:r>
-          </a:p>
-          <a:p>
-            <a:pPr marL="800100" lvl="1" indent="-342900">
-              <a:buAutoNum type="arabicPeriod"/>
-            </a:pPr>
-            <a:r>
-              <a:rPr lang="en-US" dirty="0"/>
-              <a:t>Increasing photon number must reduce std of solutions</a:t>
-            </a:r>
-          </a:p>
-          <a:p>
-            <a:pPr marL="800100" lvl="1" indent="-342900">
-              <a:buAutoNum type="arabicPeriod"/>
-            </a:pPr>
-            <a:r>
-              <a:rPr lang="en-US" dirty="0"/>
-              <a:t>HG and FF must </a:t>
-            </a:r>
-            <a:r>
-              <a:rPr lang="en-US" dirty="0" err="1"/>
-              <a:t>divarge</a:t>
-            </a:r>
-            <a:endParaRPr lang="en-US" dirty="0"/>
-          </a:p>
-          <a:p>
-            <a:pPr marL="342900" indent="-342900">
-              <a:buAutoNum type="arabicPeriod"/>
-            </a:pPr>
-            <a:r>
-              <a:rPr lang="en-US" dirty="0"/>
-              <a:t> Under very large scattering:</a:t>
-            </a:r>
-          </a:p>
-          <a:p>
-            <a:pPr marL="800100" lvl="1" indent="-342900">
-              <a:buAutoNum type="arabicPeriod"/>
-            </a:pPr>
-            <a:r>
-              <a:rPr lang="en-US" dirty="0"/>
-              <a:t>Source must look isotropic at a distance with no forward bias</a:t>
-            </a:r>
-          </a:p>
-          <a:p>
-            <a:pPr marL="800100" lvl="1" indent="-342900">
-              <a:buAutoNum type="arabicPeriod"/>
-            </a:pPr>
-            <a:r>
-              <a:rPr lang="en-US" dirty="0"/>
-              <a:t>HG and FF must converge</a:t>
-            </a:r>
-          </a:p>
-          <a:p>
-            <a:pPr marL="342900" indent="-342900">
-              <a:buAutoNum type="arabicPeriod"/>
-            </a:pPr>
-            <a:endParaRPr lang="en-US" dirty="0"/>
+              <a:t>X-Z plane of the experimental setup</a:t>
+            </a:r>
           </a:p>
         </p:txBody>
       </p:sp>
     </p:spTree>
     <p:extLst>
       <p:ext uri="{BB962C8B-B14F-4D97-AF65-F5344CB8AC3E}">
-        <p14:creationId xmlns:p14="http://schemas.microsoft.com/office/powerpoint/2010/main" val="2081107019"/>
+        <p14:creationId xmlns:p14="http://schemas.microsoft.com/office/powerpoint/2010/main" val="2867557785"/>
       </p:ext>
     </p:extLst>
   </p:cSld>
@@ -3641,7 +7260,7 @@
           <p:cNvPr id="2" name="Title 1">
             <a:extLst>
               <a:ext uri="{FF2B5EF4-FFF2-40B4-BE49-F238E27FC236}">
-                <a16:creationId xmlns:a16="http://schemas.microsoft.com/office/drawing/2014/main" id="{1A1577E8-C58B-D8E1-A3AD-F4FA7A6F76D2}"/>
+                <a16:creationId xmlns:a16="http://schemas.microsoft.com/office/drawing/2014/main" id="{F23843A8-74B2-78E6-FCA9-17B2EACE42AA}"/>
               </a:ext>
             </a:extLst>
           </p:cNvPr>
@@ -3659,17 +7278,17 @@
           <a:p>
             <a:r>
               <a:rPr lang="en-US" dirty="0"/>
-              <a:t>Zero Scattering Check</a:t>
-            </a:r>
-          </a:p>
-        </p:txBody>
-      </p:sp>
-      <p:sp>
-        <p:nvSpPr>
-          <p:cNvPr id="3" name="Text Placeholder 2">
+              <a:t>Simulation Innerworkings</a:t>
+            </a:r>
+          </a:p>
+        </p:txBody>
+      </p:sp>
+      <p:sp>
+        <p:nvSpPr>
+          <p:cNvPr id="3" name="Content Placeholder 2">
             <a:extLst>
               <a:ext uri="{FF2B5EF4-FFF2-40B4-BE49-F238E27FC236}">
-                <a16:creationId xmlns:a16="http://schemas.microsoft.com/office/drawing/2014/main" id="{E751E261-3E13-2E5E-33EF-D6FD51D80BED}"/>
+                <a16:creationId xmlns:a16="http://schemas.microsoft.com/office/drawing/2014/main" id="{1013BAC1-1CF2-92D1-B9E7-C497CD6672E4}"/>
               </a:ext>
             </a:extLst>
           </p:cNvPr>
@@ -3677,123 +7296,168 @@
             <a:spLocks noGrp="1"/>
           </p:cNvSpPr>
           <p:nvPr>
-            <p:ph type="body" idx="1"/>
+            <p:ph idx="1"/>
           </p:nvPr>
         </p:nvSpPr>
         <p:spPr/>
         <p:txBody>
-          <a:bodyPr/>
-          <a:lstStyle/>
+          <a:bodyPr>
+            <a:normAutofit fontScale="85000" lnSpcReduction="10000"/>
+          </a:bodyPr>
+          <a:lstStyle/>
+          <a:p>
+            <a:pPr marL="457200" indent="-457200">
+              <a:buFont typeface="+mj-lt"/>
+              <a:buAutoNum type="arabicPeriod"/>
+            </a:pPr>
+            <a:r>
+              <a:rPr lang="en-US" dirty="0"/>
+              <a:t>Photon launches with a packet weight 1 and direction v</a:t>
+            </a:r>
+          </a:p>
+          <a:p>
+            <a:pPr marL="457200" indent="-457200">
+              <a:buFont typeface="+mj-lt"/>
+              <a:buAutoNum type="arabicPeriod"/>
+            </a:pPr>
+            <a:r>
+              <a:rPr lang="en-US" dirty="0"/>
+              <a:t>Based on an exponential distribution based on the scattering coefficient (</a:t>
+            </a:r>
+            <a:r>
+              <a:rPr lang="el-GR" dirty="0">
+                <a:latin typeface="Cambria Math" panose="02040503050406030204" pitchFamily="18" charset="0"/>
+                <a:ea typeface="Cambria Math" panose="02040503050406030204" pitchFamily="18" charset="0"/>
+              </a:rPr>
+              <a:t>μ</a:t>
+            </a:r>
+            <a:r>
+              <a:rPr lang="en-US" baseline="-25000" dirty="0">
+                <a:latin typeface="Cambria Math" panose="02040503050406030204" pitchFamily="18" charset="0"/>
+                <a:ea typeface="Cambria Math" panose="02040503050406030204" pitchFamily="18" charset="0"/>
+              </a:rPr>
+              <a:t>s</a:t>
+            </a:r>
+            <a:r>
+              <a:rPr lang="en-US" dirty="0">
+                <a:latin typeface="Cambria Math" panose="02040503050406030204" pitchFamily="18" charset="0"/>
+                <a:ea typeface="Cambria Math" panose="02040503050406030204" pitchFamily="18" charset="0"/>
+              </a:rPr>
+              <a:t>) of the current voxel, it  decides how many voxels to travel in v direction.</a:t>
+            </a:r>
+          </a:p>
+          <a:p>
+            <a:pPr marL="457200" indent="-457200">
+              <a:buFont typeface="+mj-lt"/>
+              <a:buAutoNum type="arabicPeriod"/>
+            </a:pPr>
+            <a:r>
+              <a:rPr lang="en-US" dirty="0">
+                <a:latin typeface="Cambria Math" panose="02040503050406030204" pitchFamily="18" charset="0"/>
+                <a:ea typeface="Cambria Math" panose="02040503050406030204" pitchFamily="18" charset="0"/>
+              </a:rPr>
+              <a:t>Steps 1 voxel in v direction and looses packet weight based on the absorption coefficient </a:t>
+            </a:r>
+            <a:r>
+              <a:rPr lang="en-US" dirty="0"/>
+              <a:t>(</a:t>
+            </a:r>
+            <a:r>
+              <a:rPr lang="el-GR" dirty="0">
+                <a:latin typeface="Cambria Math" panose="02040503050406030204" pitchFamily="18" charset="0"/>
+                <a:ea typeface="Cambria Math" panose="02040503050406030204" pitchFamily="18" charset="0"/>
+              </a:rPr>
+              <a:t>μ</a:t>
+            </a:r>
+            <a:r>
+              <a:rPr lang="en-US" baseline="-25000" dirty="0">
+                <a:latin typeface="Cambria Math" panose="02040503050406030204" pitchFamily="18" charset="0"/>
+                <a:ea typeface="Cambria Math" panose="02040503050406030204" pitchFamily="18" charset="0"/>
+              </a:rPr>
+              <a:t>a</a:t>
+            </a:r>
+            <a:r>
+              <a:rPr lang="en-US" dirty="0">
+                <a:latin typeface="Cambria Math" panose="02040503050406030204" pitchFamily="18" charset="0"/>
+                <a:ea typeface="Cambria Math" panose="02040503050406030204" pitchFamily="18" charset="0"/>
+              </a:rPr>
+              <a:t>) </a:t>
+            </a:r>
+          </a:p>
+          <a:p>
+            <a:pPr marL="457200" indent="-457200">
+              <a:buFont typeface="+mj-lt"/>
+              <a:buAutoNum type="arabicPeriod"/>
+            </a:pPr>
+            <a:r>
+              <a:rPr lang="en-US" dirty="0">
+                <a:latin typeface="Cambria Math" panose="02040503050406030204" pitchFamily="18" charset="0"/>
+                <a:ea typeface="Cambria Math" panose="02040503050406030204" pitchFamily="18" charset="0"/>
+              </a:rPr>
+              <a:t>The packet weight is added to its current voxel’s raw probability,</a:t>
+            </a:r>
+          </a:p>
+          <a:p>
+            <a:pPr marL="457200" indent="-457200">
+              <a:buFont typeface="+mj-lt"/>
+              <a:buAutoNum type="arabicPeriod"/>
+            </a:pPr>
+            <a:r>
+              <a:rPr lang="en-US" dirty="0">
+                <a:latin typeface="Cambria Math" panose="02040503050406030204" pitchFamily="18" charset="0"/>
+                <a:ea typeface="Cambria Math" panose="02040503050406030204" pitchFamily="18" charset="0"/>
+              </a:rPr>
+              <a:t>The previous 2 steps are repeated until the package reaches the next scattering voxel decided in the second step</a:t>
+            </a:r>
+          </a:p>
+          <a:p>
+            <a:pPr marL="457200" indent="-457200">
+              <a:buFont typeface="+mj-lt"/>
+              <a:buAutoNum type="arabicPeriod"/>
+            </a:pPr>
+            <a:r>
+              <a:rPr lang="en-US" dirty="0">
+                <a:latin typeface="Cambria Math" panose="02040503050406030204" pitchFamily="18" charset="0"/>
+                <a:ea typeface="Cambria Math" panose="02040503050406030204" pitchFamily="18" charset="0"/>
+              </a:rPr>
+              <a:t>Calculate a new scattering direction vector: the azimuth and zenith scattering angles are computed, respectively, by a random number uniformly distributed in [0,2pi] and a random number between [0,pi) following an assigned phase function.</a:t>
+            </a:r>
+          </a:p>
+          <a:p>
+            <a:pPr marL="457200" indent="-457200">
+              <a:buFont typeface="+mj-lt"/>
+              <a:buAutoNum type="arabicPeriod"/>
+            </a:pPr>
+            <a:r>
+              <a:rPr lang="en-US" dirty="0">
+                <a:latin typeface="Cambria Math" panose="02040503050406030204" pitchFamily="18" charset="0"/>
+                <a:ea typeface="Cambria Math" panose="02040503050406030204" pitchFamily="18" charset="0"/>
+              </a:rPr>
+              <a:t>Repeat from step 2 until the max time is reached or the photon exits the domain</a:t>
+            </a:r>
+          </a:p>
+          <a:p>
+            <a:pPr marL="457200" indent="-457200">
+              <a:buFont typeface="+mj-lt"/>
+              <a:buAutoNum type="arabicPeriod"/>
+            </a:pPr>
+            <a:r>
+              <a:rPr lang="en-US" dirty="0">
+                <a:latin typeface="Cambria Math" panose="02040503050406030204" pitchFamily="18" charset="0"/>
+                <a:ea typeface="Cambria Math" panose="02040503050406030204" pitchFamily="18" charset="0"/>
+              </a:rPr>
+              <a:t>Repeat all steps for next photon</a:t>
+            </a:r>
+          </a:p>
           <a:p>
             <a:endParaRPr lang="en-US" dirty="0"/>
           </a:p>
         </p:txBody>
       </p:sp>
-      <p:pic>
-        <p:nvPicPr>
-          <p:cNvPr id="8" name="Content Placeholder 7">
-            <a:extLst>
-              <a:ext uri="{FF2B5EF4-FFF2-40B4-BE49-F238E27FC236}">
-                <a16:creationId xmlns:a16="http://schemas.microsoft.com/office/drawing/2014/main" id="{EC8ECB81-F538-BEF0-3CDD-5EF1CB03CF55}"/>
-              </a:ext>
-            </a:extLst>
-          </p:cNvPr>
-          <p:cNvPicPr>
-            <a:picLocks noGrp="1" noChangeAspect="1"/>
-          </p:cNvPicPr>
-          <p:nvPr>
-            <p:ph sz="half" idx="2"/>
-          </p:nvPr>
-        </p:nvPicPr>
-        <p:blipFill>
-          <a:blip r:embed="rId2">
-            <a:extLst>
-              <a:ext uri="{28A0092B-C50C-407E-A947-70E740481C1C}">
-                <a14:useLocalDpi xmlns:a14="http://schemas.microsoft.com/office/drawing/2010/main" val="0"/>
-              </a:ext>
-            </a:extLst>
-          </a:blip>
-          <a:stretch>
-            <a:fillRect/>
-          </a:stretch>
-        </p:blipFill>
-        <p:spPr>
-          <a:xfrm>
-            <a:off x="962289" y="2505075"/>
-            <a:ext cx="4912784" cy="3684588"/>
-          </a:xfrm>
-          <a:prstGeom prst="rect">
-            <a:avLst/>
-          </a:prstGeom>
-        </p:spPr>
-      </p:pic>
-      <p:sp>
-        <p:nvSpPr>
-          <p:cNvPr id="5" name="Text Placeholder 4">
-            <a:extLst>
-              <a:ext uri="{FF2B5EF4-FFF2-40B4-BE49-F238E27FC236}">
-                <a16:creationId xmlns:a16="http://schemas.microsoft.com/office/drawing/2014/main" id="{2D8E22DB-48CA-CC3E-4860-A85544A96475}"/>
-              </a:ext>
-            </a:extLst>
-          </p:cNvPr>
-          <p:cNvSpPr>
-            <a:spLocks noGrp="1"/>
-          </p:cNvSpPr>
-          <p:nvPr>
-            <p:ph type="body" sz="quarter" idx="3"/>
-          </p:nvPr>
-        </p:nvSpPr>
-        <p:spPr/>
-        <p:txBody>
-          <a:bodyPr/>
-          <a:lstStyle/>
-          <a:p>
-            <a:endParaRPr lang="en-US"/>
-          </a:p>
-        </p:txBody>
-      </p:sp>
-      <p:pic>
-        <p:nvPicPr>
-          <p:cNvPr id="10" name="Content Placeholder 9">
-            <a:extLst>
-              <a:ext uri="{FF2B5EF4-FFF2-40B4-BE49-F238E27FC236}">
-                <a16:creationId xmlns:a16="http://schemas.microsoft.com/office/drawing/2014/main" id="{AFF93458-1A9C-97F1-32B3-696333D6E3FE}"/>
-              </a:ext>
-            </a:extLst>
-          </p:cNvPr>
-          <p:cNvPicPr>
-            <a:picLocks noGrp="1" noChangeAspect="1"/>
-          </p:cNvPicPr>
-          <p:nvPr>
-            <p:ph sz="quarter" idx="4"/>
-          </p:nvPr>
-        </p:nvPicPr>
-        <p:blipFill>
-          <a:blip r:embed="rId3">
-            <a:extLst>
-              <a:ext uri="{28A0092B-C50C-407E-A947-70E740481C1C}">
-                <a14:useLocalDpi xmlns:a14="http://schemas.microsoft.com/office/drawing/2010/main" val="0"/>
-              </a:ext>
-            </a:extLst>
-          </a:blip>
-          <a:stretch>
-            <a:fillRect/>
-          </a:stretch>
-        </p:blipFill>
-        <p:spPr>
-          <a:xfrm>
-            <a:off x="6307402" y="2505075"/>
-            <a:ext cx="4912784" cy="3684588"/>
-          </a:xfrm>
-          <a:prstGeom prst="rect">
-            <a:avLst/>
-          </a:prstGeom>
-        </p:spPr>
-      </p:pic>
     </p:spTree>
     <p:extLst>
       <p:ext uri="{BB962C8B-B14F-4D97-AF65-F5344CB8AC3E}">
-        <p14:creationId xmlns:p14="http://schemas.microsoft.com/office/powerpoint/2010/main" val="4062619294"/>
+        <p14:creationId xmlns:p14="http://schemas.microsoft.com/office/powerpoint/2010/main" val="309444661"/>
       </p:ext>
     </p:extLst>
   </p:cSld>
@@ -3822,10 +7486,1022 @@
       </p:grpSpPr>
       <p:sp>
         <p:nvSpPr>
+          <p:cNvPr id="45" name="Rectangle 44">
+            <a:extLst>
+              <a:ext uri="{FF2B5EF4-FFF2-40B4-BE49-F238E27FC236}">
+                <a16:creationId xmlns:a16="http://schemas.microsoft.com/office/drawing/2014/main" id="{E5E6297A-D824-851D-1682-E7DB224153CD}"/>
+              </a:ext>
+            </a:extLst>
+          </p:cNvPr>
+          <p:cNvSpPr/>
+          <p:nvPr/>
+        </p:nvSpPr>
+        <p:spPr>
+          <a:xfrm>
+            <a:off x="53009" y="1358348"/>
+            <a:ext cx="11940208" cy="4671391"/>
+          </a:xfrm>
+          <a:prstGeom prst="rect">
+            <a:avLst/>
+          </a:prstGeom>
+          <a:noFill/>
+          <a:ln w="9525" cap="flat" cmpd="sng" algn="ctr">
+            <a:solidFill>
+              <a:schemeClr val="accent3"/>
+            </a:solidFill>
+            <a:prstDash val="solid"/>
+            <a:round/>
+            <a:headEnd type="none" w="med" len="med"/>
+            <a:tailEnd type="none" w="med" len="med"/>
+          </a:ln>
+        </p:spPr>
+        <p:style>
+          <a:lnRef idx="0">
+            <a:scrgbClr r="0" g="0" b="0"/>
+          </a:lnRef>
+          <a:fillRef idx="0">
+            <a:scrgbClr r="0" g="0" b="0"/>
+          </a:fillRef>
+          <a:effectRef idx="0">
+            <a:scrgbClr r="0" g="0" b="0"/>
+          </a:effectRef>
+          <a:fontRef idx="minor">
+            <a:schemeClr val="accent3"/>
+          </a:fontRef>
+        </p:style>
+        <p:txBody>
+          <a:bodyPr rtlCol="0" anchor="ctr"/>
+          <a:lstStyle/>
+          <a:p>
+            <a:pPr algn="ctr"/>
+            <a:endParaRPr lang="en-US"/>
+          </a:p>
+        </p:txBody>
+      </p:sp>
+      <p:sp>
+        <p:nvSpPr>
+          <p:cNvPr id="6" name="Rectangle: Rounded Corners 5">
+            <a:extLst>
+              <a:ext uri="{FF2B5EF4-FFF2-40B4-BE49-F238E27FC236}">
+                <a16:creationId xmlns:a16="http://schemas.microsoft.com/office/drawing/2014/main" id="{2A58B961-E562-FC88-8A0E-3FC06955C401}"/>
+              </a:ext>
+            </a:extLst>
+          </p:cNvPr>
+          <p:cNvSpPr/>
+          <p:nvPr/>
+        </p:nvSpPr>
+        <p:spPr>
+          <a:xfrm>
+            <a:off x="114504" y="1842052"/>
+            <a:ext cx="1881809" cy="1152940"/>
+          </a:xfrm>
+          <a:prstGeom prst="roundRect">
+            <a:avLst/>
+          </a:prstGeom>
+        </p:spPr>
+        <p:style>
+          <a:lnRef idx="1">
+            <a:schemeClr val="accent6"/>
+          </a:lnRef>
+          <a:fillRef idx="2">
+            <a:schemeClr val="accent6"/>
+          </a:fillRef>
+          <a:effectRef idx="1">
+            <a:schemeClr val="accent6"/>
+          </a:effectRef>
+          <a:fontRef idx="minor">
+            <a:schemeClr val="dk1"/>
+          </a:fontRef>
+        </p:style>
+        <p:txBody>
+          <a:bodyPr rtlCol="0" anchor="ctr"/>
+          <a:lstStyle/>
+          <a:p>
+            <a:pPr algn="ctr"/>
+            <a:r>
+              <a:rPr lang="en-US" dirty="0"/>
+              <a:t>Photon Launches with weight 1 in v </a:t>
+            </a:r>
+            <a:r>
+              <a:rPr lang="en-US" dirty="0" err="1"/>
+              <a:t>dir</a:t>
+            </a:r>
+            <a:endParaRPr lang="en-US" dirty="0"/>
+          </a:p>
+        </p:txBody>
+      </p:sp>
+      <p:sp>
+        <p:nvSpPr>
+          <p:cNvPr id="8" name="Rectangle: Rounded Corners 7">
+            <a:extLst>
+              <a:ext uri="{FF2B5EF4-FFF2-40B4-BE49-F238E27FC236}">
+                <a16:creationId xmlns:a16="http://schemas.microsoft.com/office/drawing/2014/main" id="{1FA17908-4E4A-2C7B-8F3E-38AE0389FF97}"/>
+              </a:ext>
+            </a:extLst>
+          </p:cNvPr>
+          <p:cNvSpPr/>
+          <p:nvPr/>
+        </p:nvSpPr>
+        <p:spPr>
+          <a:xfrm>
+            <a:off x="3730895" y="2803461"/>
+            <a:ext cx="1129340" cy="1152940"/>
+          </a:xfrm>
+          <a:prstGeom prst="roundRect">
+            <a:avLst/>
+          </a:prstGeom>
+        </p:spPr>
+        <p:style>
+          <a:lnRef idx="1">
+            <a:schemeClr val="dk1"/>
+          </a:lnRef>
+          <a:fillRef idx="2">
+            <a:schemeClr val="dk1"/>
+          </a:fillRef>
+          <a:effectRef idx="1">
+            <a:schemeClr val="dk1"/>
+          </a:effectRef>
+          <a:fontRef idx="minor">
+            <a:schemeClr val="dk1"/>
+          </a:fontRef>
+        </p:style>
+        <p:txBody>
+          <a:bodyPr rtlCol="0" anchor="ctr"/>
+          <a:lstStyle/>
+          <a:p>
+            <a:pPr algn="ctr"/>
+            <a:endParaRPr lang="en-US" dirty="0"/>
+          </a:p>
+        </p:txBody>
+      </p:sp>
+      <p:pic>
+        <p:nvPicPr>
+          <p:cNvPr id="10" name="Picture 9">
+            <a:extLst>
+              <a:ext uri="{FF2B5EF4-FFF2-40B4-BE49-F238E27FC236}">
+                <a16:creationId xmlns:a16="http://schemas.microsoft.com/office/drawing/2014/main" id="{9E99E545-9608-7184-1081-9E7EC5F60C86}"/>
+              </a:ext>
+            </a:extLst>
+          </p:cNvPr>
+          <p:cNvPicPr>
+            <a:picLocks noChangeAspect="1"/>
+          </p:cNvPicPr>
+          <p:nvPr/>
+        </p:nvPicPr>
+        <p:blipFill>
+          <a:blip r:embed="rId2"/>
+          <a:stretch>
+            <a:fillRect/>
+          </a:stretch>
+        </p:blipFill>
+        <p:spPr>
+          <a:xfrm>
+            <a:off x="2110816" y="2746514"/>
+            <a:ext cx="1543061" cy="1266834"/>
+          </a:xfrm>
+          <a:prstGeom prst="rect">
+            <a:avLst/>
+          </a:prstGeom>
+        </p:spPr>
+      </p:pic>
+      <p:sp>
+        <p:nvSpPr>
+          <p:cNvPr id="11" name="Arrow: Right 10">
+            <a:extLst>
+              <a:ext uri="{FF2B5EF4-FFF2-40B4-BE49-F238E27FC236}">
+                <a16:creationId xmlns:a16="http://schemas.microsoft.com/office/drawing/2014/main" id="{519AE099-0597-5E63-4686-68D2FB27CCD5}"/>
+              </a:ext>
+            </a:extLst>
+          </p:cNvPr>
+          <p:cNvSpPr/>
+          <p:nvPr/>
+        </p:nvSpPr>
+        <p:spPr>
+          <a:xfrm>
+            <a:off x="2110816" y="1842052"/>
+            <a:ext cx="6096006" cy="1152940"/>
+          </a:xfrm>
+          <a:prstGeom prst="rightArrow">
+            <a:avLst/>
+          </a:prstGeom>
+        </p:spPr>
+        <p:style>
+          <a:lnRef idx="1">
+            <a:schemeClr val="accent6"/>
+          </a:lnRef>
+          <a:fillRef idx="2">
+            <a:schemeClr val="accent6"/>
+          </a:fillRef>
+          <a:effectRef idx="1">
+            <a:schemeClr val="accent6"/>
+          </a:effectRef>
+          <a:fontRef idx="minor">
+            <a:schemeClr val="dk1"/>
+          </a:fontRef>
+        </p:style>
+        <p:txBody>
+          <a:bodyPr rtlCol="0" anchor="ctr"/>
+          <a:lstStyle/>
+          <a:p>
+            <a:pPr algn="ctr"/>
+            <a:r>
+              <a:rPr lang="en-US" dirty="0"/>
+              <a:t>Based on </a:t>
+            </a:r>
+            <a:r>
+              <a:rPr lang="el-GR" dirty="0">
+                <a:latin typeface="Cambria Math" panose="02040503050406030204" pitchFamily="18" charset="0"/>
+                <a:ea typeface="Cambria Math" panose="02040503050406030204" pitchFamily="18" charset="0"/>
+              </a:rPr>
+              <a:t>μ</a:t>
+            </a:r>
+            <a:r>
+              <a:rPr lang="en-US" baseline="-25000" dirty="0">
+                <a:latin typeface="Cambria Math" panose="02040503050406030204" pitchFamily="18" charset="0"/>
+                <a:ea typeface="Cambria Math" panose="02040503050406030204" pitchFamily="18" charset="0"/>
+              </a:rPr>
+              <a:t>s</a:t>
+            </a:r>
+            <a:r>
+              <a:rPr lang="en-US" dirty="0"/>
+              <a:t>, photon travels n voxels</a:t>
+            </a:r>
+          </a:p>
+        </p:txBody>
+      </p:sp>
+      <p:sp>
+        <p:nvSpPr>
+          <p:cNvPr id="13" name="Oval 12">
+            <a:extLst>
+              <a:ext uri="{FF2B5EF4-FFF2-40B4-BE49-F238E27FC236}">
+                <a16:creationId xmlns:a16="http://schemas.microsoft.com/office/drawing/2014/main" id="{C05261AD-26CE-077F-A73A-9E0CAB08E63D}"/>
+              </a:ext>
+            </a:extLst>
+          </p:cNvPr>
+          <p:cNvSpPr/>
+          <p:nvPr/>
+        </p:nvSpPr>
+        <p:spPr>
+          <a:xfrm>
+            <a:off x="4046930" y="3131296"/>
+            <a:ext cx="497269" cy="497269"/>
+          </a:xfrm>
+          <a:prstGeom prst="ellipse">
+            <a:avLst/>
+          </a:prstGeom>
+        </p:spPr>
+        <p:style>
+          <a:lnRef idx="0">
+            <a:schemeClr val="accent3"/>
+          </a:lnRef>
+          <a:fillRef idx="3">
+            <a:schemeClr val="accent3"/>
+          </a:fillRef>
+          <a:effectRef idx="3">
+            <a:schemeClr val="accent3"/>
+          </a:effectRef>
+          <a:fontRef idx="minor">
+            <a:schemeClr val="lt1"/>
+          </a:fontRef>
+        </p:style>
+        <p:txBody>
+          <a:bodyPr rtlCol="0" anchor="ctr"/>
+          <a:lstStyle/>
+          <a:p>
+            <a:pPr algn="ctr"/>
+            <a:endParaRPr lang="en-US"/>
+          </a:p>
+        </p:txBody>
+      </p:sp>
+      <p:sp>
+        <p:nvSpPr>
+          <p:cNvPr id="15" name="Rectangle: Rounded Corners 14">
+            <a:extLst>
+              <a:ext uri="{FF2B5EF4-FFF2-40B4-BE49-F238E27FC236}">
+                <a16:creationId xmlns:a16="http://schemas.microsoft.com/office/drawing/2014/main" id="{B3E8AE43-0D28-F6DC-0FC1-3121AEBF9B70}"/>
+              </a:ext>
+            </a:extLst>
+          </p:cNvPr>
+          <p:cNvSpPr/>
+          <p:nvPr/>
+        </p:nvSpPr>
+        <p:spPr>
+          <a:xfrm>
+            <a:off x="4937253" y="2803461"/>
+            <a:ext cx="1129340" cy="1152940"/>
+          </a:xfrm>
+          <a:prstGeom prst="roundRect">
+            <a:avLst/>
+          </a:prstGeom>
+        </p:spPr>
+        <p:style>
+          <a:lnRef idx="1">
+            <a:schemeClr val="dk1"/>
+          </a:lnRef>
+          <a:fillRef idx="2">
+            <a:schemeClr val="dk1"/>
+          </a:fillRef>
+          <a:effectRef idx="1">
+            <a:schemeClr val="dk1"/>
+          </a:effectRef>
+          <a:fontRef idx="minor">
+            <a:schemeClr val="dk1"/>
+          </a:fontRef>
+        </p:style>
+        <p:txBody>
+          <a:bodyPr rtlCol="0" anchor="ctr"/>
+          <a:lstStyle/>
+          <a:p>
+            <a:pPr algn="ctr"/>
+            <a:endParaRPr lang="en-US" dirty="0"/>
+          </a:p>
+        </p:txBody>
+      </p:sp>
+      <p:sp>
+        <p:nvSpPr>
+          <p:cNvPr id="17" name="Oval 16">
+            <a:extLst>
+              <a:ext uri="{FF2B5EF4-FFF2-40B4-BE49-F238E27FC236}">
+                <a16:creationId xmlns:a16="http://schemas.microsoft.com/office/drawing/2014/main" id="{CED25659-77B4-9FF8-C456-39935DD55A9C}"/>
+              </a:ext>
+            </a:extLst>
+          </p:cNvPr>
+          <p:cNvSpPr/>
+          <p:nvPr/>
+        </p:nvSpPr>
+        <p:spPr>
+          <a:xfrm>
+            <a:off x="5326176" y="3209766"/>
+            <a:ext cx="319252" cy="319252"/>
+          </a:xfrm>
+          <a:prstGeom prst="ellipse">
+            <a:avLst/>
+          </a:prstGeom>
+        </p:spPr>
+        <p:style>
+          <a:lnRef idx="0">
+            <a:schemeClr val="accent3"/>
+          </a:lnRef>
+          <a:fillRef idx="3">
+            <a:schemeClr val="accent3"/>
+          </a:fillRef>
+          <a:effectRef idx="3">
+            <a:schemeClr val="accent3"/>
+          </a:effectRef>
+          <a:fontRef idx="minor">
+            <a:schemeClr val="lt1"/>
+          </a:fontRef>
+        </p:style>
+        <p:txBody>
+          <a:bodyPr rtlCol="0" anchor="ctr"/>
+          <a:lstStyle/>
+          <a:p>
+            <a:pPr algn="ctr"/>
+            <a:endParaRPr lang="en-US"/>
+          </a:p>
+        </p:txBody>
+      </p:sp>
+      <p:sp>
+        <p:nvSpPr>
+          <p:cNvPr id="23" name="Rectangle: Rounded Corners 22">
+            <a:extLst>
+              <a:ext uri="{FF2B5EF4-FFF2-40B4-BE49-F238E27FC236}">
+                <a16:creationId xmlns:a16="http://schemas.microsoft.com/office/drawing/2014/main" id="{7870FDC6-969A-4902-83E7-BDBF27EDAC0E}"/>
+              </a:ext>
+            </a:extLst>
+          </p:cNvPr>
+          <p:cNvSpPr/>
+          <p:nvPr/>
+        </p:nvSpPr>
+        <p:spPr>
+          <a:xfrm>
+            <a:off x="6143611" y="2776801"/>
+            <a:ext cx="1129340" cy="1152940"/>
+          </a:xfrm>
+          <a:prstGeom prst="roundRect">
+            <a:avLst/>
+          </a:prstGeom>
+        </p:spPr>
+        <p:style>
+          <a:lnRef idx="1">
+            <a:schemeClr val="dk1"/>
+          </a:lnRef>
+          <a:fillRef idx="2">
+            <a:schemeClr val="dk1"/>
+          </a:fillRef>
+          <a:effectRef idx="1">
+            <a:schemeClr val="dk1"/>
+          </a:effectRef>
+          <a:fontRef idx="minor">
+            <a:schemeClr val="dk1"/>
+          </a:fontRef>
+        </p:style>
+        <p:txBody>
+          <a:bodyPr rtlCol="0" anchor="ctr"/>
+          <a:lstStyle/>
+          <a:p>
+            <a:pPr algn="ctr"/>
+            <a:endParaRPr lang="en-US" dirty="0"/>
+          </a:p>
+        </p:txBody>
+      </p:sp>
+      <p:sp>
+        <p:nvSpPr>
+          <p:cNvPr id="25" name="Oval 24">
+            <a:extLst>
+              <a:ext uri="{FF2B5EF4-FFF2-40B4-BE49-F238E27FC236}">
+                <a16:creationId xmlns:a16="http://schemas.microsoft.com/office/drawing/2014/main" id="{DA79CE46-865E-A188-6C39-74E03E74C1B4}"/>
+              </a:ext>
+            </a:extLst>
+          </p:cNvPr>
+          <p:cNvSpPr/>
+          <p:nvPr/>
+        </p:nvSpPr>
+        <p:spPr>
+          <a:xfrm>
+            <a:off x="6532533" y="3226958"/>
+            <a:ext cx="242479" cy="242479"/>
+          </a:xfrm>
+          <a:prstGeom prst="ellipse">
+            <a:avLst/>
+          </a:prstGeom>
+        </p:spPr>
+        <p:style>
+          <a:lnRef idx="0">
+            <a:schemeClr val="accent3"/>
+          </a:lnRef>
+          <a:fillRef idx="3">
+            <a:schemeClr val="accent3"/>
+          </a:fillRef>
+          <a:effectRef idx="3">
+            <a:schemeClr val="accent3"/>
+          </a:effectRef>
+          <a:fontRef idx="minor">
+            <a:schemeClr val="lt1"/>
+          </a:fontRef>
+        </p:style>
+        <p:txBody>
+          <a:bodyPr rtlCol="0" anchor="ctr"/>
+          <a:lstStyle/>
+          <a:p>
+            <a:pPr algn="ctr"/>
+            <a:endParaRPr lang="en-US"/>
+          </a:p>
+        </p:txBody>
+      </p:sp>
+      <p:cxnSp>
+        <p:nvCxnSpPr>
+          <p:cNvPr id="27" name="Connector: Curved 26">
+            <a:extLst>
+              <a:ext uri="{FF2B5EF4-FFF2-40B4-BE49-F238E27FC236}">
+                <a16:creationId xmlns:a16="http://schemas.microsoft.com/office/drawing/2014/main" id="{7EF43584-8A09-DF8D-E946-B0FE437CAA09}"/>
+              </a:ext>
+            </a:extLst>
+          </p:cNvPr>
+          <p:cNvCxnSpPr>
+            <a:stCxn id="8" idx="2"/>
+            <a:endCxn id="15" idx="2"/>
+          </p:cNvCxnSpPr>
+          <p:nvPr/>
+        </p:nvCxnSpPr>
+        <p:spPr>
+          <a:xfrm rot="16200000" flipH="1">
+            <a:off x="4898744" y="3353222"/>
+            <a:ext cx="12700" cy="1206358"/>
+          </a:xfrm>
+          <a:prstGeom prst="curvedConnector3">
+            <a:avLst>
+              <a:gd name="adj1" fmla="val 1800000"/>
+            </a:avLst>
+          </a:prstGeom>
+          <a:ln>
+            <a:tailEnd type="triangle"/>
+          </a:ln>
+        </p:spPr>
+        <p:style>
+          <a:lnRef idx="1">
+            <a:schemeClr val="dk1"/>
+          </a:lnRef>
+          <a:fillRef idx="0">
+            <a:schemeClr val="dk1"/>
+          </a:fillRef>
+          <a:effectRef idx="0">
+            <a:schemeClr val="dk1"/>
+          </a:effectRef>
+          <a:fontRef idx="minor">
+            <a:schemeClr val="tx1"/>
+          </a:fontRef>
+        </p:style>
+      </p:cxnSp>
+      <p:cxnSp>
+        <p:nvCxnSpPr>
+          <p:cNvPr id="28" name="Connector: Curved 27">
+            <a:extLst>
+              <a:ext uri="{FF2B5EF4-FFF2-40B4-BE49-F238E27FC236}">
+                <a16:creationId xmlns:a16="http://schemas.microsoft.com/office/drawing/2014/main" id="{A0717F08-B786-FF34-5EAC-26C9DA0DB85C}"/>
+              </a:ext>
+            </a:extLst>
+          </p:cNvPr>
+          <p:cNvCxnSpPr/>
+          <p:nvPr/>
+        </p:nvCxnSpPr>
+        <p:spPr>
+          <a:xfrm rot="16200000" flipH="1">
+            <a:off x="6097142" y="3334171"/>
+            <a:ext cx="12700" cy="1206358"/>
+          </a:xfrm>
+          <a:prstGeom prst="curvedConnector3">
+            <a:avLst>
+              <a:gd name="adj1" fmla="val 1800000"/>
+            </a:avLst>
+          </a:prstGeom>
+          <a:ln>
+            <a:tailEnd type="triangle"/>
+          </a:ln>
+        </p:spPr>
+        <p:style>
+          <a:lnRef idx="1">
+            <a:schemeClr val="dk1"/>
+          </a:lnRef>
+          <a:fillRef idx="0">
+            <a:schemeClr val="dk1"/>
+          </a:fillRef>
+          <a:effectRef idx="0">
+            <a:schemeClr val="dk1"/>
+          </a:effectRef>
+          <a:fontRef idx="minor">
+            <a:schemeClr val="tx1"/>
+          </a:fontRef>
+        </p:style>
+      </p:cxnSp>
+      <p:sp>
+        <p:nvSpPr>
+          <p:cNvPr id="29" name="Oval 28">
+            <a:extLst>
+              <a:ext uri="{FF2B5EF4-FFF2-40B4-BE49-F238E27FC236}">
+                <a16:creationId xmlns:a16="http://schemas.microsoft.com/office/drawing/2014/main" id="{614E54FC-995B-9FD9-B4D0-A9CFAEA84012}"/>
+              </a:ext>
+            </a:extLst>
+          </p:cNvPr>
+          <p:cNvSpPr/>
+          <p:nvPr/>
+        </p:nvSpPr>
+        <p:spPr>
+          <a:xfrm>
+            <a:off x="7427844" y="3348197"/>
+            <a:ext cx="92765" cy="92765"/>
+          </a:xfrm>
+          <a:prstGeom prst="ellipse">
+            <a:avLst/>
+          </a:prstGeom>
+        </p:spPr>
+        <p:style>
+          <a:lnRef idx="2">
+            <a:schemeClr val="dk1">
+              <a:shade val="15000"/>
+            </a:schemeClr>
+          </a:lnRef>
+          <a:fillRef idx="1">
+            <a:schemeClr val="dk1"/>
+          </a:fillRef>
+          <a:effectRef idx="0">
+            <a:schemeClr val="dk1"/>
+          </a:effectRef>
+          <a:fontRef idx="minor">
+            <a:schemeClr val="lt1"/>
+          </a:fontRef>
+        </p:style>
+        <p:txBody>
+          <a:bodyPr rtlCol="0" anchor="ctr"/>
+          <a:lstStyle/>
+          <a:p>
+            <a:pPr algn="ctr"/>
+            <a:endParaRPr lang="en-US"/>
+          </a:p>
+        </p:txBody>
+      </p:sp>
+      <p:sp>
+        <p:nvSpPr>
+          <p:cNvPr id="33" name="Oval 32">
+            <a:extLst>
+              <a:ext uri="{FF2B5EF4-FFF2-40B4-BE49-F238E27FC236}">
+                <a16:creationId xmlns:a16="http://schemas.microsoft.com/office/drawing/2014/main" id="{26E07292-A4D4-72BA-E678-155CB70D2120}"/>
+              </a:ext>
+            </a:extLst>
+          </p:cNvPr>
+          <p:cNvSpPr/>
+          <p:nvPr/>
+        </p:nvSpPr>
+        <p:spPr>
+          <a:xfrm>
+            <a:off x="7661873" y="3348197"/>
+            <a:ext cx="92765" cy="92765"/>
+          </a:xfrm>
+          <a:prstGeom prst="ellipse">
+            <a:avLst/>
+          </a:prstGeom>
+        </p:spPr>
+        <p:style>
+          <a:lnRef idx="2">
+            <a:schemeClr val="dk1">
+              <a:shade val="15000"/>
+            </a:schemeClr>
+          </a:lnRef>
+          <a:fillRef idx="1">
+            <a:schemeClr val="dk1"/>
+          </a:fillRef>
+          <a:effectRef idx="0">
+            <a:schemeClr val="dk1"/>
+          </a:effectRef>
+          <a:fontRef idx="minor">
+            <a:schemeClr val="lt1"/>
+          </a:fontRef>
+        </p:style>
+        <p:txBody>
+          <a:bodyPr rtlCol="0" anchor="ctr"/>
+          <a:lstStyle/>
+          <a:p>
+            <a:pPr algn="ctr"/>
+            <a:endParaRPr lang="en-US"/>
+          </a:p>
+        </p:txBody>
+      </p:sp>
+      <p:sp>
+        <p:nvSpPr>
+          <p:cNvPr id="35" name="Oval 34">
+            <a:extLst>
+              <a:ext uri="{FF2B5EF4-FFF2-40B4-BE49-F238E27FC236}">
+                <a16:creationId xmlns:a16="http://schemas.microsoft.com/office/drawing/2014/main" id="{258315BD-41CC-6F90-B553-8AE5999C2239}"/>
+              </a:ext>
+            </a:extLst>
+          </p:cNvPr>
+          <p:cNvSpPr/>
+          <p:nvPr/>
+        </p:nvSpPr>
+        <p:spPr>
+          <a:xfrm>
+            <a:off x="7895902" y="3348197"/>
+            <a:ext cx="92765" cy="92765"/>
+          </a:xfrm>
+          <a:prstGeom prst="ellipse">
+            <a:avLst/>
+          </a:prstGeom>
+        </p:spPr>
+        <p:style>
+          <a:lnRef idx="2">
+            <a:schemeClr val="dk1">
+              <a:shade val="15000"/>
+            </a:schemeClr>
+          </a:lnRef>
+          <a:fillRef idx="1">
+            <a:schemeClr val="dk1"/>
+          </a:fillRef>
+          <a:effectRef idx="0">
+            <a:schemeClr val="dk1"/>
+          </a:effectRef>
+          <a:fontRef idx="minor">
+            <a:schemeClr val="lt1"/>
+          </a:fontRef>
+        </p:style>
+        <p:txBody>
+          <a:bodyPr rtlCol="0" anchor="ctr"/>
+          <a:lstStyle/>
+          <a:p>
+            <a:pPr algn="ctr"/>
+            <a:endParaRPr lang="en-US"/>
+          </a:p>
+        </p:txBody>
+      </p:sp>
+      <p:sp>
+        <p:nvSpPr>
+          <p:cNvPr id="36" name="TextBox 35">
+            <a:extLst>
+              <a:ext uri="{FF2B5EF4-FFF2-40B4-BE49-F238E27FC236}">
+                <a16:creationId xmlns:a16="http://schemas.microsoft.com/office/drawing/2014/main" id="{1A54670A-1960-82BB-9C71-DF05F66283AB}"/>
+              </a:ext>
+            </a:extLst>
+          </p:cNvPr>
+          <p:cNvSpPr txBox="1"/>
+          <p:nvPr/>
+        </p:nvSpPr>
+        <p:spPr>
+          <a:xfrm>
+            <a:off x="7609733" y="3469437"/>
+            <a:ext cx="492724" cy="369332"/>
+          </a:xfrm>
+          <a:prstGeom prst="rect">
+            <a:avLst/>
+          </a:prstGeom>
+          <a:noFill/>
+        </p:spPr>
+        <p:txBody>
+          <a:bodyPr wrap="square" rtlCol="0">
+            <a:spAutoFit/>
+          </a:bodyPr>
+          <a:lstStyle/>
+          <a:p>
+            <a:r>
+              <a:rPr lang="en-US" b="1" dirty="0">
+                <a:solidFill>
+                  <a:schemeClr val="bg1"/>
+                </a:solidFill>
+              </a:rPr>
+              <a:t>n</a:t>
+            </a:r>
+          </a:p>
+        </p:txBody>
+      </p:sp>
+      <p:sp>
+        <p:nvSpPr>
+          <p:cNvPr id="37" name="TextBox 36">
+            <a:extLst>
+              <a:ext uri="{FF2B5EF4-FFF2-40B4-BE49-F238E27FC236}">
+                <a16:creationId xmlns:a16="http://schemas.microsoft.com/office/drawing/2014/main" id="{EAEE55A7-84BF-6E4B-6CB7-FBDF4CC8589A}"/>
+              </a:ext>
+            </a:extLst>
+          </p:cNvPr>
+          <p:cNvSpPr txBox="1"/>
+          <p:nvPr/>
+        </p:nvSpPr>
+        <p:spPr>
+          <a:xfrm>
+            <a:off x="3637150" y="4161015"/>
+            <a:ext cx="3599985" cy="369332"/>
+          </a:xfrm>
+          <a:prstGeom prst="rect">
+            <a:avLst/>
+          </a:prstGeom>
+          <a:noFill/>
+        </p:spPr>
+        <p:txBody>
+          <a:bodyPr wrap="square" rtlCol="0">
+            <a:spAutoFit/>
+          </a:bodyPr>
+          <a:lstStyle/>
+          <a:p>
+            <a:r>
+              <a:rPr lang="en-US" dirty="0"/>
+              <a:t>Weight is reduced based on </a:t>
+            </a:r>
+            <a:r>
+              <a:rPr lang="el-GR" dirty="0">
+                <a:latin typeface="Cambria Math" panose="02040503050406030204" pitchFamily="18" charset="0"/>
+                <a:ea typeface="Cambria Math" panose="02040503050406030204" pitchFamily="18" charset="0"/>
+              </a:rPr>
+              <a:t>μ</a:t>
+            </a:r>
+            <a:r>
+              <a:rPr lang="en-US" baseline="-25000" dirty="0">
+                <a:latin typeface="Cambria Math" panose="02040503050406030204" pitchFamily="18" charset="0"/>
+                <a:ea typeface="Cambria Math" panose="02040503050406030204" pitchFamily="18" charset="0"/>
+              </a:rPr>
+              <a:t>a</a:t>
+            </a:r>
+            <a:r>
+              <a:rPr lang="en-US" dirty="0"/>
+              <a:t>  </a:t>
+            </a:r>
+          </a:p>
+        </p:txBody>
+      </p:sp>
+      <p:sp>
+        <p:nvSpPr>
+          <p:cNvPr id="39" name="Rectangle: Rounded Corners 38">
+            <a:extLst>
+              <a:ext uri="{FF2B5EF4-FFF2-40B4-BE49-F238E27FC236}">
+                <a16:creationId xmlns:a16="http://schemas.microsoft.com/office/drawing/2014/main" id="{2CED0CBE-4FA2-0A39-27D5-62030A9E7494}"/>
+              </a:ext>
+            </a:extLst>
+          </p:cNvPr>
+          <p:cNvSpPr/>
+          <p:nvPr/>
+        </p:nvSpPr>
+        <p:spPr>
+          <a:xfrm>
+            <a:off x="8335618" y="1795669"/>
+            <a:ext cx="1663148" cy="1152940"/>
+          </a:xfrm>
+          <a:prstGeom prst="roundRect">
+            <a:avLst/>
+          </a:prstGeom>
+        </p:spPr>
+        <p:style>
+          <a:lnRef idx="1">
+            <a:schemeClr val="accent6"/>
+          </a:lnRef>
+          <a:fillRef idx="2">
+            <a:schemeClr val="accent6"/>
+          </a:fillRef>
+          <a:effectRef idx="1">
+            <a:schemeClr val="accent6"/>
+          </a:effectRef>
+          <a:fontRef idx="minor">
+            <a:schemeClr val="dk1"/>
+          </a:fontRef>
+        </p:style>
+        <p:txBody>
+          <a:bodyPr rtlCol="0" anchor="ctr"/>
+          <a:lstStyle/>
+          <a:p>
+            <a:pPr algn="ctr"/>
+            <a:r>
+              <a:rPr lang="en-US" dirty="0"/>
+              <a:t>New scatter direction is determined</a:t>
+            </a:r>
+          </a:p>
+        </p:txBody>
+      </p:sp>
+      <p:pic>
+        <p:nvPicPr>
+          <p:cNvPr id="41" name="Picture 40">
+            <a:extLst>
+              <a:ext uri="{FF2B5EF4-FFF2-40B4-BE49-F238E27FC236}">
+                <a16:creationId xmlns:a16="http://schemas.microsoft.com/office/drawing/2014/main" id="{53483FE8-D6C3-9B74-285A-09BD500A65A2}"/>
+              </a:ext>
+            </a:extLst>
+          </p:cNvPr>
+          <p:cNvPicPr>
+            <a:picLocks noChangeAspect="1"/>
+          </p:cNvPicPr>
+          <p:nvPr/>
+        </p:nvPicPr>
+        <p:blipFill>
+          <a:blip r:embed="rId3"/>
+          <a:stretch>
+            <a:fillRect/>
+          </a:stretch>
+        </p:blipFill>
+        <p:spPr>
+          <a:xfrm>
+            <a:off x="214156" y="265467"/>
+            <a:ext cx="9446193" cy="615176"/>
+          </a:xfrm>
+          <a:prstGeom prst="rect">
+            <a:avLst/>
+          </a:prstGeom>
+          <a:ln>
+            <a:solidFill>
+              <a:schemeClr val="bg1"/>
+            </a:solidFill>
+          </a:ln>
+        </p:spPr>
+      </p:pic>
+      <p:cxnSp>
+        <p:nvCxnSpPr>
+          <p:cNvPr id="43" name="Connector: Curved 42">
+            <a:extLst>
+              <a:ext uri="{FF2B5EF4-FFF2-40B4-BE49-F238E27FC236}">
+                <a16:creationId xmlns:a16="http://schemas.microsoft.com/office/drawing/2014/main" id="{0E84804B-640A-9B18-7608-E5DB48BBBEBE}"/>
+              </a:ext>
+            </a:extLst>
+          </p:cNvPr>
+          <p:cNvCxnSpPr>
+            <a:cxnSpLocks/>
+          </p:cNvCxnSpPr>
+          <p:nvPr/>
+        </p:nvCxnSpPr>
+        <p:spPr>
+          <a:xfrm rot="16200000" flipV="1">
+            <a:off x="6562551" y="-776815"/>
+            <a:ext cx="915026" cy="4229939"/>
+          </a:xfrm>
+          <a:prstGeom prst="curvedConnector3">
+            <a:avLst/>
+          </a:prstGeom>
+          <a:ln>
+            <a:tailEnd type="triangle"/>
+          </a:ln>
+        </p:spPr>
+        <p:style>
+          <a:lnRef idx="1">
+            <a:schemeClr val="dk1"/>
+          </a:lnRef>
+          <a:fillRef idx="0">
+            <a:schemeClr val="dk1"/>
+          </a:fillRef>
+          <a:effectRef idx="0">
+            <a:schemeClr val="dk1"/>
+          </a:effectRef>
+          <a:fontRef idx="minor">
+            <a:schemeClr val="tx1"/>
+          </a:fontRef>
+        </p:style>
+      </p:cxnSp>
+      <p:sp>
+        <p:nvSpPr>
+          <p:cNvPr id="46" name="Arrow: Right 45">
+            <a:extLst>
+              <a:ext uri="{FF2B5EF4-FFF2-40B4-BE49-F238E27FC236}">
+                <a16:creationId xmlns:a16="http://schemas.microsoft.com/office/drawing/2014/main" id="{55D8F6E7-FEDD-F497-CCD5-4F9E8ABF1236}"/>
+              </a:ext>
+            </a:extLst>
+          </p:cNvPr>
+          <p:cNvSpPr/>
+          <p:nvPr/>
+        </p:nvSpPr>
+        <p:spPr>
+          <a:xfrm rot="5400000">
+            <a:off x="7776604" y="3979996"/>
+            <a:ext cx="2883454" cy="1018356"/>
+          </a:xfrm>
+          <a:prstGeom prst="rightArrow">
+            <a:avLst/>
+          </a:prstGeom>
+        </p:spPr>
+        <p:style>
+          <a:lnRef idx="1">
+            <a:schemeClr val="accent6"/>
+          </a:lnRef>
+          <a:fillRef idx="2">
+            <a:schemeClr val="accent6"/>
+          </a:fillRef>
+          <a:effectRef idx="1">
+            <a:schemeClr val="accent6"/>
+          </a:effectRef>
+          <a:fontRef idx="minor">
+            <a:schemeClr val="dk1"/>
+          </a:fontRef>
+        </p:style>
+        <p:txBody>
+          <a:bodyPr rtlCol="0" anchor="ctr"/>
+          <a:lstStyle/>
+          <a:p>
+            <a:pPr algn="ctr"/>
+            <a:endParaRPr lang="en-US"/>
+          </a:p>
+        </p:txBody>
+      </p:sp>
+      <p:sp>
+        <p:nvSpPr>
+          <p:cNvPr id="47" name="TextBox 46">
+            <a:extLst>
+              <a:ext uri="{FF2B5EF4-FFF2-40B4-BE49-F238E27FC236}">
+                <a16:creationId xmlns:a16="http://schemas.microsoft.com/office/drawing/2014/main" id="{68A415F6-6CC3-DBFF-FDCE-3E7E211DC316}"/>
+              </a:ext>
+            </a:extLst>
+          </p:cNvPr>
+          <p:cNvSpPr txBox="1"/>
+          <p:nvPr/>
+        </p:nvSpPr>
+        <p:spPr>
+          <a:xfrm>
+            <a:off x="9672340" y="3253547"/>
+            <a:ext cx="1782418" cy="2031325"/>
+          </a:xfrm>
+          <a:prstGeom prst="rect">
+            <a:avLst/>
+          </a:prstGeom>
+          <a:noFill/>
+        </p:spPr>
+        <p:txBody>
+          <a:bodyPr wrap="square" rtlCol="0">
+            <a:spAutoFit/>
+          </a:bodyPr>
+          <a:lstStyle/>
+          <a:p>
+            <a:r>
+              <a:rPr lang="en-US" dirty="0"/>
+              <a:t>Previous steps are repeated until the boundary is left or no more time is left</a:t>
+            </a:r>
+          </a:p>
+        </p:txBody>
+      </p:sp>
+    </p:spTree>
+    <p:extLst>
+      <p:ext uri="{BB962C8B-B14F-4D97-AF65-F5344CB8AC3E}">
+        <p14:creationId xmlns:p14="http://schemas.microsoft.com/office/powerpoint/2010/main" val="1601636316"/>
+      </p:ext>
+    </p:extLst>
+  </p:cSld>
+  <p:clrMapOvr>
+    <a:masterClrMapping/>
+  </p:clrMapOvr>
+</p:sld>
+</file>
+
+<file path=ppt/slides/slide5.xml><?xml version="1.0" encoding="utf-8"?>
+<p:sld xmlns:a="http://schemas.openxmlformats.org/drawingml/2006/main" xmlns:r="http://schemas.openxmlformats.org/officeDocument/2006/relationships" xmlns:p="http://schemas.openxmlformats.org/presentationml/2006/main">
+  <p:cSld>
+    <p:spTree>
+      <p:nvGrpSpPr>
+        <p:cNvPr id="1" name=""/>
+        <p:cNvGrpSpPr/>
+        <p:nvPr/>
+      </p:nvGrpSpPr>
+      <p:grpSpPr>
+        <a:xfrm>
+          <a:off x="0" y="0"/>
+          <a:ext cx="0" cy="0"/>
+          <a:chOff x="0" y="0"/>
+          <a:chExt cx="0" cy="0"/>
+        </a:xfrm>
+      </p:grpSpPr>
+      <p:sp>
+        <p:nvSpPr>
           <p:cNvPr id="2" name="Title 1">
             <a:extLst>
               <a:ext uri="{FF2B5EF4-FFF2-40B4-BE49-F238E27FC236}">
-                <a16:creationId xmlns:a16="http://schemas.microsoft.com/office/drawing/2014/main" id="{BFB7EC54-3F47-EEB3-F49C-6ADDCD5448FB}"/>
+                <a16:creationId xmlns:a16="http://schemas.microsoft.com/office/drawing/2014/main" id="{8CBD9C3D-8F83-B489-ED20-32DC9A49B52E}"/>
               </a:ext>
             </a:extLst>
           </p:cNvPr>
@@ -3843,25 +8519,17 @@
           <a:p>
             <a:r>
               <a:rPr lang="en-US" dirty="0"/>
-              <a:t>Absorption-</a:t>
-            </a:r>
-            <a:r>
-              <a:rPr lang="en-US" dirty="0" err="1"/>
-              <a:t>BeerLambert</a:t>
-            </a:r>
-            <a:r>
-              <a:rPr lang="en-US" dirty="0"/>
-              <a:t> Crosscheck</a:t>
+              <a:t>Deciding the Parameters for Fornier Forand</a:t>
             </a:r>
           </a:p>
         </p:txBody>
       </p:sp>
       <p:pic>
         <p:nvPicPr>
-          <p:cNvPr id="6" name="Content Placeholder 5">
+          <p:cNvPr id="7" name="Content Placeholder 6">
             <a:extLst>
               <a:ext uri="{FF2B5EF4-FFF2-40B4-BE49-F238E27FC236}">
-                <a16:creationId xmlns:a16="http://schemas.microsoft.com/office/drawing/2014/main" id="{C9BBE854-CF5E-5F60-728F-58D0ED728690}"/>
+                <a16:creationId xmlns:a16="http://schemas.microsoft.com/office/drawing/2014/main" id="{EB621F94-919A-F061-AEFA-DCA454A0C88B}"/>
               </a:ext>
             </a:extLst>
           </p:cNvPr>
@@ -3869,7 +8537,509 @@
             <a:picLocks noGrp="1" noChangeAspect="1"/>
           </p:cNvPicPr>
           <p:nvPr>
-            <p:ph sz="half" idx="1"/>
+            <p:ph idx="1"/>
+          </p:nvPr>
+        </p:nvPicPr>
+        <p:blipFill>
+          <a:blip r:embed="rId2"/>
+          <a:stretch>
+            <a:fillRect/>
+          </a:stretch>
+        </p:blipFill>
+        <p:spPr>
+          <a:xfrm>
+            <a:off x="4960398" y="2517503"/>
+            <a:ext cx="6138895" cy="3011966"/>
+          </a:xfrm>
+          <a:prstGeom prst="rect">
+            <a:avLst/>
+          </a:prstGeom>
+        </p:spPr>
+      </p:pic>
+      <p:sp>
+        <p:nvSpPr>
+          <p:cNvPr id="5" name="Text Placeholder 4">
+            <a:extLst>
+              <a:ext uri="{FF2B5EF4-FFF2-40B4-BE49-F238E27FC236}">
+                <a16:creationId xmlns:a16="http://schemas.microsoft.com/office/drawing/2014/main" id="{17EF4266-C469-7D12-1BBE-C95523C3392C}"/>
+              </a:ext>
+            </a:extLst>
+          </p:cNvPr>
+          <p:cNvSpPr>
+            <a:spLocks noGrp="1"/>
+          </p:cNvSpPr>
+          <p:nvPr>
+            <p:ph type="body" sz="half" idx="2"/>
+          </p:nvPr>
+        </p:nvSpPr>
+        <p:spPr/>
+        <p:txBody>
+          <a:bodyPr/>
+          <a:lstStyle/>
+          <a:p>
+            <a:pPr marL="342900" indent="-342900">
+              <a:buAutoNum type="arabicPeriod"/>
+            </a:pPr>
+            <a:r>
+              <a:rPr lang="en-US" dirty="0"/>
+              <a:t>0.015–0.025  from Characterization of Particle Backscattering of Global </a:t>
+            </a:r>
+            <a:r>
+              <a:rPr lang="en-US" dirty="0" err="1"/>
+              <a:t>HighlyTurbid</a:t>
+            </a:r>
+            <a:r>
+              <a:rPr lang="en-US" dirty="0"/>
+              <a:t> Waters From VIIRS Ocean Color Observations</a:t>
+            </a:r>
+          </a:p>
+          <a:p>
+            <a:pPr marL="342900" indent="-342900">
+              <a:buAutoNum type="arabicPeriod"/>
+            </a:pPr>
+            <a:r>
+              <a:rPr lang="en-US" dirty="0"/>
+              <a:t>Picture to the left from Comparison of reflectance with backscatter and absorption parameters for turbid waters</a:t>
+            </a:r>
+          </a:p>
+        </p:txBody>
+      </p:sp>
+    </p:spTree>
+    <p:extLst>
+      <p:ext uri="{BB962C8B-B14F-4D97-AF65-F5344CB8AC3E}">
+        <p14:creationId xmlns:p14="http://schemas.microsoft.com/office/powerpoint/2010/main" val="3580156459"/>
+      </p:ext>
+    </p:extLst>
+  </p:cSld>
+  <p:clrMapOvr>
+    <a:masterClrMapping/>
+  </p:clrMapOvr>
+</p:sld>
+</file>
+
+<file path=ppt/slides/slide6.xml><?xml version="1.0" encoding="utf-8"?>
+<p:sld xmlns:a="http://schemas.openxmlformats.org/drawingml/2006/main" xmlns:r="http://schemas.openxmlformats.org/officeDocument/2006/relationships" xmlns:p="http://schemas.openxmlformats.org/presentationml/2006/main">
+  <p:cSld>
+    <p:spTree>
+      <p:nvGrpSpPr>
+        <p:cNvPr id="1" name=""/>
+        <p:cNvGrpSpPr/>
+        <p:nvPr/>
+      </p:nvGrpSpPr>
+      <p:grpSpPr>
+        <a:xfrm>
+          <a:off x="0" y="0"/>
+          <a:ext cx="0" cy="0"/>
+          <a:chOff x="0" y="0"/>
+          <a:chExt cx="0" cy="0"/>
+        </a:xfrm>
+      </p:grpSpPr>
+      <p:sp>
+        <p:nvSpPr>
+          <p:cNvPr id="2" name="Title 1">
+            <a:extLst>
+              <a:ext uri="{FF2B5EF4-FFF2-40B4-BE49-F238E27FC236}">
+                <a16:creationId xmlns:a16="http://schemas.microsoft.com/office/drawing/2014/main" id="{4840326F-948C-8CD6-61AF-24B753B4D2CB}"/>
+              </a:ext>
+            </a:extLst>
+          </p:cNvPr>
+          <p:cNvSpPr>
+            <a:spLocks noGrp="1"/>
+          </p:cNvSpPr>
+          <p:nvPr>
+            <p:ph type="title"/>
+          </p:nvPr>
+        </p:nvSpPr>
+        <p:spPr/>
+        <p:txBody>
+          <a:bodyPr/>
+          <a:lstStyle/>
+          <a:p>
+            <a:r>
+              <a:rPr lang="en-US" dirty="0"/>
+              <a:t>Other Parameters</a:t>
+            </a:r>
+          </a:p>
+        </p:txBody>
+      </p:sp>
+      <p:sp>
+        <p:nvSpPr>
+          <p:cNvPr id="3" name="Content Placeholder 2">
+            <a:extLst>
+              <a:ext uri="{FF2B5EF4-FFF2-40B4-BE49-F238E27FC236}">
+                <a16:creationId xmlns:a16="http://schemas.microsoft.com/office/drawing/2014/main" id="{D8FB0220-23E7-8FF9-3EFB-50936F2D4F6A}"/>
+              </a:ext>
+            </a:extLst>
+          </p:cNvPr>
+          <p:cNvSpPr>
+            <a:spLocks noGrp="1"/>
+          </p:cNvSpPr>
+          <p:nvPr>
+            <p:ph idx="1"/>
+          </p:nvPr>
+        </p:nvSpPr>
+        <p:spPr/>
+        <p:txBody>
+          <a:bodyPr/>
+          <a:lstStyle/>
+          <a:p>
+            <a:r>
+              <a:rPr lang="en-US" dirty="0"/>
+              <a:t>Domain: 500mm by 500mm by 500mm ( Can be reduced to 100mm for some tests)</a:t>
+            </a:r>
+          </a:p>
+          <a:p>
+            <a:r>
+              <a:rPr lang="en-US" dirty="0"/>
+              <a:t>Back Scatter Fraction 0.02 (May be tuned in via Petzold)</a:t>
+            </a:r>
+          </a:p>
+          <a:p>
+            <a:r>
+              <a:rPr lang="en-US" dirty="0"/>
+              <a:t>Mua:0.002</a:t>
+            </a:r>
+          </a:p>
+          <a:p>
+            <a:r>
+              <a:rPr lang="en-US" dirty="0"/>
+              <a:t>Mus: 0.015 to 0.05</a:t>
+            </a:r>
+          </a:p>
+          <a:p>
+            <a:endParaRPr lang="en-US" dirty="0"/>
+          </a:p>
+          <a:p>
+            <a:endParaRPr lang="en-US" dirty="0"/>
+          </a:p>
+        </p:txBody>
+      </p:sp>
+    </p:spTree>
+    <p:extLst>
+      <p:ext uri="{BB962C8B-B14F-4D97-AF65-F5344CB8AC3E}">
+        <p14:creationId xmlns:p14="http://schemas.microsoft.com/office/powerpoint/2010/main" val="944707997"/>
+      </p:ext>
+    </p:extLst>
+  </p:cSld>
+  <p:clrMapOvr>
+    <a:masterClrMapping/>
+  </p:clrMapOvr>
+</p:sld>
+</file>
+
+<file path=ppt/slides/slide7.xml><?xml version="1.0" encoding="utf-8"?>
+<p:sld xmlns:a="http://schemas.openxmlformats.org/drawingml/2006/main" xmlns:r="http://schemas.openxmlformats.org/officeDocument/2006/relationships" xmlns:p="http://schemas.openxmlformats.org/presentationml/2006/main">
+  <p:cSld>
+    <p:spTree>
+      <p:nvGrpSpPr>
+        <p:cNvPr id="1" name=""/>
+        <p:cNvGrpSpPr/>
+        <p:nvPr/>
+      </p:nvGrpSpPr>
+      <p:grpSpPr>
+        <a:xfrm>
+          <a:off x="0" y="0"/>
+          <a:ext cx="0" cy="0"/>
+          <a:chOff x="0" y="0"/>
+          <a:chExt cx="0" cy="0"/>
+        </a:xfrm>
+      </p:grpSpPr>
+      <p:sp>
+        <p:nvSpPr>
+          <p:cNvPr id="2" name="Title 1">
+            <a:extLst>
+              <a:ext uri="{FF2B5EF4-FFF2-40B4-BE49-F238E27FC236}">
+                <a16:creationId xmlns:a16="http://schemas.microsoft.com/office/drawing/2014/main" id="{68CDE3B1-A1D1-CD63-EFDA-1AE7F26FA84E}"/>
+              </a:ext>
+            </a:extLst>
+          </p:cNvPr>
+          <p:cNvSpPr>
+            <a:spLocks noGrp="1"/>
+          </p:cNvSpPr>
+          <p:nvPr>
+            <p:ph type="title"/>
+          </p:nvPr>
+        </p:nvSpPr>
+        <p:spPr/>
+        <p:txBody>
+          <a:bodyPr/>
+          <a:lstStyle/>
+          <a:p>
+            <a:r>
+              <a:rPr lang="en-US" dirty="0"/>
+              <a:t>Sanity Checks</a:t>
+            </a:r>
+          </a:p>
+        </p:txBody>
+      </p:sp>
+      <p:sp>
+        <p:nvSpPr>
+          <p:cNvPr id="3" name="Content Placeholder 2">
+            <a:extLst>
+              <a:ext uri="{FF2B5EF4-FFF2-40B4-BE49-F238E27FC236}">
+                <a16:creationId xmlns:a16="http://schemas.microsoft.com/office/drawing/2014/main" id="{A967A8ED-E292-CF61-9F53-B9DCD8CEFC7E}"/>
+              </a:ext>
+            </a:extLst>
+          </p:cNvPr>
+          <p:cNvSpPr>
+            <a:spLocks noGrp="1"/>
+          </p:cNvSpPr>
+          <p:nvPr>
+            <p:ph idx="1"/>
+          </p:nvPr>
+        </p:nvSpPr>
+        <p:spPr/>
+        <p:txBody>
+          <a:bodyPr/>
+          <a:lstStyle/>
+          <a:p>
+            <a:endParaRPr lang="en-US" dirty="0"/>
+          </a:p>
+        </p:txBody>
+      </p:sp>
+      <p:sp>
+        <p:nvSpPr>
+          <p:cNvPr id="4" name="Text Placeholder 3">
+            <a:extLst>
+              <a:ext uri="{FF2B5EF4-FFF2-40B4-BE49-F238E27FC236}">
+                <a16:creationId xmlns:a16="http://schemas.microsoft.com/office/drawing/2014/main" id="{1D46CF0A-A784-9712-C2C8-FC454923D163}"/>
+              </a:ext>
+            </a:extLst>
+          </p:cNvPr>
+          <p:cNvSpPr>
+            <a:spLocks noGrp="1"/>
+          </p:cNvSpPr>
+          <p:nvPr>
+            <p:ph type="body" sz="half" idx="2"/>
+          </p:nvPr>
+        </p:nvSpPr>
+        <p:spPr/>
+        <p:txBody>
+          <a:bodyPr>
+            <a:normAutofit fontScale="55000" lnSpcReduction="20000"/>
+          </a:bodyPr>
+          <a:lstStyle/>
+          <a:p>
+            <a:pPr marL="342900" indent="-342900">
+              <a:buAutoNum type="arabicPeriod"/>
+            </a:pPr>
+            <a:r>
+              <a:rPr lang="en-US" dirty="0"/>
+              <a:t>Under 0 scattering:</a:t>
+            </a:r>
+          </a:p>
+          <a:p>
+            <a:pPr marL="800100" lvl="1" indent="-342900">
+              <a:buAutoNum type="arabicPeriod"/>
+            </a:pPr>
+            <a:r>
+              <a:rPr lang="en-US" dirty="0"/>
+              <a:t>Peak at zero degrees</a:t>
+            </a:r>
+          </a:p>
+          <a:p>
+            <a:pPr marL="800100" lvl="1" indent="-342900">
+              <a:buAutoNum type="arabicPeriod"/>
+            </a:pPr>
+            <a:r>
+              <a:rPr lang="en-US" dirty="0"/>
+              <a:t>Absorption dependance must recover the beer lambert law</a:t>
+            </a:r>
+          </a:p>
+          <a:p>
+            <a:pPr marL="342900" indent="-342900">
+              <a:buAutoNum type="arabicPeriod"/>
+            </a:pPr>
+            <a:r>
+              <a:rPr lang="en-US" dirty="0"/>
+              <a:t>Under conditions where 1 scattering event per photon on average occurs:</a:t>
+            </a:r>
+          </a:p>
+          <a:p>
+            <a:pPr marL="800100" lvl="1" indent="-342900">
+              <a:buAutoNum type="arabicPeriod"/>
+            </a:pPr>
+            <a:r>
+              <a:rPr lang="en-US" dirty="0"/>
+              <a:t>We must recover the Fornier Forand distribution</a:t>
+            </a:r>
+          </a:p>
+          <a:p>
+            <a:pPr marL="800100" lvl="1" indent="-342900">
+              <a:buAutoNum type="arabicPeriod"/>
+            </a:pPr>
+            <a:r>
+              <a:rPr lang="en-US" dirty="0"/>
+              <a:t>HG and FF must be close</a:t>
+            </a:r>
+          </a:p>
+          <a:p>
+            <a:pPr marL="342900" indent="-342900">
+              <a:buAutoNum type="arabicPeriod"/>
+            </a:pPr>
+            <a:r>
+              <a:rPr lang="en-US" dirty="0"/>
+              <a:t>Under reasonable scattering:</a:t>
+            </a:r>
+          </a:p>
+          <a:p>
+            <a:pPr marL="800100" lvl="1" indent="-342900">
+              <a:buAutoNum type="arabicPeriod"/>
+            </a:pPr>
+            <a:r>
+              <a:rPr lang="en-US" dirty="0"/>
+              <a:t>Increasing photon number must reduce std of solutions</a:t>
+            </a:r>
+          </a:p>
+          <a:p>
+            <a:pPr marL="800100" lvl="1" indent="-342900">
+              <a:buAutoNum type="arabicPeriod"/>
+            </a:pPr>
+            <a:r>
+              <a:rPr lang="en-US" dirty="0"/>
+              <a:t>HG and FF must </a:t>
+            </a:r>
+            <a:r>
+              <a:rPr lang="en-US" dirty="0" err="1"/>
+              <a:t>divarge</a:t>
+            </a:r>
+            <a:endParaRPr lang="en-US" dirty="0"/>
+          </a:p>
+          <a:p>
+            <a:pPr marL="342900" indent="-342900">
+              <a:buAutoNum type="arabicPeriod"/>
+            </a:pPr>
+            <a:r>
+              <a:rPr lang="en-US" dirty="0"/>
+              <a:t> Under very large scattering:</a:t>
+            </a:r>
+          </a:p>
+          <a:p>
+            <a:pPr marL="800100" lvl="1" indent="-342900">
+              <a:buAutoNum type="arabicPeriod"/>
+            </a:pPr>
+            <a:r>
+              <a:rPr lang="en-US" dirty="0"/>
+              <a:t>Source must look isotropic at a distance with no forward bias</a:t>
+            </a:r>
+          </a:p>
+          <a:p>
+            <a:pPr marL="800100" lvl="1" indent="-342900">
+              <a:buAutoNum type="arabicPeriod"/>
+            </a:pPr>
+            <a:r>
+              <a:rPr lang="en-US" dirty="0"/>
+              <a:t>HG and FF must converge</a:t>
+            </a:r>
+          </a:p>
+          <a:p>
+            <a:pPr marL="342900" indent="-342900">
+              <a:buAutoNum type="arabicPeriod"/>
+            </a:pPr>
+            <a:endParaRPr lang="en-US" dirty="0"/>
+          </a:p>
+        </p:txBody>
+      </p:sp>
+    </p:spTree>
+    <p:extLst>
+      <p:ext uri="{BB962C8B-B14F-4D97-AF65-F5344CB8AC3E}">
+        <p14:creationId xmlns:p14="http://schemas.microsoft.com/office/powerpoint/2010/main" val="2081107019"/>
+      </p:ext>
+    </p:extLst>
+  </p:cSld>
+  <p:clrMapOvr>
+    <a:masterClrMapping/>
+  </p:clrMapOvr>
+</p:sld>
+</file>
+
+<file path=ppt/slides/slide8.xml><?xml version="1.0" encoding="utf-8"?>
+<p:sld xmlns:a="http://schemas.openxmlformats.org/drawingml/2006/main" xmlns:r="http://schemas.openxmlformats.org/officeDocument/2006/relationships" xmlns:p="http://schemas.openxmlformats.org/presentationml/2006/main">
+  <p:cSld>
+    <p:spTree>
+      <p:nvGrpSpPr>
+        <p:cNvPr id="1" name=""/>
+        <p:cNvGrpSpPr/>
+        <p:nvPr/>
+      </p:nvGrpSpPr>
+      <p:grpSpPr>
+        <a:xfrm>
+          <a:off x="0" y="0"/>
+          <a:ext cx="0" cy="0"/>
+          <a:chOff x="0" y="0"/>
+          <a:chExt cx="0" cy="0"/>
+        </a:xfrm>
+      </p:grpSpPr>
+      <p:sp>
+        <p:nvSpPr>
+          <p:cNvPr id="2" name="Title 1">
+            <a:extLst>
+              <a:ext uri="{FF2B5EF4-FFF2-40B4-BE49-F238E27FC236}">
+                <a16:creationId xmlns:a16="http://schemas.microsoft.com/office/drawing/2014/main" id="{1A1577E8-C58B-D8E1-A3AD-F4FA7A6F76D2}"/>
+              </a:ext>
+            </a:extLst>
+          </p:cNvPr>
+          <p:cNvSpPr>
+            <a:spLocks noGrp="1"/>
+          </p:cNvSpPr>
+          <p:nvPr>
+            <p:ph type="title"/>
+          </p:nvPr>
+        </p:nvSpPr>
+        <p:spPr/>
+        <p:txBody>
+          <a:bodyPr/>
+          <a:lstStyle/>
+          <a:p>
+            <a:r>
+              <a:rPr lang="en-US" dirty="0"/>
+              <a:t>Zero Scattering Check</a:t>
+            </a:r>
+          </a:p>
+        </p:txBody>
+      </p:sp>
+      <p:sp>
+        <p:nvSpPr>
+          <p:cNvPr id="3" name="Text Placeholder 2">
+            <a:extLst>
+              <a:ext uri="{FF2B5EF4-FFF2-40B4-BE49-F238E27FC236}">
+                <a16:creationId xmlns:a16="http://schemas.microsoft.com/office/drawing/2014/main" id="{E751E261-3E13-2E5E-33EF-D6FD51D80BED}"/>
+              </a:ext>
+            </a:extLst>
+          </p:cNvPr>
+          <p:cNvSpPr>
+            <a:spLocks noGrp="1"/>
+          </p:cNvSpPr>
+          <p:nvPr>
+            <p:ph type="body" idx="1"/>
+          </p:nvPr>
+        </p:nvSpPr>
+        <p:spPr/>
+        <p:txBody>
+          <a:bodyPr/>
+          <a:lstStyle/>
+          <a:p>
+            <a:r>
+              <a:rPr lang="en-US" dirty="0"/>
+              <a:t>X-Y Slice of Monte Carlo Sim</a:t>
+            </a:r>
+          </a:p>
+        </p:txBody>
+      </p:sp>
+      <p:pic>
+        <p:nvPicPr>
+          <p:cNvPr id="8" name="Content Placeholder 7">
+            <a:extLst>
+              <a:ext uri="{FF2B5EF4-FFF2-40B4-BE49-F238E27FC236}">
+                <a16:creationId xmlns:a16="http://schemas.microsoft.com/office/drawing/2014/main" id="{EC8ECB81-F538-BEF0-3CDD-5EF1CB03CF55}"/>
+              </a:ext>
+            </a:extLst>
+          </p:cNvPr>
+          <p:cNvPicPr>
+            <a:picLocks noGrp="1" noChangeAspect="1"/>
+          </p:cNvPicPr>
+          <p:nvPr>
+            <p:ph sz="half" idx="2"/>
           </p:nvPr>
         </p:nvPicPr>
         <p:blipFill>
@@ -3886,8 +9056,175 @@
         </p:blipFill>
         <p:spPr>
           <a:xfrm>
-            <a:off x="838200" y="2058194"/>
-            <a:ext cx="5181600" cy="3886200"/>
+            <a:off x="1103313" y="2737049"/>
+            <a:ext cx="4395787" cy="3296840"/>
+          </a:xfrm>
+          <a:prstGeom prst="rect">
+            <a:avLst/>
+          </a:prstGeom>
+        </p:spPr>
+      </p:pic>
+      <p:sp>
+        <p:nvSpPr>
+          <p:cNvPr id="5" name="Text Placeholder 4">
+            <a:extLst>
+              <a:ext uri="{FF2B5EF4-FFF2-40B4-BE49-F238E27FC236}">
+                <a16:creationId xmlns:a16="http://schemas.microsoft.com/office/drawing/2014/main" id="{2D8E22DB-48CA-CC3E-4860-A85544A96475}"/>
+              </a:ext>
+            </a:extLst>
+          </p:cNvPr>
+          <p:cNvSpPr>
+            <a:spLocks noGrp="1"/>
+          </p:cNvSpPr>
+          <p:nvPr>
+            <p:ph type="body" sz="quarter" idx="3"/>
+          </p:nvPr>
+        </p:nvSpPr>
+        <p:spPr/>
+        <p:txBody>
+          <a:bodyPr/>
+          <a:lstStyle/>
+          <a:p>
+            <a:r>
+              <a:rPr lang="en-US" dirty="0"/>
+              <a:t>Fluence measured at angles</a:t>
+            </a:r>
+          </a:p>
+        </p:txBody>
+      </p:sp>
+      <p:pic>
+        <p:nvPicPr>
+          <p:cNvPr id="10" name="Content Placeholder 9">
+            <a:extLst>
+              <a:ext uri="{FF2B5EF4-FFF2-40B4-BE49-F238E27FC236}">
+                <a16:creationId xmlns:a16="http://schemas.microsoft.com/office/drawing/2014/main" id="{AFF93458-1A9C-97F1-32B3-696333D6E3FE}"/>
+              </a:ext>
+            </a:extLst>
+          </p:cNvPr>
+          <p:cNvPicPr>
+            <a:picLocks noGrp="1" noChangeAspect="1"/>
+          </p:cNvPicPr>
+          <p:nvPr>
+            <p:ph sz="quarter" idx="4"/>
+          </p:nvPr>
+        </p:nvPicPr>
+        <p:blipFill>
+          <a:blip r:embed="rId3">
+            <a:extLst>
+              <a:ext uri="{28A0092B-C50C-407E-A947-70E740481C1C}">
+                <a14:useLocalDpi xmlns:a14="http://schemas.microsoft.com/office/drawing/2010/main" val="0"/>
+              </a:ext>
+            </a:extLst>
+          </a:blip>
+          <a:stretch>
+            <a:fillRect/>
+          </a:stretch>
+        </p:blipFill>
+        <p:spPr>
+          <a:xfrm>
+            <a:off x="5654675" y="2737048"/>
+            <a:ext cx="4395788" cy="3296841"/>
+          </a:xfrm>
+          <a:prstGeom prst="rect">
+            <a:avLst/>
+          </a:prstGeom>
+        </p:spPr>
+      </p:pic>
+    </p:spTree>
+    <p:extLst>
+      <p:ext uri="{BB962C8B-B14F-4D97-AF65-F5344CB8AC3E}">
+        <p14:creationId xmlns:p14="http://schemas.microsoft.com/office/powerpoint/2010/main" val="4062619294"/>
+      </p:ext>
+    </p:extLst>
+  </p:cSld>
+  <p:clrMapOvr>
+    <a:masterClrMapping/>
+  </p:clrMapOvr>
+</p:sld>
+</file>
+
+<file path=ppt/slides/slide9.xml><?xml version="1.0" encoding="utf-8"?>
+<p:sld xmlns:a="http://schemas.openxmlformats.org/drawingml/2006/main" xmlns:r="http://schemas.openxmlformats.org/officeDocument/2006/relationships" xmlns:p="http://schemas.openxmlformats.org/presentationml/2006/main">
+  <p:cSld>
+    <p:spTree>
+      <p:nvGrpSpPr>
+        <p:cNvPr id="1" name=""/>
+        <p:cNvGrpSpPr/>
+        <p:nvPr/>
+      </p:nvGrpSpPr>
+      <p:grpSpPr>
+        <a:xfrm>
+          <a:off x="0" y="0"/>
+          <a:ext cx="0" cy="0"/>
+          <a:chOff x="0" y="0"/>
+          <a:chExt cx="0" cy="0"/>
+        </a:xfrm>
+      </p:grpSpPr>
+      <p:sp>
+        <p:nvSpPr>
+          <p:cNvPr id="2" name="Title 1">
+            <a:extLst>
+              <a:ext uri="{FF2B5EF4-FFF2-40B4-BE49-F238E27FC236}">
+                <a16:creationId xmlns:a16="http://schemas.microsoft.com/office/drawing/2014/main" id="{BFB7EC54-3F47-EEB3-F49C-6ADDCD5448FB}"/>
+              </a:ext>
+            </a:extLst>
+          </p:cNvPr>
+          <p:cNvSpPr>
+            <a:spLocks noGrp="1"/>
+          </p:cNvSpPr>
+          <p:nvPr>
+            <p:ph type="title"/>
+          </p:nvPr>
+        </p:nvSpPr>
+        <p:spPr>
+          <a:xfrm>
+            <a:off x="646111" y="452718"/>
+            <a:ext cx="9675342" cy="1400530"/>
+          </a:xfrm>
+        </p:spPr>
+        <p:txBody>
+          <a:bodyPr/>
+          <a:lstStyle/>
+          <a:p>
+            <a:r>
+              <a:rPr lang="en-US" dirty="0"/>
+              <a:t>Absorption/Beer-Lambert Crosscheck</a:t>
+            </a:r>
+          </a:p>
+        </p:txBody>
+      </p:sp>
+      <p:pic>
+        <p:nvPicPr>
+          <p:cNvPr id="6" name="Content Placeholder 5">
+            <a:extLst>
+              <a:ext uri="{FF2B5EF4-FFF2-40B4-BE49-F238E27FC236}">
+                <a16:creationId xmlns:a16="http://schemas.microsoft.com/office/drawing/2014/main" id="{C9BBE854-CF5E-5F60-728F-58D0ED728690}"/>
+              </a:ext>
+            </a:extLst>
+          </p:cNvPr>
+          <p:cNvPicPr>
+            <a:picLocks noGrp="1" noChangeAspect="1"/>
+          </p:cNvPicPr>
+          <p:nvPr>
+            <p:ph sz="half" idx="1"/>
+          </p:nvPr>
+        </p:nvPicPr>
+        <p:blipFill>
+          <a:blip r:embed="rId2">
+            <a:extLst>
+              <a:ext uri="{28A0092B-C50C-407E-A947-70E740481C1C}">
+                <a14:useLocalDpi xmlns:a14="http://schemas.microsoft.com/office/drawing/2010/main" val="0"/>
+              </a:ext>
+            </a:extLst>
+          </a:blip>
+          <a:stretch>
+            <a:fillRect/>
+          </a:stretch>
+        </p:blipFill>
+        <p:spPr>
+          <a:xfrm>
+            <a:off x="1103313" y="2510036"/>
+            <a:ext cx="4395787" cy="3296840"/>
           </a:xfrm>
           <a:prstGeom prst="rect">
             <a:avLst/>
@@ -4347,309 +9684,10 @@
 </p:sld>
 </file>
 
-<file path=ppt/slides/slide5.xml><?xml version="1.0" encoding="utf-8"?>
-<p:sld xmlns:a="http://schemas.openxmlformats.org/drawingml/2006/main" xmlns:r="http://schemas.openxmlformats.org/officeDocument/2006/relationships" xmlns:p="http://schemas.openxmlformats.org/presentationml/2006/main">
-  <p:cSld>
-    <p:spTree>
-      <p:nvGrpSpPr>
-        <p:cNvPr id="1" name=""/>
-        <p:cNvGrpSpPr/>
-        <p:nvPr/>
-      </p:nvGrpSpPr>
-      <p:grpSpPr>
-        <a:xfrm>
-          <a:off x="0" y="0"/>
-          <a:ext cx="0" cy="0"/>
-          <a:chOff x="0" y="0"/>
-          <a:chExt cx="0" cy="0"/>
-        </a:xfrm>
-      </p:grpSpPr>
-      <p:sp>
-        <p:nvSpPr>
-          <p:cNvPr id="2" name="Title 1">
-            <a:extLst>
-              <a:ext uri="{FF2B5EF4-FFF2-40B4-BE49-F238E27FC236}">
-                <a16:creationId xmlns:a16="http://schemas.microsoft.com/office/drawing/2014/main" id="{E2A8B833-A627-EF0D-80E8-9139A89545EF}"/>
-              </a:ext>
-            </a:extLst>
-          </p:cNvPr>
-          <p:cNvSpPr>
-            <a:spLocks noGrp="1"/>
-          </p:cNvSpPr>
-          <p:nvPr>
-            <p:ph type="title"/>
-          </p:nvPr>
-        </p:nvSpPr>
-        <p:spPr/>
-        <p:txBody>
-          <a:bodyPr/>
-          <a:lstStyle/>
-          <a:p>
-            <a:r>
-              <a:rPr lang="en-US" dirty="0"/>
-              <a:t>Validation</a:t>
-            </a:r>
-          </a:p>
-        </p:txBody>
-      </p:sp>
-      <p:sp>
-        <p:nvSpPr>
-          <p:cNvPr id="3" name="Picture Placeholder 2">
-            <a:extLst>
-              <a:ext uri="{FF2B5EF4-FFF2-40B4-BE49-F238E27FC236}">
-                <a16:creationId xmlns:a16="http://schemas.microsoft.com/office/drawing/2014/main" id="{02029C07-C905-3A77-FA6C-DA96735E126E}"/>
-              </a:ext>
-            </a:extLst>
-          </p:cNvPr>
-          <p:cNvSpPr>
-            <a:spLocks noGrp="1"/>
-          </p:cNvSpPr>
-          <p:nvPr>
-            <p:ph type="pic" idx="1"/>
-          </p:nvPr>
-        </p:nvSpPr>
-        <p:spPr/>
-        <p:txBody>
-          <a:bodyPr/>
-          <a:lstStyle/>
-          <a:p>
-            <a:endParaRPr lang="en-US"/>
-          </a:p>
-        </p:txBody>
-      </p:sp>
-      <p:sp>
-        <p:nvSpPr>
-          <p:cNvPr id="4" name="Text Placeholder 3">
-            <a:extLst>
-              <a:ext uri="{FF2B5EF4-FFF2-40B4-BE49-F238E27FC236}">
-                <a16:creationId xmlns:a16="http://schemas.microsoft.com/office/drawing/2014/main" id="{039F6216-FE26-A01B-8564-DFA27F4EA6F6}"/>
-              </a:ext>
-            </a:extLst>
-          </p:cNvPr>
-          <p:cNvSpPr>
-            <a:spLocks noGrp="1"/>
-          </p:cNvSpPr>
-          <p:nvPr>
-            <p:ph type="body" sz="half" idx="2"/>
-          </p:nvPr>
-        </p:nvSpPr>
-        <p:spPr/>
-        <p:txBody>
-          <a:bodyPr/>
-          <a:lstStyle/>
-          <a:p>
-            <a:r>
-              <a:rPr lang="en-US" dirty="0"/>
-              <a:t>For proper verification, I will use an analytic solver</a:t>
-            </a:r>
-          </a:p>
-        </p:txBody>
-      </p:sp>
-    </p:spTree>
-    <p:extLst>
-      <p:ext uri="{BB962C8B-B14F-4D97-AF65-F5344CB8AC3E}">
-        <p14:creationId xmlns:p14="http://schemas.microsoft.com/office/powerpoint/2010/main" val="2347936626"/>
-      </p:ext>
-    </p:extLst>
-  </p:cSld>
-  <p:clrMapOvr>
-    <a:masterClrMapping/>
-  </p:clrMapOvr>
-</p:sld>
-</file>
-
-<file path=ppt/slides/slide6.xml><?xml version="1.0" encoding="utf-8"?>
-<p:sld xmlns:a="http://schemas.openxmlformats.org/drawingml/2006/main" xmlns:r="http://schemas.openxmlformats.org/officeDocument/2006/relationships" xmlns:p="http://schemas.openxmlformats.org/presentationml/2006/main">
-  <p:cSld>
-    <p:spTree>
-      <p:nvGrpSpPr>
-        <p:cNvPr id="1" name=""/>
-        <p:cNvGrpSpPr/>
-        <p:nvPr/>
-      </p:nvGrpSpPr>
-      <p:grpSpPr>
-        <a:xfrm>
-          <a:off x="0" y="0"/>
-          <a:ext cx="0" cy="0"/>
-          <a:chOff x="0" y="0"/>
-          <a:chExt cx="0" cy="0"/>
-        </a:xfrm>
-      </p:grpSpPr>
-      <p:sp>
-        <p:nvSpPr>
-          <p:cNvPr id="2" name="Title 1">
-            <a:extLst>
-              <a:ext uri="{FF2B5EF4-FFF2-40B4-BE49-F238E27FC236}">
-                <a16:creationId xmlns:a16="http://schemas.microsoft.com/office/drawing/2014/main" id="{82892E64-2938-2E72-3704-0B2F214CA44C}"/>
-              </a:ext>
-            </a:extLst>
-          </p:cNvPr>
-          <p:cNvSpPr>
-            <a:spLocks noGrp="1"/>
-          </p:cNvSpPr>
-          <p:nvPr>
-            <p:ph type="title"/>
-          </p:nvPr>
-        </p:nvSpPr>
-        <p:spPr/>
-        <p:txBody>
-          <a:bodyPr/>
-          <a:lstStyle/>
-          <a:p>
-            <a:endParaRPr lang="en-US" dirty="0"/>
-          </a:p>
-        </p:txBody>
-      </p:sp>
-      <p:sp>
-        <p:nvSpPr>
-          <p:cNvPr id="3" name="Content Placeholder 2">
-            <a:extLst>
-              <a:ext uri="{FF2B5EF4-FFF2-40B4-BE49-F238E27FC236}">
-                <a16:creationId xmlns:a16="http://schemas.microsoft.com/office/drawing/2014/main" id="{807E48B6-D143-64CD-E99F-B83C8C90B860}"/>
-              </a:ext>
-            </a:extLst>
-          </p:cNvPr>
-          <p:cNvSpPr>
-            <a:spLocks noGrp="1"/>
-          </p:cNvSpPr>
-          <p:nvPr>
-            <p:ph idx="1"/>
-          </p:nvPr>
-        </p:nvSpPr>
-        <p:spPr/>
-        <p:txBody>
-          <a:bodyPr/>
-          <a:lstStyle/>
-          <a:p>
-            <a:endParaRPr lang="en-US"/>
-          </a:p>
-        </p:txBody>
-      </p:sp>
-    </p:spTree>
-    <p:extLst>
-      <p:ext uri="{BB962C8B-B14F-4D97-AF65-F5344CB8AC3E}">
-        <p14:creationId xmlns:p14="http://schemas.microsoft.com/office/powerpoint/2010/main" val="1310250"/>
-      </p:ext>
-    </p:extLst>
-  </p:cSld>
-  <p:clrMapOvr>
-    <a:masterClrMapping/>
-  </p:clrMapOvr>
-</p:sld>
-</file>
-
-<file path=ppt/slides/slide7.xml><?xml version="1.0" encoding="utf-8"?>
-<p:sld xmlns:a="http://schemas.openxmlformats.org/drawingml/2006/main" xmlns:r="http://schemas.openxmlformats.org/officeDocument/2006/relationships" xmlns:p="http://schemas.openxmlformats.org/presentationml/2006/main">
-  <p:cSld>
-    <p:spTree>
-      <p:nvGrpSpPr>
-        <p:cNvPr id="1" name=""/>
-        <p:cNvGrpSpPr/>
-        <p:nvPr/>
-      </p:nvGrpSpPr>
-      <p:grpSpPr>
-        <a:xfrm>
-          <a:off x="0" y="0"/>
-          <a:ext cx="0" cy="0"/>
-          <a:chOff x="0" y="0"/>
-          <a:chExt cx="0" cy="0"/>
-        </a:xfrm>
-      </p:grpSpPr>
-      <p:sp>
-        <p:nvSpPr>
-          <p:cNvPr id="2" name="Title 1">
-            <a:extLst>
-              <a:ext uri="{FF2B5EF4-FFF2-40B4-BE49-F238E27FC236}">
-                <a16:creationId xmlns:a16="http://schemas.microsoft.com/office/drawing/2014/main" id="{4DA35A90-343A-331E-F423-28D767CCB9E2}"/>
-              </a:ext>
-            </a:extLst>
-          </p:cNvPr>
-          <p:cNvSpPr>
-            <a:spLocks noGrp="1"/>
-          </p:cNvSpPr>
-          <p:nvPr>
-            <p:ph type="title"/>
-          </p:nvPr>
-        </p:nvSpPr>
-        <p:spPr/>
-        <p:txBody>
-          <a:bodyPr/>
-          <a:lstStyle/>
-          <a:p>
-            <a:r>
-              <a:rPr lang="en-US" dirty="0"/>
-              <a:t>Structure</a:t>
-            </a:r>
-          </a:p>
-        </p:txBody>
-      </p:sp>
-      <p:sp>
-        <p:nvSpPr>
-          <p:cNvPr id="3" name="Content Placeholder 2">
-            <a:extLst>
-              <a:ext uri="{FF2B5EF4-FFF2-40B4-BE49-F238E27FC236}">
-                <a16:creationId xmlns:a16="http://schemas.microsoft.com/office/drawing/2014/main" id="{F02F2B44-79DC-9756-4DB0-9D4EFB36E436}"/>
-              </a:ext>
-            </a:extLst>
-          </p:cNvPr>
-          <p:cNvSpPr>
-            <a:spLocks noGrp="1"/>
-          </p:cNvSpPr>
-          <p:nvPr>
-            <p:ph idx="1"/>
-          </p:nvPr>
-        </p:nvSpPr>
-        <p:spPr/>
-        <p:txBody>
-          <a:bodyPr/>
-          <a:lstStyle/>
-          <a:p>
-            <a:endParaRPr lang="en-US"/>
-          </a:p>
-        </p:txBody>
-      </p:sp>
-      <p:sp>
-        <p:nvSpPr>
-          <p:cNvPr id="4" name="Text Placeholder 3">
-            <a:extLst>
-              <a:ext uri="{FF2B5EF4-FFF2-40B4-BE49-F238E27FC236}">
-                <a16:creationId xmlns:a16="http://schemas.microsoft.com/office/drawing/2014/main" id="{BAA88F27-8EE8-783C-5CB9-DD3F9E6A24A7}"/>
-              </a:ext>
-            </a:extLst>
-          </p:cNvPr>
-          <p:cNvSpPr>
-            <a:spLocks noGrp="1"/>
-          </p:cNvSpPr>
-          <p:nvPr>
-            <p:ph type="body" sz="half" idx="2"/>
-          </p:nvPr>
-        </p:nvSpPr>
-        <p:spPr/>
-        <p:txBody>
-          <a:bodyPr/>
-          <a:lstStyle/>
-          <a:p>
-            <a:endParaRPr lang="en-US" dirty="0"/>
-          </a:p>
-        </p:txBody>
-      </p:sp>
-    </p:spTree>
-    <p:extLst>
-      <p:ext uri="{BB962C8B-B14F-4D97-AF65-F5344CB8AC3E}">
-        <p14:creationId xmlns:p14="http://schemas.microsoft.com/office/powerpoint/2010/main" val="829106148"/>
-      </p:ext>
-    </p:extLst>
-  </p:cSld>
-  <p:clrMapOvr>
-    <a:masterClrMapping/>
-  </p:clrMapOvr>
-</p:sld>
-</file>
-
 <file path=ppt/theme/theme1.xml><?xml version="1.0" encoding="utf-8"?>
-<a:theme xmlns:a="http://schemas.openxmlformats.org/drawingml/2006/main" name="Office Theme">
+<a:theme xmlns:a="http://schemas.openxmlformats.org/drawingml/2006/main" name="Ion">
   <a:themeElements>
-    <a:clrScheme name="Office">
+    <a:clrScheme name="Ion">
       <a:dk1>
         <a:sysClr val="windowText" lastClr="000000"/>
       </a:dk1>
@@ -4657,44 +9695,44 @@
         <a:sysClr val="window" lastClr="FFFFFF"/>
       </a:lt1>
       <a:dk2>
-        <a:srgbClr val="0E2841"/>
+        <a:srgbClr val="1E5155"/>
       </a:dk2>
       <a:lt2>
-        <a:srgbClr val="E8E8E8"/>
+        <a:srgbClr val="EBEBEB"/>
       </a:lt2>
       <a:accent1>
-        <a:srgbClr val="156082"/>
+        <a:srgbClr val="B01513"/>
       </a:accent1>
       <a:accent2>
-        <a:srgbClr val="E97132"/>
+        <a:srgbClr val="EA6312"/>
       </a:accent2>
       <a:accent3>
-        <a:srgbClr val="196B24"/>
+        <a:srgbClr val="E6B729"/>
       </a:accent3>
       <a:accent4>
-        <a:srgbClr val="0F9ED5"/>
+        <a:srgbClr val="6AAC90"/>
       </a:accent4>
       <a:accent5>
-        <a:srgbClr val="A02B93"/>
+        <a:srgbClr val="54849A"/>
       </a:accent5>
       <a:accent6>
-        <a:srgbClr val="4EA72E"/>
+        <a:srgbClr val="9E5E9B"/>
       </a:accent6>
       <a:hlink>
-        <a:srgbClr val="467886"/>
+        <a:srgbClr val="58C1BA"/>
       </a:hlink>
       <a:folHlink>
-        <a:srgbClr val="96607D"/>
+        <a:srgbClr val="9DFFCB"/>
       </a:folHlink>
     </a:clrScheme>
-    <a:fontScheme name="Office">
+    <a:fontScheme name="Ion">
       <a:majorFont>
-        <a:latin typeface="Aptos Display" panose="02110004020202020204"/>
+        <a:latin typeface="Century Gothic" panose="020B0502020202020204"/>
         <a:ea typeface=""/>
         <a:cs typeface=""/>
-        <a:font script="Jpan" typeface="游ゴシック Light"/>
+        <a:font script="Jpan" typeface="メイリオ"/>
         <a:font script="Hang" typeface="맑은 고딕"/>
-        <a:font script="Hans" typeface="等线 Light"/>
+        <a:font script="Hans" typeface="宋体"/>
         <a:font script="Hant" typeface="新細明體"/>
         <a:font script="Arab" typeface="Times New Roman"/>
         <a:font script="Hebr" typeface="Times New Roman"/>
@@ -4722,31 +9760,14 @@
         <a:font script="Viet" typeface="Times New Roman"/>
         <a:font script="Uigh" typeface="Microsoft Uighur"/>
         <a:font script="Geor" typeface="Sylfaen"/>
-        <a:font script="Armn" typeface="Arial"/>
-        <a:font script="Bugi" typeface="Leelawadee UI"/>
-        <a:font script="Bopo" typeface="Microsoft JhengHei"/>
-        <a:font script="Java" typeface="Javanese Text"/>
-        <a:font script="Lisu" typeface="Segoe UI"/>
-        <a:font script="Mymr" typeface="Myanmar Text"/>
-        <a:font script="Nkoo" typeface="Ebrima"/>
-        <a:font script="Olck" typeface="Nirmala UI"/>
-        <a:font script="Osma" typeface="Ebrima"/>
-        <a:font script="Phag" typeface="Phagspa"/>
-        <a:font script="Syrn" typeface="Estrangelo Edessa"/>
-        <a:font script="Syrj" typeface="Estrangelo Edessa"/>
-        <a:font script="Syre" typeface="Estrangelo Edessa"/>
-        <a:font script="Sora" typeface="Nirmala UI"/>
-        <a:font script="Tale" typeface="Microsoft Tai Le"/>
-        <a:font script="Talu" typeface="Microsoft New Tai Lue"/>
-        <a:font script="Tfng" typeface="Ebrima"/>
       </a:majorFont>
       <a:minorFont>
-        <a:latin typeface="Aptos" panose="02110004020202020204"/>
+        <a:latin typeface="Century Gothic" panose="020B0502020202020204"/>
         <a:ea typeface=""/>
         <a:cs typeface=""/>
-        <a:font script="Jpan" typeface="游ゴシック"/>
+        <a:font script="Jpan" typeface="メイリオ"/>
         <a:font script="Hang" typeface="맑은 고딕"/>
-        <a:font script="Hans" typeface="等线"/>
+        <a:font script="Hans" typeface="宋体"/>
         <a:font script="Hant" typeface="新細明體"/>
         <a:font script="Arab" typeface="Arial"/>
         <a:font script="Hebr" typeface="Arial"/>
@@ -4774,26 +9795,9 @@
         <a:font script="Viet" typeface="Arial"/>
         <a:font script="Uigh" typeface="Microsoft Uighur"/>
         <a:font script="Geor" typeface="Sylfaen"/>
-        <a:font script="Armn" typeface="Arial"/>
-        <a:font script="Bugi" typeface="Leelawadee UI"/>
-        <a:font script="Bopo" typeface="Microsoft JhengHei"/>
-        <a:font script="Java" typeface="Javanese Text"/>
-        <a:font script="Lisu" typeface="Segoe UI"/>
-        <a:font script="Mymr" typeface="Myanmar Text"/>
-        <a:font script="Nkoo" typeface="Ebrima"/>
-        <a:font script="Olck" typeface="Nirmala UI"/>
-        <a:font script="Osma" typeface="Ebrima"/>
-        <a:font script="Phag" typeface="Phagspa"/>
-        <a:font script="Syrn" typeface="Estrangelo Edessa"/>
-        <a:font script="Syrj" typeface="Estrangelo Edessa"/>
-        <a:font script="Syre" typeface="Estrangelo Edessa"/>
-        <a:font script="Sora" typeface="Nirmala UI"/>
-        <a:font script="Tale" typeface="Microsoft Tai Le"/>
-        <a:font script="Talu" typeface="Microsoft New Tai Lue"/>
-        <a:font script="Tfng" typeface="Ebrima"/>
       </a:minorFont>
     </a:fontScheme>
-    <a:fmtScheme name="Office">
+    <a:fmtScheme name="Ion">
       <a:fillStyleLst>
         <a:solidFill>
           <a:schemeClr val="phClr"/>
@@ -4802,23 +9806,15 @@
           <a:gsLst>
             <a:gs pos="0">
               <a:schemeClr val="phClr">
-                <a:lumMod val="110000"/>
-                <a:satMod val="105000"/>
-                <a:tint val="67000"/>
-              </a:schemeClr>
-            </a:gs>
-            <a:gs pos="50000">
-              <a:schemeClr val="phClr">
-                <a:lumMod val="105000"/>
-                <a:satMod val="103000"/>
-                <a:tint val="73000"/>
+                <a:tint val="64000"/>
+                <a:lumMod val="118000"/>
               </a:schemeClr>
             </a:gs>
             <a:gs pos="100000">
               <a:schemeClr val="phClr">
-                <a:lumMod val="105000"/>
-                <a:satMod val="109000"/>
-                <a:tint val="81000"/>
+                <a:tint val="92000"/>
+                <a:alpha val="100000"/>
+                <a:lumMod val="110000"/>
               </a:schemeClr>
             </a:gs>
           </a:gsLst>
@@ -4828,23 +9824,14 @@
           <a:gsLst>
             <a:gs pos="0">
               <a:schemeClr val="phClr">
-                <a:satMod val="103000"/>
-                <a:lumMod val="102000"/>
-                <a:tint val="94000"/>
-              </a:schemeClr>
-            </a:gs>
-            <a:gs pos="50000">
-              <a:schemeClr val="phClr">
-                <a:satMod val="110000"/>
-                <a:lumMod val="100000"/>
-                <a:shade val="100000"/>
+                <a:tint val="98000"/>
+                <a:lumMod val="114000"/>
               </a:schemeClr>
             </a:gs>
             <a:gs pos="100000">
               <a:schemeClr val="phClr">
-                <a:lumMod val="99000"/>
-                <a:satMod val="120000"/>
-                <a:shade val="78000"/>
+                <a:shade val="90000"/>
+                <a:lumMod val="84000"/>
               </a:schemeClr>
             </a:gs>
           </a:gsLst>
@@ -4852,26 +9839,23 @@
         </a:gradFill>
       </a:fillStyleLst>
       <a:lnStyleLst>
-        <a:ln w="12700" cap="flat" cmpd="sng" algn="ctr">
+        <a:ln w="9525" cap="rnd" cmpd="sng" algn="ctr">
           <a:solidFill>
             <a:schemeClr val="phClr"/>
           </a:solidFill>
           <a:prstDash val="solid"/>
-          <a:miter lim="800000"/>
         </a:ln>
-        <a:ln w="19050" cap="flat" cmpd="sng" algn="ctr">
+        <a:ln w="19050" cap="rnd" cmpd="sng" algn="ctr">
           <a:solidFill>
             <a:schemeClr val="phClr"/>
           </a:solidFill>
           <a:prstDash val="solid"/>
-          <a:miter lim="800000"/>
         </a:ln>
-        <a:ln w="25400" cap="flat" cmpd="sng" algn="ctr">
+        <a:ln w="28575" cap="rnd" cmpd="sng" algn="ctr">
           <a:solidFill>
             <a:schemeClr val="phClr"/>
           </a:solidFill>
           <a:prstDash val="solid"/>
-          <a:miter lim="800000"/>
         </a:ln>
       </a:lnStyleLst>
       <a:effectStyleLst>
@@ -4879,83 +9863,88 @@
           <a:effectLst/>
         </a:effectStyle>
         <a:effectStyle>
-          <a:effectLst/>
+          <a:effectLst>
+            <a:outerShdw blurRad="38100" dist="25400" dir="5400000" rotWithShape="0">
+              <a:srgbClr val="000000">
+                <a:alpha val="45000"/>
+              </a:srgbClr>
+            </a:outerShdw>
+          </a:effectLst>
         </a:effectStyle>
         <a:effectStyle>
           <a:effectLst>
-            <a:outerShdw blurRad="57150" dist="19050" dir="5400000" algn="ctr" rotWithShape="0">
+            <a:outerShdw blurRad="63500" dist="38100" dir="5400000" rotWithShape="0">
               <a:srgbClr val="000000">
-                <a:alpha val="63000"/>
+                <a:alpha val="60000"/>
               </a:srgbClr>
             </a:outerShdw>
           </a:effectLst>
+          <a:scene3d>
+            <a:camera prst="orthographicFront">
+              <a:rot lat="0" lon="0" rev="0"/>
+            </a:camera>
+            <a:lightRig rig="threePt" dir="tl"/>
+          </a:scene3d>
+          <a:sp3d prstMaterial="plastic">
+            <a:bevelT w="0" h="0"/>
+          </a:sp3d>
         </a:effectStyle>
       </a:effectStyleLst>
       <a:bgFillStyleLst>
         <a:solidFill>
           <a:schemeClr val="phClr"/>
         </a:solidFill>
-        <a:solidFill>
-          <a:schemeClr val="phClr">
-            <a:tint val="95000"/>
-            <a:satMod val="170000"/>
-          </a:schemeClr>
-        </a:solidFill>
         <a:gradFill rotWithShape="1">
           <a:gsLst>
             <a:gs pos="0">
               <a:schemeClr val="phClr">
-                <a:tint val="93000"/>
-                <a:satMod val="150000"/>
-                <a:shade val="98000"/>
-                <a:lumMod val="102000"/>
-              </a:schemeClr>
-            </a:gs>
-            <a:gs pos="50000">
-              <a:schemeClr val="phClr">
-                <a:tint val="98000"/>
+                <a:tint val="97000"/>
+                <a:hueMod val="88000"/>
                 <a:satMod val="130000"/>
-                <a:shade val="90000"/>
-                <a:lumMod val="103000"/>
+                <a:lumMod val="124000"/>
               </a:schemeClr>
             </a:gs>
             <a:gs pos="100000">
               <a:schemeClr val="phClr">
-                <a:shade val="63000"/>
-                <a:satMod val="120000"/>
+                <a:tint val="96000"/>
+                <a:shade val="88000"/>
+                <a:hueMod val="108000"/>
+                <a:satMod val="164000"/>
+                <a:lumMod val="76000"/>
               </a:schemeClr>
             </a:gs>
           </a:gsLst>
-          <a:lin ang="5400000" scaled="0"/>
+          <a:path path="circle">
+            <a:fillToRect l="45000" t="65000" r="125000" b="100000"/>
+          </a:path>
         </a:gradFill>
+        <a:blipFill rotWithShape="1">
+          <a:blip xmlns:r="http://schemas.openxmlformats.org/officeDocument/2006/relationships" r:embed="rId1">
+            <a:duotone>
+              <a:schemeClr val="phClr">
+                <a:shade val="69000"/>
+                <a:hueMod val="108000"/>
+                <a:satMod val="164000"/>
+                <a:lumMod val="74000"/>
+              </a:schemeClr>
+              <a:schemeClr val="phClr">
+                <a:tint val="96000"/>
+                <a:hueMod val="88000"/>
+                <a:satMod val="140000"/>
+                <a:lumMod val="132000"/>
+              </a:schemeClr>
+            </a:duotone>
+          </a:blip>
+          <a:stretch/>
+        </a:blipFill>
       </a:bgFillStyleLst>
     </a:fmtScheme>
   </a:themeElements>
-  <a:objectDefaults>
-    <a:lnDef>
-      <a:spPr/>
-      <a:bodyPr/>
-      <a:lstStyle/>
-      <a:style>
-        <a:lnRef idx="2">
-          <a:schemeClr val="accent1"/>
-        </a:lnRef>
-        <a:fillRef idx="0">
-          <a:schemeClr val="accent1"/>
-        </a:fillRef>
-        <a:effectRef idx="1">
-          <a:schemeClr val="accent1"/>
-        </a:effectRef>
-        <a:fontRef idx="minor">
-          <a:schemeClr val="tx1"/>
-        </a:fontRef>
-      </a:style>
-    </a:lnDef>
-  </a:objectDefaults>
+  <a:objectDefaults/>
   <a:extraClrSchemeLst/>
   <a:extLst>
     <a:ext uri="{05A4C25C-085E-4340-85A3-A5531E510DB2}">
-      <thm15:themeFamily xmlns:thm15="http://schemas.microsoft.com/office/thememl/2012/main" name="Office Theme" id="{2E142A2C-CD16-42D6-873A-C26D2A0506FA}" vid="{1BDDFF52-6CD6-40A5-AB3C-68EB2F1E4D0A}"/>
+      <thm15:themeFamily xmlns:thm15="http://schemas.microsoft.com/office/thememl/2012/main" name="Ion" id="{B8441ADB-2E43-4AF7-B97A-BD870242C6A8}" vid="{292E63A9-BB86-4E3D-B92A-7223C6510D2E}"/>
     </a:ext>
   </a:extLst>
 </a:theme>

--- a/MonteCarlo/MonteCarloProj/Presentation for West River.pptx
+++ b/MonteCarlo/MonteCarloProj/Presentation for West River.pptx
@@ -5348,6 +5348,13 @@
             <a:schemeClr val="lt1"/>
           </a:fontRef>
         </p:style>
+        <p:txBody>
+          <a:bodyPr/>
+          <a:lstStyle/>
+          <a:p>
+            <a:endParaRPr lang="en-US"/>
+          </a:p>
+        </p:txBody>
       </p:sp>
       <p:pic>
         <p:nvPicPr>
@@ -5442,6 +5449,13 @@
             <a:schemeClr val="lt1"/>
           </a:fontRef>
         </p:style>
+        <p:txBody>
+          <a:bodyPr/>
+          <a:lstStyle/>
+          <a:p>
+            <a:endParaRPr lang="en-US"/>
+          </a:p>
+        </p:txBody>
       </p:sp>
       <p:sp>
         <p:nvSpPr>
@@ -8678,7 +8692,12 @@
             <p:ph idx="1"/>
           </p:nvPr>
         </p:nvSpPr>
-        <p:spPr/>
+        <p:spPr>
+          <a:xfrm>
+            <a:off x="1103311" y="2052918"/>
+            <a:ext cx="9630950" cy="4195481"/>
+          </a:xfrm>
+        </p:spPr>
         <p:txBody>
           <a:bodyPr/>
           <a:lstStyle/>
@@ -8691,14 +8710,19 @@
           <a:p>
             <a:r>
               <a:rPr lang="en-US" dirty="0"/>
-              <a:t>Back Scatter Fraction 0.02 (May be tuned in via Petzold)</a:t>
+              <a:t>Back Scatter Fraction 0.024 (May be tuned in via Petzold)(n=1.1,u=3.4)</a:t>
             </a:r>
           </a:p>
           <a:p>
             <a:r>
               <a:rPr lang="en-US" dirty="0"/>
-              <a:t>Mua:0.002</a:t>
-            </a:r>
+              <a:t>Mua</a:t>
+            </a:r>
+            <a:r>
+              <a:rPr lang="en-US"/>
+              <a:t>:0.003</a:t>
+            </a:r>
+            <a:endParaRPr lang="en-US" dirty="0"/>
           </a:p>
           <a:p>
             <a:r>

--- a/MonteCarlo/MonteCarloProj/Presentation for West River.pptx
+++ b/MonteCarlo/MonteCarloProj/Presentation for West River.pptx
@@ -10,13 +10,17 @@
     <p:sldId id="264" r:id="rId4"/>
     <p:sldId id="265" r:id="rId5"/>
     <p:sldId id="266" r:id="rId6"/>
-    <p:sldId id="267" r:id="rId7"/>
-    <p:sldId id="258" r:id="rId8"/>
-    <p:sldId id="260" r:id="rId9"/>
-    <p:sldId id="261" r:id="rId10"/>
-    <p:sldId id="262" r:id="rId11"/>
-    <p:sldId id="259" r:id="rId12"/>
-    <p:sldId id="257" r:id="rId13"/>
+    <p:sldId id="268" r:id="rId7"/>
+    <p:sldId id="269" r:id="rId8"/>
+    <p:sldId id="271" r:id="rId9"/>
+    <p:sldId id="270" r:id="rId10"/>
+    <p:sldId id="267" r:id="rId11"/>
+    <p:sldId id="258" r:id="rId12"/>
+    <p:sldId id="260" r:id="rId13"/>
+    <p:sldId id="261" r:id="rId14"/>
+    <p:sldId id="262" r:id="rId15"/>
+    <p:sldId id="259" r:id="rId16"/>
+    <p:sldId id="257" r:id="rId17"/>
   </p:sldIdLst>
   <p:sldSz cx="12192000" cy="6858000"/>
   <p:notesSz cx="6858000" cy="9144000"/>
@@ -6204,7 +6208,7 @@
           <p:cNvPr id="2" name="Title 1">
             <a:extLst>
               <a:ext uri="{FF2B5EF4-FFF2-40B4-BE49-F238E27FC236}">
-                <a16:creationId xmlns:a16="http://schemas.microsoft.com/office/drawing/2014/main" id="{E2A8B833-A627-EF0D-80E8-9139A89545EF}"/>
+                <a16:creationId xmlns:a16="http://schemas.microsoft.com/office/drawing/2014/main" id="{4840326F-948C-8CD6-61AF-24B753B4D2CB}"/>
               </a:ext>
             </a:extLst>
           </p:cNvPr>
@@ -6222,17 +6226,17 @@
           <a:p>
             <a:r>
               <a:rPr lang="en-US" dirty="0"/>
-              <a:t>Validation</a:t>
-            </a:r>
-          </a:p>
-        </p:txBody>
-      </p:sp>
-      <p:sp>
-        <p:nvSpPr>
-          <p:cNvPr id="3" name="Picture Placeholder 2">
+              <a:t>Other Parameters</a:t>
+            </a:r>
+          </a:p>
+        </p:txBody>
+      </p:sp>
+      <p:sp>
+        <p:nvSpPr>
+          <p:cNvPr id="3" name="Content Placeholder 2">
             <a:extLst>
               <a:ext uri="{FF2B5EF4-FFF2-40B4-BE49-F238E27FC236}">
-                <a16:creationId xmlns:a16="http://schemas.microsoft.com/office/drawing/2014/main" id="{02029C07-C905-3A77-FA6C-DA96735E126E}"/>
+                <a16:creationId xmlns:a16="http://schemas.microsoft.com/office/drawing/2014/main" id="{D8FB0220-23E7-8FF9-3EFB-50936F2D4F6A}"/>
               </a:ext>
             </a:extLst>
           </p:cNvPr>
@@ -6240,50 +6244,54 @@
             <a:spLocks noGrp="1"/>
           </p:cNvSpPr>
           <p:nvPr>
-            <p:ph type="pic" idx="1"/>
-          </p:nvPr>
-        </p:nvSpPr>
-        <p:spPr/>
+            <p:ph idx="1"/>
+          </p:nvPr>
+        </p:nvSpPr>
+        <p:spPr>
+          <a:xfrm>
+            <a:off x="1103311" y="2052918"/>
+            <a:ext cx="9630950" cy="4195481"/>
+          </a:xfrm>
+        </p:spPr>
         <p:txBody>
           <a:bodyPr/>
           <a:lstStyle/>
           <a:p>
-            <a:endParaRPr lang="en-US"/>
-          </a:p>
-        </p:txBody>
-      </p:sp>
-      <p:sp>
-        <p:nvSpPr>
-          <p:cNvPr id="4" name="Text Placeholder 3">
-            <a:extLst>
-              <a:ext uri="{FF2B5EF4-FFF2-40B4-BE49-F238E27FC236}">
-                <a16:creationId xmlns:a16="http://schemas.microsoft.com/office/drawing/2014/main" id="{039F6216-FE26-A01B-8564-DFA27F4EA6F6}"/>
-              </a:ext>
-            </a:extLst>
-          </p:cNvPr>
-          <p:cNvSpPr>
-            <a:spLocks noGrp="1"/>
-          </p:cNvSpPr>
-          <p:nvPr>
-            <p:ph type="body" sz="half" idx="2"/>
-          </p:nvPr>
-        </p:nvSpPr>
-        <p:spPr/>
-        <p:txBody>
-          <a:bodyPr/>
-          <a:lstStyle/>
-          <a:p>
             <a:r>
               <a:rPr lang="en-US" dirty="0"/>
-              <a:t>For proper verification, I will use an analytic solver</a:t>
-            </a:r>
+              <a:t>Domain: 500mm by 500mm by 500mm ( Can be reduced to 100mm for some tests)</a:t>
+            </a:r>
+          </a:p>
+          <a:p>
+            <a:r>
+              <a:rPr lang="en-US" dirty="0"/>
+              <a:t>Back Scatter Fraction 0.024 (May be tuned in via Petzold)(n=1.1,u=3.4)</a:t>
+            </a:r>
+          </a:p>
+          <a:p>
+            <a:r>
+              <a:rPr lang="en-US" dirty="0"/>
+              <a:t>Mua:0.003</a:t>
+            </a:r>
+          </a:p>
+          <a:p>
+            <a:r>
+              <a:rPr lang="en-US" dirty="0"/>
+              <a:t>Mus: 0.015 to 0.05</a:t>
+            </a:r>
+          </a:p>
+          <a:p>
+            <a:endParaRPr lang="en-US" dirty="0"/>
+          </a:p>
+          <a:p>
+            <a:endParaRPr lang="en-US" dirty="0"/>
           </a:p>
         </p:txBody>
       </p:sp>
     </p:spTree>
     <p:extLst>
       <p:ext uri="{BB962C8B-B14F-4D97-AF65-F5344CB8AC3E}">
-        <p14:creationId xmlns:p14="http://schemas.microsoft.com/office/powerpoint/2010/main" val="2347936626"/>
+        <p14:creationId xmlns:p14="http://schemas.microsoft.com/office/powerpoint/2010/main" val="944707997"/>
       </p:ext>
     </p:extLst>
   </p:cSld>
@@ -6315,7 +6323,7 @@
           <p:cNvPr id="2" name="Title 1">
             <a:extLst>
               <a:ext uri="{FF2B5EF4-FFF2-40B4-BE49-F238E27FC236}">
-                <a16:creationId xmlns:a16="http://schemas.microsoft.com/office/drawing/2014/main" id="{82892E64-2938-2E72-3704-0B2F214CA44C}"/>
+                <a16:creationId xmlns:a16="http://schemas.microsoft.com/office/drawing/2014/main" id="{68CDE3B1-A1D1-CD63-EFDA-1AE7F26FA84E}"/>
               </a:ext>
             </a:extLst>
           </p:cNvPr>
@@ -6331,7 +6339,10 @@
           <a:bodyPr/>
           <a:lstStyle/>
           <a:p>
-            <a:endParaRPr lang="en-US" dirty="0"/>
+            <a:r>
+              <a:rPr lang="en-US" dirty="0"/>
+              <a:t>Sanity Checks</a:t>
+            </a:r>
           </a:p>
         </p:txBody>
       </p:sp>
@@ -6340,7 +6351,7 @@
           <p:cNvPr id="3" name="Content Placeholder 2">
             <a:extLst>
               <a:ext uri="{FF2B5EF4-FFF2-40B4-BE49-F238E27FC236}">
-                <a16:creationId xmlns:a16="http://schemas.microsoft.com/office/drawing/2014/main" id="{807E48B6-D143-64CD-E99F-B83C8C90B860}"/>
+                <a16:creationId xmlns:a16="http://schemas.microsoft.com/office/drawing/2014/main" id="{A967A8ED-E292-CF61-9F53-B9DCD8CEFC7E}"/>
               </a:ext>
             </a:extLst>
           </p:cNvPr>
@@ -6356,14 +6367,157 @@
           <a:bodyPr/>
           <a:lstStyle/>
           <a:p>
-            <a:endParaRPr lang="en-US"/>
+            <a:endParaRPr lang="en-US" dirty="0"/>
+          </a:p>
+        </p:txBody>
+      </p:sp>
+      <p:sp>
+        <p:nvSpPr>
+          <p:cNvPr id="4" name="Text Placeholder 3">
+            <a:extLst>
+              <a:ext uri="{FF2B5EF4-FFF2-40B4-BE49-F238E27FC236}">
+                <a16:creationId xmlns:a16="http://schemas.microsoft.com/office/drawing/2014/main" id="{1D46CF0A-A784-9712-C2C8-FC454923D163}"/>
+              </a:ext>
+            </a:extLst>
+          </p:cNvPr>
+          <p:cNvSpPr>
+            <a:spLocks noGrp="1"/>
+          </p:cNvSpPr>
+          <p:nvPr>
+            <p:ph type="body" sz="half" idx="2"/>
+          </p:nvPr>
+        </p:nvSpPr>
+        <p:spPr/>
+        <p:txBody>
+          <a:bodyPr>
+            <a:normAutofit fontScale="55000" lnSpcReduction="20000"/>
+          </a:bodyPr>
+          <a:lstStyle/>
+          <a:p>
+            <a:pPr marL="342900" indent="-342900">
+              <a:buAutoNum type="arabicPeriod"/>
+            </a:pPr>
+            <a:r>
+              <a:rPr lang="en-US" dirty="0"/>
+              <a:t>Under 0 scattering:</a:t>
+            </a:r>
+          </a:p>
+          <a:p>
+            <a:pPr marL="800100" lvl="1" indent="-342900">
+              <a:buAutoNum type="arabicPeriod"/>
+            </a:pPr>
+            <a:r>
+              <a:rPr lang="en-US" dirty="0"/>
+              <a:t>Peak at zero degrees</a:t>
+            </a:r>
+          </a:p>
+          <a:p>
+            <a:pPr marL="800100" lvl="1" indent="-342900">
+              <a:buAutoNum type="arabicPeriod"/>
+            </a:pPr>
+            <a:r>
+              <a:rPr lang="en-US" dirty="0"/>
+              <a:t>Absorption dependance must recover the beer lambert law</a:t>
+            </a:r>
+          </a:p>
+          <a:p>
+            <a:pPr marL="342900" indent="-342900">
+              <a:buAutoNum type="arabicPeriod"/>
+            </a:pPr>
+            <a:r>
+              <a:rPr lang="en-US" dirty="0"/>
+              <a:t>Under conditions where 1 scattering event per photon on average occurs:</a:t>
+            </a:r>
+          </a:p>
+          <a:p>
+            <a:pPr marL="800100" lvl="1" indent="-342900">
+              <a:buAutoNum type="arabicPeriod"/>
+            </a:pPr>
+            <a:r>
+              <a:rPr lang="en-US" dirty="0"/>
+              <a:t>We must recover the Fornier Forand distribution</a:t>
+            </a:r>
+          </a:p>
+          <a:p>
+            <a:pPr marL="800100" lvl="1" indent="-342900">
+              <a:buAutoNum type="arabicPeriod"/>
+            </a:pPr>
+            <a:r>
+              <a:rPr lang="en-US" dirty="0"/>
+              <a:t>HG and FF must be close</a:t>
+            </a:r>
+          </a:p>
+          <a:p>
+            <a:pPr marL="342900" indent="-342900">
+              <a:buAutoNum type="arabicPeriod"/>
+            </a:pPr>
+            <a:r>
+              <a:rPr lang="en-US" dirty="0"/>
+              <a:t>Under reasonable scattering:</a:t>
+            </a:r>
+          </a:p>
+          <a:p>
+            <a:pPr marL="800100" lvl="1" indent="-342900">
+              <a:buAutoNum type="arabicPeriod"/>
+            </a:pPr>
+            <a:r>
+              <a:rPr lang="en-US" dirty="0"/>
+              <a:t>Increasing photon number must reduce std of solutions</a:t>
+            </a:r>
+          </a:p>
+          <a:p>
+            <a:pPr marL="800100" lvl="1" indent="-342900">
+              <a:buAutoNum type="arabicPeriod"/>
+            </a:pPr>
+            <a:r>
+              <a:rPr lang="en-US" dirty="0"/>
+              <a:t>HG and FF must </a:t>
+            </a:r>
+            <a:r>
+              <a:rPr lang="en-US" dirty="0" err="1"/>
+              <a:t>divarge</a:t>
+            </a:r>
+            <a:endParaRPr lang="en-US" dirty="0"/>
+          </a:p>
+          <a:p>
+            <a:pPr marL="342900" indent="-342900">
+              <a:buAutoNum type="arabicPeriod"/>
+            </a:pPr>
+            <a:r>
+              <a:rPr lang="en-US" dirty="0"/>
+              <a:t> Under very large scattering:</a:t>
+            </a:r>
+          </a:p>
+          <a:p>
+            <a:pPr marL="800100" lvl="1" indent="-342900">
+              <a:buAutoNum type="arabicPeriod"/>
+            </a:pPr>
+            <a:r>
+              <a:rPr lang="en-US" dirty="0"/>
+              <a:t>Source must look isotropic at a distance with no forward bias</a:t>
+            </a:r>
+          </a:p>
+          <a:p>
+            <a:pPr marL="800100" lvl="1" indent="-342900">
+              <a:buAutoNum type="arabicPeriod"/>
+            </a:pPr>
+            <a:r>
+              <a:rPr lang="en-US" dirty="0"/>
+              <a:t>HG and FF must converge</a:t>
+            </a:r>
+          </a:p>
+          <a:p>
+            <a:pPr marL="342900" indent="-342900">
+              <a:buAutoNum type="arabicPeriod"/>
+            </a:pPr>
+            <a:endParaRPr lang="en-US" dirty="0"/>
           </a:p>
         </p:txBody>
       </p:sp>
     </p:spTree>
     <p:extLst>
       <p:ext uri="{BB962C8B-B14F-4D97-AF65-F5344CB8AC3E}">
-        <p14:creationId xmlns:p14="http://schemas.microsoft.com/office/powerpoint/2010/main" val="1310250"/>
+        <p14:creationId xmlns:p14="http://schemas.microsoft.com/office/powerpoint/2010/main" val="2081107019"/>
       </p:ext>
     </p:extLst>
   </p:cSld>
@@ -6395,2610 +6549,6 @@
           <p:cNvPr id="2" name="Title 1">
             <a:extLst>
               <a:ext uri="{FF2B5EF4-FFF2-40B4-BE49-F238E27FC236}">
-                <a16:creationId xmlns:a16="http://schemas.microsoft.com/office/drawing/2014/main" id="{4DA35A90-343A-331E-F423-28D767CCB9E2}"/>
-              </a:ext>
-            </a:extLst>
-          </p:cNvPr>
-          <p:cNvSpPr>
-            <a:spLocks noGrp="1"/>
-          </p:cNvSpPr>
-          <p:nvPr>
-            <p:ph type="title"/>
-          </p:nvPr>
-        </p:nvSpPr>
-        <p:spPr/>
-        <p:txBody>
-          <a:bodyPr/>
-          <a:lstStyle/>
-          <a:p>
-            <a:r>
-              <a:rPr lang="en-US" dirty="0"/>
-              <a:t>Structure</a:t>
-            </a:r>
-          </a:p>
-        </p:txBody>
-      </p:sp>
-      <p:sp>
-        <p:nvSpPr>
-          <p:cNvPr id="3" name="Content Placeholder 2">
-            <a:extLst>
-              <a:ext uri="{FF2B5EF4-FFF2-40B4-BE49-F238E27FC236}">
-                <a16:creationId xmlns:a16="http://schemas.microsoft.com/office/drawing/2014/main" id="{F02F2B44-79DC-9756-4DB0-9D4EFB36E436}"/>
-              </a:ext>
-            </a:extLst>
-          </p:cNvPr>
-          <p:cNvSpPr>
-            <a:spLocks noGrp="1"/>
-          </p:cNvSpPr>
-          <p:nvPr>
-            <p:ph idx="1"/>
-          </p:nvPr>
-        </p:nvSpPr>
-        <p:spPr/>
-        <p:txBody>
-          <a:bodyPr/>
-          <a:lstStyle/>
-          <a:p>
-            <a:endParaRPr lang="en-US"/>
-          </a:p>
-        </p:txBody>
-      </p:sp>
-      <p:sp>
-        <p:nvSpPr>
-          <p:cNvPr id="4" name="Text Placeholder 3">
-            <a:extLst>
-              <a:ext uri="{FF2B5EF4-FFF2-40B4-BE49-F238E27FC236}">
-                <a16:creationId xmlns:a16="http://schemas.microsoft.com/office/drawing/2014/main" id="{BAA88F27-8EE8-783C-5CB9-DD3F9E6A24A7}"/>
-              </a:ext>
-            </a:extLst>
-          </p:cNvPr>
-          <p:cNvSpPr>
-            <a:spLocks noGrp="1"/>
-          </p:cNvSpPr>
-          <p:nvPr>
-            <p:ph type="body" sz="half" idx="2"/>
-          </p:nvPr>
-        </p:nvSpPr>
-        <p:spPr/>
-        <p:txBody>
-          <a:bodyPr/>
-          <a:lstStyle/>
-          <a:p>
-            <a:endParaRPr lang="en-US" dirty="0"/>
-          </a:p>
-        </p:txBody>
-      </p:sp>
-    </p:spTree>
-    <p:extLst>
-      <p:ext uri="{BB962C8B-B14F-4D97-AF65-F5344CB8AC3E}">
-        <p14:creationId xmlns:p14="http://schemas.microsoft.com/office/powerpoint/2010/main" val="829106148"/>
-      </p:ext>
-    </p:extLst>
-  </p:cSld>
-  <p:clrMapOvr>
-    <a:masterClrMapping/>
-  </p:clrMapOvr>
-</p:sld>
-</file>
-
-<file path=ppt/slides/slide2.xml><?xml version="1.0" encoding="utf-8"?>
-<p:sld xmlns:a="http://schemas.openxmlformats.org/drawingml/2006/main" xmlns:r="http://schemas.openxmlformats.org/officeDocument/2006/relationships" xmlns:p="http://schemas.openxmlformats.org/presentationml/2006/main">
-  <p:cSld>
-    <p:spTree>
-      <p:nvGrpSpPr>
-        <p:cNvPr id="1" name=""/>
-        <p:cNvGrpSpPr/>
-        <p:nvPr/>
-      </p:nvGrpSpPr>
-      <p:grpSpPr>
-        <a:xfrm>
-          <a:off x="0" y="0"/>
-          <a:ext cx="0" cy="0"/>
-          <a:chOff x="0" y="0"/>
-          <a:chExt cx="0" cy="0"/>
-        </a:xfrm>
-      </p:grpSpPr>
-      <p:sp>
-        <p:nvSpPr>
-          <p:cNvPr id="2" name="Title 1">
-            <a:extLst>
-              <a:ext uri="{FF2B5EF4-FFF2-40B4-BE49-F238E27FC236}">
-                <a16:creationId xmlns:a16="http://schemas.microsoft.com/office/drawing/2014/main" id="{7F51885E-7E45-1838-C5CE-F10B02BE33A0}"/>
-              </a:ext>
-            </a:extLst>
-          </p:cNvPr>
-          <p:cNvSpPr>
-            <a:spLocks noGrp="1"/>
-          </p:cNvSpPr>
-          <p:nvPr>
-            <p:ph type="title"/>
-          </p:nvPr>
-        </p:nvSpPr>
-        <p:spPr/>
-        <p:txBody>
-          <a:bodyPr/>
-          <a:lstStyle/>
-          <a:p>
-            <a:r>
-              <a:rPr lang="en-US" dirty="0"/>
-              <a:t>The Experimental Setup</a:t>
-            </a:r>
-          </a:p>
-        </p:txBody>
-      </p:sp>
-      <p:pic>
-        <p:nvPicPr>
-          <p:cNvPr id="7" name="Content Placeholder 6">
-            <a:extLst>
-              <a:ext uri="{FF2B5EF4-FFF2-40B4-BE49-F238E27FC236}">
-                <a16:creationId xmlns:a16="http://schemas.microsoft.com/office/drawing/2014/main" id="{7979D269-78B7-1CB2-DED0-0A47B66C7350}"/>
-              </a:ext>
-            </a:extLst>
-          </p:cNvPr>
-          <p:cNvPicPr>
-            <a:picLocks noGrp="1" noChangeAspect="1"/>
-          </p:cNvPicPr>
-          <p:nvPr>
-            <p:ph idx="1"/>
-          </p:nvPr>
-        </p:nvPicPr>
-        <p:blipFill>
-          <a:blip r:embed="rId2"/>
-          <a:stretch>
-            <a:fillRect/>
-          </a:stretch>
-        </p:blipFill>
-        <p:spPr>
-          <a:xfrm>
-            <a:off x="767246" y="2736970"/>
-            <a:ext cx="4010054" cy="2990872"/>
-          </a:xfrm>
-          <a:prstGeom prst="rect">
-            <a:avLst/>
-          </a:prstGeom>
-        </p:spPr>
-      </p:pic>
-      <p:pic>
-        <p:nvPicPr>
-          <p:cNvPr id="9" name="Picture 8">
-            <a:extLst>
-              <a:ext uri="{FF2B5EF4-FFF2-40B4-BE49-F238E27FC236}">
-                <a16:creationId xmlns:a16="http://schemas.microsoft.com/office/drawing/2014/main" id="{9AB91F91-4097-493D-65AB-5A166AFFB796}"/>
-              </a:ext>
-            </a:extLst>
-          </p:cNvPr>
-          <p:cNvPicPr>
-            <a:picLocks noChangeAspect="1"/>
-          </p:cNvPicPr>
-          <p:nvPr/>
-        </p:nvPicPr>
-        <p:blipFill>
-          <a:blip r:embed="rId3"/>
-          <a:stretch>
-            <a:fillRect/>
-          </a:stretch>
-        </p:blipFill>
-        <p:spPr>
-          <a:xfrm>
-            <a:off x="6416568" y="2979859"/>
-            <a:ext cx="3562376" cy="2505093"/>
-          </a:xfrm>
-          <a:prstGeom prst="rect">
-            <a:avLst/>
-          </a:prstGeom>
-        </p:spPr>
-      </p:pic>
-      <p:sp>
-        <p:nvSpPr>
-          <p:cNvPr id="10" name="Oval 9">
-            <a:extLst>
-              <a:ext uri="{FF2B5EF4-FFF2-40B4-BE49-F238E27FC236}">
-                <a16:creationId xmlns:a16="http://schemas.microsoft.com/office/drawing/2014/main" id="{A1E60410-D2D2-80E1-8BB0-68BD9497A657}"/>
-              </a:ext>
-            </a:extLst>
-          </p:cNvPr>
-          <p:cNvSpPr/>
-          <p:nvPr/>
-        </p:nvSpPr>
-        <p:spPr>
-          <a:xfrm>
-            <a:off x="2406649" y="4013199"/>
-            <a:ext cx="212725" cy="244475"/>
-          </a:xfrm>
-          <a:prstGeom prst="ellipse">
-            <a:avLst/>
-          </a:prstGeom>
-          <a:noFill/>
-          <a:ln w="9525" cap="flat" cmpd="sng" algn="ctr">
-            <a:solidFill>
-              <a:schemeClr val="accent1"/>
-            </a:solidFill>
-            <a:prstDash val="solid"/>
-            <a:round/>
-            <a:headEnd type="none" w="med" len="med"/>
-            <a:tailEnd type="none" w="med" len="med"/>
-          </a:ln>
-        </p:spPr>
-        <p:style>
-          <a:lnRef idx="0">
-            <a:scrgbClr r="0" g="0" b="0"/>
-          </a:lnRef>
-          <a:fillRef idx="0">
-            <a:scrgbClr r="0" g="0" b="0"/>
-          </a:fillRef>
-          <a:effectRef idx="0">
-            <a:scrgbClr r="0" g="0" b="0"/>
-          </a:effectRef>
-          <a:fontRef idx="minor">
-            <a:schemeClr val="accent1"/>
-          </a:fontRef>
-        </p:style>
-        <p:txBody>
-          <a:bodyPr rtlCol="0" anchor="ctr"/>
-          <a:lstStyle/>
-          <a:p>
-            <a:pPr algn="ctr"/>
-            <a:endParaRPr lang="en-US"/>
-          </a:p>
-        </p:txBody>
-      </p:sp>
-      <p:sp>
-        <p:nvSpPr>
-          <p:cNvPr id="11" name="TextBox 10">
-            <a:extLst>
-              <a:ext uri="{FF2B5EF4-FFF2-40B4-BE49-F238E27FC236}">
-                <a16:creationId xmlns:a16="http://schemas.microsoft.com/office/drawing/2014/main" id="{CE91E650-593F-1E09-81AB-496D0BD94930}"/>
-              </a:ext>
-            </a:extLst>
-          </p:cNvPr>
-          <p:cNvSpPr txBox="1"/>
-          <p:nvPr/>
-        </p:nvSpPr>
-        <p:spPr>
-          <a:xfrm>
-            <a:off x="4013199" y="2295525"/>
-            <a:ext cx="1454151" cy="338554"/>
-          </a:xfrm>
-          <a:prstGeom prst="rect">
-            <a:avLst/>
-          </a:prstGeom>
-          <a:noFill/>
-        </p:spPr>
-        <p:txBody>
-          <a:bodyPr wrap="square" rtlCol="0">
-            <a:spAutoFit/>
-          </a:bodyPr>
-          <a:lstStyle/>
-          <a:p>
-            <a:r>
-              <a:rPr lang="en-US" sz="1600" dirty="0"/>
-              <a:t>The source</a:t>
-            </a:r>
-          </a:p>
-        </p:txBody>
-      </p:sp>
-      <p:cxnSp>
-        <p:nvCxnSpPr>
-          <p:cNvPr id="15" name="Connector: Curved 14">
-            <a:extLst>
-              <a:ext uri="{FF2B5EF4-FFF2-40B4-BE49-F238E27FC236}">
-                <a16:creationId xmlns:a16="http://schemas.microsoft.com/office/drawing/2014/main" id="{80FD5669-7FE1-BA61-9F4F-F229D21DB396}"/>
-              </a:ext>
-            </a:extLst>
-          </p:cNvPr>
-          <p:cNvCxnSpPr>
-            <a:cxnSpLocks/>
-            <a:stCxn id="10" idx="6"/>
-            <a:endCxn id="11" idx="1"/>
-          </p:cNvCxnSpPr>
-          <p:nvPr/>
-        </p:nvCxnSpPr>
-        <p:spPr>
-          <a:xfrm flipV="1">
-            <a:off x="2619374" y="2464802"/>
-            <a:ext cx="1393825" cy="1670635"/>
-          </a:xfrm>
-          <a:prstGeom prst="curvedConnector3">
-            <a:avLst/>
-          </a:prstGeom>
-          <a:ln>
-            <a:tailEnd type="triangle"/>
-          </a:ln>
-        </p:spPr>
-        <p:style>
-          <a:lnRef idx="1">
-            <a:schemeClr val="accent1"/>
-          </a:lnRef>
-          <a:fillRef idx="0">
-            <a:schemeClr val="accent1"/>
-          </a:fillRef>
-          <a:effectRef idx="0">
-            <a:schemeClr val="accent1"/>
-          </a:effectRef>
-          <a:fontRef idx="minor">
-            <a:schemeClr val="tx1"/>
-          </a:fontRef>
-        </p:style>
-      </p:cxnSp>
-      <p:sp>
-        <p:nvSpPr>
-          <p:cNvPr id="17" name="TextBox 16">
-            <a:extLst>
-              <a:ext uri="{FF2B5EF4-FFF2-40B4-BE49-F238E27FC236}">
-                <a16:creationId xmlns:a16="http://schemas.microsoft.com/office/drawing/2014/main" id="{344CB1B2-1D9D-7F03-DCF9-43633DE715E9}"/>
-              </a:ext>
-            </a:extLst>
-          </p:cNvPr>
-          <p:cNvSpPr txBox="1"/>
-          <p:nvPr/>
-        </p:nvSpPr>
-        <p:spPr>
-          <a:xfrm>
-            <a:off x="4743449" y="4197350"/>
-            <a:ext cx="1463568" cy="584775"/>
-          </a:xfrm>
-          <a:prstGeom prst="rect">
-            <a:avLst/>
-          </a:prstGeom>
-          <a:noFill/>
-        </p:spPr>
-        <p:txBody>
-          <a:bodyPr wrap="square" rtlCol="0">
-            <a:spAutoFit/>
-          </a:bodyPr>
-          <a:lstStyle/>
-          <a:p>
-            <a:r>
-              <a:rPr lang="en-US" sz="1600" dirty="0"/>
-              <a:t>Domain Boundary</a:t>
-            </a:r>
-          </a:p>
-        </p:txBody>
-      </p:sp>
-      <p:cxnSp>
-        <p:nvCxnSpPr>
-          <p:cNvPr id="19" name="Connector: Curved 18">
-            <a:extLst>
-              <a:ext uri="{FF2B5EF4-FFF2-40B4-BE49-F238E27FC236}">
-                <a16:creationId xmlns:a16="http://schemas.microsoft.com/office/drawing/2014/main" id="{B28DB5EB-C3BF-1505-4C8D-69869071366C}"/>
-              </a:ext>
-            </a:extLst>
-          </p:cNvPr>
-          <p:cNvCxnSpPr>
-            <a:cxnSpLocks/>
-            <a:endCxn id="17" idx="1"/>
-          </p:cNvCxnSpPr>
-          <p:nvPr/>
-        </p:nvCxnSpPr>
-        <p:spPr>
-          <a:xfrm>
-            <a:off x="4378325" y="4314825"/>
-            <a:ext cx="365124" cy="174913"/>
-          </a:xfrm>
-          <a:prstGeom prst="curvedConnector3">
-            <a:avLst/>
-          </a:prstGeom>
-          <a:ln>
-            <a:tailEnd type="triangle"/>
-          </a:ln>
-        </p:spPr>
-        <p:style>
-          <a:lnRef idx="1">
-            <a:schemeClr val="accent3"/>
-          </a:lnRef>
-          <a:fillRef idx="0">
-            <a:schemeClr val="accent3"/>
-          </a:fillRef>
-          <a:effectRef idx="0">
-            <a:schemeClr val="accent3"/>
-          </a:effectRef>
-          <a:fontRef idx="minor">
-            <a:schemeClr val="tx1"/>
-          </a:fontRef>
-        </p:style>
-      </p:cxnSp>
-      <p:sp>
-        <p:nvSpPr>
-          <p:cNvPr id="22" name="Oval 21">
-            <a:extLst>
-              <a:ext uri="{FF2B5EF4-FFF2-40B4-BE49-F238E27FC236}">
-                <a16:creationId xmlns:a16="http://schemas.microsoft.com/office/drawing/2014/main" id="{34597057-9281-2B75-01EC-8ACEAC1FCDEC}"/>
-              </a:ext>
-            </a:extLst>
-          </p:cNvPr>
-          <p:cNvSpPr/>
-          <p:nvPr/>
-        </p:nvSpPr>
-        <p:spPr>
-          <a:xfrm>
-            <a:off x="7294077" y="3484562"/>
-            <a:ext cx="1425575" cy="1425575"/>
-          </a:xfrm>
-          <a:prstGeom prst="ellipse">
-            <a:avLst/>
-          </a:prstGeom>
-          <a:noFill/>
-          <a:ln w="9525" cap="flat" cmpd="sng" algn="ctr">
-            <a:solidFill>
-              <a:schemeClr val="accent6"/>
-            </a:solidFill>
-            <a:prstDash val="solid"/>
-            <a:round/>
-            <a:headEnd type="none" w="med" len="med"/>
-            <a:tailEnd type="none" w="med" len="med"/>
-          </a:ln>
-        </p:spPr>
-        <p:style>
-          <a:lnRef idx="0">
-            <a:scrgbClr r="0" g="0" b="0"/>
-          </a:lnRef>
-          <a:fillRef idx="0">
-            <a:scrgbClr r="0" g="0" b="0"/>
-          </a:fillRef>
-          <a:effectRef idx="0">
-            <a:scrgbClr r="0" g="0" b="0"/>
-          </a:effectRef>
-          <a:fontRef idx="minor">
-            <a:schemeClr val="accent6"/>
-          </a:fontRef>
-        </p:style>
-        <p:txBody>
-          <a:bodyPr rtlCol="0" anchor="ctr"/>
-          <a:lstStyle/>
-          <a:p>
-            <a:pPr algn="ctr"/>
-            <a:endParaRPr lang="en-US"/>
-          </a:p>
-        </p:txBody>
-      </p:sp>
-      <p:sp>
-        <p:nvSpPr>
-          <p:cNvPr id="24" name="Oval 23">
-            <a:extLst>
-              <a:ext uri="{FF2B5EF4-FFF2-40B4-BE49-F238E27FC236}">
-                <a16:creationId xmlns:a16="http://schemas.microsoft.com/office/drawing/2014/main" id="{680CB751-AAB9-858F-647A-4FA0D7604A12}"/>
-              </a:ext>
-            </a:extLst>
-          </p:cNvPr>
-          <p:cNvSpPr/>
-          <p:nvPr/>
-        </p:nvSpPr>
-        <p:spPr>
-          <a:xfrm>
-            <a:off x="7322926" y="3513411"/>
-            <a:ext cx="1367875" cy="1367875"/>
-          </a:xfrm>
-          <a:prstGeom prst="ellipse">
-            <a:avLst/>
-          </a:prstGeom>
-          <a:noFill/>
-          <a:ln w="9525" cap="flat" cmpd="sng" algn="ctr">
-            <a:solidFill>
-              <a:schemeClr val="accent6"/>
-            </a:solidFill>
-            <a:prstDash val="solid"/>
-            <a:round/>
-            <a:headEnd type="none" w="med" len="med"/>
-            <a:tailEnd type="none" w="med" len="med"/>
-          </a:ln>
-        </p:spPr>
-        <p:style>
-          <a:lnRef idx="0">
-            <a:scrgbClr r="0" g="0" b="0"/>
-          </a:lnRef>
-          <a:fillRef idx="0">
-            <a:scrgbClr r="0" g="0" b="0"/>
-          </a:fillRef>
-          <a:effectRef idx="0">
-            <a:scrgbClr r="0" g="0" b="0"/>
-          </a:effectRef>
-          <a:fontRef idx="minor">
-            <a:schemeClr val="accent6"/>
-          </a:fontRef>
-        </p:style>
-        <p:txBody>
-          <a:bodyPr rtlCol="0" anchor="ctr"/>
-          <a:lstStyle/>
-          <a:p>
-            <a:pPr algn="ctr"/>
-            <a:endParaRPr lang="en-US" dirty="0"/>
-          </a:p>
-        </p:txBody>
-      </p:sp>
-      <p:sp>
-        <p:nvSpPr>
-          <p:cNvPr id="25" name="TextBox 24">
-            <a:extLst>
-              <a:ext uri="{FF2B5EF4-FFF2-40B4-BE49-F238E27FC236}">
-                <a16:creationId xmlns:a16="http://schemas.microsoft.com/office/drawing/2014/main" id="{028882FF-07FF-6165-7054-61A776DFEDB0}"/>
-              </a:ext>
-            </a:extLst>
-          </p:cNvPr>
-          <p:cNvSpPr txBox="1"/>
-          <p:nvPr/>
-        </p:nvSpPr>
-        <p:spPr>
-          <a:xfrm>
-            <a:off x="7896224" y="2531528"/>
-            <a:ext cx="2311402" cy="338554"/>
-          </a:xfrm>
-          <a:prstGeom prst="rect">
-            <a:avLst/>
-          </a:prstGeom>
-          <a:noFill/>
-        </p:spPr>
-        <p:txBody>
-          <a:bodyPr wrap="square" rtlCol="0">
-            <a:spAutoFit/>
-          </a:bodyPr>
-          <a:lstStyle/>
-          <a:p>
-            <a:r>
-              <a:rPr lang="en-US" sz="1600" dirty="0"/>
-              <a:t>Zone(1) of interest</a:t>
-            </a:r>
-          </a:p>
-        </p:txBody>
-      </p:sp>
-      <p:cxnSp>
-        <p:nvCxnSpPr>
-          <p:cNvPr id="27" name="Straight Connector 26">
-            <a:extLst>
-              <a:ext uri="{FF2B5EF4-FFF2-40B4-BE49-F238E27FC236}">
-                <a16:creationId xmlns:a16="http://schemas.microsoft.com/office/drawing/2014/main" id="{A62EA7DA-8570-1224-F1F7-B0127DC73EF8}"/>
-              </a:ext>
-            </a:extLst>
-          </p:cNvPr>
-          <p:cNvCxnSpPr/>
-          <p:nvPr/>
-        </p:nvCxnSpPr>
-        <p:spPr>
-          <a:xfrm flipV="1">
-            <a:off x="8197756" y="3984625"/>
-            <a:ext cx="1270095" cy="212723"/>
-          </a:xfrm>
-          <a:prstGeom prst="line">
-            <a:avLst/>
-          </a:prstGeom>
-        </p:spPr>
-        <p:style>
-          <a:lnRef idx="1">
-            <a:schemeClr val="accent1"/>
-          </a:lnRef>
-          <a:fillRef idx="0">
-            <a:schemeClr val="accent1"/>
-          </a:fillRef>
-          <a:effectRef idx="0">
-            <a:schemeClr val="accent1"/>
-          </a:effectRef>
-          <a:fontRef idx="minor">
-            <a:schemeClr val="tx1"/>
-          </a:fontRef>
-        </p:style>
-      </p:cxnSp>
-      <p:cxnSp>
-        <p:nvCxnSpPr>
-          <p:cNvPr id="28" name="Straight Connector 27">
-            <a:extLst>
-              <a:ext uri="{FF2B5EF4-FFF2-40B4-BE49-F238E27FC236}">
-                <a16:creationId xmlns:a16="http://schemas.microsoft.com/office/drawing/2014/main" id="{F5A34D47-6D1C-904F-88DE-F7CB0E4DF642}"/>
-              </a:ext>
-            </a:extLst>
-          </p:cNvPr>
-          <p:cNvCxnSpPr>
-            <a:cxnSpLocks/>
-          </p:cNvCxnSpPr>
-          <p:nvPr/>
-        </p:nvCxnSpPr>
-        <p:spPr>
-          <a:xfrm>
-            <a:off x="8197755" y="4220232"/>
-            <a:ext cx="1270095" cy="212723"/>
-          </a:xfrm>
-          <a:prstGeom prst="line">
-            <a:avLst/>
-          </a:prstGeom>
-        </p:spPr>
-        <p:style>
-          <a:lnRef idx="1">
-            <a:schemeClr val="accent1"/>
-          </a:lnRef>
-          <a:fillRef idx="0">
-            <a:schemeClr val="accent1"/>
-          </a:fillRef>
-          <a:effectRef idx="0">
-            <a:schemeClr val="accent1"/>
-          </a:effectRef>
-          <a:fontRef idx="minor">
-            <a:schemeClr val="tx1"/>
-          </a:fontRef>
-        </p:style>
-      </p:cxnSp>
-      <p:cxnSp>
-        <p:nvCxnSpPr>
-          <p:cNvPr id="30" name="Straight Connector 29">
-            <a:extLst>
-              <a:ext uri="{FF2B5EF4-FFF2-40B4-BE49-F238E27FC236}">
-                <a16:creationId xmlns:a16="http://schemas.microsoft.com/office/drawing/2014/main" id="{F8164D63-2122-6D15-236F-8CBCB67ABA74}"/>
-              </a:ext>
-            </a:extLst>
-          </p:cNvPr>
-          <p:cNvCxnSpPr/>
-          <p:nvPr/>
-        </p:nvCxnSpPr>
-        <p:spPr>
-          <a:xfrm>
-            <a:off x="9467850" y="3984625"/>
-            <a:ext cx="0" cy="448330"/>
-          </a:xfrm>
-          <a:prstGeom prst="line">
-            <a:avLst/>
-          </a:prstGeom>
-        </p:spPr>
-        <p:style>
-          <a:lnRef idx="1">
-            <a:schemeClr val="accent1"/>
-          </a:lnRef>
-          <a:fillRef idx="0">
-            <a:schemeClr val="accent1"/>
-          </a:fillRef>
-          <a:effectRef idx="0">
-            <a:schemeClr val="accent1"/>
-          </a:effectRef>
-          <a:fontRef idx="minor">
-            <a:schemeClr val="tx1"/>
-          </a:fontRef>
-        </p:style>
-      </p:cxnSp>
-      <p:sp>
-        <p:nvSpPr>
-          <p:cNvPr id="31" name="TextBox 30">
-            <a:extLst>
-              <a:ext uri="{FF2B5EF4-FFF2-40B4-BE49-F238E27FC236}">
-                <a16:creationId xmlns:a16="http://schemas.microsoft.com/office/drawing/2014/main" id="{36340BF6-8631-0EEE-55D3-9397A3FE36EE}"/>
-              </a:ext>
-            </a:extLst>
-          </p:cNvPr>
-          <p:cNvSpPr txBox="1"/>
-          <p:nvPr/>
-        </p:nvSpPr>
-        <p:spPr>
-          <a:xfrm>
-            <a:off x="10216048" y="4740860"/>
-            <a:ext cx="2130520" cy="338554"/>
-          </a:xfrm>
-          <a:prstGeom prst="rect">
-            <a:avLst/>
-          </a:prstGeom>
-          <a:noFill/>
-        </p:spPr>
-        <p:txBody>
-          <a:bodyPr wrap="square" rtlCol="0">
-            <a:spAutoFit/>
-          </a:bodyPr>
-          <a:lstStyle/>
-          <a:p>
-            <a:r>
-              <a:rPr lang="en-US" sz="1600" dirty="0"/>
-              <a:t>Zone(2) of interest</a:t>
-            </a:r>
-          </a:p>
-        </p:txBody>
-      </p:sp>
-      <p:cxnSp>
-        <p:nvCxnSpPr>
-          <p:cNvPr id="33" name="Connector: Curved 32">
-            <a:extLst>
-              <a:ext uri="{FF2B5EF4-FFF2-40B4-BE49-F238E27FC236}">
-                <a16:creationId xmlns:a16="http://schemas.microsoft.com/office/drawing/2014/main" id="{4987ABB5-9CA5-8241-A4DD-D8F94585A0BA}"/>
-              </a:ext>
-            </a:extLst>
-          </p:cNvPr>
-          <p:cNvCxnSpPr>
-            <a:cxnSpLocks/>
-            <a:endCxn id="25" idx="1"/>
-          </p:cNvCxnSpPr>
-          <p:nvPr/>
-        </p:nvCxnSpPr>
-        <p:spPr>
-          <a:xfrm rot="5400000" flipH="1" flipV="1">
-            <a:off x="7193989" y="3012516"/>
-            <a:ext cx="1013946" cy="390524"/>
-          </a:xfrm>
-          <a:prstGeom prst="curvedConnector2">
-            <a:avLst/>
-          </a:prstGeom>
-          <a:ln>
-            <a:tailEnd type="triangle"/>
-          </a:ln>
-        </p:spPr>
-        <p:style>
-          <a:lnRef idx="1">
-            <a:schemeClr val="accent6"/>
-          </a:lnRef>
-          <a:fillRef idx="0">
-            <a:schemeClr val="accent6"/>
-          </a:fillRef>
-          <a:effectRef idx="0">
-            <a:schemeClr val="accent6"/>
-          </a:effectRef>
-          <a:fontRef idx="minor">
-            <a:schemeClr val="tx1"/>
-          </a:fontRef>
-        </p:style>
-      </p:cxnSp>
-      <p:cxnSp>
-        <p:nvCxnSpPr>
-          <p:cNvPr id="36" name="Connector: Curved 35">
-            <a:extLst>
-              <a:ext uri="{FF2B5EF4-FFF2-40B4-BE49-F238E27FC236}">
-                <a16:creationId xmlns:a16="http://schemas.microsoft.com/office/drawing/2014/main" id="{C105E3A2-5B12-362D-2BBD-41ADEDE4416A}"/>
-              </a:ext>
-            </a:extLst>
-          </p:cNvPr>
-          <p:cNvCxnSpPr>
-            <a:cxnSpLocks/>
-            <a:endCxn id="31" idx="0"/>
-          </p:cNvCxnSpPr>
-          <p:nvPr/>
-        </p:nvCxnSpPr>
-        <p:spPr>
-          <a:xfrm>
-            <a:off x="9239250" y="4283075"/>
-            <a:ext cx="2042058" cy="457785"/>
-          </a:xfrm>
-          <a:prstGeom prst="curvedConnector2">
-            <a:avLst/>
-          </a:prstGeom>
-          <a:ln>
-            <a:tailEnd type="triangle"/>
-          </a:ln>
-        </p:spPr>
-        <p:style>
-          <a:lnRef idx="1">
-            <a:schemeClr val="accent1"/>
-          </a:lnRef>
-          <a:fillRef idx="0">
-            <a:schemeClr val="accent1"/>
-          </a:fillRef>
-          <a:effectRef idx="0">
-            <a:schemeClr val="accent1"/>
-          </a:effectRef>
-          <a:fontRef idx="minor">
-            <a:schemeClr val="tx1"/>
-          </a:fontRef>
-        </p:style>
-      </p:cxnSp>
-      <p:sp>
-        <p:nvSpPr>
-          <p:cNvPr id="39" name="TextBox 38">
-            <a:extLst>
-              <a:ext uri="{FF2B5EF4-FFF2-40B4-BE49-F238E27FC236}">
-                <a16:creationId xmlns:a16="http://schemas.microsoft.com/office/drawing/2014/main" id="{7FA885E1-9B3B-36F2-C04E-BF29C9BB9DF5}"/>
-              </a:ext>
-            </a:extLst>
-          </p:cNvPr>
-          <p:cNvSpPr txBox="1"/>
-          <p:nvPr/>
-        </p:nvSpPr>
-        <p:spPr>
-          <a:xfrm>
-            <a:off x="647922" y="5792896"/>
-            <a:ext cx="4248702" cy="369332"/>
-          </a:xfrm>
-          <a:prstGeom prst="rect">
-            <a:avLst/>
-          </a:prstGeom>
-          <a:noFill/>
-        </p:spPr>
-        <p:txBody>
-          <a:bodyPr wrap="square" rtlCol="0">
-            <a:spAutoFit/>
-          </a:bodyPr>
-          <a:lstStyle/>
-          <a:p>
-            <a:r>
-              <a:rPr lang="en-US" dirty="0"/>
-              <a:t>3D image of the experimental setup</a:t>
-            </a:r>
-          </a:p>
-        </p:txBody>
-      </p:sp>
-      <p:sp>
-        <p:nvSpPr>
-          <p:cNvPr id="41" name="TextBox 40">
-            <a:extLst>
-              <a:ext uri="{FF2B5EF4-FFF2-40B4-BE49-F238E27FC236}">
-                <a16:creationId xmlns:a16="http://schemas.microsoft.com/office/drawing/2014/main" id="{84F7F0FB-27E7-7596-EC56-19CA6574F7A4}"/>
-              </a:ext>
-            </a:extLst>
-          </p:cNvPr>
-          <p:cNvSpPr txBox="1"/>
-          <p:nvPr/>
-        </p:nvSpPr>
-        <p:spPr>
-          <a:xfrm>
-            <a:off x="6073404" y="5551505"/>
-            <a:ext cx="4248702" cy="369332"/>
-          </a:xfrm>
-          <a:prstGeom prst="rect">
-            <a:avLst/>
-          </a:prstGeom>
-          <a:noFill/>
-        </p:spPr>
-        <p:txBody>
-          <a:bodyPr wrap="square" rtlCol="0">
-            <a:spAutoFit/>
-          </a:bodyPr>
-          <a:lstStyle/>
-          <a:p>
-            <a:r>
-              <a:rPr lang="en-US" dirty="0"/>
-              <a:t>X-Z plane of the experimental setup</a:t>
-            </a:r>
-          </a:p>
-        </p:txBody>
-      </p:sp>
-    </p:spTree>
-    <p:extLst>
-      <p:ext uri="{BB962C8B-B14F-4D97-AF65-F5344CB8AC3E}">
-        <p14:creationId xmlns:p14="http://schemas.microsoft.com/office/powerpoint/2010/main" val="2867557785"/>
-      </p:ext>
-    </p:extLst>
-  </p:cSld>
-  <p:clrMapOvr>
-    <a:masterClrMapping/>
-  </p:clrMapOvr>
-</p:sld>
-</file>
-
-<file path=ppt/slides/slide3.xml><?xml version="1.0" encoding="utf-8"?>
-<p:sld xmlns:a="http://schemas.openxmlformats.org/drawingml/2006/main" xmlns:r="http://schemas.openxmlformats.org/officeDocument/2006/relationships" xmlns:p="http://schemas.openxmlformats.org/presentationml/2006/main">
-  <p:cSld>
-    <p:spTree>
-      <p:nvGrpSpPr>
-        <p:cNvPr id="1" name=""/>
-        <p:cNvGrpSpPr/>
-        <p:nvPr/>
-      </p:nvGrpSpPr>
-      <p:grpSpPr>
-        <a:xfrm>
-          <a:off x="0" y="0"/>
-          <a:ext cx="0" cy="0"/>
-          <a:chOff x="0" y="0"/>
-          <a:chExt cx="0" cy="0"/>
-        </a:xfrm>
-      </p:grpSpPr>
-      <p:sp>
-        <p:nvSpPr>
-          <p:cNvPr id="2" name="Title 1">
-            <a:extLst>
-              <a:ext uri="{FF2B5EF4-FFF2-40B4-BE49-F238E27FC236}">
-                <a16:creationId xmlns:a16="http://schemas.microsoft.com/office/drawing/2014/main" id="{F23843A8-74B2-78E6-FCA9-17B2EACE42AA}"/>
-              </a:ext>
-            </a:extLst>
-          </p:cNvPr>
-          <p:cNvSpPr>
-            <a:spLocks noGrp="1"/>
-          </p:cNvSpPr>
-          <p:nvPr>
-            <p:ph type="title"/>
-          </p:nvPr>
-        </p:nvSpPr>
-        <p:spPr/>
-        <p:txBody>
-          <a:bodyPr/>
-          <a:lstStyle/>
-          <a:p>
-            <a:r>
-              <a:rPr lang="en-US" dirty="0"/>
-              <a:t>Simulation Innerworkings</a:t>
-            </a:r>
-          </a:p>
-        </p:txBody>
-      </p:sp>
-      <p:sp>
-        <p:nvSpPr>
-          <p:cNvPr id="3" name="Content Placeholder 2">
-            <a:extLst>
-              <a:ext uri="{FF2B5EF4-FFF2-40B4-BE49-F238E27FC236}">
-                <a16:creationId xmlns:a16="http://schemas.microsoft.com/office/drawing/2014/main" id="{1013BAC1-1CF2-92D1-B9E7-C497CD6672E4}"/>
-              </a:ext>
-            </a:extLst>
-          </p:cNvPr>
-          <p:cNvSpPr>
-            <a:spLocks noGrp="1"/>
-          </p:cNvSpPr>
-          <p:nvPr>
-            <p:ph idx="1"/>
-          </p:nvPr>
-        </p:nvSpPr>
-        <p:spPr/>
-        <p:txBody>
-          <a:bodyPr>
-            <a:normAutofit fontScale="85000" lnSpcReduction="10000"/>
-          </a:bodyPr>
-          <a:lstStyle/>
-          <a:p>
-            <a:pPr marL="457200" indent="-457200">
-              <a:buFont typeface="+mj-lt"/>
-              <a:buAutoNum type="arabicPeriod"/>
-            </a:pPr>
-            <a:r>
-              <a:rPr lang="en-US" dirty="0"/>
-              <a:t>Photon launches with a packet weight 1 and direction v</a:t>
-            </a:r>
-          </a:p>
-          <a:p>
-            <a:pPr marL="457200" indent="-457200">
-              <a:buFont typeface="+mj-lt"/>
-              <a:buAutoNum type="arabicPeriod"/>
-            </a:pPr>
-            <a:r>
-              <a:rPr lang="en-US" dirty="0"/>
-              <a:t>Based on an exponential distribution based on the scattering coefficient (</a:t>
-            </a:r>
-            <a:r>
-              <a:rPr lang="el-GR" dirty="0">
-                <a:latin typeface="Cambria Math" panose="02040503050406030204" pitchFamily="18" charset="0"/>
-                <a:ea typeface="Cambria Math" panose="02040503050406030204" pitchFamily="18" charset="0"/>
-              </a:rPr>
-              <a:t>μ</a:t>
-            </a:r>
-            <a:r>
-              <a:rPr lang="en-US" baseline="-25000" dirty="0">
-                <a:latin typeface="Cambria Math" panose="02040503050406030204" pitchFamily="18" charset="0"/>
-                <a:ea typeface="Cambria Math" panose="02040503050406030204" pitchFamily="18" charset="0"/>
-              </a:rPr>
-              <a:t>s</a:t>
-            </a:r>
-            <a:r>
-              <a:rPr lang="en-US" dirty="0">
-                <a:latin typeface="Cambria Math" panose="02040503050406030204" pitchFamily="18" charset="0"/>
-                <a:ea typeface="Cambria Math" panose="02040503050406030204" pitchFamily="18" charset="0"/>
-              </a:rPr>
-              <a:t>) of the current voxel, it  decides how many voxels to travel in v direction.</a:t>
-            </a:r>
-          </a:p>
-          <a:p>
-            <a:pPr marL="457200" indent="-457200">
-              <a:buFont typeface="+mj-lt"/>
-              <a:buAutoNum type="arabicPeriod"/>
-            </a:pPr>
-            <a:r>
-              <a:rPr lang="en-US" dirty="0">
-                <a:latin typeface="Cambria Math" panose="02040503050406030204" pitchFamily="18" charset="0"/>
-                <a:ea typeface="Cambria Math" panose="02040503050406030204" pitchFamily="18" charset="0"/>
-              </a:rPr>
-              <a:t>Steps 1 voxel in v direction and looses packet weight based on the absorption coefficient </a:t>
-            </a:r>
-            <a:r>
-              <a:rPr lang="en-US" dirty="0"/>
-              <a:t>(</a:t>
-            </a:r>
-            <a:r>
-              <a:rPr lang="el-GR" dirty="0">
-                <a:latin typeface="Cambria Math" panose="02040503050406030204" pitchFamily="18" charset="0"/>
-                <a:ea typeface="Cambria Math" panose="02040503050406030204" pitchFamily="18" charset="0"/>
-              </a:rPr>
-              <a:t>μ</a:t>
-            </a:r>
-            <a:r>
-              <a:rPr lang="en-US" baseline="-25000" dirty="0">
-                <a:latin typeface="Cambria Math" panose="02040503050406030204" pitchFamily="18" charset="0"/>
-                <a:ea typeface="Cambria Math" panose="02040503050406030204" pitchFamily="18" charset="0"/>
-              </a:rPr>
-              <a:t>a</a:t>
-            </a:r>
-            <a:r>
-              <a:rPr lang="en-US" dirty="0">
-                <a:latin typeface="Cambria Math" panose="02040503050406030204" pitchFamily="18" charset="0"/>
-                <a:ea typeface="Cambria Math" panose="02040503050406030204" pitchFamily="18" charset="0"/>
-              </a:rPr>
-              <a:t>) </a:t>
-            </a:r>
-          </a:p>
-          <a:p>
-            <a:pPr marL="457200" indent="-457200">
-              <a:buFont typeface="+mj-lt"/>
-              <a:buAutoNum type="arabicPeriod"/>
-            </a:pPr>
-            <a:r>
-              <a:rPr lang="en-US" dirty="0">
-                <a:latin typeface="Cambria Math" panose="02040503050406030204" pitchFamily="18" charset="0"/>
-                <a:ea typeface="Cambria Math" panose="02040503050406030204" pitchFamily="18" charset="0"/>
-              </a:rPr>
-              <a:t>The packet weight is added to its current voxel’s raw probability,</a:t>
-            </a:r>
-          </a:p>
-          <a:p>
-            <a:pPr marL="457200" indent="-457200">
-              <a:buFont typeface="+mj-lt"/>
-              <a:buAutoNum type="arabicPeriod"/>
-            </a:pPr>
-            <a:r>
-              <a:rPr lang="en-US" dirty="0">
-                <a:latin typeface="Cambria Math" panose="02040503050406030204" pitchFamily="18" charset="0"/>
-                <a:ea typeface="Cambria Math" panose="02040503050406030204" pitchFamily="18" charset="0"/>
-              </a:rPr>
-              <a:t>The previous 2 steps are repeated until the package reaches the next scattering voxel decided in the second step</a:t>
-            </a:r>
-          </a:p>
-          <a:p>
-            <a:pPr marL="457200" indent="-457200">
-              <a:buFont typeface="+mj-lt"/>
-              <a:buAutoNum type="arabicPeriod"/>
-            </a:pPr>
-            <a:r>
-              <a:rPr lang="en-US" dirty="0">
-                <a:latin typeface="Cambria Math" panose="02040503050406030204" pitchFamily="18" charset="0"/>
-                <a:ea typeface="Cambria Math" panose="02040503050406030204" pitchFamily="18" charset="0"/>
-              </a:rPr>
-              <a:t>Calculate a new scattering direction vector: the azimuth and zenith scattering angles are computed, respectively, by a random number uniformly distributed in [0,2pi] and a random number between [0,pi) following an assigned phase function.</a:t>
-            </a:r>
-          </a:p>
-          <a:p>
-            <a:pPr marL="457200" indent="-457200">
-              <a:buFont typeface="+mj-lt"/>
-              <a:buAutoNum type="arabicPeriod"/>
-            </a:pPr>
-            <a:r>
-              <a:rPr lang="en-US" dirty="0">
-                <a:latin typeface="Cambria Math" panose="02040503050406030204" pitchFamily="18" charset="0"/>
-                <a:ea typeface="Cambria Math" panose="02040503050406030204" pitchFamily="18" charset="0"/>
-              </a:rPr>
-              <a:t>Repeat from step 2 until the max time is reached or the photon exits the domain</a:t>
-            </a:r>
-          </a:p>
-          <a:p>
-            <a:pPr marL="457200" indent="-457200">
-              <a:buFont typeface="+mj-lt"/>
-              <a:buAutoNum type="arabicPeriod"/>
-            </a:pPr>
-            <a:r>
-              <a:rPr lang="en-US" dirty="0">
-                <a:latin typeface="Cambria Math" panose="02040503050406030204" pitchFamily="18" charset="0"/>
-                <a:ea typeface="Cambria Math" panose="02040503050406030204" pitchFamily="18" charset="0"/>
-              </a:rPr>
-              <a:t>Repeat all steps for next photon</a:t>
-            </a:r>
-          </a:p>
-          <a:p>
-            <a:endParaRPr lang="en-US" dirty="0"/>
-          </a:p>
-        </p:txBody>
-      </p:sp>
-    </p:spTree>
-    <p:extLst>
-      <p:ext uri="{BB962C8B-B14F-4D97-AF65-F5344CB8AC3E}">
-        <p14:creationId xmlns:p14="http://schemas.microsoft.com/office/powerpoint/2010/main" val="309444661"/>
-      </p:ext>
-    </p:extLst>
-  </p:cSld>
-  <p:clrMapOvr>
-    <a:masterClrMapping/>
-  </p:clrMapOvr>
-</p:sld>
-</file>
-
-<file path=ppt/slides/slide4.xml><?xml version="1.0" encoding="utf-8"?>
-<p:sld xmlns:a="http://schemas.openxmlformats.org/drawingml/2006/main" xmlns:r="http://schemas.openxmlformats.org/officeDocument/2006/relationships" xmlns:p="http://schemas.openxmlformats.org/presentationml/2006/main">
-  <p:cSld>
-    <p:spTree>
-      <p:nvGrpSpPr>
-        <p:cNvPr id="1" name=""/>
-        <p:cNvGrpSpPr/>
-        <p:nvPr/>
-      </p:nvGrpSpPr>
-      <p:grpSpPr>
-        <a:xfrm>
-          <a:off x="0" y="0"/>
-          <a:ext cx="0" cy="0"/>
-          <a:chOff x="0" y="0"/>
-          <a:chExt cx="0" cy="0"/>
-        </a:xfrm>
-      </p:grpSpPr>
-      <p:sp>
-        <p:nvSpPr>
-          <p:cNvPr id="45" name="Rectangle 44">
-            <a:extLst>
-              <a:ext uri="{FF2B5EF4-FFF2-40B4-BE49-F238E27FC236}">
-                <a16:creationId xmlns:a16="http://schemas.microsoft.com/office/drawing/2014/main" id="{E5E6297A-D824-851D-1682-E7DB224153CD}"/>
-              </a:ext>
-            </a:extLst>
-          </p:cNvPr>
-          <p:cNvSpPr/>
-          <p:nvPr/>
-        </p:nvSpPr>
-        <p:spPr>
-          <a:xfrm>
-            <a:off x="53009" y="1358348"/>
-            <a:ext cx="11940208" cy="4671391"/>
-          </a:xfrm>
-          <a:prstGeom prst="rect">
-            <a:avLst/>
-          </a:prstGeom>
-          <a:noFill/>
-          <a:ln w="9525" cap="flat" cmpd="sng" algn="ctr">
-            <a:solidFill>
-              <a:schemeClr val="accent3"/>
-            </a:solidFill>
-            <a:prstDash val="solid"/>
-            <a:round/>
-            <a:headEnd type="none" w="med" len="med"/>
-            <a:tailEnd type="none" w="med" len="med"/>
-          </a:ln>
-        </p:spPr>
-        <p:style>
-          <a:lnRef idx="0">
-            <a:scrgbClr r="0" g="0" b="0"/>
-          </a:lnRef>
-          <a:fillRef idx="0">
-            <a:scrgbClr r="0" g="0" b="0"/>
-          </a:fillRef>
-          <a:effectRef idx="0">
-            <a:scrgbClr r="0" g="0" b="0"/>
-          </a:effectRef>
-          <a:fontRef idx="minor">
-            <a:schemeClr val="accent3"/>
-          </a:fontRef>
-        </p:style>
-        <p:txBody>
-          <a:bodyPr rtlCol="0" anchor="ctr"/>
-          <a:lstStyle/>
-          <a:p>
-            <a:pPr algn="ctr"/>
-            <a:endParaRPr lang="en-US"/>
-          </a:p>
-        </p:txBody>
-      </p:sp>
-      <p:sp>
-        <p:nvSpPr>
-          <p:cNvPr id="6" name="Rectangle: Rounded Corners 5">
-            <a:extLst>
-              <a:ext uri="{FF2B5EF4-FFF2-40B4-BE49-F238E27FC236}">
-                <a16:creationId xmlns:a16="http://schemas.microsoft.com/office/drawing/2014/main" id="{2A58B961-E562-FC88-8A0E-3FC06955C401}"/>
-              </a:ext>
-            </a:extLst>
-          </p:cNvPr>
-          <p:cNvSpPr/>
-          <p:nvPr/>
-        </p:nvSpPr>
-        <p:spPr>
-          <a:xfrm>
-            <a:off x="114504" y="1842052"/>
-            <a:ext cx="1881809" cy="1152940"/>
-          </a:xfrm>
-          <a:prstGeom prst="roundRect">
-            <a:avLst/>
-          </a:prstGeom>
-        </p:spPr>
-        <p:style>
-          <a:lnRef idx="1">
-            <a:schemeClr val="accent6"/>
-          </a:lnRef>
-          <a:fillRef idx="2">
-            <a:schemeClr val="accent6"/>
-          </a:fillRef>
-          <a:effectRef idx="1">
-            <a:schemeClr val="accent6"/>
-          </a:effectRef>
-          <a:fontRef idx="minor">
-            <a:schemeClr val="dk1"/>
-          </a:fontRef>
-        </p:style>
-        <p:txBody>
-          <a:bodyPr rtlCol="0" anchor="ctr"/>
-          <a:lstStyle/>
-          <a:p>
-            <a:pPr algn="ctr"/>
-            <a:r>
-              <a:rPr lang="en-US" dirty="0"/>
-              <a:t>Photon Launches with weight 1 in v </a:t>
-            </a:r>
-            <a:r>
-              <a:rPr lang="en-US" dirty="0" err="1"/>
-              <a:t>dir</a:t>
-            </a:r>
-            <a:endParaRPr lang="en-US" dirty="0"/>
-          </a:p>
-        </p:txBody>
-      </p:sp>
-      <p:sp>
-        <p:nvSpPr>
-          <p:cNvPr id="8" name="Rectangle: Rounded Corners 7">
-            <a:extLst>
-              <a:ext uri="{FF2B5EF4-FFF2-40B4-BE49-F238E27FC236}">
-                <a16:creationId xmlns:a16="http://schemas.microsoft.com/office/drawing/2014/main" id="{1FA17908-4E4A-2C7B-8F3E-38AE0389FF97}"/>
-              </a:ext>
-            </a:extLst>
-          </p:cNvPr>
-          <p:cNvSpPr/>
-          <p:nvPr/>
-        </p:nvSpPr>
-        <p:spPr>
-          <a:xfrm>
-            <a:off x="3730895" y="2803461"/>
-            <a:ext cx="1129340" cy="1152940"/>
-          </a:xfrm>
-          <a:prstGeom prst="roundRect">
-            <a:avLst/>
-          </a:prstGeom>
-        </p:spPr>
-        <p:style>
-          <a:lnRef idx="1">
-            <a:schemeClr val="dk1"/>
-          </a:lnRef>
-          <a:fillRef idx="2">
-            <a:schemeClr val="dk1"/>
-          </a:fillRef>
-          <a:effectRef idx="1">
-            <a:schemeClr val="dk1"/>
-          </a:effectRef>
-          <a:fontRef idx="minor">
-            <a:schemeClr val="dk1"/>
-          </a:fontRef>
-        </p:style>
-        <p:txBody>
-          <a:bodyPr rtlCol="0" anchor="ctr"/>
-          <a:lstStyle/>
-          <a:p>
-            <a:pPr algn="ctr"/>
-            <a:endParaRPr lang="en-US" dirty="0"/>
-          </a:p>
-        </p:txBody>
-      </p:sp>
-      <p:pic>
-        <p:nvPicPr>
-          <p:cNvPr id="10" name="Picture 9">
-            <a:extLst>
-              <a:ext uri="{FF2B5EF4-FFF2-40B4-BE49-F238E27FC236}">
-                <a16:creationId xmlns:a16="http://schemas.microsoft.com/office/drawing/2014/main" id="{9E99E545-9608-7184-1081-9E7EC5F60C86}"/>
-              </a:ext>
-            </a:extLst>
-          </p:cNvPr>
-          <p:cNvPicPr>
-            <a:picLocks noChangeAspect="1"/>
-          </p:cNvPicPr>
-          <p:nvPr/>
-        </p:nvPicPr>
-        <p:blipFill>
-          <a:blip r:embed="rId2"/>
-          <a:stretch>
-            <a:fillRect/>
-          </a:stretch>
-        </p:blipFill>
-        <p:spPr>
-          <a:xfrm>
-            <a:off x="2110816" y="2746514"/>
-            <a:ext cx="1543061" cy="1266834"/>
-          </a:xfrm>
-          <a:prstGeom prst="rect">
-            <a:avLst/>
-          </a:prstGeom>
-        </p:spPr>
-      </p:pic>
-      <p:sp>
-        <p:nvSpPr>
-          <p:cNvPr id="11" name="Arrow: Right 10">
-            <a:extLst>
-              <a:ext uri="{FF2B5EF4-FFF2-40B4-BE49-F238E27FC236}">
-                <a16:creationId xmlns:a16="http://schemas.microsoft.com/office/drawing/2014/main" id="{519AE099-0597-5E63-4686-68D2FB27CCD5}"/>
-              </a:ext>
-            </a:extLst>
-          </p:cNvPr>
-          <p:cNvSpPr/>
-          <p:nvPr/>
-        </p:nvSpPr>
-        <p:spPr>
-          <a:xfrm>
-            <a:off x="2110816" y="1842052"/>
-            <a:ext cx="6096006" cy="1152940"/>
-          </a:xfrm>
-          <a:prstGeom prst="rightArrow">
-            <a:avLst/>
-          </a:prstGeom>
-        </p:spPr>
-        <p:style>
-          <a:lnRef idx="1">
-            <a:schemeClr val="accent6"/>
-          </a:lnRef>
-          <a:fillRef idx="2">
-            <a:schemeClr val="accent6"/>
-          </a:fillRef>
-          <a:effectRef idx="1">
-            <a:schemeClr val="accent6"/>
-          </a:effectRef>
-          <a:fontRef idx="minor">
-            <a:schemeClr val="dk1"/>
-          </a:fontRef>
-        </p:style>
-        <p:txBody>
-          <a:bodyPr rtlCol="0" anchor="ctr"/>
-          <a:lstStyle/>
-          <a:p>
-            <a:pPr algn="ctr"/>
-            <a:r>
-              <a:rPr lang="en-US" dirty="0"/>
-              <a:t>Based on </a:t>
-            </a:r>
-            <a:r>
-              <a:rPr lang="el-GR" dirty="0">
-                <a:latin typeface="Cambria Math" panose="02040503050406030204" pitchFamily="18" charset="0"/>
-                <a:ea typeface="Cambria Math" panose="02040503050406030204" pitchFamily="18" charset="0"/>
-              </a:rPr>
-              <a:t>μ</a:t>
-            </a:r>
-            <a:r>
-              <a:rPr lang="en-US" baseline="-25000" dirty="0">
-                <a:latin typeface="Cambria Math" panose="02040503050406030204" pitchFamily="18" charset="0"/>
-                <a:ea typeface="Cambria Math" panose="02040503050406030204" pitchFamily="18" charset="0"/>
-              </a:rPr>
-              <a:t>s</a:t>
-            </a:r>
-            <a:r>
-              <a:rPr lang="en-US" dirty="0"/>
-              <a:t>, photon travels n voxels</a:t>
-            </a:r>
-          </a:p>
-        </p:txBody>
-      </p:sp>
-      <p:sp>
-        <p:nvSpPr>
-          <p:cNvPr id="13" name="Oval 12">
-            <a:extLst>
-              <a:ext uri="{FF2B5EF4-FFF2-40B4-BE49-F238E27FC236}">
-                <a16:creationId xmlns:a16="http://schemas.microsoft.com/office/drawing/2014/main" id="{C05261AD-26CE-077F-A73A-9E0CAB08E63D}"/>
-              </a:ext>
-            </a:extLst>
-          </p:cNvPr>
-          <p:cNvSpPr/>
-          <p:nvPr/>
-        </p:nvSpPr>
-        <p:spPr>
-          <a:xfrm>
-            <a:off x="4046930" y="3131296"/>
-            <a:ext cx="497269" cy="497269"/>
-          </a:xfrm>
-          <a:prstGeom prst="ellipse">
-            <a:avLst/>
-          </a:prstGeom>
-        </p:spPr>
-        <p:style>
-          <a:lnRef idx="0">
-            <a:schemeClr val="accent3"/>
-          </a:lnRef>
-          <a:fillRef idx="3">
-            <a:schemeClr val="accent3"/>
-          </a:fillRef>
-          <a:effectRef idx="3">
-            <a:schemeClr val="accent3"/>
-          </a:effectRef>
-          <a:fontRef idx="minor">
-            <a:schemeClr val="lt1"/>
-          </a:fontRef>
-        </p:style>
-        <p:txBody>
-          <a:bodyPr rtlCol="0" anchor="ctr"/>
-          <a:lstStyle/>
-          <a:p>
-            <a:pPr algn="ctr"/>
-            <a:endParaRPr lang="en-US"/>
-          </a:p>
-        </p:txBody>
-      </p:sp>
-      <p:sp>
-        <p:nvSpPr>
-          <p:cNvPr id="15" name="Rectangle: Rounded Corners 14">
-            <a:extLst>
-              <a:ext uri="{FF2B5EF4-FFF2-40B4-BE49-F238E27FC236}">
-                <a16:creationId xmlns:a16="http://schemas.microsoft.com/office/drawing/2014/main" id="{B3E8AE43-0D28-F6DC-0FC1-3121AEBF9B70}"/>
-              </a:ext>
-            </a:extLst>
-          </p:cNvPr>
-          <p:cNvSpPr/>
-          <p:nvPr/>
-        </p:nvSpPr>
-        <p:spPr>
-          <a:xfrm>
-            <a:off x="4937253" y="2803461"/>
-            <a:ext cx="1129340" cy="1152940"/>
-          </a:xfrm>
-          <a:prstGeom prst="roundRect">
-            <a:avLst/>
-          </a:prstGeom>
-        </p:spPr>
-        <p:style>
-          <a:lnRef idx="1">
-            <a:schemeClr val="dk1"/>
-          </a:lnRef>
-          <a:fillRef idx="2">
-            <a:schemeClr val="dk1"/>
-          </a:fillRef>
-          <a:effectRef idx="1">
-            <a:schemeClr val="dk1"/>
-          </a:effectRef>
-          <a:fontRef idx="minor">
-            <a:schemeClr val="dk1"/>
-          </a:fontRef>
-        </p:style>
-        <p:txBody>
-          <a:bodyPr rtlCol="0" anchor="ctr"/>
-          <a:lstStyle/>
-          <a:p>
-            <a:pPr algn="ctr"/>
-            <a:endParaRPr lang="en-US" dirty="0"/>
-          </a:p>
-        </p:txBody>
-      </p:sp>
-      <p:sp>
-        <p:nvSpPr>
-          <p:cNvPr id="17" name="Oval 16">
-            <a:extLst>
-              <a:ext uri="{FF2B5EF4-FFF2-40B4-BE49-F238E27FC236}">
-                <a16:creationId xmlns:a16="http://schemas.microsoft.com/office/drawing/2014/main" id="{CED25659-77B4-9FF8-C456-39935DD55A9C}"/>
-              </a:ext>
-            </a:extLst>
-          </p:cNvPr>
-          <p:cNvSpPr/>
-          <p:nvPr/>
-        </p:nvSpPr>
-        <p:spPr>
-          <a:xfrm>
-            <a:off x="5326176" y="3209766"/>
-            <a:ext cx="319252" cy="319252"/>
-          </a:xfrm>
-          <a:prstGeom prst="ellipse">
-            <a:avLst/>
-          </a:prstGeom>
-        </p:spPr>
-        <p:style>
-          <a:lnRef idx="0">
-            <a:schemeClr val="accent3"/>
-          </a:lnRef>
-          <a:fillRef idx="3">
-            <a:schemeClr val="accent3"/>
-          </a:fillRef>
-          <a:effectRef idx="3">
-            <a:schemeClr val="accent3"/>
-          </a:effectRef>
-          <a:fontRef idx="minor">
-            <a:schemeClr val="lt1"/>
-          </a:fontRef>
-        </p:style>
-        <p:txBody>
-          <a:bodyPr rtlCol="0" anchor="ctr"/>
-          <a:lstStyle/>
-          <a:p>
-            <a:pPr algn="ctr"/>
-            <a:endParaRPr lang="en-US"/>
-          </a:p>
-        </p:txBody>
-      </p:sp>
-      <p:sp>
-        <p:nvSpPr>
-          <p:cNvPr id="23" name="Rectangle: Rounded Corners 22">
-            <a:extLst>
-              <a:ext uri="{FF2B5EF4-FFF2-40B4-BE49-F238E27FC236}">
-                <a16:creationId xmlns:a16="http://schemas.microsoft.com/office/drawing/2014/main" id="{7870FDC6-969A-4902-83E7-BDBF27EDAC0E}"/>
-              </a:ext>
-            </a:extLst>
-          </p:cNvPr>
-          <p:cNvSpPr/>
-          <p:nvPr/>
-        </p:nvSpPr>
-        <p:spPr>
-          <a:xfrm>
-            <a:off x="6143611" y="2776801"/>
-            <a:ext cx="1129340" cy="1152940"/>
-          </a:xfrm>
-          <a:prstGeom prst="roundRect">
-            <a:avLst/>
-          </a:prstGeom>
-        </p:spPr>
-        <p:style>
-          <a:lnRef idx="1">
-            <a:schemeClr val="dk1"/>
-          </a:lnRef>
-          <a:fillRef idx="2">
-            <a:schemeClr val="dk1"/>
-          </a:fillRef>
-          <a:effectRef idx="1">
-            <a:schemeClr val="dk1"/>
-          </a:effectRef>
-          <a:fontRef idx="minor">
-            <a:schemeClr val="dk1"/>
-          </a:fontRef>
-        </p:style>
-        <p:txBody>
-          <a:bodyPr rtlCol="0" anchor="ctr"/>
-          <a:lstStyle/>
-          <a:p>
-            <a:pPr algn="ctr"/>
-            <a:endParaRPr lang="en-US" dirty="0"/>
-          </a:p>
-        </p:txBody>
-      </p:sp>
-      <p:sp>
-        <p:nvSpPr>
-          <p:cNvPr id="25" name="Oval 24">
-            <a:extLst>
-              <a:ext uri="{FF2B5EF4-FFF2-40B4-BE49-F238E27FC236}">
-                <a16:creationId xmlns:a16="http://schemas.microsoft.com/office/drawing/2014/main" id="{DA79CE46-865E-A188-6C39-74E03E74C1B4}"/>
-              </a:ext>
-            </a:extLst>
-          </p:cNvPr>
-          <p:cNvSpPr/>
-          <p:nvPr/>
-        </p:nvSpPr>
-        <p:spPr>
-          <a:xfrm>
-            <a:off x="6532533" y="3226958"/>
-            <a:ext cx="242479" cy="242479"/>
-          </a:xfrm>
-          <a:prstGeom prst="ellipse">
-            <a:avLst/>
-          </a:prstGeom>
-        </p:spPr>
-        <p:style>
-          <a:lnRef idx="0">
-            <a:schemeClr val="accent3"/>
-          </a:lnRef>
-          <a:fillRef idx="3">
-            <a:schemeClr val="accent3"/>
-          </a:fillRef>
-          <a:effectRef idx="3">
-            <a:schemeClr val="accent3"/>
-          </a:effectRef>
-          <a:fontRef idx="minor">
-            <a:schemeClr val="lt1"/>
-          </a:fontRef>
-        </p:style>
-        <p:txBody>
-          <a:bodyPr rtlCol="0" anchor="ctr"/>
-          <a:lstStyle/>
-          <a:p>
-            <a:pPr algn="ctr"/>
-            <a:endParaRPr lang="en-US"/>
-          </a:p>
-        </p:txBody>
-      </p:sp>
-      <p:cxnSp>
-        <p:nvCxnSpPr>
-          <p:cNvPr id="27" name="Connector: Curved 26">
-            <a:extLst>
-              <a:ext uri="{FF2B5EF4-FFF2-40B4-BE49-F238E27FC236}">
-                <a16:creationId xmlns:a16="http://schemas.microsoft.com/office/drawing/2014/main" id="{7EF43584-8A09-DF8D-E946-B0FE437CAA09}"/>
-              </a:ext>
-            </a:extLst>
-          </p:cNvPr>
-          <p:cNvCxnSpPr>
-            <a:stCxn id="8" idx="2"/>
-            <a:endCxn id="15" idx="2"/>
-          </p:cNvCxnSpPr>
-          <p:nvPr/>
-        </p:nvCxnSpPr>
-        <p:spPr>
-          <a:xfrm rot="16200000" flipH="1">
-            <a:off x="4898744" y="3353222"/>
-            <a:ext cx="12700" cy="1206358"/>
-          </a:xfrm>
-          <a:prstGeom prst="curvedConnector3">
-            <a:avLst>
-              <a:gd name="adj1" fmla="val 1800000"/>
-            </a:avLst>
-          </a:prstGeom>
-          <a:ln>
-            <a:tailEnd type="triangle"/>
-          </a:ln>
-        </p:spPr>
-        <p:style>
-          <a:lnRef idx="1">
-            <a:schemeClr val="dk1"/>
-          </a:lnRef>
-          <a:fillRef idx="0">
-            <a:schemeClr val="dk1"/>
-          </a:fillRef>
-          <a:effectRef idx="0">
-            <a:schemeClr val="dk1"/>
-          </a:effectRef>
-          <a:fontRef idx="minor">
-            <a:schemeClr val="tx1"/>
-          </a:fontRef>
-        </p:style>
-      </p:cxnSp>
-      <p:cxnSp>
-        <p:nvCxnSpPr>
-          <p:cNvPr id="28" name="Connector: Curved 27">
-            <a:extLst>
-              <a:ext uri="{FF2B5EF4-FFF2-40B4-BE49-F238E27FC236}">
-                <a16:creationId xmlns:a16="http://schemas.microsoft.com/office/drawing/2014/main" id="{A0717F08-B786-FF34-5EAC-26C9DA0DB85C}"/>
-              </a:ext>
-            </a:extLst>
-          </p:cNvPr>
-          <p:cNvCxnSpPr/>
-          <p:nvPr/>
-        </p:nvCxnSpPr>
-        <p:spPr>
-          <a:xfrm rot="16200000" flipH="1">
-            <a:off x="6097142" y="3334171"/>
-            <a:ext cx="12700" cy="1206358"/>
-          </a:xfrm>
-          <a:prstGeom prst="curvedConnector3">
-            <a:avLst>
-              <a:gd name="adj1" fmla="val 1800000"/>
-            </a:avLst>
-          </a:prstGeom>
-          <a:ln>
-            <a:tailEnd type="triangle"/>
-          </a:ln>
-        </p:spPr>
-        <p:style>
-          <a:lnRef idx="1">
-            <a:schemeClr val="dk1"/>
-          </a:lnRef>
-          <a:fillRef idx="0">
-            <a:schemeClr val="dk1"/>
-          </a:fillRef>
-          <a:effectRef idx="0">
-            <a:schemeClr val="dk1"/>
-          </a:effectRef>
-          <a:fontRef idx="minor">
-            <a:schemeClr val="tx1"/>
-          </a:fontRef>
-        </p:style>
-      </p:cxnSp>
-      <p:sp>
-        <p:nvSpPr>
-          <p:cNvPr id="29" name="Oval 28">
-            <a:extLst>
-              <a:ext uri="{FF2B5EF4-FFF2-40B4-BE49-F238E27FC236}">
-                <a16:creationId xmlns:a16="http://schemas.microsoft.com/office/drawing/2014/main" id="{614E54FC-995B-9FD9-B4D0-A9CFAEA84012}"/>
-              </a:ext>
-            </a:extLst>
-          </p:cNvPr>
-          <p:cNvSpPr/>
-          <p:nvPr/>
-        </p:nvSpPr>
-        <p:spPr>
-          <a:xfrm>
-            <a:off x="7427844" y="3348197"/>
-            <a:ext cx="92765" cy="92765"/>
-          </a:xfrm>
-          <a:prstGeom prst="ellipse">
-            <a:avLst/>
-          </a:prstGeom>
-        </p:spPr>
-        <p:style>
-          <a:lnRef idx="2">
-            <a:schemeClr val="dk1">
-              <a:shade val="15000"/>
-            </a:schemeClr>
-          </a:lnRef>
-          <a:fillRef idx="1">
-            <a:schemeClr val="dk1"/>
-          </a:fillRef>
-          <a:effectRef idx="0">
-            <a:schemeClr val="dk1"/>
-          </a:effectRef>
-          <a:fontRef idx="minor">
-            <a:schemeClr val="lt1"/>
-          </a:fontRef>
-        </p:style>
-        <p:txBody>
-          <a:bodyPr rtlCol="0" anchor="ctr"/>
-          <a:lstStyle/>
-          <a:p>
-            <a:pPr algn="ctr"/>
-            <a:endParaRPr lang="en-US"/>
-          </a:p>
-        </p:txBody>
-      </p:sp>
-      <p:sp>
-        <p:nvSpPr>
-          <p:cNvPr id="33" name="Oval 32">
-            <a:extLst>
-              <a:ext uri="{FF2B5EF4-FFF2-40B4-BE49-F238E27FC236}">
-                <a16:creationId xmlns:a16="http://schemas.microsoft.com/office/drawing/2014/main" id="{26E07292-A4D4-72BA-E678-155CB70D2120}"/>
-              </a:ext>
-            </a:extLst>
-          </p:cNvPr>
-          <p:cNvSpPr/>
-          <p:nvPr/>
-        </p:nvSpPr>
-        <p:spPr>
-          <a:xfrm>
-            <a:off x="7661873" y="3348197"/>
-            <a:ext cx="92765" cy="92765"/>
-          </a:xfrm>
-          <a:prstGeom prst="ellipse">
-            <a:avLst/>
-          </a:prstGeom>
-        </p:spPr>
-        <p:style>
-          <a:lnRef idx="2">
-            <a:schemeClr val="dk1">
-              <a:shade val="15000"/>
-            </a:schemeClr>
-          </a:lnRef>
-          <a:fillRef idx="1">
-            <a:schemeClr val="dk1"/>
-          </a:fillRef>
-          <a:effectRef idx="0">
-            <a:schemeClr val="dk1"/>
-          </a:effectRef>
-          <a:fontRef idx="minor">
-            <a:schemeClr val="lt1"/>
-          </a:fontRef>
-        </p:style>
-        <p:txBody>
-          <a:bodyPr rtlCol="0" anchor="ctr"/>
-          <a:lstStyle/>
-          <a:p>
-            <a:pPr algn="ctr"/>
-            <a:endParaRPr lang="en-US"/>
-          </a:p>
-        </p:txBody>
-      </p:sp>
-      <p:sp>
-        <p:nvSpPr>
-          <p:cNvPr id="35" name="Oval 34">
-            <a:extLst>
-              <a:ext uri="{FF2B5EF4-FFF2-40B4-BE49-F238E27FC236}">
-                <a16:creationId xmlns:a16="http://schemas.microsoft.com/office/drawing/2014/main" id="{258315BD-41CC-6F90-B553-8AE5999C2239}"/>
-              </a:ext>
-            </a:extLst>
-          </p:cNvPr>
-          <p:cNvSpPr/>
-          <p:nvPr/>
-        </p:nvSpPr>
-        <p:spPr>
-          <a:xfrm>
-            <a:off x="7895902" y="3348197"/>
-            <a:ext cx="92765" cy="92765"/>
-          </a:xfrm>
-          <a:prstGeom prst="ellipse">
-            <a:avLst/>
-          </a:prstGeom>
-        </p:spPr>
-        <p:style>
-          <a:lnRef idx="2">
-            <a:schemeClr val="dk1">
-              <a:shade val="15000"/>
-            </a:schemeClr>
-          </a:lnRef>
-          <a:fillRef idx="1">
-            <a:schemeClr val="dk1"/>
-          </a:fillRef>
-          <a:effectRef idx="0">
-            <a:schemeClr val="dk1"/>
-          </a:effectRef>
-          <a:fontRef idx="minor">
-            <a:schemeClr val="lt1"/>
-          </a:fontRef>
-        </p:style>
-        <p:txBody>
-          <a:bodyPr rtlCol="0" anchor="ctr"/>
-          <a:lstStyle/>
-          <a:p>
-            <a:pPr algn="ctr"/>
-            <a:endParaRPr lang="en-US"/>
-          </a:p>
-        </p:txBody>
-      </p:sp>
-      <p:sp>
-        <p:nvSpPr>
-          <p:cNvPr id="36" name="TextBox 35">
-            <a:extLst>
-              <a:ext uri="{FF2B5EF4-FFF2-40B4-BE49-F238E27FC236}">
-                <a16:creationId xmlns:a16="http://schemas.microsoft.com/office/drawing/2014/main" id="{1A54670A-1960-82BB-9C71-DF05F66283AB}"/>
-              </a:ext>
-            </a:extLst>
-          </p:cNvPr>
-          <p:cNvSpPr txBox="1"/>
-          <p:nvPr/>
-        </p:nvSpPr>
-        <p:spPr>
-          <a:xfrm>
-            <a:off x="7609733" y="3469437"/>
-            <a:ext cx="492724" cy="369332"/>
-          </a:xfrm>
-          <a:prstGeom prst="rect">
-            <a:avLst/>
-          </a:prstGeom>
-          <a:noFill/>
-        </p:spPr>
-        <p:txBody>
-          <a:bodyPr wrap="square" rtlCol="0">
-            <a:spAutoFit/>
-          </a:bodyPr>
-          <a:lstStyle/>
-          <a:p>
-            <a:r>
-              <a:rPr lang="en-US" b="1" dirty="0">
-                <a:solidFill>
-                  <a:schemeClr val="bg1"/>
-                </a:solidFill>
-              </a:rPr>
-              <a:t>n</a:t>
-            </a:r>
-          </a:p>
-        </p:txBody>
-      </p:sp>
-      <p:sp>
-        <p:nvSpPr>
-          <p:cNvPr id="37" name="TextBox 36">
-            <a:extLst>
-              <a:ext uri="{FF2B5EF4-FFF2-40B4-BE49-F238E27FC236}">
-                <a16:creationId xmlns:a16="http://schemas.microsoft.com/office/drawing/2014/main" id="{EAEE55A7-84BF-6E4B-6CB7-FBDF4CC8589A}"/>
-              </a:ext>
-            </a:extLst>
-          </p:cNvPr>
-          <p:cNvSpPr txBox="1"/>
-          <p:nvPr/>
-        </p:nvSpPr>
-        <p:spPr>
-          <a:xfrm>
-            <a:off x="3637150" y="4161015"/>
-            <a:ext cx="3599985" cy="369332"/>
-          </a:xfrm>
-          <a:prstGeom prst="rect">
-            <a:avLst/>
-          </a:prstGeom>
-          <a:noFill/>
-        </p:spPr>
-        <p:txBody>
-          <a:bodyPr wrap="square" rtlCol="0">
-            <a:spAutoFit/>
-          </a:bodyPr>
-          <a:lstStyle/>
-          <a:p>
-            <a:r>
-              <a:rPr lang="en-US" dirty="0"/>
-              <a:t>Weight is reduced based on </a:t>
-            </a:r>
-            <a:r>
-              <a:rPr lang="el-GR" dirty="0">
-                <a:latin typeface="Cambria Math" panose="02040503050406030204" pitchFamily="18" charset="0"/>
-                <a:ea typeface="Cambria Math" panose="02040503050406030204" pitchFamily="18" charset="0"/>
-              </a:rPr>
-              <a:t>μ</a:t>
-            </a:r>
-            <a:r>
-              <a:rPr lang="en-US" baseline="-25000" dirty="0">
-                <a:latin typeface="Cambria Math" panose="02040503050406030204" pitchFamily="18" charset="0"/>
-                <a:ea typeface="Cambria Math" panose="02040503050406030204" pitchFamily="18" charset="0"/>
-              </a:rPr>
-              <a:t>a</a:t>
-            </a:r>
-            <a:r>
-              <a:rPr lang="en-US" dirty="0"/>
-              <a:t>  </a:t>
-            </a:r>
-          </a:p>
-        </p:txBody>
-      </p:sp>
-      <p:sp>
-        <p:nvSpPr>
-          <p:cNvPr id="39" name="Rectangle: Rounded Corners 38">
-            <a:extLst>
-              <a:ext uri="{FF2B5EF4-FFF2-40B4-BE49-F238E27FC236}">
-                <a16:creationId xmlns:a16="http://schemas.microsoft.com/office/drawing/2014/main" id="{2CED0CBE-4FA2-0A39-27D5-62030A9E7494}"/>
-              </a:ext>
-            </a:extLst>
-          </p:cNvPr>
-          <p:cNvSpPr/>
-          <p:nvPr/>
-        </p:nvSpPr>
-        <p:spPr>
-          <a:xfrm>
-            <a:off x="8335618" y="1795669"/>
-            <a:ext cx="1663148" cy="1152940"/>
-          </a:xfrm>
-          <a:prstGeom prst="roundRect">
-            <a:avLst/>
-          </a:prstGeom>
-        </p:spPr>
-        <p:style>
-          <a:lnRef idx="1">
-            <a:schemeClr val="accent6"/>
-          </a:lnRef>
-          <a:fillRef idx="2">
-            <a:schemeClr val="accent6"/>
-          </a:fillRef>
-          <a:effectRef idx="1">
-            <a:schemeClr val="accent6"/>
-          </a:effectRef>
-          <a:fontRef idx="minor">
-            <a:schemeClr val="dk1"/>
-          </a:fontRef>
-        </p:style>
-        <p:txBody>
-          <a:bodyPr rtlCol="0" anchor="ctr"/>
-          <a:lstStyle/>
-          <a:p>
-            <a:pPr algn="ctr"/>
-            <a:r>
-              <a:rPr lang="en-US" dirty="0"/>
-              <a:t>New scatter direction is determined</a:t>
-            </a:r>
-          </a:p>
-        </p:txBody>
-      </p:sp>
-      <p:pic>
-        <p:nvPicPr>
-          <p:cNvPr id="41" name="Picture 40">
-            <a:extLst>
-              <a:ext uri="{FF2B5EF4-FFF2-40B4-BE49-F238E27FC236}">
-                <a16:creationId xmlns:a16="http://schemas.microsoft.com/office/drawing/2014/main" id="{53483FE8-D6C3-9B74-285A-09BD500A65A2}"/>
-              </a:ext>
-            </a:extLst>
-          </p:cNvPr>
-          <p:cNvPicPr>
-            <a:picLocks noChangeAspect="1"/>
-          </p:cNvPicPr>
-          <p:nvPr/>
-        </p:nvPicPr>
-        <p:blipFill>
-          <a:blip r:embed="rId3"/>
-          <a:stretch>
-            <a:fillRect/>
-          </a:stretch>
-        </p:blipFill>
-        <p:spPr>
-          <a:xfrm>
-            <a:off x="214156" y="265467"/>
-            <a:ext cx="9446193" cy="615176"/>
-          </a:xfrm>
-          <a:prstGeom prst="rect">
-            <a:avLst/>
-          </a:prstGeom>
-          <a:ln>
-            <a:solidFill>
-              <a:schemeClr val="bg1"/>
-            </a:solidFill>
-          </a:ln>
-        </p:spPr>
-      </p:pic>
-      <p:cxnSp>
-        <p:nvCxnSpPr>
-          <p:cNvPr id="43" name="Connector: Curved 42">
-            <a:extLst>
-              <a:ext uri="{FF2B5EF4-FFF2-40B4-BE49-F238E27FC236}">
-                <a16:creationId xmlns:a16="http://schemas.microsoft.com/office/drawing/2014/main" id="{0E84804B-640A-9B18-7608-E5DB48BBBEBE}"/>
-              </a:ext>
-            </a:extLst>
-          </p:cNvPr>
-          <p:cNvCxnSpPr>
-            <a:cxnSpLocks/>
-          </p:cNvCxnSpPr>
-          <p:nvPr/>
-        </p:nvCxnSpPr>
-        <p:spPr>
-          <a:xfrm rot="16200000" flipV="1">
-            <a:off x="6562551" y="-776815"/>
-            <a:ext cx="915026" cy="4229939"/>
-          </a:xfrm>
-          <a:prstGeom prst="curvedConnector3">
-            <a:avLst/>
-          </a:prstGeom>
-          <a:ln>
-            <a:tailEnd type="triangle"/>
-          </a:ln>
-        </p:spPr>
-        <p:style>
-          <a:lnRef idx="1">
-            <a:schemeClr val="dk1"/>
-          </a:lnRef>
-          <a:fillRef idx="0">
-            <a:schemeClr val="dk1"/>
-          </a:fillRef>
-          <a:effectRef idx="0">
-            <a:schemeClr val="dk1"/>
-          </a:effectRef>
-          <a:fontRef idx="minor">
-            <a:schemeClr val="tx1"/>
-          </a:fontRef>
-        </p:style>
-      </p:cxnSp>
-      <p:sp>
-        <p:nvSpPr>
-          <p:cNvPr id="46" name="Arrow: Right 45">
-            <a:extLst>
-              <a:ext uri="{FF2B5EF4-FFF2-40B4-BE49-F238E27FC236}">
-                <a16:creationId xmlns:a16="http://schemas.microsoft.com/office/drawing/2014/main" id="{55D8F6E7-FEDD-F497-CCD5-4F9E8ABF1236}"/>
-              </a:ext>
-            </a:extLst>
-          </p:cNvPr>
-          <p:cNvSpPr/>
-          <p:nvPr/>
-        </p:nvSpPr>
-        <p:spPr>
-          <a:xfrm rot="5400000">
-            <a:off x="7776604" y="3979996"/>
-            <a:ext cx="2883454" cy="1018356"/>
-          </a:xfrm>
-          <a:prstGeom prst="rightArrow">
-            <a:avLst/>
-          </a:prstGeom>
-        </p:spPr>
-        <p:style>
-          <a:lnRef idx="1">
-            <a:schemeClr val="accent6"/>
-          </a:lnRef>
-          <a:fillRef idx="2">
-            <a:schemeClr val="accent6"/>
-          </a:fillRef>
-          <a:effectRef idx="1">
-            <a:schemeClr val="accent6"/>
-          </a:effectRef>
-          <a:fontRef idx="minor">
-            <a:schemeClr val="dk1"/>
-          </a:fontRef>
-        </p:style>
-        <p:txBody>
-          <a:bodyPr rtlCol="0" anchor="ctr"/>
-          <a:lstStyle/>
-          <a:p>
-            <a:pPr algn="ctr"/>
-            <a:endParaRPr lang="en-US"/>
-          </a:p>
-        </p:txBody>
-      </p:sp>
-      <p:sp>
-        <p:nvSpPr>
-          <p:cNvPr id="47" name="TextBox 46">
-            <a:extLst>
-              <a:ext uri="{FF2B5EF4-FFF2-40B4-BE49-F238E27FC236}">
-                <a16:creationId xmlns:a16="http://schemas.microsoft.com/office/drawing/2014/main" id="{68A415F6-6CC3-DBFF-FDCE-3E7E211DC316}"/>
-              </a:ext>
-            </a:extLst>
-          </p:cNvPr>
-          <p:cNvSpPr txBox="1"/>
-          <p:nvPr/>
-        </p:nvSpPr>
-        <p:spPr>
-          <a:xfrm>
-            <a:off x="9672340" y="3253547"/>
-            <a:ext cx="1782418" cy="2031325"/>
-          </a:xfrm>
-          <a:prstGeom prst="rect">
-            <a:avLst/>
-          </a:prstGeom>
-          <a:noFill/>
-        </p:spPr>
-        <p:txBody>
-          <a:bodyPr wrap="square" rtlCol="0">
-            <a:spAutoFit/>
-          </a:bodyPr>
-          <a:lstStyle/>
-          <a:p>
-            <a:r>
-              <a:rPr lang="en-US" dirty="0"/>
-              <a:t>Previous steps are repeated until the boundary is left or no more time is left</a:t>
-            </a:r>
-          </a:p>
-        </p:txBody>
-      </p:sp>
-    </p:spTree>
-    <p:extLst>
-      <p:ext uri="{BB962C8B-B14F-4D97-AF65-F5344CB8AC3E}">
-        <p14:creationId xmlns:p14="http://schemas.microsoft.com/office/powerpoint/2010/main" val="1601636316"/>
-      </p:ext>
-    </p:extLst>
-  </p:cSld>
-  <p:clrMapOvr>
-    <a:masterClrMapping/>
-  </p:clrMapOvr>
-</p:sld>
-</file>
-
-<file path=ppt/slides/slide5.xml><?xml version="1.0" encoding="utf-8"?>
-<p:sld xmlns:a="http://schemas.openxmlformats.org/drawingml/2006/main" xmlns:r="http://schemas.openxmlformats.org/officeDocument/2006/relationships" xmlns:p="http://schemas.openxmlformats.org/presentationml/2006/main">
-  <p:cSld>
-    <p:spTree>
-      <p:nvGrpSpPr>
-        <p:cNvPr id="1" name=""/>
-        <p:cNvGrpSpPr/>
-        <p:nvPr/>
-      </p:nvGrpSpPr>
-      <p:grpSpPr>
-        <a:xfrm>
-          <a:off x="0" y="0"/>
-          <a:ext cx="0" cy="0"/>
-          <a:chOff x="0" y="0"/>
-          <a:chExt cx="0" cy="0"/>
-        </a:xfrm>
-      </p:grpSpPr>
-      <p:sp>
-        <p:nvSpPr>
-          <p:cNvPr id="2" name="Title 1">
-            <a:extLst>
-              <a:ext uri="{FF2B5EF4-FFF2-40B4-BE49-F238E27FC236}">
-                <a16:creationId xmlns:a16="http://schemas.microsoft.com/office/drawing/2014/main" id="{8CBD9C3D-8F83-B489-ED20-32DC9A49B52E}"/>
-              </a:ext>
-            </a:extLst>
-          </p:cNvPr>
-          <p:cNvSpPr>
-            <a:spLocks noGrp="1"/>
-          </p:cNvSpPr>
-          <p:nvPr>
-            <p:ph type="title"/>
-          </p:nvPr>
-        </p:nvSpPr>
-        <p:spPr/>
-        <p:txBody>
-          <a:bodyPr/>
-          <a:lstStyle/>
-          <a:p>
-            <a:r>
-              <a:rPr lang="en-US" dirty="0"/>
-              <a:t>Deciding the Parameters for Fornier Forand</a:t>
-            </a:r>
-          </a:p>
-        </p:txBody>
-      </p:sp>
-      <p:pic>
-        <p:nvPicPr>
-          <p:cNvPr id="7" name="Content Placeholder 6">
-            <a:extLst>
-              <a:ext uri="{FF2B5EF4-FFF2-40B4-BE49-F238E27FC236}">
-                <a16:creationId xmlns:a16="http://schemas.microsoft.com/office/drawing/2014/main" id="{EB621F94-919A-F061-AEFA-DCA454A0C88B}"/>
-              </a:ext>
-            </a:extLst>
-          </p:cNvPr>
-          <p:cNvPicPr>
-            <a:picLocks noGrp="1" noChangeAspect="1"/>
-          </p:cNvPicPr>
-          <p:nvPr>
-            <p:ph idx="1"/>
-          </p:nvPr>
-        </p:nvPicPr>
-        <p:blipFill>
-          <a:blip r:embed="rId2"/>
-          <a:stretch>
-            <a:fillRect/>
-          </a:stretch>
-        </p:blipFill>
-        <p:spPr>
-          <a:xfrm>
-            <a:off x="4960398" y="2517503"/>
-            <a:ext cx="6138895" cy="3011966"/>
-          </a:xfrm>
-          <a:prstGeom prst="rect">
-            <a:avLst/>
-          </a:prstGeom>
-        </p:spPr>
-      </p:pic>
-      <p:sp>
-        <p:nvSpPr>
-          <p:cNvPr id="5" name="Text Placeholder 4">
-            <a:extLst>
-              <a:ext uri="{FF2B5EF4-FFF2-40B4-BE49-F238E27FC236}">
-                <a16:creationId xmlns:a16="http://schemas.microsoft.com/office/drawing/2014/main" id="{17EF4266-C469-7D12-1BBE-C95523C3392C}"/>
-              </a:ext>
-            </a:extLst>
-          </p:cNvPr>
-          <p:cNvSpPr>
-            <a:spLocks noGrp="1"/>
-          </p:cNvSpPr>
-          <p:nvPr>
-            <p:ph type="body" sz="half" idx="2"/>
-          </p:nvPr>
-        </p:nvSpPr>
-        <p:spPr/>
-        <p:txBody>
-          <a:bodyPr/>
-          <a:lstStyle/>
-          <a:p>
-            <a:pPr marL="342900" indent="-342900">
-              <a:buAutoNum type="arabicPeriod"/>
-            </a:pPr>
-            <a:r>
-              <a:rPr lang="en-US" dirty="0"/>
-              <a:t>0.015–0.025  from Characterization of Particle Backscattering of Global </a:t>
-            </a:r>
-            <a:r>
-              <a:rPr lang="en-US" dirty="0" err="1"/>
-              <a:t>HighlyTurbid</a:t>
-            </a:r>
-            <a:r>
-              <a:rPr lang="en-US" dirty="0"/>
-              <a:t> Waters From VIIRS Ocean Color Observations</a:t>
-            </a:r>
-          </a:p>
-          <a:p>
-            <a:pPr marL="342900" indent="-342900">
-              <a:buAutoNum type="arabicPeriod"/>
-            </a:pPr>
-            <a:r>
-              <a:rPr lang="en-US" dirty="0"/>
-              <a:t>Picture to the left from Comparison of reflectance with backscatter and absorption parameters for turbid waters</a:t>
-            </a:r>
-          </a:p>
-        </p:txBody>
-      </p:sp>
-    </p:spTree>
-    <p:extLst>
-      <p:ext uri="{BB962C8B-B14F-4D97-AF65-F5344CB8AC3E}">
-        <p14:creationId xmlns:p14="http://schemas.microsoft.com/office/powerpoint/2010/main" val="3580156459"/>
-      </p:ext>
-    </p:extLst>
-  </p:cSld>
-  <p:clrMapOvr>
-    <a:masterClrMapping/>
-  </p:clrMapOvr>
-</p:sld>
-</file>
-
-<file path=ppt/slides/slide6.xml><?xml version="1.0" encoding="utf-8"?>
-<p:sld xmlns:a="http://schemas.openxmlformats.org/drawingml/2006/main" xmlns:r="http://schemas.openxmlformats.org/officeDocument/2006/relationships" xmlns:p="http://schemas.openxmlformats.org/presentationml/2006/main">
-  <p:cSld>
-    <p:spTree>
-      <p:nvGrpSpPr>
-        <p:cNvPr id="1" name=""/>
-        <p:cNvGrpSpPr/>
-        <p:nvPr/>
-      </p:nvGrpSpPr>
-      <p:grpSpPr>
-        <a:xfrm>
-          <a:off x="0" y="0"/>
-          <a:ext cx="0" cy="0"/>
-          <a:chOff x="0" y="0"/>
-          <a:chExt cx="0" cy="0"/>
-        </a:xfrm>
-      </p:grpSpPr>
-      <p:sp>
-        <p:nvSpPr>
-          <p:cNvPr id="2" name="Title 1">
-            <a:extLst>
-              <a:ext uri="{FF2B5EF4-FFF2-40B4-BE49-F238E27FC236}">
-                <a16:creationId xmlns:a16="http://schemas.microsoft.com/office/drawing/2014/main" id="{4840326F-948C-8CD6-61AF-24B753B4D2CB}"/>
-              </a:ext>
-            </a:extLst>
-          </p:cNvPr>
-          <p:cNvSpPr>
-            <a:spLocks noGrp="1"/>
-          </p:cNvSpPr>
-          <p:nvPr>
-            <p:ph type="title"/>
-          </p:nvPr>
-        </p:nvSpPr>
-        <p:spPr/>
-        <p:txBody>
-          <a:bodyPr/>
-          <a:lstStyle/>
-          <a:p>
-            <a:r>
-              <a:rPr lang="en-US" dirty="0"/>
-              <a:t>Other Parameters</a:t>
-            </a:r>
-          </a:p>
-        </p:txBody>
-      </p:sp>
-      <p:sp>
-        <p:nvSpPr>
-          <p:cNvPr id="3" name="Content Placeholder 2">
-            <a:extLst>
-              <a:ext uri="{FF2B5EF4-FFF2-40B4-BE49-F238E27FC236}">
-                <a16:creationId xmlns:a16="http://schemas.microsoft.com/office/drawing/2014/main" id="{D8FB0220-23E7-8FF9-3EFB-50936F2D4F6A}"/>
-              </a:ext>
-            </a:extLst>
-          </p:cNvPr>
-          <p:cNvSpPr>
-            <a:spLocks noGrp="1"/>
-          </p:cNvSpPr>
-          <p:nvPr>
-            <p:ph idx="1"/>
-          </p:nvPr>
-        </p:nvSpPr>
-        <p:spPr>
-          <a:xfrm>
-            <a:off x="1103311" y="2052918"/>
-            <a:ext cx="9630950" cy="4195481"/>
-          </a:xfrm>
-        </p:spPr>
-        <p:txBody>
-          <a:bodyPr/>
-          <a:lstStyle/>
-          <a:p>
-            <a:r>
-              <a:rPr lang="en-US" dirty="0"/>
-              <a:t>Domain: 500mm by 500mm by 500mm ( Can be reduced to 100mm for some tests)</a:t>
-            </a:r>
-          </a:p>
-          <a:p>
-            <a:r>
-              <a:rPr lang="en-US" dirty="0"/>
-              <a:t>Back Scatter Fraction 0.024 (May be tuned in via Petzold)(n=1.1,u=3.4)</a:t>
-            </a:r>
-          </a:p>
-          <a:p>
-            <a:r>
-              <a:rPr lang="en-US" dirty="0"/>
-              <a:t>Mua</a:t>
-            </a:r>
-            <a:r>
-              <a:rPr lang="en-US"/>
-              <a:t>:0.003</a:t>
-            </a:r>
-            <a:endParaRPr lang="en-US" dirty="0"/>
-          </a:p>
-          <a:p>
-            <a:r>
-              <a:rPr lang="en-US" dirty="0"/>
-              <a:t>Mus: 0.015 to 0.05</a:t>
-            </a:r>
-          </a:p>
-          <a:p>
-            <a:endParaRPr lang="en-US" dirty="0"/>
-          </a:p>
-          <a:p>
-            <a:endParaRPr lang="en-US" dirty="0"/>
-          </a:p>
-        </p:txBody>
-      </p:sp>
-    </p:spTree>
-    <p:extLst>
-      <p:ext uri="{BB962C8B-B14F-4D97-AF65-F5344CB8AC3E}">
-        <p14:creationId xmlns:p14="http://schemas.microsoft.com/office/powerpoint/2010/main" val="944707997"/>
-      </p:ext>
-    </p:extLst>
-  </p:cSld>
-  <p:clrMapOvr>
-    <a:masterClrMapping/>
-  </p:clrMapOvr>
-</p:sld>
-</file>
-
-<file path=ppt/slides/slide7.xml><?xml version="1.0" encoding="utf-8"?>
-<p:sld xmlns:a="http://schemas.openxmlformats.org/drawingml/2006/main" xmlns:r="http://schemas.openxmlformats.org/officeDocument/2006/relationships" xmlns:p="http://schemas.openxmlformats.org/presentationml/2006/main">
-  <p:cSld>
-    <p:spTree>
-      <p:nvGrpSpPr>
-        <p:cNvPr id="1" name=""/>
-        <p:cNvGrpSpPr/>
-        <p:nvPr/>
-      </p:nvGrpSpPr>
-      <p:grpSpPr>
-        <a:xfrm>
-          <a:off x="0" y="0"/>
-          <a:ext cx="0" cy="0"/>
-          <a:chOff x="0" y="0"/>
-          <a:chExt cx="0" cy="0"/>
-        </a:xfrm>
-      </p:grpSpPr>
-      <p:sp>
-        <p:nvSpPr>
-          <p:cNvPr id="2" name="Title 1">
-            <a:extLst>
-              <a:ext uri="{FF2B5EF4-FFF2-40B4-BE49-F238E27FC236}">
-                <a16:creationId xmlns:a16="http://schemas.microsoft.com/office/drawing/2014/main" id="{68CDE3B1-A1D1-CD63-EFDA-1AE7F26FA84E}"/>
-              </a:ext>
-            </a:extLst>
-          </p:cNvPr>
-          <p:cNvSpPr>
-            <a:spLocks noGrp="1"/>
-          </p:cNvSpPr>
-          <p:nvPr>
-            <p:ph type="title"/>
-          </p:nvPr>
-        </p:nvSpPr>
-        <p:spPr/>
-        <p:txBody>
-          <a:bodyPr/>
-          <a:lstStyle/>
-          <a:p>
-            <a:r>
-              <a:rPr lang="en-US" dirty="0"/>
-              <a:t>Sanity Checks</a:t>
-            </a:r>
-          </a:p>
-        </p:txBody>
-      </p:sp>
-      <p:sp>
-        <p:nvSpPr>
-          <p:cNvPr id="3" name="Content Placeholder 2">
-            <a:extLst>
-              <a:ext uri="{FF2B5EF4-FFF2-40B4-BE49-F238E27FC236}">
-                <a16:creationId xmlns:a16="http://schemas.microsoft.com/office/drawing/2014/main" id="{A967A8ED-E292-CF61-9F53-B9DCD8CEFC7E}"/>
-              </a:ext>
-            </a:extLst>
-          </p:cNvPr>
-          <p:cNvSpPr>
-            <a:spLocks noGrp="1"/>
-          </p:cNvSpPr>
-          <p:nvPr>
-            <p:ph idx="1"/>
-          </p:nvPr>
-        </p:nvSpPr>
-        <p:spPr/>
-        <p:txBody>
-          <a:bodyPr/>
-          <a:lstStyle/>
-          <a:p>
-            <a:endParaRPr lang="en-US" dirty="0"/>
-          </a:p>
-        </p:txBody>
-      </p:sp>
-      <p:sp>
-        <p:nvSpPr>
-          <p:cNvPr id="4" name="Text Placeholder 3">
-            <a:extLst>
-              <a:ext uri="{FF2B5EF4-FFF2-40B4-BE49-F238E27FC236}">
-                <a16:creationId xmlns:a16="http://schemas.microsoft.com/office/drawing/2014/main" id="{1D46CF0A-A784-9712-C2C8-FC454923D163}"/>
-              </a:ext>
-            </a:extLst>
-          </p:cNvPr>
-          <p:cNvSpPr>
-            <a:spLocks noGrp="1"/>
-          </p:cNvSpPr>
-          <p:nvPr>
-            <p:ph type="body" sz="half" idx="2"/>
-          </p:nvPr>
-        </p:nvSpPr>
-        <p:spPr/>
-        <p:txBody>
-          <a:bodyPr>
-            <a:normAutofit fontScale="55000" lnSpcReduction="20000"/>
-          </a:bodyPr>
-          <a:lstStyle/>
-          <a:p>
-            <a:pPr marL="342900" indent="-342900">
-              <a:buAutoNum type="arabicPeriod"/>
-            </a:pPr>
-            <a:r>
-              <a:rPr lang="en-US" dirty="0"/>
-              <a:t>Under 0 scattering:</a:t>
-            </a:r>
-          </a:p>
-          <a:p>
-            <a:pPr marL="800100" lvl="1" indent="-342900">
-              <a:buAutoNum type="arabicPeriod"/>
-            </a:pPr>
-            <a:r>
-              <a:rPr lang="en-US" dirty="0"/>
-              <a:t>Peak at zero degrees</a:t>
-            </a:r>
-          </a:p>
-          <a:p>
-            <a:pPr marL="800100" lvl="1" indent="-342900">
-              <a:buAutoNum type="arabicPeriod"/>
-            </a:pPr>
-            <a:r>
-              <a:rPr lang="en-US" dirty="0"/>
-              <a:t>Absorption dependance must recover the beer lambert law</a:t>
-            </a:r>
-          </a:p>
-          <a:p>
-            <a:pPr marL="342900" indent="-342900">
-              <a:buAutoNum type="arabicPeriod"/>
-            </a:pPr>
-            <a:r>
-              <a:rPr lang="en-US" dirty="0"/>
-              <a:t>Under conditions where 1 scattering event per photon on average occurs:</a:t>
-            </a:r>
-          </a:p>
-          <a:p>
-            <a:pPr marL="800100" lvl="1" indent="-342900">
-              <a:buAutoNum type="arabicPeriod"/>
-            </a:pPr>
-            <a:r>
-              <a:rPr lang="en-US" dirty="0"/>
-              <a:t>We must recover the Fornier Forand distribution</a:t>
-            </a:r>
-          </a:p>
-          <a:p>
-            <a:pPr marL="800100" lvl="1" indent="-342900">
-              <a:buAutoNum type="arabicPeriod"/>
-            </a:pPr>
-            <a:r>
-              <a:rPr lang="en-US" dirty="0"/>
-              <a:t>HG and FF must be close</a:t>
-            </a:r>
-          </a:p>
-          <a:p>
-            <a:pPr marL="342900" indent="-342900">
-              <a:buAutoNum type="arabicPeriod"/>
-            </a:pPr>
-            <a:r>
-              <a:rPr lang="en-US" dirty="0"/>
-              <a:t>Under reasonable scattering:</a:t>
-            </a:r>
-          </a:p>
-          <a:p>
-            <a:pPr marL="800100" lvl="1" indent="-342900">
-              <a:buAutoNum type="arabicPeriod"/>
-            </a:pPr>
-            <a:r>
-              <a:rPr lang="en-US" dirty="0"/>
-              <a:t>Increasing photon number must reduce std of solutions</a:t>
-            </a:r>
-          </a:p>
-          <a:p>
-            <a:pPr marL="800100" lvl="1" indent="-342900">
-              <a:buAutoNum type="arabicPeriod"/>
-            </a:pPr>
-            <a:r>
-              <a:rPr lang="en-US" dirty="0"/>
-              <a:t>HG and FF must </a:t>
-            </a:r>
-            <a:r>
-              <a:rPr lang="en-US" dirty="0" err="1"/>
-              <a:t>divarge</a:t>
-            </a:r>
-            <a:endParaRPr lang="en-US" dirty="0"/>
-          </a:p>
-          <a:p>
-            <a:pPr marL="342900" indent="-342900">
-              <a:buAutoNum type="arabicPeriod"/>
-            </a:pPr>
-            <a:r>
-              <a:rPr lang="en-US" dirty="0"/>
-              <a:t> Under very large scattering:</a:t>
-            </a:r>
-          </a:p>
-          <a:p>
-            <a:pPr marL="800100" lvl="1" indent="-342900">
-              <a:buAutoNum type="arabicPeriod"/>
-            </a:pPr>
-            <a:r>
-              <a:rPr lang="en-US" dirty="0"/>
-              <a:t>Source must look isotropic at a distance with no forward bias</a:t>
-            </a:r>
-          </a:p>
-          <a:p>
-            <a:pPr marL="800100" lvl="1" indent="-342900">
-              <a:buAutoNum type="arabicPeriod"/>
-            </a:pPr>
-            <a:r>
-              <a:rPr lang="en-US" dirty="0"/>
-              <a:t>HG and FF must converge</a:t>
-            </a:r>
-          </a:p>
-          <a:p>
-            <a:pPr marL="342900" indent="-342900">
-              <a:buAutoNum type="arabicPeriod"/>
-            </a:pPr>
-            <a:endParaRPr lang="en-US" dirty="0"/>
-          </a:p>
-        </p:txBody>
-      </p:sp>
-    </p:spTree>
-    <p:extLst>
-      <p:ext uri="{BB962C8B-B14F-4D97-AF65-F5344CB8AC3E}">
-        <p14:creationId xmlns:p14="http://schemas.microsoft.com/office/powerpoint/2010/main" val="2081107019"/>
-      </p:ext>
-    </p:extLst>
-  </p:cSld>
-  <p:clrMapOvr>
-    <a:masterClrMapping/>
-  </p:clrMapOvr>
-</p:sld>
-</file>
-
-<file path=ppt/slides/slide8.xml><?xml version="1.0" encoding="utf-8"?>
-<p:sld xmlns:a="http://schemas.openxmlformats.org/drawingml/2006/main" xmlns:r="http://schemas.openxmlformats.org/officeDocument/2006/relationships" xmlns:p="http://schemas.openxmlformats.org/presentationml/2006/main">
-  <p:cSld>
-    <p:spTree>
-      <p:nvGrpSpPr>
-        <p:cNvPr id="1" name=""/>
-        <p:cNvGrpSpPr/>
-        <p:nvPr/>
-      </p:nvGrpSpPr>
-      <p:grpSpPr>
-        <a:xfrm>
-          <a:off x="0" y="0"/>
-          <a:ext cx="0" cy="0"/>
-          <a:chOff x="0" y="0"/>
-          <a:chExt cx="0" cy="0"/>
-        </a:xfrm>
-      </p:grpSpPr>
-      <p:sp>
-        <p:nvSpPr>
-          <p:cNvPr id="2" name="Title 1">
-            <a:extLst>
-              <a:ext uri="{FF2B5EF4-FFF2-40B4-BE49-F238E27FC236}">
                 <a16:creationId xmlns:a16="http://schemas.microsoft.com/office/drawing/2014/main" id="{1A1577E8-C58B-D8E1-A3AD-F4FA7A6F76D2}"/>
               </a:ext>
             </a:extLst>
@@ -9167,7 +6717,7 @@
 </p:sld>
 </file>
 
-<file path=ppt/slides/slide9.xml><?xml version="1.0" encoding="utf-8"?>
+<file path=ppt/slides/slide13.xml><?xml version="1.0" encoding="utf-8"?>
 <p:sld xmlns:a="http://schemas.openxmlformats.org/drawingml/2006/main" xmlns:r="http://schemas.openxmlformats.org/officeDocument/2006/relationships" xmlns:p="http://schemas.openxmlformats.org/presentationml/2006/main">
   <p:cSld>
     <p:spTree>
@@ -9708,6 +7258,3317 @@
 </p:sld>
 </file>
 
+<file path=ppt/slides/slide14.xml><?xml version="1.0" encoding="utf-8"?>
+<p:sld xmlns:a="http://schemas.openxmlformats.org/drawingml/2006/main" xmlns:r="http://schemas.openxmlformats.org/officeDocument/2006/relationships" xmlns:p="http://schemas.openxmlformats.org/presentationml/2006/main">
+  <p:cSld>
+    <p:spTree>
+      <p:nvGrpSpPr>
+        <p:cNvPr id="1" name=""/>
+        <p:cNvGrpSpPr/>
+        <p:nvPr/>
+      </p:nvGrpSpPr>
+      <p:grpSpPr>
+        <a:xfrm>
+          <a:off x="0" y="0"/>
+          <a:ext cx="0" cy="0"/>
+          <a:chOff x="0" y="0"/>
+          <a:chExt cx="0" cy="0"/>
+        </a:xfrm>
+      </p:grpSpPr>
+      <p:sp>
+        <p:nvSpPr>
+          <p:cNvPr id="2" name="Title 1">
+            <a:extLst>
+              <a:ext uri="{FF2B5EF4-FFF2-40B4-BE49-F238E27FC236}">
+                <a16:creationId xmlns:a16="http://schemas.microsoft.com/office/drawing/2014/main" id="{E2A8B833-A627-EF0D-80E8-9139A89545EF}"/>
+              </a:ext>
+            </a:extLst>
+          </p:cNvPr>
+          <p:cNvSpPr>
+            <a:spLocks noGrp="1"/>
+          </p:cNvSpPr>
+          <p:nvPr>
+            <p:ph type="title"/>
+          </p:nvPr>
+        </p:nvSpPr>
+        <p:spPr/>
+        <p:txBody>
+          <a:bodyPr/>
+          <a:lstStyle/>
+          <a:p>
+            <a:r>
+              <a:rPr lang="en-US" dirty="0"/>
+              <a:t>Validation</a:t>
+            </a:r>
+          </a:p>
+        </p:txBody>
+      </p:sp>
+      <p:sp>
+        <p:nvSpPr>
+          <p:cNvPr id="3" name="Picture Placeholder 2">
+            <a:extLst>
+              <a:ext uri="{FF2B5EF4-FFF2-40B4-BE49-F238E27FC236}">
+                <a16:creationId xmlns:a16="http://schemas.microsoft.com/office/drawing/2014/main" id="{02029C07-C905-3A77-FA6C-DA96735E126E}"/>
+              </a:ext>
+            </a:extLst>
+          </p:cNvPr>
+          <p:cNvSpPr>
+            <a:spLocks noGrp="1"/>
+          </p:cNvSpPr>
+          <p:nvPr>
+            <p:ph type="pic" idx="1"/>
+          </p:nvPr>
+        </p:nvSpPr>
+        <p:spPr/>
+        <p:txBody>
+          <a:bodyPr/>
+          <a:lstStyle/>
+          <a:p>
+            <a:endParaRPr lang="en-US"/>
+          </a:p>
+        </p:txBody>
+      </p:sp>
+      <p:sp>
+        <p:nvSpPr>
+          <p:cNvPr id="4" name="Text Placeholder 3">
+            <a:extLst>
+              <a:ext uri="{FF2B5EF4-FFF2-40B4-BE49-F238E27FC236}">
+                <a16:creationId xmlns:a16="http://schemas.microsoft.com/office/drawing/2014/main" id="{039F6216-FE26-A01B-8564-DFA27F4EA6F6}"/>
+              </a:ext>
+            </a:extLst>
+          </p:cNvPr>
+          <p:cNvSpPr>
+            <a:spLocks noGrp="1"/>
+          </p:cNvSpPr>
+          <p:nvPr>
+            <p:ph type="body" sz="half" idx="2"/>
+          </p:nvPr>
+        </p:nvSpPr>
+        <p:spPr/>
+        <p:txBody>
+          <a:bodyPr/>
+          <a:lstStyle/>
+          <a:p>
+            <a:r>
+              <a:rPr lang="en-US" dirty="0"/>
+              <a:t>For proper verification, I will use an analytic solver</a:t>
+            </a:r>
+          </a:p>
+        </p:txBody>
+      </p:sp>
+    </p:spTree>
+    <p:extLst>
+      <p:ext uri="{BB962C8B-B14F-4D97-AF65-F5344CB8AC3E}">
+        <p14:creationId xmlns:p14="http://schemas.microsoft.com/office/powerpoint/2010/main" val="2347936626"/>
+      </p:ext>
+    </p:extLst>
+  </p:cSld>
+  <p:clrMapOvr>
+    <a:masterClrMapping/>
+  </p:clrMapOvr>
+</p:sld>
+</file>
+
+<file path=ppt/slides/slide15.xml><?xml version="1.0" encoding="utf-8"?>
+<p:sld xmlns:a="http://schemas.openxmlformats.org/drawingml/2006/main" xmlns:r="http://schemas.openxmlformats.org/officeDocument/2006/relationships" xmlns:p="http://schemas.openxmlformats.org/presentationml/2006/main">
+  <p:cSld>
+    <p:spTree>
+      <p:nvGrpSpPr>
+        <p:cNvPr id="1" name=""/>
+        <p:cNvGrpSpPr/>
+        <p:nvPr/>
+      </p:nvGrpSpPr>
+      <p:grpSpPr>
+        <a:xfrm>
+          <a:off x="0" y="0"/>
+          <a:ext cx="0" cy="0"/>
+          <a:chOff x="0" y="0"/>
+          <a:chExt cx="0" cy="0"/>
+        </a:xfrm>
+      </p:grpSpPr>
+      <p:sp>
+        <p:nvSpPr>
+          <p:cNvPr id="2" name="Title 1">
+            <a:extLst>
+              <a:ext uri="{FF2B5EF4-FFF2-40B4-BE49-F238E27FC236}">
+                <a16:creationId xmlns:a16="http://schemas.microsoft.com/office/drawing/2014/main" id="{82892E64-2938-2E72-3704-0B2F214CA44C}"/>
+              </a:ext>
+            </a:extLst>
+          </p:cNvPr>
+          <p:cNvSpPr>
+            <a:spLocks noGrp="1"/>
+          </p:cNvSpPr>
+          <p:nvPr>
+            <p:ph type="title"/>
+          </p:nvPr>
+        </p:nvSpPr>
+        <p:spPr/>
+        <p:txBody>
+          <a:bodyPr/>
+          <a:lstStyle/>
+          <a:p>
+            <a:endParaRPr lang="en-US" dirty="0"/>
+          </a:p>
+        </p:txBody>
+      </p:sp>
+      <p:sp>
+        <p:nvSpPr>
+          <p:cNvPr id="3" name="Content Placeholder 2">
+            <a:extLst>
+              <a:ext uri="{FF2B5EF4-FFF2-40B4-BE49-F238E27FC236}">
+                <a16:creationId xmlns:a16="http://schemas.microsoft.com/office/drawing/2014/main" id="{807E48B6-D143-64CD-E99F-B83C8C90B860}"/>
+              </a:ext>
+            </a:extLst>
+          </p:cNvPr>
+          <p:cNvSpPr>
+            <a:spLocks noGrp="1"/>
+          </p:cNvSpPr>
+          <p:nvPr>
+            <p:ph idx="1"/>
+          </p:nvPr>
+        </p:nvSpPr>
+        <p:spPr/>
+        <p:txBody>
+          <a:bodyPr/>
+          <a:lstStyle/>
+          <a:p>
+            <a:endParaRPr lang="en-US"/>
+          </a:p>
+        </p:txBody>
+      </p:sp>
+    </p:spTree>
+    <p:extLst>
+      <p:ext uri="{BB962C8B-B14F-4D97-AF65-F5344CB8AC3E}">
+        <p14:creationId xmlns:p14="http://schemas.microsoft.com/office/powerpoint/2010/main" val="1310250"/>
+      </p:ext>
+    </p:extLst>
+  </p:cSld>
+  <p:clrMapOvr>
+    <a:masterClrMapping/>
+  </p:clrMapOvr>
+</p:sld>
+</file>
+
+<file path=ppt/slides/slide16.xml><?xml version="1.0" encoding="utf-8"?>
+<p:sld xmlns:a="http://schemas.openxmlformats.org/drawingml/2006/main" xmlns:r="http://schemas.openxmlformats.org/officeDocument/2006/relationships" xmlns:p="http://schemas.openxmlformats.org/presentationml/2006/main">
+  <p:cSld>
+    <p:spTree>
+      <p:nvGrpSpPr>
+        <p:cNvPr id="1" name=""/>
+        <p:cNvGrpSpPr/>
+        <p:nvPr/>
+      </p:nvGrpSpPr>
+      <p:grpSpPr>
+        <a:xfrm>
+          <a:off x="0" y="0"/>
+          <a:ext cx="0" cy="0"/>
+          <a:chOff x="0" y="0"/>
+          <a:chExt cx="0" cy="0"/>
+        </a:xfrm>
+      </p:grpSpPr>
+      <p:sp>
+        <p:nvSpPr>
+          <p:cNvPr id="2" name="Title 1">
+            <a:extLst>
+              <a:ext uri="{FF2B5EF4-FFF2-40B4-BE49-F238E27FC236}">
+                <a16:creationId xmlns:a16="http://schemas.microsoft.com/office/drawing/2014/main" id="{4DA35A90-343A-331E-F423-28D767CCB9E2}"/>
+              </a:ext>
+            </a:extLst>
+          </p:cNvPr>
+          <p:cNvSpPr>
+            <a:spLocks noGrp="1"/>
+          </p:cNvSpPr>
+          <p:nvPr>
+            <p:ph type="title"/>
+          </p:nvPr>
+        </p:nvSpPr>
+        <p:spPr/>
+        <p:txBody>
+          <a:bodyPr/>
+          <a:lstStyle/>
+          <a:p>
+            <a:r>
+              <a:rPr lang="en-US" dirty="0"/>
+              <a:t>Structure</a:t>
+            </a:r>
+          </a:p>
+        </p:txBody>
+      </p:sp>
+      <p:sp>
+        <p:nvSpPr>
+          <p:cNvPr id="3" name="Content Placeholder 2">
+            <a:extLst>
+              <a:ext uri="{FF2B5EF4-FFF2-40B4-BE49-F238E27FC236}">
+                <a16:creationId xmlns:a16="http://schemas.microsoft.com/office/drawing/2014/main" id="{F02F2B44-79DC-9756-4DB0-9D4EFB36E436}"/>
+              </a:ext>
+            </a:extLst>
+          </p:cNvPr>
+          <p:cNvSpPr>
+            <a:spLocks noGrp="1"/>
+          </p:cNvSpPr>
+          <p:nvPr>
+            <p:ph idx="1"/>
+          </p:nvPr>
+        </p:nvSpPr>
+        <p:spPr/>
+        <p:txBody>
+          <a:bodyPr/>
+          <a:lstStyle/>
+          <a:p>
+            <a:endParaRPr lang="en-US"/>
+          </a:p>
+        </p:txBody>
+      </p:sp>
+      <p:sp>
+        <p:nvSpPr>
+          <p:cNvPr id="4" name="Text Placeholder 3">
+            <a:extLst>
+              <a:ext uri="{FF2B5EF4-FFF2-40B4-BE49-F238E27FC236}">
+                <a16:creationId xmlns:a16="http://schemas.microsoft.com/office/drawing/2014/main" id="{BAA88F27-8EE8-783C-5CB9-DD3F9E6A24A7}"/>
+              </a:ext>
+            </a:extLst>
+          </p:cNvPr>
+          <p:cNvSpPr>
+            <a:spLocks noGrp="1"/>
+          </p:cNvSpPr>
+          <p:nvPr>
+            <p:ph type="body" sz="half" idx="2"/>
+          </p:nvPr>
+        </p:nvSpPr>
+        <p:spPr/>
+        <p:txBody>
+          <a:bodyPr/>
+          <a:lstStyle/>
+          <a:p>
+            <a:endParaRPr lang="en-US" dirty="0"/>
+          </a:p>
+        </p:txBody>
+      </p:sp>
+    </p:spTree>
+    <p:extLst>
+      <p:ext uri="{BB962C8B-B14F-4D97-AF65-F5344CB8AC3E}">
+        <p14:creationId xmlns:p14="http://schemas.microsoft.com/office/powerpoint/2010/main" val="829106148"/>
+      </p:ext>
+    </p:extLst>
+  </p:cSld>
+  <p:clrMapOvr>
+    <a:masterClrMapping/>
+  </p:clrMapOvr>
+</p:sld>
+</file>
+
+<file path=ppt/slides/slide2.xml><?xml version="1.0" encoding="utf-8"?>
+<p:sld xmlns:a="http://schemas.openxmlformats.org/drawingml/2006/main" xmlns:r="http://schemas.openxmlformats.org/officeDocument/2006/relationships" xmlns:p="http://schemas.openxmlformats.org/presentationml/2006/main">
+  <p:cSld>
+    <p:spTree>
+      <p:nvGrpSpPr>
+        <p:cNvPr id="1" name=""/>
+        <p:cNvGrpSpPr/>
+        <p:nvPr/>
+      </p:nvGrpSpPr>
+      <p:grpSpPr>
+        <a:xfrm>
+          <a:off x="0" y="0"/>
+          <a:ext cx="0" cy="0"/>
+          <a:chOff x="0" y="0"/>
+          <a:chExt cx="0" cy="0"/>
+        </a:xfrm>
+      </p:grpSpPr>
+      <p:sp>
+        <p:nvSpPr>
+          <p:cNvPr id="2" name="Title 1">
+            <a:extLst>
+              <a:ext uri="{FF2B5EF4-FFF2-40B4-BE49-F238E27FC236}">
+                <a16:creationId xmlns:a16="http://schemas.microsoft.com/office/drawing/2014/main" id="{7F51885E-7E45-1838-C5CE-F10B02BE33A0}"/>
+              </a:ext>
+            </a:extLst>
+          </p:cNvPr>
+          <p:cNvSpPr>
+            <a:spLocks noGrp="1"/>
+          </p:cNvSpPr>
+          <p:nvPr>
+            <p:ph type="title"/>
+          </p:nvPr>
+        </p:nvSpPr>
+        <p:spPr/>
+        <p:txBody>
+          <a:bodyPr/>
+          <a:lstStyle/>
+          <a:p>
+            <a:r>
+              <a:rPr lang="en-US" dirty="0"/>
+              <a:t>The Experimental Setup</a:t>
+            </a:r>
+          </a:p>
+        </p:txBody>
+      </p:sp>
+      <p:pic>
+        <p:nvPicPr>
+          <p:cNvPr id="7" name="Content Placeholder 6">
+            <a:extLst>
+              <a:ext uri="{FF2B5EF4-FFF2-40B4-BE49-F238E27FC236}">
+                <a16:creationId xmlns:a16="http://schemas.microsoft.com/office/drawing/2014/main" id="{7979D269-78B7-1CB2-DED0-0A47B66C7350}"/>
+              </a:ext>
+            </a:extLst>
+          </p:cNvPr>
+          <p:cNvPicPr>
+            <a:picLocks noGrp="1" noChangeAspect="1"/>
+          </p:cNvPicPr>
+          <p:nvPr>
+            <p:ph idx="1"/>
+          </p:nvPr>
+        </p:nvPicPr>
+        <p:blipFill>
+          <a:blip r:embed="rId2"/>
+          <a:stretch>
+            <a:fillRect/>
+          </a:stretch>
+        </p:blipFill>
+        <p:spPr>
+          <a:xfrm>
+            <a:off x="767246" y="2736970"/>
+            <a:ext cx="4010054" cy="2990872"/>
+          </a:xfrm>
+          <a:prstGeom prst="rect">
+            <a:avLst/>
+          </a:prstGeom>
+        </p:spPr>
+      </p:pic>
+      <p:pic>
+        <p:nvPicPr>
+          <p:cNvPr id="9" name="Picture 8">
+            <a:extLst>
+              <a:ext uri="{FF2B5EF4-FFF2-40B4-BE49-F238E27FC236}">
+                <a16:creationId xmlns:a16="http://schemas.microsoft.com/office/drawing/2014/main" id="{9AB91F91-4097-493D-65AB-5A166AFFB796}"/>
+              </a:ext>
+            </a:extLst>
+          </p:cNvPr>
+          <p:cNvPicPr>
+            <a:picLocks noChangeAspect="1"/>
+          </p:cNvPicPr>
+          <p:nvPr/>
+        </p:nvPicPr>
+        <p:blipFill>
+          <a:blip r:embed="rId3"/>
+          <a:stretch>
+            <a:fillRect/>
+          </a:stretch>
+        </p:blipFill>
+        <p:spPr>
+          <a:xfrm>
+            <a:off x="6416568" y="2979859"/>
+            <a:ext cx="3562376" cy="2505093"/>
+          </a:xfrm>
+          <a:prstGeom prst="rect">
+            <a:avLst/>
+          </a:prstGeom>
+        </p:spPr>
+      </p:pic>
+      <p:sp>
+        <p:nvSpPr>
+          <p:cNvPr id="10" name="Oval 9">
+            <a:extLst>
+              <a:ext uri="{FF2B5EF4-FFF2-40B4-BE49-F238E27FC236}">
+                <a16:creationId xmlns:a16="http://schemas.microsoft.com/office/drawing/2014/main" id="{A1E60410-D2D2-80E1-8BB0-68BD9497A657}"/>
+              </a:ext>
+            </a:extLst>
+          </p:cNvPr>
+          <p:cNvSpPr/>
+          <p:nvPr/>
+        </p:nvSpPr>
+        <p:spPr>
+          <a:xfrm>
+            <a:off x="2406649" y="4013199"/>
+            <a:ext cx="212725" cy="244475"/>
+          </a:xfrm>
+          <a:prstGeom prst="ellipse">
+            <a:avLst/>
+          </a:prstGeom>
+          <a:noFill/>
+          <a:ln w="9525" cap="flat" cmpd="sng" algn="ctr">
+            <a:solidFill>
+              <a:schemeClr val="accent1"/>
+            </a:solidFill>
+            <a:prstDash val="solid"/>
+            <a:round/>
+            <a:headEnd type="none" w="med" len="med"/>
+            <a:tailEnd type="none" w="med" len="med"/>
+          </a:ln>
+        </p:spPr>
+        <p:style>
+          <a:lnRef idx="0">
+            <a:scrgbClr r="0" g="0" b="0"/>
+          </a:lnRef>
+          <a:fillRef idx="0">
+            <a:scrgbClr r="0" g="0" b="0"/>
+          </a:fillRef>
+          <a:effectRef idx="0">
+            <a:scrgbClr r="0" g="0" b="0"/>
+          </a:effectRef>
+          <a:fontRef idx="minor">
+            <a:schemeClr val="accent1"/>
+          </a:fontRef>
+        </p:style>
+        <p:txBody>
+          <a:bodyPr rtlCol="0" anchor="ctr"/>
+          <a:lstStyle/>
+          <a:p>
+            <a:pPr algn="ctr"/>
+            <a:endParaRPr lang="en-US"/>
+          </a:p>
+        </p:txBody>
+      </p:sp>
+      <p:sp>
+        <p:nvSpPr>
+          <p:cNvPr id="11" name="TextBox 10">
+            <a:extLst>
+              <a:ext uri="{FF2B5EF4-FFF2-40B4-BE49-F238E27FC236}">
+                <a16:creationId xmlns:a16="http://schemas.microsoft.com/office/drawing/2014/main" id="{CE91E650-593F-1E09-81AB-496D0BD94930}"/>
+              </a:ext>
+            </a:extLst>
+          </p:cNvPr>
+          <p:cNvSpPr txBox="1"/>
+          <p:nvPr/>
+        </p:nvSpPr>
+        <p:spPr>
+          <a:xfrm>
+            <a:off x="4013199" y="2295525"/>
+            <a:ext cx="1454151" cy="338554"/>
+          </a:xfrm>
+          <a:prstGeom prst="rect">
+            <a:avLst/>
+          </a:prstGeom>
+          <a:noFill/>
+        </p:spPr>
+        <p:txBody>
+          <a:bodyPr wrap="square" rtlCol="0">
+            <a:spAutoFit/>
+          </a:bodyPr>
+          <a:lstStyle/>
+          <a:p>
+            <a:r>
+              <a:rPr lang="en-US" sz="1600" dirty="0"/>
+              <a:t>The source</a:t>
+            </a:r>
+          </a:p>
+        </p:txBody>
+      </p:sp>
+      <p:cxnSp>
+        <p:nvCxnSpPr>
+          <p:cNvPr id="15" name="Connector: Curved 14">
+            <a:extLst>
+              <a:ext uri="{FF2B5EF4-FFF2-40B4-BE49-F238E27FC236}">
+                <a16:creationId xmlns:a16="http://schemas.microsoft.com/office/drawing/2014/main" id="{80FD5669-7FE1-BA61-9F4F-F229D21DB396}"/>
+              </a:ext>
+            </a:extLst>
+          </p:cNvPr>
+          <p:cNvCxnSpPr>
+            <a:cxnSpLocks/>
+            <a:stCxn id="10" idx="6"/>
+            <a:endCxn id="11" idx="1"/>
+          </p:cNvCxnSpPr>
+          <p:nvPr/>
+        </p:nvCxnSpPr>
+        <p:spPr>
+          <a:xfrm flipV="1">
+            <a:off x="2619374" y="2464802"/>
+            <a:ext cx="1393825" cy="1670635"/>
+          </a:xfrm>
+          <a:prstGeom prst="curvedConnector3">
+            <a:avLst/>
+          </a:prstGeom>
+          <a:ln>
+            <a:tailEnd type="triangle"/>
+          </a:ln>
+        </p:spPr>
+        <p:style>
+          <a:lnRef idx="1">
+            <a:schemeClr val="accent1"/>
+          </a:lnRef>
+          <a:fillRef idx="0">
+            <a:schemeClr val="accent1"/>
+          </a:fillRef>
+          <a:effectRef idx="0">
+            <a:schemeClr val="accent1"/>
+          </a:effectRef>
+          <a:fontRef idx="minor">
+            <a:schemeClr val="tx1"/>
+          </a:fontRef>
+        </p:style>
+      </p:cxnSp>
+      <p:sp>
+        <p:nvSpPr>
+          <p:cNvPr id="17" name="TextBox 16">
+            <a:extLst>
+              <a:ext uri="{FF2B5EF4-FFF2-40B4-BE49-F238E27FC236}">
+                <a16:creationId xmlns:a16="http://schemas.microsoft.com/office/drawing/2014/main" id="{344CB1B2-1D9D-7F03-DCF9-43633DE715E9}"/>
+              </a:ext>
+            </a:extLst>
+          </p:cNvPr>
+          <p:cNvSpPr txBox="1"/>
+          <p:nvPr/>
+        </p:nvSpPr>
+        <p:spPr>
+          <a:xfrm>
+            <a:off x="4743449" y="4197350"/>
+            <a:ext cx="1463568" cy="584775"/>
+          </a:xfrm>
+          <a:prstGeom prst="rect">
+            <a:avLst/>
+          </a:prstGeom>
+          <a:noFill/>
+        </p:spPr>
+        <p:txBody>
+          <a:bodyPr wrap="square" rtlCol="0">
+            <a:spAutoFit/>
+          </a:bodyPr>
+          <a:lstStyle/>
+          <a:p>
+            <a:r>
+              <a:rPr lang="en-US" sz="1600" dirty="0"/>
+              <a:t>Domain Boundary</a:t>
+            </a:r>
+          </a:p>
+        </p:txBody>
+      </p:sp>
+      <p:cxnSp>
+        <p:nvCxnSpPr>
+          <p:cNvPr id="19" name="Connector: Curved 18">
+            <a:extLst>
+              <a:ext uri="{FF2B5EF4-FFF2-40B4-BE49-F238E27FC236}">
+                <a16:creationId xmlns:a16="http://schemas.microsoft.com/office/drawing/2014/main" id="{B28DB5EB-C3BF-1505-4C8D-69869071366C}"/>
+              </a:ext>
+            </a:extLst>
+          </p:cNvPr>
+          <p:cNvCxnSpPr>
+            <a:cxnSpLocks/>
+            <a:endCxn id="17" idx="1"/>
+          </p:cNvCxnSpPr>
+          <p:nvPr/>
+        </p:nvCxnSpPr>
+        <p:spPr>
+          <a:xfrm>
+            <a:off x="4378325" y="4314825"/>
+            <a:ext cx="365124" cy="174913"/>
+          </a:xfrm>
+          <a:prstGeom prst="curvedConnector3">
+            <a:avLst/>
+          </a:prstGeom>
+          <a:ln>
+            <a:tailEnd type="triangle"/>
+          </a:ln>
+        </p:spPr>
+        <p:style>
+          <a:lnRef idx="1">
+            <a:schemeClr val="accent3"/>
+          </a:lnRef>
+          <a:fillRef idx="0">
+            <a:schemeClr val="accent3"/>
+          </a:fillRef>
+          <a:effectRef idx="0">
+            <a:schemeClr val="accent3"/>
+          </a:effectRef>
+          <a:fontRef idx="minor">
+            <a:schemeClr val="tx1"/>
+          </a:fontRef>
+        </p:style>
+      </p:cxnSp>
+      <p:sp>
+        <p:nvSpPr>
+          <p:cNvPr id="22" name="Oval 21">
+            <a:extLst>
+              <a:ext uri="{FF2B5EF4-FFF2-40B4-BE49-F238E27FC236}">
+                <a16:creationId xmlns:a16="http://schemas.microsoft.com/office/drawing/2014/main" id="{34597057-9281-2B75-01EC-8ACEAC1FCDEC}"/>
+              </a:ext>
+            </a:extLst>
+          </p:cNvPr>
+          <p:cNvSpPr/>
+          <p:nvPr/>
+        </p:nvSpPr>
+        <p:spPr>
+          <a:xfrm>
+            <a:off x="7294077" y="3484562"/>
+            <a:ext cx="1425575" cy="1425575"/>
+          </a:xfrm>
+          <a:prstGeom prst="ellipse">
+            <a:avLst/>
+          </a:prstGeom>
+          <a:noFill/>
+          <a:ln w="9525" cap="flat" cmpd="sng" algn="ctr">
+            <a:solidFill>
+              <a:schemeClr val="accent6"/>
+            </a:solidFill>
+            <a:prstDash val="solid"/>
+            <a:round/>
+            <a:headEnd type="none" w="med" len="med"/>
+            <a:tailEnd type="none" w="med" len="med"/>
+          </a:ln>
+        </p:spPr>
+        <p:style>
+          <a:lnRef idx="0">
+            <a:scrgbClr r="0" g="0" b="0"/>
+          </a:lnRef>
+          <a:fillRef idx="0">
+            <a:scrgbClr r="0" g="0" b="0"/>
+          </a:fillRef>
+          <a:effectRef idx="0">
+            <a:scrgbClr r="0" g="0" b="0"/>
+          </a:effectRef>
+          <a:fontRef idx="minor">
+            <a:schemeClr val="accent6"/>
+          </a:fontRef>
+        </p:style>
+        <p:txBody>
+          <a:bodyPr rtlCol="0" anchor="ctr"/>
+          <a:lstStyle/>
+          <a:p>
+            <a:pPr algn="ctr"/>
+            <a:endParaRPr lang="en-US"/>
+          </a:p>
+        </p:txBody>
+      </p:sp>
+      <p:sp>
+        <p:nvSpPr>
+          <p:cNvPr id="24" name="Oval 23">
+            <a:extLst>
+              <a:ext uri="{FF2B5EF4-FFF2-40B4-BE49-F238E27FC236}">
+                <a16:creationId xmlns:a16="http://schemas.microsoft.com/office/drawing/2014/main" id="{680CB751-AAB9-858F-647A-4FA0D7604A12}"/>
+              </a:ext>
+            </a:extLst>
+          </p:cNvPr>
+          <p:cNvSpPr/>
+          <p:nvPr/>
+        </p:nvSpPr>
+        <p:spPr>
+          <a:xfrm>
+            <a:off x="7322926" y="3513411"/>
+            <a:ext cx="1367875" cy="1367875"/>
+          </a:xfrm>
+          <a:prstGeom prst="ellipse">
+            <a:avLst/>
+          </a:prstGeom>
+          <a:noFill/>
+          <a:ln w="9525" cap="flat" cmpd="sng" algn="ctr">
+            <a:solidFill>
+              <a:schemeClr val="accent6"/>
+            </a:solidFill>
+            <a:prstDash val="solid"/>
+            <a:round/>
+            <a:headEnd type="none" w="med" len="med"/>
+            <a:tailEnd type="none" w="med" len="med"/>
+          </a:ln>
+        </p:spPr>
+        <p:style>
+          <a:lnRef idx="0">
+            <a:scrgbClr r="0" g="0" b="0"/>
+          </a:lnRef>
+          <a:fillRef idx="0">
+            <a:scrgbClr r="0" g="0" b="0"/>
+          </a:fillRef>
+          <a:effectRef idx="0">
+            <a:scrgbClr r="0" g="0" b="0"/>
+          </a:effectRef>
+          <a:fontRef idx="minor">
+            <a:schemeClr val="accent6"/>
+          </a:fontRef>
+        </p:style>
+        <p:txBody>
+          <a:bodyPr rtlCol="0" anchor="ctr"/>
+          <a:lstStyle/>
+          <a:p>
+            <a:pPr algn="ctr"/>
+            <a:endParaRPr lang="en-US" dirty="0"/>
+          </a:p>
+        </p:txBody>
+      </p:sp>
+      <p:sp>
+        <p:nvSpPr>
+          <p:cNvPr id="25" name="TextBox 24">
+            <a:extLst>
+              <a:ext uri="{FF2B5EF4-FFF2-40B4-BE49-F238E27FC236}">
+                <a16:creationId xmlns:a16="http://schemas.microsoft.com/office/drawing/2014/main" id="{028882FF-07FF-6165-7054-61A776DFEDB0}"/>
+              </a:ext>
+            </a:extLst>
+          </p:cNvPr>
+          <p:cNvSpPr txBox="1"/>
+          <p:nvPr/>
+        </p:nvSpPr>
+        <p:spPr>
+          <a:xfrm>
+            <a:off x="7896224" y="2531528"/>
+            <a:ext cx="2311402" cy="338554"/>
+          </a:xfrm>
+          <a:prstGeom prst="rect">
+            <a:avLst/>
+          </a:prstGeom>
+          <a:noFill/>
+        </p:spPr>
+        <p:txBody>
+          <a:bodyPr wrap="square" rtlCol="0">
+            <a:spAutoFit/>
+          </a:bodyPr>
+          <a:lstStyle/>
+          <a:p>
+            <a:r>
+              <a:rPr lang="en-US" sz="1600" dirty="0"/>
+              <a:t>Zone(1) of interest</a:t>
+            </a:r>
+          </a:p>
+        </p:txBody>
+      </p:sp>
+      <p:cxnSp>
+        <p:nvCxnSpPr>
+          <p:cNvPr id="27" name="Straight Connector 26">
+            <a:extLst>
+              <a:ext uri="{FF2B5EF4-FFF2-40B4-BE49-F238E27FC236}">
+                <a16:creationId xmlns:a16="http://schemas.microsoft.com/office/drawing/2014/main" id="{A62EA7DA-8570-1224-F1F7-B0127DC73EF8}"/>
+              </a:ext>
+            </a:extLst>
+          </p:cNvPr>
+          <p:cNvCxnSpPr/>
+          <p:nvPr/>
+        </p:nvCxnSpPr>
+        <p:spPr>
+          <a:xfrm flipV="1">
+            <a:off x="8197756" y="3984625"/>
+            <a:ext cx="1270095" cy="212723"/>
+          </a:xfrm>
+          <a:prstGeom prst="line">
+            <a:avLst/>
+          </a:prstGeom>
+        </p:spPr>
+        <p:style>
+          <a:lnRef idx="1">
+            <a:schemeClr val="accent1"/>
+          </a:lnRef>
+          <a:fillRef idx="0">
+            <a:schemeClr val="accent1"/>
+          </a:fillRef>
+          <a:effectRef idx="0">
+            <a:schemeClr val="accent1"/>
+          </a:effectRef>
+          <a:fontRef idx="minor">
+            <a:schemeClr val="tx1"/>
+          </a:fontRef>
+        </p:style>
+      </p:cxnSp>
+      <p:cxnSp>
+        <p:nvCxnSpPr>
+          <p:cNvPr id="28" name="Straight Connector 27">
+            <a:extLst>
+              <a:ext uri="{FF2B5EF4-FFF2-40B4-BE49-F238E27FC236}">
+                <a16:creationId xmlns:a16="http://schemas.microsoft.com/office/drawing/2014/main" id="{F5A34D47-6D1C-904F-88DE-F7CB0E4DF642}"/>
+              </a:ext>
+            </a:extLst>
+          </p:cNvPr>
+          <p:cNvCxnSpPr>
+            <a:cxnSpLocks/>
+          </p:cNvCxnSpPr>
+          <p:nvPr/>
+        </p:nvCxnSpPr>
+        <p:spPr>
+          <a:xfrm>
+            <a:off x="8197755" y="4220232"/>
+            <a:ext cx="1270095" cy="212723"/>
+          </a:xfrm>
+          <a:prstGeom prst="line">
+            <a:avLst/>
+          </a:prstGeom>
+        </p:spPr>
+        <p:style>
+          <a:lnRef idx="1">
+            <a:schemeClr val="accent1"/>
+          </a:lnRef>
+          <a:fillRef idx="0">
+            <a:schemeClr val="accent1"/>
+          </a:fillRef>
+          <a:effectRef idx="0">
+            <a:schemeClr val="accent1"/>
+          </a:effectRef>
+          <a:fontRef idx="minor">
+            <a:schemeClr val="tx1"/>
+          </a:fontRef>
+        </p:style>
+      </p:cxnSp>
+      <p:cxnSp>
+        <p:nvCxnSpPr>
+          <p:cNvPr id="30" name="Straight Connector 29">
+            <a:extLst>
+              <a:ext uri="{FF2B5EF4-FFF2-40B4-BE49-F238E27FC236}">
+                <a16:creationId xmlns:a16="http://schemas.microsoft.com/office/drawing/2014/main" id="{F8164D63-2122-6D15-236F-8CBCB67ABA74}"/>
+              </a:ext>
+            </a:extLst>
+          </p:cNvPr>
+          <p:cNvCxnSpPr/>
+          <p:nvPr/>
+        </p:nvCxnSpPr>
+        <p:spPr>
+          <a:xfrm>
+            <a:off x="9467850" y="3984625"/>
+            <a:ext cx="0" cy="448330"/>
+          </a:xfrm>
+          <a:prstGeom prst="line">
+            <a:avLst/>
+          </a:prstGeom>
+        </p:spPr>
+        <p:style>
+          <a:lnRef idx="1">
+            <a:schemeClr val="accent1"/>
+          </a:lnRef>
+          <a:fillRef idx="0">
+            <a:schemeClr val="accent1"/>
+          </a:fillRef>
+          <a:effectRef idx="0">
+            <a:schemeClr val="accent1"/>
+          </a:effectRef>
+          <a:fontRef idx="minor">
+            <a:schemeClr val="tx1"/>
+          </a:fontRef>
+        </p:style>
+      </p:cxnSp>
+      <p:sp>
+        <p:nvSpPr>
+          <p:cNvPr id="31" name="TextBox 30">
+            <a:extLst>
+              <a:ext uri="{FF2B5EF4-FFF2-40B4-BE49-F238E27FC236}">
+                <a16:creationId xmlns:a16="http://schemas.microsoft.com/office/drawing/2014/main" id="{36340BF6-8631-0EEE-55D3-9397A3FE36EE}"/>
+              </a:ext>
+            </a:extLst>
+          </p:cNvPr>
+          <p:cNvSpPr txBox="1"/>
+          <p:nvPr/>
+        </p:nvSpPr>
+        <p:spPr>
+          <a:xfrm>
+            <a:off x="10216048" y="4740860"/>
+            <a:ext cx="2130520" cy="338554"/>
+          </a:xfrm>
+          <a:prstGeom prst="rect">
+            <a:avLst/>
+          </a:prstGeom>
+          <a:noFill/>
+        </p:spPr>
+        <p:txBody>
+          <a:bodyPr wrap="square" rtlCol="0">
+            <a:spAutoFit/>
+          </a:bodyPr>
+          <a:lstStyle/>
+          <a:p>
+            <a:r>
+              <a:rPr lang="en-US" sz="1600" dirty="0"/>
+              <a:t>Zone(2) of interest</a:t>
+            </a:r>
+          </a:p>
+        </p:txBody>
+      </p:sp>
+      <p:cxnSp>
+        <p:nvCxnSpPr>
+          <p:cNvPr id="33" name="Connector: Curved 32">
+            <a:extLst>
+              <a:ext uri="{FF2B5EF4-FFF2-40B4-BE49-F238E27FC236}">
+                <a16:creationId xmlns:a16="http://schemas.microsoft.com/office/drawing/2014/main" id="{4987ABB5-9CA5-8241-A4DD-D8F94585A0BA}"/>
+              </a:ext>
+            </a:extLst>
+          </p:cNvPr>
+          <p:cNvCxnSpPr>
+            <a:cxnSpLocks/>
+            <a:endCxn id="25" idx="1"/>
+          </p:cNvCxnSpPr>
+          <p:nvPr/>
+        </p:nvCxnSpPr>
+        <p:spPr>
+          <a:xfrm rot="5400000" flipH="1" flipV="1">
+            <a:off x="7193989" y="3012516"/>
+            <a:ext cx="1013946" cy="390524"/>
+          </a:xfrm>
+          <a:prstGeom prst="curvedConnector2">
+            <a:avLst/>
+          </a:prstGeom>
+          <a:ln>
+            <a:tailEnd type="triangle"/>
+          </a:ln>
+        </p:spPr>
+        <p:style>
+          <a:lnRef idx="1">
+            <a:schemeClr val="accent6"/>
+          </a:lnRef>
+          <a:fillRef idx="0">
+            <a:schemeClr val="accent6"/>
+          </a:fillRef>
+          <a:effectRef idx="0">
+            <a:schemeClr val="accent6"/>
+          </a:effectRef>
+          <a:fontRef idx="minor">
+            <a:schemeClr val="tx1"/>
+          </a:fontRef>
+        </p:style>
+      </p:cxnSp>
+      <p:cxnSp>
+        <p:nvCxnSpPr>
+          <p:cNvPr id="36" name="Connector: Curved 35">
+            <a:extLst>
+              <a:ext uri="{FF2B5EF4-FFF2-40B4-BE49-F238E27FC236}">
+                <a16:creationId xmlns:a16="http://schemas.microsoft.com/office/drawing/2014/main" id="{C105E3A2-5B12-362D-2BBD-41ADEDE4416A}"/>
+              </a:ext>
+            </a:extLst>
+          </p:cNvPr>
+          <p:cNvCxnSpPr>
+            <a:cxnSpLocks/>
+            <a:endCxn id="31" idx="0"/>
+          </p:cNvCxnSpPr>
+          <p:nvPr/>
+        </p:nvCxnSpPr>
+        <p:spPr>
+          <a:xfrm>
+            <a:off x="9239250" y="4283075"/>
+            <a:ext cx="2042058" cy="457785"/>
+          </a:xfrm>
+          <a:prstGeom prst="curvedConnector2">
+            <a:avLst/>
+          </a:prstGeom>
+          <a:ln>
+            <a:tailEnd type="triangle"/>
+          </a:ln>
+        </p:spPr>
+        <p:style>
+          <a:lnRef idx="1">
+            <a:schemeClr val="accent1"/>
+          </a:lnRef>
+          <a:fillRef idx="0">
+            <a:schemeClr val="accent1"/>
+          </a:fillRef>
+          <a:effectRef idx="0">
+            <a:schemeClr val="accent1"/>
+          </a:effectRef>
+          <a:fontRef idx="minor">
+            <a:schemeClr val="tx1"/>
+          </a:fontRef>
+        </p:style>
+      </p:cxnSp>
+      <p:sp>
+        <p:nvSpPr>
+          <p:cNvPr id="39" name="TextBox 38">
+            <a:extLst>
+              <a:ext uri="{FF2B5EF4-FFF2-40B4-BE49-F238E27FC236}">
+                <a16:creationId xmlns:a16="http://schemas.microsoft.com/office/drawing/2014/main" id="{7FA885E1-9B3B-36F2-C04E-BF29C9BB9DF5}"/>
+              </a:ext>
+            </a:extLst>
+          </p:cNvPr>
+          <p:cNvSpPr txBox="1"/>
+          <p:nvPr/>
+        </p:nvSpPr>
+        <p:spPr>
+          <a:xfrm>
+            <a:off x="647922" y="5792896"/>
+            <a:ext cx="4248702" cy="369332"/>
+          </a:xfrm>
+          <a:prstGeom prst="rect">
+            <a:avLst/>
+          </a:prstGeom>
+          <a:noFill/>
+        </p:spPr>
+        <p:txBody>
+          <a:bodyPr wrap="square" rtlCol="0">
+            <a:spAutoFit/>
+          </a:bodyPr>
+          <a:lstStyle/>
+          <a:p>
+            <a:r>
+              <a:rPr lang="en-US" dirty="0"/>
+              <a:t>3D image of the experimental setup</a:t>
+            </a:r>
+          </a:p>
+        </p:txBody>
+      </p:sp>
+      <p:sp>
+        <p:nvSpPr>
+          <p:cNvPr id="41" name="TextBox 40">
+            <a:extLst>
+              <a:ext uri="{FF2B5EF4-FFF2-40B4-BE49-F238E27FC236}">
+                <a16:creationId xmlns:a16="http://schemas.microsoft.com/office/drawing/2014/main" id="{84F7F0FB-27E7-7596-EC56-19CA6574F7A4}"/>
+              </a:ext>
+            </a:extLst>
+          </p:cNvPr>
+          <p:cNvSpPr txBox="1"/>
+          <p:nvPr/>
+        </p:nvSpPr>
+        <p:spPr>
+          <a:xfrm>
+            <a:off x="6073404" y="5551505"/>
+            <a:ext cx="4248702" cy="369332"/>
+          </a:xfrm>
+          <a:prstGeom prst="rect">
+            <a:avLst/>
+          </a:prstGeom>
+          <a:noFill/>
+        </p:spPr>
+        <p:txBody>
+          <a:bodyPr wrap="square" rtlCol="0">
+            <a:spAutoFit/>
+          </a:bodyPr>
+          <a:lstStyle/>
+          <a:p>
+            <a:r>
+              <a:rPr lang="en-US" dirty="0"/>
+              <a:t>X-Z plane of the experimental setup</a:t>
+            </a:r>
+          </a:p>
+        </p:txBody>
+      </p:sp>
+    </p:spTree>
+    <p:extLst>
+      <p:ext uri="{BB962C8B-B14F-4D97-AF65-F5344CB8AC3E}">
+        <p14:creationId xmlns:p14="http://schemas.microsoft.com/office/powerpoint/2010/main" val="2867557785"/>
+      </p:ext>
+    </p:extLst>
+  </p:cSld>
+  <p:clrMapOvr>
+    <a:masterClrMapping/>
+  </p:clrMapOvr>
+</p:sld>
+</file>
+
+<file path=ppt/slides/slide3.xml><?xml version="1.0" encoding="utf-8"?>
+<p:sld xmlns:a="http://schemas.openxmlformats.org/drawingml/2006/main" xmlns:r="http://schemas.openxmlformats.org/officeDocument/2006/relationships" xmlns:p="http://schemas.openxmlformats.org/presentationml/2006/main">
+  <p:cSld>
+    <p:spTree>
+      <p:nvGrpSpPr>
+        <p:cNvPr id="1" name=""/>
+        <p:cNvGrpSpPr/>
+        <p:nvPr/>
+      </p:nvGrpSpPr>
+      <p:grpSpPr>
+        <a:xfrm>
+          <a:off x="0" y="0"/>
+          <a:ext cx="0" cy="0"/>
+          <a:chOff x="0" y="0"/>
+          <a:chExt cx="0" cy="0"/>
+        </a:xfrm>
+      </p:grpSpPr>
+      <p:sp>
+        <p:nvSpPr>
+          <p:cNvPr id="2" name="Title 1">
+            <a:extLst>
+              <a:ext uri="{FF2B5EF4-FFF2-40B4-BE49-F238E27FC236}">
+                <a16:creationId xmlns:a16="http://schemas.microsoft.com/office/drawing/2014/main" id="{F23843A8-74B2-78E6-FCA9-17B2EACE42AA}"/>
+              </a:ext>
+            </a:extLst>
+          </p:cNvPr>
+          <p:cNvSpPr>
+            <a:spLocks noGrp="1"/>
+          </p:cNvSpPr>
+          <p:nvPr>
+            <p:ph type="title"/>
+          </p:nvPr>
+        </p:nvSpPr>
+        <p:spPr/>
+        <p:txBody>
+          <a:bodyPr/>
+          <a:lstStyle/>
+          <a:p>
+            <a:r>
+              <a:rPr lang="en-US" dirty="0"/>
+              <a:t>Simulation Innerworkings</a:t>
+            </a:r>
+          </a:p>
+        </p:txBody>
+      </p:sp>
+      <p:sp>
+        <p:nvSpPr>
+          <p:cNvPr id="3" name="Content Placeholder 2">
+            <a:extLst>
+              <a:ext uri="{FF2B5EF4-FFF2-40B4-BE49-F238E27FC236}">
+                <a16:creationId xmlns:a16="http://schemas.microsoft.com/office/drawing/2014/main" id="{1013BAC1-1CF2-92D1-B9E7-C497CD6672E4}"/>
+              </a:ext>
+            </a:extLst>
+          </p:cNvPr>
+          <p:cNvSpPr>
+            <a:spLocks noGrp="1"/>
+          </p:cNvSpPr>
+          <p:nvPr>
+            <p:ph idx="1"/>
+          </p:nvPr>
+        </p:nvSpPr>
+        <p:spPr/>
+        <p:txBody>
+          <a:bodyPr>
+            <a:normAutofit fontScale="85000" lnSpcReduction="10000"/>
+          </a:bodyPr>
+          <a:lstStyle/>
+          <a:p>
+            <a:pPr marL="457200" indent="-457200">
+              <a:buFont typeface="+mj-lt"/>
+              <a:buAutoNum type="arabicPeriod"/>
+            </a:pPr>
+            <a:r>
+              <a:rPr lang="en-US" dirty="0"/>
+              <a:t>Photon launches with a packet weight 1 and direction v</a:t>
+            </a:r>
+          </a:p>
+          <a:p>
+            <a:pPr marL="457200" indent="-457200">
+              <a:buFont typeface="+mj-lt"/>
+              <a:buAutoNum type="arabicPeriod"/>
+            </a:pPr>
+            <a:r>
+              <a:rPr lang="en-US" dirty="0"/>
+              <a:t>Based on an exponential distribution based on the scattering coefficient (</a:t>
+            </a:r>
+            <a:r>
+              <a:rPr lang="el-GR" dirty="0">
+                <a:latin typeface="Cambria Math" panose="02040503050406030204" pitchFamily="18" charset="0"/>
+                <a:ea typeface="Cambria Math" panose="02040503050406030204" pitchFamily="18" charset="0"/>
+              </a:rPr>
+              <a:t>μ</a:t>
+            </a:r>
+            <a:r>
+              <a:rPr lang="en-US" baseline="-25000" dirty="0">
+                <a:latin typeface="Cambria Math" panose="02040503050406030204" pitchFamily="18" charset="0"/>
+                <a:ea typeface="Cambria Math" panose="02040503050406030204" pitchFamily="18" charset="0"/>
+              </a:rPr>
+              <a:t>s</a:t>
+            </a:r>
+            <a:r>
+              <a:rPr lang="en-US" dirty="0">
+                <a:latin typeface="Cambria Math" panose="02040503050406030204" pitchFamily="18" charset="0"/>
+                <a:ea typeface="Cambria Math" panose="02040503050406030204" pitchFamily="18" charset="0"/>
+              </a:rPr>
+              <a:t>) of the current voxel, it  decides how many voxels to travel in v direction.</a:t>
+            </a:r>
+          </a:p>
+          <a:p>
+            <a:pPr marL="457200" indent="-457200">
+              <a:buFont typeface="+mj-lt"/>
+              <a:buAutoNum type="arabicPeriod"/>
+            </a:pPr>
+            <a:r>
+              <a:rPr lang="en-US" dirty="0">
+                <a:latin typeface="Cambria Math" panose="02040503050406030204" pitchFamily="18" charset="0"/>
+                <a:ea typeface="Cambria Math" panose="02040503050406030204" pitchFamily="18" charset="0"/>
+              </a:rPr>
+              <a:t>Steps 1 voxel in v direction and looses packet weight based on the absorption coefficient </a:t>
+            </a:r>
+            <a:r>
+              <a:rPr lang="en-US" dirty="0"/>
+              <a:t>(</a:t>
+            </a:r>
+            <a:r>
+              <a:rPr lang="el-GR" dirty="0">
+                <a:latin typeface="Cambria Math" panose="02040503050406030204" pitchFamily="18" charset="0"/>
+                <a:ea typeface="Cambria Math" panose="02040503050406030204" pitchFamily="18" charset="0"/>
+              </a:rPr>
+              <a:t>μ</a:t>
+            </a:r>
+            <a:r>
+              <a:rPr lang="en-US" baseline="-25000" dirty="0">
+                <a:latin typeface="Cambria Math" panose="02040503050406030204" pitchFamily="18" charset="0"/>
+                <a:ea typeface="Cambria Math" panose="02040503050406030204" pitchFamily="18" charset="0"/>
+              </a:rPr>
+              <a:t>a</a:t>
+            </a:r>
+            <a:r>
+              <a:rPr lang="en-US" dirty="0">
+                <a:latin typeface="Cambria Math" panose="02040503050406030204" pitchFamily="18" charset="0"/>
+                <a:ea typeface="Cambria Math" panose="02040503050406030204" pitchFamily="18" charset="0"/>
+              </a:rPr>
+              <a:t>) </a:t>
+            </a:r>
+          </a:p>
+          <a:p>
+            <a:pPr marL="457200" indent="-457200">
+              <a:buFont typeface="+mj-lt"/>
+              <a:buAutoNum type="arabicPeriod"/>
+            </a:pPr>
+            <a:r>
+              <a:rPr lang="en-US" dirty="0">
+                <a:latin typeface="Cambria Math" panose="02040503050406030204" pitchFamily="18" charset="0"/>
+                <a:ea typeface="Cambria Math" panose="02040503050406030204" pitchFamily="18" charset="0"/>
+              </a:rPr>
+              <a:t>The packet weight is added to its current voxel’s raw probability,</a:t>
+            </a:r>
+          </a:p>
+          <a:p>
+            <a:pPr marL="457200" indent="-457200">
+              <a:buFont typeface="+mj-lt"/>
+              <a:buAutoNum type="arabicPeriod"/>
+            </a:pPr>
+            <a:r>
+              <a:rPr lang="en-US" dirty="0">
+                <a:latin typeface="Cambria Math" panose="02040503050406030204" pitchFamily="18" charset="0"/>
+                <a:ea typeface="Cambria Math" panose="02040503050406030204" pitchFamily="18" charset="0"/>
+              </a:rPr>
+              <a:t>The previous 2 steps are repeated until the package reaches the next scattering voxel decided in the second step</a:t>
+            </a:r>
+          </a:p>
+          <a:p>
+            <a:pPr marL="457200" indent="-457200">
+              <a:buFont typeface="+mj-lt"/>
+              <a:buAutoNum type="arabicPeriod"/>
+            </a:pPr>
+            <a:r>
+              <a:rPr lang="en-US" dirty="0">
+                <a:latin typeface="Cambria Math" panose="02040503050406030204" pitchFamily="18" charset="0"/>
+                <a:ea typeface="Cambria Math" panose="02040503050406030204" pitchFamily="18" charset="0"/>
+              </a:rPr>
+              <a:t>Calculate a new scattering direction vector: the azimuth and zenith scattering angles are computed, respectively, by a random number uniformly distributed in [0,2pi] and a random number between [0,pi) following an assigned phase function.</a:t>
+            </a:r>
+          </a:p>
+          <a:p>
+            <a:pPr marL="457200" indent="-457200">
+              <a:buFont typeface="+mj-lt"/>
+              <a:buAutoNum type="arabicPeriod"/>
+            </a:pPr>
+            <a:r>
+              <a:rPr lang="en-US" dirty="0">
+                <a:latin typeface="Cambria Math" panose="02040503050406030204" pitchFamily="18" charset="0"/>
+                <a:ea typeface="Cambria Math" panose="02040503050406030204" pitchFamily="18" charset="0"/>
+              </a:rPr>
+              <a:t>Repeat from step 2 until the max time is reached or the photon exits the domain</a:t>
+            </a:r>
+          </a:p>
+          <a:p>
+            <a:pPr marL="457200" indent="-457200">
+              <a:buFont typeface="+mj-lt"/>
+              <a:buAutoNum type="arabicPeriod"/>
+            </a:pPr>
+            <a:r>
+              <a:rPr lang="en-US" dirty="0">
+                <a:latin typeface="Cambria Math" panose="02040503050406030204" pitchFamily="18" charset="0"/>
+                <a:ea typeface="Cambria Math" panose="02040503050406030204" pitchFamily="18" charset="0"/>
+              </a:rPr>
+              <a:t>Repeat all steps for next photon</a:t>
+            </a:r>
+          </a:p>
+          <a:p>
+            <a:endParaRPr lang="en-US" dirty="0"/>
+          </a:p>
+        </p:txBody>
+      </p:sp>
+    </p:spTree>
+    <p:extLst>
+      <p:ext uri="{BB962C8B-B14F-4D97-AF65-F5344CB8AC3E}">
+        <p14:creationId xmlns:p14="http://schemas.microsoft.com/office/powerpoint/2010/main" val="309444661"/>
+      </p:ext>
+    </p:extLst>
+  </p:cSld>
+  <p:clrMapOvr>
+    <a:masterClrMapping/>
+  </p:clrMapOvr>
+</p:sld>
+</file>
+
+<file path=ppt/slides/slide4.xml><?xml version="1.0" encoding="utf-8"?>
+<p:sld xmlns:a="http://schemas.openxmlformats.org/drawingml/2006/main" xmlns:r="http://schemas.openxmlformats.org/officeDocument/2006/relationships" xmlns:p="http://schemas.openxmlformats.org/presentationml/2006/main">
+  <p:cSld>
+    <p:spTree>
+      <p:nvGrpSpPr>
+        <p:cNvPr id="1" name=""/>
+        <p:cNvGrpSpPr/>
+        <p:nvPr/>
+      </p:nvGrpSpPr>
+      <p:grpSpPr>
+        <a:xfrm>
+          <a:off x="0" y="0"/>
+          <a:ext cx="0" cy="0"/>
+          <a:chOff x="0" y="0"/>
+          <a:chExt cx="0" cy="0"/>
+        </a:xfrm>
+      </p:grpSpPr>
+      <p:sp>
+        <p:nvSpPr>
+          <p:cNvPr id="45" name="Rectangle 44">
+            <a:extLst>
+              <a:ext uri="{FF2B5EF4-FFF2-40B4-BE49-F238E27FC236}">
+                <a16:creationId xmlns:a16="http://schemas.microsoft.com/office/drawing/2014/main" id="{E5E6297A-D824-851D-1682-E7DB224153CD}"/>
+              </a:ext>
+            </a:extLst>
+          </p:cNvPr>
+          <p:cNvSpPr/>
+          <p:nvPr/>
+        </p:nvSpPr>
+        <p:spPr>
+          <a:xfrm>
+            <a:off x="53009" y="1358348"/>
+            <a:ext cx="11940208" cy="4671391"/>
+          </a:xfrm>
+          <a:prstGeom prst="rect">
+            <a:avLst/>
+          </a:prstGeom>
+          <a:noFill/>
+          <a:ln w="9525" cap="flat" cmpd="sng" algn="ctr">
+            <a:solidFill>
+              <a:schemeClr val="accent3"/>
+            </a:solidFill>
+            <a:prstDash val="solid"/>
+            <a:round/>
+            <a:headEnd type="none" w="med" len="med"/>
+            <a:tailEnd type="none" w="med" len="med"/>
+          </a:ln>
+        </p:spPr>
+        <p:style>
+          <a:lnRef idx="0">
+            <a:scrgbClr r="0" g="0" b="0"/>
+          </a:lnRef>
+          <a:fillRef idx="0">
+            <a:scrgbClr r="0" g="0" b="0"/>
+          </a:fillRef>
+          <a:effectRef idx="0">
+            <a:scrgbClr r="0" g="0" b="0"/>
+          </a:effectRef>
+          <a:fontRef idx="minor">
+            <a:schemeClr val="accent3"/>
+          </a:fontRef>
+        </p:style>
+        <p:txBody>
+          <a:bodyPr rtlCol="0" anchor="ctr"/>
+          <a:lstStyle/>
+          <a:p>
+            <a:pPr algn="ctr"/>
+            <a:endParaRPr lang="en-US"/>
+          </a:p>
+        </p:txBody>
+      </p:sp>
+      <p:sp>
+        <p:nvSpPr>
+          <p:cNvPr id="6" name="Rectangle: Rounded Corners 5">
+            <a:extLst>
+              <a:ext uri="{FF2B5EF4-FFF2-40B4-BE49-F238E27FC236}">
+                <a16:creationId xmlns:a16="http://schemas.microsoft.com/office/drawing/2014/main" id="{2A58B961-E562-FC88-8A0E-3FC06955C401}"/>
+              </a:ext>
+            </a:extLst>
+          </p:cNvPr>
+          <p:cNvSpPr/>
+          <p:nvPr/>
+        </p:nvSpPr>
+        <p:spPr>
+          <a:xfrm>
+            <a:off x="114504" y="1842052"/>
+            <a:ext cx="1881809" cy="1152940"/>
+          </a:xfrm>
+          <a:prstGeom prst="roundRect">
+            <a:avLst/>
+          </a:prstGeom>
+        </p:spPr>
+        <p:style>
+          <a:lnRef idx="1">
+            <a:schemeClr val="accent6"/>
+          </a:lnRef>
+          <a:fillRef idx="2">
+            <a:schemeClr val="accent6"/>
+          </a:fillRef>
+          <a:effectRef idx="1">
+            <a:schemeClr val="accent6"/>
+          </a:effectRef>
+          <a:fontRef idx="minor">
+            <a:schemeClr val="dk1"/>
+          </a:fontRef>
+        </p:style>
+        <p:txBody>
+          <a:bodyPr rtlCol="0" anchor="ctr"/>
+          <a:lstStyle/>
+          <a:p>
+            <a:pPr algn="ctr"/>
+            <a:r>
+              <a:rPr lang="en-US" dirty="0"/>
+              <a:t>Photon Launches with weight 1 in v </a:t>
+            </a:r>
+            <a:r>
+              <a:rPr lang="en-US" dirty="0" err="1"/>
+              <a:t>dir</a:t>
+            </a:r>
+            <a:endParaRPr lang="en-US" dirty="0"/>
+          </a:p>
+        </p:txBody>
+      </p:sp>
+      <p:sp>
+        <p:nvSpPr>
+          <p:cNvPr id="8" name="Rectangle: Rounded Corners 7">
+            <a:extLst>
+              <a:ext uri="{FF2B5EF4-FFF2-40B4-BE49-F238E27FC236}">
+                <a16:creationId xmlns:a16="http://schemas.microsoft.com/office/drawing/2014/main" id="{1FA17908-4E4A-2C7B-8F3E-38AE0389FF97}"/>
+              </a:ext>
+            </a:extLst>
+          </p:cNvPr>
+          <p:cNvSpPr/>
+          <p:nvPr/>
+        </p:nvSpPr>
+        <p:spPr>
+          <a:xfrm>
+            <a:off x="3730895" y="2803461"/>
+            <a:ext cx="1129340" cy="1152940"/>
+          </a:xfrm>
+          <a:prstGeom prst="roundRect">
+            <a:avLst/>
+          </a:prstGeom>
+        </p:spPr>
+        <p:style>
+          <a:lnRef idx="1">
+            <a:schemeClr val="dk1"/>
+          </a:lnRef>
+          <a:fillRef idx="2">
+            <a:schemeClr val="dk1"/>
+          </a:fillRef>
+          <a:effectRef idx="1">
+            <a:schemeClr val="dk1"/>
+          </a:effectRef>
+          <a:fontRef idx="minor">
+            <a:schemeClr val="dk1"/>
+          </a:fontRef>
+        </p:style>
+        <p:txBody>
+          <a:bodyPr rtlCol="0" anchor="ctr"/>
+          <a:lstStyle/>
+          <a:p>
+            <a:pPr algn="ctr"/>
+            <a:endParaRPr lang="en-US" dirty="0"/>
+          </a:p>
+        </p:txBody>
+      </p:sp>
+      <p:pic>
+        <p:nvPicPr>
+          <p:cNvPr id="10" name="Picture 9">
+            <a:extLst>
+              <a:ext uri="{FF2B5EF4-FFF2-40B4-BE49-F238E27FC236}">
+                <a16:creationId xmlns:a16="http://schemas.microsoft.com/office/drawing/2014/main" id="{9E99E545-9608-7184-1081-9E7EC5F60C86}"/>
+              </a:ext>
+            </a:extLst>
+          </p:cNvPr>
+          <p:cNvPicPr>
+            <a:picLocks noChangeAspect="1"/>
+          </p:cNvPicPr>
+          <p:nvPr/>
+        </p:nvPicPr>
+        <p:blipFill>
+          <a:blip r:embed="rId2"/>
+          <a:stretch>
+            <a:fillRect/>
+          </a:stretch>
+        </p:blipFill>
+        <p:spPr>
+          <a:xfrm>
+            <a:off x="2110816" y="2746514"/>
+            <a:ext cx="1543061" cy="1266834"/>
+          </a:xfrm>
+          <a:prstGeom prst="rect">
+            <a:avLst/>
+          </a:prstGeom>
+        </p:spPr>
+      </p:pic>
+      <p:sp>
+        <p:nvSpPr>
+          <p:cNvPr id="11" name="Arrow: Right 10">
+            <a:extLst>
+              <a:ext uri="{FF2B5EF4-FFF2-40B4-BE49-F238E27FC236}">
+                <a16:creationId xmlns:a16="http://schemas.microsoft.com/office/drawing/2014/main" id="{519AE099-0597-5E63-4686-68D2FB27CCD5}"/>
+              </a:ext>
+            </a:extLst>
+          </p:cNvPr>
+          <p:cNvSpPr/>
+          <p:nvPr/>
+        </p:nvSpPr>
+        <p:spPr>
+          <a:xfrm>
+            <a:off x="2110816" y="1842052"/>
+            <a:ext cx="6096006" cy="1152940"/>
+          </a:xfrm>
+          <a:prstGeom prst="rightArrow">
+            <a:avLst/>
+          </a:prstGeom>
+        </p:spPr>
+        <p:style>
+          <a:lnRef idx="1">
+            <a:schemeClr val="accent6"/>
+          </a:lnRef>
+          <a:fillRef idx="2">
+            <a:schemeClr val="accent6"/>
+          </a:fillRef>
+          <a:effectRef idx="1">
+            <a:schemeClr val="accent6"/>
+          </a:effectRef>
+          <a:fontRef idx="minor">
+            <a:schemeClr val="dk1"/>
+          </a:fontRef>
+        </p:style>
+        <p:txBody>
+          <a:bodyPr rtlCol="0" anchor="ctr"/>
+          <a:lstStyle/>
+          <a:p>
+            <a:pPr algn="ctr"/>
+            <a:r>
+              <a:rPr lang="en-US" dirty="0"/>
+              <a:t>Based on </a:t>
+            </a:r>
+            <a:r>
+              <a:rPr lang="el-GR" dirty="0">
+                <a:latin typeface="Cambria Math" panose="02040503050406030204" pitchFamily="18" charset="0"/>
+                <a:ea typeface="Cambria Math" panose="02040503050406030204" pitchFamily="18" charset="0"/>
+              </a:rPr>
+              <a:t>μ</a:t>
+            </a:r>
+            <a:r>
+              <a:rPr lang="en-US" baseline="-25000" dirty="0">
+                <a:latin typeface="Cambria Math" panose="02040503050406030204" pitchFamily="18" charset="0"/>
+                <a:ea typeface="Cambria Math" panose="02040503050406030204" pitchFamily="18" charset="0"/>
+              </a:rPr>
+              <a:t>s</a:t>
+            </a:r>
+            <a:r>
+              <a:rPr lang="en-US" dirty="0"/>
+              <a:t>, photon travels n voxels</a:t>
+            </a:r>
+          </a:p>
+        </p:txBody>
+      </p:sp>
+      <p:sp>
+        <p:nvSpPr>
+          <p:cNvPr id="13" name="Oval 12">
+            <a:extLst>
+              <a:ext uri="{FF2B5EF4-FFF2-40B4-BE49-F238E27FC236}">
+                <a16:creationId xmlns:a16="http://schemas.microsoft.com/office/drawing/2014/main" id="{C05261AD-26CE-077F-A73A-9E0CAB08E63D}"/>
+              </a:ext>
+            </a:extLst>
+          </p:cNvPr>
+          <p:cNvSpPr/>
+          <p:nvPr/>
+        </p:nvSpPr>
+        <p:spPr>
+          <a:xfrm>
+            <a:off x="4046930" y="3131296"/>
+            <a:ext cx="497269" cy="497269"/>
+          </a:xfrm>
+          <a:prstGeom prst="ellipse">
+            <a:avLst/>
+          </a:prstGeom>
+        </p:spPr>
+        <p:style>
+          <a:lnRef idx="0">
+            <a:schemeClr val="accent3"/>
+          </a:lnRef>
+          <a:fillRef idx="3">
+            <a:schemeClr val="accent3"/>
+          </a:fillRef>
+          <a:effectRef idx="3">
+            <a:schemeClr val="accent3"/>
+          </a:effectRef>
+          <a:fontRef idx="minor">
+            <a:schemeClr val="lt1"/>
+          </a:fontRef>
+        </p:style>
+        <p:txBody>
+          <a:bodyPr rtlCol="0" anchor="ctr"/>
+          <a:lstStyle/>
+          <a:p>
+            <a:pPr algn="ctr"/>
+            <a:endParaRPr lang="en-US"/>
+          </a:p>
+        </p:txBody>
+      </p:sp>
+      <p:sp>
+        <p:nvSpPr>
+          <p:cNvPr id="15" name="Rectangle: Rounded Corners 14">
+            <a:extLst>
+              <a:ext uri="{FF2B5EF4-FFF2-40B4-BE49-F238E27FC236}">
+                <a16:creationId xmlns:a16="http://schemas.microsoft.com/office/drawing/2014/main" id="{B3E8AE43-0D28-F6DC-0FC1-3121AEBF9B70}"/>
+              </a:ext>
+            </a:extLst>
+          </p:cNvPr>
+          <p:cNvSpPr/>
+          <p:nvPr/>
+        </p:nvSpPr>
+        <p:spPr>
+          <a:xfrm>
+            <a:off x="4937253" y="2803461"/>
+            <a:ext cx="1129340" cy="1152940"/>
+          </a:xfrm>
+          <a:prstGeom prst="roundRect">
+            <a:avLst/>
+          </a:prstGeom>
+        </p:spPr>
+        <p:style>
+          <a:lnRef idx="1">
+            <a:schemeClr val="dk1"/>
+          </a:lnRef>
+          <a:fillRef idx="2">
+            <a:schemeClr val="dk1"/>
+          </a:fillRef>
+          <a:effectRef idx="1">
+            <a:schemeClr val="dk1"/>
+          </a:effectRef>
+          <a:fontRef idx="minor">
+            <a:schemeClr val="dk1"/>
+          </a:fontRef>
+        </p:style>
+        <p:txBody>
+          <a:bodyPr rtlCol="0" anchor="ctr"/>
+          <a:lstStyle/>
+          <a:p>
+            <a:pPr algn="ctr"/>
+            <a:endParaRPr lang="en-US" dirty="0"/>
+          </a:p>
+        </p:txBody>
+      </p:sp>
+      <p:sp>
+        <p:nvSpPr>
+          <p:cNvPr id="17" name="Oval 16">
+            <a:extLst>
+              <a:ext uri="{FF2B5EF4-FFF2-40B4-BE49-F238E27FC236}">
+                <a16:creationId xmlns:a16="http://schemas.microsoft.com/office/drawing/2014/main" id="{CED25659-77B4-9FF8-C456-39935DD55A9C}"/>
+              </a:ext>
+            </a:extLst>
+          </p:cNvPr>
+          <p:cNvSpPr/>
+          <p:nvPr/>
+        </p:nvSpPr>
+        <p:spPr>
+          <a:xfrm>
+            <a:off x="5326176" y="3209766"/>
+            <a:ext cx="319252" cy="319252"/>
+          </a:xfrm>
+          <a:prstGeom prst="ellipse">
+            <a:avLst/>
+          </a:prstGeom>
+        </p:spPr>
+        <p:style>
+          <a:lnRef idx="0">
+            <a:schemeClr val="accent3"/>
+          </a:lnRef>
+          <a:fillRef idx="3">
+            <a:schemeClr val="accent3"/>
+          </a:fillRef>
+          <a:effectRef idx="3">
+            <a:schemeClr val="accent3"/>
+          </a:effectRef>
+          <a:fontRef idx="minor">
+            <a:schemeClr val="lt1"/>
+          </a:fontRef>
+        </p:style>
+        <p:txBody>
+          <a:bodyPr rtlCol="0" anchor="ctr"/>
+          <a:lstStyle/>
+          <a:p>
+            <a:pPr algn="ctr"/>
+            <a:endParaRPr lang="en-US"/>
+          </a:p>
+        </p:txBody>
+      </p:sp>
+      <p:sp>
+        <p:nvSpPr>
+          <p:cNvPr id="23" name="Rectangle: Rounded Corners 22">
+            <a:extLst>
+              <a:ext uri="{FF2B5EF4-FFF2-40B4-BE49-F238E27FC236}">
+                <a16:creationId xmlns:a16="http://schemas.microsoft.com/office/drawing/2014/main" id="{7870FDC6-969A-4902-83E7-BDBF27EDAC0E}"/>
+              </a:ext>
+            </a:extLst>
+          </p:cNvPr>
+          <p:cNvSpPr/>
+          <p:nvPr/>
+        </p:nvSpPr>
+        <p:spPr>
+          <a:xfrm>
+            <a:off x="6143611" y="2776801"/>
+            <a:ext cx="1129340" cy="1152940"/>
+          </a:xfrm>
+          <a:prstGeom prst="roundRect">
+            <a:avLst/>
+          </a:prstGeom>
+        </p:spPr>
+        <p:style>
+          <a:lnRef idx="1">
+            <a:schemeClr val="dk1"/>
+          </a:lnRef>
+          <a:fillRef idx="2">
+            <a:schemeClr val="dk1"/>
+          </a:fillRef>
+          <a:effectRef idx="1">
+            <a:schemeClr val="dk1"/>
+          </a:effectRef>
+          <a:fontRef idx="minor">
+            <a:schemeClr val="dk1"/>
+          </a:fontRef>
+        </p:style>
+        <p:txBody>
+          <a:bodyPr rtlCol="0" anchor="ctr"/>
+          <a:lstStyle/>
+          <a:p>
+            <a:pPr algn="ctr"/>
+            <a:endParaRPr lang="en-US" dirty="0"/>
+          </a:p>
+        </p:txBody>
+      </p:sp>
+      <p:sp>
+        <p:nvSpPr>
+          <p:cNvPr id="25" name="Oval 24">
+            <a:extLst>
+              <a:ext uri="{FF2B5EF4-FFF2-40B4-BE49-F238E27FC236}">
+                <a16:creationId xmlns:a16="http://schemas.microsoft.com/office/drawing/2014/main" id="{DA79CE46-865E-A188-6C39-74E03E74C1B4}"/>
+              </a:ext>
+            </a:extLst>
+          </p:cNvPr>
+          <p:cNvSpPr/>
+          <p:nvPr/>
+        </p:nvSpPr>
+        <p:spPr>
+          <a:xfrm>
+            <a:off x="6532533" y="3226958"/>
+            <a:ext cx="242479" cy="242479"/>
+          </a:xfrm>
+          <a:prstGeom prst="ellipse">
+            <a:avLst/>
+          </a:prstGeom>
+        </p:spPr>
+        <p:style>
+          <a:lnRef idx="0">
+            <a:schemeClr val="accent3"/>
+          </a:lnRef>
+          <a:fillRef idx="3">
+            <a:schemeClr val="accent3"/>
+          </a:fillRef>
+          <a:effectRef idx="3">
+            <a:schemeClr val="accent3"/>
+          </a:effectRef>
+          <a:fontRef idx="minor">
+            <a:schemeClr val="lt1"/>
+          </a:fontRef>
+        </p:style>
+        <p:txBody>
+          <a:bodyPr rtlCol="0" anchor="ctr"/>
+          <a:lstStyle/>
+          <a:p>
+            <a:pPr algn="ctr"/>
+            <a:endParaRPr lang="en-US"/>
+          </a:p>
+        </p:txBody>
+      </p:sp>
+      <p:cxnSp>
+        <p:nvCxnSpPr>
+          <p:cNvPr id="27" name="Connector: Curved 26">
+            <a:extLst>
+              <a:ext uri="{FF2B5EF4-FFF2-40B4-BE49-F238E27FC236}">
+                <a16:creationId xmlns:a16="http://schemas.microsoft.com/office/drawing/2014/main" id="{7EF43584-8A09-DF8D-E946-B0FE437CAA09}"/>
+              </a:ext>
+            </a:extLst>
+          </p:cNvPr>
+          <p:cNvCxnSpPr>
+            <a:stCxn id="8" idx="2"/>
+            <a:endCxn id="15" idx="2"/>
+          </p:cNvCxnSpPr>
+          <p:nvPr/>
+        </p:nvCxnSpPr>
+        <p:spPr>
+          <a:xfrm rot="16200000" flipH="1">
+            <a:off x="4898744" y="3353222"/>
+            <a:ext cx="12700" cy="1206358"/>
+          </a:xfrm>
+          <a:prstGeom prst="curvedConnector3">
+            <a:avLst>
+              <a:gd name="adj1" fmla="val 1800000"/>
+            </a:avLst>
+          </a:prstGeom>
+          <a:ln>
+            <a:tailEnd type="triangle"/>
+          </a:ln>
+        </p:spPr>
+        <p:style>
+          <a:lnRef idx="1">
+            <a:schemeClr val="dk1"/>
+          </a:lnRef>
+          <a:fillRef idx="0">
+            <a:schemeClr val="dk1"/>
+          </a:fillRef>
+          <a:effectRef idx="0">
+            <a:schemeClr val="dk1"/>
+          </a:effectRef>
+          <a:fontRef idx="minor">
+            <a:schemeClr val="tx1"/>
+          </a:fontRef>
+        </p:style>
+      </p:cxnSp>
+      <p:cxnSp>
+        <p:nvCxnSpPr>
+          <p:cNvPr id="28" name="Connector: Curved 27">
+            <a:extLst>
+              <a:ext uri="{FF2B5EF4-FFF2-40B4-BE49-F238E27FC236}">
+                <a16:creationId xmlns:a16="http://schemas.microsoft.com/office/drawing/2014/main" id="{A0717F08-B786-FF34-5EAC-26C9DA0DB85C}"/>
+              </a:ext>
+            </a:extLst>
+          </p:cNvPr>
+          <p:cNvCxnSpPr/>
+          <p:nvPr/>
+        </p:nvCxnSpPr>
+        <p:spPr>
+          <a:xfrm rot="16200000" flipH="1">
+            <a:off x="6097142" y="3334171"/>
+            <a:ext cx="12700" cy="1206358"/>
+          </a:xfrm>
+          <a:prstGeom prst="curvedConnector3">
+            <a:avLst>
+              <a:gd name="adj1" fmla="val 1800000"/>
+            </a:avLst>
+          </a:prstGeom>
+          <a:ln>
+            <a:tailEnd type="triangle"/>
+          </a:ln>
+        </p:spPr>
+        <p:style>
+          <a:lnRef idx="1">
+            <a:schemeClr val="dk1"/>
+          </a:lnRef>
+          <a:fillRef idx="0">
+            <a:schemeClr val="dk1"/>
+          </a:fillRef>
+          <a:effectRef idx="0">
+            <a:schemeClr val="dk1"/>
+          </a:effectRef>
+          <a:fontRef idx="minor">
+            <a:schemeClr val="tx1"/>
+          </a:fontRef>
+        </p:style>
+      </p:cxnSp>
+      <p:sp>
+        <p:nvSpPr>
+          <p:cNvPr id="29" name="Oval 28">
+            <a:extLst>
+              <a:ext uri="{FF2B5EF4-FFF2-40B4-BE49-F238E27FC236}">
+                <a16:creationId xmlns:a16="http://schemas.microsoft.com/office/drawing/2014/main" id="{614E54FC-995B-9FD9-B4D0-A9CFAEA84012}"/>
+              </a:ext>
+            </a:extLst>
+          </p:cNvPr>
+          <p:cNvSpPr/>
+          <p:nvPr/>
+        </p:nvSpPr>
+        <p:spPr>
+          <a:xfrm>
+            <a:off x="7427844" y="3348197"/>
+            <a:ext cx="92765" cy="92765"/>
+          </a:xfrm>
+          <a:prstGeom prst="ellipse">
+            <a:avLst/>
+          </a:prstGeom>
+        </p:spPr>
+        <p:style>
+          <a:lnRef idx="2">
+            <a:schemeClr val="dk1">
+              <a:shade val="15000"/>
+            </a:schemeClr>
+          </a:lnRef>
+          <a:fillRef idx="1">
+            <a:schemeClr val="dk1"/>
+          </a:fillRef>
+          <a:effectRef idx="0">
+            <a:schemeClr val="dk1"/>
+          </a:effectRef>
+          <a:fontRef idx="minor">
+            <a:schemeClr val="lt1"/>
+          </a:fontRef>
+        </p:style>
+        <p:txBody>
+          <a:bodyPr rtlCol="0" anchor="ctr"/>
+          <a:lstStyle/>
+          <a:p>
+            <a:pPr algn="ctr"/>
+            <a:endParaRPr lang="en-US"/>
+          </a:p>
+        </p:txBody>
+      </p:sp>
+      <p:sp>
+        <p:nvSpPr>
+          <p:cNvPr id="33" name="Oval 32">
+            <a:extLst>
+              <a:ext uri="{FF2B5EF4-FFF2-40B4-BE49-F238E27FC236}">
+                <a16:creationId xmlns:a16="http://schemas.microsoft.com/office/drawing/2014/main" id="{26E07292-A4D4-72BA-E678-155CB70D2120}"/>
+              </a:ext>
+            </a:extLst>
+          </p:cNvPr>
+          <p:cNvSpPr/>
+          <p:nvPr/>
+        </p:nvSpPr>
+        <p:spPr>
+          <a:xfrm>
+            <a:off x="7661873" y="3348197"/>
+            <a:ext cx="92765" cy="92765"/>
+          </a:xfrm>
+          <a:prstGeom prst="ellipse">
+            <a:avLst/>
+          </a:prstGeom>
+        </p:spPr>
+        <p:style>
+          <a:lnRef idx="2">
+            <a:schemeClr val="dk1">
+              <a:shade val="15000"/>
+            </a:schemeClr>
+          </a:lnRef>
+          <a:fillRef idx="1">
+            <a:schemeClr val="dk1"/>
+          </a:fillRef>
+          <a:effectRef idx="0">
+            <a:schemeClr val="dk1"/>
+          </a:effectRef>
+          <a:fontRef idx="minor">
+            <a:schemeClr val="lt1"/>
+          </a:fontRef>
+        </p:style>
+        <p:txBody>
+          <a:bodyPr rtlCol="0" anchor="ctr"/>
+          <a:lstStyle/>
+          <a:p>
+            <a:pPr algn="ctr"/>
+            <a:endParaRPr lang="en-US"/>
+          </a:p>
+        </p:txBody>
+      </p:sp>
+      <p:sp>
+        <p:nvSpPr>
+          <p:cNvPr id="35" name="Oval 34">
+            <a:extLst>
+              <a:ext uri="{FF2B5EF4-FFF2-40B4-BE49-F238E27FC236}">
+                <a16:creationId xmlns:a16="http://schemas.microsoft.com/office/drawing/2014/main" id="{258315BD-41CC-6F90-B553-8AE5999C2239}"/>
+              </a:ext>
+            </a:extLst>
+          </p:cNvPr>
+          <p:cNvSpPr/>
+          <p:nvPr/>
+        </p:nvSpPr>
+        <p:spPr>
+          <a:xfrm>
+            <a:off x="7895902" y="3348197"/>
+            <a:ext cx="92765" cy="92765"/>
+          </a:xfrm>
+          <a:prstGeom prst="ellipse">
+            <a:avLst/>
+          </a:prstGeom>
+        </p:spPr>
+        <p:style>
+          <a:lnRef idx="2">
+            <a:schemeClr val="dk1">
+              <a:shade val="15000"/>
+            </a:schemeClr>
+          </a:lnRef>
+          <a:fillRef idx="1">
+            <a:schemeClr val="dk1"/>
+          </a:fillRef>
+          <a:effectRef idx="0">
+            <a:schemeClr val="dk1"/>
+          </a:effectRef>
+          <a:fontRef idx="minor">
+            <a:schemeClr val="lt1"/>
+          </a:fontRef>
+        </p:style>
+        <p:txBody>
+          <a:bodyPr rtlCol="0" anchor="ctr"/>
+          <a:lstStyle/>
+          <a:p>
+            <a:pPr algn="ctr"/>
+            <a:endParaRPr lang="en-US"/>
+          </a:p>
+        </p:txBody>
+      </p:sp>
+      <p:sp>
+        <p:nvSpPr>
+          <p:cNvPr id="36" name="TextBox 35">
+            <a:extLst>
+              <a:ext uri="{FF2B5EF4-FFF2-40B4-BE49-F238E27FC236}">
+                <a16:creationId xmlns:a16="http://schemas.microsoft.com/office/drawing/2014/main" id="{1A54670A-1960-82BB-9C71-DF05F66283AB}"/>
+              </a:ext>
+            </a:extLst>
+          </p:cNvPr>
+          <p:cNvSpPr txBox="1"/>
+          <p:nvPr/>
+        </p:nvSpPr>
+        <p:spPr>
+          <a:xfrm>
+            <a:off x="7609733" y="3469437"/>
+            <a:ext cx="492724" cy="369332"/>
+          </a:xfrm>
+          <a:prstGeom prst="rect">
+            <a:avLst/>
+          </a:prstGeom>
+          <a:noFill/>
+        </p:spPr>
+        <p:txBody>
+          <a:bodyPr wrap="square" rtlCol="0">
+            <a:spAutoFit/>
+          </a:bodyPr>
+          <a:lstStyle/>
+          <a:p>
+            <a:r>
+              <a:rPr lang="en-US" b="1" dirty="0">
+                <a:solidFill>
+                  <a:schemeClr val="bg1"/>
+                </a:solidFill>
+              </a:rPr>
+              <a:t>n</a:t>
+            </a:r>
+          </a:p>
+        </p:txBody>
+      </p:sp>
+      <p:sp>
+        <p:nvSpPr>
+          <p:cNvPr id="37" name="TextBox 36">
+            <a:extLst>
+              <a:ext uri="{FF2B5EF4-FFF2-40B4-BE49-F238E27FC236}">
+                <a16:creationId xmlns:a16="http://schemas.microsoft.com/office/drawing/2014/main" id="{EAEE55A7-84BF-6E4B-6CB7-FBDF4CC8589A}"/>
+              </a:ext>
+            </a:extLst>
+          </p:cNvPr>
+          <p:cNvSpPr txBox="1"/>
+          <p:nvPr/>
+        </p:nvSpPr>
+        <p:spPr>
+          <a:xfrm>
+            <a:off x="3637150" y="4161015"/>
+            <a:ext cx="3599985" cy="369332"/>
+          </a:xfrm>
+          <a:prstGeom prst="rect">
+            <a:avLst/>
+          </a:prstGeom>
+          <a:noFill/>
+        </p:spPr>
+        <p:txBody>
+          <a:bodyPr wrap="square" rtlCol="0">
+            <a:spAutoFit/>
+          </a:bodyPr>
+          <a:lstStyle/>
+          <a:p>
+            <a:r>
+              <a:rPr lang="en-US" dirty="0"/>
+              <a:t>Weight is reduced based on </a:t>
+            </a:r>
+            <a:r>
+              <a:rPr lang="el-GR" dirty="0">
+                <a:latin typeface="Cambria Math" panose="02040503050406030204" pitchFamily="18" charset="0"/>
+                <a:ea typeface="Cambria Math" panose="02040503050406030204" pitchFamily="18" charset="0"/>
+              </a:rPr>
+              <a:t>μ</a:t>
+            </a:r>
+            <a:r>
+              <a:rPr lang="en-US" baseline="-25000" dirty="0">
+                <a:latin typeface="Cambria Math" panose="02040503050406030204" pitchFamily="18" charset="0"/>
+                <a:ea typeface="Cambria Math" panose="02040503050406030204" pitchFamily="18" charset="0"/>
+              </a:rPr>
+              <a:t>a</a:t>
+            </a:r>
+            <a:r>
+              <a:rPr lang="en-US" dirty="0"/>
+              <a:t>  </a:t>
+            </a:r>
+          </a:p>
+        </p:txBody>
+      </p:sp>
+      <p:sp>
+        <p:nvSpPr>
+          <p:cNvPr id="39" name="Rectangle: Rounded Corners 38">
+            <a:extLst>
+              <a:ext uri="{FF2B5EF4-FFF2-40B4-BE49-F238E27FC236}">
+                <a16:creationId xmlns:a16="http://schemas.microsoft.com/office/drawing/2014/main" id="{2CED0CBE-4FA2-0A39-27D5-62030A9E7494}"/>
+              </a:ext>
+            </a:extLst>
+          </p:cNvPr>
+          <p:cNvSpPr/>
+          <p:nvPr/>
+        </p:nvSpPr>
+        <p:spPr>
+          <a:xfrm>
+            <a:off x="8335618" y="1795669"/>
+            <a:ext cx="1663148" cy="1152940"/>
+          </a:xfrm>
+          <a:prstGeom prst="roundRect">
+            <a:avLst/>
+          </a:prstGeom>
+        </p:spPr>
+        <p:style>
+          <a:lnRef idx="1">
+            <a:schemeClr val="accent6"/>
+          </a:lnRef>
+          <a:fillRef idx="2">
+            <a:schemeClr val="accent6"/>
+          </a:fillRef>
+          <a:effectRef idx="1">
+            <a:schemeClr val="accent6"/>
+          </a:effectRef>
+          <a:fontRef idx="minor">
+            <a:schemeClr val="dk1"/>
+          </a:fontRef>
+        </p:style>
+        <p:txBody>
+          <a:bodyPr rtlCol="0" anchor="ctr"/>
+          <a:lstStyle/>
+          <a:p>
+            <a:pPr algn="ctr"/>
+            <a:r>
+              <a:rPr lang="en-US" dirty="0"/>
+              <a:t>New scatter direction is determined</a:t>
+            </a:r>
+          </a:p>
+        </p:txBody>
+      </p:sp>
+      <p:pic>
+        <p:nvPicPr>
+          <p:cNvPr id="41" name="Picture 40">
+            <a:extLst>
+              <a:ext uri="{FF2B5EF4-FFF2-40B4-BE49-F238E27FC236}">
+                <a16:creationId xmlns:a16="http://schemas.microsoft.com/office/drawing/2014/main" id="{53483FE8-D6C3-9B74-285A-09BD500A65A2}"/>
+              </a:ext>
+            </a:extLst>
+          </p:cNvPr>
+          <p:cNvPicPr>
+            <a:picLocks noChangeAspect="1"/>
+          </p:cNvPicPr>
+          <p:nvPr/>
+        </p:nvPicPr>
+        <p:blipFill>
+          <a:blip r:embed="rId3"/>
+          <a:stretch>
+            <a:fillRect/>
+          </a:stretch>
+        </p:blipFill>
+        <p:spPr>
+          <a:xfrm>
+            <a:off x="214156" y="265467"/>
+            <a:ext cx="9446193" cy="615176"/>
+          </a:xfrm>
+          <a:prstGeom prst="rect">
+            <a:avLst/>
+          </a:prstGeom>
+          <a:ln>
+            <a:solidFill>
+              <a:schemeClr val="bg1"/>
+            </a:solidFill>
+          </a:ln>
+        </p:spPr>
+      </p:pic>
+      <p:cxnSp>
+        <p:nvCxnSpPr>
+          <p:cNvPr id="43" name="Connector: Curved 42">
+            <a:extLst>
+              <a:ext uri="{FF2B5EF4-FFF2-40B4-BE49-F238E27FC236}">
+                <a16:creationId xmlns:a16="http://schemas.microsoft.com/office/drawing/2014/main" id="{0E84804B-640A-9B18-7608-E5DB48BBBEBE}"/>
+              </a:ext>
+            </a:extLst>
+          </p:cNvPr>
+          <p:cNvCxnSpPr>
+            <a:cxnSpLocks/>
+          </p:cNvCxnSpPr>
+          <p:nvPr/>
+        </p:nvCxnSpPr>
+        <p:spPr>
+          <a:xfrm rot="16200000" flipV="1">
+            <a:off x="6562551" y="-776815"/>
+            <a:ext cx="915026" cy="4229939"/>
+          </a:xfrm>
+          <a:prstGeom prst="curvedConnector3">
+            <a:avLst/>
+          </a:prstGeom>
+          <a:ln>
+            <a:tailEnd type="triangle"/>
+          </a:ln>
+        </p:spPr>
+        <p:style>
+          <a:lnRef idx="1">
+            <a:schemeClr val="dk1"/>
+          </a:lnRef>
+          <a:fillRef idx="0">
+            <a:schemeClr val="dk1"/>
+          </a:fillRef>
+          <a:effectRef idx="0">
+            <a:schemeClr val="dk1"/>
+          </a:effectRef>
+          <a:fontRef idx="minor">
+            <a:schemeClr val="tx1"/>
+          </a:fontRef>
+        </p:style>
+      </p:cxnSp>
+      <p:sp>
+        <p:nvSpPr>
+          <p:cNvPr id="46" name="Arrow: Right 45">
+            <a:extLst>
+              <a:ext uri="{FF2B5EF4-FFF2-40B4-BE49-F238E27FC236}">
+                <a16:creationId xmlns:a16="http://schemas.microsoft.com/office/drawing/2014/main" id="{55D8F6E7-FEDD-F497-CCD5-4F9E8ABF1236}"/>
+              </a:ext>
+            </a:extLst>
+          </p:cNvPr>
+          <p:cNvSpPr/>
+          <p:nvPr/>
+        </p:nvSpPr>
+        <p:spPr>
+          <a:xfrm rot="5400000">
+            <a:off x="7776604" y="3979996"/>
+            <a:ext cx="2883454" cy="1018356"/>
+          </a:xfrm>
+          <a:prstGeom prst="rightArrow">
+            <a:avLst/>
+          </a:prstGeom>
+        </p:spPr>
+        <p:style>
+          <a:lnRef idx="1">
+            <a:schemeClr val="accent6"/>
+          </a:lnRef>
+          <a:fillRef idx="2">
+            <a:schemeClr val="accent6"/>
+          </a:fillRef>
+          <a:effectRef idx="1">
+            <a:schemeClr val="accent6"/>
+          </a:effectRef>
+          <a:fontRef idx="minor">
+            <a:schemeClr val="dk1"/>
+          </a:fontRef>
+        </p:style>
+        <p:txBody>
+          <a:bodyPr rtlCol="0" anchor="ctr"/>
+          <a:lstStyle/>
+          <a:p>
+            <a:pPr algn="ctr"/>
+            <a:endParaRPr lang="en-US"/>
+          </a:p>
+        </p:txBody>
+      </p:sp>
+      <p:sp>
+        <p:nvSpPr>
+          <p:cNvPr id="47" name="TextBox 46">
+            <a:extLst>
+              <a:ext uri="{FF2B5EF4-FFF2-40B4-BE49-F238E27FC236}">
+                <a16:creationId xmlns:a16="http://schemas.microsoft.com/office/drawing/2014/main" id="{68A415F6-6CC3-DBFF-FDCE-3E7E211DC316}"/>
+              </a:ext>
+            </a:extLst>
+          </p:cNvPr>
+          <p:cNvSpPr txBox="1"/>
+          <p:nvPr/>
+        </p:nvSpPr>
+        <p:spPr>
+          <a:xfrm>
+            <a:off x="9672340" y="3253547"/>
+            <a:ext cx="1782418" cy="2031325"/>
+          </a:xfrm>
+          <a:prstGeom prst="rect">
+            <a:avLst/>
+          </a:prstGeom>
+          <a:noFill/>
+        </p:spPr>
+        <p:txBody>
+          <a:bodyPr wrap="square" rtlCol="0">
+            <a:spAutoFit/>
+          </a:bodyPr>
+          <a:lstStyle/>
+          <a:p>
+            <a:r>
+              <a:rPr lang="en-US" dirty="0"/>
+              <a:t>Previous steps are repeated until the boundary is left or no more time is left</a:t>
+            </a:r>
+          </a:p>
+        </p:txBody>
+      </p:sp>
+    </p:spTree>
+    <p:extLst>
+      <p:ext uri="{BB962C8B-B14F-4D97-AF65-F5344CB8AC3E}">
+        <p14:creationId xmlns:p14="http://schemas.microsoft.com/office/powerpoint/2010/main" val="1601636316"/>
+      </p:ext>
+    </p:extLst>
+  </p:cSld>
+  <p:clrMapOvr>
+    <a:masterClrMapping/>
+  </p:clrMapOvr>
+</p:sld>
+</file>
+
+<file path=ppt/slides/slide5.xml><?xml version="1.0" encoding="utf-8"?>
+<p:sld xmlns:a="http://schemas.openxmlformats.org/drawingml/2006/main" xmlns:r="http://schemas.openxmlformats.org/officeDocument/2006/relationships" xmlns:p="http://schemas.openxmlformats.org/presentationml/2006/main">
+  <p:cSld>
+    <p:spTree>
+      <p:nvGrpSpPr>
+        <p:cNvPr id="1" name=""/>
+        <p:cNvGrpSpPr/>
+        <p:nvPr/>
+      </p:nvGrpSpPr>
+      <p:grpSpPr>
+        <a:xfrm>
+          <a:off x="0" y="0"/>
+          <a:ext cx="0" cy="0"/>
+          <a:chOff x="0" y="0"/>
+          <a:chExt cx="0" cy="0"/>
+        </a:xfrm>
+      </p:grpSpPr>
+      <p:sp>
+        <p:nvSpPr>
+          <p:cNvPr id="2" name="Title 1">
+            <a:extLst>
+              <a:ext uri="{FF2B5EF4-FFF2-40B4-BE49-F238E27FC236}">
+                <a16:creationId xmlns:a16="http://schemas.microsoft.com/office/drawing/2014/main" id="{8CBD9C3D-8F83-B489-ED20-32DC9A49B52E}"/>
+              </a:ext>
+            </a:extLst>
+          </p:cNvPr>
+          <p:cNvSpPr>
+            <a:spLocks noGrp="1"/>
+          </p:cNvSpPr>
+          <p:nvPr>
+            <p:ph type="title"/>
+          </p:nvPr>
+        </p:nvSpPr>
+        <p:spPr/>
+        <p:txBody>
+          <a:bodyPr/>
+          <a:lstStyle/>
+          <a:p>
+            <a:r>
+              <a:rPr lang="en-US" dirty="0"/>
+              <a:t>Deciding the Parameters for Fornier Forand</a:t>
+            </a:r>
+          </a:p>
+        </p:txBody>
+      </p:sp>
+      <p:pic>
+        <p:nvPicPr>
+          <p:cNvPr id="7" name="Content Placeholder 6">
+            <a:extLst>
+              <a:ext uri="{FF2B5EF4-FFF2-40B4-BE49-F238E27FC236}">
+                <a16:creationId xmlns:a16="http://schemas.microsoft.com/office/drawing/2014/main" id="{EB621F94-919A-F061-AEFA-DCA454A0C88B}"/>
+              </a:ext>
+            </a:extLst>
+          </p:cNvPr>
+          <p:cNvPicPr>
+            <a:picLocks noGrp="1" noChangeAspect="1"/>
+          </p:cNvPicPr>
+          <p:nvPr>
+            <p:ph idx="1"/>
+          </p:nvPr>
+        </p:nvPicPr>
+        <p:blipFill>
+          <a:blip r:embed="rId2"/>
+          <a:stretch>
+            <a:fillRect/>
+          </a:stretch>
+        </p:blipFill>
+        <p:spPr>
+          <a:xfrm>
+            <a:off x="4960398" y="2517503"/>
+            <a:ext cx="6138895" cy="3011966"/>
+          </a:xfrm>
+          <a:prstGeom prst="rect">
+            <a:avLst/>
+          </a:prstGeom>
+        </p:spPr>
+      </p:pic>
+      <p:sp>
+        <p:nvSpPr>
+          <p:cNvPr id="5" name="Text Placeholder 4">
+            <a:extLst>
+              <a:ext uri="{FF2B5EF4-FFF2-40B4-BE49-F238E27FC236}">
+                <a16:creationId xmlns:a16="http://schemas.microsoft.com/office/drawing/2014/main" id="{17EF4266-C469-7D12-1BBE-C95523C3392C}"/>
+              </a:ext>
+            </a:extLst>
+          </p:cNvPr>
+          <p:cNvSpPr>
+            <a:spLocks noGrp="1"/>
+          </p:cNvSpPr>
+          <p:nvPr>
+            <p:ph type="body" sz="half" idx="2"/>
+          </p:nvPr>
+        </p:nvSpPr>
+        <p:spPr/>
+        <p:txBody>
+          <a:bodyPr/>
+          <a:lstStyle/>
+          <a:p>
+            <a:pPr marL="342900" indent="-342900">
+              <a:buAutoNum type="arabicPeriod"/>
+            </a:pPr>
+            <a:r>
+              <a:rPr lang="en-US" dirty="0"/>
+              <a:t>0.015–0.025  from Characterization of Particle Backscattering of Global </a:t>
+            </a:r>
+            <a:r>
+              <a:rPr lang="en-US" dirty="0" err="1"/>
+              <a:t>HighlyTurbid</a:t>
+            </a:r>
+            <a:r>
+              <a:rPr lang="en-US" dirty="0"/>
+              <a:t> Waters From VIIRS Ocean Color Observations</a:t>
+            </a:r>
+          </a:p>
+          <a:p>
+            <a:pPr marL="342900" indent="-342900">
+              <a:buAutoNum type="arabicPeriod"/>
+            </a:pPr>
+            <a:r>
+              <a:rPr lang="en-US" dirty="0"/>
+              <a:t>Picture to the left from Comparison of reflectance with backscatter and absorption parameters for turbid waters</a:t>
+            </a:r>
+          </a:p>
+        </p:txBody>
+      </p:sp>
+    </p:spTree>
+    <p:extLst>
+      <p:ext uri="{BB962C8B-B14F-4D97-AF65-F5344CB8AC3E}">
+        <p14:creationId xmlns:p14="http://schemas.microsoft.com/office/powerpoint/2010/main" val="3580156459"/>
+      </p:ext>
+    </p:extLst>
+  </p:cSld>
+  <p:clrMapOvr>
+    <a:masterClrMapping/>
+  </p:clrMapOvr>
+</p:sld>
+</file>
+
+<file path=ppt/slides/slide6.xml><?xml version="1.0" encoding="utf-8"?>
+<p:sld xmlns:a="http://schemas.openxmlformats.org/drawingml/2006/main" xmlns:r="http://schemas.openxmlformats.org/officeDocument/2006/relationships" xmlns:p="http://schemas.openxmlformats.org/presentationml/2006/main">
+  <p:cSld>
+    <p:spTree>
+      <p:nvGrpSpPr>
+        <p:cNvPr id="1" name=""/>
+        <p:cNvGrpSpPr/>
+        <p:nvPr/>
+      </p:nvGrpSpPr>
+      <p:grpSpPr>
+        <a:xfrm>
+          <a:off x="0" y="0"/>
+          <a:ext cx="0" cy="0"/>
+          <a:chOff x="0" y="0"/>
+          <a:chExt cx="0" cy="0"/>
+        </a:xfrm>
+      </p:grpSpPr>
+      <p:sp>
+        <p:nvSpPr>
+          <p:cNvPr id="2" name="Title 1">
+            <a:extLst>
+              <a:ext uri="{FF2B5EF4-FFF2-40B4-BE49-F238E27FC236}">
+                <a16:creationId xmlns:a16="http://schemas.microsoft.com/office/drawing/2014/main" id="{B356E126-C1BE-85E8-459F-D92815FAC6FA}"/>
+              </a:ext>
+            </a:extLst>
+          </p:cNvPr>
+          <p:cNvSpPr>
+            <a:spLocks noGrp="1"/>
+          </p:cNvSpPr>
+          <p:nvPr>
+            <p:ph type="title"/>
+          </p:nvPr>
+        </p:nvSpPr>
+        <p:spPr/>
+        <p:txBody>
+          <a:bodyPr/>
+          <a:lstStyle/>
+          <a:p>
+            <a:r>
+              <a:rPr lang="en-US" dirty="0"/>
+              <a:t>Analysis Methods</a:t>
+            </a:r>
+          </a:p>
+        </p:txBody>
+      </p:sp>
+      <p:sp>
+        <p:nvSpPr>
+          <p:cNvPr id="3" name="Content Placeholder 2">
+            <a:extLst>
+              <a:ext uri="{FF2B5EF4-FFF2-40B4-BE49-F238E27FC236}">
+                <a16:creationId xmlns:a16="http://schemas.microsoft.com/office/drawing/2014/main" id="{B072FA01-4DD5-7264-9B6F-4CC46B83B25F}"/>
+              </a:ext>
+            </a:extLst>
+          </p:cNvPr>
+          <p:cNvSpPr>
+            <a:spLocks noGrp="1"/>
+          </p:cNvSpPr>
+          <p:nvPr>
+            <p:ph idx="1"/>
+          </p:nvPr>
+        </p:nvSpPr>
+        <p:spPr/>
+        <p:txBody>
+          <a:bodyPr/>
+          <a:lstStyle/>
+          <a:p>
+            <a:endParaRPr lang="en-US"/>
+          </a:p>
+        </p:txBody>
+      </p:sp>
+      <p:sp>
+        <p:nvSpPr>
+          <p:cNvPr id="4" name="Text Placeholder 3">
+            <a:extLst>
+              <a:ext uri="{FF2B5EF4-FFF2-40B4-BE49-F238E27FC236}">
+                <a16:creationId xmlns:a16="http://schemas.microsoft.com/office/drawing/2014/main" id="{5AFD19D3-F098-B794-A2BA-0DAB398D30C8}"/>
+              </a:ext>
+            </a:extLst>
+          </p:cNvPr>
+          <p:cNvSpPr>
+            <a:spLocks noGrp="1"/>
+          </p:cNvSpPr>
+          <p:nvPr>
+            <p:ph type="body" sz="half" idx="2"/>
+          </p:nvPr>
+        </p:nvSpPr>
+        <p:spPr/>
+        <p:txBody>
+          <a:bodyPr/>
+          <a:lstStyle/>
+          <a:p>
+            <a:r>
+              <a:rPr lang="en-US" dirty="0"/>
+              <a:t>Overall Picture</a:t>
+            </a:r>
+          </a:p>
+          <a:p>
+            <a:r>
+              <a:rPr lang="en-US" dirty="0"/>
+              <a:t>Angle Dependent Analysis</a:t>
+            </a:r>
+          </a:p>
+          <a:p>
+            <a:r>
+              <a:rPr lang="en-US" dirty="0"/>
+              <a:t>Goldie Zone Given Some Min</a:t>
+            </a:r>
+          </a:p>
+          <a:p>
+            <a:r>
+              <a:rPr lang="en-US" dirty="0"/>
+              <a:t>Curve</a:t>
+            </a:r>
+          </a:p>
+        </p:txBody>
+      </p:sp>
+    </p:spTree>
+    <p:extLst>
+      <p:ext uri="{BB962C8B-B14F-4D97-AF65-F5344CB8AC3E}">
+        <p14:creationId xmlns:p14="http://schemas.microsoft.com/office/powerpoint/2010/main" val="1310060062"/>
+      </p:ext>
+    </p:extLst>
+  </p:cSld>
+  <p:clrMapOvr>
+    <a:masterClrMapping/>
+  </p:clrMapOvr>
+</p:sld>
+</file>
+
+<file path=ppt/slides/slide7.xml><?xml version="1.0" encoding="utf-8"?>
+<p:sld xmlns:a="http://schemas.openxmlformats.org/drawingml/2006/main" xmlns:r="http://schemas.openxmlformats.org/officeDocument/2006/relationships" xmlns:p="http://schemas.openxmlformats.org/presentationml/2006/main">
+  <p:cSld>
+    <p:spTree>
+      <p:nvGrpSpPr>
+        <p:cNvPr id="1" name=""/>
+        <p:cNvGrpSpPr/>
+        <p:nvPr/>
+      </p:nvGrpSpPr>
+      <p:grpSpPr>
+        <a:xfrm>
+          <a:off x="0" y="0"/>
+          <a:ext cx="0" cy="0"/>
+          <a:chOff x="0" y="0"/>
+          <a:chExt cx="0" cy="0"/>
+        </a:xfrm>
+      </p:grpSpPr>
+      <p:sp>
+        <p:nvSpPr>
+          <p:cNvPr id="2" name="Title 1">
+            <a:extLst>
+              <a:ext uri="{FF2B5EF4-FFF2-40B4-BE49-F238E27FC236}">
+                <a16:creationId xmlns:a16="http://schemas.microsoft.com/office/drawing/2014/main" id="{394BB6C8-2B20-F7A7-DA70-2F191D990ECC}"/>
+              </a:ext>
+            </a:extLst>
+          </p:cNvPr>
+          <p:cNvSpPr>
+            <a:spLocks noGrp="1"/>
+          </p:cNvSpPr>
+          <p:nvPr>
+            <p:ph type="title"/>
+          </p:nvPr>
+        </p:nvSpPr>
+        <p:spPr/>
+        <p:txBody>
+          <a:bodyPr/>
+          <a:lstStyle/>
+          <a:p>
+            <a:r>
+              <a:rPr lang="en-US" dirty="0"/>
+              <a:t>Monte Carlo Simulation Result</a:t>
+            </a:r>
+          </a:p>
+        </p:txBody>
+      </p:sp>
+      <p:pic>
+        <p:nvPicPr>
+          <p:cNvPr id="5" name="Content Placeholder 4">
+            <a:extLst>
+              <a:ext uri="{FF2B5EF4-FFF2-40B4-BE49-F238E27FC236}">
+                <a16:creationId xmlns:a16="http://schemas.microsoft.com/office/drawing/2014/main" id="{C7086805-400A-E772-78E2-27D8B555203A}"/>
+              </a:ext>
+            </a:extLst>
+          </p:cNvPr>
+          <p:cNvPicPr>
+            <a:picLocks noGrp="1" noChangeAspect="1"/>
+          </p:cNvPicPr>
+          <p:nvPr>
+            <p:ph idx="1"/>
+          </p:nvPr>
+        </p:nvPicPr>
+        <p:blipFill>
+          <a:blip r:embed="rId2">
+            <a:extLst>
+              <a:ext uri="{28A0092B-C50C-407E-A947-70E740481C1C}">
+                <a14:useLocalDpi xmlns:a14="http://schemas.microsoft.com/office/drawing/2010/main" val="0"/>
+              </a:ext>
+            </a:extLst>
+          </a:blip>
+          <a:stretch>
+            <a:fillRect/>
+          </a:stretch>
+        </p:blipFill>
+        <p:spPr>
+          <a:xfrm>
+            <a:off x="2547800" y="1413405"/>
+            <a:ext cx="6655835" cy="4991877"/>
+          </a:xfrm>
+          <a:prstGeom prst="rect">
+            <a:avLst/>
+          </a:prstGeom>
+        </p:spPr>
+      </p:pic>
+    </p:spTree>
+    <p:extLst>
+      <p:ext uri="{BB962C8B-B14F-4D97-AF65-F5344CB8AC3E}">
+        <p14:creationId xmlns:p14="http://schemas.microsoft.com/office/powerpoint/2010/main" val="258165557"/>
+      </p:ext>
+    </p:extLst>
+  </p:cSld>
+  <p:clrMapOvr>
+    <a:masterClrMapping/>
+  </p:clrMapOvr>
+</p:sld>
+</file>
+
+<file path=ppt/slides/slide8.xml><?xml version="1.0" encoding="utf-8"?>
+<p:sld xmlns:a="http://schemas.openxmlformats.org/drawingml/2006/main" xmlns:r="http://schemas.openxmlformats.org/officeDocument/2006/relationships" xmlns:p="http://schemas.openxmlformats.org/presentationml/2006/main">
+  <p:cSld>
+    <p:spTree>
+      <p:nvGrpSpPr>
+        <p:cNvPr id="1" name=""/>
+        <p:cNvGrpSpPr/>
+        <p:nvPr/>
+      </p:nvGrpSpPr>
+      <p:grpSpPr>
+        <a:xfrm>
+          <a:off x="0" y="0"/>
+          <a:ext cx="0" cy="0"/>
+          <a:chOff x="0" y="0"/>
+          <a:chExt cx="0" cy="0"/>
+        </a:xfrm>
+      </p:grpSpPr>
+      <p:sp>
+        <p:nvSpPr>
+          <p:cNvPr id="2" name="Title 1">
+            <a:extLst>
+              <a:ext uri="{FF2B5EF4-FFF2-40B4-BE49-F238E27FC236}">
+                <a16:creationId xmlns:a16="http://schemas.microsoft.com/office/drawing/2014/main" id="{F06ED232-3F5E-61B1-E61F-8DA938316306}"/>
+              </a:ext>
+            </a:extLst>
+          </p:cNvPr>
+          <p:cNvSpPr>
+            <a:spLocks noGrp="1"/>
+          </p:cNvSpPr>
+          <p:nvPr>
+            <p:ph type="title"/>
+          </p:nvPr>
+        </p:nvSpPr>
+        <p:spPr/>
+        <p:txBody>
+          <a:bodyPr/>
+          <a:lstStyle/>
+          <a:p>
+            <a:r>
+              <a:rPr lang="en-US" dirty="0"/>
+              <a:t>Angle test</a:t>
+            </a:r>
+          </a:p>
+        </p:txBody>
+      </p:sp>
+      <p:sp>
+        <p:nvSpPr>
+          <p:cNvPr id="6" name="TextBox 5">
+            <a:extLst>
+              <a:ext uri="{FF2B5EF4-FFF2-40B4-BE49-F238E27FC236}">
+                <a16:creationId xmlns:a16="http://schemas.microsoft.com/office/drawing/2014/main" id="{51FBCCF5-06D0-4A88-D221-08B91CAB6B39}"/>
+              </a:ext>
+            </a:extLst>
+          </p:cNvPr>
+          <p:cNvSpPr txBox="1"/>
+          <p:nvPr/>
+        </p:nvSpPr>
+        <p:spPr>
+          <a:xfrm>
+            <a:off x="6894394" y="1606477"/>
+            <a:ext cx="4386470" cy="3139321"/>
+          </a:xfrm>
+          <a:prstGeom prst="rect">
+            <a:avLst/>
+          </a:prstGeom>
+          <a:noFill/>
+        </p:spPr>
+        <p:txBody>
+          <a:bodyPr wrap="square" rtlCol="0">
+            <a:spAutoFit/>
+          </a:bodyPr>
+          <a:lstStyle/>
+          <a:p>
+            <a:r>
+              <a:rPr lang="en-US" dirty="0"/>
+              <a:t>For smaller radius the difference between the peak and bottom </a:t>
+            </a:r>
+            <a:r>
+              <a:rPr lang="en-US" dirty="0" err="1"/>
+              <a:t>plateu</a:t>
+            </a:r>
+            <a:r>
+              <a:rPr lang="en-US" dirty="0"/>
+              <a:t> become smaller from 4 times to 3 times the difference.</a:t>
+            </a:r>
+          </a:p>
+          <a:p>
+            <a:endParaRPr lang="en-US" dirty="0"/>
+          </a:p>
+          <a:p>
+            <a:endParaRPr lang="en-US" dirty="0"/>
+          </a:p>
+          <a:p>
+            <a:r>
+              <a:rPr lang="en-US" dirty="0"/>
+              <a:t>The issue is that these voxels have no min acceptance angle, so this is not an accurate representation of what the detector would see. </a:t>
+            </a:r>
+          </a:p>
+          <a:p>
+            <a:endParaRPr lang="en-US" dirty="0"/>
+          </a:p>
+        </p:txBody>
+      </p:sp>
+      <p:pic>
+        <p:nvPicPr>
+          <p:cNvPr id="10" name="Content Placeholder 9">
+            <a:extLst>
+              <a:ext uri="{FF2B5EF4-FFF2-40B4-BE49-F238E27FC236}">
+                <a16:creationId xmlns:a16="http://schemas.microsoft.com/office/drawing/2014/main" id="{BC47EA91-0DF6-26FD-0684-6A5A7A09E81F}"/>
+              </a:ext>
+            </a:extLst>
+          </p:cNvPr>
+          <p:cNvPicPr>
+            <a:picLocks noGrp="1" noChangeAspect="1"/>
+          </p:cNvPicPr>
+          <p:nvPr>
+            <p:ph idx="1"/>
+          </p:nvPr>
+        </p:nvPicPr>
+        <p:blipFill>
+          <a:blip r:embed="rId2">
+            <a:extLst>
+              <a:ext uri="{28A0092B-C50C-407E-A947-70E740481C1C}">
+                <a14:useLocalDpi xmlns:a14="http://schemas.microsoft.com/office/drawing/2010/main" val="0"/>
+              </a:ext>
+            </a:extLst>
+          </a:blip>
+          <a:stretch>
+            <a:fillRect/>
+          </a:stretch>
+        </p:blipFill>
+        <p:spPr>
+          <a:xfrm>
+            <a:off x="377707" y="1606477"/>
+            <a:ext cx="6398406" cy="4798805"/>
+          </a:xfrm>
+          <a:prstGeom prst="rect">
+            <a:avLst/>
+          </a:prstGeom>
+        </p:spPr>
+      </p:pic>
+      <p:sp>
+        <p:nvSpPr>
+          <p:cNvPr id="11" name="Rectangle 10">
+            <a:extLst>
+              <a:ext uri="{FF2B5EF4-FFF2-40B4-BE49-F238E27FC236}">
+                <a16:creationId xmlns:a16="http://schemas.microsoft.com/office/drawing/2014/main" id="{3D733DC3-FC48-DED9-C563-138E8D47F0E9}"/>
+              </a:ext>
+            </a:extLst>
+          </p:cNvPr>
+          <p:cNvSpPr/>
+          <p:nvPr/>
+        </p:nvSpPr>
+        <p:spPr>
+          <a:xfrm>
+            <a:off x="9173028" y="4943094"/>
+            <a:ext cx="616857" cy="616857"/>
+          </a:xfrm>
+          <a:prstGeom prst="rect">
+            <a:avLst/>
+          </a:prstGeom>
+        </p:spPr>
+        <p:style>
+          <a:lnRef idx="1">
+            <a:schemeClr val="dk1"/>
+          </a:lnRef>
+          <a:fillRef idx="2">
+            <a:schemeClr val="dk1"/>
+          </a:fillRef>
+          <a:effectRef idx="1">
+            <a:schemeClr val="dk1"/>
+          </a:effectRef>
+          <a:fontRef idx="minor">
+            <a:schemeClr val="dk1"/>
+          </a:fontRef>
+        </p:style>
+        <p:txBody>
+          <a:bodyPr rtlCol="0" anchor="ctr"/>
+          <a:lstStyle/>
+          <a:p>
+            <a:pPr algn="ctr"/>
+            <a:endParaRPr lang="en-US"/>
+          </a:p>
+        </p:txBody>
+      </p:sp>
+      <p:cxnSp>
+        <p:nvCxnSpPr>
+          <p:cNvPr id="13" name="Straight Arrow Connector 12">
+            <a:extLst>
+              <a:ext uri="{FF2B5EF4-FFF2-40B4-BE49-F238E27FC236}">
+                <a16:creationId xmlns:a16="http://schemas.microsoft.com/office/drawing/2014/main" id="{2446E7BA-52AF-AEB3-B765-9984E3705A58}"/>
+              </a:ext>
+            </a:extLst>
+          </p:cNvPr>
+          <p:cNvCxnSpPr>
+            <a:endCxn id="11" idx="1"/>
+          </p:cNvCxnSpPr>
+          <p:nvPr/>
+        </p:nvCxnSpPr>
+        <p:spPr>
+          <a:xfrm flipV="1">
+            <a:off x="8040914" y="5251523"/>
+            <a:ext cx="1132114" cy="677563"/>
+          </a:xfrm>
+          <a:prstGeom prst="straightConnector1">
+            <a:avLst/>
+          </a:prstGeom>
+          <a:ln>
+            <a:tailEnd type="triangle"/>
+          </a:ln>
+        </p:spPr>
+        <p:style>
+          <a:lnRef idx="2">
+            <a:schemeClr val="accent1"/>
+          </a:lnRef>
+          <a:fillRef idx="0">
+            <a:schemeClr val="accent1"/>
+          </a:fillRef>
+          <a:effectRef idx="1">
+            <a:schemeClr val="accent1"/>
+          </a:effectRef>
+          <a:fontRef idx="minor">
+            <a:schemeClr val="tx1"/>
+          </a:fontRef>
+        </p:style>
+      </p:cxnSp>
+      <p:cxnSp>
+        <p:nvCxnSpPr>
+          <p:cNvPr id="14" name="Straight Arrow Connector 13">
+            <a:extLst>
+              <a:ext uri="{FF2B5EF4-FFF2-40B4-BE49-F238E27FC236}">
+                <a16:creationId xmlns:a16="http://schemas.microsoft.com/office/drawing/2014/main" id="{D74B5380-F88C-9EC7-2CB3-440884F34EB8}"/>
+              </a:ext>
+            </a:extLst>
+          </p:cNvPr>
+          <p:cNvCxnSpPr>
+            <a:cxnSpLocks/>
+          </p:cNvCxnSpPr>
+          <p:nvPr/>
+        </p:nvCxnSpPr>
+        <p:spPr>
+          <a:xfrm flipV="1">
+            <a:off x="8040914" y="5405737"/>
+            <a:ext cx="1197429" cy="523349"/>
+          </a:xfrm>
+          <a:prstGeom prst="straightConnector1">
+            <a:avLst/>
+          </a:prstGeom>
+          <a:ln>
+            <a:tailEnd type="triangle"/>
+          </a:ln>
+        </p:spPr>
+        <p:style>
+          <a:lnRef idx="2">
+            <a:schemeClr val="accent1"/>
+          </a:lnRef>
+          <a:fillRef idx="0">
+            <a:schemeClr val="accent1"/>
+          </a:fillRef>
+          <a:effectRef idx="1">
+            <a:schemeClr val="accent1"/>
+          </a:effectRef>
+          <a:fontRef idx="minor">
+            <a:schemeClr val="tx1"/>
+          </a:fontRef>
+        </p:style>
+      </p:cxnSp>
+      <p:cxnSp>
+        <p:nvCxnSpPr>
+          <p:cNvPr id="16" name="Straight Arrow Connector 15">
+            <a:extLst>
+              <a:ext uri="{FF2B5EF4-FFF2-40B4-BE49-F238E27FC236}">
+                <a16:creationId xmlns:a16="http://schemas.microsoft.com/office/drawing/2014/main" id="{C23572D7-8C16-97AE-799F-DF6FF2D7D816}"/>
+              </a:ext>
+            </a:extLst>
+          </p:cNvPr>
+          <p:cNvCxnSpPr>
+            <a:cxnSpLocks/>
+            <a:endCxn id="11" idx="2"/>
+          </p:cNvCxnSpPr>
+          <p:nvPr/>
+        </p:nvCxnSpPr>
+        <p:spPr>
+          <a:xfrm flipV="1">
+            <a:off x="8040914" y="5559951"/>
+            <a:ext cx="1440543" cy="339606"/>
+          </a:xfrm>
+          <a:prstGeom prst="straightConnector1">
+            <a:avLst/>
+          </a:prstGeom>
+          <a:ln>
+            <a:tailEnd type="triangle"/>
+          </a:ln>
+        </p:spPr>
+        <p:style>
+          <a:lnRef idx="2">
+            <a:schemeClr val="accent4"/>
+          </a:lnRef>
+          <a:fillRef idx="0">
+            <a:schemeClr val="accent4"/>
+          </a:fillRef>
+          <a:effectRef idx="1">
+            <a:schemeClr val="accent4"/>
+          </a:effectRef>
+          <a:fontRef idx="minor">
+            <a:schemeClr val="tx1"/>
+          </a:fontRef>
+        </p:style>
+      </p:cxnSp>
+      <p:cxnSp>
+        <p:nvCxnSpPr>
+          <p:cNvPr id="19" name="Straight Arrow Connector 18">
+            <a:extLst>
+              <a:ext uri="{FF2B5EF4-FFF2-40B4-BE49-F238E27FC236}">
+                <a16:creationId xmlns:a16="http://schemas.microsoft.com/office/drawing/2014/main" id="{18E1BEBB-D3BD-C788-116B-BCD1B5B370CA}"/>
+              </a:ext>
+            </a:extLst>
+          </p:cNvPr>
+          <p:cNvCxnSpPr>
+            <a:cxnSpLocks/>
+          </p:cNvCxnSpPr>
+          <p:nvPr/>
+        </p:nvCxnSpPr>
+        <p:spPr>
+          <a:xfrm flipV="1">
+            <a:off x="8073571" y="5559951"/>
+            <a:ext cx="1716314" cy="383973"/>
+          </a:xfrm>
+          <a:prstGeom prst="straightConnector1">
+            <a:avLst/>
+          </a:prstGeom>
+          <a:ln>
+            <a:tailEnd type="triangle"/>
+          </a:ln>
+        </p:spPr>
+        <p:style>
+          <a:lnRef idx="2">
+            <a:schemeClr val="accent4"/>
+          </a:lnRef>
+          <a:fillRef idx="0">
+            <a:schemeClr val="accent4"/>
+          </a:fillRef>
+          <a:effectRef idx="1">
+            <a:schemeClr val="accent4"/>
+          </a:effectRef>
+          <a:fontRef idx="minor">
+            <a:schemeClr val="tx1"/>
+          </a:fontRef>
+        </p:style>
+      </p:cxnSp>
+      <p:cxnSp>
+        <p:nvCxnSpPr>
+          <p:cNvPr id="21" name="Straight Arrow Connector 20">
+            <a:extLst>
+              <a:ext uri="{FF2B5EF4-FFF2-40B4-BE49-F238E27FC236}">
+                <a16:creationId xmlns:a16="http://schemas.microsoft.com/office/drawing/2014/main" id="{829942EB-0800-16DC-8273-AB7DE88DBC9B}"/>
+              </a:ext>
+            </a:extLst>
+          </p:cNvPr>
+          <p:cNvCxnSpPr>
+            <a:cxnSpLocks/>
+          </p:cNvCxnSpPr>
+          <p:nvPr/>
+        </p:nvCxnSpPr>
+        <p:spPr>
+          <a:xfrm flipV="1">
+            <a:off x="8073571" y="5899557"/>
+            <a:ext cx="1338943" cy="51712"/>
+          </a:xfrm>
+          <a:prstGeom prst="straightConnector1">
+            <a:avLst/>
+          </a:prstGeom>
+          <a:ln>
+            <a:tailEnd type="triangle"/>
+          </a:ln>
+        </p:spPr>
+        <p:style>
+          <a:lnRef idx="2">
+            <a:schemeClr val="accent4"/>
+          </a:lnRef>
+          <a:fillRef idx="0">
+            <a:schemeClr val="accent4"/>
+          </a:fillRef>
+          <a:effectRef idx="1">
+            <a:schemeClr val="accent4"/>
+          </a:effectRef>
+          <a:fontRef idx="minor">
+            <a:schemeClr val="tx1"/>
+          </a:fontRef>
+        </p:style>
+      </p:cxnSp>
+      <p:cxnSp>
+        <p:nvCxnSpPr>
+          <p:cNvPr id="23" name="Straight Arrow Connector 22">
+            <a:extLst>
+              <a:ext uri="{FF2B5EF4-FFF2-40B4-BE49-F238E27FC236}">
+                <a16:creationId xmlns:a16="http://schemas.microsoft.com/office/drawing/2014/main" id="{96844AB8-9997-FC6E-4794-B6455324B225}"/>
+              </a:ext>
+            </a:extLst>
+          </p:cNvPr>
+          <p:cNvCxnSpPr>
+            <a:cxnSpLocks/>
+          </p:cNvCxnSpPr>
+          <p:nvPr/>
+        </p:nvCxnSpPr>
+        <p:spPr>
+          <a:xfrm flipV="1">
+            <a:off x="9412514" y="5590304"/>
+            <a:ext cx="246743" cy="309253"/>
+          </a:xfrm>
+          <a:prstGeom prst="straightConnector1">
+            <a:avLst/>
+          </a:prstGeom>
+          <a:ln>
+            <a:tailEnd type="triangle"/>
+          </a:ln>
+        </p:spPr>
+        <p:style>
+          <a:lnRef idx="2">
+            <a:schemeClr val="accent4"/>
+          </a:lnRef>
+          <a:fillRef idx="0">
+            <a:schemeClr val="accent4"/>
+          </a:fillRef>
+          <a:effectRef idx="1">
+            <a:schemeClr val="accent4"/>
+          </a:effectRef>
+          <a:fontRef idx="minor">
+            <a:schemeClr val="tx1"/>
+          </a:fontRef>
+        </p:style>
+      </p:cxnSp>
+      <p:cxnSp>
+        <p:nvCxnSpPr>
+          <p:cNvPr id="27" name="Straight Arrow Connector 26">
+            <a:extLst>
+              <a:ext uri="{FF2B5EF4-FFF2-40B4-BE49-F238E27FC236}">
+                <a16:creationId xmlns:a16="http://schemas.microsoft.com/office/drawing/2014/main" id="{10AC60BB-30F4-3A48-AF82-7AA1061789CA}"/>
+              </a:ext>
+            </a:extLst>
+          </p:cNvPr>
+          <p:cNvCxnSpPr>
+            <a:cxnSpLocks/>
+          </p:cNvCxnSpPr>
+          <p:nvPr/>
+        </p:nvCxnSpPr>
+        <p:spPr>
+          <a:xfrm flipV="1">
+            <a:off x="8073571" y="5054227"/>
+            <a:ext cx="1132114" cy="814153"/>
+          </a:xfrm>
+          <a:prstGeom prst="straightConnector1">
+            <a:avLst/>
+          </a:prstGeom>
+          <a:ln>
+            <a:tailEnd type="triangle"/>
+          </a:ln>
+        </p:spPr>
+        <p:style>
+          <a:lnRef idx="2">
+            <a:schemeClr val="accent1"/>
+          </a:lnRef>
+          <a:fillRef idx="0">
+            <a:schemeClr val="accent1"/>
+          </a:fillRef>
+          <a:effectRef idx="1">
+            <a:schemeClr val="accent1"/>
+          </a:effectRef>
+          <a:fontRef idx="minor">
+            <a:schemeClr val="tx1"/>
+          </a:fontRef>
+        </p:style>
+      </p:cxnSp>
+      <p:cxnSp>
+        <p:nvCxnSpPr>
+          <p:cNvPr id="30" name="Straight Arrow Connector 29">
+            <a:extLst>
+              <a:ext uri="{FF2B5EF4-FFF2-40B4-BE49-F238E27FC236}">
+                <a16:creationId xmlns:a16="http://schemas.microsoft.com/office/drawing/2014/main" id="{FF38CD91-A5D7-367E-43E5-D329AB265129}"/>
+              </a:ext>
+            </a:extLst>
+          </p:cNvPr>
+          <p:cNvCxnSpPr>
+            <a:cxnSpLocks/>
+          </p:cNvCxnSpPr>
+          <p:nvPr/>
+        </p:nvCxnSpPr>
+        <p:spPr>
+          <a:xfrm flipV="1">
+            <a:off x="8048235" y="4738823"/>
+            <a:ext cx="1364279" cy="1186590"/>
+          </a:xfrm>
+          <a:prstGeom prst="straightConnector1">
+            <a:avLst/>
+          </a:prstGeom>
+          <a:ln>
+            <a:tailEnd type="triangle"/>
+          </a:ln>
+        </p:spPr>
+        <p:style>
+          <a:lnRef idx="2">
+            <a:schemeClr val="accent1"/>
+          </a:lnRef>
+          <a:fillRef idx="0">
+            <a:schemeClr val="accent1"/>
+          </a:fillRef>
+          <a:effectRef idx="1">
+            <a:schemeClr val="accent1"/>
+          </a:effectRef>
+          <a:fontRef idx="minor">
+            <a:schemeClr val="tx1"/>
+          </a:fontRef>
+        </p:style>
+      </p:cxnSp>
+      <p:cxnSp>
+        <p:nvCxnSpPr>
+          <p:cNvPr id="35" name="Straight Arrow Connector 34">
+            <a:extLst>
+              <a:ext uri="{FF2B5EF4-FFF2-40B4-BE49-F238E27FC236}">
+                <a16:creationId xmlns:a16="http://schemas.microsoft.com/office/drawing/2014/main" id="{ECF50F66-9F1C-938E-AD51-AA349E8002A1}"/>
+              </a:ext>
+            </a:extLst>
+          </p:cNvPr>
+          <p:cNvCxnSpPr/>
+          <p:nvPr/>
+        </p:nvCxnSpPr>
+        <p:spPr>
+          <a:xfrm>
+            <a:off x="9376073" y="4760199"/>
+            <a:ext cx="210766" cy="138259"/>
+          </a:xfrm>
+          <a:prstGeom prst="straightConnector1">
+            <a:avLst/>
+          </a:prstGeom>
+          <a:ln>
+            <a:tailEnd type="triangle"/>
+          </a:ln>
+        </p:spPr>
+        <p:style>
+          <a:lnRef idx="2">
+            <a:schemeClr val="accent1"/>
+          </a:lnRef>
+          <a:fillRef idx="0">
+            <a:schemeClr val="accent1"/>
+          </a:fillRef>
+          <a:effectRef idx="1">
+            <a:schemeClr val="accent1"/>
+          </a:effectRef>
+          <a:fontRef idx="minor">
+            <a:schemeClr val="tx1"/>
+          </a:fontRef>
+        </p:style>
+      </p:cxnSp>
+      <p:cxnSp>
+        <p:nvCxnSpPr>
+          <p:cNvPr id="36" name="Straight Arrow Connector 35">
+            <a:extLst>
+              <a:ext uri="{FF2B5EF4-FFF2-40B4-BE49-F238E27FC236}">
+                <a16:creationId xmlns:a16="http://schemas.microsoft.com/office/drawing/2014/main" id="{44C35404-9943-BE1E-3971-914160D3CB93}"/>
+              </a:ext>
+            </a:extLst>
+          </p:cNvPr>
+          <p:cNvCxnSpPr>
+            <a:cxnSpLocks/>
+          </p:cNvCxnSpPr>
+          <p:nvPr/>
+        </p:nvCxnSpPr>
+        <p:spPr>
+          <a:xfrm flipV="1">
+            <a:off x="8113713" y="5575466"/>
+            <a:ext cx="1149966" cy="334359"/>
+          </a:xfrm>
+          <a:prstGeom prst="straightConnector1">
+            <a:avLst/>
+          </a:prstGeom>
+          <a:ln>
+            <a:tailEnd type="triangle"/>
+          </a:ln>
+        </p:spPr>
+        <p:style>
+          <a:lnRef idx="2">
+            <a:schemeClr val="accent4"/>
+          </a:lnRef>
+          <a:fillRef idx="0">
+            <a:schemeClr val="accent4"/>
+          </a:fillRef>
+          <a:effectRef idx="1">
+            <a:schemeClr val="accent4"/>
+          </a:effectRef>
+          <a:fontRef idx="minor">
+            <a:schemeClr val="tx1"/>
+          </a:fontRef>
+        </p:style>
+      </p:cxnSp>
+    </p:spTree>
+    <p:extLst>
+      <p:ext uri="{BB962C8B-B14F-4D97-AF65-F5344CB8AC3E}">
+        <p14:creationId xmlns:p14="http://schemas.microsoft.com/office/powerpoint/2010/main" val="2677060751"/>
+      </p:ext>
+    </p:extLst>
+  </p:cSld>
+  <p:clrMapOvr>
+    <a:masterClrMapping/>
+  </p:clrMapOvr>
+</p:sld>
+</file>
+
+<file path=ppt/slides/slide9.xml><?xml version="1.0" encoding="utf-8"?>
+<p:sld xmlns:a="http://schemas.openxmlformats.org/drawingml/2006/main" xmlns:r="http://schemas.openxmlformats.org/officeDocument/2006/relationships" xmlns:p="http://schemas.openxmlformats.org/presentationml/2006/main">
+  <p:cSld>
+    <p:spTree>
+      <p:nvGrpSpPr>
+        <p:cNvPr id="1" name=""/>
+        <p:cNvGrpSpPr/>
+        <p:nvPr/>
+      </p:nvGrpSpPr>
+      <p:grpSpPr>
+        <a:xfrm>
+          <a:off x="0" y="0"/>
+          <a:ext cx="0" cy="0"/>
+          <a:chOff x="0" y="0"/>
+          <a:chExt cx="0" cy="0"/>
+        </a:xfrm>
+      </p:grpSpPr>
+    </p:spTree>
+    <p:extLst>
+      <p:ext uri="{BB962C8B-B14F-4D97-AF65-F5344CB8AC3E}">
+        <p14:creationId xmlns:p14="http://schemas.microsoft.com/office/powerpoint/2010/main" val="1017295827"/>
+      </p:ext>
+    </p:extLst>
+  </p:cSld>
+  <p:clrMapOvr>
+    <a:masterClrMapping/>
+  </p:clrMapOvr>
+</p:sld>
+</file>
+
 <file path=ppt/theme/theme1.xml><?xml version="1.0" encoding="utf-8"?>
 <a:theme xmlns:a="http://schemas.openxmlformats.org/drawingml/2006/main" name="Ion">
   <a:themeElements>

--- a/MonteCarlo/MonteCarloProj/Presentation for West River.pptx
+++ b/MonteCarlo/MonteCarloProj/Presentation for West River.pptx
@@ -10,17 +10,21 @@
     <p:sldId id="264" r:id="rId4"/>
     <p:sldId id="265" r:id="rId5"/>
     <p:sldId id="266" r:id="rId6"/>
-    <p:sldId id="268" r:id="rId7"/>
-    <p:sldId id="269" r:id="rId8"/>
-    <p:sldId id="271" r:id="rId9"/>
-    <p:sldId id="270" r:id="rId10"/>
-    <p:sldId id="267" r:id="rId11"/>
-    <p:sldId id="258" r:id="rId12"/>
-    <p:sldId id="260" r:id="rId13"/>
-    <p:sldId id="261" r:id="rId14"/>
-    <p:sldId id="262" r:id="rId15"/>
-    <p:sldId id="259" r:id="rId16"/>
-    <p:sldId id="257" r:id="rId17"/>
+    <p:sldId id="269" r:id="rId7"/>
+    <p:sldId id="271" r:id="rId8"/>
+    <p:sldId id="272" r:id="rId9"/>
+    <p:sldId id="273" r:id="rId10"/>
+    <p:sldId id="274" r:id="rId11"/>
+    <p:sldId id="275" r:id="rId12"/>
+    <p:sldId id="268" r:id="rId13"/>
+    <p:sldId id="270" r:id="rId14"/>
+    <p:sldId id="267" r:id="rId15"/>
+    <p:sldId id="258" r:id="rId16"/>
+    <p:sldId id="260" r:id="rId17"/>
+    <p:sldId id="261" r:id="rId18"/>
+    <p:sldId id="262" r:id="rId19"/>
+    <p:sldId id="259" r:id="rId20"/>
+    <p:sldId id="257" r:id="rId21"/>
   </p:sldIdLst>
   <p:sldSz cx="12192000" cy="6858000"/>
   <p:notesSz cx="6858000" cy="9144000"/>
@@ -6208,7 +6212,7 @@
           <p:cNvPr id="2" name="Title 1">
             <a:extLst>
               <a:ext uri="{FF2B5EF4-FFF2-40B4-BE49-F238E27FC236}">
-                <a16:creationId xmlns:a16="http://schemas.microsoft.com/office/drawing/2014/main" id="{4840326F-948C-8CD6-61AF-24B753B4D2CB}"/>
+                <a16:creationId xmlns:a16="http://schemas.microsoft.com/office/drawing/2014/main" id="{5A714353-51EB-52A8-831C-C3B35976DF0F}"/>
               </a:ext>
             </a:extLst>
           </p:cNvPr>
@@ -6226,72 +6230,51 @@
           <a:p>
             <a:r>
               <a:rPr lang="en-US" dirty="0"/>
-              <a:t>Other Parameters</a:t>
-            </a:r>
-          </a:p>
-        </p:txBody>
-      </p:sp>
-      <p:sp>
-        <p:nvSpPr>
-          <p:cNvPr id="3" name="Content Placeholder 2">
+              <a:t>Results for the off beam detector at 50 mm continued</a:t>
+            </a:r>
+          </a:p>
+        </p:txBody>
+      </p:sp>
+      <p:pic>
+        <p:nvPicPr>
+          <p:cNvPr id="4" name="Picture 3">
             <a:extLst>
               <a:ext uri="{FF2B5EF4-FFF2-40B4-BE49-F238E27FC236}">
-                <a16:creationId xmlns:a16="http://schemas.microsoft.com/office/drawing/2014/main" id="{D8FB0220-23E7-8FF9-3EFB-50936F2D4F6A}"/>
+                <a16:creationId xmlns:a16="http://schemas.microsoft.com/office/drawing/2014/main" id="{9CF6A7D8-BF7F-B10E-F428-7255E2F8EA39}"/>
               </a:ext>
             </a:extLst>
           </p:cNvPr>
-          <p:cNvSpPr>
-            <a:spLocks noGrp="1"/>
-          </p:cNvSpPr>
-          <p:nvPr>
-            <p:ph idx="1"/>
-          </p:nvPr>
-        </p:nvSpPr>
+          <p:cNvPicPr>
+            <a:picLocks noChangeAspect="1"/>
+          </p:cNvPicPr>
+          <p:nvPr/>
+        </p:nvPicPr>
+        <p:blipFill>
+          <a:blip r:embed="rId2">
+            <a:extLst>
+              <a:ext uri="{28A0092B-C50C-407E-A947-70E740481C1C}">
+                <a14:useLocalDpi xmlns:a14="http://schemas.microsoft.com/office/drawing/2010/main" val="0"/>
+              </a:ext>
+            </a:extLst>
+          </a:blip>
+          <a:stretch>
+            <a:fillRect/>
+          </a:stretch>
+        </p:blipFill>
         <p:spPr>
           <a:xfrm>
-            <a:off x="1103311" y="2052918"/>
-            <a:ext cx="9630950" cy="4195481"/>
-          </a:xfrm>
-        </p:spPr>
-        <p:txBody>
-          <a:bodyPr/>
-          <a:lstStyle/>
-          <a:p>
-            <a:r>
-              <a:rPr lang="en-US" dirty="0"/>
-              <a:t>Domain: 500mm by 500mm by 500mm ( Can be reduced to 100mm for some tests)</a:t>
-            </a:r>
-          </a:p>
-          <a:p>
-            <a:r>
-              <a:rPr lang="en-US" dirty="0"/>
-              <a:t>Back Scatter Fraction 0.024 (May be tuned in via Petzold)(n=1.1,u=3.4)</a:t>
-            </a:r>
-          </a:p>
-          <a:p>
-            <a:r>
-              <a:rPr lang="en-US" dirty="0"/>
-              <a:t>Mua:0.003</a:t>
-            </a:r>
-          </a:p>
-          <a:p>
-            <a:r>
-              <a:rPr lang="en-US" dirty="0"/>
-              <a:t>Mus: 0.015 to 0.05</a:t>
-            </a:r>
-          </a:p>
-          <a:p>
-            <a:endParaRPr lang="en-US" dirty="0"/>
-          </a:p>
-          <a:p>
-            <a:endParaRPr lang="en-US" dirty="0"/>
-          </a:p>
-        </p:txBody>
-      </p:sp>
+            <a:off x="2738361" y="1952070"/>
+            <a:ext cx="6100839" cy="4575629"/>
+          </a:xfrm>
+          <a:prstGeom prst="rect">
+            <a:avLst/>
+          </a:prstGeom>
+        </p:spPr>
+      </p:pic>
     </p:spTree>
     <p:extLst>
       <p:ext uri="{BB962C8B-B14F-4D97-AF65-F5344CB8AC3E}">
-        <p14:creationId xmlns:p14="http://schemas.microsoft.com/office/powerpoint/2010/main" val="944707997"/>
+        <p14:creationId xmlns:p14="http://schemas.microsoft.com/office/powerpoint/2010/main" val="4100624530"/>
       </p:ext>
     </p:extLst>
   </p:cSld>
@@ -6323,7 +6306,7 @@
           <p:cNvPr id="2" name="Title 1">
             <a:extLst>
               <a:ext uri="{FF2B5EF4-FFF2-40B4-BE49-F238E27FC236}">
-                <a16:creationId xmlns:a16="http://schemas.microsoft.com/office/drawing/2014/main" id="{68CDE3B1-A1D1-CD63-EFDA-1AE7F26FA84E}"/>
+                <a16:creationId xmlns:a16="http://schemas.microsoft.com/office/drawing/2014/main" id="{150A4619-7D3B-529C-5753-894E1F0D3950}"/>
               </a:ext>
             </a:extLst>
           </p:cNvPr>
@@ -6341,183 +6324,89 @@
           <a:p>
             <a:r>
               <a:rPr lang="en-US" dirty="0"/>
-              <a:t>Sanity Checks</a:t>
-            </a:r>
-          </a:p>
-        </p:txBody>
-      </p:sp>
-      <p:sp>
-        <p:nvSpPr>
-          <p:cNvPr id="3" name="Content Placeholder 2">
+              <a:t>Results on the face perpendicular to the beamline at 100mm</a:t>
+            </a:r>
+          </a:p>
+        </p:txBody>
+      </p:sp>
+      <p:pic>
+        <p:nvPicPr>
+          <p:cNvPr id="5" name="Content Placeholder 4">
             <a:extLst>
               <a:ext uri="{FF2B5EF4-FFF2-40B4-BE49-F238E27FC236}">
-                <a16:creationId xmlns:a16="http://schemas.microsoft.com/office/drawing/2014/main" id="{A967A8ED-E292-CF61-9F53-B9DCD8CEFC7E}"/>
+                <a16:creationId xmlns:a16="http://schemas.microsoft.com/office/drawing/2014/main" id="{ED3A0969-9A81-1DC8-873A-2335A282355B}"/>
               </a:ext>
             </a:extLst>
           </p:cNvPr>
-          <p:cNvSpPr>
-            <a:spLocks noGrp="1"/>
-          </p:cNvSpPr>
+          <p:cNvPicPr>
+            <a:picLocks noGrp="1" noChangeAspect="1"/>
+          </p:cNvPicPr>
           <p:nvPr>
             <p:ph idx="1"/>
           </p:nvPr>
-        </p:nvSpPr>
-        <p:spPr/>
-        <p:txBody>
-          <a:bodyPr/>
-          <a:lstStyle/>
-          <a:p>
-            <a:endParaRPr lang="en-US" dirty="0"/>
-          </a:p>
-        </p:txBody>
-      </p:sp>
-      <p:sp>
-        <p:nvSpPr>
-          <p:cNvPr id="4" name="Text Placeholder 3">
+        </p:nvPicPr>
+        <p:blipFill>
+          <a:blip r:embed="rId2">
+            <a:extLst>
+              <a:ext uri="{28A0092B-C50C-407E-A947-70E740481C1C}">
+                <a14:useLocalDpi xmlns:a14="http://schemas.microsoft.com/office/drawing/2010/main" val="0"/>
+              </a:ext>
+            </a:extLst>
+          </a:blip>
+          <a:stretch>
+            <a:fillRect/>
+          </a:stretch>
+        </p:blipFill>
+        <p:spPr>
+          <a:xfrm>
+            <a:off x="501651" y="2292123"/>
+            <a:ext cx="5594349" cy="4195762"/>
+          </a:xfrm>
+          <a:prstGeom prst="rect">
+            <a:avLst/>
+          </a:prstGeom>
+        </p:spPr>
+      </p:pic>
+      <p:pic>
+        <p:nvPicPr>
+          <p:cNvPr id="7" name="Picture 6">
             <a:extLst>
               <a:ext uri="{FF2B5EF4-FFF2-40B4-BE49-F238E27FC236}">
-                <a16:creationId xmlns:a16="http://schemas.microsoft.com/office/drawing/2014/main" id="{1D46CF0A-A784-9712-C2C8-FC454923D163}"/>
+                <a16:creationId xmlns:a16="http://schemas.microsoft.com/office/drawing/2014/main" id="{3AD234F4-79D5-3A6E-CDEB-2BE150ECE53E}"/>
               </a:ext>
             </a:extLst>
           </p:cNvPr>
-          <p:cNvSpPr>
-            <a:spLocks noGrp="1"/>
-          </p:cNvSpPr>
-          <p:nvPr>
-            <p:ph type="body" sz="half" idx="2"/>
-          </p:nvPr>
-        </p:nvSpPr>
-        <p:spPr/>
-        <p:txBody>
-          <a:bodyPr>
-            <a:normAutofit fontScale="55000" lnSpcReduction="20000"/>
-          </a:bodyPr>
-          <a:lstStyle/>
-          <a:p>
-            <a:pPr marL="342900" indent="-342900">
-              <a:buAutoNum type="arabicPeriod"/>
-            </a:pPr>
-            <a:r>
-              <a:rPr lang="en-US" dirty="0"/>
-              <a:t>Under 0 scattering:</a:t>
-            </a:r>
-          </a:p>
-          <a:p>
-            <a:pPr marL="800100" lvl="1" indent="-342900">
-              <a:buAutoNum type="arabicPeriod"/>
-            </a:pPr>
-            <a:r>
-              <a:rPr lang="en-US" dirty="0"/>
-              <a:t>Peak at zero degrees</a:t>
-            </a:r>
-          </a:p>
-          <a:p>
-            <a:pPr marL="800100" lvl="1" indent="-342900">
-              <a:buAutoNum type="arabicPeriod"/>
-            </a:pPr>
-            <a:r>
-              <a:rPr lang="en-US" dirty="0"/>
-              <a:t>Absorption dependance must recover the beer lambert law</a:t>
-            </a:r>
-          </a:p>
-          <a:p>
-            <a:pPr marL="342900" indent="-342900">
-              <a:buAutoNum type="arabicPeriod"/>
-            </a:pPr>
-            <a:r>
-              <a:rPr lang="en-US" dirty="0"/>
-              <a:t>Under conditions where 1 scattering event per photon on average occurs:</a:t>
-            </a:r>
-          </a:p>
-          <a:p>
-            <a:pPr marL="800100" lvl="1" indent="-342900">
-              <a:buAutoNum type="arabicPeriod"/>
-            </a:pPr>
-            <a:r>
-              <a:rPr lang="en-US" dirty="0"/>
-              <a:t>We must recover the Fornier Forand distribution</a:t>
-            </a:r>
-          </a:p>
-          <a:p>
-            <a:pPr marL="800100" lvl="1" indent="-342900">
-              <a:buAutoNum type="arabicPeriod"/>
-            </a:pPr>
-            <a:r>
-              <a:rPr lang="en-US" dirty="0"/>
-              <a:t>HG and FF must be close</a:t>
-            </a:r>
-          </a:p>
-          <a:p>
-            <a:pPr marL="342900" indent="-342900">
-              <a:buAutoNum type="arabicPeriod"/>
-            </a:pPr>
-            <a:r>
-              <a:rPr lang="en-US" dirty="0"/>
-              <a:t>Under reasonable scattering:</a:t>
-            </a:r>
-          </a:p>
-          <a:p>
-            <a:pPr marL="800100" lvl="1" indent="-342900">
-              <a:buAutoNum type="arabicPeriod"/>
-            </a:pPr>
-            <a:r>
-              <a:rPr lang="en-US" dirty="0"/>
-              <a:t>Increasing photon number must reduce std of solutions</a:t>
-            </a:r>
-          </a:p>
-          <a:p>
-            <a:pPr marL="800100" lvl="1" indent="-342900">
-              <a:buAutoNum type="arabicPeriod"/>
-            </a:pPr>
-            <a:r>
-              <a:rPr lang="en-US" dirty="0"/>
-              <a:t>HG and FF must </a:t>
-            </a:r>
-            <a:r>
-              <a:rPr lang="en-US" dirty="0" err="1"/>
-              <a:t>divarge</a:t>
-            </a:r>
-            <a:endParaRPr lang="en-US" dirty="0"/>
-          </a:p>
-          <a:p>
-            <a:pPr marL="342900" indent="-342900">
-              <a:buAutoNum type="arabicPeriod"/>
-            </a:pPr>
-            <a:r>
-              <a:rPr lang="en-US" dirty="0"/>
-              <a:t> Under very large scattering:</a:t>
-            </a:r>
-          </a:p>
-          <a:p>
-            <a:pPr marL="800100" lvl="1" indent="-342900">
-              <a:buAutoNum type="arabicPeriod"/>
-            </a:pPr>
-            <a:r>
-              <a:rPr lang="en-US" dirty="0"/>
-              <a:t>Source must look isotropic at a distance with no forward bias</a:t>
-            </a:r>
-          </a:p>
-          <a:p>
-            <a:pPr marL="800100" lvl="1" indent="-342900">
-              <a:buAutoNum type="arabicPeriod"/>
-            </a:pPr>
-            <a:r>
-              <a:rPr lang="en-US" dirty="0"/>
-              <a:t>HG and FF must converge</a:t>
-            </a:r>
-          </a:p>
-          <a:p>
-            <a:pPr marL="342900" indent="-342900">
-              <a:buAutoNum type="arabicPeriod"/>
-            </a:pPr>
-            <a:endParaRPr lang="en-US" dirty="0"/>
-          </a:p>
-        </p:txBody>
-      </p:sp>
+          <p:cNvPicPr>
+            <a:picLocks noChangeAspect="1"/>
+          </p:cNvPicPr>
+          <p:nvPr/>
+        </p:nvPicPr>
+        <p:blipFill>
+          <a:blip r:embed="rId3">
+            <a:extLst>
+              <a:ext uri="{28A0092B-C50C-407E-A947-70E740481C1C}">
+                <a14:useLocalDpi xmlns:a14="http://schemas.microsoft.com/office/drawing/2010/main" val="0"/>
+              </a:ext>
+            </a:extLst>
+          </a:blip>
+          <a:stretch>
+            <a:fillRect/>
+          </a:stretch>
+        </p:blipFill>
+        <p:spPr>
+          <a:xfrm>
+            <a:off x="6314623" y="2292123"/>
+            <a:ext cx="5594350" cy="4195762"/>
+          </a:xfrm>
+          <a:prstGeom prst="rect">
+            <a:avLst/>
+          </a:prstGeom>
+        </p:spPr>
+      </p:pic>
     </p:spTree>
     <p:extLst>
       <p:ext uri="{BB962C8B-B14F-4D97-AF65-F5344CB8AC3E}">
-        <p14:creationId xmlns:p14="http://schemas.microsoft.com/office/powerpoint/2010/main" val="2081107019"/>
+        <p14:creationId xmlns:p14="http://schemas.microsoft.com/office/powerpoint/2010/main" val="3214653460"/>
       </p:ext>
     </p:extLst>
   </p:cSld>
@@ -6549,6 +6438,506 @@
           <p:cNvPr id="2" name="Title 1">
             <a:extLst>
               <a:ext uri="{FF2B5EF4-FFF2-40B4-BE49-F238E27FC236}">
+                <a16:creationId xmlns:a16="http://schemas.microsoft.com/office/drawing/2014/main" id="{B356E126-C1BE-85E8-459F-D92815FAC6FA}"/>
+              </a:ext>
+            </a:extLst>
+          </p:cNvPr>
+          <p:cNvSpPr>
+            <a:spLocks noGrp="1"/>
+          </p:cNvSpPr>
+          <p:nvPr>
+            <p:ph type="title"/>
+          </p:nvPr>
+        </p:nvSpPr>
+        <p:spPr/>
+        <p:txBody>
+          <a:bodyPr/>
+          <a:lstStyle/>
+          <a:p>
+            <a:r>
+              <a:rPr lang="en-US" dirty="0"/>
+              <a:t>Analysis Methods</a:t>
+            </a:r>
+          </a:p>
+        </p:txBody>
+      </p:sp>
+      <p:sp>
+        <p:nvSpPr>
+          <p:cNvPr id="3" name="Content Placeholder 2">
+            <a:extLst>
+              <a:ext uri="{FF2B5EF4-FFF2-40B4-BE49-F238E27FC236}">
+                <a16:creationId xmlns:a16="http://schemas.microsoft.com/office/drawing/2014/main" id="{B072FA01-4DD5-7264-9B6F-4CC46B83B25F}"/>
+              </a:ext>
+            </a:extLst>
+          </p:cNvPr>
+          <p:cNvSpPr>
+            <a:spLocks noGrp="1"/>
+          </p:cNvSpPr>
+          <p:nvPr>
+            <p:ph idx="1"/>
+          </p:nvPr>
+        </p:nvSpPr>
+        <p:spPr/>
+        <p:txBody>
+          <a:bodyPr/>
+          <a:lstStyle/>
+          <a:p>
+            <a:endParaRPr lang="en-US"/>
+          </a:p>
+        </p:txBody>
+      </p:sp>
+      <p:sp>
+        <p:nvSpPr>
+          <p:cNvPr id="4" name="Text Placeholder 3">
+            <a:extLst>
+              <a:ext uri="{FF2B5EF4-FFF2-40B4-BE49-F238E27FC236}">
+                <a16:creationId xmlns:a16="http://schemas.microsoft.com/office/drawing/2014/main" id="{5AFD19D3-F098-B794-A2BA-0DAB398D30C8}"/>
+              </a:ext>
+            </a:extLst>
+          </p:cNvPr>
+          <p:cNvSpPr>
+            <a:spLocks noGrp="1"/>
+          </p:cNvSpPr>
+          <p:nvPr>
+            <p:ph type="body" sz="half" idx="2"/>
+          </p:nvPr>
+        </p:nvSpPr>
+        <p:spPr/>
+        <p:txBody>
+          <a:bodyPr/>
+          <a:lstStyle/>
+          <a:p>
+            <a:r>
+              <a:rPr lang="en-US" dirty="0"/>
+              <a:t>Overall Picture</a:t>
+            </a:r>
+          </a:p>
+          <a:p>
+            <a:r>
+              <a:rPr lang="en-US" dirty="0"/>
+              <a:t>Angle Dependent Analysis</a:t>
+            </a:r>
+          </a:p>
+          <a:p>
+            <a:r>
+              <a:rPr lang="en-US" dirty="0"/>
+              <a:t>Goldie Zone Given Some Min</a:t>
+            </a:r>
+          </a:p>
+          <a:p>
+            <a:r>
+              <a:rPr lang="en-US" dirty="0"/>
+              <a:t>Curve</a:t>
+            </a:r>
+          </a:p>
+        </p:txBody>
+      </p:sp>
+    </p:spTree>
+    <p:extLst>
+      <p:ext uri="{BB962C8B-B14F-4D97-AF65-F5344CB8AC3E}">
+        <p14:creationId xmlns:p14="http://schemas.microsoft.com/office/powerpoint/2010/main" val="1310060062"/>
+      </p:ext>
+    </p:extLst>
+  </p:cSld>
+  <p:clrMapOvr>
+    <a:masterClrMapping/>
+  </p:clrMapOvr>
+</p:sld>
+</file>
+
+<file path=ppt/slides/slide13.xml><?xml version="1.0" encoding="utf-8"?>
+<p:sld xmlns:a="http://schemas.openxmlformats.org/drawingml/2006/main" xmlns:r="http://schemas.openxmlformats.org/officeDocument/2006/relationships" xmlns:p="http://schemas.openxmlformats.org/presentationml/2006/main">
+  <p:cSld>
+    <p:spTree>
+      <p:nvGrpSpPr>
+        <p:cNvPr id="1" name=""/>
+        <p:cNvGrpSpPr/>
+        <p:nvPr/>
+      </p:nvGrpSpPr>
+      <p:grpSpPr>
+        <a:xfrm>
+          <a:off x="0" y="0"/>
+          <a:ext cx="0" cy="0"/>
+          <a:chOff x="0" y="0"/>
+          <a:chExt cx="0" cy="0"/>
+        </a:xfrm>
+      </p:grpSpPr>
+    </p:spTree>
+    <p:extLst>
+      <p:ext uri="{BB962C8B-B14F-4D97-AF65-F5344CB8AC3E}">
+        <p14:creationId xmlns:p14="http://schemas.microsoft.com/office/powerpoint/2010/main" val="1017295827"/>
+      </p:ext>
+    </p:extLst>
+  </p:cSld>
+  <p:clrMapOvr>
+    <a:masterClrMapping/>
+  </p:clrMapOvr>
+</p:sld>
+</file>
+
+<file path=ppt/slides/slide14.xml><?xml version="1.0" encoding="utf-8"?>
+<p:sld xmlns:a="http://schemas.openxmlformats.org/drawingml/2006/main" xmlns:r="http://schemas.openxmlformats.org/officeDocument/2006/relationships" xmlns:p="http://schemas.openxmlformats.org/presentationml/2006/main">
+  <p:cSld>
+    <p:spTree>
+      <p:nvGrpSpPr>
+        <p:cNvPr id="1" name=""/>
+        <p:cNvGrpSpPr/>
+        <p:nvPr/>
+      </p:nvGrpSpPr>
+      <p:grpSpPr>
+        <a:xfrm>
+          <a:off x="0" y="0"/>
+          <a:ext cx="0" cy="0"/>
+          <a:chOff x="0" y="0"/>
+          <a:chExt cx="0" cy="0"/>
+        </a:xfrm>
+      </p:grpSpPr>
+      <p:sp>
+        <p:nvSpPr>
+          <p:cNvPr id="2" name="Title 1">
+            <a:extLst>
+              <a:ext uri="{FF2B5EF4-FFF2-40B4-BE49-F238E27FC236}">
+                <a16:creationId xmlns:a16="http://schemas.microsoft.com/office/drawing/2014/main" id="{4840326F-948C-8CD6-61AF-24B753B4D2CB}"/>
+              </a:ext>
+            </a:extLst>
+          </p:cNvPr>
+          <p:cNvSpPr>
+            <a:spLocks noGrp="1"/>
+          </p:cNvSpPr>
+          <p:nvPr>
+            <p:ph type="title"/>
+          </p:nvPr>
+        </p:nvSpPr>
+        <p:spPr/>
+        <p:txBody>
+          <a:bodyPr/>
+          <a:lstStyle/>
+          <a:p>
+            <a:r>
+              <a:rPr lang="en-US" dirty="0"/>
+              <a:t>Other Parameters</a:t>
+            </a:r>
+          </a:p>
+        </p:txBody>
+      </p:sp>
+      <p:sp>
+        <p:nvSpPr>
+          <p:cNvPr id="3" name="Content Placeholder 2">
+            <a:extLst>
+              <a:ext uri="{FF2B5EF4-FFF2-40B4-BE49-F238E27FC236}">
+                <a16:creationId xmlns:a16="http://schemas.microsoft.com/office/drawing/2014/main" id="{D8FB0220-23E7-8FF9-3EFB-50936F2D4F6A}"/>
+              </a:ext>
+            </a:extLst>
+          </p:cNvPr>
+          <p:cNvSpPr>
+            <a:spLocks noGrp="1"/>
+          </p:cNvSpPr>
+          <p:nvPr>
+            <p:ph idx="1"/>
+          </p:nvPr>
+        </p:nvSpPr>
+        <p:spPr>
+          <a:xfrm>
+            <a:off x="1103311" y="2052918"/>
+            <a:ext cx="9630950" cy="4195481"/>
+          </a:xfrm>
+        </p:spPr>
+        <p:txBody>
+          <a:bodyPr/>
+          <a:lstStyle/>
+          <a:p>
+            <a:r>
+              <a:rPr lang="en-US" dirty="0"/>
+              <a:t>Domain: 500mm by 500mm by 500mm ( Can be reduced to 100mm for some tests)</a:t>
+            </a:r>
+          </a:p>
+          <a:p>
+            <a:r>
+              <a:rPr lang="en-US" dirty="0"/>
+              <a:t>Back Scatter Fraction 0.024 (May be tuned in via Petzold)(n=1.1,u=3.4)</a:t>
+            </a:r>
+          </a:p>
+          <a:p>
+            <a:r>
+              <a:rPr lang="en-US" dirty="0"/>
+              <a:t>Mua:0.003</a:t>
+            </a:r>
+          </a:p>
+          <a:p>
+            <a:r>
+              <a:rPr lang="en-US" dirty="0"/>
+              <a:t>Mus: 0.015 to 0.05</a:t>
+            </a:r>
+          </a:p>
+          <a:p>
+            <a:endParaRPr lang="en-US" dirty="0"/>
+          </a:p>
+          <a:p>
+            <a:endParaRPr lang="en-US" dirty="0"/>
+          </a:p>
+        </p:txBody>
+      </p:sp>
+    </p:spTree>
+    <p:extLst>
+      <p:ext uri="{BB962C8B-B14F-4D97-AF65-F5344CB8AC3E}">
+        <p14:creationId xmlns:p14="http://schemas.microsoft.com/office/powerpoint/2010/main" val="944707997"/>
+      </p:ext>
+    </p:extLst>
+  </p:cSld>
+  <p:clrMapOvr>
+    <a:masterClrMapping/>
+  </p:clrMapOvr>
+</p:sld>
+</file>
+
+<file path=ppt/slides/slide15.xml><?xml version="1.0" encoding="utf-8"?>
+<p:sld xmlns:a="http://schemas.openxmlformats.org/drawingml/2006/main" xmlns:r="http://schemas.openxmlformats.org/officeDocument/2006/relationships" xmlns:p="http://schemas.openxmlformats.org/presentationml/2006/main">
+  <p:cSld>
+    <p:spTree>
+      <p:nvGrpSpPr>
+        <p:cNvPr id="1" name=""/>
+        <p:cNvGrpSpPr/>
+        <p:nvPr/>
+      </p:nvGrpSpPr>
+      <p:grpSpPr>
+        <a:xfrm>
+          <a:off x="0" y="0"/>
+          <a:ext cx="0" cy="0"/>
+          <a:chOff x="0" y="0"/>
+          <a:chExt cx="0" cy="0"/>
+        </a:xfrm>
+      </p:grpSpPr>
+      <p:sp>
+        <p:nvSpPr>
+          <p:cNvPr id="2" name="Title 1">
+            <a:extLst>
+              <a:ext uri="{FF2B5EF4-FFF2-40B4-BE49-F238E27FC236}">
+                <a16:creationId xmlns:a16="http://schemas.microsoft.com/office/drawing/2014/main" id="{68CDE3B1-A1D1-CD63-EFDA-1AE7F26FA84E}"/>
+              </a:ext>
+            </a:extLst>
+          </p:cNvPr>
+          <p:cNvSpPr>
+            <a:spLocks noGrp="1"/>
+          </p:cNvSpPr>
+          <p:nvPr>
+            <p:ph type="title"/>
+          </p:nvPr>
+        </p:nvSpPr>
+        <p:spPr/>
+        <p:txBody>
+          <a:bodyPr/>
+          <a:lstStyle/>
+          <a:p>
+            <a:r>
+              <a:rPr lang="en-US" dirty="0"/>
+              <a:t>Sanity Checks</a:t>
+            </a:r>
+          </a:p>
+        </p:txBody>
+      </p:sp>
+      <p:sp>
+        <p:nvSpPr>
+          <p:cNvPr id="3" name="Content Placeholder 2">
+            <a:extLst>
+              <a:ext uri="{FF2B5EF4-FFF2-40B4-BE49-F238E27FC236}">
+                <a16:creationId xmlns:a16="http://schemas.microsoft.com/office/drawing/2014/main" id="{A967A8ED-E292-CF61-9F53-B9DCD8CEFC7E}"/>
+              </a:ext>
+            </a:extLst>
+          </p:cNvPr>
+          <p:cNvSpPr>
+            <a:spLocks noGrp="1"/>
+          </p:cNvSpPr>
+          <p:nvPr>
+            <p:ph idx="1"/>
+          </p:nvPr>
+        </p:nvSpPr>
+        <p:spPr/>
+        <p:txBody>
+          <a:bodyPr/>
+          <a:lstStyle/>
+          <a:p>
+            <a:endParaRPr lang="en-US" dirty="0"/>
+          </a:p>
+        </p:txBody>
+      </p:sp>
+      <p:sp>
+        <p:nvSpPr>
+          <p:cNvPr id="4" name="Text Placeholder 3">
+            <a:extLst>
+              <a:ext uri="{FF2B5EF4-FFF2-40B4-BE49-F238E27FC236}">
+                <a16:creationId xmlns:a16="http://schemas.microsoft.com/office/drawing/2014/main" id="{1D46CF0A-A784-9712-C2C8-FC454923D163}"/>
+              </a:ext>
+            </a:extLst>
+          </p:cNvPr>
+          <p:cNvSpPr>
+            <a:spLocks noGrp="1"/>
+          </p:cNvSpPr>
+          <p:nvPr>
+            <p:ph type="body" sz="half" idx="2"/>
+          </p:nvPr>
+        </p:nvSpPr>
+        <p:spPr/>
+        <p:txBody>
+          <a:bodyPr>
+            <a:normAutofit fontScale="55000" lnSpcReduction="20000"/>
+          </a:bodyPr>
+          <a:lstStyle/>
+          <a:p>
+            <a:pPr marL="342900" indent="-342900">
+              <a:buAutoNum type="arabicPeriod"/>
+            </a:pPr>
+            <a:r>
+              <a:rPr lang="en-US" dirty="0"/>
+              <a:t>Under 0 scattering:</a:t>
+            </a:r>
+          </a:p>
+          <a:p>
+            <a:pPr marL="800100" lvl="1" indent="-342900">
+              <a:buAutoNum type="arabicPeriod"/>
+            </a:pPr>
+            <a:r>
+              <a:rPr lang="en-US" dirty="0"/>
+              <a:t>Peak at zero degrees</a:t>
+            </a:r>
+          </a:p>
+          <a:p>
+            <a:pPr marL="800100" lvl="1" indent="-342900">
+              <a:buAutoNum type="arabicPeriod"/>
+            </a:pPr>
+            <a:r>
+              <a:rPr lang="en-US" dirty="0"/>
+              <a:t>Absorption dependance must recover the beer lambert law</a:t>
+            </a:r>
+          </a:p>
+          <a:p>
+            <a:pPr marL="342900" indent="-342900">
+              <a:buAutoNum type="arabicPeriod"/>
+            </a:pPr>
+            <a:r>
+              <a:rPr lang="en-US" dirty="0"/>
+              <a:t>Under conditions where 1 scattering event per photon on average occurs:</a:t>
+            </a:r>
+          </a:p>
+          <a:p>
+            <a:pPr marL="800100" lvl="1" indent="-342900">
+              <a:buAutoNum type="arabicPeriod"/>
+            </a:pPr>
+            <a:r>
+              <a:rPr lang="en-US" dirty="0"/>
+              <a:t>We must recover the Fornier Forand distribution</a:t>
+            </a:r>
+          </a:p>
+          <a:p>
+            <a:pPr marL="800100" lvl="1" indent="-342900">
+              <a:buAutoNum type="arabicPeriod"/>
+            </a:pPr>
+            <a:r>
+              <a:rPr lang="en-US" dirty="0"/>
+              <a:t>HG and FF must be close</a:t>
+            </a:r>
+          </a:p>
+          <a:p>
+            <a:pPr marL="342900" indent="-342900">
+              <a:buAutoNum type="arabicPeriod"/>
+            </a:pPr>
+            <a:r>
+              <a:rPr lang="en-US" dirty="0"/>
+              <a:t>Under reasonable scattering:</a:t>
+            </a:r>
+          </a:p>
+          <a:p>
+            <a:pPr marL="800100" lvl="1" indent="-342900">
+              <a:buAutoNum type="arabicPeriod"/>
+            </a:pPr>
+            <a:r>
+              <a:rPr lang="en-US" dirty="0"/>
+              <a:t>Increasing photon number must reduce std of solutions</a:t>
+            </a:r>
+          </a:p>
+          <a:p>
+            <a:pPr marL="800100" lvl="1" indent="-342900">
+              <a:buAutoNum type="arabicPeriod"/>
+            </a:pPr>
+            <a:r>
+              <a:rPr lang="en-US" dirty="0"/>
+              <a:t>HG and FF must </a:t>
+            </a:r>
+            <a:r>
+              <a:rPr lang="en-US" dirty="0" err="1"/>
+              <a:t>divarge</a:t>
+            </a:r>
+            <a:endParaRPr lang="en-US" dirty="0"/>
+          </a:p>
+          <a:p>
+            <a:pPr marL="342900" indent="-342900">
+              <a:buAutoNum type="arabicPeriod"/>
+            </a:pPr>
+            <a:r>
+              <a:rPr lang="en-US" dirty="0"/>
+              <a:t> Under very large scattering:</a:t>
+            </a:r>
+          </a:p>
+          <a:p>
+            <a:pPr marL="800100" lvl="1" indent="-342900">
+              <a:buAutoNum type="arabicPeriod"/>
+            </a:pPr>
+            <a:r>
+              <a:rPr lang="en-US" dirty="0"/>
+              <a:t>Source must look isotropic at a distance with no forward bias</a:t>
+            </a:r>
+          </a:p>
+          <a:p>
+            <a:pPr marL="800100" lvl="1" indent="-342900">
+              <a:buAutoNum type="arabicPeriod"/>
+            </a:pPr>
+            <a:r>
+              <a:rPr lang="en-US" dirty="0"/>
+              <a:t>HG and FF must converge</a:t>
+            </a:r>
+          </a:p>
+          <a:p>
+            <a:pPr marL="342900" indent="-342900">
+              <a:buAutoNum type="arabicPeriod"/>
+            </a:pPr>
+            <a:endParaRPr lang="en-US" dirty="0"/>
+          </a:p>
+        </p:txBody>
+      </p:sp>
+    </p:spTree>
+    <p:extLst>
+      <p:ext uri="{BB962C8B-B14F-4D97-AF65-F5344CB8AC3E}">
+        <p14:creationId xmlns:p14="http://schemas.microsoft.com/office/powerpoint/2010/main" val="2081107019"/>
+      </p:ext>
+    </p:extLst>
+  </p:cSld>
+  <p:clrMapOvr>
+    <a:masterClrMapping/>
+  </p:clrMapOvr>
+</p:sld>
+</file>
+
+<file path=ppt/slides/slide16.xml><?xml version="1.0" encoding="utf-8"?>
+<p:sld xmlns:a="http://schemas.openxmlformats.org/drawingml/2006/main" xmlns:r="http://schemas.openxmlformats.org/officeDocument/2006/relationships" xmlns:p="http://schemas.openxmlformats.org/presentationml/2006/main">
+  <p:cSld>
+    <p:spTree>
+      <p:nvGrpSpPr>
+        <p:cNvPr id="1" name=""/>
+        <p:cNvGrpSpPr/>
+        <p:nvPr/>
+      </p:nvGrpSpPr>
+      <p:grpSpPr>
+        <a:xfrm>
+          <a:off x="0" y="0"/>
+          <a:ext cx="0" cy="0"/>
+          <a:chOff x="0" y="0"/>
+          <a:chExt cx="0" cy="0"/>
+        </a:xfrm>
+      </p:grpSpPr>
+      <p:sp>
+        <p:nvSpPr>
+          <p:cNvPr id="2" name="Title 1">
+            <a:extLst>
+              <a:ext uri="{FF2B5EF4-FFF2-40B4-BE49-F238E27FC236}">
                 <a16:creationId xmlns:a16="http://schemas.microsoft.com/office/drawing/2014/main" id="{1A1577E8-C58B-D8E1-A3AD-F4FA7A6F76D2}"/>
               </a:ext>
             </a:extLst>
@@ -6717,7 +7106,7 @@
 </p:sld>
 </file>
 
-<file path=ppt/slides/slide13.xml><?xml version="1.0" encoding="utf-8"?>
+<file path=ppt/slides/slide17.xml><?xml version="1.0" encoding="utf-8"?>
 <p:sld xmlns:a="http://schemas.openxmlformats.org/drawingml/2006/main" xmlns:r="http://schemas.openxmlformats.org/officeDocument/2006/relationships" xmlns:p="http://schemas.openxmlformats.org/presentationml/2006/main">
   <p:cSld>
     <p:spTree>
@@ -7258,7 +7647,7 @@
 </p:sld>
 </file>
 
-<file path=ppt/slides/slide14.xml><?xml version="1.0" encoding="utf-8"?>
+<file path=ppt/slides/slide18.xml><?xml version="1.0" encoding="utf-8"?>
 <p:sld xmlns:a="http://schemas.openxmlformats.org/drawingml/2006/main" xmlns:r="http://schemas.openxmlformats.org/officeDocument/2006/relationships" xmlns:p="http://schemas.openxmlformats.org/presentationml/2006/main">
   <p:cSld>
     <p:spTree>
@@ -7369,7 +7758,7 @@
 </p:sld>
 </file>
 
-<file path=ppt/slides/slide15.xml><?xml version="1.0" encoding="utf-8"?>
+<file path=ppt/slides/slide19.xml><?xml version="1.0" encoding="utf-8"?>
 <p:sld xmlns:a="http://schemas.openxmlformats.org/drawingml/2006/main" xmlns:r="http://schemas.openxmlformats.org/officeDocument/2006/relationships" xmlns:p="http://schemas.openxmlformats.org/presentationml/2006/main">
   <p:cSld>
     <p:spTree>
@@ -7440,114 +7829,6 @@
     <p:extLst>
       <p:ext uri="{BB962C8B-B14F-4D97-AF65-F5344CB8AC3E}">
         <p14:creationId xmlns:p14="http://schemas.microsoft.com/office/powerpoint/2010/main" val="1310250"/>
-      </p:ext>
-    </p:extLst>
-  </p:cSld>
-  <p:clrMapOvr>
-    <a:masterClrMapping/>
-  </p:clrMapOvr>
-</p:sld>
-</file>
-
-<file path=ppt/slides/slide16.xml><?xml version="1.0" encoding="utf-8"?>
-<p:sld xmlns:a="http://schemas.openxmlformats.org/drawingml/2006/main" xmlns:r="http://schemas.openxmlformats.org/officeDocument/2006/relationships" xmlns:p="http://schemas.openxmlformats.org/presentationml/2006/main">
-  <p:cSld>
-    <p:spTree>
-      <p:nvGrpSpPr>
-        <p:cNvPr id="1" name=""/>
-        <p:cNvGrpSpPr/>
-        <p:nvPr/>
-      </p:nvGrpSpPr>
-      <p:grpSpPr>
-        <a:xfrm>
-          <a:off x="0" y="0"/>
-          <a:ext cx="0" cy="0"/>
-          <a:chOff x="0" y="0"/>
-          <a:chExt cx="0" cy="0"/>
-        </a:xfrm>
-      </p:grpSpPr>
-      <p:sp>
-        <p:nvSpPr>
-          <p:cNvPr id="2" name="Title 1">
-            <a:extLst>
-              <a:ext uri="{FF2B5EF4-FFF2-40B4-BE49-F238E27FC236}">
-                <a16:creationId xmlns:a16="http://schemas.microsoft.com/office/drawing/2014/main" id="{4DA35A90-343A-331E-F423-28D767CCB9E2}"/>
-              </a:ext>
-            </a:extLst>
-          </p:cNvPr>
-          <p:cNvSpPr>
-            <a:spLocks noGrp="1"/>
-          </p:cNvSpPr>
-          <p:nvPr>
-            <p:ph type="title"/>
-          </p:nvPr>
-        </p:nvSpPr>
-        <p:spPr/>
-        <p:txBody>
-          <a:bodyPr/>
-          <a:lstStyle/>
-          <a:p>
-            <a:r>
-              <a:rPr lang="en-US" dirty="0"/>
-              <a:t>Structure</a:t>
-            </a:r>
-          </a:p>
-        </p:txBody>
-      </p:sp>
-      <p:sp>
-        <p:nvSpPr>
-          <p:cNvPr id="3" name="Content Placeholder 2">
-            <a:extLst>
-              <a:ext uri="{FF2B5EF4-FFF2-40B4-BE49-F238E27FC236}">
-                <a16:creationId xmlns:a16="http://schemas.microsoft.com/office/drawing/2014/main" id="{F02F2B44-79DC-9756-4DB0-9D4EFB36E436}"/>
-              </a:ext>
-            </a:extLst>
-          </p:cNvPr>
-          <p:cNvSpPr>
-            <a:spLocks noGrp="1"/>
-          </p:cNvSpPr>
-          <p:nvPr>
-            <p:ph idx="1"/>
-          </p:nvPr>
-        </p:nvSpPr>
-        <p:spPr/>
-        <p:txBody>
-          <a:bodyPr/>
-          <a:lstStyle/>
-          <a:p>
-            <a:endParaRPr lang="en-US"/>
-          </a:p>
-        </p:txBody>
-      </p:sp>
-      <p:sp>
-        <p:nvSpPr>
-          <p:cNvPr id="4" name="Text Placeholder 3">
-            <a:extLst>
-              <a:ext uri="{FF2B5EF4-FFF2-40B4-BE49-F238E27FC236}">
-                <a16:creationId xmlns:a16="http://schemas.microsoft.com/office/drawing/2014/main" id="{BAA88F27-8EE8-783C-5CB9-DD3F9E6A24A7}"/>
-              </a:ext>
-            </a:extLst>
-          </p:cNvPr>
-          <p:cNvSpPr>
-            <a:spLocks noGrp="1"/>
-          </p:cNvSpPr>
-          <p:nvPr>
-            <p:ph type="body" sz="half" idx="2"/>
-          </p:nvPr>
-        </p:nvSpPr>
-        <p:spPr/>
-        <p:txBody>
-          <a:bodyPr/>
-          <a:lstStyle/>
-          <a:p>
-            <a:endParaRPr lang="en-US" dirty="0"/>
-          </a:p>
-        </p:txBody>
-      </p:sp>
-    </p:spTree>
-    <p:extLst>
-      <p:ext uri="{BB962C8B-B14F-4D97-AF65-F5344CB8AC3E}">
-        <p14:creationId xmlns:p14="http://schemas.microsoft.com/office/powerpoint/2010/main" val="829106148"/>
       </p:ext>
     </p:extLst>
   </p:cSld>
@@ -8319,6 +8600,114 @@
     <p:extLst>
       <p:ext uri="{BB962C8B-B14F-4D97-AF65-F5344CB8AC3E}">
         <p14:creationId xmlns:p14="http://schemas.microsoft.com/office/powerpoint/2010/main" val="2867557785"/>
+      </p:ext>
+    </p:extLst>
+  </p:cSld>
+  <p:clrMapOvr>
+    <a:masterClrMapping/>
+  </p:clrMapOvr>
+</p:sld>
+</file>
+
+<file path=ppt/slides/slide20.xml><?xml version="1.0" encoding="utf-8"?>
+<p:sld xmlns:a="http://schemas.openxmlformats.org/drawingml/2006/main" xmlns:r="http://schemas.openxmlformats.org/officeDocument/2006/relationships" xmlns:p="http://schemas.openxmlformats.org/presentationml/2006/main">
+  <p:cSld>
+    <p:spTree>
+      <p:nvGrpSpPr>
+        <p:cNvPr id="1" name=""/>
+        <p:cNvGrpSpPr/>
+        <p:nvPr/>
+      </p:nvGrpSpPr>
+      <p:grpSpPr>
+        <a:xfrm>
+          <a:off x="0" y="0"/>
+          <a:ext cx="0" cy="0"/>
+          <a:chOff x="0" y="0"/>
+          <a:chExt cx="0" cy="0"/>
+        </a:xfrm>
+      </p:grpSpPr>
+      <p:sp>
+        <p:nvSpPr>
+          <p:cNvPr id="2" name="Title 1">
+            <a:extLst>
+              <a:ext uri="{FF2B5EF4-FFF2-40B4-BE49-F238E27FC236}">
+                <a16:creationId xmlns:a16="http://schemas.microsoft.com/office/drawing/2014/main" id="{4DA35A90-343A-331E-F423-28D767CCB9E2}"/>
+              </a:ext>
+            </a:extLst>
+          </p:cNvPr>
+          <p:cNvSpPr>
+            <a:spLocks noGrp="1"/>
+          </p:cNvSpPr>
+          <p:nvPr>
+            <p:ph type="title"/>
+          </p:nvPr>
+        </p:nvSpPr>
+        <p:spPr/>
+        <p:txBody>
+          <a:bodyPr/>
+          <a:lstStyle/>
+          <a:p>
+            <a:r>
+              <a:rPr lang="en-US" dirty="0"/>
+              <a:t>Structure</a:t>
+            </a:r>
+          </a:p>
+        </p:txBody>
+      </p:sp>
+      <p:sp>
+        <p:nvSpPr>
+          <p:cNvPr id="3" name="Content Placeholder 2">
+            <a:extLst>
+              <a:ext uri="{FF2B5EF4-FFF2-40B4-BE49-F238E27FC236}">
+                <a16:creationId xmlns:a16="http://schemas.microsoft.com/office/drawing/2014/main" id="{F02F2B44-79DC-9756-4DB0-9D4EFB36E436}"/>
+              </a:ext>
+            </a:extLst>
+          </p:cNvPr>
+          <p:cNvSpPr>
+            <a:spLocks noGrp="1"/>
+          </p:cNvSpPr>
+          <p:nvPr>
+            <p:ph idx="1"/>
+          </p:nvPr>
+        </p:nvSpPr>
+        <p:spPr/>
+        <p:txBody>
+          <a:bodyPr/>
+          <a:lstStyle/>
+          <a:p>
+            <a:endParaRPr lang="en-US"/>
+          </a:p>
+        </p:txBody>
+      </p:sp>
+      <p:sp>
+        <p:nvSpPr>
+          <p:cNvPr id="4" name="Text Placeholder 3">
+            <a:extLst>
+              <a:ext uri="{FF2B5EF4-FFF2-40B4-BE49-F238E27FC236}">
+                <a16:creationId xmlns:a16="http://schemas.microsoft.com/office/drawing/2014/main" id="{BAA88F27-8EE8-783C-5CB9-DD3F9E6A24A7}"/>
+              </a:ext>
+            </a:extLst>
+          </p:cNvPr>
+          <p:cNvSpPr>
+            <a:spLocks noGrp="1"/>
+          </p:cNvSpPr>
+          <p:nvPr>
+            <p:ph type="body" sz="half" idx="2"/>
+          </p:nvPr>
+        </p:nvSpPr>
+        <p:spPr/>
+        <p:txBody>
+          <a:bodyPr/>
+          <a:lstStyle/>
+          <a:p>
+            <a:endParaRPr lang="en-US" dirty="0"/>
+          </a:p>
+        </p:txBody>
+      </p:sp>
+    </p:spTree>
+    <p:extLst>
+      <p:ext uri="{BB962C8B-B14F-4D97-AF65-F5344CB8AC3E}">
+        <p14:creationId xmlns:p14="http://schemas.microsoft.com/office/powerpoint/2010/main" val="829106148"/>
       </p:ext>
     </p:extLst>
   </p:cSld>
@@ -9729,135 +10118,6 @@
           <p:cNvPr id="2" name="Title 1">
             <a:extLst>
               <a:ext uri="{FF2B5EF4-FFF2-40B4-BE49-F238E27FC236}">
-                <a16:creationId xmlns:a16="http://schemas.microsoft.com/office/drawing/2014/main" id="{B356E126-C1BE-85E8-459F-D92815FAC6FA}"/>
-              </a:ext>
-            </a:extLst>
-          </p:cNvPr>
-          <p:cNvSpPr>
-            <a:spLocks noGrp="1"/>
-          </p:cNvSpPr>
-          <p:nvPr>
-            <p:ph type="title"/>
-          </p:nvPr>
-        </p:nvSpPr>
-        <p:spPr/>
-        <p:txBody>
-          <a:bodyPr/>
-          <a:lstStyle/>
-          <a:p>
-            <a:r>
-              <a:rPr lang="en-US" dirty="0"/>
-              <a:t>Analysis Methods</a:t>
-            </a:r>
-          </a:p>
-        </p:txBody>
-      </p:sp>
-      <p:sp>
-        <p:nvSpPr>
-          <p:cNvPr id="3" name="Content Placeholder 2">
-            <a:extLst>
-              <a:ext uri="{FF2B5EF4-FFF2-40B4-BE49-F238E27FC236}">
-                <a16:creationId xmlns:a16="http://schemas.microsoft.com/office/drawing/2014/main" id="{B072FA01-4DD5-7264-9B6F-4CC46B83B25F}"/>
-              </a:ext>
-            </a:extLst>
-          </p:cNvPr>
-          <p:cNvSpPr>
-            <a:spLocks noGrp="1"/>
-          </p:cNvSpPr>
-          <p:nvPr>
-            <p:ph idx="1"/>
-          </p:nvPr>
-        </p:nvSpPr>
-        <p:spPr/>
-        <p:txBody>
-          <a:bodyPr/>
-          <a:lstStyle/>
-          <a:p>
-            <a:endParaRPr lang="en-US"/>
-          </a:p>
-        </p:txBody>
-      </p:sp>
-      <p:sp>
-        <p:nvSpPr>
-          <p:cNvPr id="4" name="Text Placeholder 3">
-            <a:extLst>
-              <a:ext uri="{FF2B5EF4-FFF2-40B4-BE49-F238E27FC236}">
-                <a16:creationId xmlns:a16="http://schemas.microsoft.com/office/drawing/2014/main" id="{5AFD19D3-F098-B794-A2BA-0DAB398D30C8}"/>
-              </a:ext>
-            </a:extLst>
-          </p:cNvPr>
-          <p:cNvSpPr>
-            <a:spLocks noGrp="1"/>
-          </p:cNvSpPr>
-          <p:nvPr>
-            <p:ph type="body" sz="half" idx="2"/>
-          </p:nvPr>
-        </p:nvSpPr>
-        <p:spPr/>
-        <p:txBody>
-          <a:bodyPr/>
-          <a:lstStyle/>
-          <a:p>
-            <a:r>
-              <a:rPr lang="en-US" dirty="0"/>
-              <a:t>Overall Picture</a:t>
-            </a:r>
-          </a:p>
-          <a:p>
-            <a:r>
-              <a:rPr lang="en-US" dirty="0"/>
-              <a:t>Angle Dependent Analysis</a:t>
-            </a:r>
-          </a:p>
-          <a:p>
-            <a:r>
-              <a:rPr lang="en-US" dirty="0"/>
-              <a:t>Goldie Zone Given Some Min</a:t>
-            </a:r>
-          </a:p>
-          <a:p>
-            <a:r>
-              <a:rPr lang="en-US" dirty="0"/>
-              <a:t>Curve</a:t>
-            </a:r>
-          </a:p>
-        </p:txBody>
-      </p:sp>
-    </p:spTree>
-    <p:extLst>
-      <p:ext uri="{BB962C8B-B14F-4D97-AF65-F5344CB8AC3E}">
-        <p14:creationId xmlns:p14="http://schemas.microsoft.com/office/powerpoint/2010/main" val="1310060062"/>
-      </p:ext>
-    </p:extLst>
-  </p:cSld>
-  <p:clrMapOvr>
-    <a:masterClrMapping/>
-  </p:clrMapOvr>
-</p:sld>
-</file>
-
-<file path=ppt/slides/slide7.xml><?xml version="1.0" encoding="utf-8"?>
-<p:sld xmlns:a="http://schemas.openxmlformats.org/drawingml/2006/main" xmlns:r="http://schemas.openxmlformats.org/officeDocument/2006/relationships" xmlns:p="http://schemas.openxmlformats.org/presentationml/2006/main">
-  <p:cSld>
-    <p:spTree>
-      <p:nvGrpSpPr>
-        <p:cNvPr id="1" name=""/>
-        <p:cNvGrpSpPr/>
-        <p:nvPr/>
-      </p:nvGrpSpPr>
-      <p:grpSpPr>
-        <a:xfrm>
-          <a:off x="0" y="0"/>
-          <a:ext cx="0" cy="0"/>
-          <a:chOff x="0" y="0"/>
-          <a:chExt cx="0" cy="0"/>
-        </a:xfrm>
-      </p:grpSpPr>
-      <p:sp>
-        <p:nvSpPr>
-          <p:cNvPr id="2" name="Title 1">
-            <a:extLst>
-              <a:ext uri="{FF2B5EF4-FFF2-40B4-BE49-F238E27FC236}">
                 <a16:creationId xmlns:a16="http://schemas.microsoft.com/office/drawing/2014/main" id="{394BB6C8-2B20-F7A7-DA70-2F191D990ECC}"/>
               </a:ext>
             </a:extLst>
@@ -9932,7 +10192,7 @@
 </p:sld>
 </file>
 
-<file path=ppt/slides/slide8.xml><?xml version="1.0" encoding="utf-8"?>
+<file path=ppt/slides/slide7.xml><?xml version="1.0" encoding="utf-8"?>
 <p:sld xmlns:a="http://schemas.openxmlformats.org/drawingml/2006/main" xmlns:r="http://schemas.openxmlformats.org/officeDocument/2006/relationships" xmlns:p="http://schemas.openxmlformats.org/presentationml/2006/main">
   <p:cSld>
     <p:spTree>
@@ -10539,6 +10799,1041 @@
 </p:sld>
 </file>
 
+<file path=ppt/slides/slide8.xml><?xml version="1.0" encoding="utf-8"?>
+<p:sld xmlns:a="http://schemas.openxmlformats.org/drawingml/2006/main" xmlns:r="http://schemas.openxmlformats.org/officeDocument/2006/relationships" xmlns:p="http://schemas.openxmlformats.org/presentationml/2006/main">
+  <p:cSld>
+    <p:spTree>
+      <p:nvGrpSpPr>
+        <p:cNvPr id="1" name=""/>
+        <p:cNvGrpSpPr/>
+        <p:nvPr/>
+      </p:nvGrpSpPr>
+      <p:grpSpPr>
+        <a:xfrm>
+          <a:off x="0" y="0"/>
+          <a:ext cx="0" cy="0"/>
+          <a:chOff x="0" y="0"/>
+          <a:chExt cx="0" cy="0"/>
+        </a:xfrm>
+      </p:grpSpPr>
+      <p:sp>
+        <p:nvSpPr>
+          <p:cNvPr id="2" name="Title 1">
+            <a:extLst>
+              <a:ext uri="{FF2B5EF4-FFF2-40B4-BE49-F238E27FC236}">
+                <a16:creationId xmlns:a16="http://schemas.microsoft.com/office/drawing/2014/main" id="{3984CFD2-76F1-1597-7B39-73FFC073936D}"/>
+              </a:ext>
+            </a:extLst>
+          </p:cNvPr>
+          <p:cNvSpPr>
+            <a:spLocks noGrp="1"/>
+          </p:cNvSpPr>
+          <p:nvPr>
+            <p:ph type="title"/>
+          </p:nvPr>
+        </p:nvSpPr>
+        <p:spPr/>
+        <p:txBody>
+          <a:bodyPr/>
+          <a:lstStyle/>
+          <a:p>
+            <a:r>
+              <a:rPr lang="en-US" dirty="0"/>
+              <a:t>A better way</a:t>
+            </a:r>
+          </a:p>
+        </p:txBody>
+      </p:sp>
+      <p:sp>
+        <p:nvSpPr>
+          <p:cNvPr id="3" name="Rectangle 2">
+            <a:extLst>
+              <a:ext uri="{FF2B5EF4-FFF2-40B4-BE49-F238E27FC236}">
+                <a16:creationId xmlns:a16="http://schemas.microsoft.com/office/drawing/2014/main" id="{C7072D75-58DA-AFAC-2D07-4EE315537E29}"/>
+              </a:ext>
+            </a:extLst>
+          </p:cNvPr>
+          <p:cNvSpPr/>
+          <p:nvPr/>
+        </p:nvSpPr>
+        <p:spPr>
+          <a:xfrm>
+            <a:off x="827314" y="4459514"/>
+            <a:ext cx="6618515" cy="1817914"/>
+          </a:xfrm>
+          <a:prstGeom prst="rect">
+            <a:avLst/>
+          </a:prstGeom>
+          <a:noFill/>
+          <a:ln w="19050" cap="flat" cmpd="sng" algn="ctr">
+            <a:solidFill>
+              <a:schemeClr val="dk1"/>
+            </a:solidFill>
+            <a:prstDash val="solid"/>
+            <a:round/>
+            <a:headEnd type="none" w="med" len="med"/>
+            <a:tailEnd type="none" w="med" len="med"/>
+          </a:ln>
+        </p:spPr>
+        <p:style>
+          <a:lnRef idx="0">
+            <a:scrgbClr r="0" g="0" b="0"/>
+          </a:lnRef>
+          <a:fillRef idx="0">
+            <a:scrgbClr r="0" g="0" b="0"/>
+          </a:fillRef>
+          <a:effectRef idx="0">
+            <a:scrgbClr r="0" g="0" b="0"/>
+          </a:effectRef>
+          <a:fontRef idx="minor">
+            <a:schemeClr val="dk1"/>
+          </a:fontRef>
+        </p:style>
+        <p:txBody>
+          <a:bodyPr rtlCol="0" anchor="ctr"/>
+          <a:lstStyle/>
+          <a:p>
+            <a:pPr algn="ctr"/>
+            <a:endParaRPr lang="en-US"/>
+          </a:p>
+        </p:txBody>
+      </p:sp>
+      <p:cxnSp>
+        <p:nvCxnSpPr>
+          <p:cNvPr id="5" name="Straight Arrow Connector 4">
+            <a:extLst>
+              <a:ext uri="{FF2B5EF4-FFF2-40B4-BE49-F238E27FC236}">
+                <a16:creationId xmlns:a16="http://schemas.microsoft.com/office/drawing/2014/main" id="{43B7DBEE-7FE6-A02F-E309-880E801FC400}"/>
+              </a:ext>
+            </a:extLst>
+          </p:cNvPr>
+          <p:cNvCxnSpPr>
+            <a:cxnSpLocks/>
+            <a:stCxn id="3" idx="1"/>
+          </p:cNvCxnSpPr>
+          <p:nvPr/>
+        </p:nvCxnSpPr>
+        <p:spPr>
+          <a:xfrm>
+            <a:off x="827314" y="5368471"/>
+            <a:ext cx="384629" cy="0"/>
+          </a:xfrm>
+          <a:prstGeom prst="straightConnector1">
+            <a:avLst/>
+          </a:prstGeom>
+          <a:ln w="19050" cap="flat" cmpd="sng" algn="ctr">
+            <a:solidFill>
+              <a:schemeClr val="accent3"/>
+            </a:solidFill>
+            <a:prstDash val="solid"/>
+            <a:round/>
+            <a:headEnd type="none" w="med" len="med"/>
+            <a:tailEnd type="arrow" w="med" len="med"/>
+          </a:ln>
+        </p:spPr>
+        <p:style>
+          <a:lnRef idx="0">
+            <a:scrgbClr r="0" g="0" b="0"/>
+          </a:lnRef>
+          <a:fillRef idx="0">
+            <a:scrgbClr r="0" g="0" b="0"/>
+          </a:fillRef>
+          <a:effectRef idx="0">
+            <a:scrgbClr r="0" g="0" b="0"/>
+          </a:effectRef>
+          <a:fontRef idx="minor">
+            <a:schemeClr val="tx1"/>
+          </a:fontRef>
+        </p:style>
+      </p:cxnSp>
+      <p:sp>
+        <p:nvSpPr>
+          <p:cNvPr id="6" name="TextBox 5">
+            <a:extLst>
+              <a:ext uri="{FF2B5EF4-FFF2-40B4-BE49-F238E27FC236}">
+                <a16:creationId xmlns:a16="http://schemas.microsoft.com/office/drawing/2014/main" id="{2803698B-C0FC-2CAC-79F9-6AD0D8BFB308}"/>
+              </a:ext>
+            </a:extLst>
+          </p:cNvPr>
+          <p:cNvSpPr txBox="1"/>
+          <p:nvPr/>
+        </p:nvSpPr>
+        <p:spPr>
+          <a:xfrm>
+            <a:off x="827314" y="1625600"/>
+            <a:ext cx="8512629" cy="1200329"/>
+          </a:xfrm>
+          <a:prstGeom prst="rect">
+            <a:avLst/>
+          </a:prstGeom>
+          <a:noFill/>
+        </p:spPr>
+        <p:txBody>
+          <a:bodyPr wrap="square" rtlCol="0">
+            <a:spAutoFit/>
+          </a:bodyPr>
+          <a:lstStyle/>
+          <a:p>
+            <a:r>
+              <a:rPr lang="en-US" dirty="0"/>
+              <a:t>Imagine the image below is the x-z slice where the source is. The idea is to measure the light exiting the top boundary. Represent the intensity at the boundary along the y direction in a bar graph. Hence we know the best position to place the detector. The same can be done at the front face.</a:t>
+            </a:r>
+          </a:p>
+        </p:txBody>
+      </p:sp>
+      <p:sp>
+        <p:nvSpPr>
+          <p:cNvPr id="7" name="Rectangle 6">
+            <a:extLst>
+              <a:ext uri="{FF2B5EF4-FFF2-40B4-BE49-F238E27FC236}">
+                <a16:creationId xmlns:a16="http://schemas.microsoft.com/office/drawing/2014/main" id="{AAB3B4D9-A9EE-1180-F1CC-6E2D50CF76F5}"/>
+              </a:ext>
+            </a:extLst>
+          </p:cNvPr>
+          <p:cNvSpPr/>
+          <p:nvPr/>
+        </p:nvSpPr>
+        <p:spPr>
+          <a:xfrm>
+            <a:off x="2525485" y="3563256"/>
+            <a:ext cx="232229" cy="896257"/>
+          </a:xfrm>
+          <a:prstGeom prst="rect">
+            <a:avLst/>
+          </a:prstGeom>
+        </p:spPr>
+        <p:style>
+          <a:lnRef idx="2">
+            <a:schemeClr val="accent1">
+              <a:shade val="15000"/>
+            </a:schemeClr>
+          </a:lnRef>
+          <a:fillRef idx="1">
+            <a:schemeClr val="accent1"/>
+          </a:fillRef>
+          <a:effectRef idx="0">
+            <a:schemeClr val="accent1"/>
+          </a:effectRef>
+          <a:fontRef idx="minor">
+            <a:schemeClr val="lt1"/>
+          </a:fontRef>
+        </p:style>
+        <p:txBody>
+          <a:bodyPr rtlCol="0" anchor="ctr"/>
+          <a:lstStyle/>
+          <a:p>
+            <a:pPr algn="ctr"/>
+            <a:endParaRPr lang="en-US"/>
+          </a:p>
+        </p:txBody>
+      </p:sp>
+      <p:sp>
+        <p:nvSpPr>
+          <p:cNvPr id="9" name="Rectangle 8">
+            <a:extLst>
+              <a:ext uri="{FF2B5EF4-FFF2-40B4-BE49-F238E27FC236}">
+                <a16:creationId xmlns:a16="http://schemas.microsoft.com/office/drawing/2014/main" id="{93B9092F-5634-F7AE-58B4-2605DFB23955}"/>
+              </a:ext>
+            </a:extLst>
+          </p:cNvPr>
+          <p:cNvSpPr/>
+          <p:nvPr/>
+        </p:nvSpPr>
+        <p:spPr>
+          <a:xfrm>
+            <a:off x="2902857" y="3252332"/>
+            <a:ext cx="232229" cy="1201057"/>
+          </a:xfrm>
+          <a:prstGeom prst="rect">
+            <a:avLst/>
+          </a:prstGeom>
+        </p:spPr>
+        <p:style>
+          <a:lnRef idx="2">
+            <a:schemeClr val="accent1">
+              <a:shade val="15000"/>
+            </a:schemeClr>
+          </a:lnRef>
+          <a:fillRef idx="1">
+            <a:schemeClr val="accent1"/>
+          </a:fillRef>
+          <a:effectRef idx="0">
+            <a:schemeClr val="accent1"/>
+          </a:effectRef>
+          <a:fontRef idx="minor">
+            <a:schemeClr val="lt1"/>
+          </a:fontRef>
+        </p:style>
+        <p:txBody>
+          <a:bodyPr rtlCol="0" anchor="ctr"/>
+          <a:lstStyle/>
+          <a:p>
+            <a:pPr algn="ctr"/>
+            <a:endParaRPr lang="en-US"/>
+          </a:p>
+        </p:txBody>
+      </p:sp>
+      <p:sp>
+        <p:nvSpPr>
+          <p:cNvPr id="11" name="Rectangle 10">
+            <a:extLst>
+              <a:ext uri="{FF2B5EF4-FFF2-40B4-BE49-F238E27FC236}">
+                <a16:creationId xmlns:a16="http://schemas.microsoft.com/office/drawing/2014/main" id="{22EEF5C7-0D8E-F0F6-504C-9655EBBA1B34}"/>
+              </a:ext>
+            </a:extLst>
+          </p:cNvPr>
+          <p:cNvSpPr/>
+          <p:nvPr/>
+        </p:nvSpPr>
+        <p:spPr>
+          <a:xfrm>
+            <a:off x="2148114" y="4005263"/>
+            <a:ext cx="232229" cy="454251"/>
+          </a:xfrm>
+          <a:prstGeom prst="rect">
+            <a:avLst/>
+          </a:prstGeom>
+        </p:spPr>
+        <p:style>
+          <a:lnRef idx="2">
+            <a:schemeClr val="accent1">
+              <a:shade val="15000"/>
+            </a:schemeClr>
+          </a:lnRef>
+          <a:fillRef idx="1">
+            <a:schemeClr val="accent1"/>
+          </a:fillRef>
+          <a:effectRef idx="0">
+            <a:schemeClr val="accent1"/>
+          </a:effectRef>
+          <a:fontRef idx="minor">
+            <a:schemeClr val="lt1"/>
+          </a:fontRef>
+        </p:style>
+        <p:txBody>
+          <a:bodyPr rtlCol="0" anchor="ctr"/>
+          <a:lstStyle/>
+          <a:p>
+            <a:pPr algn="ctr"/>
+            <a:endParaRPr lang="en-US"/>
+          </a:p>
+        </p:txBody>
+      </p:sp>
+      <p:sp>
+        <p:nvSpPr>
+          <p:cNvPr id="13" name="Rectangle 12">
+            <a:extLst>
+              <a:ext uri="{FF2B5EF4-FFF2-40B4-BE49-F238E27FC236}">
+                <a16:creationId xmlns:a16="http://schemas.microsoft.com/office/drawing/2014/main" id="{AB2E9B13-5574-815C-1E73-7C70740B0DC2}"/>
+              </a:ext>
+            </a:extLst>
+          </p:cNvPr>
+          <p:cNvSpPr/>
+          <p:nvPr/>
+        </p:nvSpPr>
+        <p:spPr>
+          <a:xfrm>
+            <a:off x="1654628" y="4034707"/>
+            <a:ext cx="232229" cy="454251"/>
+          </a:xfrm>
+          <a:prstGeom prst="rect">
+            <a:avLst/>
+          </a:prstGeom>
+        </p:spPr>
+        <p:style>
+          <a:lnRef idx="2">
+            <a:schemeClr val="accent1">
+              <a:shade val="15000"/>
+            </a:schemeClr>
+          </a:lnRef>
+          <a:fillRef idx="1">
+            <a:schemeClr val="accent1"/>
+          </a:fillRef>
+          <a:effectRef idx="0">
+            <a:schemeClr val="accent1"/>
+          </a:effectRef>
+          <a:fontRef idx="minor">
+            <a:schemeClr val="lt1"/>
+          </a:fontRef>
+        </p:style>
+        <p:txBody>
+          <a:bodyPr rtlCol="0" anchor="ctr"/>
+          <a:lstStyle/>
+          <a:p>
+            <a:pPr algn="ctr"/>
+            <a:endParaRPr lang="en-US"/>
+          </a:p>
+        </p:txBody>
+      </p:sp>
+      <p:sp>
+        <p:nvSpPr>
+          <p:cNvPr id="15" name="Rectangle 14">
+            <a:extLst>
+              <a:ext uri="{FF2B5EF4-FFF2-40B4-BE49-F238E27FC236}">
+                <a16:creationId xmlns:a16="http://schemas.microsoft.com/office/drawing/2014/main" id="{274F71CE-270D-F875-EE01-F5396BDF4131}"/>
+              </a:ext>
+            </a:extLst>
+          </p:cNvPr>
+          <p:cNvSpPr/>
+          <p:nvPr/>
+        </p:nvSpPr>
+        <p:spPr>
+          <a:xfrm>
+            <a:off x="3388387" y="3095626"/>
+            <a:ext cx="232229" cy="1363888"/>
+          </a:xfrm>
+          <a:prstGeom prst="rect">
+            <a:avLst/>
+          </a:prstGeom>
+        </p:spPr>
+        <p:style>
+          <a:lnRef idx="2">
+            <a:schemeClr val="accent1">
+              <a:shade val="15000"/>
+            </a:schemeClr>
+          </a:lnRef>
+          <a:fillRef idx="1">
+            <a:schemeClr val="accent1"/>
+          </a:fillRef>
+          <a:effectRef idx="0">
+            <a:schemeClr val="accent1"/>
+          </a:effectRef>
+          <a:fontRef idx="minor">
+            <a:schemeClr val="lt1"/>
+          </a:fontRef>
+        </p:style>
+        <p:txBody>
+          <a:bodyPr rtlCol="0" anchor="ctr"/>
+          <a:lstStyle/>
+          <a:p>
+            <a:pPr algn="ctr"/>
+            <a:endParaRPr lang="en-US"/>
+          </a:p>
+        </p:txBody>
+      </p:sp>
+      <p:sp>
+        <p:nvSpPr>
+          <p:cNvPr id="17" name="Rectangle 16">
+            <a:extLst>
+              <a:ext uri="{FF2B5EF4-FFF2-40B4-BE49-F238E27FC236}">
+                <a16:creationId xmlns:a16="http://schemas.microsoft.com/office/drawing/2014/main" id="{4E3F898B-6839-AE58-A385-0CACC6C548C3}"/>
+              </a:ext>
+            </a:extLst>
+          </p:cNvPr>
+          <p:cNvSpPr/>
+          <p:nvPr/>
+        </p:nvSpPr>
+        <p:spPr>
+          <a:xfrm>
+            <a:off x="3860690" y="3081888"/>
+            <a:ext cx="232229" cy="1363888"/>
+          </a:xfrm>
+          <a:prstGeom prst="rect">
+            <a:avLst/>
+          </a:prstGeom>
+        </p:spPr>
+        <p:style>
+          <a:lnRef idx="2">
+            <a:schemeClr val="accent1">
+              <a:shade val="15000"/>
+            </a:schemeClr>
+          </a:lnRef>
+          <a:fillRef idx="1">
+            <a:schemeClr val="accent1"/>
+          </a:fillRef>
+          <a:effectRef idx="0">
+            <a:schemeClr val="accent1"/>
+          </a:effectRef>
+          <a:fontRef idx="minor">
+            <a:schemeClr val="lt1"/>
+          </a:fontRef>
+        </p:style>
+        <p:txBody>
+          <a:bodyPr rtlCol="0" anchor="ctr"/>
+          <a:lstStyle/>
+          <a:p>
+            <a:pPr algn="ctr"/>
+            <a:endParaRPr lang="en-US"/>
+          </a:p>
+        </p:txBody>
+      </p:sp>
+      <p:sp>
+        <p:nvSpPr>
+          <p:cNvPr id="19" name="Rectangle 18">
+            <a:extLst>
+              <a:ext uri="{FF2B5EF4-FFF2-40B4-BE49-F238E27FC236}">
+                <a16:creationId xmlns:a16="http://schemas.microsoft.com/office/drawing/2014/main" id="{30E11BCD-4A77-1753-95B5-191FD6C2127C}"/>
+              </a:ext>
+            </a:extLst>
+          </p:cNvPr>
+          <p:cNvSpPr/>
+          <p:nvPr/>
+        </p:nvSpPr>
+        <p:spPr>
+          <a:xfrm>
+            <a:off x="4318157" y="3319461"/>
+            <a:ext cx="232229" cy="1125763"/>
+          </a:xfrm>
+          <a:prstGeom prst="rect">
+            <a:avLst/>
+          </a:prstGeom>
+        </p:spPr>
+        <p:style>
+          <a:lnRef idx="2">
+            <a:schemeClr val="accent1">
+              <a:shade val="15000"/>
+            </a:schemeClr>
+          </a:lnRef>
+          <a:fillRef idx="1">
+            <a:schemeClr val="accent1"/>
+          </a:fillRef>
+          <a:effectRef idx="0">
+            <a:schemeClr val="accent1"/>
+          </a:effectRef>
+          <a:fontRef idx="minor">
+            <a:schemeClr val="lt1"/>
+          </a:fontRef>
+        </p:style>
+        <p:txBody>
+          <a:bodyPr rtlCol="0" anchor="ctr"/>
+          <a:lstStyle/>
+          <a:p>
+            <a:pPr algn="ctr"/>
+            <a:endParaRPr lang="en-US" dirty="0"/>
+          </a:p>
+        </p:txBody>
+      </p:sp>
+      <p:sp>
+        <p:nvSpPr>
+          <p:cNvPr id="21" name="Rectangle 20">
+            <a:extLst>
+              <a:ext uri="{FF2B5EF4-FFF2-40B4-BE49-F238E27FC236}">
+                <a16:creationId xmlns:a16="http://schemas.microsoft.com/office/drawing/2014/main" id="{67E6074D-1F23-EA3C-B866-8AD3F231C066}"/>
+              </a:ext>
+            </a:extLst>
+          </p:cNvPr>
+          <p:cNvSpPr/>
+          <p:nvPr/>
+        </p:nvSpPr>
+        <p:spPr>
+          <a:xfrm>
+            <a:off x="4914422" y="3548969"/>
+            <a:ext cx="232229" cy="896255"/>
+          </a:xfrm>
+          <a:prstGeom prst="rect">
+            <a:avLst/>
+          </a:prstGeom>
+        </p:spPr>
+        <p:style>
+          <a:lnRef idx="2">
+            <a:schemeClr val="accent1">
+              <a:shade val="15000"/>
+            </a:schemeClr>
+          </a:lnRef>
+          <a:fillRef idx="1">
+            <a:schemeClr val="accent1"/>
+          </a:fillRef>
+          <a:effectRef idx="0">
+            <a:schemeClr val="accent1"/>
+          </a:effectRef>
+          <a:fontRef idx="minor">
+            <a:schemeClr val="lt1"/>
+          </a:fontRef>
+        </p:style>
+        <p:txBody>
+          <a:bodyPr rtlCol="0" anchor="ctr"/>
+          <a:lstStyle/>
+          <a:p>
+            <a:pPr algn="ctr"/>
+            <a:endParaRPr lang="en-US"/>
+          </a:p>
+        </p:txBody>
+      </p:sp>
+      <p:sp>
+        <p:nvSpPr>
+          <p:cNvPr id="23" name="Rectangle 22">
+            <a:extLst>
+              <a:ext uri="{FF2B5EF4-FFF2-40B4-BE49-F238E27FC236}">
+                <a16:creationId xmlns:a16="http://schemas.microsoft.com/office/drawing/2014/main" id="{07416182-E633-2210-5390-12AB57314715}"/>
+              </a:ext>
+            </a:extLst>
+          </p:cNvPr>
+          <p:cNvSpPr/>
+          <p:nvPr/>
+        </p:nvSpPr>
+        <p:spPr>
+          <a:xfrm>
+            <a:off x="5461679" y="3635819"/>
+            <a:ext cx="232229" cy="817570"/>
+          </a:xfrm>
+          <a:prstGeom prst="rect">
+            <a:avLst/>
+          </a:prstGeom>
+        </p:spPr>
+        <p:style>
+          <a:lnRef idx="2">
+            <a:schemeClr val="accent1">
+              <a:shade val="15000"/>
+            </a:schemeClr>
+          </a:lnRef>
+          <a:fillRef idx="1">
+            <a:schemeClr val="accent1"/>
+          </a:fillRef>
+          <a:effectRef idx="0">
+            <a:schemeClr val="accent1"/>
+          </a:effectRef>
+          <a:fontRef idx="minor">
+            <a:schemeClr val="lt1"/>
+          </a:fontRef>
+        </p:style>
+        <p:txBody>
+          <a:bodyPr rtlCol="0" anchor="ctr"/>
+          <a:lstStyle/>
+          <a:p>
+            <a:pPr algn="ctr"/>
+            <a:endParaRPr lang="en-US"/>
+          </a:p>
+        </p:txBody>
+      </p:sp>
+      <p:sp>
+        <p:nvSpPr>
+          <p:cNvPr id="24" name="Oval 23">
+            <a:extLst>
+              <a:ext uri="{FF2B5EF4-FFF2-40B4-BE49-F238E27FC236}">
+                <a16:creationId xmlns:a16="http://schemas.microsoft.com/office/drawing/2014/main" id="{BCC69295-87F7-9907-EC07-BD0F3FDC64FA}"/>
+              </a:ext>
+            </a:extLst>
+          </p:cNvPr>
+          <p:cNvSpPr/>
+          <p:nvPr/>
+        </p:nvSpPr>
+        <p:spPr>
+          <a:xfrm>
+            <a:off x="5302066" y="4053229"/>
+            <a:ext cx="1799771" cy="508000"/>
+          </a:xfrm>
+          <a:prstGeom prst="ellipse">
+            <a:avLst/>
+          </a:prstGeom>
+        </p:spPr>
+        <p:style>
+          <a:lnRef idx="2">
+            <a:schemeClr val="dk1">
+              <a:shade val="15000"/>
+            </a:schemeClr>
+          </a:lnRef>
+          <a:fillRef idx="1">
+            <a:schemeClr val="dk1"/>
+          </a:fillRef>
+          <a:effectRef idx="0">
+            <a:schemeClr val="dk1"/>
+          </a:effectRef>
+          <a:fontRef idx="minor">
+            <a:schemeClr val="lt1"/>
+          </a:fontRef>
+        </p:style>
+        <p:txBody>
+          <a:bodyPr rtlCol="0" anchor="ctr"/>
+          <a:lstStyle/>
+          <a:p>
+            <a:pPr algn="ctr"/>
+            <a:r>
+              <a:rPr lang="en-US" dirty="0"/>
+              <a:t>Detector</a:t>
+            </a:r>
+          </a:p>
+        </p:txBody>
+      </p:sp>
+      <p:sp>
+        <p:nvSpPr>
+          <p:cNvPr id="26" name="Oval 25">
+            <a:extLst>
+              <a:ext uri="{FF2B5EF4-FFF2-40B4-BE49-F238E27FC236}">
+                <a16:creationId xmlns:a16="http://schemas.microsoft.com/office/drawing/2014/main" id="{727C8728-98BD-D133-1C9F-D16EDBD6043E}"/>
+              </a:ext>
+            </a:extLst>
+          </p:cNvPr>
+          <p:cNvSpPr/>
+          <p:nvPr/>
+        </p:nvSpPr>
+        <p:spPr>
+          <a:xfrm>
+            <a:off x="3515363" y="4070666"/>
+            <a:ext cx="1799771" cy="508000"/>
+          </a:xfrm>
+          <a:prstGeom prst="ellipse">
+            <a:avLst/>
+          </a:prstGeom>
+        </p:spPr>
+        <p:style>
+          <a:lnRef idx="2">
+            <a:schemeClr val="dk1">
+              <a:shade val="15000"/>
+            </a:schemeClr>
+          </a:lnRef>
+          <a:fillRef idx="1">
+            <a:schemeClr val="dk1"/>
+          </a:fillRef>
+          <a:effectRef idx="0">
+            <a:schemeClr val="dk1"/>
+          </a:effectRef>
+          <a:fontRef idx="minor">
+            <a:schemeClr val="lt1"/>
+          </a:fontRef>
+        </p:style>
+        <p:txBody>
+          <a:bodyPr rtlCol="0" anchor="ctr"/>
+          <a:lstStyle/>
+          <a:p>
+            <a:pPr algn="ctr"/>
+            <a:r>
+              <a:rPr lang="en-US" dirty="0"/>
+              <a:t>Detector</a:t>
+            </a:r>
+          </a:p>
+        </p:txBody>
+      </p:sp>
+      <p:sp>
+        <p:nvSpPr>
+          <p:cNvPr id="28" name="Oval 27">
+            <a:extLst>
+              <a:ext uri="{FF2B5EF4-FFF2-40B4-BE49-F238E27FC236}">
+                <a16:creationId xmlns:a16="http://schemas.microsoft.com/office/drawing/2014/main" id="{E0124D9B-A28A-B64A-05C2-84CFAD1C5FBC}"/>
+              </a:ext>
+            </a:extLst>
+          </p:cNvPr>
+          <p:cNvSpPr/>
+          <p:nvPr/>
+        </p:nvSpPr>
+        <p:spPr>
+          <a:xfrm>
+            <a:off x="1654628" y="4070666"/>
+            <a:ext cx="1799771" cy="508000"/>
+          </a:xfrm>
+          <a:prstGeom prst="ellipse">
+            <a:avLst/>
+          </a:prstGeom>
+        </p:spPr>
+        <p:style>
+          <a:lnRef idx="2">
+            <a:schemeClr val="dk1">
+              <a:shade val="15000"/>
+            </a:schemeClr>
+          </a:lnRef>
+          <a:fillRef idx="1">
+            <a:schemeClr val="dk1"/>
+          </a:fillRef>
+          <a:effectRef idx="0">
+            <a:schemeClr val="dk1"/>
+          </a:effectRef>
+          <a:fontRef idx="minor">
+            <a:schemeClr val="lt1"/>
+          </a:fontRef>
+        </p:style>
+        <p:txBody>
+          <a:bodyPr rtlCol="0" anchor="ctr"/>
+          <a:lstStyle/>
+          <a:p>
+            <a:pPr algn="ctr"/>
+            <a:r>
+              <a:rPr lang="en-US" dirty="0"/>
+              <a:t>Detector</a:t>
+            </a:r>
+          </a:p>
+        </p:txBody>
+      </p:sp>
+      <p:sp>
+        <p:nvSpPr>
+          <p:cNvPr id="35" name="Rectangle 34">
+            <a:extLst>
+              <a:ext uri="{FF2B5EF4-FFF2-40B4-BE49-F238E27FC236}">
+                <a16:creationId xmlns:a16="http://schemas.microsoft.com/office/drawing/2014/main" id="{0983F79C-7AA7-23F4-31D4-6DD263900530}"/>
+              </a:ext>
+            </a:extLst>
+          </p:cNvPr>
+          <p:cNvSpPr/>
+          <p:nvPr/>
+        </p:nvSpPr>
+        <p:spPr>
+          <a:xfrm rot="5400000">
+            <a:off x="7781313" y="4939730"/>
+            <a:ext cx="232229" cy="817570"/>
+          </a:xfrm>
+          <a:prstGeom prst="rect">
+            <a:avLst/>
+          </a:prstGeom>
+        </p:spPr>
+        <p:style>
+          <a:lnRef idx="2">
+            <a:schemeClr val="accent1">
+              <a:shade val="15000"/>
+            </a:schemeClr>
+          </a:lnRef>
+          <a:fillRef idx="1">
+            <a:schemeClr val="accent1"/>
+          </a:fillRef>
+          <a:effectRef idx="0">
+            <a:schemeClr val="accent1"/>
+          </a:effectRef>
+          <a:fontRef idx="minor">
+            <a:schemeClr val="lt1"/>
+          </a:fontRef>
+        </p:style>
+        <p:txBody>
+          <a:bodyPr rtlCol="0" anchor="ctr"/>
+          <a:lstStyle/>
+          <a:p>
+            <a:pPr algn="ctr"/>
+            <a:endParaRPr lang="en-US"/>
+          </a:p>
+        </p:txBody>
+      </p:sp>
+      <p:sp>
+        <p:nvSpPr>
+          <p:cNvPr id="37" name="Rectangle 36">
+            <a:extLst>
+              <a:ext uri="{FF2B5EF4-FFF2-40B4-BE49-F238E27FC236}">
+                <a16:creationId xmlns:a16="http://schemas.microsoft.com/office/drawing/2014/main" id="{5DFE40C5-9AA7-54A5-AF84-0EF622F49558}"/>
+              </a:ext>
+            </a:extLst>
+          </p:cNvPr>
+          <p:cNvSpPr/>
+          <p:nvPr/>
+        </p:nvSpPr>
+        <p:spPr>
+          <a:xfrm rot="5400000">
+            <a:off x="7694487" y="4747973"/>
+            <a:ext cx="232230" cy="591252"/>
+          </a:xfrm>
+          <a:prstGeom prst="rect">
+            <a:avLst/>
+          </a:prstGeom>
+        </p:spPr>
+        <p:style>
+          <a:lnRef idx="2">
+            <a:schemeClr val="accent1">
+              <a:shade val="15000"/>
+            </a:schemeClr>
+          </a:lnRef>
+          <a:fillRef idx="1">
+            <a:schemeClr val="accent1"/>
+          </a:fillRef>
+          <a:effectRef idx="0">
+            <a:schemeClr val="accent1"/>
+          </a:effectRef>
+          <a:fontRef idx="minor">
+            <a:schemeClr val="lt1"/>
+          </a:fontRef>
+        </p:style>
+        <p:txBody>
+          <a:bodyPr rtlCol="0" anchor="ctr"/>
+          <a:lstStyle/>
+          <a:p>
+            <a:pPr algn="ctr"/>
+            <a:endParaRPr lang="en-US"/>
+          </a:p>
+        </p:txBody>
+      </p:sp>
+      <p:sp>
+        <p:nvSpPr>
+          <p:cNvPr id="41" name="Rectangle 40">
+            <a:extLst>
+              <a:ext uri="{FF2B5EF4-FFF2-40B4-BE49-F238E27FC236}">
+                <a16:creationId xmlns:a16="http://schemas.microsoft.com/office/drawing/2014/main" id="{9764218F-F695-1655-8B32-047384F002B3}"/>
+              </a:ext>
+            </a:extLst>
+          </p:cNvPr>
+          <p:cNvSpPr/>
+          <p:nvPr/>
+        </p:nvSpPr>
+        <p:spPr>
+          <a:xfrm rot="5400000">
+            <a:off x="7539256" y="4570853"/>
+            <a:ext cx="190518" cy="377371"/>
+          </a:xfrm>
+          <a:prstGeom prst="rect">
+            <a:avLst/>
+          </a:prstGeom>
+        </p:spPr>
+        <p:style>
+          <a:lnRef idx="2">
+            <a:schemeClr val="accent1">
+              <a:shade val="15000"/>
+            </a:schemeClr>
+          </a:lnRef>
+          <a:fillRef idx="1">
+            <a:schemeClr val="accent1"/>
+          </a:fillRef>
+          <a:effectRef idx="0">
+            <a:schemeClr val="accent1"/>
+          </a:effectRef>
+          <a:fontRef idx="minor">
+            <a:schemeClr val="lt1"/>
+          </a:fontRef>
+        </p:style>
+        <p:txBody>
+          <a:bodyPr rtlCol="0" anchor="ctr"/>
+          <a:lstStyle/>
+          <a:p>
+            <a:pPr algn="ctr"/>
+            <a:endParaRPr lang="en-US"/>
+          </a:p>
+        </p:txBody>
+      </p:sp>
+      <p:sp>
+        <p:nvSpPr>
+          <p:cNvPr id="43" name="Rectangle 42">
+            <a:extLst>
+              <a:ext uri="{FF2B5EF4-FFF2-40B4-BE49-F238E27FC236}">
+                <a16:creationId xmlns:a16="http://schemas.microsoft.com/office/drawing/2014/main" id="{FBDEBEE8-F4CB-F001-CA5E-2FE33C094105}"/>
+              </a:ext>
+            </a:extLst>
+          </p:cNvPr>
+          <p:cNvSpPr/>
+          <p:nvPr/>
+        </p:nvSpPr>
+        <p:spPr>
+          <a:xfrm rot="5400000">
+            <a:off x="7694487" y="5375887"/>
+            <a:ext cx="232230" cy="591252"/>
+          </a:xfrm>
+          <a:prstGeom prst="rect">
+            <a:avLst/>
+          </a:prstGeom>
+        </p:spPr>
+        <p:style>
+          <a:lnRef idx="2">
+            <a:schemeClr val="accent1">
+              <a:shade val="15000"/>
+            </a:schemeClr>
+          </a:lnRef>
+          <a:fillRef idx="1">
+            <a:schemeClr val="accent1"/>
+          </a:fillRef>
+          <a:effectRef idx="0">
+            <a:schemeClr val="accent1"/>
+          </a:effectRef>
+          <a:fontRef idx="minor">
+            <a:schemeClr val="lt1"/>
+          </a:fontRef>
+        </p:style>
+        <p:txBody>
+          <a:bodyPr rtlCol="0" anchor="ctr"/>
+          <a:lstStyle/>
+          <a:p>
+            <a:pPr algn="ctr"/>
+            <a:endParaRPr lang="en-US"/>
+          </a:p>
+        </p:txBody>
+      </p:sp>
+      <p:sp>
+        <p:nvSpPr>
+          <p:cNvPr id="45" name="Rectangle 44">
+            <a:extLst>
+              <a:ext uri="{FF2B5EF4-FFF2-40B4-BE49-F238E27FC236}">
+                <a16:creationId xmlns:a16="http://schemas.microsoft.com/office/drawing/2014/main" id="{B9591057-B4D9-347A-7B43-03C7292C335F}"/>
+              </a:ext>
+            </a:extLst>
+          </p:cNvPr>
+          <p:cNvSpPr/>
+          <p:nvPr/>
+        </p:nvSpPr>
+        <p:spPr>
+          <a:xfrm rot="5400000">
+            <a:off x="7543609" y="5813883"/>
+            <a:ext cx="190518" cy="377371"/>
+          </a:xfrm>
+          <a:prstGeom prst="rect">
+            <a:avLst/>
+          </a:prstGeom>
+        </p:spPr>
+        <p:style>
+          <a:lnRef idx="2">
+            <a:schemeClr val="accent1">
+              <a:shade val="15000"/>
+            </a:schemeClr>
+          </a:lnRef>
+          <a:fillRef idx="1">
+            <a:schemeClr val="accent1"/>
+          </a:fillRef>
+          <a:effectRef idx="0">
+            <a:schemeClr val="accent1"/>
+          </a:effectRef>
+          <a:fontRef idx="minor">
+            <a:schemeClr val="lt1"/>
+          </a:fontRef>
+        </p:style>
+        <p:txBody>
+          <a:bodyPr rtlCol="0" anchor="ctr"/>
+          <a:lstStyle/>
+          <a:p>
+            <a:pPr algn="ctr"/>
+            <a:endParaRPr lang="en-US"/>
+          </a:p>
+        </p:txBody>
+      </p:sp>
+      <p:sp>
+        <p:nvSpPr>
+          <p:cNvPr id="33" name="Oval 32">
+            <a:extLst>
+              <a:ext uri="{FF2B5EF4-FFF2-40B4-BE49-F238E27FC236}">
+                <a16:creationId xmlns:a16="http://schemas.microsoft.com/office/drawing/2014/main" id="{703904B2-931C-4EB7-0677-0CB8714306B6}"/>
+              </a:ext>
+            </a:extLst>
+          </p:cNvPr>
+          <p:cNvSpPr/>
+          <p:nvPr/>
+        </p:nvSpPr>
+        <p:spPr>
+          <a:xfrm rot="5400000">
+            <a:off x="7069485" y="5152932"/>
+            <a:ext cx="838315" cy="431077"/>
+          </a:xfrm>
+          <a:prstGeom prst="ellipse">
+            <a:avLst/>
+          </a:prstGeom>
+        </p:spPr>
+        <p:style>
+          <a:lnRef idx="2">
+            <a:schemeClr val="dk1">
+              <a:shade val="15000"/>
+            </a:schemeClr>
+          </a:lnRef>
+          <a:fillRef idx="1">
+            <a:schemeClr val="dk1"/>
+          </a:fillRef>
+          <a:effectRef idx="0">
+            <a:schemeClr val="dk1"/>
+          </a:effectRef>
+          <a:fontRef idx="minor">
+            <a:schemeClr val="lt1"/>
+          </a:fontRef>
+        </p:style>
+        <p:txBody>
+          <a:bodyPr rtlCol="0" anchor="ctr"/>
+          <a:lstStyle/>
+          <a:p>
+            <a:pPr algn="ctr"/>
+            <a:r>
+              <a:rPr lang="en-US" dirty="0"/>
+              <a:t>Det</a:t>
+            </a:r>
+          </a:p>
+        </p:txBody>
+      </p:sp>
+    </p:spTree>
+    <p:extLst>
+      <p:ext uri="{BB962C8B-B14F-4D97-AF65-F5344CB8AC3E}">
+        <p14:creationId xmlns:p14="http://schemas.microsoft.com/office/powerpoint/2010/main" val="36593793"/>
+      </p:ext>
+    </p:extLst>
+  </p:cSld>
+  <p:clrMapOvr>
+    <a:masterClrMapping/>
+  </p:clrMapOvr>
+</p:sld>
+</file>
+
 <file path=ppt/slides/slide9.xml><?xml version="1.0" encoding="utf-8"?>
 <p:sld xmlns:a="http://schemas.openxmlformats.org/drawingml/2006/main" xmlns:r="http://schemas.openxmlformats.org/officeDocument/2006/relationships" xmlns:p="http://schemas.openxmlformats.org/presentationml/2006/main">
   <p:cSld>
@@ -10556,16 +11851,248 @@
           <a:chExt cx="0" cy="0"/>
         </a:xfrm>
       </p:grpSpPr>
+      <p:sp>
+        <p:nvSpPr>
+          <p:cNvPr id="2" name="Title 1">
+            <a:extLst>
+              <a:ext uri="{FF2B5EF4-FFF2-40B4-BE49-F238E27FC236}">
+                <a16:creationId xmlns:a16="http://schemas.microsoft.com/office/drawing/2014/main" id="{6BC8AB86-2DBC-0B06-22E7-36DC67501C43}"/>
+              </a:ext>
+            </a:extLst>
+          </p:cNvPr>
+          <p:cNvSpPr>
+            <a:spLocks noGrp="1"/>
+          </p:cNvSpPr>
+          <p:nvPr>
+            <p:ph type="title"/>
+          </p:nvPr>
+        </p:nvSpPr>
+        <p:spPr/>
+        <p:txBody>
+          <a:bodyPr/>
+          <a:lstStyle/>
+          <a:p>
+            <a:r>
+              <a:rPr lang="en-US" dirty="0"/>
+              <a:t>Results for the off beam detector </a:t>
+            </a:r>
+            <a:r>
+              <a:rPr lang="en-US"/>
+              <a:t>at 50 </a:t>
+            </a:r>
+            <a:r>
+              <a:rPr lang="en-US" dirty="0"/>
+              <a:t>mm </a:t>
+            </a:r>
+          </a:p>
+        </p:txBody>
+      </p:sp>
+      <p:pic>
+        <p:nvPicPr>
+          <p:cNvPr id="4" name="Picture 3">
+            <a:extLst>
+              <a:ext uri="{FF2B5EF4-FFF2-40B4-BE49-F238E27FC236}">
+                <a16:creationId xmlns:a16="http://schemas.microsoft.com/office/drawing/2014/main" id="{7FA60738-074D-CE49-AABC-8098EA717527}"/>
+              </a:ext>
+            </a:extLst>
+          </p:cNvPr>
+          <p:cNvPicPr>
+            <a:picLocks noChangeAspect="1"/>
+          </p:cNvPicPr>
+          <p:nvPr/>
+        </p:nvPicPr>
+        <p:blipFill>
+          <a:blip r:embed="rId2">
+            <a:extLst>
+              <a:ext uri="{28A0092B-C50C-407E-A947-70E740481C1C}">
+                <a14:useLocalDpi xmlns:a14="http://schemas.microsoft.com/office/drawing/2010/main" val="0"/>
+              </a:ext>
+            </a:extLst>
+          </a:blip>
+          <a:stretch>
+            <a:fillRect/>
+          </a:stretch>
+        </p:blipFill>
+        <p:spPr>
+          <a:xfrm>
+            <a:off x="863600" y="2220686"/>
+            <a:ext cx="4538133" cy="3403600"/>
+          </a:xfrm>
+          <a:prstGeom prst="rect">
+            <a:avLst/>
+          </a:prstGeom>
+        </p:spPr>
+      </p:pic>
+      <p:pic>
+        <p:nvPicPr>
+          <p:cNvPr id="6" name="Picture 5">
+            <a:extLst>
+              <a:ext uri="{FF2B5EF4-FFF2-40B4-BE49-F238E27FC236}">
+                <a16:creationId xmlns:a16="http://schemas.microsoft.com/office/drawing/2014/main" id="{0089C81D-21B9-E6C4-633F-D8BFC46DCBEB}"/>
+              </a:ext>
+            </a:extLst>
+          </p:cNvPr>
+          <p:cNvPicPr>
+            <a:picLocks noChangeAspect="1"/>
+          </p:cNvPicPr>
+          <p:nvPr/>
+        </p:nvPicPr>
+        <p:blipFill>
+          <a:blip r:embed="rId3">
+            <a:extLst>
+              <a:ext uri="{28A0092B-C50C-407E-A947-70E740481C1C}">
+                <a14:useLocalDpi xmlns:a14="http://schemas.microsoft.com/office/drawing/2010/main" val="0"/>
+              </a:ext>
+            </a:extLst>
+          </a:blip>
+          <a:stretch>
+            <a:fillRect/>
+          </a:stretch>
+        </p:blipFill>
+        <p:spPr>
+          <a:xfrm>
+            <a:off x="6715276" y="2220686"/>
+            <a:ext cx="4538133" cy="3403600"/>
+          </a:xfrm>
+          <a:prstGeom prst="rect">
+            <a:avLst/>
+          </a:prstGeom>
+        </p:spPr>
+      </p:pic>
+      <p:sp>
+        <p:nvSpPr>
+          <p:cNvPr id="7" name="Rectangle 6">
+            <a:extLst>
+              <a:ext uri="{FF2B5EF4-FFF2-40B4-BE49-F238E27FC236}">
+                <a16:creationId xmlns:a16="http://schemas.microsoft.com/office/drawing/2014/main" id="{242F019C-A6E9-513E-0DC8-D355A11CB504}"/>
+              </a:ext>
+            </a:extLst>
+          </p:cNvPr>
+          <p:cNvSpPr/>
+          <p:nvPr/>
+        </p:nvSpPr>
+        <p:spPr>
+          <a:xfrm>
+            <a:off x="1734457" y="1853248"/>
+            <a:ext cx="8498114" cy="577895"/>
+          </a:xfrm>
+          <a:prstGeom prst="rect">
+            <a:avLst/>
+          </a:prstGeom>
+        </p:spPr>
+        <p:style>
+          <a:lnRef idx="2">
+            <a:schemeClr val="accent1">
+              <a:shade val="15000"/>
+            </a:schemeClr>
+          </a:lnRef>
+          <a:fillRef idx="1">
+            <a:schemeClr val="accent1"/>
+          </a:fillRef>
+          <a:effectRef idx="0">
+            <a:schemeClr val="accent1"/>
+          </a:effectRef>
+          <a:fontRef idx="minor">
+            <a:schemeClr val="lt1"/>
+          </a:fontRef>
+        </p:style>
+        <p:txBody>
+          <a:bodyPr rtlCol="0" anchor="ctr"/>
+          <a:lstStyle/>
+          <a:p>
+            <a:pPr algn="ctr"/>
+            <a:endParaRPr lang="en-US"/>
+          </a:p>
+        </p:txBody>
+      </p:sp>
     </p:spTree>
     <p:extLst>
       <p:ext uri="{BB962C8B-B14F-4D97-AF65-F5344CB8AC3E}">
-        <p14:creationId xmlns:p14="http://schemas.microsoft.com/office/powerpoint/2010/main" val="1017295827"/>
+        <p14:creationId xmlns:p14="http://schemas.microsoft.com/office/powerpoint/2010/main" val="3643520138"/>
       </p:ext>
     </p:extLst>
   </p:cSld>
   <p:clrMapOvr>
     <a:masterClrMapping/>
   </p:clrMapOvr>
+  <p:timing>
+    <p:tnLst>
+      <p:par>
+        <p:cTn id="1" dur="indefinite" restart="never" nodeType="tmRoot">
+          <p:childTnLst>
+            <p:seq concurrent="1" nextAc="seek">
+              <p:cTn id="2" dur="indefinite" nodeType="mainSeq">
+                <p:childTnLst>
+                  <p:par>
+                    <p:cTn id="3" fill="hold">
+                      <p:stCondLst>
+                        <p:cond delay="indefinite"/>
+                      </p:stCondLst>
+                      <p:childTnLst>
+                        <p:par>
+                          <p:cTn id="4" fill="hold">
+                            <p:stCondLst>
+                              <p:cond delay="0"/>
+                            </p:stCondLst>
+                            <p:childTnLst>
+                              <p:par>
+                                <p:cTn id="5" presetID="1" presetClass="exit" presetSubtype="0" fill="hold" grpId="0" nodeType="clickEffect">
+                                  <p:stCondLst>
+                                    <p:cond delay="0"/>
+                                  </p:stCondLst>
+                                  <p:childTnLst>
+                                    <p:set>
+                                      <p:cBhvr>
+                                        <p:cTn id="6" dur="1" fill="hold">
+                                          <p:stCondLst>
+                                            <p:cond delay="0"/>
+                                          </p:stCondLst>
+                                        </p:cTn>
+                                        <p:tgtEl>
+                                          <p:spTgt spid="7"/>
+                                        </p:tgtEl>
+                                        <p:attrNameLst>
+                                          <p:attrName>style.visibility</p:attrName>
+                                        </p:attrNameLst>
+                                      </p:cBhvr>
+                                      <p:to>
+                                        <p:strVal val="hidden"/>
+                                      </p:to>
+                                    </p:set>
+                                  </p:childTnLst>
+                                </p:cTn>
+                              </p:par>
+                            </p:childTnLst>
+                          </p:cTn>
+                        </p:par>
+                      </p:childTnLst>
+                    </p:cTn>
+                  </p:par>
+                </p:childTnLst>
+              </p:cTn>
+              <p:prevCondLst>
+                <p:cond evt="onPrev" delay="0">
+                  <p:tgtEl>
+                    <p:sldTgt/>
+                  </p:tgtEl>
+                </p:cond>
+              </p:prevCondLst>
+              <p:nextCondLst>
+                <p:cond evt="onNext" delay="0">
+                  <p:tgtEl>
+                    <p:sldTgt/>
+                  </p:tgtEl>
+                </p:cond>
+              </p:nextCondLst>
+            </p:seq>
+          </p:childTnLst>
+        </p:cTn>
+      </p:par>
+    </p:tnLst>
+    <p:bldLst>
+      <p:bldP spid="7" grpId="0" animBg="1"/>
+    </p:bldLst>
+  </p:timing>
 </p:sld>
 </file>
 

--- a/MonteCarlo/MonteCarloProj/Presentation for West River.pptx
+++ b/MonteCarlo/MonteCarloProj/Presentation for West River.pptx
@@ -9,22 +9,17 @@
     <p:sldId id="263" r:id="rId3"/>
     <p:sldId id="264" r:id="rId4"/>
     <p:sldId id="265" r:id="rId5"/>
-    <p:sldId id="266" r:id="rId6"/>
-    <p:sldId id="269" r:id="rId7"/>
+    <p:sldId id="269" r:id="rId6"/>
+    <p:sldId id="278" r:id="rId7"/>
     <p:sldId id="271" r:id="rId8"/>
     <p:sldId id="272" r:id="rId9"/>
     <p:sldId id="273" r:id="rId10"/>
     <p:sldId id="274" r:id="rId11"/>
     <p:sldId id="275" r:id="rId12"/>
-    <p:sldId id="268" r:id="rId13"/>
-    <p:sldId id="270" r:id="rId14"/>
-    <p:sldId id="267" r:id="rId15"/>
-    <p:sldId id="258" r:id="rId16"/>
-    <p:sldId id="260" r:id="rId17"/>
-    <p:sldId id="261" r:id="rId18"/>
-    <p:sldId id="262" r:id="rId19"/>
-    <p:sldId id="259" r:id="rId20"/>
-    <p:sldId id="257" r:id="rId21"/>
+    <p:sldId id="276" r:id="rId13"/>
+    <p:sldId id="258" r:id="rId14"/>
+    <p:sldId id="260" r:id="rId15"/>
+    <p:sldId id="261" r:id="rId16"/>
   </p:sldIdLst>
   <p:sldSz cx="12192000" cy="6858000"/>
   <p:notesSz cx="6858000" cy="9144000"/>
@@ -6147,7 +6142,7 @@
           <a:p>
             <a:r>
               <a:rPr lang="en-US" dirty="0"/>
-              <a:t>Presentation for West River</a:t>
+              <a:t>Turbidity Meter Simulation</a:t>
             </a:r>
           </a:p>
         </p:txBody>
@@ -6173,10 +6168,49 @@
           <a:bodyPr/>
           <a:lstStyle/>
           <a:p>
-            <a:endParaRPr lang="en-US" dirty="0"/>
-          </a:p>
-        </p:txBody>
-      </p:sp>
+            <a:r>
+              <a:rPr lang="en-US" dirty="0"/>
+              <a:t>Pre-Results Meeting</a:t>
+            </a:r>
+          </a:p>
+        </p:txBody>
+      </p:sp>
+      <p:pic>
+        <p:nvPicPr>
+          <p:cNvPr id="5" name="Picture 4">
+            <a:extLst>
+              <a:ext uri="{FF2B5EF4-FFF2-40B4-BE49-F238E27FC236}">
+                <a16:creationId xmlns:a16="http://schemas.microsoft.com/office/drawing/2014/main" id="{3C637CC8-38DA-8ECC-FE91-146B615A8AC5}"/>
+              </a:ext>
+            </a:extLst>
+          </p:cNvPr>
+          <p:cNvPicPr>
+            <a:picLocks noChangeAspect="1"/>
+          </p:cNvPicPr>
+          <p:nvPr/>
+        </p:nvPicPr>
+        <p:blipFill>
+          <a:blip r:embed="rId2">
+            <a:extLst>
+              <a:ext uri="{28A0092B-C50C-407E-A947-70E740481C1C}">
+                <a14:useLocalDpi xmlns:a14="http://schemas.microsoft.com/office/drawing/2010/main" val="0"/>
+              </a:ext>
+            </a:extLst>
+          </a:blip>
+          <a:stretch>
+            <a:fillRect/>
+          </a:stretch>
+        </p:blipFill>
+        <p:spPr>
+          <a:xfrm>
+            <a:off x="8173962" y="3875315"/>
+            <a:ext cx="3880152" cy="2910114"/>
+          </a:xfrm>
+          <a:prstGeom prst="rect">
+            <a:avLst/>
+          </a:prstGeom>
+        </p:spPr>
+      </p:pic>
     </p:spTree>
     <p:extLst>
       <p:ext uri="{BB962C8B-B14F-4D97-AF65-F5344CB8AC3E}">
@@ -6438,7 +6472,7 @@
           <p:cNvPr id="2" name="Title 1">
             <a:extLst>
               <a:ext uri="{FF2B5EF4-FFF2-40B4-BE49-F238E27FC236}">
-                <a16:creationId xmlns:a16="http://schemas.microsoft.com/office/drawing/2014/main" id="{B356E126-C1BE-85E8-459F-D92815FAC6FA}"/>
+                <a16:creationId xmlns:a16="http://schemas.microsoft.com/office/drawing/2014/main" id="{8F277E78-A326-71AB-52D1-8F790BA3AFDB}"/>
               </a:ext>
             </a:extLst>
           </p:cNvPr>
@@ -6449,85 +6483,161 @@
             <p:ph type="title"/>
           </p:nvPr>
         </p:nvSpPr>
-        <p:spPr/>
+        <p:spPr>
+          <a:xfrm>
+            <a:off x="646111" y="452718"/>
+            <a:ext cx="10021889" cy="1400530"/>
+          </a:xfrm>
+        </p:spPr>
         <p:txBody>
           <a:bodyPr/>
           <a:lstStyle/>
           <a:p>
             <a:r>
               <a:rPr lang="en-US" dirty="0"/>
-              <a:t>Analysis Methods</a:t>
-            </a:r>
-          </a:p>
-        </p:txBody>
-      </p:sp>
-      <p:sp>
-        <p:nvSpPr>
-          <p:cNvPr id="3" name="Content Placeholder 2">
+              <a:t>What if we go higher off the beam?</a:t>
+            </a:r>
+          </a:p>
+        </p:txBody>
+      </p:sp>
+      <p:pic>
+        <p:nvPicPr>
+          <p:cNvPr id="4" name="Picture 3">
             <a:extLst>
               <a:ext uri="{FF2B5EF4-FFF2-40B4-BE49-F238E27FC236}">
-                <a16:creationId xmlns:a16="http://schemas.microsoft.com/office/drawing/2014/main" id="{B072FA01-4DD5-7264-9B6F-4CC46B83B25F}"/>
+                <a16:creationId xmlns:a16="http://schemas.microsoft.com/office/drawing/2014/main" id="{4F1F9E79-446C-6EBC-81EE-831DCE3BFBD0}"/>
               </a:ext>
             </a:extLst>
           </p:cNvPr>
-          <p:cNvSpPr>
-            <a:spLocks noGrp="1"/>
-          </p:cNvSpPr>
-          <p:nvPr>
-            <p:ph idx="1"/>
-          </p:nvPr>
-        </p:nvSpPr>
-        <p:spPr/>
-        <p:txBody>
-          <a:bodyPr/>
-          <a:lstStyle/>
-          <a:p>
-            <a:endParaRPr lang="en-US"/>
-          </a:p>
-        </p:txBody>
-      </p:sp>
-      <p:sp>
-        <p:nvSpPr>
-          <p:cNvPr id="4" name="Text Placeholder 3">
+          <p:cNvPicPr>
+            <a:picLocks noChangeAspect="1"/>
+          </p:cNvPicPr>
+          <p:nvPr/>
+        </p:nvPicPr>
+        <p:blipFill>
+          <a:blip r:embed="rId2">
+            <a:extLst>
+              <a:ext uri="{28A0092B-C50C-407E-A947-70E740481C1C}">
+                <a14:useLocalDpi xmlns:a14="http://schemas.microsoft.com/office/drawing/2010/main" val="0"/>
+              </a:ext>
+            </a:extLst>
+          </a:blip>
+          <a:stretch>
+            <a:fillRect/>
+          </a:stretch>
+        </p:blipFill>
+        <p:spPr>
+          <a:xfrm>
+            <a:off x="67734" y="2126343"/>
+            <a:ext cx="6028266" cy="4521200"/>
+          </a:xfrm>
+          <a:prstGeom prst="rect">
+            <a:avLst/>
+          </a:prstGeom>
+        </p:spPr>
+      </p:pic>
+      <p:pic>
+        <p:nvPicPr>
+          <p:cNvPr id="6" name="Picture 5">
             <a:extLst>
               <a:ext uri="{FF2B5EF4-FFF2-40B4-BE49-F238E27FC236}">
-                <a16:creationId xmlns:a16="http://schemas.microsoft.com/office/drawing/2014/main" id="{5AFD19D3-F098-B794-A2BA-0DAB398D30C8}"/>
+                <a16:creationId xmlns:a16="http://schemas.microsoft.com/office/drawing/2014/main" id="{2E1F7D74-F458-1217-2C14-7AF1792F064E}"/>
               </a:ext>
             </a:extLst>
           </p:cNvPr>
-          <p:cNvSpPr>
-            <a:spLocks noGrp="1"/>
-          </p:cNvSpPr>
-          <p:nvPr>
-            <p:ph type="body" sz="half" idx="2"/>
-          </p:nvPr>
-        </p:nvSpPr>
-        <p:spPr/>
-        <p:txBody>
-          <a:bodyPr/>
+          <p:cNvPicPr>
+            <a:picLocks noChangeAspect="1"/>
+          </p:cNvPicPr>
+          <p:nvPr/>
+        </p:nvPicPr>
+        <p:blipFill>
+          <a:blip r:embed="rId3">
+            <a:extLst>
+              <a:ext uri="{28A0092B-C50C-407E-A947-70E740481C1C}">
+                <a14:useLocalDpi xmlns:a14="http://schemas.microsoft.com/office/drawing/2010/main" val="0"/>
+              </a:ext>
+            </a:extLst>
+          </a:blip>
+          <a:stretch>
+            <a:fillRect/>
+          </a:stretch>
+        </p:blipFill>
+        <p:spPr>
+          <a:xfrm>
+            <a:off x="6096000" y="2126343"/>
+            <a:ext cx="6028266" cy="4521200"/>
+          </a:xfrm>
+          <a:prstGeom prst="rect">
+            <a:avLst/>
+          </a:prstGeom>
+        </p:spPr>
+      </p:pic>
+      <p:sp>
+        <p:nvSpPr>
+          <p:cNvPr id="7" name="TextBox 6">
+            <a:extLst>
+              <a:ext uri="{FF2B5EF4-FFF2-40B4-BE49-F238E27FC236}">
+                <a16:creationId xmlns:a16="http://schemas.microsoft.com/office/drawing/2014/main" id="{21C38AE6-8375-C451-2760-F24FC0F6F9EC}"/>
+              </a:ext>
+            </a:extLst>
+          </p:cNvPr>
+          <p:cNvSpPr txBox="1"/>
+          <p:nvPr/>
+        </p:nvSpPr>
+        <p:spPr>
+          <a:xfrm>
+            <a:off x="725714" y="1545771"/>
+            <a:ext cx="4782457" cy="369332"/>
+          </a:xfrm>
+          <a:prstGeom prst="rect">
+            <a:avLst/>
+          </a:prstGeom>
+          <a:noFill/>
+        </p:spPr>
+        <p:txBody>
+          <a:bodyPr wrap="square" rtlCol="0">
+            <a:spAutoFit/>
+          </a:bodyPr>
           <a:lstStyle/>
           <a:p>
             <a:r>
               <a:rPr lang="en-US" dirty="0"/>
-              <a:t>Overall Picture</a:t>
-            </a:r>
-          </a:p>
+              <a:t>AT 100mm off beam</a:t>
+            </a:r>
+          </a:p>
+        </p:txBody>
+      </p:sp>
+      <p:sp>
+        <p:nvSpPr>
+          <p:cNvPr id="9" name="TextBox 8">
+            <a:extLst>
+              <a:ext uri="{FF2B5EF4-FFF2-40B4-BE49-F238E27FC236}">
+                <a16:creationId xmlns:a16="http://schemas.microsoft.com/office/drawing/2014/main" id="{8B16EEAD-D3D3-7729-44F5-043CEBC72987}"/>
+              </a:ext>
+            </a:extLst>
+          </p:cNvPr>
+          <p:cNvSpPr txBox="1"/>
+          <p:nvPr/>
+        </p:nvSpPr>
+        <p:spPr>
+          <a:xfrm>
+            <a:off x="7341809" y="1498430"/>
+            <a:ext cx="4782457" cy="369332"/>
+          </a:xfrm>
+          <a:prstGeom prst="rect">
+            <a:avLst/>
+          </a:prstGeom>
+          <a:noFill/>
+        </p:spPr>
+        <p:txBody>
+          <a:bodyPr wrap="square" rtlCol="0">
+            <a:spAutoFit/>
+          </a:bodyPr>
+          <a:lstStyle/>
           <a:p>
             <a:r>
               <a:rPr lang="en-US" dirty="0"/>
-              <a:t>Angle Dependent Analysis</a:t>
-            </a:r>
-          </a:p>
-          <a:p>
-            <a:r>
-              <a:rPr lang="en-US" dirty="0"/>
-              <a:t>Goldie Zone Given Some Min</a:t>
-            </a:r>
-          </a:p>
-          <a:p>
-            <a:r>
-              <a:rPr lang="en-US" dirty="0"/>
-              <a:t>Curve</a:t>
+              <a:t>AT 50mm off beam</a:t>
             </a:r>
           </a:p>
         </p:txBody>
@@ -6535,7 +6645,7 @@
     </p:spTree>
     <p:extLst>
       <p:ext uri="{BB962C8B-B14F-4D97-AF65-F5344CB8AC3E}">
-        <p14:creationId xmlns:p14="http://schemas.microsoft.com/office/powerpoint/2010/main" val="1310060062"/>
+        <p14:creationId xmlns:p14="http://schemas.microsoft.com/office/powerpoint/2010/main" val="1793682186"/>
       </p:ext>
     </p:extLst>
   </p:cSld>
@@ -6562,10 +6672,191 @@
           <a:chExt cx="0" cy="0"/>
         </a:xfrm>
       </p:grpSpPr>
+      <p:sp>
+        <p:nvSpPr>
+          <p:cNvPr id="2" name="Title 1">
+            <a:extLst>
+              <a:ext uri="{FF2B5EF4-FFF2-40B4-BE49-F238E27FC236}">
+                <a16:creationId xmlns:a16="http://schemas.microsoft.com/office/drawing/2014/main" id="{68CDE3B1-A1D1-CD63-EFDA-1AE7F26FA84E}"/>
+              </a:ext>
+            </a:extLst>
+          </p:cNvPr>
+          <p:cNvSpPr>
+            <a:spLocks noGrp="1"/>
+          </p:cNvSpPr>
+          <p:nvPr>
+            <p:ph type="title"/>
+          </p:nvPr>
+        </p:nvSpPr>
+        <p:spPr>
+          <a:xfrm>
+            <a:off x="458268" y="257628"/>
+            <a:ext cx="1668075" cy="1447800"/>
+          </a:xfrm>
+        </p:spPr>
+        <p:txBody>
+          <a:bodyPr/>
+          <a:lstStyle/>
+          <a:p>
+            <a:r>
+              <a:rPr lang="en-US" dirty="0"/>
+              <a:t>Sanity Checks</a:t>
+            </a:r>
+          </a:p>
+        </p:txBody>
+      </p:sp>
+      <p:sp>
+        <p:nvSpPr>
+          <p:cNvPr id="4" name="Text Placeholder 3">
+            <a:extLst>
+              <a:ext uri="{FF2B5EF4-FFF2-40B4-BE49-F238E27FC236}">
+                <a16:creationId xmlns:a16="http://schemas.microsoft.com/office/drawing/2014/main" id="{1D46CF0A-A784-9712-C2C8-FC454923D163}"/>
+              </a:ext>
+            </a:extLst>
+          </p:cNvPr>
+          <p:cNvSpPr>
+            <a:spLocks noGrp="1"/>
+          </p:cNvSpPr>
+          <p:nvPr>
+            <p:ph type="body" sz="half" idx="2"/>
+          </p:nvPr>
+        </p:nvSpPr>
+        <p:spPr>
+          <a:xfrm>
+            <a:off x="399143" y="2191657"/>
+            <a:ext cx="10980057" cy="4521199"/>
+          </a:xfrm>
+        </p:spPr>
+        <p:txBody>
+          <a:bodyPr>
+            <a:normAutofit fontScale="55000" lnSpcReduction="20000"/>
+          </a:bodyPr>
+          <a:lstStyle/>
+          <a:p>
+            <a:pPr marL="342900" indent="-342900">
+              <a:buAutoNum type="arabicPeriod"/>
+            </a:pPr>
+            <a:r>
+              <a:rPr lang="en-US" sz="3300" dirty="0"/>
+              <a:t>Under 0 scattering:</a:t>
+            </a:r>
+          </a:p>
+          <a:p>
+            <a:pPr marL="800100" lvl="1" indent="-342900">
+              <a:buAutoNum type="arabicPeriod"/>
+            </a:pPr>
+            <a:r>
+              <a:rPr lang="en-US" sz="3300" dirty="0"/>
+              <a:t>Peak at zero degrees</a:t>
+            </a:r>
+          </a:p>
+          <a:p>
+            <a:pPr marL="800100" lvl="1" indent="-342900">
+              <a:buAutoNum type="arabicPeriod"/>
+            </a:pPr>
+            <a:r>
+              <a:rPr lang="en-US" sz="3300" dirty="0"/>
+              <a:t>Absorption dependance must recover the beer lambert law</a:t>
+            </a:r>
+          </a:p>
+          <a:p>
+            <a:pPr marL="342900" indent="-342900">
+              <a:buAutoNum type="arabicPeriod"/>
+            </a:pPr>
+            <a:r>
+              <a:rPr lang="en-US" sz="3300" dirty="0"/>
+              <a:t>Under conditions where 1 scattering event per photon on average occurs:</a:t>
+            </a:r>
+          </a:p>
+          <a:p>
+            <a:pPr marL="800100" lvl="1" indent="-342900">
+              <a:buAutoNum type="arabicPeriod"/>
+            </a:pPr>
+            <a:r>
+              <a:rPr lang="en-US" sz="3300" dirty="0"/>
+              <a:t>We must recover the Fornier Forand distribution</a:t>
+            </a:r>
+          </a:p>
+          <a:p>
+            <a:pPr marL="800100" lvl="1" indent="-342900">
+              <a:buAutoNum type="arabicPeriod"/>
+            </a:pPr>
+            <a:r>
+              <a:rPr lang="en-US" sz="3300" dirty="0"/>
+              <a:t>HG and FF must be close</a:t>
+            </a:r>
+          </a:p>
+          <a:p>
+            <a:pPr marL="342900" indent="-342900">
+              <a:buAutoNum type="arabicPeriod"/>
+            </a:pPr>
+            <a:r>
+              <a:rPr lang="en-US" sz="3300" dirty="0"/>
+              <a:t>Under reasonable scattering:</a:t>
+            </a:r>
+          </a:p>
+          <a:p>
+            <a:pPr marL="800100" lvl="1" indent="-342900">
+              <a:buAutoNum type="arabicPeriod"/>
+            </a:pPr>
+            <a:r>
+              <a:rPr lang="en-US" sz="3300" dirty="0"/>
+              <a:t>Increasing photon number must reduce std of solutions</a:t>
+            </a:r>
+          </a:p>
+          <a:p>
+            <a:pPr marL="800100" lvl="1" indent="-342900">
+              <a:buAutoNum type="arabicPeriod"/>
+            </a:pPr>
+            <a:r>
+              <a:rPr lang="en-US" sz="3300" dirty="0"/>
+              <a:t>HG and FF must </a:t>
+            </a:r>
+            <a:r>
+              <a:rPr lang="en-US" sz="3300" dirty="0" err="1"/>
+              <a:t>divarge</a:t>
+            </a:r>
+            <a:endParaRPr lang="en-US" sz="3300" dirty="0"/>
+          </a:p>
+          <a:p>
+            <a:pPr marL="342900" indent="-342900">
+              <a:buAutoNum type="arabicPeriod"/>
+            </a:pPr>
+            <a:r>
+              <a:rPr lang="en-US" sz="3300" dirty="0"/>
+              <a:t> Under very large scattering:</a:t>
+            </a:r>
+          </a:p>
+          <a:p>
+            <a:pPr marL="800100" lvl="1" indent="-342900">
+              <a:buAutoNum type="arabicPeriod"/>
+            </a:pPr>
+            <a:r>
+              <a:rPr lang="en-US" sz="3300" dirty="0"/>
+              <a:t>Source must look isotropic at a distance with no forward bias</a:t>
+            </a:r>
+          </a:p>
+          <a:p>
+            <a:pPr marL="800100" lvl="1" indent="-342900">
+              <a:buAutoNum type="arabicPeriod"/>
+            </a:pPr>
+            <a:r>
+              <a:rPr lang="en-US" sz="3300" dirty="0"/>
+              <a:t>HG and FF must converge</a:t>
+            </a:r>
+          </a:p>
+          <a:p>
+            <a:pPr marL="342900" indent="-342900">
+              <a:buAutoNum type="arabicPeriod"/>
+            </a:pPr>
+            <a:endParaRPr lang="en-US" dirty="0"/>
+          </a:p>
+        </p:txBody>
+      </p:sp>
     </p:spTree>
     <p:extLst>
       <p:ext uri="{BB962C8B-B14F-4D97-AF65-F5344CB8AC3E}">
-        <p14:creationId xmlns:p14="http://schemas.microsoft.com/office/powerpoint/2010/main" val="1017295827"/>
+        <p14:creationId xmlns:p14="http://schemas.microsoft.com/office/powerpoint/2010/main" val="2081107019"/>
       </p:ext>
     </p:extLst>
   </p:cSld>
@@ -6597,347 +6888,6 @@
           <p:cNvPr id="2" name="Title 1">
             <a:extLst>
               <a:ext uri="{FF2B5EF4-FFF2-40B4-BE49-F238E27FC236}">
-                <a16:creationId xmlns:a16="http://schemas.microsoft.com/office/drawing/2014/main" id="{4840326F-948C-8CD6-61AF-24B753B4D2CB}"/>
-              </a:ext>
-            </a:extLst>
-          </p:cNvPr>
-          <p:cNvSpPr>
-            <a:spLocks noGrp="1"/>
-          </p:cNvSpPr>
-          <p:nvPr>
-            <p:ph type="title"/>
-          </p:nvPr>
-        </p:nvSpPr>
-        <p:spPr/>
-        <p:txBody>
-          <a:bodyPr/>
-          <a:lstStyle/>
-          <a:p>
-            <a:r>
-              <a:rPr lang="en-US" dirty="0"/>
-              <a:t>Other Parameters</a:t>
-            </a:r>
-          </a:p>
-        </p:txBody>
-      </p:sp>
-      <p:sp>
-        <p:nvSpPr>
-          <p:cNvPr id="3" name="Content Placeholder 2">
-            <a:extLst>
-              <a:ext uri="{FF2B5EF4-FFF2-40B4-BE49-F238E27FC236}">
-                <a16:creationId xmlns:a16="http://schemas.microsoft.com/office/drawing/2014/main" id="{D8FB0220-23E7-8FF9-3EFB-50936F2D4F6A}"/>
-              </a:ext>
-            </a:extLst>
-          </p:cNvPr>
-          <p:cNvSpPr>
-            <a:spLocks noGrp="1"/>
-          </p:cNvSpPr>
-          <p:nvPr>
-            <p:ph idx="1"/>
-          </p:nvPr>
-        </p:nvSpPr>
-        <p:spPr>
-          <a:xfrm>
-            <a:off x="1103311" y="2052918"/>
-            <a:ext cx="9630950" cy="4195481"/>
-          </a:xfrm>
-        </p:spPr>
-        <p:txBody>
-          <a:bodyPr/>
-          <a:lstStyle/>
-          <a:p>
-            <a:r>
-              <a:rPr lang="en-US" dirty="0"/>
-              <a:t>Domain: 500mm by 500mm by 500mm ( Can be reduced to 100mm for some tests)</a:t>
-            </a:r>
-          </a:p>
-          <a:p>
-            <a:r>
-              <a:rPr lang="en-US" dirty="0"/>
-              <a:t>Back Scatter Fraction 0.024 (May be tuned in via Petzold)(n=1.1,u=3.4)</a:t>
-            </a:r>
-          </a:p>
-          <a:p>
-            <a:r>
-              <a:rPr lang="en-US" dirty="0"/>
-              <a:t>Mua:0.003</a:t>
-            </a:r>
-          </a:p>
-          <a:p>
-            <a:r>
-              <a:rPr lang="en-US" dirty="0"/>
-              <a:t>Mus: 0.015 to 0.05</a:t>
-            </a:r>
-          </a:p>
-          <a:p>
-            <a:endParaRPr lang="en-US" dirty="0"/>
-          </a:p>
-          <a:p>
-            <a:endParaRPr lang="en-US" dirty="0"/>
-          </a:p>
-        </p:txBody>
-      </p:sp>
-    </p:spTree>
-    <p:extLst>
-      <p:ext uri="{BB962C8B-B14F-4D97-AF65-F5344CB8AC3E}">
-        <p14:creationId xmlns:p14="http://schemas.microsoft.com/office/powerpoint/2010/main" val="944707997"/>
-      </p:ext>
-    </p:extLst>
-  </p:cSld>
-  <p:clrMapOvr>
-    <a:masterClrMapping/>
-  </p:clrMapOvr>
-</p:sld>
-</file>
-
-<file path=ppt/slides/slide15.xml><?xml version="1.0" encoding="utf-8"?>
-<p:sld xmlns:a="http://schemas.openxmlformats.org/drawingml/2006/main" xmlns:r="http://schemas.openxmlformats.org/officeDocument/2006/relationships" xmlns:p="http://schemas.openxmlformats.org/presentationml/2006/main">
-  <p:cSld>
-    <p:spTree>
-      <p:nvGrpSpPr>
-        <p:cNvPr id="1" name=""/>
-        <p:cNvGrpSpPr/>
-        <p:nvPr/>
-      </p:nvGrpSpPr>
-      <p:grpSpPr>
-        <a:xfrm>
-          <a:off x="0" y="0"/>
-          <a:ext cx="0" cy="0"/>
-          <a:chOff x="0" y="0"/>
-          <a:chExt cx="0" cy="0"/>
-        </a:xfrm>
-      </p:grpSpPr>
-      <p:sp>
-        <p:nvSpPr>
-          <p:cNvPr id="2" name="Title 1">
-            <a:extLst>
-              <a:ext uri="{FF2B5EF4-FFF2-40B4-BE49-F238E27FC236}">
-                <a16:creationId xmlns:a16="http://schemas.microsoft.com/office/drawing/2014/main" id="{68CDE3B1-A1D1-CD63-EFDA-1AE7F26FA84E}"/>
-              </a:ext>
-            </a:extLst>
-          </p:cNvPr>
-          <p:cNvSpPr>
-            <a:spLocks noGrp="1"/>
-          </p:cNvSpPr>
-          <p:nvPr>
-            <p:ph type="title"/>
-          </p:nvPr>
-        </p:nvSpPr>
-        <p:spPr/>
-        <p:txBody>
-          <a:bodyPr/>
-          <a:lstStyle/>
-          <a:p>
-            <a:r>
-              <a:rPr lang="en-US" dirty="0"/>
-              <a:t>Sanity Checks</a:t>
-            </a:r>
-          </a:p>
-        </p:txBody>
-      </p:sp>
-      <p:sp>
-        <p:nvSpPr>
-          <p:cNvPr id="3" name="Content Placeholder 2">
-            <a:extLst>
-              <a:ext uri="{FF2B5EF4-FFF2-40B4-BE49-F238E27FC236}">
-                <a16:creationId xmlns:a16="http://schemas.microsoft.com/office/drawing/2014/main" id="{A967A8ED-E292-CF61-9F53-B9DCD8CEFC7E}"/>
-              </a:ext>
-            </a:extLst>
-          </p:cNvPr>
-          <p:cNvSpPr>
-            <a:spLocks noGrp="1"/>
-          </p:cNvSpPr>
-          <p:nvPr>
-            <p:ph idx="1"/>
-          </p:nvPr>
-        </p:nvSpPr>
-        <p:spPr/>
-        <p:txBody>
-          <a:bodyPr/>
-          <a:lstStyle/>
-          <a:p>
-            <a:endParaRPr lang="en-US" dirty="0"/>
-          </a:p>
-        </p:txBody>
-      </p:sp>
-      <p:sp>
-        <p:nvSpPr>
-          <p:cNvPr id="4" name="Text Placeholder 3">
-            <a:extLst>
-              <a:ext uri="{FF2B5EF4-FFF2-40B4-BE49-F238E27FC236}">
-                <a16:creationId xmlns:a16="http://schemas.microsoft.com/office/drawing/2014/main" id="{1D46CF0A-A784-9712-C2C8-FC454923D163}"/>
-              </a:ext>
-            </a:extLst>
-          </p:cNvPr>
-          <p:cNvSpPr>
-            <a:spLocks noGrp="1"/>
-          </p:cNvSpPr>
-          <p:nvPr>
-            <p:ph type="body" sz="half" idx="2"/>
-          </p:nvPr>
-        </p:nvSpPr>
-        <p:spPr/>
-        <p:txBody>
-          <a:bodyPr>
-            <a:normAutofit fontScale="55000" lnSpcReduction="20000"/>
-          </a:bodyPr>
-          <a:lstStyle/>
-          <a:p>
-            <a:pPr marL="342900" indent="-342900">
-              <a:buAutoNum type="arabicPeriod"/>
-            </a:pPr>
-            <a:r>
-              <a:rPr lang="en-US" dirty="0"/>
-              <a:t>Under 0 scattering:</a:t>
-            </a:r>
-          </a:p>
-          <a:p>
-            <a:pPr marL="800100" lvl="1" indent="-342900">
-              <a:buAutoNum type="arabicPeriod"/>
-            </a:pPr>
-            <a:r>
-              <a:rPr lang="en-US" dirty="0"/>
-              <a:t>Peak at zero degrees</a:t>
-            </a:r>
-          </a:p>
-          <a:p>
-            <a:pPr marL="800100" lvl="1" indent="-342900">
-              <a:buAutoNum type="arabicPeriod"/>
-            </a:pPr>
-            <a:r>
-              <a:rPr lang="en-US" dirty="0"/>
-              <a:t>Absorption dependance must recover the beer lambert law</a:t>
-            </a:r>
-          </a:p>
-          <a:p>
-            <a:pPr marL="342900" indent="-342900">
-              <a:buAutoNum type="arabicPeriod"/>
-            </a:pPr>
-            <a:r>
-              <a:rPr lang="en-US" dirty="0"/>
-              <a:t>Under conditions where 1 scattering event per photon on average occurs:</a:t>
-            </a:r>
-          </a:p>
-          <a:p>
-            <a:pPr marL="800100" lvl="1" indent="-342900">
-              <a:buAutoNum type="arabicPeriod"/>
-            </a:pPr>
-            <a:r>
-              <a:rPr lang="en-US" dirty="0"/>
-              <a:t>We must recover the Fornier Forand distribution</a:t>
-            </a:r>
-          </a:p>
-          <a:p>
-            <a:pPr marL="800100" lvl="1" indent="-342900">
-              <a:buAutoNum type="arabicPeriod"/>
-            </a:pPr>
-            <a:r>
-              <a:rPr lang="en-US" dirty="0"/>
-              <a:t>HG and FF must be close</a:t>
-            </a:r>
-          </a:p>
-          <a:p>
-            <a:pPr marL="342900" indent="-342900">
-              <a:buAutoNum type="arabicPeriod"/>
-            </a:pPr>
-            <a:r>
-              <a:rPr lang="en-US" dirty="0"/>
-              <a:t>Under reasonable scattering:</a:t>
-            </a:r>
-          </a:p>
-          <a:p>
-            <a:pPr marL="800100" lvl="1" indent="-342900">
-              <a:buAutoNum type="arabicPeriod"/>
-            </a:pPr>
-            <a:r>
-              <a:rPr lang="en-US" dirty="0"/>
-              <a:t>Increasing photon number must reduce std of solutions</a:t>
-            </a:r>
-          </a:p>
-          <a:p>
-            <a:pPr marL="800100" lvl="1" indent="-342900">
-              <a:buAutoNum type="arabicPeriod"/>
-            </a:pPr>
-            <a:r>
-              <a:rPr lang="en-US" dirty="0"/>
-              <a:t>HG and FF must </a:t>
-            </a:r>
-            <a:r>
-              <a:rPr lang="en-US" dirty="0" err="1"/>
-              <a:t>divarge</a:t>
-            </a:r>
-            <a:endParaRPr lang="en-US" dirty="0"/>
-          </a:p>
-          <a:p>
-            <a:pPr marL="342900" indent="-342900">
-              <a:buAutoNum type="arabicPeriod"/>
-            </a:pPr>
-            <a:r>
-              <a:rPr lang="en-US" dirty="0"/>
-              <a:t> Under very large scattering:</a:t>
-            </a:r>
-          </a:p>
-          <a:p>
-            <a:pPr marL="800100" lvl="1" indent="-342900">
-              <a:buAutoNum type="arabicPeriod"/>
-            </a:pPr>
-            <a:r>
-              <a:rPr lang="en-US" dirty="0"/>
-              <a:t>Source must look isotropic at a distance with no forward bias</a:t>
-            </a:r>
-          </a:p>
-          <a:p>
-            <a:pPr marL="800100" lvl="1" indent="-342900">
-              <a:buAutoNum type="arabicPeriod"/>
-            </a:pPr>
-            <a:r>
-              <a:rPr lang="en-US" dirty="0"/>
-              <a:t>HG and FF must converge</a:t>
-            </a:r>
-          </a:p>
-          <a:p>
-            <a:pPr marL="342900" indent="-342900">
-              <a:buAutoNum type="arabicPeriod"/>
-            </a:pPr>
-            <a:endParaRPr lang="en-US" dirty="0"/>
-          </a:p>
-        </p:txBody>
-      </p:sp>
-    </p:spTree>
-    <p:extLst>
-      <p:ext uri="{BB962C8B-B14F-4D97-AF65-F5344CB8AC3E}">
-        <p14:creationId xmlns:p14="http://schemas.microsoft.com/office/powerpoint/2010/main" val="2081107019"/>
-      </p:ext>
-    </p:extLst>
-  </p:cSld>
-  <p:clrMapOvr>
-    <a:masterClrMapping/>
-  </p:clrMapOvr>
-</p:sld>
-</file>
-
-<file path=ppt/slides/slide16.xml><?xml version="1.0" encoding="utf-8"?>
-<p:sld xmlns:a="http://schemas.openxmlformats.org/drawingml/2006/main" xmlns:r="http://schemas.openxmlformats.org/officeDocument/2006/relationships" xmlns:p="http://schemas.openxmlformats.org/presentationml/2006/main">
-  <p:cSld>
-    <p:spTree>
-      <p:nvGrpSpPr>
-        <p:cNvPr id="1" name=""/>
-        <p:cNvGrpSpPr/>
-        <p:nvPr/>
-      </p:nvGrpSpPr>
-      <p:grpSpPr>
-        <a:xfrm>
-          <a:off x="0" y="0"/>
-          <a:ext cx="0" cy="0"/>
-          <a:chOff x="0" y="0"/>
-          <a:chExt cx="0" cy="0"/>
-        </a:xfrm>
-      </p:grpSpPr>
-      <p:sp>
-        <p:nvSpPr>
-          <p:cNvPr id="2" name="Title 1">
-            <a:extLst>
-              <a:ext uri="{FF2B5EF4-FFF2-40B4-BE49-F238E27FC236}">
                 <a16:creationId xmlns:a16="http://schemas.microsoft.com/office/drawing/2014/main" id="{1A1577E8-C58B-D8E1-A3AD-F4FA7A6F76D2}"/>
               </a:ext>
             </a:extLst>
@@ -7106,7 +7056,7 @@
 </p:sld>
 </file>
 
-<file path=ppt/slides/slide17.xml><?xml version="1.0" encoding="utf-8"?>
+<file path=ppt/slides/slide15.xml><?xml version="1.0" encoding="utf-8"?>
 <p:sld xmlns:a="http://schemas.openxmlformats.org/drawingml/2006/main" xmlns:r="http://schemas.openxmlformats.org/officeDocument/2006/relationships" xmlns:p="http://schemas.openxmlformats.org/presentationml/2006/main">
   <p:cSld>
     <p:spTree>
@@ -7647,197 +7597,6 @@
 </p:sld>
 </file>
 
-<file path=ppt/slides/slide18.xml><?xml version="1.0" encoding="utf-8"?>
-<p:sld xmlns:a="http://schemas.openxmlformats.org/drawingml/2006/main" xmlns:r="http://schemas.openxmlformats.org/officeDocument/2006/relationships" xmlns:p="http://schemas.openxmlformats.org/presentationml/2006/main">
-  <p:cSld>
-    <p:spTree>
-      <p:nvGrpSpPr>
-        <p:cNvPr id="1" name=""/>
-        <p:cNvGrpSpPr/>
-        <p:nvPr/>
-      </p:nvGrpSpPr>
-      <p:grpSpPr>
-        <a:xfrm>
-          <a:off x="0" y="0"/>
-          <a:ext cx="0" cy="0"/>
-          <a:chOff x="0" y="0"/>
-          <a:chExt cx="0" cy="0"/>
-        </a:xfrm>
-      </p:grpSpPr>
-      <p:sp>
-        <p:nvSpPr>
-          <p:cNvPr id="2" name="Title 1">
-            <a:extLst>
-              <a:ext uri="{FF2B5EF4-FFF2-40B4-BE49-F238E27FC236}">
-                <a16:creationId xmlns:a16="http://schemas.microsoft.com/office/drawing/2014/main" id="{E2A8B833-A627-EF0D-80E8-9139A89545EF}"/>
-              </a:ext>
-            </a:extLst>
-          </p:cNvPr>
-          <p:cNvSpPr>
-            <a:spLocks noGrp="1"/>
-          </p:cNvSpPr>
-          <p:nvPr>
-            <p:ph type="title"/>
-          </p:nvPr>
-        </p:nvSpPr>
-        <p:spPr/>
-        <p:txBody>
-          <a:bodyPr/>
-          <a:lstStyle/>
-          <a:p>
-            <a:r>
-              <a:rPr lang="en-US" dirty="0"/>
-              <a:t>Validation</a:t>
-            </a:r>
-          </a:p>
-        </p:txBody>
-      </p:sp>
-      <p:sp>
-        <p:nvSpPr>
-          <p:cNvPr id="3" name="Picture Placeholder 2">
-            <a:extLst>
-              <a:ext uri="{FF2B5EF4-FFF2-40B4-BE49-F238E27FC236}">
-                <a16:creationId xmlns:a16="http://schemas.microsoft.com/office/drawing/2014/main" id="{02029C07-C905-3A77-FA6C-DA96735E126E}"/>
-              </a:ext>
-            </a:extLst>
-          </p:cNvPr>
-          <p:cNvSpPr>
-            <a:spLocks noGrp="1"/>
-          </p:cNvSpPr>
-          <p:nvPr>
-            <p:ph type="pic" idx="1"/>
-          </p:nvPr>
-        </p:nvSpPr>
-        <p:spPr/>
-        <p:txBody>
-          <a:bodyPr/>
-          <a:lstStyle/>
-          <a:p>
-            <a:endParaRPr lang="en-US"/>
-          </a:p>
-        </p:txBody>
-      </p:sp>
-      <p:sp>
-        <p:nvSpPr>
-          <p:cNvPr id="4" name="Text Placeholder 3">
-            <a:extLst>
-              <a:ext uri="{FF2B5EF4-FFF2-40B4-BE49-F238E27FC236}">
-                <a16:creationId xmlns:a16="http://schemas.microsoft.com/office/drawing/2014/main" id="{039F6216-FE26-A01B-8564-DFA27F4EA6F6}"/>
-              </a:ext>
-            </a:extLst>
-          </p:cNvPr>
-          <p:cNvSpPr>
-            <a:spLocks noGrp="1"/>
-          </p:cNvSpPr>
-          <p:nvPr>
-            <p:ph type="body" sz="half" idx="2"/>
-          </p:nvPr>
-        </p:nvSpPr>
-        <p:spPr/>
-        <p:txBody>
-          <a:bodyPr/>
-          <a:lstStyle/>
-          <a:p>
-            <a:r>
-              <a:rPr lang="en-US" dirty="0"/>
-              <a:t>For proper verification, I will use an analytic solver</a:t>
-            </a:r>
-          </a:p>
-        </p:txBody>
-      </p:sp>
-    </p:spTree>
-    <p:extLst>
-      <p:ext uri="{BB962C8B-B14F-4D97-AF65-F5344CB8AC3E}">
-        <p14:creationId xmlns:p14="http://schemas.microsoft.com/office/powerpoint/2010/main" val="2347936626"/>
-      </p:ext>
-    </p:extLst>
-  </p:cSld>
-  <p:clrMapOvr>
-    <a:masterClrMapping/>
-  </p:clrMapOvr>
-</p:sld>
-</file>
-
-<file path=ppt/slides/slide19.xml><?xml version="1.0" encoding="utf-8"?>
-<p:sld xmlns:a="http://schemas.openxmlformats.org/drawingml/2006/main" xmlns:r="http://schemas.openxmlformats.org/officeDocument/2006/relationships" xmlns:p="http://schemas.openxmlformats.org/presentationml/2006/main">
-  <p:cSld>
-    <p:spTree>
-      <p:nvGrpSpPr>
-        <p:cNvPr id="1" name=""/>
-        <p:cNvGrpSpPr/>
-        <p:nvPr/>
-      </p:nvGrpSpPr>
-      <p:grpSpPr>
-        <a:xfrm>
-          <a:off x="0" y="0"/>
-          <a:ext cx="0" cy="0"/>
-          <a:chOff x="0" y="0"/>
-          <a:chExt cx="0" cy="0"/>
-        </a:xfrm>
-      </p:grpSpPr>
-      <p:sp>
-        <p:nvSpPr>
-          <p:cNvPr id="2" name="Title 1">
-            <a:extLst>
-              <a:ext uri="{FF2B5EF4-FFF2-40B4-BE49-F238E27FC236}">
-                <a16:creationId xmlns:a16="http://schemas.microsoft.com/office/drawing/2014/main" id="{82892E64-2938-2E72-3704-0B2F214CA44C}"/>
-              </a:ext>
-            </a:extLst>
-          </p:cNvPr>
-          <p:cNvSpPr>
-            <a:spLocks noGrp="1"/>
-          </p:cNvSpPr>
-          <p:nvPr>
-            <p:ph type="title"/>
-          </p:nvPr>
-        </p:nvSpPr>
-        <p:spPr/>
-        <p:txBody>
-          <a:bodyPr/>
-          <a:lstStyle/>
-          <a:p>
-            <a:endParaRPr lang="en-US" dirty="0"/>
-          </a:p>
-        </p:txBody>
-      </p:sp>
-      <p:sp>
-        <p:nvSpPr>
-          <p:cNvPr id="3" name="Content Placeholder 2">
-            <a:extLst>
-              <a:ext uri="{FF2B5EF4-FFF2-40B4-BE49-F238E27FC236}">
-                <a16:creationId xmlns:a16="http://schemas.microsoft.com/office/drawing/2014/main" id="{807E48B6-D143-64CD-E99F-B83C8C90B860}"/>
-              </a:ext>
-            </a:extLst>
-          </p:cNvPr>
-          <p:cNvSpPr>
-            <a:spLocks noGrp="1"/>
-          </p:cNvSpPr>
-          <p:nvPr>
-            <p:ph idx="1"/>
-          </p:nvPr>
-        </p:nvSpPr>
-        <p:spPr/>
-        <p:txBody>
-          <a:bodyPr/>
-          <a:lstStyle/>
-          <a:p>
-            <a:endParaRPr lang="en-US"/>
-          </a:p>
-        </p:txBody>
-      </p:sp>
-    </p:spTree>
-    <p:extLst>
-      <p:ext uri="{BB962C8B-B14F-4D97-AF65-F5344CB8AC3E}">
-        <p14:creationId xmlns:p14="http://schemas.microsoft.com/office/powerpoint/2010/main" val="1310250"/>
-      </p:ext>
-    </p:extLst>
-  </p:cSld>
-  <p:clrMapOvr>
-    <a:masterClrMapping/>
-  </p:clrMapOvr>
-</p:sld>
-</file>
-
 <file path=ppt/slides/slide2.xml><?xml version="1.0" encoding="utf-8"?>
 <p:sld xmlns:a="http://schemas.openxmlformats.org/drawingml/2006/main" xmlns:r="http://schemas.openxmlformats.org/officeDocument/2006/relationships" xmlns:p="http://schemas.openxmlformats.org/presentationml/2006/main">
   <p:cSld>
@@ -8596,118 +8355,53 @@
           </a:p>
         </p:txBody>
       </p:sp>
+      <p:sp>
+        <p:nvSpPr>
+          <p:cNvPr id="42" name="TextBox 41">
+            <a:extLst>
+              <a:ext uri="{FF2B5EF4-FFF2-40B4-BE49-F238E27FC236}">
+                <a16:creationId xmlns:a16="http://schemas.microsoft.com/office/drawing/2014/main" id="{8F044F69-07BD-2751-24FF-8652B93A6368}"/>
+              </a:ext>
+            </a:extLst>
+          </p:cNvPr>
+          <p:cNvSpPr txBox="1"/>
+          <p:nvPr/>
+        </p:nvSpPr>
+        <p:spPr>
+          <a:xfrm>
+            <a:off x="1066800" y="1320800"/>
+            <a:ext cx="8912144" cy="646331"/>
+          </a:xfrm>
+          <a:prstGeom prst="rect">
+            <a:avLst/>
+          </a:prstGeom>
+          <a:noFill/>
+        </p:spPr>
+        <p:txBody>
+          <a:bodyPr wrap="square" rtlCol="0">
+            <a:spAutoFit/>
+          </a:bodyPr>
+          <a:lstStyle/>
+          <a:p>
+            <a:r>
+              <a:rPr lang="en-US" dirty="0"/>
+              <a:t>The setup(1) consists of a source in the middle of out domain. The domain boundary is </a:t>
+            </a:r>
+            <a:r>
+              <a:rPr lang="en-US" dirty="0" err="1"/>
+              <a:t>absorbant</a:t>
+            </a:r>
+            <a:r>
+              <a:rPr lang="en-US" dirty="0"/>
+              <a:t>, and the source is a pencil source. </a:t>
+            </a:r>
+          </a:p>
+        </p:txBody>
+      </p:sp>
     </p:spTree>
     <p:extLst>
       <p:ext uri="{BB962C8B-B14F-4D97-AF65-F5344CB8AC3E}">
         <p14:creationId xmlns:p14="http://schemas.microsoft.com/office/powerpoint/2010/main" val="2867557785"/>
-      </p:ext>
-    </p:extLst>
-  </p:cSld>
-  <p:clrMapOvr>
-    <a:masterClrMapping/>
-  </p:clrMapOvr>
-</p:sld>
-</file>
-
-<file path=ppt/slides/slide20.xml><?xml version="1.0" encoding="utf-8"?>
-<p:sld xmlns:a="http://schemas.openxmlformats.org/drawingml/2006/main" xmlns:r="http://schemas.openxmlformats.org/officeDocument/2006/relationships" xmlns:p="http://schemas.openxmlformats.org/presentationml/2006/main">
-  <p:cSld>
-    <p:spTree>
-      <p:nvGrpSpPr>
-        <p:cNvPr id="1" name=""/>
-        <p:cNvGrpSpPr/>
-        <p:nvPr/>
-      </p:nvGrpSpPr>
-      <p:grpSpPr>
-        <a:xfrm>
-          <a:off x="0" y="0"/>
-          <a:ext cx="0" cy="0"/>
-          <a:chOff x="0" y="0"/>
-          <a:chExt cx="0" cy="0"/>
-        </a:xfrm>
-      </p:grpSpPr>
-      <p:sp>
-        <p:nvSpPr>
-          <p:cNvPr id="2" name="Title 1">
-            <a:extLst>
-              <a:ext uri="{FF2B5EF4-FFF2-40B4-BE49-F238E27FC236}">
-                <a16:creationId xmlns:a16="http://schemas.microsoft.com/office/drawing/2014/main" id="{4DA35A90-343A-331E-F423-28D767CCB9E2}"/>
-              </a:ext>
-            </a:extLst>
-          </p:cNvPr>
-          <p:cNvSpPr>
-            <a:spLocks noGrp="1"/>
-          </p:cNvSpPr>
-          <p:nvPr>
-            <p:ph type="title"/>
-          </p:nvPr>
-        </p:nvSpPr>
-        <p:spPr/>
-        <p:txBody>
-          <a:bodyPr/>
-          <a:lstStyle/>
-          <a:p>
-            <a:r>
-              <a:rPr lang="en-US" dirty="0"/>
-              <a:t>Structure</a:t>
-            </a:r>
-          </a:p>
-        </p:txBody>
-      </p:sp>
-      <p:sp>
-        <p:nvSpPr>
-          <p:cNvPr id="3" name="Content Placeholder 2">
-            <a:extLst>
-              <a:ext uri="{FF2B5EF4-FFF2-40B4-BE49-F238E27FC236}">
-                <a16:creationId xmlns:a16="http://schemas.microsoft.com/office/drawing/2014/main" id="{F02F2B44-79DC-9756-4DB0-9D4EFB36E436}"/>
-              </a:ext>
-            </a:extLst>
-          </p:cNvPr>
-          <p:cNvSpPr>
-            <a:spLocks noGrp="1"/>
-          </p:cNvSpPr>
-          <p:nvPr>
-            <p:ph idx="1"/>
-          </p:nvPr>
-        </p:nvSpPr>
-        <p:spPr/>
-        <p:txBody>
-          <a:bodyPr/>
-          <a:lstStyle/>
-          <a:p>
-            <a:endParaRPr lang="en-US"/>
-          </a:p>
-        </p:txBody>
-      </p:sp>
-      <p:sp>
-        <p:nvSpPr>
-          <p:cNvPr id="4" name="Text Placeholder 3">
-            <a:extLst>
-              <a:ext uri="{FF2B5EF4-FFF2-40B4-BE49-F238E27FC236}">
-                <a16:creationId xmlns:a16="http://schemas.microsoft.com/office/drawing/2014/main" id="{BAA88F27-8EE8-783C-5CB9-DD3F9E6A24A7}"/>
-              </a:ext>
-            </a:extLst>
-          </p:cNvPr>
-          <p:cNvSpPr>
-            <a:spLocks noGrp="1"/>
-          </p:cNvSpPr>
-          <p:nvPr>
-            <p:ph type="body" sz="half" idx="2"/>
-          </p:nvPr>
-        </p:nvSpPr>
-        <p:spPr/>
-        <p:txBody>
-          <a:bodyPr/>
-          <a:lstStyle/>
-          <a:p>
-            <a:endParaRPr lang="en-US" dirty="0"/>
-          </a:p>
-        </p:txBody>
-      </p:sp>
-    </p:spTree>
-    <p:extLst>
-      <p:ext uri="{BB962C8B-B14F-4D97-AF65-F5344CB8AC3E}">
-        <p14:creationId xmlns:p14="http://schemas.microsoft.com/office/powerpoint/2010/main" val="829106148"/>
       </p:ext>
     </p:extLst>
   </p:cSld>
@@ -9812,7 +9506,7 @@
         </p:blipFill>
         <p:spPr>
           <a:xfrm>
-            <a:off x="214156" y="265467"/>
+            <a:off x="214156" y="1353608"/>
             <a:ext cx="9446193" cy="615176"/>
           </a:xfrm>
           <a:prstGeom prst="rect">
@@ -9980,7 +9674,7 @@
           <p:cNvPr id="2" name="Title 1">
             <a:extLst>
               <a:ext uri="{FF2B5EF4-FFF2-40B4-BE49-F238E27FC236}">
-                <a16:creationId xmlns:a16="http://schemas.microsoft.com/office/drawing/2014/main" id="{8CBD9C3D-8F83-B489-ED20-32DC9A49B52E}"/>
+                <a16:creationId xmlns:a16="http://schemas.microsoft.com/office/drawing/2014/main" id="{394BB6C8-2B20-F7A7-DA70-2F191D990ECC}"/>
               </a:ext>
             </a:extLst>
           </p:cNvPr>
@@ -9998,17 +9692,17 @@
           <a:p>
             <a:r>
               <a:rPr lang="en-US" dirty="0"/>
-              <a:t>Deciding the Parameters for Fornier Forand</a:t>
+              <a:t>Monte Carlo Simulation Result</a:t>
             </a:r>
           </a:p>
         </p:txBody>
       </p:sp>
       <p:pic>
         <p:nvPicPr>
-          <p:cNvPr id="7" name="Content Placeholder 6">
+          <p:cNvPr id="5" name="Content Placeholder 4">
             <a:extLst>
               <a:ext uri="{FF2B5EF4-FFF2-40B4-BE49-F238E27FC236}">
-                <a16:creationId xmlns:a16="http://schemas.microsoft.com/office/drawing/2014/main" id="{EB621F94-919A-F061-AEFA-DCA454A0C88B}"/>
+                <a16:creationId xmlns:a16="http://schemas.microsoft.com/office/drawing/2014/main" id="{C7086805-400A-E772-78E2-27D8B555203A}"/>
               </a:ext>
             </a:extLst>
           </p:cNvPr>
@@ -10020,15 +9714,21 @@
           </p:nvPr>
         </p:nvPicPr>
         <p:blipFill>
-          <a:blip r:embed="rId2"/>
+          <a:blip r:embed="rId2">
+            <a:extLst>
+              <a:ext uri="{28A0092B-C50C-407E-A947-70E740481C1C}">
+                <a14:useLocalDpi xmlns:a14="http://schemas.microsoft.com/office/drawing/2010/main" val="0"/>
+              </a:ext>
+            </a:extLst>
+          </a:blip>
           <a:stretch>
             <a:fillRect/>
           </a:stretch>
         </p:blipFill>
         <p:spPr>
           <a:xfrm>
-            <a:off x="4960398" y="2517503"/>
-            <a:ext cx="6138895" cy="3011966"/>
+            <a:off x="2547800" y="1413405"/>
+            <a:ext cx="6655835" cy="4991877"/>
           </a:xfrm>
           <a:prstGeom prst="rect">
             <a:avLst/>
@@ -10037,62 +9737,146 @@
       </p:pic>
       <p:sp>
         <p:nvSpPr>
-          <p:cNvPr id="5" name="Text Placeholder 4">
+          <p:cNvPr id="6" name="Oval 5">
             <a:extLst>
               <a:ext uri="{FF2B5EF4-FFF2-40B4-BE49-F238E27FC236}">
-                <a16:creationId xmlns:a16="http://schemas.microsoft.com/office/drawing/2014/main" id="{17EF4266-C469-7D12-1BBE-C95523C3392C}"/>
+                <a16:creationId xmlns:a16="http://schemas.microsoft.com/office/drawing/2014/main" id="{4389F85F-5017-D968-1F54-7D29472F73B0}"/>
               </a:ext>
             </a:extLst>
           </p:cNvPr>
-          <p:cNvSpPr>
-            <a:spLocks noGrp="1"/>
-          </p:cNvSpPr>
-          <p:nvPr>
-            <p:ph type="body" sz="half" idx="2"/>
-          </p:nvPr>
-        </p:nvSpPr>
-        <p:spPr/>
-        <p:txBody>
-          <a:bodyPr/>
-          <a:lstStyle/>
-          <a:p>
-            <a:pPr marL="342900" indent="-342900">
-              <a:buAutoNum type="arabicPeriod"/>
-            </a:pPr>
-            <a:r>
-              <a:rPr lang="en-US" dirty="0"/>
-              <a:t>0.015–0.025  from Characterization of Particle Backscattering of Global </a:t>
-            </a:r>
-            <a:r>
-              <a:rPr lang="en-US" dirty="0" err="1"/>
-              <a:t>HighlyTurbid</a:t>
-            </a:r>
-            <a:r>
-              <a:rPr lang="en-US" dirty="0"/>
-              <a:t> Waters From VIIRS Ocean Color Observations</a:t>
-            </a:r>
-          </a:p>
-          <a:p>
-            <a:pPr marL="342900" indent="-342900">
-              <a:buAutoNum type="arabicPeriod"/>
-            </a:pPr>
-            <a:r>
-              <a:rPr lang="en-US" dirty="0"/>
-              <a:t>Picture to the left from Comparison of reflectance with backscatter and absorption parameters for turbid waters</a:t>
-            </a:r>
+          <p:cNvSpPr/>
+          <p:nvPr/>
+        </p:nvSpPr>
+        <p:spPr>
+          <a:xfrm>
+            <a:off x="4426857" y="2106309"/>
+            <a:ext cx="3338286" cy="3338286"/>
+          </a:xfrm>
+          <a:prstGeom prst="ellipse">
+            <a:avLst/>
+          </a:prstGeom>
+          <a:noFill/>
+          <a:ln w="12700" cap="flat" cmpd="sng" algn="ctr">
+            <a:solidFill>
+              <a:schemeClr val="accent1"/>
+            </a:solidFill>
+            <a:prstDash val="solid"/>
+            <a:round/>
+            <a:headEnd type="none" w="med" len="med"/>
+            <a:tailEnd type="none" w="med" len="med"/>
+          </a:ln>
+        </p:spPr>
+        <p:style>
+          <a:lnRef idx="0">
+            <a:scrgbClr r="0" g="0" b="0"/>
+          </a:lnRef>
+          <a:fillRef idx="0">
+            <a:scrgbClr r="0" g="0" b="0"/>
+          </a:fillRef>
+          <a:effectRef idx="0">
+            <a:scrgbClr r="0" g="0" b="0"/>
+          </a:effectRef>
+          <a:fontRef idx="minor">
+            <a:schemeClr val="accent1"/>
+          </a:fontRef>
+        </p:style>
+        <p:txBody>
+          <a:bodyPr rtlCol="0" anchor="ctr"/>
+          <a:lstStyle/>
+          <a:p>
+            <a:pPr algn="ctr"/>
+            <a:endParaRPr lang="en-US"/>
           </a:p>
         </p:txBody>
       </p:sp>
     </p:spTree>
     <p:extLst>
       <p:ext uri="{BB962C8B-B14F-4D97-AF65-F5344CB8AC3E}">
-        <p14:creationId xmlns:p14="http://schemas.microsoft.com/office/powerpoint/2010/main" val="3580156459"/>
+        <p14:creationId xmlns:p14="http://schemas.microsoft.com/office/powerpoint/2010/main" val="258165557"/>
       </p:ext>
     </p:extLst>
   </p:cSld>
   <p:clrMapOvr>
     <a:masterClrMapping/>
   </p:clrMapOvr>
+  <p:timing>
+    <p:tnLst>
+      <p:par>
+        <p:cTn id="1" dur="indefinite" restart="never" nodeType="tmRoot">
+          <p:childTnLst>
+            <p:seq concurrent="1" nextAc="seek">
+              <p:cTn id="2" dur="indefinite" nodeType="mainSeq">
+                <p:childTnLst>
+                  <p:par>
+                    <p:cTn id="3" fill="hold">
+                      <p:stCondLst>
+                        <p:cond delay="indefinite"/>
+                      </p:stCondLst>
+                      <p:childTnLst>
+                        <p:par>
+                          <p:cTn id="4" fill="hold">
+                            <p:stCondLst>
+                              <p:cond delay="0"/>
+                            </p:stCondLst>
+                            <p:childTnLst>
+                              <p:par>
+                                <p:cTn id="5" presetID="1" presetClass="entr" presetSubtype="0" fill="hold" grpId="0" nodeType="clickEffect">
+                                  <p:stCondLst>
+                                    <p:cond delay="0"/>
+                                  </p:stCondLst>
+                                  <p:childTnLst>
+                                    <p:set>
+                                      <p:cBhvr>
+                                        <p:cTn id="6" dur="1" fill="hold">
+                                          <p:stCondLst>
+                                            <p:cond delay="0"/>
+                                          </p:stCondLst>
+                                        </p:cTn>
+                                        <p:tgtEl>
+                                          <p:spTgt spid="6"/>
+                                        </p:tgtEl>
+                                        <p:attrNameLst>
+                                          <p:attrName>style.visibility</p:attrName>
+                                        </p:attrNameLst>
+                                      </p:cBhvr>
+                                      <p:to>
+                                        <p:strVal val="visible"/>
+                                      </p:to>
+                                    </p:set>
+                                  </p:childTnLst>
+                                </p:cTn>
+                              </p:par>
+                            </p:childTnLst>
+                          </p:cTn>
+                        </p:par>
+                      </p:childTnLst>
+                    </p:cTn>
+                  </p:par>
+                </p:childTnLst>
+              </p:cTn>
+              <p:prevCondLst>
+                <p:cond evt="onPrev" delay="0">
+                  <p:tgtEl>
+                    <p:sldTgt/>
+                  </p:tgtEl>
+                </p:cond>
+              </p:prevCondLst>
+              <p:nextCondLst>
+                <p:cond evt="onNext" delay="0">
+                  <p:tgtEl>
+                    <p:sldTgt/>
+                  </p:tgtEl>
+                </p:cond>
+              </p:nextCondLst>
+            </p:seq>
+          </p:childTnLst>
+        </p:cTn>
+      </p:par>
+    </p:tnLst>
+    <p:bldLst>
+      <p:bldP spid="6" grpId="0" animBg="1"/>
+    </p:bldLst>
+  </p:timing>
 </p:sld>
 </file>
 
@@ -10113,49 +9897,19 @@
           <a:chExt cx="0" cy="0"/>
         </a:xfrm>
       </p:grpSpPr>
-      <p:sp>
-        <p:nvSpPr>
-          <p:cNvPr id="2" name="Title 1">
-            <a:extLst>
-              <a:ext uri="{FF2B5EF4-FFF2-40B4-BE49-F238E27FC236}">
-                <a16:creationId xmlns:a16="http://schemas.microsoft.com/office/drawing/2014/main" id="{394BB6C8-2B20-F7A7-DA70-2F191D990ECC}"/>
-              </a:ext>
-            </a:extLst>
-          </p:cNvPr>
-          <p:cNvSpPr>
-            <a:spLocks noGrp="1"/>
-          </p:cNvSpPr>
-          <p:nvPr>
-            <p:ph type="title"/>
-          </p:nvPr>
-        </p:nvSpPr>
-        <p:spPr/>
-        <p:txBody>
-          <a:bodyPr/>
-          <a:lstStyle/>
-          <a:p>
-            <a:r>
-              <a:rPr lang="en-US" dirty="0"/>
-              <a:t>Monte Carlo Simulation Result</a:t>
-            </a:r>
-          </a:p>
-        </p:txBody>
-      </p:sp>
       <p:pic>
         <p:nvPicPr>
-          <p:cNvPr id="5" name="Content Placeholder 4">
+          <p:cNvPr id="3" name="Picture 2">
             <a:extLst>
               <a:ext uri="{FF2B5EF4-FFF2-40B4-BE49-F238E27FC236}">
-                <a16:creationId xmlns:a16="http://schemas.microsoft.com/office/drawing/2014/main" id="{C7086805-400A-E772-78E2-27D8B555203A}"/>
+                <a16:creationId xmlns:a16="http://schemas.microsoft.com/office/drawing/2014/main" id="{60E138A7-AEAD-B31A-FEC5-F6B9386AB1F9}"/>
               </a:ext>
             </a:extLst>
           </p:cNvPr>
           <p:cNvPicPr>
-            <a:picLocks noGrp="1" noChangeAspect="1"/>
+            <a:picLocks noChangeAspect="1"/>
           </p:cNvPicPr>
-          <p:nvPr>
-            <p:ph idx="1"/>
-          </p:nvPr>
+          <p:nvPr/>
         </p:nvPicPr>
         <p:blipFill>
           <a:blip r:embed="rId2">
@@ -10171,8 +9925,44 @@
         </p:blipFill>
         <p:spPr>
           <a:xfrm>
-            <a:off x="2547800" y="1413405"/>
-            <a:ext cx="6655835" cy="4991877"/>
+            <a:off x="6545943" y="2256971"/>
+            <a:ext cx="5302550" cy="3976912"/>
+          </a:xfrm>
+          <a:prstGeom prst="rect">
+            <a:avLst/>
+          </a:prstGeom>
+        </p:spPr>
+      </p:pic>
+      <p:pic>
+        <p:nvPicPr>
+          <p:cNvPr id="5" name="Picture 4">
+            <a:extLst>
+              <a:ext uri="{FF2B5EF4-FFF2-40B4-BE49-F238E27FC236}">
+                <a16:creationId xmlns:a16="http://schemas.microsoft.com/office/drawing/2014/main" id="{F7890A62-0952-860A-ECD3-D3095D3E361B}"/>
+              </a:ext>
+            </a:extLst>
+          </p:cNvPr>
+          <p:cNvPicPr>
+            <a:picLocks noChangeAspect="1"/>
+          </p:cNvPicPr>
+          <p:nvPr/>
+        </p:nvPicPr>
+        <p:blipFill>
+          <a:blip r:embed="rId3">
+            <a:extLst>
+              <a:ext uri="{28A0092B-C50C-407E-A947-70E740481C1C}">
+                <a14:useLocalDpi xmlns:a14="http://schemas.microsoft.com/office/drawing/2010/main" val="0"/>
+              </a:ext>
+            </a:extLst>
+          </a:blip>
+          <a:stretch>
+            <a:fillRect/>
+          </a:stretch>
+        </p:blipFill>
+        <p:spPr>
+          <a:xfrm>
+            <a:off x="343507" y="1995714"/>
+            <a:ext cx="5863768" cy="4397826"/>
           </a:xfrm>
           <a:prstGeom prst="rect">
             <a:avLst/>
@@ -10182,7 +9972,7 @@
     </p:spTree>
     <p:extLst>
       <p:ext uri="{BB962C8B-B14F-4D97-AF65-F5344CB8AC3E}">
-        <p14:creationId xmlns:p14="http://schemas.microsoft.com/office/powerpoint/2010/main" val="258165557"/>
+        <p14:creationId xmlns:p14="http://schemas.microsoft.com/office/powerpoint/2010/main" val="186930274"/>
       </p:ext>
     </p:extLst>
   </p:cSld>
@@ -10976,7 +10766,7 @@
           <a:p>
             <a:r>
               <a:rPr lang="en-US" dirty="0"/>
-              <a:t>Imagine the image below is the x-z slice where the source is. The idea is to measure the light exiting the top boundary. Represent the intensity at the boundary along the y direction in a bar graph. Hence we know the best position to place the detector. The same can be done at the front face.</a:t>
+              <a:t>Imagine the image below is the x-y slice where the source is. The idea is to measure the light exiting the top boundary. Represent the intensity at the boundary along the y direction in a bar graph. Hence we know the best position to place the detector. The same can be done at the front face.</a:t>
             </a:r>
           </a:p>
         </p:txBody>
@@ -11409,7 +11199,56 @@
         </p:nvSpPr>
         <p:spPr>
           <a:xfrm>
-            <a:off x="5302066" y="4053229"/>
+            <a:off x="5428233" y="3945389"/>
+            <a:ext cx="1799771" cy="508000"/>
+          </a:xfrm>
+          <a:prstGeom prst="ellipse">
+            <a:avLst/>
+          </a:prstGeom>
+        </p:spPr>
+        <p:style>
+          <a:lnRef idx="2">
+            <a:schemeClr val="accent1">
+              <a:shade val="15000"/>
+            </a:schemeClr>
+          </a:lnRef>
+          <a:fillRef idx="1">
+            <a:schemeClr val="accent1"/>
+          </a:fillRef>
+          <a:effectRef idx="0">
+            <a:schemeClr val="accent1"/>
+          </a:effectRef>
+          <a:fontRef idx="minor">
+            <a:schemeClr val="lt1"/>
+          </a:fontRef>
+        </p:style>
+        <p:txBody>
+          <a:bodyPr rtlCol="0" anchor="ctr"/>
+          <a:lstStyle/>
+          <a:p>
+            <a:pPr algn="ctr"/>
+            <a:r>
+              <a:rPr lang="en-US" dirty="0"/>
+              <a:t>Detector</a:t>
+            </a:r>
+          </a:p>
+        </p:txBody>
+      </p:sp>
+      <p:sp>
+        <p:nvSpPr>
+          <p:cNvPr id="26" name="Oval 25">
+            <a:extLst>
+              <a:ext uri="{FF2B5EF4-FFF2-40B4-BE49-F238E27FC236}">
+                <a16:creationId xmlns:a16="http://schemas.microsoft.com/office/drawing/2014/main" id="{727C8728-98BD-D133-1C9F-D16EDBD6043E}"/>
+              </a:ext>
+            </a:extLst>
+          </p:cNvPr>
+          <p:cNvSpPr/>
+          <p:nvPr/>
+        </p:nvSpPr>
+        <p:spPr>
+          <a:xfrm>
+            <a:off x="3515363" y="4070666"/>
             <a:ext cx="1799771" cy="508000"/>
           </a:xfrm>
           <a:prstGeom prst="ellipse">
@@ -11446,10 +11285,10 @@
       </p:sp>
       <p:sp>
         <p:nvSpPr>
-          <p:cNvPr id="26" name="Oval 25">
+          <p:cNvPr id="28" name="Oval 27">
             <a:extLst>
               <a:ext uri="{FF2B5EF4-FFF2-40B4-BE49-F238E27FC236}">
-                <a16:creationId xmlns:a16="http://schemas.microsoft.com/office/drawing/2014/main" id="{727C8728-98BD-D133-1C9F-D16EDBD6043E}"/>
+                <a16:creationId xmlns:a16="http://schemas.microsoft.com/office/drawing/2014/main" id="{E0124D9B-A28A-B64A-05C2-84CFAD1C5FBC}"/>
               </a:ext>
             </a:extLst>
           </p:cNvPr>
@@ -11458,7 +11297,7 @@
         </p:nvSpPr>
         <p:spPr>
           <a:xfrm>
-            <a:off x="3515363" y="4070666"/>
+            <a:off x="1654628" y="4070666"/>
             <a:ext cx="1799771" cy="508000"/>
           </a:xfrm>
           <a:prstGeom prst="ellipse">
@@ -11495,10 +11334,10 @@
       </p:sp>
       <p:sp>
         <p:nvSpPr>
-          <p:cNvPr id="28" name="Oval 27">
+          <p:cNvPr id="35" name="Rectangle 34">
             <a:extLst>
               <a:ext uri="{FF2B5EF4-FFF2-40B4-BE49-F238E27FC236}">
-                <a16:creationId xmlns:a16="http://schemas.microsoft.com/office/drawing/2014/main" id="{E0124D9B-A28A-B64A-05C2-84CFAD1C5FBC}"/>
+                <a16:creationId xmlns:a16="http://schemas.microsoft.com/office/drawing/2014/main" id="{0983F79C-7AA7-23F4-31D4-6DD263900530}"/>
               </a:ext>
             </a:extLst>
           </p:cNvPr>
@@ -11506,9 +11345,239 @@
           <p:nvPr/>
         </p:nvSpPr>
         <p:spPr>
-          <a:xfrm>
-            <a:off x="1654628" y="4070666"/>
-            <a:ext cx="1799771" cy="508000"/>
+          <a:xfrm rot="5400000">
+            <a:off x="8683210" y="4037835"/>
+            <a:ext cx="232229" cy="2621364"/>
+          </a:xfrm>
+          <a:prstGeom prst="rect">
+            <a:avLst/>
+          </a:prstGeom>
+        </p:spPr>
+        <p:style>
+          <a:lnRef idx="2">
+            <a:schemeClr val="accent1">
+              <a:shade val="15000"/>
+            </a:schemeClr>
+          </a:lnRef>
+          <a:fillRef idx="1">
+            <a:schemeClr val="accent1"/>
+          </a:fillRef>
+          <a:effectRef idx="0">
+            <a:schemeClr val="accent1"/>
+          </a:effectRef>
+          <a:fontRef idx="minor">
+            <a:schemeClr val="lt1"/>
+          </a:fontRef>
+        </p:style>
+        <p:txBody>
+          <a:bodyPr rtlCol="0" anchor="ctr"/>
+          <a:lstStyle/>
+          <a:p>
+            <a:pPr algn="ctr"/>
+            <a:endParaRPr lang="en-US"/>
+          </a:p>
+        </p:txBody>
+      </p:sp>
+      <p:sp>
+        <p:nvSpPr>
+          <p:cNvPr id="37" name="Rectangle 36">
+            <a:extLst>
+              <a:ext uri="{FF2B5EF4-FFF2-40B4-BE49-F238E27FC236}">
+                <a16:creationId xmlns:a16="http://schemas.microsoft.com/office/drawing/2014/main" id="{5DFE40C5-9AA7-54A5-AF84-0EF622F49558}"/>
+              </a:ext>
+            </a:extLst>
+          </p:cNvPr>
+          <p:cNvSpPr/>
+          <p:nvPr/>
+        </p:nvSpPr>
+        <p:spPr>
+          <a:xfrm rot="5400000">
+            <a:off x="8346723" y="4095737"/>
+            <a:ext cx="232230" cy="1895724"/>
+          </a:xfrm>
+          <a:prstGeom prst="rect">
+            <a:avLst/>
+          </a:prstGeom>
+        </p:spPr>
+        <p:style>
+          <a:lnRef idx="2">
+            <a:schemeClr val="accent1">
+              <a:shade val="15000"/>
+            </a:schemeClr>
+          </a:lnRef>
+          <a:fillRef idx="1">
+            <a:schemeClr val="accent1"/>
+          </a:fillRef>
+          <a:effectRef idx="0">
+            <a:schemeClr val="accent1"/>
+          </a:effectRef>
+          <a:fontRef idx="minor">
+            <a:schemeClr val="lt1"/>
+          </a:fontRef>
+        </p:style>
+        <p:txBody>
+          <a:bodyPr rtlCol="0" anchor="ctr"/>
+          <a:lstStyle/>
+          <a:p>
+            <a:pPr algn="ctr"/>
+            <a:endParaRPr lang="en-US"/>
+          </a:p>
+        </p:txBody>
+      </p:sp>
+      <p:sp>
+        <p:nvSpPr>
+          <p:cNvPr id="41" name="Rectangle 40">
+            <a:extLst>
+              <a:ext uri="{FF2B5EF4-FFF2-40B4-BE49-F238E27FC236}">
+                <a16:creationId xmlns:a16="http://schemas.microsoft.com/office/drawing/2014/main" id="{9764218F-F695-1655-8B32-047384F002B3}"/>
+              </a:ext>
+            </a:extLst>
+          </p:cNvPr>
+          <p:cNvSpPr/>
+          <p:nvPr/>
+        </p:nvSpPr>
+        <p:spPr>
+          <a:xfrm rot="5400000">
+            <a:off x="7955550" y="4154559"/>
+            <a:ext cx="190518" cy="1209960"/>
+          </a:xfrm>
+          <a:prstGeom prst="rect">
+            <a:avLst/>
+          </a:prstGeom>
+        </p:spPr>
+        <p:style>
+          <a:lnRef idx="2">
+            <a:schemeClr val="accent1">
+              <a:shade val="15000"/>
+            </a:schemeClr>
+          </a:lnRef>
+          <a:fillRef idx="1">
+            <a:schemeClr val="accent1"/>
+          </a:fillRef>
+          <a:effectRef idx="0">
+            <a:schemeClr val="accent1"/>
+          </a:effectRef>
+          <a:fontRef idx="minor">
+            <a:schemeClr val="lt1"/>
+          </a:fontRef>
+        </p:style>
+        <p:txBody>
+          <a:bodyPr rtlCol="0" anchor="ctr"/>
+          <a:lstStyle/>
+          <a:p>
+            <a:pPr algn="ctr"/>
+            <a:endParaRPr lang="en-US"/>
+          </a:p>
+        </p:txBody>
+      </p:sp>
+      <p:sp>
+        <p:nvSpPr>
+          <p:cNvPr id="43" name="Rectangle 42">
+            <a:extLst>
+              <a:ext uri="{FF2B5EF4-FFF2-40B4-BE49-F238E27FC236}">
+                <a16:creationId xmlns:a16="http://schemas.microsoft.com/office/drawing/2014/main" id="{FBDEBEE8-F4CB-F001-CA5E-2FE33C094105}"/>
+              </a:ext>
+            </a:extLst>
+          </p:cNvPr>
+          <p:cNvSpPr/>
+          <p:nvPr/>
+        </p:nvSpPr>
+        <p:spPr>
+          <a:xfrm rot="5400000">
+            <a:off x="8346723" y="4723651"/>
+            <a:ext cx="232230" cy="1895724"/>
+          </a:xfrm>
+          <a:prstGeom prst="rect">
+            <a:avLst/>
+          </a:prstGeom>
+        </p:spPr>
+        <p:style>
+          <a:lnRef idx="2">
+            <a:schemeClr val="accent1">
+              <a:shade val="15000"/>
+            </a:schemeClr>
+          </a:lnRef>
+          <a:fillRef idx="1">
+            <a:schemeClr val="accent1"/>
+          </a:fillRef>
+          <a:effectRef idx="0">
+            <a:schemeClr val="accent1"/>
+          </a:effectRef>
+          <a:fontRef idx="minor">
+            <a:schemeClr val="lt1"/>
+          </a:fontRef>
+        </p:style>
+        <p:txBody>
+          <a:bodyPr rtlCol="0" anchor="ctr"/>
+          <a:lstStyle/>
+          <a:p>
+            <a:pPr algn="ctr"/>
+            <a:endParaRPr lang="en-US"/>
+          </a:p>
+        </p:txBody>
+      </p:sp>
+      <p:sp>
+        <p:nvSpPr>
+          <p:cNvPr id="45" name="Rectangle 44">
+            <a:extLst>
+              <a:ext uri="{FF2B5EF4-FFF2-40B4-BE49-F238E27FC236}">
+                <a16:creationId xmlns:a16="http://schemas.microsoft.com/office/drawing/2014/main" id="{B9591057-B4D9-347A-7B43-03C7292C335F}"/>
+              </a:ext>
+            </a:extLst>
+          </p:cNvPr>
+          <p:cNvSpPr/>
+          <p:nvPr/>
+        </p:nvSpPr>
+        <p:spPr>
+          <a:xfrm rot="5400000">
+            <a:off x="7959903" y="5397589"/>
+            <a:ext cx="190518" cy="1209960"/>
+          </a:xfrm>
+          <a:prstGeom prst="rect">
+            <a:avLst/>
+          </a:prstGeom>
+        </p:spPr>
+        <p:style>
+          <a:lnRef idx="2">
+            <a:schemeClr val="accent1">
+              <a:shade val="15000"/>
+            </a:schemeClr>
+          </a:lnRef>
+          <a:fillRef idx="1">
+            <a:schemeClr val="accent1"/>
+          </a:fillRef>
+          <a:effectRef idx="0">
+            <a:schemeClr val="accent1"/>
+          </a:effectRef>
+          <a:fontRef idx="minor">
+            <a:schemeClr val="lt1"/>
+          </a:fontRef>
+        </p:style>
+        <p:txBody>
+          <a:bodyPr rtlCol="0" anchor="ctr"/>
+          <a:lstStyle/>
+          <a:p>
+            <a:pPr algn="ctr"/>
+            <a:endParaRPr lang="en-US"/>
+          </a:p>
+        </p:txBody>
+      </p:sp>
+      <p:sp>
+        <p:nvSpPr>
+          <p:cNvPr id="33" name="Oval 32">
+            <a:extLst>
+              <a:ext uri="{FF2B5EF4-FFF2-40B4-BE49-F238E27FC236}">
+                <a16:creationId xmlns:a16="http://schemas.microsoft.com/office/drawing/2014/main" id="{703904B2-931C-4EB7-0677-0CB8714306B6}"/>
+              </a:ext>
+            </a:extLst>
+          </p:cNvPr>
+          <p:cNvSpPr/>
+          <p:nvPr/>
+        </p:nvSpPr>
+        <p:spPr>
+          <a:xfrm rot="5400000">
+            <a:off x="7069485" y="5152932"/>
+            <a:ext cx="838315" cy="431077"/>
           </a:xfrm>
           <a:prstGeom prst="ellipse">
             <a:avLst/>
@@ -11537,290 +11606,293 @@
             <a:pPr algn="ctr"/>
             <a:r>
               <a:rPr lang="en-US" dirty="0"/>
-              <a:t>Detector</a:t>
-            </a:r>
-          </a:p>
-        </p:txBody>
-      </p:sp>
-      <p:sp>
-        <p:nvSpPr>
-          <p:cNvPr id="35" name="Rectangle 34">
+              <a:t>Det</a:t>
+            </a:r>
+          </a:p>
+        </p:txBody>
+      </p:sp>
+      <p:sp>
+        <p:nvSpPr>
+          <p:cNvPr id="46" name="TextBox 45">
             <a:extLst>
               <a:ext uri="{FF2B5EF4-FFF2-40B4-BE49-F238E27FC236}">
-                <a16:creationId xmlns:a16="http://schemas.microsoft.com/office/drawing/2014/main" id="{0983F79C-7AA7-23F4-31D4-6DD263900530}"/>
+                <a16:creationId xmlns:a16="http://schemas.microsoft.com/office/drawing/2014/main" id="{60C608CD-2EB3-1B0A-9447-B18D20AE3BF4}"/>
               </a:ext>
             </a:extLst>
           </p:cNvPr>
-          <p:cNvSpPr/>
+          <p:cNvSpPr txBox="1"/>
           <p:nvPr/>
         </p:nvSpPr>
         <p:spPr>
-          <a:xfrm rot="5400000">
-            <a:off x="7781313" y="4939730"/>
-            <a:ext cx="232229" cy="817570"/>
+          <a:xfrm>
+            <a:off x="6886301" y="3331374"/>
+            <a:ext cx="1635761" cy="369332"/>
           </a:xfrm>
           <a:prstGeom prst="rect">
             <a:avLst/>
           </a:prstGeom>
+          <a:noFill/>
+        </p:spPr>
+        <p:txBody>
+          <a:bodyPr wrap="square" rtlCol="0">
+            <a:spAutoFit/>
+          </a:bodyPr>
+          <a:lstStyle/>
+          <a:p>
+            <a:r>
+              <a:rPr lang="en-US" dirty="0"/>
+              <a:t>X-</a:t>
+            </a:r>
+            <a:r>
+              <a:rPr lang="en-US" dirty="0" err="1"/>
+              <a:t>dir</a:t>
+            </a:r>
+            <a:endParaRPr lang="en-US" dirty="0"/>
+          </a:p>
+        </p:txBody>
+      </p:sp>
+      <p:cxnSp>
+        <p:nvCxnSpPr>
+          <p:cNvPr id="48" name="Straight Arrow Connector 47">
+            <a:extLst>
+              <a:ext uri="{FF2B5EF4-FFF2-40B4-BE49-F238E27FC236}">
+                <a16:creationId xmlns:a16="http://schemas.microsoft.com/office/drawing/2014/main" id="{D4E9CDF0-950B-B810-5AB7-D92FC297F9AC}"/>
+              </a:ext>
+            </a:extLst>
+          </p:cNvPr>
+          <p:cNvCxnSpPr>
+            <a:cxnSpLocks/>
+          </p:cNvCxnSpPr>
+          <p:nvPr/>
+        </p:nvCxnSpPr>
+        <p:spPr>
+          <a:xfrm>
+            <a:off x="6974114" y="3777570"/>
+            <a:ext cx="820057" cy="25611"/>
+          </a:xfrm>
+          <a:prstGeom prst="straightConnector1">
+            <a:avLst/>
+          </a:prstGeom>
+          <a:ln>
+            <a:tailEnd type="triangle"/>
+          </a:ln>
         </p:spPr>
         <p:style>
-          <a:lnRef idx="2">
-            <a:schemeClr val="accent1">
-              <a:shade val="15000"/>
-            </a:schemeClr>
+          <a:lnRef idx="1">
+            <a:schemeClr val="accent1"/>
           </a:lnRef>
-          <a:fillRef idx="1">
+          <a:fillRef idx="0">
             <a:schemeClr val="accent1"/>
           </a:fillRef>
           <a:effectRef idx="0">
             <a:schemeClr val="accent1"/>
           </a:effectRef>
           <a:fontRef idx="minor">
-            <a:schemeClr val="lt1"/>
+            <a:schemeClr val="tx1"/>
           </a:fontRef>
         </p:style>
-        <p:txBody>
-          <a:bodyPr rtlCol="0" anchor="ctr"/>
-          <a:lstStyle/>
-          <a:p>
-            <a:pPr algn="ctr"/>
-            <a:endParaRPr lang="en-US"/>
-          </a:p>
-        </p:txBody>
-      </p:sp>
-      <p:sp>
-        <p:nvSpPr>
-          <p:cNvPr id="37" name="Rectangle 36">
+      </p:cxnSp>
+      <p:sp>
+        <p:nvSpPr>
+          <p:cNvPr id="50" name="TextBox 49">
             <a:extLst>
               <a:ext uri="{FF2B5EF4-FFF2-40B4-BE49-F238E27FC236}">
-                <a16:creationId xmlns:a16="http://schemas.microsoft.com/office/drawing/2014/main" id="{5DFE40C5-9AA7-54A5-AF84-0EF622F49558}"/>
+                <a16:creationId xmlns:a16="http://schemas.microsoft.com/office/drawing/2014/main" id="{16B814BB-BB07-7DC4-175B-DC78E2C05023}"/>
               </a:ext>
             </a:extLst>
           </p:cNvPr>
-          <p:cNvSpPr/>
+          <p:cNvSpPr txBox="1"/>
           <p:nvPr/>
         </p:nvSpPr>
         <p:spPr>
-          <a:xfrm rot="5400000">
-            <a:off x="7694487" y="4747973"/>
-            <a:ext cx="232230" cy="591252"/>
+          <a:xfrm>
+            <a:off x="10580914" y="4232388"/>
+            <a:ext cx="795381" cy="646331"/>
           </a:xfrm>
           <a:prstGeom prst="rect">
             <a:avLst/>
           </a:prstGeom>
+          <a:noFill/>
+        </p:spPr>
+        <p:txBody>
+          <a:bodyPr wrap="square" rtlCol="0">
+            <a:spAutoFit/>
+          </a:bodyPr>
+          <a:lstStyle/>
+          <a:p>
+            <a:r>
+              <a:rPr lang="en-US" dirty="0"/>
+              <a:t>Y-</a:t>
+            </a:r>
+            <a:r>
+              <a:rPr lang="en-US" dirty="0" err="1"/>
+              <a:t>dir</a:t>
+            </a:r>
+            <a:endParaRPr lang="en-US" dirty="0"/>
+          </a:p>
+          <a:p>
+            <a:endParaRPr lang="en-US" dirty="0"/>
+          </a:p>
+        </p:txBody>
+      </p:sp>
+      <p:cxnSp>
+        <p:nvCxnSpPr>
+          <p:cNvPr id="51" name="Straight Arrow Connector 50">
+            <a:extLst>
+              <a:ext uri="{FF2B5EF4-FFF2-40B4-BE49-F238E27FC236}">
+                <a16:creationId xmlns:a16="http://schemas.microsoft.com/office/drawing/2014/main" id="{82931D66-0D18-797A-2DDC-D206709F3DF1}"/>
+              </a:ext>
+            </a:extLst>
+          </p:cNvPr>
+          <p:cNvCxnSpPr>
+            <a:cxnSpLocks/>
+          </p:cNvCxnSpPr>
+          <p:nvPr/>
+        </p:nvCxnSpPr>
+        <p:spPr>
+          <a:xfrm flipV="1">
+            <a:off x="10580914" y="4395260"/>
+            <a:ext cx="0" cy="554053"/>
+          </a:xfrm>
+          <a:prstGeom prst="straightConnector1">
+            <a:avLst/>
+          </a:prstGeom>
+          <a:ln>
+            <a:tailEnd type="triangle"/>
+          </a:ln>
         </p:spPr>
         <p:style>
-          <a:lnRef idx="2">
-            <a:schemeClr val="accent1">
-              <a:shade val="15000"/>
-            </a:schemeClr>
+          <a:lnRef idx="1">
+            <a:schemeClr val="accent1"/>
           </a:lnRef>
-          <a:fillRef idx="1">
+          <a:fillRef idx="0">
             <a:schemeClr val="accent1"/>
           </a:fillRef>
           <a:effectRef idx="0">
             <a:schemeClr val="accent1"/>
           </a:effectRef>
           <a:fontRef idx="minor">
-            <a:schemeClr val="lt1"/>
+            <a:schemeClr val="tx1"/>
           </a:fontRef>
         </p:style>
-        <p:txBody>
-          <a:bodyPr rtlCol="0" anchor="ctr"/>
-          <a:lstStyle/>
-          <a:p>
-            <a:pPr algn="ctr"/>
-            <a:endParaRPr lang="en-US"/>
-          </a:p>
-        </p:txBody>
-      </p:sp>
-      <p:sp>
-        <p:nvSpPr>
-          <p:cNvPr id="41" name="Rectangle 40">
+      </p:cxnSp>
+      <p:cxnSp>
+        <p:nvCxnSpPr>
+          <p:cNvPr id="54" name="Straight Arrow Connector 53">
             <a:extLst>
               <a:ext uri="{FF2B5EF4-FFF2-40B4-BE49-F238E27FC236}">
-                <a16:creationId xmlns:a16="http://schemas.microsoft.com/office/drawing/2014/main" id="{9764218F-F695-1655-8B32-047384F002B3}"/>
+                <a16:creationId xmlns:a16="http://schemas.microsoft.com/office/drawing/2014/main" id="{0D504438-4BA5-B6ED-76FE-D5D33EC5C0FD}"/>
               </a:ext>
             </a:extLst>
           </p:cNvPr>
-          <p:cNvSpPr/>
+          <p:cNvCxnSpPr/>
           <p:nvPr/>
-        </p:nvSpPr>
-        <p:spPr>
-          <a:xfrm rot="5400000">
-            <a:off x="7539256" y="4570853"/>
-            <a:ext cx="190518" cy="377371"/>
-          </a:xfrm>
-          <a:prstGeom prst="rect">
+        </p:nvCxnSpPr>
+        <p:spPr>
+          <a:xfrm>
+            <a:off x="529771" y="4453389"/>
+            <a:ext cx="0" cy="779013"/>
+          </a:xfrm>
+          <a:prstGeom prst="straightConnector1">
             <a:avLst/>
           </a:prstGeom>
+          <a:ln>
+            <a:headEnd type="triangle"/>
+            <a:tailEnd type="triangle"/>
+          </a:ln>
         </p:spPr>
         <p:style>
-          <a:lnRef idx="2">
-            <a:schemeClr val="accent1">
-              <a:shade val="15000"/>
-            </a:schemeClr>
+          <a:lnRef idx="1">
+            <a:schemeClr val="accent1"/>
           </a:lnRef>
-          <a:fillRef idx="1">
+          <a:fillRef idx="0">
             <a:schemeClr val="accent1"/>
           </a:fillRef>
           <a:effectRef idx="0">
             <a:schemeClr val="accent1"/>
           </a:effectRef>
           <a:fontRef idx="minor">
-            <a:schemeClr val="lt1"/>
+            <a:schemeClr val="tx1"/>
           </a:fontRef>
         </p:style>
-        <p:txBody>
-          <a:bodyPr rtlCol="0" anchor="ctr"/>
-          <a:lstStyle/>
-          <a:p>
-            <a:pPr algn="ctr"/>
-            <a:endParaRPr lang="en-US"/>
-          </a:p>
-        </p:txBody>
-      </p:sp>
-      <p:sp>
-        <p:nvSpPr>
-          <p:cNvPr id="43" name="Rectangle 42">
+      </p:cxnSp>
+      <p:sp>
+        <p:nvSpPr>
+          <p:cNvPr id="55" name="TextBox 54">
             <a:extLst>
               <a:ext uri="{FF2B5EF4-FFF2-40B4-BE49-F238E27FC236}">
-                <a16:creationId xmlns:a16="http://schemas.microsoft.com/office/drawing/2014/main" id="{FBDEBEE8-F4CB-F001-CA5E-2FE33C094105}"/>
+                <a16:creationId xmlns:a16="http://schemas.microsoft.com/office/drawing/2014/main" id="{BC2D94D5-14D0-BE1A-8498-440A1232497F}"/>
               </a:ext>
             </a:extLst>
           </p:cNvPr>
-          <p:cNvSpPr/>
+          <p:cNvSpPr txBox="1"/>
           <p:nvPr/>
         </p:nvSpPr>
         <p:spPr>
-          <a:xfrm rot="5400000">
-            <a:off x="7694487" y="5375887"/>
-            <a:ext cx="232230" cy="591252"/>
+          <a:xfrm>
+            <a:off x="-94863" y="4578666"/>
+            <a:ext cx="917824" cy="307777"/>
           </a:xfrm>
           <a:prstGeom prst="rect">
             <a:avLst/>
           </a:prstGeom>
+          <a:noFill/>
+        </p:spPr>
+        <p:txBody>
+          <a:bodyPr wrap="square" rtlCol="0">
+            <a:spAutoFit/>
+          </a:bodyPr>
+          <a:lstStyle/>
+          <a:p>
+            <a:r>
+              <a:rPr lang="en-US" sz="1400" dirty="0"/>
+              <a:t>50mm</a:t>
+            </a:r>
+          </a:p>
+        </p:txBody>
+      </p:sp>
+      <p:cxnSp>
+        <p:nvCxnSpPr>
+          <p:cNvPr id="57" name="Straight Arrow Connector 56">
+            <a:extLst>
+              <a:ext uri="{FF2B5EF4-FFF2-40B4-BE49-F238E27FC236}">
+                <a16:creationId xmlns:a16="http://schemas.microsoft.com/office/drawing/2014/main" id="{75792742-F6FC-9411-F113-4B2F069A449C}"/>
+              </a:ext>
+            </a:extLst>
+          </p:cNvPr>
+          <p:cNvCxnSpPr>
+            <a:cxnSpLocks/>
+            <a:endCxn id="24" idx="4"/>
+          </p:cNvCxnSpPr>
+          <p:nvPr/>
+        </p:nvCxnSpPr>
+        <p:spPr>
+          <a:xfrm flipV="1">
+            <a:off x="2811097" y="4453389"/>
+            <a:ext cx="3517022" cy="380683"/>
+          </a:xfrm>
+          <a:prstGeom prst="straightConnector1">
+            <a:avLst/>
+          </a:prstGeom>
+          <a:ln>
+            <a:tailEnd type="triangle"/>
+          </a:ln>
         </p:spPr>
         <p:style>
-          <a:lnRef idx="2">
-            <a:schemeClr val="accent1">
-              <a:shade val="15000"/>
-            </a:schemeClr>
+          <a:lnRef idx="1">
+            <a:schemeClr val="accent1"/>
           </a:lnRef>
-          <a:fillRef idx="1">
+          <a:fillRef idx="0">
             <a:schemeClr val="accent1"/>
           </a:fillRef>
           <a:effectRef idx="0">
             <a:schemeClr val="accent1"/>
           </a:effectRef>
           <a:fontRef idx="minor">
-            <a:schemeClr val="lt1"/>
+            <a:schemeClr val="tx1"/>
           </a:fontRef>
         </p:style>
-        <p:txBody>
-          <a:bodyPr rtlCol="0" anchor="ctr"/>
-          <a:lstStyle/>
-          <a:p>
-            <a:pPr algn="ctr"/>
-            <a:endParaRPr lang="en-US"/>
-          </a:p>
-        </p:txBody>
-      </p:sp>
-      <p:sp>
-        <p:nvSpPr>
-          <p:cNvPr id="45" name="Rectangle 44">
-            <a:extLst>
-              <a:ext uri="{FF2B5EF4-FFF2-40B4-BE49-F238E27FC236}">
-                <a16:creationId xmlns:a16="http://schemas.microsoft.com/office/drawing/2014/main" id="{B9591057-B4D9-347A-7B43-03C7292C335F}"/>
-              </a:ext>
-            </a:extLst>
-          </p:cNvPr>
-          <p:cNvSpPr/>
-          <p:nvPr/>
-        </p:nvSpPr>
-        <p:spPr>
-          <a:xfrm rot="5400000">
-            <a:off x="7543609" y="5813883"/>
-            <a:ext cx="190518" cy="377371"/>
-          </a:xfrm>
-          <a:prstGeom prst="rect">
-            <a:avLst/>
-          </a:prstGeom>
-        </p:spPr>
-        <p:style>
-          <a:lnRef idx="2">
-            <a:schemeClr val="accent1">
-              <a:shade val="15000"/>
-            </a:schemeClr>
-          </a:lnRef>
-          <a:fillRef idx="1">
-            <a:schemeClr val="accent1"/>
-          </a:fillRef>
-          <a:effectRef idx="0">
-            <a:schemeClr val="accent1"/>
-          </a:effectRef>
-          <a:fontRef idx="minor">
-            <a:schemeClr val="lt1"/>
-          </a:fontRef>
-        </p:style>
-        <p:txBody>
-          <a:bodyPr rtlCol="0" anchor="ctr"/>
-          <a:lstStyle/>
-          <a:p>
-            <a:pPr algn="ctr"/>
-            <a:endParaRPr lang="en-US"/>
-          </a:p>
-        </p:txBody>
-      </p:sp>
-      <p:sp>
-        <p:nvSpPr>
-          <p:cNvPr id="33" name="Oval 32">
-            <a:extLst>
-              <a:ext uri="{FF2B5EF4-FFF2-40B4-BE49-F238E27FC236}">
-                <a16:creationId xmlns:a16="http://schemas.microsoft.com/office/drawing/2014/main" id="{703904B2-931C-4EB7-0677-0CB8714306B6}"/>
-              </a:ext>
-            </a:extLst>
-          </p:cNvPr>
-          <p:cNvSpPr/>
-          <p:nvPr/>
-        </p:nvSpPr>
-        <p:spPr>
-          <a:xfrm rot="5400000">
-            <a:off x="7069485" y="5152932"/>
-            <a:ext cx="838315" cy="431077"/>
-          </a:xfrm>
-          <a:prstGeom prst="ellipse">
-            <a:avLst/>
-          </a:prstGeom>
-        </p:spPr>
-        <p:style>
-          <a:lnRef idx="2">
-            <a:schemeClr val="dk1">
-              <a:shade val="15000"/>
-            </a:schemeClr>
-          </a:lnRef>
-          <a:fillRef idx="1">
-            <a:schemeClr val="dk1"/>
-          </a:fillRef>
-          <a:effectRef idx="0">
-            <a:schemeClr val="dk1"/>
-          </a:effectRef>
-          <a:fontRef idx="minor">
-            <a:schemeClr val="lt1"/>
-          </a:fontRef>
-        </p:style>
-        <p:txBody>
-          <a:bodyPr rtlCol="0" anchor="ctr"/>
-          <a:lstStyle/>
-          <a:p>
-            <a:pPr algn="ctr"/>
-            <a:r>
-              <a:rPr lang="en-US" dirty="0"/>
-              <a:t>Det</a:t>
-            </a:r>
-          </a:p>
-        </p:txBody>
-      </p:sp>
+      </p:cxnSp>
     </p:spTree>
     <p:extLst>
       <p:ext uri="{BB962C8B-B14F-4D97-AF65-F5344CB8AC3E}">
@@ -11874,15 +11946,7 @@
           <a:p>
             <a:r>
               <a:rPr lang="en-US" dirty="0"/>
-              <a:t>Results for the off beam detector </a:t>
-            </a:r>
-            <a:r>
-              <a:rPr lang="en-US"/>
-              <a:t>at 50 </a:t>
-            </a:r>
-            <a:r>
-              <a:rPr lang="en-US" dirty="0"/>
-              <a:t>mm </a:t>
+              <a:t>Results for the off beam detector at 50 mm </a:t>
             </a:r>
           </a:p>
         </p:txBody>
